--- a/docs/오늘은봄날_회사소개서.pptx
+++ b/docs/오늘은봄날_회사소개서.pptx
@@ -18,9 +18,10 @@
     <p:sldId id="266" r:id="rId12"/>
     <p:sldId id="267" r:id="rId13"/>
     <p:sldId id="268" r:id="rId14"/>
+    <p:sldId id="269" r:id="rId15"/>
   </p:sldIdLst>
   <p:notesMasterIdLst>
-    <p:notesMasterId r:id="rId15"/>
+    <p:notesMasterId r:id="rId16"/>
   </p:notesMasterIdLst>
   <p:sldSz cx="12192000" cy="6858000"/>
   <p:notesSz cx="6858000" cy="12192000"/>
@@ -221,10 +222,10 @@
                 <c:formatCode>General</c:formatCode>
                 <c:ptCount val="2"/>
                 <c:pt idx="0">
-                  <c:v>5</c:v>
+                  <c:v>30</c:v>
                 </c:pt>
                 <c:pt idx="1">
-                  <c:v>1</c:v>
+                  <c:v>7</c:v>
                 </c:pt>
               </c:numCache>
             </c:numRef>
@@ -305,7 +306,7 @@
         <c:axId val="2094734552"/>
         <c:scaling>
           <c:orientation val="minMax"/>
-          <c:max val="6"/>
+          <c:max val="35"/>
         </c:scaling>
         <c:delete val="0"/>
         <c:axPos val="b"/>
@@ -351,7 +352,7 @@
         <c:crossAx val="2094734554"/>
         <c:crosses val="autoZero"/>
         <c:crossBetween val="between"/>
-        <c:majorUnit val="1"/>
+        <c:majorUnit val="7"/>
       </c:valAx>
       <c:spPr>
         <a:noFill/>
@@ -1148,6 +1149,94 @@
             <a:fld id="{F7021451-1387-4CA6-816F-3879F97B5CBC}" type="slidenum">
               <a:rPr lang="en-US"/>
               <a:t>13</a:t>
+            </a:fld>
+            <a:endParaRPr lang="en-US"/>
+          </a:p>
+        </p:txBody>
+      </p:sp>
+    </p:spTree>
+    <p:extLst>
+      <p:ext uri="{BB962C8B-B14F-4D97-AF65-F5344CB8AC3E}">
+        <p14:creationId xmlns:p14="http://schemas.microsoft.com/office/powerpoint/2010/main" val="1024086991"/>
+      </p:ext>
+    </p:extLst>
+  </p:cSld>
+  <p:clrMapOvr>
+    <a:masterClrMapping/>
+  </p:clrMapOvr>
+</p:notes>
+</file>
+
+<file path=ppt/notesSlides/notesSlide14.xml><?xml version="1.0" encoding="utf-8"?>
+<p:notes xmlns:a="http://schemas.openxmlformats.org/drawingml/2006/main" xmlns:r="http://schemas.openxmlformats.org/officeDocument/2006/relationships" xmlns:p="http://schemas.openxmlformats.org/presentationml/2006/main">
+  <p:cSld>
+    <p:spTree>
+      <p:nvGrpSpPr>
+        <p:cNvPr id="1" name=""/>
+        <p:cNvGrpSpPr/>
+        <p:nvPr/>
+      </p:nvGrpSpPr>
+      <p:grpSpPr>
+        <a:xfrm>
+          <a:off x="0" y="0"/>
+          <a:ext cx="0" cy="0"/>
+          <a:chOff x="0" y="0"/>
+          <a:chExt cx="0" cy="0"/>
+        </a:xfrm>
+      </p:grpSpPr>
+      <p:sp>
+        <p:nvSpPr>
+          <p:cNvPr id="2" name="Slide Image Placeholder 1"/>
+          <p:cNvSpPr>
+            <a:spLocks noGrp="1" noRot="1" noChangeAspect="1"/>
+          </p:cNvSpPr>
+          <p:nvPr>
+            <p:ph type="sldImg"/>
+          </p:nvPr>
+        </p:nvSpPr>
+        <p:spPr/>
+      </p:sp>
+      <p:sp>
+        <p:nvSpPr>
+          <p:cNvPr id="3" name="Notes Placeholder 2"/>
+          <p:cNvSpPr>
+            <a:spLocks noGrp="1"/>
+          </p:cNvSpPr>
+          <p:nvPr>
+            <p:ph type="body" idx="1"/>
+          </p:nvPr>
+        </p:nvSpPr>
+        <p:spPr/>
+        <p:txBody>
+          <a:bodyPr/>
+          <a:lstStyle/>
+          <a:p>
+            <a:r>
+              <a:rPr lang="en-US" dirty="0"/>
+              <a:t/>
+            </a:r>
+            <a:endParaRPr lang="en-US" dirty="0"/>
+          </a:p>
+        </p:txBody>
+      </p:sp>
+      <p:sp>
+        <p:nvSpPr>
+          <p:cNvPr id="4" name="Slide Number Placeholder 3"/>
+          <p:cNvSpPr>
+            <a:spLocks noGrp="1"/>
+          </p:cNvSpPr>
+          <p:nvPr>
+            <p:ph type="sldNum" sz="quarter" idx="10"/>
+          </p:nvPr>
+        </p:nvSpPr>
+        <p:spPr/>
+        <p:txBody>
+          <a:bodyPr/>
+          <a:lstStyle/>
+          <a:p>
+            <a:fld id="{F7021451-1387-4CA6-816F-3879F97B5CBC}" type="slidenum">
+              <a:rPr lang="en-US"/>
+              <a:t>14</a:t>
             </a:fld>
             <a:endParaRPr lang="en-US"/>
           </a:p>
@@ -3345,7 +3434,7 @@
                 <a:ea typeface="맑은 고딕" pitchFamily="34" charset="-122"/>
                 <a:cs typeface="맑은 고딕" pitchFamily="34" charset="-120"/>
               </a:rPr>
-              <a:t>REFERENCES</a:t>
+              <a:t>WHAT YOU ASKED</a:t>
             </a:r>
             <a:endParaRPr lang="en-US" sz="1200" dirty="0"/>
           </a:p>
@@ -3384,61 +3473,175 @@
                 <a:ea typeface="맑은 고딕" pitchFamily="34" charset="-122"/>
                 <a:cs typeface="맑은 고딕" pitchFamily="34" charset="-120"/>
               </a:rPr>
-              <a:t>영남권 공공 현장에서 켜져 있는 화면들</a:t>
+              <a:t>이런 것까지 해드립니다</a:t>
             </a:r>
             <a:endParaRPr lang="en-US" sz="3200" dirty="0"/>
           </a:p>
         </p:txBody>
       </p:sp>
-      <p:pic>
-        <p:nvPicPr>
-          <p:cNvPr id="4" name="Image 0" descr="/home/user/oneul-bomnal/assets/works/busan-songdo-wave.jpg">    </p:cNvPr>
-          <p:cNvPicPr>
-            <a:picLocks noChangeAspect="1"/>
-          </p:cNvPicPr>
-          <p:nvPr/>
-        </p:nvPicPr>
-        <p:blipFill>
-          <a:blip r:embed="rId1"/>
-          <a:srcRect l="0" r="0" t="0" b="0"/>
-          <a:stretch/>
-        </p:blipFill>
-        <p:spPr>
-          <a:xfrm>
-            <a:off x="640080" y="1783080"/>
-            <a:ext cx="3520440" cy="1417320"/>
-          </a:xfrm>
-          <a:prstGeom prst="rect">
-            <a:avLst/>
-          </a:prstGeom>
-        </p:spPr>
-      </p:pic>
-      <p:sp>
-        <p:nvSpPr>
-          <p:cNvPr id="5" name="Text 2"/>
-          <p:cNvSpPr/>
-          <p:nvPr/>
-        </p:nvSpPr>
-        <p:spPr>
-          <a:xfrm>
-            <a:off x="640080" y="3273552"/>
-            <a:ext cx="3520440" cy="237744"/>
-          </a:xfrm>
-          <a:prstGeom prst="rect">
-            <a:avLst/>
-          </a:prstGeom>
-          <a:noFill/>
-          <a:ln/>
-        </p:spPr>
-        <p:txBody>
-          <a:bodyPr wrap="square" lIns="0" tIns="0" rIns="0" bIns="0" rtlCol="0" anchor="ctr"/>
-          <a:lstStyle/>
-          <a:p>
-            <a:pPr indent="0" marL="0">
-              <a:buNone/>
-            </a:pPr>
-            <a:r>
-              <a:rPr lang="en-US" sz="1200" b="1" dirty="0">
+      <p:sp>
+        <p:nvSpPr>
+          <p:cNvPr id="4" name="Text 2"/>
+          <p:cNvSpPr/>
+          <p:nvPr/>
+        </p:nvSpPr>
+        <p:spPr>
+          <a:xfrm>
+            <a:off x="640080" y="1719072"/>
+            <a:ext cx="10881360" cy="320040"/>
+          </a:xfrm>
+          <a:prstGeom prst="rect">
+            <a:avLst/>
+          </a:prstGeom>
+          <a:noFill/>
+          <a:ln/>
+        </p:spPr>
+        <p:txBody>
+          <a:bodyPr wrap="square" lIns="0" tIns="0" rIns="0" bIns="0" rtlCol="0" anchor="ctr"/>
+          <a:lstStyle/>
+          <a:p>
+            <a:pPr indent="0" marL="0">
+              <a:buNone/>
+            </a:pPr>
+            <a:r>
+              <a:rPr lang="en-US" sz="1300" dirty="0">
+                <a:solidFill>
+                  <a:srgbClr val="4A5262"/>
+                </a:solidFill>
+                <a:latin typeface="맑은 고딕" pitchFamily="34" charset="0"/>
+                <a:ea typeface="맑은 고딕" pitchFamily="34" charset="-122"/>
+                <a:cs typeface="맑은 고딕" pitchFamily="34" charset="-120"/>
+              </a:rPr>
+              <a:t>담당자분들이 발주 전에 가장 많이 확인하시는 네 가지입니다.</a:t>
+            </a:r>
+            <a:endParaRPr lang="en-US" sz="1300" dirty="0"/>
+          </a:p>
+        </p:txBody>
+      </p:sp>
+      <p:sp>
+        <p:nvSpPr>
+          <p:cNvPr id="5" name="Shape 3"/>
+          <p:cNvSpPr/>
+          <p:nvPr/>
+        </p:nvSpPr>
+        <p:spPr>
+          <a:xfrm>
+            <a:off x="640080" y="2240280"/>
+            <a:ext cx="5349240" cy="1965960"/>
+          </a:xfrm>
+          <a:prstGeom prst="roundRect">
+            <a:avLst>
+              <a:gd name="adj" fmla="val 2791"/>
+            </a:avLst>
+          </a:prstGeom>
+          <a:solidFill>
+            <a:srgbClr val="FFFFFF"/>
+          </a:solidFill>
+          <a:ln w="12700">
+            <a:solidFill>
+              <a:srgbClr val="DFE3EA"/>
+            </a:solidFill>
+            <a:prstDash val="solid"/>
+          </a:ln>
+          <a:effectLst>
+            <a:outerShdw sx="100000" sy="100000" kx="0" ky="0" algn="bl" rotWithShape="0" blurRad="152400" dist="38100" dir="5400000">
+              <a:srgbClr val="101B33">
+                <a:alpha val="7000"/>
+              </a:srgbClr>
+            </a:outerShdw>
+          </a:effectLst>
+        </p:spPr>
+      </p:sp>
+      <p:sp>
+        <p:nvSpPr>
+          <p:cNvPr id="6" name="Shape 4"/>
+          <p:cNvSpPr/>
+          <p:nvPr/>
+        </p:nvSpPr>
+        <p:spPr>
+          <a:xfrm>
+            <a:off x="987552" y="2532888"/>
+            <a:ext cx="420624" cy="420624"/>
+          </a:xfrm>
+          <a:prstGeom prst="ellipse">
+            <a:avLst/>
+          </a:prstGeom>
+          <a:solidFill>
+            <a:srgbClr val="0075C9"/>
+          </a:solidFill>
+          <a:ln w="12700">
+            <a:solidFill>
+              <a:srgbClr val="0075C9"/>
+            </a:solidFill>
+            <a:prstDash val="solid"/>
+          </a:ln>
+        </p:spPr>
+      </p:sp>
+      <p:sp>
+        <p:nvSpPr>
+          <p:cNvPr id="7" name="Text 5"/>
+          <p:cNvSpPr/>
+          <p:nvPr/>
+        </p:nvSpPr>
+        <p:spPr>
+          <a:xfrm>
+            <a:off x="987552" y="2532888"/>
+            <a:ext cx="420624" cy="420624"/>
+          </a:xfrm>
+          <a:prstGeom prst="rect">
+            <a:avLst/>
+          </a:prstGeom>
+          <a:noFill/>
+          <a:ln/>
+        </p:spPr>
+        <p:txBody>
+          <a:bodyPr wrap="square" lIns="0" tIns="0" rIns="0" bIns="0" rtlCol="0" anchor="ctr"/>
+          <a:lstStyle/>
+          <a:p>
+            <a:pPr algn="ctr" indent="0" marL="0">
+              <a:buNone/>
+            </a:pPr>
+            <a:r>
+              <a:rPr lang="en-US" sz="1300" b="1" dirty="0">
+                <a:solidFill>
+                  <a:srgbClr val="FFFFFF"/>
+                </a:solidFill>
+                <a:latin typeface="맑은 고딕" pitchFamily="34" charset="0"/>
+                <a:ea typeface="맑은 고딕" pitchFamily="34" charset="-122"/>
+                <a:cs typeface="맑은 고딕" pitchFamily="34" charset="-120"/>
+              </a:rPr>
+              <a:t>1</a:t>
+            </a:r>
+            <a:endParaRPr lang="en-US" sz="1300" dirty="0"/>
+          </a:p>
+        </p:txBody>
+      </p:sp>
+      <p:sp>
+        <p:nvSpPr>
+          <p:cNvPr id="8" name="Text 6"/>
+          <p:cNvSpPr/>
+          <p:nvPr/>
+        </p:nvSpPr>
+        <p:spPr>
+          <a:xfrm>
+            <a:off x="1554480" y="2514600"/>
+            <a:ext cx="4069080" cy="457200"/>
+          </a:xfrm>
+          <a:prstGeom prst="rect">
+            <a:avLst/>
+          </a:prstGeom>
+          <a:noFill/>
+          <a:ln/>
+        </p:spPr>
+        <p:txBody>
+          <a:bodyPr wrap="square" lIns="0" tIns="0" rIns="0" bIns="0" rtlCol="0" anchor="ctr"/>
+          <a:lstStyle/>
+          <a:p>
+            <a:pPr indent="0" marL="0">
+              <a:buNone/>
+            </a:pPr>
+            <a:r>
+              <a:rPr lang="en-US" sz="1450" b="1" dirty="0">
                 <a:solidFill>
                   <a:srgbClr val="101B33"/>
                 </a:solidFill>
@@ -3446,34 +3649,37 @@
                 <a:ea typeface="맑은 고딕" pitchFamily="34" charset="-122"/>
                 <a:cs typeface="맑은 고딕" pitchFamily="34" charset="-120"/>
               </a:rPr>
-              <a:t>부산 서구청 · 송도</a:t>
-            </a:r>
-            <a:endParaRPr lang="en-US" sz="1200" dirty="0"/>
-          </a:p>
-        </p:txBody>
-      </p:sp>
-      <p:sp>
-        <p:nvSpPr>
-          <p:cNvPr id="6" name="Text 3"/>
-          <p:cNvSpPr/>
-          <p:nvPr/>
-        </p:nvSpPr>
-        <p:spPr>
-          <a:xfrm>
-            <a:off x="640080" y="3529584"/>
-            <a:ext cx="3520440" cy="237744"/>
-          </a:xfrm>
-          <a:prstGeom prst="rect">
-            <a:avLst/>
-          </a:prstGeom>
-          <a:noFill/>
-          <a:ln/>
-        </p:spPr>
-        <p:txBody>
-          <a:bodyPr wrap="square" lIns="0" tIns="0" rIns="0" bIns="0" rtlCol="0" anchor="ctr"/>
-          <a:lstStyle/>
-          <a:p>
-            <a:pPr indent="0" marL="0">
+              <a:t>원하시는 이미지만 주시면 만듭니다</a:t>
+            </a:r>
+            <a:endParaRPr lang="en-US" sz="1450" dirty="0"/>
+          </a:p>
+        </p:txBody>
+      </p:sp>
+      <p:sp>
+        <p:nvSpPr>
+          <p:cNvPr id="9" name="Text 7"/>
+          <p:cNvSpPr/>
+          <p:nvPr/>
+        </p:nvSpPr>
+        <p:spPr>
+          <a:xfrm>
+            <a:off x="987552" y="3044952"/>
+            <a:ext cx="4654296" cy="1060704"/>
+          </a:xfrm>
+          <a:prstGeom prst="rect">
+            <a:avLst/>
+          </a:prstGeom>
+          <a:noFill/>
+          <a:ln/>
+        </p:spPr>
+        <p:txBody>
+          <a:bodyPr wrap="square" lIns="0" tIns="0" rIns="0" bIns="0" rtlCol="0" anchor="t"/>
+          <a:lstStyle/>
+          <a:p>
+            <a:pPr indent="0" marL="0">
+              <a:lnSpc>
+                <a:spcPts val="1450"/>
+              </a:lnSpc>
               <a:buNone/>
             </a:pPr>
             <a:r>
@@ -3485,61 +3691,136 @@
                 <a:ea typeface="맑은 고딕" pitchFamily="34" charset="-122"/>
                 <a:cs typeface="맑은 고딕" pitchFamily="34" charset="-120"/>
               </a:rPr>
-              <a:t>실내 대형 벽면 미디어파사드</a:t>
+              <a:t>기관이 원하는 이미지나 참고 예시가 있으면 그것을 재료로 여러 방식으로 뽑아냅니다. 같은 소재를 흐름·입자·타이포·물리 등 다른 방법으로 풀어 시안으로 보여드리고, 고르신 방향으로 완성합니다. 처음부터 무엇을 만들지 정해두지 않으셔도 됩니다. 다만 원하시는 것을 자세히 알려주실수록 시안의 디테일이 올라갑니다.</a:t>
             </a:r>
             <a:endParaRPr lang="en-US" sz="1000" dirty="0"/>
           </a:p>
         </p:txBody>
       </p:sp>
-      <p:pic>
-        <p:nvPicPr>
-          <p:cNvPr id="7" name="Image 1" descr="/home/user/oneul-bomnal/assets/works/daegu-student-center.jpg">    </p:cNvPr>
-          <p:cNvPicPr>
-            <a:picLocks noChangeAspect="1"/>
-          </p:cNvPicPr>
-          <p:nvPr/>
-        </p:nvPicPr>
-        <p:blipFill>
-          <a:blip r:embed="rId2"/>
-          <a:srcRect l="0" r="0" t="0" b="0"/>
-          <a:stretch/>
-        </p:blipFill>
-        <p:spPr>
-          <a:xfrm>
-            <a:off x="4434840" y="1783080"/>
-            <a:ext cx="3520440" cy="1417320"/>
-          </a:xfrm>
-          <a:prstGeom prst="rect">
-            <a:avLst/>
-          </a:prstGeom>
-        </p:spPr>
-      </p:pic>
-      <p:sp>
-        <p:nvSpPr>
-          <p:cNvPr id="8" name="Text 4"/>
-          <p:cNvSpPr/>
-          <p:nvPr/>
-        </p:nvSpPr>
-        <p:spPr>
-          <a:xfrm>
-            <a:off x="4434840" y="3273552"/>
-            <a:ext cx="3520440" cy="237744"/>
-          </a:xfrm>
-          <a:prstGeom prst="rect">
-            <a:avLst/>
-          </a:prstGeom>
-          <a:noFill/>
-          <a:ln/>
-        </p:spPr>
-        <p:txBody>
-          <a:bodyPr wrap="square" lIns="0" tIns="0" rIns="0" bIns="0" rtlCol="0" anchor="ctr"/>
-          <a:lstStyle/>
-          <a:p>
-            <a:pPr indent="0" marL="0">
-              <a:buNone/>
-            </a:pPr>
-            <a:r>
-              <a:rPr lang="en-US" sz="1200" b="1" dirty="0">
+      <p:sp>
+        <p:nvSpPr>
+          <p:cNvPr id="10" name="Shape 8"/>
+          <p:cNvSpPr/>
+          <p:nvPr/>
+        </p:nvSpPr>
+        <p:spPr>
+          <a:xfrm>
+            <a:off x="6309360" y="2240280"/>
+            <a:ext cx="5349240" cy="1965960"/>
+          </a:xfrm>
+          <a:prstGeom prst="roundRect">
+            <a:avLst>
+              <a:gd name="adj" fmla="val 2791"/>
+            </a:avLst>
+          </a:prstGeom>
+          <a:solidFill>
+            <a:srgbClr val="FFFFFF"/>
+          </a:solidFill>
+          <a:ln w="12700">
+            <a:solidFill>
+              <a:srgbClr val="DFE3EA"/>
+            </a:solidFill>
+            <a:prstDash val="solid"/>
+          </a:ln>
+          <a:effectLst>
+            <a:outerShdw sx="100000" sy="100000" kx="0" ky="0" algn="bl" rotWithShape="0" blurRad="152400" dist="38100" dir="5400000">
+              <a:srgbClr val="101B33">
+                <a:alpha val="7000"/>
+              </a:srgbClr>
+            </a:outerShdw>
+          </a:effectLst>
+        </p:spPr>
+      </p:sp>
+      <p:sp>
+        <p:nvSpPr>
+          <p:cNvPr id="11" name="Shape 9"/>
+          <p:cNvSpPr/>
+          <p:nvPr/>
+        </p:nvSpPr>
+        <p:spPr>
+          <a:xfrm>
+            <a:off x="6656832" y="2532888"/>
+            <a:ext cx="420624" cy="420624"/>
+          </a:xfrm>
+          <a:prstGeom prst="ellipse">
+            <a:avLst/>
+          </a:prstGeom>
+          <a:solidFill>
+            <a:srgbClr val="0075C9"/>
+          </a:solidFill>
+          <a:ln w="12700">
+            <a:solidFill>
+              <a:srgbClr val="0075C9"/>
+            </a:solidFill>
+            <a:prstDash val="solid"/>
+          </a:ln>
+        </p:spPr>
+      </p:sp>
+      <p:sp>
+        <p:nvSpPr>
+          <p:cNvPr id="12" name="Text 10"/>
+          <p:cNvSpPr/>
+          <p:nvPr/>
+        </p:nvSpPr>
+        <p:spPr>
+          <a:xfrm>
+            <a:off x="6656832" y="2532888"/>
+            <a:ext cx="420624" cy="420624"/>
+          </a:xfrm>
+          <a:prstGeom prst="rect">
+            <a:avLst/>
+          </a:prstGeom>
+          <a:noFill/>
+          <a:ln/>
+        </p:spPr>
+        <p:txBody>
+          <a:bodyPr wrap="square" lIns="0" tIns="0" rIns="0" bIns="0" rtlCol="0" anchor="ctr"/>
+          <a:lstStyle/>
+          <a:p>
+            <a:pPr algn="ctr" indent="0" marL="0">
+              <a:buNone/>
+            </a:pPr>
+            <a:r>
+              <a:rPr lang="en-US" sz="1300" b="1" dirty="0">
+                <a:solidFill>
+                  <a:srgbClr val="FFFFFF"/>
+                </a:solidFill>
+                <a:latin typeface="맑은 고딕" pitchFamily="34" charset="0"/>
+                <a:ea typeface="맑은 고딕" pitchFamily="34" charset="-122"/>
+                <a:cs typeface="맑은 고딕" pitchFamily="34" charset="-120"/>
+              </a:rPr>
+              <a:t>2</a:t>
+            </a:r>
+            <a:endParaRPr lang="en-US" sz="1300" dirty="0"/>
+          </a:p>
+        </p:txBody>
+      </p:sp>
+      <p:sp>
+        <p:nvSpPr>
+          <p:cNvPr id="13" name="Text 11"/>
+          <p:cNvSpPr/>
+          <p:nvPr/>
+        </p:nvSpPr>
+        <p:spPr>
+          <a:xfrm>
+            <a:off x="7223760" y="2514600"/>
+            <a:ext cx="4069080" cy="457200"/>
+          </a:xfrm>
+          <a:prstGeom prst="rect">
+            <a:avLst/>
+          </a:prstGeom>
+          <a:noFill/>
+          <a:ln/>
+        </p:spPr>
+        <p:txBody>
+          <a:bodyPr wrap="square" lIns="0" tIns="0" rIns="0" bIns="0" rtlCol="0" anchor="ctr"/>
+          <a:lstStyle/>
+          <a:p>
+            <a:pPr indent="0" marL="0">
+              <a:buNone/>
+            </a:pPr>
+            <a:r>
+              <a:rPr lang="en-US" sz="1450" b="1" dirty="0">
                 <a:solidFill>
                   <a:srgbClr val="101B33"/>
                 </a:solidFill>
@@ -3547,34 +3828,37 @@
                 <a:ea typeface="맑은 고딕" pitchFamily="34" charset="-122"/>
                 <a:cs typeface="맑은 고딕" pitchFamily="34" charset="-120"/>
               </a:rPr>
-              <a:t>대구학생문화센터</a:t>
-            </a:r>
-            <a:endParaRPr lang="en-US" sz="1200" dirty="0"/>
-          </a:p>
-        </p:txBody>
-      </p:sp>
-      <p:sp>
-        <p:nvSpPr>
-          <p:cNvPr id="9" name="Text 5"/>
-          <p:cNvSpPr/>
-          <p:nvPr/>
-        </p:nvSpPr>
-        <p:spPr>
-          <a:xfrm>
-            <a:off x="4434840" y="3529584"/>
-            <a:ext cx="3520440" cy="237744"/>
-          </a:xfrm>
-          <a:prstGeom prst="rect">
-            <a:avLst/>
-          </a:prstGeom>
-          <a:noFill/>
-          <a:ln/>
-        </p:spPr>
-        <p:txBody>
-          <a:bodyPr wrap="square" lIns="0" tIns="0" rIns="0" bIns="0" rtlCol="0" anchor="ctr"/>
-          <a:lstStyle/>
-          <a:p>
-            <a:pPr indent="0" marL="0">
+              <a:t>사이니지 재생 PC 세팅까지 해드립니다</a:t>
+            </a:r>
+            <a:endParaRPr lang="en-US" sz="1450" dirty="0"/>
+          </a:p>
+        </p:txBody>
+      </p:sp>
+      <p:sp>
+        <p:nvSpPr>
+          <p:cNvPr id="14" name="Text 12"/>
+          <p:cNvSpPr/>
+          <p:nvPr/>
+        </p:nvSpPr>
+        <p:spPr>
+          <a:xfrm>
+            <a:off x="6656832" y="3044952"/>
+            <a:ext cx="4654296" cy="1060704"/>
+          </a:xfrm>
+          <a:prstGeom prst="rect">
+            <a:avLst/>
+          </a:prstGeom>
+          <a:noFill/>
+          <a:ln/>
+        </p:spPr>
+        <p:txBody>
+          <a:bodyPr wrap="square" lIns="0" tIns="0" rIns="0" bIns="0" rtlCol="0" anchor="t"/>
+          <a:lstStyle/>
+          <a:p>
+            <a:pPr indent="0" marL="0">
+              <a:lnSpc>
+                <a:spcPts val="1450"/>
+              </a:lnSpc>
               <a:buNone/>
             </a:pPr>
             <a:r>
@@ -3586,61 +3870,136 @@
                 <a:ea typeface="맑은 고딕" pitchFamily="34" charset="-122"/>
                 <a:cs typeface="맑은 고딕" pitchFamily="34" charset="-120"/>
               </a:rPr>
-              <a:t>로비 LED 월 미디어아트</a:t>
+              <a:t>화면만 있고 무엇으로 틀지 정해지지 않은 현장이 많습니다. 콘텐츠를 안정적으로 상시 재생할 재생 PC를 현장 화면 규격에 맞춰 세팅해 전달합니다. 담당자가 별도로 장비를 알아보실 필요가 없습니다.</a:t>
             </a:r>
             <a:endParaRPr lang="en-US" sz="1000" dirty="0"/>
           </a:p>
         </p:txBody>
       </p:sp>
-      <p:pic>
-        <p:nvPicPr>
-          <p:cNvPr id="10" name="Image 2" descr="/home/user/oneul-bomnal/assets/works/gumi-summer-night.jpg">    </p:cNvPr>
-          <p:cNvPicPr>
-            <a:picLocks noChangeAspect="1"/>
-          </p:cNvPicPr>
-          <p:nvPr/>
-        </p:nvPicPr>
-        <p:blipFill>
-          <a:blip r:embed="rId3"/>
-          <a:srcRect l="0" r="0" t="0" b="0"/>
-          <a:stretch/>
-        </p:blipFill>
-        <p:spPr>
-          <a:xfrm>
-            <a:off x="8229600" y="1783080"/>
-            <a:ext cx="3520440" cy="1417320"/>
-          </a:xfrm>
-          <a:prstGeom prst="rect">
-            <a:avLst/>
-          </a:prstGeom>
-        </p:spPr>
-      </p:pic>
-      <p:sp>
-        <p:nvSpPr>
-          <p:cNvPr id="11" name="Text 6"/>
-          <p:cNvSpPr/>
-          <p:nvPr/>
-        </p:nvSpPr>
-        <p:spPr>
-          <a:xfrm>
-            <a:off x="8229600" y="3273552"/>
-            <a:ext cx="3520440" cy="237744"/>
-          </a:xfrm>
-          <a:prstGeom prst="rect">
-            <a:avLst/>
-          </a:prstGeom>
-          <a:noFill/>
-          <a:ln/>
-        </p:spPr>
-        <p:txBody>
-          <a:bodyPr wrap="square" lIns="0" tIns="0" rIns="0" bIns="0" rtlCol="0" anchor="ctr"/>
-          <a:lstStyle/>
-          <a:p>
-            <a:pPr indent="0" marL="0">
-              <a:buNone/>
-            </a:pPr>
-            <a:r>
-              <a:rPr lang="en-US" sz="1200" b="1" dirty="0">
+      <p:sp>
+        <p:nvSpPr>
+          <p:cNvPr id="15" name="Shape 13"/>
+          <p:cNvSpPr/>
+          <p:nvPr/>
+        </p:nvSpPr>
+        <p:spPr>
+          <a:xfrm>
+            <a:off x="640080" y="4480560"/>
+            <a:ext cx="5349240" cy="1965960"/>
+          </a:xfrm>
+          <a:prstGeom prst="roundRect">
+            <a:avLst>
+              <a:gd name="adj" fmla="val 2791"/>
+            </a:avLst>
+          </a:prstGeom>
+          <a:solidFill>
+            <a:srgbClr val="F0F6FC"/>
+          </a:solidFill>
+          <a:ln w="12700">
+            <a:solidFill>
+              <a:srgbClr val="DFE3EA"/>
+            </a:solidFill>
+            <a:prstDash val="solid"/>
+          </a:ln>
+          <a:effectLst>
+            <a:outerShdw sx="100000" sy="100000" kx="0" ky="0" algn="bl" rotWithShape="0" blurRad="152400" dist="38100" dir="5400000">
+              <a:srgbClr val="101B33">
+                <a:alpha val="7000"/>
+              </a:srgbClr>
+            </a:outerShdw>
+          </a:effectLst>
+        </p:spPr>
+      </p:sp>
+      <p:sp>
+        <p:nvSpPr>
+          <p:cNvPr id="16" name="Shape 14"/>
+          <p:cNvSpPr/>
+          <p:nvPr/>
+        </p:nvSpPr>
+        <p:spPr>
+          <a:xfrm>
+            <a:off x="987552" y="4773168"/>
+            <a:ext cx="420624" cy="420624"/>
+          </a:xfrm>
+          <a:prstGeom prst="ellipse">
+            <a:avLst/>
+          </a:prstGeom>
+          <a:solidFill>
+            <a:srgbClr val="101B33"/>
+          </a:solidFill>
+          <a:ln w="12700">
+            <a:solidFill>
+              <a:srgbClr val="101B33"/>
+            </a:solidFill>
+            <a:prstDash val="solid"/>
+          </a:ln>
+        </p:spPr>
+      </p:sp>
+      <p:sp>
+        <p:nvSpPr>
+          <p:cNvPr id="17" name="Text 15"/>
+          <p:cNvSpPr/>
+          <p:nvPr/>
+        </p:nvSpPr>
+        <p:spPr>
+          <a:xfrm>
+            <a:off x="987552" y="4773168"/>
+            <a:ext cx="420624" cy="420624"/>
+          </a:xfrm>
+          <a:prstGeom prst="rect">
+            <a:avLst/>
+          </a:prstGeom>
+          <a:noFill/>
+          <a:ln/>
+        </p:spPr>
+        <p:txBody>
+          <a:bodyPr wrap="square" lIns="0" tIns="0" rIns="0" bIns="0" rtlCol="0" anchor="ctr"/>
+          <a:lstStyle/>
+          <a:p>
+            <a:pPr algn="ctr" indent="0" marL="0">
+              <a:buNone/>
+            </a:pPr>
+            <a:r>
+              <a:rPr lang="en-US" sz="1300" b="1" dirty="0">
+                <a:solidFill>
+                  <a:srgbClr val="FFFFFF"/>
+                </a:solidFill>
+                <a:latin typeface="맑은 고딕" pitchFamily="34" charset="0"/>
+                <a:ea typeface="맑은 고딕" pitchFamily="34" charset="-122"/>
+                <a:cs typeface="맑은 고딕" pitchFamily="34" charset="-120"/>
+              </a:rPr>
+              <a:t>3</a:t>
+            </a:r>
+            <a:endParaRPr lang="en-US" sz="1300" dirty="0"/>
+          </a:p>
+        </p:txBody>
+      </p:sp>
+      <p:sp>
+        <p:nvSpPr>
+          <p:cNvPr id="18" name="Text 16"/>
+          <p:cNvSpPr/>
+          <p:nvPr/>
+        </p:nvSpPr>
+        <p:spPr>
+          <a:xfrm>
+            <a:off x="1554480" y="4754880"/>
+            <a:ext cx="4069080" cy="457200"/>
+          </a:xfrm>
+          <a:prstGeom prst="rect">
+            <a:avLst/>
+          </a:prstGeom>
+          <a:noFill/>
+          <a:ln/>
+        </p:spPr>
+        <p:txBody>
+          <a:bodyPr wrap="square" lIns="0" tIns="0" rIns="0" bIns="0" rtlCol="0" anchor="ctr"/>
+          <a:lstStyle/>
+          <a:p>
+            <a:pPr indent="0" marL="0">
+              <a:buNone/>
+            </a:pPr>
+            <a:r>
+              <a:rPr lang="en-US" sz="1450" b="1" dirty="0">
                 <a:solidFill>
                   <a:srgbClr val="101B33"/>
                 </a:solidFill>
@@ -3648,34 +4007,37 @@
                 <a:ea typeface="맑은 고딕" pitchFamily="34" charset="-122"/>
                 <a:cs typeface="맑은 고딕" pitchFamily="34" charset="-120"/>
               </a:rPr>
-              <a:t>구미 썸머나잇 페스티벌</a:t>
-            </a:r>
-            <a:endParaRPr lang="en-US" sz="1200" dirty="0"/>
-          </a:p>
-        </p:txBody>
-      </p:sp>
-      <p:sp>
-        <p:nvSpPr>
-          <p:cNvPr id="12" name="Text 7"/>
-          <p:cNvSpPr/>
-          <p:nvPr/>
-        </p:nvSpPr>
-        <p:spPr>
-          <a:xfrm>
-            <a:off x="8229600" y="3529584"/>
-            <a:ext cx="3520440" cy="237744"/>
-          </a:xfrm>
-          <a:prstGeom prst="rect">
-            <a:avLst/>
-          </a:prstGeom>
-          <a:noFill/>
-          <a:ln/>
-        </p:spPr>
-        <p:txBody>
-          <a:bodyPr wrap="square" lIns="0" tIns="0" rIns="0" bIns="0" rtlCol="0" anchor="ctr"/>
-          <a:lstStyle/>
-          <a:p>
-            <a:pPr indent="0" marL="0">
+              <a:t>공공 API를 대형 사이니지에서 돌립니다</a:t>
+            </a:r>
+            <a:endParaRPr lang="en-US" sz="1450" dirty="0"/>
+          </a:p>
+        </p:txBody>
+      </p:sp>
+      <p:sp>
+        <p:nvSpPr>
+          <p:cNvPr id="19" name="Text 17"/>
+          <p:cNvSpPr/>
+          <p:nvPr/>
+        </p:nvSpPr>
+        <p:spPr>
+          <a:xfrm>
+            <a:off x="987552" y="5285232"/>
+            <a:ext cx="4654296" cy="1060704"/>
+          </a:xfrm>
+          <a:prstGeom prst="rect">
+            <a:avLst/>
+          </a:prstGeom>
+          <a:noFill/>
+          <a:ln/>
+        </p:spPr>
+        <p:txBody>
+          <a:bodyPr wrap="square" lIns="0" tIns="0" rIns="0" bIns="0" rtlCol="0" anchor="t"/>
+          <a:lstStyle/>
+          <a:p>
+            <a:pPr indent="0" marL="0">
+              <a:lnSpc>
+                <a:spcPts val="1450"/>
+              </a:lnSpc>
               <a:buNone/>
             </a:pPr>
             <a:r>
@@ -3687,61 +4049,136 @@
                 <a:ea typeface="맑은 고딕" pitchFamily="34" charset="-122"/>
                 <a:cs typeface="맑은 고딕" pitchFamily="34" charset="-120"/>
               </a:rPr>
-              <a:t>야외 건물 미디어파사드</a:t>
+              <a:t>기존 사이니지 재생 프로그램은 공공 API를 직접 받아 화면에 반영하지 못합니다. 정해진 영상 파일을 순서대로 트는 구조이기 때문입니다. 오늘은 봄날은 자체 개발한 방식으로 공공 API를 실시간으로 읽어 화면에 반영하며, 대형 사이니지에서도 같은 방식이 돌아갑니다. 날씨·대기질·기관 데이터가 바뀌면 화면이 따라 바뀝니다.</a:t>
             </a:r>
             <a:endParaRPr lang="en-US" sz="1000" dirty="0"/>
           </a:p>
         </p:txBody>
       </p:sp>
-      <p:pic>
-        <p:nvPicPr>
-          <p:cNvPr id="13" name="Image 3" descr="/home/user/oneul-bomnal/assets/works/gbe-gumico-exhibition.jpg">    </p:cNvPr>
-          <p:cNvPicPr>
-            <a:picLocks noChangeAspect="1"/>
-          </p:cNvPicPr>
-          <p:nvPr/>
-        </p:nvPicPr>
-        <p:blipFill>
-          <a:blip r:embed="rId4"/>
-          <a:srcRect l="0" r="0" t="0" b="0"/>
-          <a:stretch/>
-        </p:blipFill>
-        <p:spPr>
-          <a:xfrm>
-            <a:off x="640080" y="3931920"/>
-            <a:ext cx="3520440" cy="1417320"/>
-          </a:xfrm>
-          <a:prstGeom prst="rect">
-            <a:avLst/>
-          </a:prstGeom>
-        </p:spPr>
-      </p:pic>
-      <p:sp>
-        <p:nvSpPr>
-          <p:cNvPr id="14" name="Text 8"/>
-          <p:cNvSpPr/>
-          <p:nvPr/>
-        </p:nvSpPr>
-        <p:spPr>
-          <a:xfrm>
-            <a:off x="640080" y="5422392"/>
-            <a:ext cx="3520440" cy="237744"/>
-          </a:xfrm>
-          <a:prstGeom prst="rect">
-            <a:avLst/>
-          </a:prstGeom>
-          <a:noFill/>
-          <a:ln/>
-        </p:spPr>
-        <p:txBody>
-          <a:bodyPr wrap="square" lIns="0" tIns="0" rIns="0" bIns="0" rtlCol="0" anchor="ctr"/>
-          <a:lstStyle/>
-          <a:p>
-            <a:pPr indent="0" marL="0">
-              <a:buNone/>
-            </a:pPr>
-            <a:r>
-              <a:rPr lang="en-US" sz="1200" b="1" dirty="0">
+      <p:sp>
+        <p:nvSpPr>
+          <p:cNvPr id="20" name="Shape 18"/>
+          <p:cNvSpPr/>
+          <p:nvPr/>
+        </p:nvSpPr>
+        <p:spPr>
+          <a:xfrm>
+            <a:off x="6309360" y="4480560"/>
+            <a:ext cx="5349240" cy="1965960"/>
+          </a:xfrm>
+          <a:prstGeom prst="roundRect">
+            <a:avLst>
+              <a:gd name="adj" fmla="val 2791"/>
+            </a:avLst>
+          </a:prstGeom>
+          <a:solidFill>
+            <a:srgbClr val="FFFFFF"/>
+          </a:solidFill>
+          <a:ln w="12700">
+            <a:solidFill>
+              <a:srgbClr val="DFE3EA"/>
+            </a:solidFill>
+            <a:prstDash val="solid"/>
+          </a:ln>
+          <a:effectLst>
+            <a:outerShdw sx="100000" sy="100000" kx="0" ky="0" algn="bl" rotWithShape="0" blurRad="152400" dist="38100" dir="5400000">
+              <a:srgbClr val="101B33">
+                <a:alpha val="7000"/>
+              </a:srgbClr>
+            </a:outerShdw>
+          </a:effectLst>
+        </p:spPr>
+      </p:sp>
+      <p:sp>
+        <p:nvSpPr>
+          <p:cNvPr id="21" name="Shape 19"/>
+          <p:cNvSpPr/>
+          <p:nvPr/>
+        </p:nvSpPr>
+        <p:spPr>
+          <a:xfrm>
+            <a:off x="6656832" y="4773168"/>
+            <a:ext cx="420624" cy="420624"/>
+          </a:xfrm>
+          <a:prstGeom prst="ellipse">
+            <a:avLst/>
+          </a:prstGeom>
+          <a:solidFill>
+            <a:srgbClr val="0075C9"/>
+          </a:solidFill>
+          <a:ln w="12700">
+            <a:solidFill>
+              <a:srgbClr val="0075C9"/>
+            </a:solidFill>
+            <a:prstDash val="solid"/>
+          </a:ln>
+        </p:spPr>
+      </p:sp>
+      <p:sp>
+        <p:nvSpPr>
+          <p:cNvPr id="22" name="Text 20"/>
+          <p:cNvSpPr/>
+          <p:nvPr/>
+        </p:nvSpPr>
+        <p:spPr>
+          <a:xfrm>
+            <a:off x="6656832" y="4773168"/>
+            <a:ext cx="420624" cy="420624"/>
+          </a:xfrm>
+          <a:prstGeom prst="rect">
+            <a:avLst/>
+          </a:prstGeom>
+          <a:noFill/>
+          <a:ln/>
+        </p:spPr>
+        <p:txBody>
+          <a:bodyPr wrap="square" lIns="0" tIns="0" rIns="0" bIns="0" rtlCol="0" anchor="ctr"/>
+          <a:lstStyle/>
+          <a:p>
+            <a:pPr algn="ctr" indent="0" marL="0">
+              <a:buNone/>
+            </a:pPr>
+            <a:r>
+              <a:rPr lang="en-US" sz="1300" b="1" dirty="0">
+                <a:solidFill>
+                  <a:srgbClr val="FFFFFF"/>
+                </a:solidFill>
+                <a:latin typeface="맑은 고딕" pitchFamily="34" charset="0"/>
+                <a:ea typeface="맑은 고딕" pitchFamily="34" charset="-122"/>
+                <a:cs typeface="맑은 고딕" pitchFamily="34" charset="-120"/>
+              </a:rPr>
+              <a:t>4</a:t>
+            </a:r>
+            <a:endParaRPr lang="en-US" sz="1300" dirty="0"/>
+          </a:p>
+        </p:txBody>
+      </p:sp>
+      <p:sp>
+        <p:nvSpPr>
+          <p:cNvPr id="23" name="Text 21"/>
+          <p:cNvSpPr/>
+          <p:nvPr/>
+        </p:nvSpPr>
+        <p:spPr>
+          <a:xfrm>
+            <a:off x="7223760" y="4754880"/>
+            <a:ext cx="4069080" cy="457200"/>
+          </a:xfrm>
+          <a:prstGeom prst="rect">
+            <a:avLst/>
+          </a:prstGeom>
+          <a:noFill/>
+          <a:ln/>
+        </p:spPr>
+        <p:txBody>
+          <a:bodyPr wrap="square" lIns="0" tIns="0" rIns="0" bIns="0" rtlCol="0" anchor="ctr"/>
+          <a:lstStyle/>
+          <a:p>
+            <a:pPr indent="0" marL="0">
+              <a:buNone/>
+            </a:pPr>
+            <a:r>
+              <a:rPr lang="en-US" sz="1450" b="1" dirty="0">
                 <a:solidFill>
                   <a:srgbClr val="101B33"/>
                 </a:solidFill>
@@ -3749,34 +4186,37 @@
                 <a:ea typeface="맑은 고딕" pitchFamily="34" charset="-122"/>
                 <a:cs typeface="맑은 고딕" pitchFamily="34" charset="-120"/>
               </a:rPr>
-              <a:t>경북교육청 · 구미코 전시</a:t>
-            </a:r>
-            <a:endParaRPr lang="en-US" sz="1200" dirty="0"/>
-          </a:p>
-        </p:txBody>
-      </p:sp>
-      <p:sp>
-        <p:nvSpPr>
-          <p:cNvPr id="15" name="Text 9"/>
-          <p:cNvSpPr/>
-          <p:nvPr/>
-        </p:nvSpPr>
-        <p:spPr>
-          <a:xfrm>
-            <a:off x="640080" y="5678424"/>
-            <a:ext cx="3520440" cy="237744"/>
-          </a:xfrm>
-          <a:prstGeom prst="rect">
-            <a:avLst/>
-          </a:prstGeom>
-          <a:noFill/>
-          <a:ln/>
-        </p:spPr>
-        <p:txBody>
-          <a:bodyPr wrap="square" lIns="0" tIns="0" rIns="0" bIns="0" rtlCol="0" anchor="ctr"/>
-          <a:lstStyle/>
-          <a:p>
-            <a:pPr indent="0" marL="0">
+              <a:t>API 없이 쓰실 때는 영상으로 드립니다</a:t>
+            </a:r>
+            <a:endParaRPr lang="en-US" sz="1450" dirty="0"/>
+          </a:p>
+        </p:txBody>
+      </p:sp>
+      <p:sp>
+        <p:nvSpPr>
+          <p:cNvPr id="24" name="Text 22"/>
+          <p:cNvSpPr/>
+          <p:nvPr/>
+        </p:nvSpPr>
+        <p:spPr>
+          <a:xfrm>
+            <a:off x="6656832" y="5285232"/>
+            <a:ext cx="4654296" cy="1060704"/>
+          </a:xfrm>
+          <a:prstGeom prst="rect">
+            <a:avLst/>
+          </a:prstGeom>
+          <a:noFill/>
+          <a:ln/>
+        </p:spPr>
+        <p:txBody>
+          <a:bodyPr wrap="square" lIns="0" tIns="0" rIns="0" bIns="0" rtlCol="0" anchor="t"/>
+          <a:lstStyle/>
+          <a:p>
+            <a:pPr indent="0" marL="0">
+              <a:lnSpc>
+                <a:spcPts val="1450"/>
+              </a:lnSpc>
               <a:buNone/>
             </a:pPr>
             <a:r>
@@ -3788,259 +4228,15 @@
                 <a:ea typeface="맑은 고딕" pitchFamily="34" charset="-122"/>
                 <a:cs typeface="맑은 고딕" pitchFamily="34" charset="-120"/>
               </a:rPr>
-              <a:t>전시장 미디어파사드</a:t>
+              <a:t>실시간 연동이 필요 없고 화면만 예쁘게 틀고 싶은 경우에는, 설치된 패널 크기에 맞춰 저희가 렌더링해 영상 파일로 전달드립니다. 기존 재생 장비에 그대로 올리시면 됩니다.</a:t>
             </a:r>
             <a:endParaRPr lang="en-US" sz="1000" dirty="0"/>
           </a:p>
         </p:txBody>
       </p:sp>
-      <p:pic>
-        <p:nvPicPr>
-          <p:cNvPr id="16" name="Image 4" descr="/home/user/oneul-bomnal/assets/works/gumico-signage-yeongchae.jpg">    </p:cNvPr>
-          <p:cNvPicPr>
-            <a:picLocks noChangeAspect="1"/>
-          </p:cNvPicPr>
-          <p:nvPr/>
-        </p:nvPicPr>
-        <p:blipFill>
-          <a:blip r:embed="rId5"/>
-          <a:srcRect l="0" r="0" t="0" b="0"/>
-          <a:stretch/>
-        </p:blipFill>
-        <p:spPr>
-          <a:xfrm>
-            <a:off x="4434840" y="3931920"/>
-            <a:ext cx="3520440" cy="1417320"/>
-          </a:xfrm>
-          <a:prstGeom prst="rect">
-            <a:avLst/>
-          </a:prstGeom>
-        </p:spPr>
-      </p:pic>
-      <p:sp>
-        <p:nvSpPr>
-          <p:cNvPr id="17" name="Text 10"/>
-          <p:cNvSpPr/>
-          <p:nvPr/>
-        </p:nvSpPr>
-        <p:spPr>
-          <a:xfrm>
-            <a:off x="4434840" y="5422392"/>
-            <a:ext cx="3520440" cy="237744"/>
-          </a:xfrm>
-          <a:prstGeom prst="rect">
-            <a:avLst/>
-          </a:prstGeom>
-          <a:noFill/>
-          <a:ln/>
-        </p:spPr>
-        <p:txBody>
-          <a:bodyPr wrap="square" lIns="0" tIns="0" rIns="0" bIns="0" rtlCol="0" anchor="ctr"/>
-          <a:lstStyle/>
-          <a:p>
-            <a:pPr indent="0" marL="0">
-              <a:buNone/>
-            </a:pPr>
-            <a:r>
-              <a:rPr lang="en-US" sz="1200" b="1" dirty="0">
-                <a:solidFill>
-                  <a:srgbClr val="101B33"/>
-                </a:solidFill>
-                <a:latin typeface="맑은 고딕" pitchFamily="34" charset="0"/>
-                <a:ea typeface="맑은 고딕" pitchFamily="34" charset="-122"/>
-                <a:cs typeface="맑은 고딕" pitchFamily="34" charset="-120"/>
-              </a:rPr>
-              <a:t>구미코 · 로비 사이니지</a:t>
-            </a:r>
-            <a:endParaRPr lang="en-US" sz="1200" dirty="0"/>
-          </a:p>
-        </p:txBody>
-      </p:sp>
-      <p:sp>
-        <p:nvSpPr>
-          <p:cNvPr id="18" name="Text 11"/>
-          <p:cNvSpPr/>
-          <p:nvPr/>
-        </p:nvSpPr>
-        <p:spPr>
-          <a:xfrm>
-            <a:off x="4434840" y="5678424"/>
-            <a:ext cx="3520440" cy="237744"/>
-          </a:xfrm>
-          <a:prstGeom prst="rect">
-            <a:avLst/>
-          </a:prstGeom>
-          <a:noFill/>
-          <a:ln/>
-        </p:spPr>
-        <p:txBody>
-          <a:bodyPr wrap="square" lIns="0" tIns="0" rIns="0" bIns="0" rtlCol="0" anchor="ctr"/>
-          <a:lstStyle/>
-          <a:p>
-            <a:pPr indent="0" marL="0">
-              <a:buNone/>
-            </a:pPr>
-            <a:r>
-              <a:rPr lang="en-US" sz="1000" dirty="0">
-                <a:solidFill>
-                  <a:srgbClr val="4A5262"/>
-                </a:solidFill>
-                <a:latin typeface="맑은 고딕" pitchFamily="34" charset="0"/>
-                <a:ea typeface="맑은 고딕" pitchFamily="34" charset="-122"/>
-                <a:cs typeface="맑은 고딕" pitchFamily="34" charset="-120"/>
-              </a:rPr>
-              <a:t>세로형 LED 사이니지</a:t>
-            </a:r>
-            <a:endParaRPr lang="en-US" sz="1000" dirty="0"/>
-          </a:p>
-        </p:txBody>
-      </p:sp>
-      <p:pic>
-        <p:nvPicPr>
-          <p:cNvPr id="19" name="Image 5" descr="/home/user/oneul-bomnal/assets/works/andong-station-facade.jpg">    </p:cNvPr>
-          <p:cNvPicPr>
-            <a:picLocks noChangeAspect="1"/>
-          </p:cNvPicPr>
-          <p:nvPr/>
-        </p:nvPicPr>
-        <p:blipFill>
-          <a:blip r:embed="rId6"/>
-          <a:srcRect l="0" r="0" t="0" b="0"/>
-          <a:stretch/>
-        </p:blipFill>
-        <p:spPr>
-          <a:xfrm>
-            <a:off x="8229600" y="3931920"/>
-            <a:ext cx="3520440" cy="1417320"/>
-          </a:xfrm>
-          <a:prstGeom prst="rect">
-            <a:avLst/>
-          </a:prstGeom>
-        </p:spPr>
-      </p:pic>
-      <p:sp>
-        <p:nvSpPr>
-          <p:cNvPr id="20" name="Text 12"/>
-          <p:cNvSpPr/>
-          <p:nvPr/>
-        </p:nvSpPr>
-        <p:spPr>
-          <a:xfrm>
-            <a:off x="8229600" y="5422392"/>
-            <a:ext cx="3520440" cy="237744"/>
-          </a:xfrm>
-          <a:prstGeom prst="rect">
-            <a:avLst/>
-          </a:prstGeom>
-          <a:noFill/>
-          <a:ln/>
-        </p:spPr>
-        <p:txBody>
-          <a:bodyPr wrap="square" lIns="0" tIns="0" rIns="0" bIns="0" rtlCol="0" anchor="ctr"/>
-          <a:lstStyle/>
-          <a:p>
-            <a:pPr indent="0" marL="0">
-              <a:buNone/>
-            </a:pPr>
-            <a:r>
-              <a:rPr lang="en-US" sz="1200" b="1" dirty="0">
-                <a:solidFill>
-                  <a:srgbClr val="101B33"/>
-                </a:solidFill>
-                <a:latin typeface="맑은 고딕" pitchFamily="34" charset="0"/>
-                <a:ea typeface="맑은 고딕" pitchFamily="34" charset="-122"/>
-                <a:cs typeface="맑은 고딕" pitchFamily="34" charset="-120"/>
-              </a:rPr>
-              <a:t>안동 · 모디684</a:t>
-            </a:r>
-            <a:endParaRPr lang="en-US" sz="1200" dirty="0"/>
-          </a:p>
-        </p:txBody>
-      </p:sp>
-      <p:sp>
-        <p:nvSpPr>
-          <p:cNvPr id="21" name="Text 13"/>
-          <p:cNvSpPr/>
-          <p:nvPr/>
-        </p:nvSpPr>
-        <p:spPr>
-          <a:xfrm>
-            <a:off x="8229600" y="5678424"/>
-            <a:ext cx="3520440" cy="237744"/>
-          </a:xfrm>
-          <a:prstGeom prst="rect">
-            <a:avLst/>
-          </a:prstGeom>
-          <a:noFill/>
-          <a:ln/>
-        </p:spPr>
-        <p:txBody>
-          <a:bodyPr wrap="square" lIns="0" tIns="0" rIns="0" bIns="0" rtlCol="0" anchor="ctr"/>
-          <a:lstStyle/>
-          <a:p>
-            <a:pPr indent="0" marL="0">
-              <a:buNone/>
-            </a:pPr>
-            <a:r>
-              <a:rPr lang="en-US" sz="1000" dirty="0">
-                <a:solidFill>
-                  <a:srgbClr val="4A5262"/>
-                </a:solidFill>
-                <a:latin typeface="맑은 고딕" pitchFamily="34" charset="0"/>
-                <a:ea typeface="맑은 고딕" pitchFamily="34" charset="-122"/>
-                <a:cs typeface="맑은 고딕" pitchFamily="34" charset="-120"/>
-              </a:rPr>
-              <a:t>야외 건물 미디어파사드</a:t>
-            </a:r>
-            <a:endParaRPr lang="en-US" sz="1000" dirty="0"/>
-          </a:p>
-        </p:txBody>
-      </p:sp>
-      <p:sp>
-        <p:nvSpPr>
-          <p:cNvPr id="22" name="Text 14"/>
-          <p:cNvSpPr/>
-          <p:nvPr/>
-        </p:nvSpPr>
-        <p:spPr>
-          <a:xfrm>
-            <a:off x="640080" y="6053328"/>
-            <a:ext cx="9875520" cy="457200"/>
-          </a:xfrm>
-          <a:prstGeom prst="rect">
-            <a:avLst/>
-          </a:prstGeom>
-          <a:noFill/>
-          <a:ln/>
-        </p:spPr>
-        <p:txBody>
-          <a:bodyPr wrap="square" lIns="0" tIns="0" rIns="0" bIns="0" rtlCol="0" anchor="ctr"/>
-          <a:lstStyle/>
-          <a:p>
-            <a:pPr indent="0" marL="0">
-              <a:lnSpc>
-                <a:spcPts val="1400"/>
-              </a:lnSpc>
-              <a:buNone/>
-            </a:pPr>
-            <a:r>
-              <a:rPr lang="en-US" sz="1000" dirty="0">
-                <a:solidFill>
-                  <a:srgbClr val="8A93A3"/>
-                </a:solidFill>
-                <a:latin typeface="맑은 고딕" pitchFamily="34" charset="0"/>
-                <a:ea typeface="맑은 고딕" pitchFamily="34" charset="-122"/>
-                <a:cs typeface="맑은 고딕" pitchFamily="34" charset="-120"/>
-              </a:rPr>
-              <a:t>위 현장은 상상연필과 함께 수행한 레퍼런스입니다. 오늘은 봄날 명의의 납품 실적은 대구 북구청 사이니지 미디어아트 3편이며, 입찰·수의계약용 실적증명서는 요청 시 발송합니다.</a:t>
-            </a:r>
-            <a:endParaRPr lang="en-US" sz="1000" dirty="0"/>
-          </a:p>
-        </p:txBody>
-      </p:sp>
-      <p:sp>
-        <p:nvSpPr>
-          <p:cNvPr id="23" name="Text 15"/>
+      <p:sp>
+        <p:nvSpPr>
+          <p:cNvPr id="25" name="Text 23"/>
           <p:cNvSpPr/>
           <p:nvPr/>
         </p:nvSpPr>
@@ -4142,6 +4338,803 @@
                 <a:ea typeface="맑은 고딕" pitchFamily="34" charset="-122"/>
                 <a:cs typeface="맑은 고딕" pitchFamily="34" charset="-120"/>
               </a:rPr>
+              <a:t>REFERENCES</a:t>
+            </a:r>
+            <a:endParaRPr lang="en-US" sz="1200" dirty="0"/>
+          </a:p>
+        </p:txBody>
+      </p:sp>
+      <p:sp>
+        <p:nvSpPr>
+          <p:cNvPr id="3" name="Text 1"/>
+          <p:cNvSpPr/>
+          <p:nvPr/>
+        </p:nvSpPr>
+        <p:spPr>
+          <a:xfrm>
+            <a:off x="640080" y="749808"/>
+            <a:ext cx="8412480" cy="932688"/>
+          </a:xfrm>
+          <a:prstGeom prst="rect">
+            <a:avLst/>
+          </a:prstGeom>
+          <a:noFill/>
+          <a:ln/>
+        </p:spPr>
+        <p:txBody>
+          <a:bodyPr wrap="square" lIns="0" tIns="0" rIns="0" bIns="0" rtlCol="0" anchor="t"/>
+          <a:lstStyle/>
+          <a:p>
+            <a:pPr indent="0" marL="0">
+              <a:buNone/>
+            </a:pPr>
+            <a:r>
+              <a:rPr lang="en-US" sz="3200" b="1" dirty="0">
+                <a:solidFill>
+                  <a:srgbClr val="101B33"/>
+                </a:solidFill>
+                <a:latin typeface="맑은 고딕" pitchFamily="34" charset="0"/>
+                <a:ea typeface="맑은 고딕" pitchFamily="34" charset="-122"/>
+                <a:cs typeface="맑은 고딕" pitchFamily="34" charset="-120"/>
+              </a:rPr>
+              <a:t>영남권 공공 현장에서 켜져 있는 화면들</a:t>
+            </a:r>
+            <a:endParaRPr lang="en-US" sz="3200" dirty="0"/>
+          </a:p>
+        </p:txBody>
+      </p:sp>
+      <p:pic>
+        <p:nvPicPr>
+          <p:cNvPr id="4" name="Image 0" descr="/home/user/oneul-bomnal/assets/works/busan-songdo-wave.jpg">    </p:cNvPr>
+          <p:cNvPicPr>
+            <a:picLocks noChangeAspect="1"/>
+          </p:cNvPicPr>
+          <p:nvPr/>
+        </p:nvPicPr>
+        <p:blipFill>
+          <a:blip r:embed="rId1"/>
+          <a:srcRect l="0" r="0" t="0" b="0"/>
+          <a:stretch/>
+        </p:blipFill>
+        <p:spPr>
+          <a:xfrm>
+            <a:off x="640080" y="1783080"/>
+            <a:ext cx="3520440" cy="1417320"/>
+          </a:xfrm>
+          <a:prstGeom prst="rect">
+            <a:avLst/>
+          </a:prstGeom>
+        </p:spPr>
+      </p:pic>
+      <p:sp>
+        <p:nvSpPr>
+          <p:cNvPr id="5" name="Text 2"/>
+          <p:cNvSpPr/>
+          <p:nvPr/>
+        </p:nvSpPr>
+        <p:spPr>
+          <a:xfrm>
+            <a:off x="640080" y="3273552"/>
+            <a:ext cx="3520440" cy="237744"/>
+          </a:xfrm>
+          <a:prstGeom prst="rect">
+            <a:avLst/>
+          </a:prstGeom>
+          <a:noFill/>
+          <a:ln/>
+        </p:spPr>
+        <p:txBody>
+          <a:bodyPr wrap="square" lIns="0" tIns="0" rIns="0" bIns="0" rtlCol="0" anchor="ctr"/>
+          <a:lstStyle/>
+          <a:p>
+            <a:pPr indent="0" marL="0">
+              <a:buNone/>
+            </a:pPr>
+            <a:r>
+              <a:rPr lang="en-US" sz="1200" b="1" dirty="0">
+                <a:solidFill>
+                  <a:srgbClr val="101B33"/>
+                </a:solidFill>
+                <a:latin typeface="맑은 고딕" pitchFamily="34" charset="0"/>
+                <a:ea typeface="맑은 고딕" pitchFamily="34" charset="-122"/>
+                <a:cs typeface="맑은 고딕" pitchFamily="34" charset="-120"/>
+              </a:rPr>
+              <a:t>부산 서구청 · 송도</a:t>
+            </a:r>
+            <a:endParaRPr lang="en-US" sz="1200" dirty="0"/>
+          </a:p>
+        </p:txBody>
+      </p:sp>
+      <p:sp>
+        <p:nvSpPr>
+          <p:cNvPr id="6" name="Text 3"/>
+          <p:cNvSpPr/>
+          <p:nvPr/>
+        </p:nvSpPr>
+        <p:spPr>
+          <a:xfrm>
+            <a:off x="640080" y="3529584"/>
+            <a:ext cx="3520440" cy="237744"/>
+          </a:xfrm>
+          <a:prstGeom prst="rect">
+            <a:avLst/>
+          </a:prstGeom>
+          <a:noFill/>
+          <a:ln/>
+        </p:spPr>
+        <p:txBody>
+          <a:bodyPr wrap="square" lIns="0" tIns="0" rIns="0" bIns="0" rtlCol="0" anchor="ctr"/>
+          <a:lstStyle/>
+          <a:p>
+            <a:pPr indent="0" marL="0">
+              <a:buNone/>
+            </a:pPr>
+            <a:r>
+              <a:rPr lang="en-US" sz="1000" dirty="0">
+                <a:solidFill>
+                  <a:srgbClr val="4A5262"/>
+                </a:solidFill>
+                <a:latin typeface="맑은 고딕" pitchFamily="34" charset="0"/>
+                <a:ea typeface="맑은 고딕" pitchFamily="34" charset="-122"/>
+                <a:cs typeface="맑은 고딕" pitchFamily="34" charset="-120"/>
+              </a:rPr>
+              <a:t>실내 대형 벽면 미디어파사드</a:t>
+            </a:r>
+            <a:endParaRPr lang="en-US" sz="1000" dirty="0"/>
+          </a:p>
+        </p:txBody>
+      </p:sp>
+      <p:pic>
+        <p:nvPicPr>
+          <p:cNvPr id="7" name="Image 1" descr="/home/user/oneul-bomnal/assets/works/daegu-student-center.jpg">    </p:cNvPr>
+          <p:cNvPicPr>
+            <a:picLocks noChangeAspect="1"/>
+          </p:cNvPicPr>
+          <p:nvPr/>
+        </p:nvPicPr>
+        <p:blipFill>
+          <a:blip r:embed="rId2"/>
+          <a:srcRect l="0" r="0" t="0" b="0"/>
+          <a:stretch/>
+        </p:blipFill>
+        <p:spPr>
+          <a:xfrm>
+            <a:off x="4434840" y="1783080"/>
+            <a:ext cx="3520440" cy="1417320"/>
+          </a:xfrm>
+          <a:prstGeom prst="rect">
+            <a:avLst/>
+          </a:prstGeom>
+        </p:spPr>
+      </p:pic>
+      <p:sp>
+        <p:nvSpPr>
+          <p:cNvPr id="8" name="Text 4"/>
+          <p:cNvSpPr/>
+          <p:nvPr/>
+        </p:nvSpPr>
+        <p:spPr>
+          <a:xfrm>
+            <a:off x="4434840" y="3273552"/>
+            <a:ext cx="3520440" cy="237744"/>
+          </a:xfrm>
+          <a:prstGeom prst="rect">
+            <a:avLst/>
+          </a:prstGeom>
+          <a:noFill/>
+          <a:ln/>
+        </p:spPr>
+        <p:txBody>
+          <a:bodyPr wrap="square" lIns="0" tIns="0" rIns="0" bIns="0" rtlCol="0" anchor="ctr"/>
+          <a:lstStyle/>
+          <a:p>
+            <a:pPr indent="0" marL="0">
+              <a:buNone/>
+            </a:pPr>
+            <a:r>
+              <a:rPr lang="en-US" sz="1200" b="1" dirty="0">
+                <a:solidFill>
+                  <a:srgbClr val="101B33"/>
+                </a:solidFill>
+                <a:latin typeface="맑은 고딕" pitchFamily="34" charset="0"/>
+                <a:ea typeface="맑은 고딕" pitchFamily="34" charset="-122"/>
+                <a:cs typeface="맑은 고딕" pitchFamily="34" charset="-120"/>
+              </a:rPr>
+              <a:t>대구학생문화센터</a:t>
+            </a:r>
+            <a:endParaRPr lang="en-US" sz="1200" dirty="0"/>
+          </a:p>
+        </p:txBody>
+      </p:sp>
+      <p:sp>
+        <p:nvSpPr>
+          <p:cNvPr id="9" name="Text 5"/>
+          <p:cNvSpPr/>
+          <p:nvPr/>
+        </p:nvSpPr>
+        <p:spPr>
+          <a:xfrm>
+            <a:off x="4434840" y="3529584"/>
+            <a:ext cx="3520440" cy="237744"/>
+          </a:xfrm>
+          <a:prstGeom prst="rect">
+            <a:avLst/>
+          </a:prstGeom>
+          <a:noFill/>
+          <a:ln/>
+        </p:spPr>
+        <p:txBody>
+          <a:bodyPr wrap="square" lIns="0" tIns="0" rIns="0" bIns="0" rtlCol="0" anchor="ctr"/>
+          <a:lstStyle/>
+          <a:p>
+            <a:pPr indent="0" marL="0">
+              <a:buNone/>
+            </a:pPr>
+            <a:r>
+              <a:rPr lang="en-US" sz="1000" dirty="0">
+                <a:solidFill>
+                  <a:srgbClr val="4A5262"/>
+                </a:solidFill>
+                <a:latin typeface="맑은 고딕" pitchFamily="34" charset="0"/>
+                <a:ea typeface="맑은 고딕" pitchFamily="34" charset="-122"/>
+                <a:cs typeface="맑은 고딕" pitchFamily="34" charset="-120"/>
+              </a:rPr>
+              <a:t>로비 LED 월 미디어아트</a:t>
+            </a:r>
+            <a:endParaRPr lang="en-US" sz="1000" dirty="0"/>
+          </a:p>
+        </p:txBody>
+      </p:sp>
+      <p:pic>
+        <p:nvPicPr>
+          <p:cNvPr id="10" name="Image 2" descr="/home/user/oneul-bomnal/assets/works/gumi-summer-night.jpg">    </p:cNvPr>
+          <p:cNvPicPr>
+            <a:picLocks noChangeAspect="1"/>
+          </p:cNvPicPr>
+          <p:nvPr/>
+        </p:nvPicPr>
+        <p:blipFill>
+          <a:blip r:embed="rId3"/>
+          <a:srcRect l="0" r="0" t="0" b="0"/>
+          <a:stretch/>
+        </p:blipFill>
+        <p:spPr>
+          <a:xfrm>
+            <a:off x="8229600" y="1783080"/>
+            <a:ext cx="3520440" cy="1417320"/>
+          </a:xfrm>
+          <a:prstGeom prst="rect">
+            <a:avLst/>
+          </a:prstGeom>
+        </p:spPr>
+      </p:pic>
+      <p:sp>
+        <p:nvSpPr>
+          <p:cNvPr id="11" name="Text 6"/>
+          <p:cNvSpPr/>
+          <p:nvPr/>
+        </p:nvSpPr>
+        <p:spPr>
+          <a:xfrm>
+            <a:off x="8229600" y="3273552"/>
+            <a:ext cx="3520440" cy="237744"/>
+          </a:xfrm>
+          <a:prstGeom prst="rect">
+            <a:avLst/>
+          </a:prstGeom>
+          <a:noFill/>
+          <a:ln/>
+        </p:spPr>
+        <p:txBody>
+          <a:bodyPr wrap="square" lIns="0" tIns="0" rIns="0" bIns="0" rtlCol="0" anchor="ctr"/>
+          <a:lstStyle/>
+          <a:p>
+            <a:pPr indent="0" marL="0">
+              <a:buNone/>
+            </a:pPr>
+            <a:r>
+              <a:rPr lang="en-US" sz="1200" b="1" dirty="0">
+                <a:solidFill>
+                  <a:srgbClr val="101B33"/>
+                </a:solidFill>
+                <a:latin typeface="맑은 고딕" pitchFamily="34" charset="0"/>
+                <a:ea typeface="맑은 고딕" pitchFamily="34" charset="-122"/>
+                <a:cs typeface="맑은 고딕" pitchFamily="34" charset="-120"/>
+              </a:rPr>
+              <a:t>구미 썸머나잇 페스티벌</a:t>
+            </a:r>
+            <a:endParaRPr lang="en-US" sz="1200" dirty="0"/>
+          </a:p>
+        </p:txBody>
+      </p:sp>
+      <p:sp>
+        <p:nvSpPr>
+          <p:cNvPr id="12" name="Text 7"/>
+          <p:cNvSpPr/>
+          <p:nvPr/>
+        </p:nvSpPr>
+        <p:spPr>
+          <a:xfrm>
+            <a:off x="8229600" y="3529584"/>
+            <a:ext cx="3520440" cy="237744"/>
+          </a:xfrm>
+          <a:prstGeom prst="rect">
+            <a:avLst/>
+          </a:prstGeom>
+          <a:noFill/>
+          <a:ln/>
+        </p:spPr>
+        <p:txBody>
+          <a:bodyPr wrap="square" lIns="0" tIns="0" rIns="0" bIns="0" rtlCol="0" anchor="ctr"/>
+          <a:lstStyle/>
+          <a:p>
+            <a:pPr indent="0" marL="0">
+              <a:buNone/>
+            </a:pPr>
+            <a:r>
+              <a:rPr lang="en-US" sz="1000" dirty="0">
+                <a:solidFill>
+                  <a:srgbClr val="4A5262"/>
+                </a:solidFill>
+                <a:latin typeface="맑은 고딕" pitchFamily="34" charset="0"/>
+                <a:ea typeface="맑은 고딕" pitchFamily="34" charset="-122"/>
+                <a:cs typeface="맑은 고딕" pitchFamily="34" charset="-120"/>
+              </a:rPr>
+              <a:t>야외 건물 미디어파사드</a:t>
+            </a:r>
+            <a:endParaRPr lang="en-US" sz="1000" dirty="0"/>
+          </a:p>
+        </p:txBody>
+      </p:sp>
+      <p:pic>
+        <p:nvPicPr>
+          <p:cNvPr id="13" name="Image 3" descr="/home/user/oneul-bomnal/assets/works/gbe-gumico-exhibition.jpg">    </p:cNvPr>
+          <p:cNvPicPr>
+            <a:picLocks noChangeAspect="1"/>
+          </p:cNvPicPr>
+          <p:nvPr/>
+        </p:nvPicPr>
+        <p:blipFill>
+          <a:blip r:embed="rId4"/>
+          <a:srcRect l="0" r="0" t="0" b="0"/>
+          <a:stretch/>
+        </p:blipFill>
+        <p:spPr>
+          <a:xfrm>
+            <a:off x="640080" y="3931920"/>
+            <a:ext cx="3520440" cy="1417320"/>
+          </a:xfrm>
+          <a:prstGeom prst="rect">
+            <a:avLst/>
+          </a:prstGeom>
+        </p:spPr>
+      </p:pic>
+      <p:sp>
+        <p:nvSpPr>
+          <p:cNvPr id="14" name="Text 8"/>
+          <p:cNvSpPr/>
+          <p:nvPr/>
+        </p:nvSpPr>
+        <p:spPr>
+          <a:xfrm>
+            <a:off x="640080" y="5422392"/>
+            <a:ext cx="3520440" cy="237744"/>
+          </a:xfrm>
+          <a:prstGeom prst="rect">
+            <a:avLst/>
+          </a:prstGeom>
+          <a:noFill/>
+          <a:ln/>
+        </p:spPr>
+        <p:txBody>
+          <a:bodyPr wrap="square" lIns="0" tIns="0" rIns="0" bIns="0" rtlCol="0" anchor="ctr"/>
+          <a:lstStyle/>
+          <a:p>
+            <a:pPr indent="0" marL="0">
+              <a:buNone/>
+            </a:pPr>
+            <a:r>
+              <a:rPr lang="en-US" sz="1200" b="1" dirty="0">
+                <a:solidFill>
+                  <a:srgbClr val="101B33"/>
+                </a:solidFill>
+                <a:latin typeface="맑은 고딕" pitchFamily="34" charset="0"/>
+                <a:ea typeface="맑은 고딕" pitchFamily="34" charset="-122"/>
+                <a:cs typeface="맑은 고딕" pitchFamily="34" charset="-120"/>
+              </a:rPr>
+              <a:t>경북교육청 · 구미코 전시</a:t>
+            </a:r>
+            <a:endParaRPr lang="en-US" sz="1200" dirty="0"/>
+          </a:p>
+        </p:txBody>
+      </p:sp>
+      <p:sp>
+        <p:nvSpPr>
+          <p:cNvPr id="15" name="Text 9"/>
+          <p:cNvSpPr/>
+          <p:nvPr/>
+        </p:nvSpPr>
+        <p:spPr>
+          <a:xfrm>
+            <a:off x="640080" y="5678424"/>
+            <a:ext cx="3520440" cy="237744"/>
+          </a:xfrm>
+          <a:prstGeom prst="rect">
+            <a:avLst/>
+          </a:prstGeom>
+          <a:noFill/>
+          <a:ln/>
+        </p:spPr>
+        <p:txBody>
+          <a:bodyPr wrap="square" lIns="0" tIns="0" rIns="0" bIns="0" rtlCol="0" anchor="ctr"/>
+          <a:lstStyle/>
+          <a:p>
+            <a:pPr indent="0" marL="0">
+              <a:buNone/>
+            </a:pPr>
+            <a:r>
+              <a:rPr lang="en-US" sz="1000" dirty="0">
+                <a:solidFill>
+                  <a:srgbClr val="4A5262"/>
+                </a:solidFill>
+                <a:latin typeface="맑은 고딕" pitchFamily="34" charset="0"/>
+                <a:ea typeface="맑은 고딕" pitchFamily="34" charset="-122"/>
+                <a:cs typeface="맑은 고딕" pitchFamily="34" charset="-120"/>
+              </a:rPr>
+              <a:t>전시장 미디어파사드</a:t>
+            </a:r>
+            <a:endParaRPr lang="en-US" sz="1000" dirty="0"/>
+          </a:p>
+        </p:txBody>
+      </p:sp>
+      <p:pic>
+        <p:nvPicPr>
+          <p:cNvPr id="16" name="Image 4" descr="/home/user/oneul-bomnal/assets/works/gumico-signage-yeongchae.jpg">    </p:cNvPr>
+          <p:cNvPicPr>
+            <a:picLocks noChangeAspect="1"/>
+          </p:cNvPicPr>
+          <p:nvPr/>
+        </p:nvPicPr>
+        <p:blipFill>
+          <a:blip r:embed="rId5"/>
+          <a:srcRect l="0" r="0" t="0" b="0"/>
+          <a:stretch/>
+        </p:blipFill>
+        <p:spPr>
+          <a:xfrm>
+            <a:off x="4434840" y="3931920"/>
+            <a:ext cx="3520440" cy="1417320"/>
+          </a:xfrm>
+          <a:prstGeom prst="rect">
+            <a:avLst/>
+          </a:prstGeom>
+        </p:spPr>
+      </p:pic>
+      <p:sp>
+        <p:nvSpPr>
+          <p:cNvPr id="17" name="Text 10"/>
+          <p:cNvSpPr/>
+          <p:nvPr/>
+        </p:nvSpPr>
+        <p:spPr>
+          <a:xfrm>
+            <a:off x="4434840" y="5422392"/>
+            <a:ext cx="3520440" cy="237744"/>
+          </a:xfrm>
+          <a:prstGeom prst="rect">
+            <a:avLst/>
+          </a:prstGeom>
+          <a:noFill/>
+          <a:ln/>
+        </p:spPr>
+        <p:txBody>
+          <a:bodyPr wrap="square" lIns="0" tIns="0" rIns="0" bIns="0" rtlCol="0" anchor="ctr"/>
+          <a:lstStyle/>
+          <a:p>
+            <a:pPr indent="0" marL="0">
+              <a:buNone/>
+            </a:pPr>
+            <a:r>
+              <a:rPr lang="en-US" sz="1200" b="1" dirty="0">
+                <a:solidFill>
+                  <a:srgbClr val="101B33"/>
+                </a:solidFill>
+                <a:latin typeface="맑은 고딕" pitchFamily="34" charset="0"/>
+                <a:ea typeface="맑은 고딕" pitchFamily="34" charset="-122"/>
+                <a:cs typeface="맑은 고딕" pitchFamily="34" charset="-120"/>
+              </a:rPr>
+              <a:t>구미코 · 로비 사이니지</a:t>
+            </a:r>
+            <a:endParaRPr lang="en-US" sz="1200" dirty="0"/>
+          </a:p>
+        </p:txBody>
+      </p:sp>
+      <p:sp>
+        <p:nvSpPr>
+          <p:cNvPr id="18" name="Text 11"/>
+          <p:cNvSpPr/>
+          <p:nvPr/>
+        </p:nvSpPr>
+        <p:spPr>
+          <a:xfrm>
+            <a:off x="4434840" y="5678424"/>
+            <a:ext cx="3520440" cy="237744"/>
+          </a:xfrm>
+          <a:prstGeom prst="rect">
+            <a:avLst/>
+          </a:prstGeom>
+          <a:noFill/>
+          <a:ln/>
+        </p:spPr>
+        <p:txBody>
+          <a:bodyPr wrap="square" lIns="0" tIns="0" rIns="0" bIns="0" rtlCol="0" anchor="ctr"/>
+          <a:lstStyle/>
+          <a:p>
+            <a:pPr indent="0" marL="0">
+              <a:buNone/>
+            </a:pPr>
+            <a:r>
+              <a:rPr lang="en-US" sz="1000" dirty="0">
+                <a:solidFill>
+                  <a:srgbClr val="4A5262"/>
+                </a:solidFill>
+                <a:latin typeface="맑은 고딕" pitchFamily="34" charset="0"/>
+                <a:ea typeface="맑은 고딕" pitchFamily="34" charset="-122"/>
+                <a:cs typeface="맑은 고딕" pitchFamily="34" charset="-120"/>
+              </a:rPr>
+              <a:t>세로형 LED 사이니지</a:t>
+            </a:r>
+            <a:endParaRPr lang="en-US" sz="1000" dirty="0"/>
+          </a:p>
+        </p:txBody>
+      </p:sp>
+      <p:pic>
+        <p:nvPicPr>
+          <p:cNvPr id="19" name="Image 5" descr="/home/user/oneul-bomnal/assets/works/andong-station-facade.jpg">    </p:cNvPr>
+          <p:cNvPicPr>
+            <a:picLocks noChangeAspect="1"/>
+          </p:cNvPicPr>
+          <p:nvPr/>
+        </p:nvPicPr>
+        <p:blipFill>
+          <a:blip r:embed="rId6"/>
+          <a:srcRect l="0" r="0" t="0" b="0"/>
+          <a:stretch/>
+        </p:blipFill>
+        <p:spPr>
+          <a:xfrm>
+            <a:off x="8229600" y="3931920"/>
+            <a:ext cx="3520440" cy="1417320"/>
+          </a:xfrm>
+          <a:prstGeom prst="rect">
+            <a:avLst/>
+          </a:prstGeom>
+        </p:spPr>
+      </p:pic>
+      <p:sp>
+        <p:nvSpPr>
+          <p:cNvPr id="20" name="Text 12"/>
+          <p:cNvSpPr/>
+          <p:nvPr/>
+        </p:nvSpPr>
+        <p:spPr>
+          <a:xfrm>
+            <a:off x="8229600" y="5422392"/>
+            <a:ext cx="3520440" cy="237744"/>
+          </a:xfrm>
+          <a:prstGeom prst="rect">
+            <a:avLst/>
+          </a:prstGeom>
+          <a:noFill/>
+          <a:ln/>
+        </p:spPr>
+        <p:txBody>
+          <a:bodyPr wrap="square" lIns="0" tIns="0" rIns="0" bIns="0" rtlCol="0" anchor="ctr"/>
+          <a:lstStyle/>
+          <a:p>
+            <a:pPr indent="0" marL="0">
+              <a:buNone/>
+            </a:pPr>
+            <a:r>
+              <a:rPr lang="en-US" sz="1200" b="1" dirty="0">
+                <a:solidFill>
+                  <a:srgbClr val="101B33"/>
+                </a:solidFill>
+                <a:latin typeface="맑은 고딕" pitchFamily="34" charset="0"/>
+                <a:ea typeface="맑은 고딕" pitchFamily="34" charset="-122"/>
+                <a:cs typeface="맑은 고딕" pitchFamily="34" charset="-120"/>
+              </a:rPr>
+              <a:t>안동 · 모디684</a:t>
+            </a:r>
+            <a:endParaRPr lang="en-US" sz="1200" dirty="0"/>
+          </a:p>
+        </p:txBody>
+      </p:sp>
+      <p:sp>
+        <p:nvSpPr>
+          <p:cNvPr id="21" name="Text 13"/>
+          <p:cNvSpPr/>
+          <p:nvPr/>
+        </p:nvSpPr>
+        <p:spPr>
+          <a:xfrm>
+            <a:off x="8229600" y="5678424"/>
+            <a:ext cx="3520440" cy="237744"/>
+          </a:xfrm>
+          <a:prstGeom prst="rect">
+            <a:avLst/>
+          </a:prstGeom>
+          <a:noFill/>
+          <a:ln/>
+        </p:spPr>
+        <p:txBody>
+          <a:bodyPr wrap="square" lIns="0" tIns="0" rIns="0" bIns="0" rtlCol="0" anchor="ctr"/>
+          <a:lstStyle/>
+          <a:p>
+            <a:pPr indent="0" marL="0">
+              <a:buNone/>
+            </a:pPr>
+            <a:r>
+              <a:rPr lang="en-US" sz="1000" dirty="0">
+                <a:solidFill>
+                  <a:srgbClr val="4A5262"/>
+                </a:solidFill>
+                <a:latin typeface="맑은 고딕" pitchFamily="34" charset="0"/>
+                <a:ea typeface="맑은 고딕" pitchFamily="34" charset="-122"/>
+                <a:cs typeface="맑은 고딕" pitchFamily="34" charset="-120"/>
+              </a:rPr>
+              <a:t>야외 건물 미디어파사드</a:t>
+            </a:r>
+            <a:endParaRPr lang="en-US" sz="1000" dirty="0"/>
+          </a:p>
+        </p:txBody>
+      </p:sp>
+      <p:sp>
+        <p:nvSpPr>
+          <p:cNvPr id="22" name="Text 14"/>
+          <p:cNvSpPr/>
+          <p:nvPr/>
+        </p:nvSpPr>
+        <p:spPr>
+          <a:xfrm>
+            <a:off x="640080" y="6053328"/>
+            <a:ext cx="9875520" cy="457200"/>
+          </a:xfrm>
+          <a:prstGeom prst="rect">
+            <a:avLst/>
+          </a:prstGeom>
+          <a:noFill/>
+          <a:ln/>
+        </p:spPr>
+        <p:txBody>
+          <a:bodyPr wrap="square" lIns="0" tIns="0" rIns="0" bIns="0" rtlCol="0" anchor="ctr"/>
+          <a:lstStyle/>
+          <a:p>
+            <a:pPr indent="0" marL="0">
+              <a:lnSpc>
+                <a:spcPts val="1400"/>
+              </a:lnSpc>
+              <a:buNone/>
+            </a:pPr>
+            <a:r>
+              <a:rPr lang="en-US" sz="1000" dirty="0">
+                <a:solidFill>
+                  <a:srgbClr val="8A93A3"/>
+                </a:solidFill>
+                <a:latin typeface="맑은 고딕" pitchFamily="34" charset="0"/>
+                <a:ea typeface="맑은 고딕" pitchFamily="34" charset="-122"/>
+                <a:cs typeface="맑은 고딕" pitchFamily="34" charset="-120"/>
+              </a:rPr>
+              <a:t>위 현장은 상상연필과 함께 수행한 레퍼런스입니다. 오늘은 봄날 명의의 납품 실적은 대구 북구청 사이니지 미디어아트 3편이며, 입찰·수의계약용 실적증명서는 요청 시 발송합니다.</a:t>
+            </a:r>
+            <a:endParaRPr lang="en-US" sz="1000" dirty="0"/>
+          </a:p>
+        </p:txBody>
+      </p:sp>
+      <p:sp>
+        <p:nvSpPr>
+          <p:cNvPr id="23" name="Text 15"/>
+          <p:cNvSpPr/>
+          <p:nvPr/>
+        </p:nvSpPr>
+        <p:spPr>
+          <a:xfrm>
+            <a:off x="11155680" y="6291072"/>
+            <a:ext cx="548640" cy="274320"/>
+          </a:xfrm>
+          <a:prstGeom prst="rect">
+            <a:avLst/>
+          </a:prstGeom>
+          <a:noFill/>
+          <a:ln/>
+        </p:spPr>
+        <p:txBody>
+          <a:bodyPr wrap="square" lIns="0" tIns="0" rIns="0" bIns="0" rtlCol="0" anchor="ctr"/>
+          <a:lstStyle/>
+          <a:p>
+            <a:pPr algn="r" indent="0" marL="0">
+              <a:buNone/>
+            </a:pPr>
+            <a:r>
+              <a:rPr lang="en-US" sz="1000" dirty="0">
+                <a:solidFill>
+                  <a:srgbClr val="9AA3B0"/>
+                </a:solidFill>
+                <a:latin typeface="맑은 고딕" pitchFamily="34" charset="0"/>
+                <a:ea typeface="맑은 고딕" pitchFamily="34" charset="-122"/>
+                <a:cs typeface="맑은 고딕" pitchFamily="34" charset="-120"/>
+              </a:rPr>
+              <a:t>12</a:t>
+            </a:r>
+            <a:endParaRPr lang="en-US" sz="1000" dirty="0"/>
+          </a:p>
+        </p:txBody>
+      </p:sp>
+    </p:spTree>
+  </p:cSld>
+  <p:clrMapOvr>
+    <a:masterClrMapping/>
+  </p:clrMapOvr>
+</p:sld>
+</file>
+
+<file path=ppt/slides/slide13.xml><?xml version="1.0" encoding="utf-8"?>
+<p:sld xmlns:a="http://schemas.openxmlformats.org/drawingml/2006/main" xmlns:r="http://schemas.openxmlformats.org/officeDocument/2006/relationships" xmlns:p="http://schemas.openxmlformats.org/presentationml/2006/main">
+  <p:cSld name="Slide 13">
+    <p:bg>
+      <p:bgPr>
+        <a:solidFill>
+          <a:srgbClr val="FFFFFF"/>
+        </a:solidFill>
+      </p:bgPr>
+    </p:bg>
+    <p:spTree>
+      <p:nvGrpSpPr>
+        <p:cNvPr id="1" name=""/>
+        <p:cNvGrpSpPr/>
+        <p:nvPr/>
+      </p:nvGrpSpPr>
+      <p:grpSpPr>
+        <a:xfrm>
+          <a:off x="0" y="0"/>
+          <a:ext cx="0" cy="0"/>
+          <a:chOff x="0" y="0"/>
+          <a:chExt cx="0" cy="0"/>
+        </a:xfrm>
+      </p:grpSpPr>
+      <p:sp>
+        <p:nvSpPr>
+          <p:cNvPr id="2" name="Text 0"/>
+          <p:cNvSpPr/>
+          <p:nvPr/>
+        </p:nvSpPr>
+        <p:spPr>
+          <a:xfrm>
+            <a:off x="640080" y="457200"/>
+            <a:ext cx="7315200" cy="274320"/>
+          </a:xfrm>
+          <a:prstGeom prst="rect">
+            <a:avLst/>
+          </a:prstGeom>
+          <a:noFill/>
+          <a:ln/>
+        </p:spPr>
+        <p:txBody>
+          <a:bodyPr wrap="square" lIns="0" tIns="0" rIns="0" bIns="0" rtlCol="0" anchor="ctr"/>
+          <a:lstStyle/>
+          <a:p>
+            <a:pPr indent="0" marL="0">
+              <a:buNone/>
+            </a:pPr>
+            <a:r>
+              <a:rPr lang="en-US" sz="1200" b="1" spc="200" kern="0" dirty="0">
+                <a:solidFill>
+                  <a:srgbClr val="0075C9"/>
+                </a:solidFill>
+                <a:latin typeface="맑은 고딕" pitchFamily="34" charset="0"/>
+                <a:ea typeface="맑은 고딕" pitchFamily="34" charset="-122"/>
+                <a:cs typeface="맑은 고딕" pitchFamily="34" charset="-120"/>
+              </a:rPr>
               <a:t>CREDENTIALS</a:t>
             </a:r>
             <a:endParaRPr lang="en-US" sz="1200" dirty="0"/>
@@ -4936,7 +5929,7 @@
                 <a:ea typeface="맑은 고딕" pitchFamily="34" charset="-122"/>
                 <a:cs typeface="맑은 고딕" pitchFamily="34" charset="-120"/>
               </a:rPr>
-              <a:t>12</a:t>
+              <a:t>13</a:t>
             </a:r>
             <a:endParaRPr lang="en-US" sz="1000" dirty="0"/>
           </a:p>
@@ -4950,9 +5943,9 @@
 </p:sld>
 </file>
 
-<file path=ppt/slides/slide13.xml><?xml version="1.0" encoding="utf-8"?>
+<file path=ppt/slides/slide14.xml><?xml version="1.0" encoding="utf-8"?>
 <p:sld xmlns:a="http://schemas.openxmlformats.org/drawingml/2006/main" xmlns:r="http://schemas.openxmlformats.org/officeDocument/2006/relationships" xmlns:p="http://schemas.openxmlformats.org/presentationml/2006/main">
-  <p:cSld name="Slide 13">
+  <p:cSld name="Slide 14">
     <p:bg>
       <p:bgPr>
         <a:solidFill>
@@ -6244,7 +7237,7 @@
                 <a:ea typeface="맑은 고딕" pitchFamily="34" charset="-122"/>
                 <a:cs typeface="맑은 고딕" pitchFamily="34" charset="-120"/>
               </a:rPr>
-              <a:t>시안 3종을 요청 후 1일 이내에 제시합니다. 영상 외주 제작이 통상 5일 걸리는 것과 비교되는 지점입니다.</a:t>
+              <a:t>시안 3종을 요청 후 1주일 이내에 제시합니다. 영상 외주 제작이 통상 1개월 이상 걸리는 것과 비교되는 지점입니다.</a:t>
             </a:r>
             <a:endParaRPr lang="en-US" sz="1000" dirty="0"/>
           </a:p>
@@ -6995,7 +7988,7 @@
                 <a:ea typeface="맑은 고딕" pitchFamily="34" charset="-122"/>
                 <a:cs typeface="맑은 고딕" pitchFamily="34" charset="-120"/>
               </a:rPr>
-              <a:t>일</a:t>
+              <a:t>주</a:t>
             </a:r>
             <a:endParaRPr lang="en-US" sz="5200" dirty="0"/>
           </a:p>
@@ -7076,7 +8069,7 @@
                 <a:ea typeface="맑은 고딕" pitchFamily="34" charset="-122"/>
                 <a:cs typeface="맑은 고딕" pitchFamily="34" charset="-120"/>
               </a:rPr>
-              <a:t>영상 외주 제작이 통상 5일 걸리는 데 비해 짧습니다. 미디어아트를 코드로 만들기 때문에 기획·카피·비주얼을 한 번에 생성합니다.</a:t>
+              <a:t>영상 외주 제작이 통상 1개월 이상 걸리는 데 비해 짧습니다. 미디어아트를 코드로 만들기 때문에 기획·카피·비주얼을 한 번에 생성합니다. 자세히 알려주실수록 시안 디테일이 올라갑니다.</a:t>
             </a:r>
             <a:endParaRPr lang="en-US" sz="1100" dirty="0"/>
           </a:p>
@@ -7456,7 +8449,7 @@
                 <a:ea typeface="맑은 고딕" pitchFamily="34" charset="-122"/>
                 <a:cs typeface="맑은 고딕" pitchFamily="34" charset="-120"/>
               </a:rPr>
-              <a:t>流帶 · 결결 — 로비 LED 미디어월용 자체 제작 작품</a:t>
+              <a:t>流帶 · 결결 · 로비 LED 미디어월용 자체 제작 작품</a:t>
             </a:r>
             <a:endParaRPr lang="en-US" sz="950" dirty="0"/>
           </a:p>
@@ -8082,7 +9075,7 @@
                 <a:ea typeface="맑은 고딕" pitchFamily="34" charset="-122"/>
                 <a:cs typeface="맑은 고딕" pitchFamily="34" charset="-120"/>
               </a:rPr>
-              <a:t>시안 3종이 하루 안에 나옵니다</a:t>
+              <a:t>시안 3종이 일주일 안에 나옵니다</a:t>
             </a:r>
             <a:endParaRPr lang="en-US" sz="3200" dirty="0"/>
           </a:p>
@@ -8144,7 +9137,7 @@
                 <a:ea typeface="맑은 고딕" pitchFamily="34" charset="-122"/>
                 <a:cs typeface="맑은 고딕" pitchFamily="34" charset="-120"/>
               </a:rPr>
-              <a:t>확정 후 상시 운영 현장은 원격으로 교체하므로 현장 방문이 필요하지 않습니다.</a:t>
+              <a:t>원하시는 방향을 자세히 알려주실수록 시안의 디테일이 올라갑니다.</a:t>
             </a:r>
             <a:endParaRPr lang="en-US" sz="1300" dirty="0"/>
           </a:p>
@@ -8272,7 +9265,7 @@
                 <a:ea typeface="맑은 고딕" pitchFamily="34" charset="-122"/>
                 <a:cs typeface="맑은 고딕" pitchFamily="34" charset="-120"/>
               </a:rPr>
-              <a:t>요청 후 1일 이내 제시</a:t>
+              <a:t>요청 후 1주일 이내 제시</a:t>
             </a:r>
             <a:endParaRPr lang="en-US" sz="1100" dirty="0"/>
           </a:p>
@@ -8345,7 +9338,7 @@
                 <a:ea typeface="맑은 고딕" pitchFamily="34" charset="-122"/>
                 <a:cs typeface="맑은 고딕" pitchFamily="34" charset="-120"/>
               </a:rPr>
-              <a:t>원격 배포</a:t>
+              <a:t>재생 PC 세팅</a:t>
             </a:r>
             <a:endParaRPr lang="en-US" sz="1300" dirty="0"/>
           </a:p>
@@ -8384,7 +9377,7 @@
                 <a:ea typeface="맑은 고딕" pitchFamily="34" charset="-122"/>
                 <a:cs typeface="맑은 고딕" pitchFamily="34" charset="-120"/>
               </a:rPr>
-              <a:t>확정 후 현장 방문 불필요</a:t>
+              <a:t>사이니지 재생 장비까지 준비</a:t>
             </a:r>
             <a:endParaRPr lang="en-US" sz="1100" dirty="0"/>
           </a:p>
@@ -8708,7 +9701,7 @@
                 <a:ea typeface="맑은 고딕" pitchFamily="34" charset="-122"/>
                 <a:cs typeface="맑은 고딕" pitchFamily="34" charset="-120"/>
               </a:rPr>
-              <a:t>구미코 외벽 LED — 대형 LED 패널 콘텐츠</a:t>
+              <a:t>구미코 외벽 LED · 대형 LED 패널 콘텐츠</a:t>
             </a:r>
             <a:endParaRPr lang="en-US" sz="950" dirty="0"/>
           </a:p>
@@ -9600,7 +10593,7 @@
                 <a:ea typeface="맑은 고딕" pitchFamily="34" charset="-122"/>
                 <a:cs typeface="맑은 고딕" pitchFamily="34" charset="-120"/>
               </a:rPr>
-              <a:t>안동 문화플랫폼 모디684 — 야외 건물 미디어파사드</a:t>
+              <a:t>안동 문화플랫폼 모디684 · 야외 건물 미디어파사드</a:t>
             </a:r>
             <a:endParaRPr lang="en-US" sz="950" dirty="0"/>
           </a:p>
@@ -11042,7 +12035,7 @@
                 <a:ea typeface="맑은 고딕" pitchFamily="34" charset="-122"/>
                 <a:cs typeface="맑은 고딕" pitchFamily="34" charset="-120"/>
               </a:rPr>
-              <a:t>매핑 면 또는 화면 규격을 확정하고, 기관 CI를 반영한 시안 3종을 1일 이내에 제시합니다.</a:t>
+              <a:t>매핑 면 또는 화면 규격을 확정하고, 기관 CI를 반영한 시안 3종을 1주일 이내에 제시합니다.</a:t>
             </a:r>
             <a:endParaRPr lang="en-US" sz="1050" dirty="0"/>
           </a:p>

--- a/docs/오늘은봄날_회사소개서.pptx
+++ b/docs/오늘은봄날_회사소개서.pptx
@@ -19,9 +19,14 @@
     <p:sldId id="267" r:id="rId13"/>
     <p:sldId id="268" r:id="rId14"/>
     <p:sldId id="269" r:id="rId15"/>
+    <p:sldId id="270" r:id="rId16"/>
+    <p:sldId id="271" r:id="rId17"/>
+    <p:sldId id="272" r:id="rId18"/>
+    <p:sldId id="273" r:id="rId19"/>
+    <p:sldId id="274" r:id="rId20"/>
   </p:sldIdLst>
   <p:notesMasterIdLst>
-    <p:notesMasterId r:id="rId16"/>
+    <p:notesMasterId r:id="rId21"/>
   </p:notesMasterIdLst>
   <p:sldSz cx="12192000" cy="6858000"/>
   <p:notesSz cx="6858000" cy="12192000"/>
@@ -1237,6 +1242,446 @@
             <a:fld id="{F7021451-1387-4CA6-816F-3879F97B5CBC}" type="slidenum">
               <a:rPr lang="en-US"/>
               <a:t>14</a:t>
+            </a:fld>
+            <a:endParaRPr lang="en-US"/>
+          </a:p>
+        </p:txBody>
+      </p:sp>
+    </p:spTree>
+    <p:extLst>
+      <p:ext uri="{BB962C8B-B14F-4D97-AF65-F5344CB8AC3E}">
+        <p14:creationId xmlns:p14="http://schemas.microsoft.com/office/powerpoint/2010/main" val="1024086991"/>
+      </p:ext>
+    </p:extLst>
+  </p:cSld>
+  <p:clrMapOvr>
+    <a:masterClrMapping/>
+  </p:clrMapOvr>
+</p:notes>
+</file>
+
+<file path=ppt/notesSlides/notesSlide15.xml><?xml version="1.0" encoding="utf-8"?>
+<p:notes xmlns:a="http://schemas.openxmlformats.org/drawingml/2006/main" xmlns:r="http://schemas.openxmlformats.org/officeDocument/2006/relationships" xmlns:p="http://schemas.openxmlformats.org/presentationml/2006/main">
+  <p:cSld>
+    <p:spTree>
+      <p:nvGrpSpPr>
+        <p:cNvPr id="1" name=""/>
+        <p:cNvGrpSpPr/>
+        <p:nvPr/>
+      </p:nvGrpSpPr>
+      <p:grpSpPr>
+        <a:xfrm>
+          <a:off x="0" y="0"/>
+          <a:ext cx="0" cy="0"/>
+          <a:chOff x="0" y="0"/>
+          <a:chExt cx="0" cy="0"/>
+        </a:xfrm>
+      </p:grpSpPr>
+      <p:sp>
+        <p:nvSpPr>
+          <p:cNvPr id="2" name="Slide Image Placeholder 1"/>
+          <p:cNvSpPr>
+            <a:spLocks noGrp="1" noRot="1" noChangeAspect="1"/>
+          </p:cNvSpPr>
+          <p:nvPr>
+            <p:ph type="sldImg"/>
+          </p:nvPr>
+        </p:nvSpPr>
+        <p:spPr/>
+      </p:sp>
+      <p:sp>
+        <p:nvSpPr>
+          <p:cNvPr id="3" name="Notes Placeholder 2"/>
+          <p:cNvSpPr>
+            <a:spLocks noGrp="1"/>
+          </p:cNvSpPr>
+          <p:nvPr>
+            <p:ph type="body" idx="1"/>
+          </p:nvPr>
+        </p:nvSpPr>
+        <p:spPr/>
+        <p:txBody>
+          <a:bodyPr/>
+          <a:lstStyle/>
+          <a:p>
+            <a:r>
+              <a:rPr lang="en-US" dirty="0"/>
+              <a:t/>
+            </a:r>
+            <a:endParaRPr lang="en-US" dirty="0"/>
+          </a:p>
+        </p:txBody>
+      </p:sp>
+      <p:sp>
+        <p:nvSpPr>
+          <p:cNvPr id="4" name="Slide Number Placeholder 3"/>
+          <p:cNvSpPr>
+            <a:spLocks noGrp="1"/>
+          </p:cNvSpPr>
+          <p:nvPr>
+            <p:ph type="sldNum" sz="quarter" idx="10"/>
+          </p:nvPr>
+        </p:nvSpPr>
+        <p:spPr/>
+        <p:txBody>
+          <a:bodyPr/>
+          <a:lstStyle/>
+          <a:p>
+            <a:fld id="{F7021451-1387-4CA6-816F-3879F97B5CBC}" type="slidenum">
+              <a:rPr lang="en-US"/>
+              <a:t>15</a:t>
+            </a:fld>
+            <a:endParaRPr lang="en-US"/>
+          </a:p>
+        </p:txBody>
+      </p:sp>
+    </p:spTree>
+    <p:extLst>
+      <p:ext uri="{BB962C8B-B14F-4D97-AF65-F5344CB8AC3E}">
+        <p14:creationId xmlns:p14="http://schemas.microsoft.com/office/powerpoint/2010/main" val="1024086991"/>
+      </p:ext>
+    </p:extLst>
+  </p:cSld>
+  <p:clrMapOvr>
+    <a:masterClrMapping/>
+  </p:clrMapOvr>
+</p:notes>
+</file>
+
+<file path=ppt/notesSlides/notesSlide16.xml><?xml version="1.0" encoding="utf-8"?>
+<p:notes xmlns:a="http://schemas.openxmlformats.org/drawingml/2006/main" xmlns:r="http://schemas.openxmlformats.org/officeDocument/2006/relationships" xmlns:p="http://schemas.openxmlformats.org/presentationml/2006/main">
+  <p:cSld>
+    <p:spTree>
+      <p:nvGrpSpPr>
+        <p:cNvPr id="1" name=""/>
+        <p:cNvGrpSpPr/>
+        <p:nvPr/>
+      </p:nvGrpSpPr>
+      <p:grpSpPr>
+        <a:xfrm>
+          <a:off x="0" y="0"/>
+          <a:ext cx="0" cy="0"/>
+          <a:chOff x="0" y="0"/>
+          <a:chExt cx="0" cy="0"/>
+        </a:xfrm>
+      </p:grpSpPr>
+      <p:sp>
+        <p:nvSpPr>
+          <p:cNvPr id="2" name="Slide Image Placeholder 1"/>
+          <p:cNvSpPr>
+            <a:spLocks noGrp="1" noRot="1" noChangeAspect="1"/>
+          </p:cNvSpPr>
+          <p:nvPr>
+            <p:ph type="sldImg"/>
+          </p:nvPr>
+        </p:nvSpPr>
+        <p:spPr/>
+      </p:sp>
+      <p:sp>
+        <p:nvSpPr>
+          <p:cNvPr id="3" name="Notes Placeholder 2"/>
+          <p:cNvSpPr>
+            <a:spLocks noGrp="1"/>
+          </p:cNvSpPr>
+          <p:nvPr>
+            <p:ph type="body" idx="1"/>
+          </p:nvPr>
+        </p:nvSpPr>
+        <p:spPr/>
+        <p:txBody>
+          <a:bodyPr/>
+          <a:lstStyle/>
+          <a:p>
+            <a:r>
+              <a:rPr lang="en-US" dirty="0"/>
+              <a:t/>
+            </a:r>
+            <a:endParaRPr lang="en-US" dirty="0"/>
+          </a:p>
+        </p:txBody>
+      </p:sp>
+      <p:sp>
+        <p:nvSpPr>
+          <p:cNvPr id="4" name="Slide Number Placeholder 3"/>
+          <p:cNvSpPr>
+            <a:spLocks noGrp="1"/>
+          </p:cNvSpPr>
+          <p:nvPr>
+            <p:ph type="sldNum" sz="quarter" idx="10"/>
+          </p:nvPr>
+        </p:nvSpPr>
+        <p:spPr/>
+        <p:txBody>
+          <a:bodyPr/>
+          <a:lstStyle/>
+          <a:p>
+            <a:fld id="{F7021451-1387-4CA6-816F-3879F97B5CBC}" type="slidenum">
+              <a:rPr lang="en-US"/>
+              <a:t>16</a:t>
+            </a:fld>
+            <a:endParaRPr lang="en-US"/>
+          </a:p>
+        </p:txBody>
+      </p:sp>
+    </p:spTree>
+    <p:extLst>
+      <p:ext uri="{BB962C8B-B14F-4D97-AF65-F5344CB8AC3E}">
+        <p14:creationId xmlns:p14="http://schemas.microsoft.com/office/powerpoint/2010/main" val="1024086991"/>
+      </p:ext>
+    </p:extLst>
+  </p:cSld>
+  <p:clrMapOvr>
+    <a:masterClrMapping/>
+  </p:clrMapOvr>
+</p:notes>
+</file>
+
+<file path=ppt/notesSlides/notesSlide17.xml><?xml version="1.0" encoding="utf-8"?>
+<p:notes xmlns:a="http://schemas.openxmlformats.org/drawingml/2006/main" xmlns:r="http://schemas.openxmlformats.org/officeDocument/2006/relationships" xmlns:p="http://schemas.openxmlformats.org/presentationml/2006/main">
+  <p:cSld>
+    <p:spTree>
+      <p:nvGrpSpPr>
+        <p:cNvPr id="1" name=""/>
+        <p:cNvGrpSpPr/>
+        <p:nvPr/>
+      </p:nvGrpSpPr>
+      <p:grpSpPr>
+        <a:xfrm>
+          <a:off x="0" y="0"/>
+          <a:ext cx="0" cy="0"/>
+          <a:chOff x="0" y="0"/>
+          <a:chExt cx="0" cy="0"/>
+        </a:xfrm>
+      </p:grpSpPr>
+      <p:sp>
+        <p:nvSpPr>
+          <p:cNvPr id="2" name="Slide Image Placeholder 1"/>
+          <p:cNvSpPr>
+            <a:spLocks noGrp="1" noRot="1" noChangeAspect="1"/>
+          </p:cNvSpPr>
+          <p:nvPr>
+            <p:ph type="sldImg"/>
+          </p:nvPr>
+        </p:nvSpPr>
+        <p:spPr/>
+      </p:sp>
+      <p:sp>
+        <p:nvSpPr>
+          <p:cNvPr id="3" name="Notes Placeholder 2"/>
+          <p:cNvSpPr>
+            <a:spLocks noGrp="1"/>
+          </p:cNvSpPr>
+          <p:nvPr>
+            <p:ph type="body" idx="1"/>
+          </p:nvPr>
+        </p:nvSpPr>
+        <p:spPr/>
+        <p:txBody>
+          <a:bodyPr/>
+          <a:lstStyle/>
+          <a:p>
+            <a:r>
+              <a:rPr lang="en-US" dirty="0"/>
+              <a:t/>
+            </a:r>
+            <a:endParaRPr lang="en-US" dirty="0"/>
+          </a:p>
+        </p:txBody>
+      </p:sp>
+      <p:sp>
+        <p:nvSpPr>
+          <p:cNvPr id="4" name="Slide Number Placeholder 3"/>
+          <p:cNvSpPr>
+            <a:spLocks noGrp="1"/>
+          </p:cNvSpPr>
+          <p:nvPr>
+            <p:ph type="sldNum" sz="quarter" idx="10"/>
+          </p:nvPr>
+        </p:nvSpPr>
+        <p:spPr/>
+        <p:txBody>
+          <a:bodyPr/>
+          <a:lstStyle/>
+          <a:p>
+            <a:fld id="{F7021451-1387-4CA6-816F-3879F97B5CBC}" type="slidenum">
+              <a:rPr lang="en-US"/>
+              <a:t>17</a:t>
+            </a:fld>
+            <a:endParaRPr lang="en-US"/>
+          </a:p>
+        </p:txBody>
+      </p:sp>
+    </p:spTree>
+    <p:extLst>
+      <p:ext uri="{BB962C8B-B14F-4D97-AF65-F5344CB8AC3E}">
+        <p14:creationId xmlns:p14="http://schemas.microsoft.com/office/powerpoint/2010/main" val="1024086991"/>
+      </p:ext>
+    </p:extLst>
+  </p:cSld>
+  <p:clrMapOvr>
+    <a:masterClrMapping/>
+  </p:clrMapOvr>
+</p:notes>
+</file>
+
+<file path=ppt/notesSlides/notesSlide18.xml><?xml version="1.0" encoding="utf-8"?>
+<p:notes xmlns:a="http://schemas.openxmlformats.org/drawingml/2006/main" xmlns:r="http://schemas.openxmlformats.org/officeDocument/2006/relationships" xmlns:p="http://schemas.openxmlformats.org/presentationml/2006/main">
+  <p:cSld>
+    <p:spTree>
+      <p:nvGrpSpPr>
+        <p:cNvPr id="1" name=""/>
+        <p:cNvGrpSpPr/>
+        <p:nvPr/>
+      </p:nvGrpSpPr>
+      <p:grpSpPr>
+        <a:xfrm>
+          <a:off x="0" y="0"/>
+          <a:ext cx="0" cy="0"/>
+          <a:chOff x="0" y="0"/>
+          <a:chExt cx="0" cy="0"/>
+        </a:xfrm>
+      </p:grpSpPr>
+      <p:sp>
+        <p:nvSpPr>
+          <p:cNvPr id="2" name="Slide Image Placeholder 1"/>
+          <p:cNvSpPr>
+            <a:spLocks noGrp="1" noRot="1" noChangeAspect="1"/>
+          </p:cNvSpPr>
+          <p:nvPr>
+            <p:ph type="sldImg"/>
+          </p:nvPr>
+        </p:nvSpPr>
+        <p:spPr/>
+      </p:sp>
+      <p:sp>
+        <p:nvSpPr>
+          <p:cNvPr id="3" name="Notes Placeholder 2"/>
+          <p:cNvSpPr>
+            <a:spLocks noGrp="1"/>
+          </p:cNvSpPr>
+          <p:nvPr>
+            <p:ph type="body" idx="1"/>
+          </p:nvPr>
+        </p:nvSpPr>
+        <p:spPr/>
+        <p:txBody>
+          <a:bodyPr/>
+          <a:lstStyle/>
+          <a:p>
+            <a:r>
+              <a:rPr lang="en-US" dirty="0"/>
+              <a:t/>
+            </a:r>
+            <a:endParaRPr lang="en-US" dirty="0"/>
+          </a:p>
+        </p:txBody>
+      </p:sp>
+      <p:sp>
+        <p:nvSpPr>
+          <p:cNvPr id="4" name="Slide Number Placeholder 3"/>
+          <p:cNvSpPr>
+            <a:spLocks noGrp="1"/>
+          </p:cNvSpPr>
+          <p:nvPr>
+            <p:ph type="sldNum" sz="quarter" idx="10"/>
+          </p:nvPr>
+        </p:nvSpPr>
+        <p:spPr/>
+        <p:txBody>
+          <a:bodyPr/>
+          <a:lstStyle/>
+          <a:p>
+            <a:fld id="{F7021451-1387-4CA6-816F-3879F97B5CBC}" type="slidenum">
+              <a:rPr lang="en-US"/>
+              <a:t>18</a:t>
+            </a:fld>
+            <a:endParaRPr lang="en-US"/>
+          </a:p>
+        </p:txBody>
+      </p:sp>
+    </p:spTree>
+    <p:extLst>
+      <p:ext uri="{BB962C8B-B14F-4D97-AF65-F5344CB8AC3E}">
+        <p14:creationId xmlns:p14="http://schemas.microsoft.com/office/powerpoint/2010/main" val="1024086991"/>
+      </p:ext>
+    </p:extLst>
+  </p:cSld>
+  <p:clrMapOvr>
+    <a:masterClrMapping/>
+  </p:clrMapOvr>
+</p:notes>
+</file>
+
+<file path=ppt/notesSlides/notesSlide19.xml><?xml version="1.0" encoding="utf-8"?>
+<p:notes xmlns:a="http://schemas.openxmlformats.org/drawingml/2006/main" xmlns:r="http://schemas.openxmlformats.org/officeDocument/2006/relationships" xmlns:p="http://schemas.openxmlformats.org/presentationml/2006/main">
+  <p:cSld>
+    <p:spTree>
+      <p:nvGrpSpPr>
+        <p:cNvPr id="1" name=""/>
+        <p:cNvGrpSpPr/>
+        <p:nvPr/>
+      </p:nvGrpSpPr>
+      <p:grpSpPr>
+        <a:xfrm>
+          <a:off x="0" y="0"/>
+          <a:ext cx="0" cy="0"/>
+          <a:chOff x="0" y="0"/>
+          <a:chExt cx="0" cy="0"/>
+        </a:xfrm>
+      </p:grpSpPr>
+      <p:sp>
+        <p:nvSpPr>
+          <p:cNvPr id="2" name="Slide Image Placeholder 1"/>
+          <p:cNvSpPr>
+            <a:spLocks noGrp="1" noRot="1" noChangeAspect="1"/>
+          </p:cNvSpPr>
+          <p:nvPr>
+            <p:ph type="sldImg"/>
+          </p:nvPr>
+        </p:nvSpPr>
+        <p:spPr/>
+      </p:sp>
+      <p:sp>
+        <p:nvSpPr>
+          <p:cNvPr id="3" name="Notes Placeholder 2"/>
+          <p:cNvSpPr>
+            <a:spLocks noGrp="1"/>
+          </p:cNvSpPr>
+          <p:nvPr>
+            <p:ph type="body" idx="1"/>
+          </p:nvPr>
+        </p:nvSpPr>
+        <p:spPr/>
+        <p:txBody>
+          <a:bodyPr/>
+          <a:lstStyle/>
+          <a:p>
+            <a:r>
+              <a:rPr lang="en-US" dirty="0"/>
+              <a:t/>
+            </a:r>
+            <a:endParaRPr lang="en-US" dirty="0"/>
+          </a:p>
+        </p:txBody>
+      </p:sp>
+      <p:sp>
+        <p:nvSpPr>
+          <p:cNvPr id="4" name="Slide Number Placeholder 3"/>
+          <p:cNvSpPr>
+            <a:spLocks noGrp="1"/>
+          </p:cNvSpPr>
+          <p:nvPr>
+            <p:ph type="sldNum" sz="quarter" idx="10"/>
+          </p:nvPr>
+        </p:nvSpPr>
+        <p:spPr/>
+        <p:txBody>
+          <a:bodyPr/>
+          <a:lstStyle/>
+          <a:p>
+            <a:fld id="{F7021451-1387-4CA6-816F-3879F97B5CBC}" type="slidenum">
+              <a:rPr lang="en-US"/>
+              <a:t>19</a:t>
             </a:fld>
             <a:endParaRPr lang="en-US"/>
           </a:p>
@@ -5929,7 +6374,7 @@
                 <a:ea typeface="맑은 고딕" pitchFamily="34" charset="-122"/>
                 <a:cs typeface="맑은 고딕" pitchFamily="34" charset="-120"/>
               </a:rPr>
-              <a:t>13</a:t>
+              <a:t>19</a:t>
             </a:r>
             <a:endParaRPr lang="en-US" sz="1000" dirty="0"/>
           </a:p>
@@ -5946,6 +6391,7353 @@
 <file path=ppt/slides/slide14.xml><?xml version="1.0" encoding="utf-8"?>
 <p:sld xmlns:a="http://schemas.openxmlformats.org/drawingml/2006/main" xmlns:r="http://schemas.openxmlformats.org/officeDocument/2006/relationships" xmlns:p="http://schemas.openxmlformats.org/presentationml/2006/main">
   <p:cSld name="Slide 14">
+    <p:bg>
+      <p:bgPr>
+        <a:solidFill>
+          <a:srgbClr val="FFFFFF"/>
+        </a:solidFill>
+      </p:bgPr>
+    </p:bg>
+    <p:spTree>
+      <p:nvGrpSpPr>
+        <p:cNvPr id="1" name=""/>
+        <p:cNvGrpSpPr/>
+        <p:nvPr/>
+      </p:nvGrpSpPr>
+      <p:grpSpPr>
+        <a:xfrm>
+          <a:off x="0" y="0"/>
+          <a:ext cx="0" cy="0"/>
+          <a:chOff x="0" y="0"/>
+          <a:chExt cx="0" cy="0"/>
+        </a:xfrm>
+      </p:grpSpPr>
+      <p:sp>
+        <p:nvSpPr>
+          <p:cNvPr id="2" name="Text 0"/>
+          <p:cNvSpPr/>
+          <p:nvPr/>
+        </p:nvSpPr>
+        <p:spPr>
+          <a:xfrm>
+            <a:off x="640080" y="457200"/>
+            <a:ext cx="7315200" cy="274320"/>
+          </a:xfrm>
+          <a:prstGeom prst="rect">
+            <a:avLst/>
+          </a:prstGeom>
+          <a:noFill/>
+          <a:ln/>
+        </p:spPr>
+        <p:txBody>
+          <a:bodyPr wrap="square" lIns="0" tIns="0" rIns="0" bIns="0" rtlCol="0" anchor="ctr"/>
+          <a:lstStyle/>
+          <a:p>
+            <a:pPr indent="0" marL="0">
+              <a:buNone/>
+            </a:pPr>
+            <a:r>
+              <a:rPr lang="en-US" sz="1200" b="1" spc="200" kern="0" dirty="0">
+                <a:solidFill>
+                  <a:srgbClr val="0075C9"/>
+                </a:solidFill>
+                <a:latin typeface="맑은 고딕" pitchFamily="34" charset="0"/>
+                <a:ea typeface="맑은 고딕" pitchFamily="34" charset="-122"/>
+                <a:cs typeface="맑은 고딕" pitchFamily="34" charset="-120"/>
+              </a:rPr>
+              <a:t>BUDGET</a:t>
+            </a:r>
+            <a:endParaRPr lang="en-US" sz="1200" dirty="0"/>
+          </a:p>
+        </p:txBody>
+      </p:sp>
+      <p:sp>
+        <p:nvSpPr>
+          <p:cNvPr id="3" name="Text 1"/>
+          <p:cNvSpPr/>
+          <p:nvPr/>
+        </p:nvSpPr>
+        <p:spPr>
+          <a:xfrm>
+            <a:off x="640080" y="749808"/>
+            <a:ext cx="8412480" cy="932688"/>
+          </a:xfrm>
+          <a:prstGeom prst="rect">
+            <a:avLst/>
+          </a:prstGeom>
+          <a:noFill/>
+          <a:ln/>
+        </p:spPr>
+        <p:txBody>
+          <a:bodyPr wrap="square" lIns="0" tIns="0" rIns="0" bIns="0" rtlCol="0" anchor="t"/>
+          <a:lstStyle/>
+          <a:p>
+            <a:pPr indent="0" marL="0">
+              <a:buNone/>
+            </a:pPr>
+            <a:r>
+              <a:rPr lang="en-US" sz="3200" b="1" dirty="0">
+                <a:solidFill>
+                  <a:srgbClr val="101B33"/>
+                </a:solidFill>
+                <a:latin typeface="맑은 고딕" pitchFamily="34" charset="0"/>
+                <a:ea typeface="맑은 고딕" pitchFamily="34" charset="-122"/>
+                <a:cs typeface="맑은 고딕" pitchFamily="34" charset="-120"/>
+              </a:rPr>
+              <a:t>사업비 구성</a:t>
+            </a:r>
+            <a:endParaRPr lang="en-US" sz="3200" dirty="0"/>
+          </a:p>
+        </p:txBody>
+      </p:sp>
+      <p:sp>
+        <p:nvSpPr>
+          <p:cNvPr id="4" name="Shape 2"/>
+          <p:cNvSpPr/>
+          <p:nvPr/>
+        </p:nvSpPr>
+        <p:spPr>
+          <a:xfrm>
+            <a:off x="640080" y="1920240"/>
+            <a:ext cx="10881360" cy="1371600"/>
+          </a:xfrm>
+          <a:prstGeom prst="roundRect">
+            <a:avLst>
+              <a:gd name="adj" fmla="val 4000"/>
+            </a:avLst>
+          </a:prstGeom>
+          <a:solidFill>
+            <a:srgbClr val="F7F8FA"/>
+          </a:solidFill>
+          <a:ln w="12700">
+            <a:solidFill>
+              <a:srgbClr val="DFE3EA"/>
+            </a:solidFill>
+            <a:prstDash val="solid"/>
+          </a:ln>
+          <a:effectLst>
+            <a:outerShdw sx="100000" sy="100000" kx="0" ky="0" algn="bl" rotWithShape="0" blurRad="152400" dist="38100" dir="5400000">
+              <a:srgbClr val="101B33">
+                <a:alpha val="7000"/>
+              </a:srgbClr>
+            </a:outerShdw>
+          </a:effectLst>
+        </p:spPr>
+      </p:sp>
+      <p:sp>
+        <p:nvSpPr>
+          <p:cNvPr id="5" name="Text 3"/>
+          <p:cNvSpPr/>
+          <p:nvPr/>
+        </p:nvSpPr>
+        <p:spPr>
+          <a:xfrm>
+            <a:off x="1005840" y="2148840"/>
+            <a:ext cx="1828800" cy="292608"/>
+          </a:xfrm>
+          <a:prstGeom prst="rect">
+            <a:avLst/>
+          </a:prstGeom>
+          <a:noFill/>
+          <a:ln/>
+        </p:spPr>
+        <p:txBody>
+          <a:bodyPr wrap="square" lIns="0" tIns="0" rIns="0" bIns="0" rtlCol="0" anchor="ctr"/>
+          <a:lstStyle/>
+          <a:p>
+            <a:pPr indent="0" marL="0">
+              <a:buNone/>
+            </a:pPr>
+            <a:r>
+              <a:rPr lang="en-US" sz="1200" b="1" dirty="0">
+                <a:solidFill>
+                  <a:srgbClr val="4A5262"/>
+                </a:solidFill>
+                <a:latin typeface="맑은 고딕" pitchFamily="34" charset="0"/>
+                <a:ea typeface="맑은 고딕" pitchFamily="34" charset="-122"/>
+                <a:cs typeface="맑은 고딕" pitchFamily="34" charset="-120"/>
+              </a:rPr>
+              <a:t>총 사업비</a:t>
+            </a:r>
+            <a:endParaRPr lang="en-US" sz="1200" dirty="0"/>
+          </a:p>
+        </p:txBody>
+      </p:sp>
+      <p:sp>
+        <p:nvSpPr>
+          <p:cNvPr id="6" name="Text 4"/>
+          <p:cNvSpPr/>
+          <p:nvPr/>
+        </p:nvSpPr>
+        <p:spPr>
+          <a:xfrm>
+            <a:off x="1005840" y="2450592"/>
+            <a:ext cx="2743200" cy="548640"/>
+          </a:xfrm>
+          <a:prstGeom prst="rect">
+            <a:avLst/>
+          </a:prstGeom>
+          <a:noFill/>
+          <a:ln/>
+        </p:spPr>
+        <p:txBody>
+          <a:bodyPr wrap="square" lIns="0" tIns="0" rIns="0" bIns="0" rtlCol="0" anchor="ctr"/>
+          <a:lstStyle/>
+          <a:p>
+            <a:pPr indent="0" marL="0">
+              <a:buNone/>
+            </a:pPr>
+            <a:r>
+              <a:rPr lang="en-US" sz="3000" b="1" dirty="0">
+                <a:solidFill>
+                  <a:srgbClr val="101B33"/>
+                </a:solidFill>
+                <a:latin typeface="맑은 고딕" pitchFamily="34" charset="0"/>
+                <a:ea typeface="맑은 고딕" pitchFamily="34" charset="-122"/>
+                <a:cs typeface="맑은 고딕" pitchFamily="34" charset="-120"/>
+              </a:rPr>
+              <a:t>4,000만원</a:t>
+            </a:r>
+            <a:endParaRPr lang="en-US" sz="3000" dirty="0"/>
+          </a:p>
+        </p:txBody>
+      </p:sp>
+      <p:sp>
+        <p:nvSpPr>
+          <p:cNvPr id="7" name="Shape 5"/>
+          <p:cNvSpPr/>
+          <p:nvPr/>
+        </p:nvSpPr>
+        <p:spPr>
+          <a:xfrm>
+            <a:off x="4206240" y="2395728"/>
+            <a:ext cx="5559552" cy="566928"/>
+          </a:xfrm>
+          <a:prstGeom prst="rect">
+            <a:avLst/>
+          </a:prstGeom>
+          <a:solidFill>
+            <a:srgbClr val="0075C9"/>
+          </a:solidFill>
+          <a:ln/>
+        </p:spPr>
+      </p:sp>
+      <p:sp>
+        <p:nvSpPr>
+          <p:cNvPr id="8" name="Shape 6"/>
+          <p:cNvSpPr/>
+          <p:nvPr/>
+        </p:nvSpPr>
+        <p:spPr>
+          <a:xfrm>
+            <a:off x="9765792" y="2395728"/>
+            <a:ext cx="1389888" cy="566928"/>
+          </a:xfrm>
+          <a:prstGeom prst="rect">
+            <a:avLst/>
+          </a:prstGeom>
+          <a:solidFill>
+            <a:srgbClr val="101B33"/>
+          </a:solidFill>
+          <a:ln/>
+        </p:spPr>
+      </p:sp>
+      <p:sp>
+        <p:nvSpPr>
+          <p:cNvPr id="9" name="Text 7"/>
+          <p:cNvSpPr/>
+          <p:nvPr/>
+        </p:nvSpPr>
+        <p:spPr>
+          <a:xfrm>
+            <a:off x="4352544" y="2395728"/>
+            <a:ext cx="5285232" cy="566928"/>
+          </a:xfrm>
+          <a:prstGeom prst="rect">
+            <a:avLst/>
+          </a:prstGeom>
+          <a:noFill/>
+          <a:ln/>
+        </p:spPr>
+        <p:txBody>
+          <a:bodyPr wrap="square" lIns="0" tIns="0" rIns="0" bIns="0" rtlCol="0" anchor="ctr"/>
+          <a:lstStyle/>
+          <a:p>
+            <a:pPr indent="0" marL="0">
+              <a:buNone/>
+            </a:pPr>
+            <a:r>
+              <a:rPr lang="en-US" sz="1250" b="1" dirty="0">
+                <a:solidFill>
+                  <a:srgbClr val="FFFFFF"/>
+                </a:solidFill>
+                <a:latin typeface="맑은 고딕" pitchFamily="34" charset="0"/>
+                <a:ea typeface="맑은 고딕" pitchFamily="34" charset="-122"/>
+                <a:cs typeface="맑은 고딕" pitchFamily="34" charset="-120"/>
+              </a:rPr>
+              <a:t>정부지원금 80%   3,200만원</a:t>
+            </a:r>
+            <a:endParaRPr lang="en-US" sz="1250" dirty="0"/>
+          </a:p>
+        </p:txBody>
+      </p:sp>
+      <p:sp>
+        <p:nvSpPr>
+          <p:cNvPr id="10" name="Text 8"/>
+          <p:cNvSpPr/>
+          <p:nvPr/>
+        </p:nvSpPr>
+        <p:spPr>
+          <a:xfrm>
+            <a:off x="9875520" y="2377440"/>
+            <a:ext cx="1389888" cy="603504"/>
+          </a:xfrm>
+          <a:prstGeom prst="rect">
+            <a:avLst/>
+          </a:prstGeom>
+          <a:noFill/>
+          <a:ln/>
+        </p:spPr>
+        <p:txBody>
+          <a:bodyPr wrap="square" lIns="0" tIns="0" rIns="0" bIns="0" rtlCol="0" anchor="ctr"/>
+          <a:lstStyle/>
+          <a:p>
+            <a:pPr indent="0" marL="0">
+              <a:lnSpc>
+                <a:spcPts val="1100"/>
+              </a:lnSpc>
+              <a:buNone/>
+            </a:pPr>
+            <a:r>
+              <a:rPr lang="en-US" sz="950" b="1" dirty="0">
+                <a:solidFill>
+                  <a:srgbClr val="FFFFFF"/>
+                </a:solidFill>
+                <a:latin typeface="맑은 고딕" pitchFamily="34" charset="0"/>
+                <a:ea typeface="맑은 고딕" pitchFamily="34" charset="-122"/>
+                <a:cs typeface="맑은 고딕" pitchFamily="34" charset="-120"/>
+              </a:rPr>
+              <a:t>대응자금 20%</a:t>
+            </a:r>
+            <a:endParaRPr lang="en-US" sz="950" dirty="0"/>
+          </a:p>
+          <a:p>
+            <a:pPr indent="0" marL="0">
+              <a:lnSpc>
+                <a:spcPts val="1100"/>
+              </a:lnSpc>
+              <a:buNone/>
+            </a:pPr>
+            <a:r>
+              <a:rPr lang="en-US" sz="950" b="1" dirty="0">
+                <a:solidFill>
+                  <a:srgbClr val="FFFFFF"/>
+                </a:solidFill>
+                <a:latin typeface="맑은 고딕" pitchFamily="34" charset="0"/>
+                <a:ea typeface="맑은 고딕" pitchFamily="34" charset="-122"/>
+                <a:cs typeface="맑은 고딕" pitchFamily="34" charset="-120"/>
+              </a:rPr>
+              <a:t>800만원</a:t>
+            </a:r>
+            <a:endParaRPr lang="en-US" sz="950" dirty="0"/>
+          </a:p>
+        </p:txBody>
+      </p:sp>
+      <p:sp>
+        <p:nvSpPr>
+          <p:cNvPr id="11" name="Text 9"/>
+          <p:cNvSpPr/>
+          <p:nvPr/>
+        </p:nvSpPr>
+        <p:spPr>
+          <a:xfrm>
+            <a:off x="4206240" y="3054096"/>
+            <a:ext cx="6949440" cy="274320"/>
+          </a:xfrm>
+          <a:prstGeom prst="rect">
+            <a:avLst/>
+          </a:prstGeom>
+          <a:noFill/>
+          <a:ln/>
+        </p:spPr>
+        <p:txBody>
+          <a:bodyPr wrap="square" lIns="0" tIns="0" rIns="0" bIns="0" rtlCol="0" anchor="ctr"/>
+          <a:lstStyle/>
+          <a:p>
+            <a:pPr indent="0" marL="0">
+              <a:buNone/>
+            </a:pPr>
+            <a:r>
+              <a:rPr lang="en-US" sz="950" dirty="0">
+                <a:solidFill>
+                  <a:srgbClr val="4A5262"/>
+                </a:solidFill>
+                <a:latin typeface="맑은 고딕" pitchFamily="34" charset="0"/>
+                <a:ea typeface="맑은 고딕" pitchFamily="34" charset="-122"/>
+                <a:cs typeface="맑은 고딕" pitchFamily="34" charset="-120"/>
+              </a:rPr>
+              <a:t>대응자금은 현금 또는 현물. 현물은 대표자·기 고용 인력 인건비, 사무실 임차료, 이행보증보험증권 수수료.</a:t>
+            </a:r>
+            <a:endParaRPr lang="en-US" sz="950" dirty="0"/>
+          </a:p>
+        </p:txBody>
+      </p:sp>
+      <p:sp>
+        <p:nvSpPr>
+          <p:cNvPr id="12" name="Text 10"/>
+          <p:cNvSpPr/>
+          <p:nvPr/>
+        </p:nvSpPr>
+        <p:spPr>
+          <a:xfrm>
+            <a:off x="640080" y="3346704"/>
+            <a:ext cx="5486400" cy="237744"/>
+          </a:xfrm>
+          <a:prstGeom prst="rect">
+            <a:avLst/>
+          </a:prstGeom>
+          <a:noFill/>
+          <a:ln/>
+        </p:spPr>
+        <p:txBody>
+          <a:bodyPr wrap="square" lIns="0" tIns="0" rIns="0" bIns="0" rtlCol="0" anchor="ctr"/>
+          <a:lstStyle/>
+          <a:p>
+            <a:pPr indent="0" marL="0">
+              <a:buNone/>
+            </a:pPr>
+            <a:r>
+              <a:rPr lang="en-US" sz="1100" b="1" dirty="0">
+                <a:solidFill>
+                  <a:srgbClr val="0075C9"/>
+                </a:solidFill>
+                <a:latin typeface="맑은 고딕" pitchFamily="34" charset="0"/>
+                <a:ea typeface="맑은 고딕" pitchFamily="34" charset="-122"/>
+                <a:cs typeface="맑은 고딕" pitchFamily="34" charset="-120"/>
+              </a:rPr>
+              <a:t>정부지원금 비목별 배분</a:t>
+            </a:r>
+            <a:endParaRPr lang="en-US" sz="1100" dirty="0"/>
+          </a:p>
+        </p:txBody>
+      </p:sp>
+      <p:sp>
+        <p:nvSpPr>
+          <p:cNvPr id="13" name="Text 11"/>
+          <p:cNvSpPr/>
+          <p:nvPr/>
+        </p:nvSpPr>
+        <p:spPr>
+          <a:xfrm>
+            <a:off x="685800" y="3621024"/>
+            <a:ext cx="2103120" cy="286512"/>
+          </a:xfrm>
+          <a:prstGeom prst="rect">
+            <a:avLst/>
+          </a:prstGeom>
+          <a:noFill/>
+          <a:ln/>
+        </p:spPr>
+        <p:txBody>
+          <a:bodyPr wrap="square" lIns="0" tIns="0" rIns="0" bIns="0" rtlCol="0" anchor="ctr"/>
+          <a:lstStyle/>
+          <a:p>
+            <a:pPr indent="0" marL="0">
+              <a:buNone/>
+            </a:pPr>
+            <a:r>
+              <a:rPr lang="en-US" sz="900" b="1" dirty="0">
+                <a:solidFill>
+                  <a:srgbClr val="101B33"/>
+                </a:solidFill>
+                <a:latin typeface="맑은 고딕" pitchFamily="34" charset="0"/>
+                <a:ea typeface="맑은 고딕" pitchFamily="34" charset="-122"/>
+                <a:cs typeface="맑은 고딕" pitchFamily="34" charset="-120"/>
+              </a:rPr>
+              <a:t>제품·서비스 고도화</a:t>
+            </a:r>
+            <a:endParaRPr lang="en-US" sz="900" dirty="0"/>
+          </a:p>
+        </p:txBody>
+      </p:sp>
+      <p:sp>
+        <p:nvSpPr>
+          <p:cNvPr id="14" name="Text 12"/>
+          <p:cNvSpPr/>
+          <p:nvPr/>
+        </p:nvSpPr>
+        <p:spPr>
+          <a:xfrm>
+            <a:off x="2834640" y="3621024"/>
+            <a:ext cx="4663440" cy="286512"/>
+          </a:xfrm>
+          <a:prstGeom prst="rect">
+            <a:avLst/>
+          </a:prstGeom>
+          <a:noFill/>
+          <a:ln/>
+        </p:spPr>
+        <p:txBody>
+          <a:bodyPr wrap="square" lIns="0" tIns="0" rIns="0" bIns="0" rtlCol="0" anchor="ctr"/>
+          <a:lstStyle/>
+          <a:p>
+            <a:pPr indent="0" marL="0">
+              <a:buNone/>
+            </a:pPr>
+            <a:r>
+              <a:rPr lang="en-US" sz="900" dirty="0">
+                <a:solidFill>
+                  <a:srgbClr val="4A5262"/>
+                </a:solidFill>
+                <a:latin typeface="맑은 고딕" pitchFamily="34" charset="0"/>
+                <a:ea typeface="맑은 고딕" pitchFamily="34" charset="-122"/>
+                <a:cs typeface="맑은 고딕" pitchFamily="34" charset="-120"/>
+              </a:rPr>
+              <a:t>온 미디어아트 에디트 고도화 외주</a:t>
+            </a:r>
+            <a:endParaRPr lang="en-US" sz="900" dirty="0"/>
+          </a:p>
+        </p:txBody>
+      </p:sp>
+      <p:sp>
+        <p:nvSpPr>
+          <p:cNvPr id="15" name="Shape 13"/>
+          <p:cNvSpPr/>
+          <p:nvPr/>
+        </p:nvSpPr>
+        <p:spPr>
+          <a:xfrm>
+            <a:off x="7635240" y="3700272"/>
+            <a:ext cx="2377440" cy="128016"/>
+          </a:xfrm>
+          <a:prstGeom prst="rect">
+            <a:avLst/>
+          </a:prstGeom>
+          <a:solidFill>
+            <a:srgbClr val="0075C9"/>
+          </a:solidFill>
+          <a:ln/>
+        </p:spPr>
+      </p:sp>
+      <p:sp>
+        <p:nvSpPr>
+          <p:cNvPr id="16" name="Text 14"/>
+          <p:cNvSpPr/>
+          <p:nvPr/>
+        </p:nvSpPr>
+        <p:spPr>
+          <a:xfrm>
+            <a:off x="10104120" y="3621024"/>
+            <a:ext cx="1371600" cy="286512"/>
+          </a:xfrm>
+          <a:prstGeom prst="rect">
+            <a:avLst/>
+          </a:prstGeom>
+          <a:noFill/>
+          <a:ln/>
+        </p:spPr>
+        <p:txBody>
+          <a:bodyPr wrap="square" lIns="0" tIns="0" rIns="0" bIns="0" rtlCol="0" anchor="ctr"/>
+          <a:lstStyle/>
+          <a:p>
+            <a:pPr algn="r" indent="0" marL="0">
+              <a:buNone/>
+            </a:pPr>
+            <a:r>
+              <a:rPr lang="en-US" sz="900" b="1" dirty="0">
+                <a:solidFill>
+                  <a:srgbClr val="101B33"/>
+                </a:solidFill>
+                <a:latin typeface="맑은 고딕" pitchFamily="34" charset="0"/>
+                <a:ea typeface="맑은 고딕" pitchFamily="34" charset="-122"/>
+                <a:cs typeface="맑은 고딕" pitchFamily="34" charset="-120"/>
+              </a:rPr>
+              <a:t>960만원</a:t>
+            </a:r>
+            <a:endParaRPr lang="en-US" sz="900" dirty="0"/>
+          </a:p>
+        </p:txBody>
+      </p:sp>
+      <p:sp>
+        <p:nvSpPr>
+          <p:cNvPr id="17" name="Shape 15"/>
+          <p:cNvSpPr/>
+          <p:nvPr/>
+        </p:nvSpPr>
+        <p:spPr>
+          <a:xfrm>
+            <a:off x="685800" y="3907536"/>
+            <a:ext cx="10789920" cy="0"/>
+          </a:xfrm>
+          <a:prstGeom prst="line">
+            <a:avLst/>
+          </a:prstGeom>
+          <a:noFill/>
+          <a:ln w="12700">
+            <a:solidFill>
+              <a:srgbClr val="DFE3EA"/>
+            </a:solidFill>
+            <a:prstDash val="solid"/>
+          </a:ln>
+        </p:spPr>
+      </p:sp>
+      <p:sp>
+        <p:nvSpPr>
+          <p:cNvPr id="18" name="Text 16"/>
+          <p:cNvSpPr/>
+          <p:nvPr/>
+        </p:nvSpPr>
+        <p:spPr>
+          <a:xfrm>
+            <a:off x="685800" y="3907536"/>
+            <a:ext cx="2103120" cy="286512"/>
+          </a:xfrm>
+          <a:prstGeom prst="rect">
+            <a:avLst/>
+          </a:prstGeom>
+          <a:noFill/>
+          <a:ln/>
+        </p:spPr>
+        <p:txBody>
+          <a:bodyPr wrap="square" lIns="0" tIns="0" rIns="0" bIns="0" rtlCol="0" anchor="ctr"/>
+          <a:lstStyle/>
+          <a:p>
+            <a:pPr indent="0" marL="0">
+              <a:buNone/>
+            </a:pPr>
+            <a:r>
+              <a:rPr lang="en-US" sz="900" b="1" dirty="0">
+                <a:solidFill>
+                  <a:srgbClr val="101B33"/>
+                </a:solidFill>
+                <a:latin typeface="맑은 고딕" pitchFamily="34" charset="0"/>
+                <a:ea typeface="맑은 고딕" pitchFamily="34" charset="-122"/>
+                <a:cs typeface="맑은 고딕" pitchFamily="34" charset="-120"/>
+              </a:rPr>
+              <a:t>AI 활용 도입</a:t>
+            </a:r>
+            <a:endParaRPr lang="en-US" sz="900" dirty="0"/>
+          </a:p>
+        </p:txBody>
+      </p:sp>
+      <p:sp>
+        <p:nvSpPr>
+          <p:cNvPr id="19" name="Text 17"/>
+          <p:cNvSpPr/>
+          <p:nvPr/>
+        </p:nvSpPr>
+        <p:spPr>
+          <a:xfrm>
+            <a:off x="2834640" y="3907536"/>
+            <a:ext cx="4663440" cy="286512"/>
+          </a:xfrm>
+          <a:prstGeom prst="rect">
+            <a:avLst/>
+          </a:prstGeom>
+          <a:noFill/>
+          <a:ln/>
+        </p:spPr>
+        <p:txBody>
+          <a:bodyPr wrap="square" lIns="0" tIns="0" rIns="0" bIns="0" rtlCol="0" anchor="ctr"/>
+          <a:lstStyle/>
+          <a:p>
+            <a:pPr indent="0" marL="0">
+              <a:buNone/>
+            </a:pPr>
+            <a:r>
+              <a:rPr lang="en-US" sz="900" dirty="0">
+                <a:solidFill>
+                  <a:srgbClr val="4A5262"/>
+                </a:solidFill>
+                <a:latin typeface="맑은 고딕" pitchFamily="34" charset="0"/>
+                <a:ea typeface="맑은 고딕" pitchFamily="34" charset="-122"/>
+                <a:cs typeface="맑은 고딕" pitchFamily="34" charset="-120"/>
+              </a:rPr>
+              <a:t>공공 API · 기관 DB 연동 모듈</a:t>
+            </a:r>
+            <a:endParaRPr lang="en-US" sz="900" dirty="0"/>
+          </a:p>
+        </p:txBody>
+      </p:sp>
+      <p:sp>
+        <p:nvSpPr>
+          <p:cNvPr id="20" name="Shape 18"/>
+          <p:cNvSpPr/>
+          <p:nvPr/>
+        </p:nvSpPr>
+        <p:spPr>
+          <a:xfrm>
+            <a:off x="7635240" y="3986784"/>
+            <a:ext cx="1426464" cy="128016"/>
+          </a:xfrm>
+          <a:prstGeom prst="rect">
+            <a:avLst/>
+          </a:prstGeom>
+          <a:solidFill>
+            <a:srgbClr val="0075C9"/>
+          </a:solidFill>
+          <a:ln/>
+        </p:spPr>
+      </p:sp>
+      <p:sp>
+        <p:nvSpPr>
+          <p:cNvPr id="21" name="Text 19"/>
+          <p:cNvSpPr/>
+          <p:nvPr/>
+        </p:nvSpPr>
+        <p:spPr>
+          <a:xfrm>
+            <a:off x="10104120" y="3907536"/>
+            <a:ext cx="1371600" cy="286512"/>
+          </a:xfrm>
+          <a:prstGeom prst="rect">
+            <a:avLst/>
+          </a:prstGeom>
+          <a:noFill/>
+          <a:ln/>
+        </p:spPr>
+        <p:txBody>
+          <a:bodyPr wrap="square" lIns="0" tIns="0" rIns="0" bIns="0" rtlCol="0" anchor="ctr"/>
+          <a:lstStyle/>
+          <a:p>
+            <a:pPr algn="r" indent="0" marL="0">
+              <a:buNone/>
+            </a:pPr>
+            <a:r>
+              <a:rPr lang="en-US" sz="900" b="1" dirty="0">
+                <a:solidFill>
+                  <a:srgbClr val="101B33"/>
+                </a:solidFill>
+                <a:latin typeface="맑은 고딕" pitchFamily="34" charset="0"/>
+                <a:ea typeface="맑은 고딕" pitchFamily="34" charset="-122"/>
+                <a:cs typeface="맑은 고딕" pitchFamily="34" charset="-120"/>
+              </a:rPr>
+              <a:t>576만원</a:t>
+            </a:r>
+            <a:endParaRPr lang="en-US" sz="900" dirty="0"/>
+          </a:p>
+        </p:txBody>
+      </p:sp>
+      <p:sp>
+        <p:nvSpPr>
+          <p:cNvPr id="22" name="Shape 20"/>
+          <p:cNvSpPr/>
+          <p:nvPr/>
+        </p:nvSpPr>
+        <p:spPr>
+          <a:xfrm>
+            <a:off x="685800" y="4194048"/>
+            <a:ext cx="10789920" cy="0"/>
+          </a:xfrm>
+          <a:prstGeom prst="line">
+            <a:avLst/>
+          </a:prstGeom>
+          <a:noFill/>
+          <a:ln w="12700">
+            <a:solidFill>
+              <a:srgbClr val="DFE3EA"/>
+            </a:solidFill>
+            <a:prstDash val="solid"/>
+          </a:ln>
+        </p:spPr>
+      </p:sp>
+      <p:sp>
+        <p:nvSpPr>
+          <p:cNvPr id="23" name="Text 21"/>
+          <p:cNvSpPr/>
+          <p:nvPr/>
+        </p:nvSpPr>
+        <p:spPr>
+          <a:xfrm>
+            <a:off x="685800" y="4194048"/>
+            <a:ext cx="2103120" cy="286512"/>
+          </a:xfrm>
+          <a:prstGeom prst="rect">
+            <a:avLst/>
+          </a:prstGeom>
+          <a:noFill/>
+          <a:ln/>
+        </p:spPr>
+        <p:txBody>
+          <a:bodyPr wrap="square" lIns="0" tIns="0" rIns="0" bIns="0" rtlCol="0" anchor="ctr"/>
+          <a:lstStyle/>
+          <a:p>
+            <a:pPr indent="0" marL="0">
+              <a:buNone/>
+            </a:pPr>
+            <a:r>
+              <a:rPr lang="en-US" sz="900" b="1" dirty="0">
+                <a:solidFill>
+                  <a:srgbClr val="101B33"/>
+                </a:solidFill>
+                <a:latin typeface="맑은 고딕" pitchFamily="34" charset="0"/>
+                <a:ea typeface="맑은 고딕" pitchFamily="34" charset="-122"/>
+                <a:cs typeface="맑은 고딕" pitchFamily="34" charset="-120"/>
+              </a:rPr>
+              <a:t>홍보비</a:t>
+            </a:r>
+            <a:endParaRPr lang="en-US" sz="900" dirty="0"/>
+          </a:p>
+        </p:txBody>
+      </p:sp>
+      <p:sp>
+        <p:nvSpPr>
+          <p:cNvPr id="24" name="Text 22"/>
+          <p:cNvSpPr/>
+          <p:nvPr/>
+        </p:nvSpPr>
+        <p:spPr>
+          <a:xfrm>
+            <a:off x="2834640" y="4194048"/>
+            <a:ext cx="4663440" cy="286512"/>
+          </a:xfrm>
+          <a:prstGeom prst="rect">
+            <a:avLst/>
+          </a:prstGeom>
+          <a:noFill/>
+          <a:ln/>
+        </p:spPr>
+        <p:txBody>
+          <a:bodyPr wrap="square" lIns="0" tIns="0" rIns="0" bIns="0" rtlCol="0" anchor="ctr"/>
+          <a:lstStyle/>
+          <a:p>
+            <a:pPr indent="0" marL="0">
+              <a:buNone/>
+            </a:pPr>
+            <a:r>
+              <a:rPr lang="en-US" sz="900" dirty="0">
+                <a:solidFill>
+                  <a:srgbClr val="4A5262"/>
+                </a:solidFill>
+                <a:latin typeface="맑은 고딕" pitchFamily="34" charset="0"/>
+                <a:ea typeface="맑은 고딕" pitchFamily="34" charset="-122"/>
+                <a:cs typeface="맑은 고딕" pitchFamily="34" charset="-120"/>
+              </a:rPr>
+              <a:t>다국어 홍보 시퀀스 확장 · 현지 감수</a:t>
+            </a:r>
+            <a:endParaRPr lang="en-US" sz="900" dirty="0"/>
+          </a:p>
+        </p:txBody>
+      </p:sp>
+      <p:sp>
+        <p:nvSpPr>
+          <p:cNvPr id="25" name="Shape 23"/>
+          <p:cNvSpPr/>
+          <p:nvPr/>
+        </p:nvSpPr>
+        <p:spPr>
+          <a:xfrm>
+            <a:off x="7635240" y="4273296"/>
+            <a:ext cx="554736" cy="128016"/>
+          </a:xfrm>
+          <a:prstGeom prst="rect">
+            <a:avLst/>
+          </a:prstGeom>
+          <a:solidFill>
+            <a:srgbClr val="0075C9"/>
+          </a:solidFill>
+          <a:ln/>
+        </p:spPr>
+      </p:sp>
+      <p:sp>
+        <p:nvSpPr>
+          <p:cNvPr id="26" name="Text 24"/>
+          <p:cNvSpPr/>
+          <p:nvPr/>
+        </p:nvSpPr>
+        <p:spPr>
+          <a:xfrm>
+            <a:off x="10104120" y="4194048"/>
+            <a:ext cx="1371600" cy="286512"/>
+          </a:xfrm>
+          <a:prstGeom prst="rect">
+            <a:avLst/>
+          </a:prstGeom>
+          <a:noFill/>
+          <a:ln/>
+        </p:spPr>
+        <p:txBody>
+          <a:bodyPr wrap="square" lIns="0" tIns="0" rIns="0" bIns="0" rtlCol="0" anchor="ctr"/>
+          <a:lstStyle/>
+          <a:p>
+            <a:pPr algn="r" indent="0" marL="0">
+              <a:buNone/>
+            </a:pPr>
+            <a:r>
+              <a:rPr lang="en-US" sz="900" b="1" dirty="0">
+                <a:solidFill>
+                  <a:srgbClr val="101B33"/>
+                </a:solidFill>
+                <a:latin typeface="맑은 고딕" pitchFamily="34" charset="0"/>
+                <a:ea typeface="맑은 고딕" pitchFamily="34" charset="-122"/>
+                <a:cs typeface="맑은 고딕" pitchFamily="34" charset="-120"/>
+              </a:rPr>
+              <a:t>224만원</a:t>
+            </a:r>
+            <a:endParaRPr lang="en-US" sz="900" dirty="0"/>
+          </a:p>
+        </p:txBody>
+      </p:sp>
+      <p:sp>
+        <p:nvSpPr>
+          <p:cNvPr id="27" name="Shape 25"/>
+          <p:cNvSpPr/>
+          <p:nvPr/>
+        </p:nvSpPr>
+        <p:spPr>
+          <a:xfrm>
+            <a:off x="685800" y="4480560"/>
+            <a:ext cx="10789920" cy="0"/>
+          </a:xfrm>
+          <a:prstGeom prst="line">
+            <a:avLst/>
+          </a:prstGeom>
+          <a:noFill/>
+          <a:ln w="12700">
+            <a:solidFill>
+              <a:srgbClr val="DFE3EA"/>
+            </a:solidFill>
+            <a:prstDash val="solid"/>
+          </a:ln>
+        </p:spPr>
+      </p:sp>
+      <p:sp>
+        <p:nvSpPr>
+          <p:cNvPr id="28" name="Text 26"/>
+          <p:cNvSpPr/>
+          <p:nvPr/>
+        </p:nvSpPr>
+        <p:spPr>
+          <a:xfrm>
+            <a:off x="685800" y="4480560"/>
+            <a:ext cx="2103120" cy="286512"/>
+          </a:xfrm>
+          <a:prstGeom prst="rect">
+            <a:avLst/>
+          </a:prstGeom>
+          <a:noFill/>
+          <a:ln/>
+        </p:spPr>
+        <p:txBody>
+          <a:bodyPr wrap="square" lIns="0" tIns="0" rIns="0" bIns="0" rtlCol="0" anchor="ctr"/>
+          <a:lstStyle/>
+          <a:p>
+            <a:pPr indent="0" marL="0">
+              <a:buNone/>
+            </a:pPr>
+            <a:r>
+              <a:rPr lang="en-US" sz="900" b="1" dirty="0">
+                <a:solidFill>
+                  <a:srgbClr val="101B33"/>
+                </a:solidFill>
+                <a:latin typeface="맑은 고딕" pitchFamily="34" charset="0"/>
+                <a:ea typeface="맑은 고딕" pitchFamily="34" charset="-122"/>
+                <a:cs typeface="맑은 고딕" pitchFamily="34" charset="-120"/>
+              </a:rPr>
+              <a:t>수수료및사용료</a:t>
+            </a:r>
+            <a:endParaRPr lang="en-US" sz="900" dirty="0"/>
+          </a:p>
+        </p:txBody>
+      </p:sp>
+      <p:sp>
+        <p:nvSpPr>
+          <p:cNvPr id="29" name="Text 27"/>
+          <p:cNvSpPr/>
+          <p:nvPr/>
+        </p:nvSpPr>
+        <p:spPr>
+          <a:xfrm>
+            <a:off x="2834640" y="4480560"/>
+            <a:ext cx="4663440" cy="286512"/>
+          </a:xfrm>
+          <a:prstGeom prst="rect">
+            <a:avLst/>
+          </a:prstGeom>
+          <a:noFill/>
+          <a:ln/>
+        </p:spPr>
+        <p:txBody>
+          <a:bodyPr wrap="square" lIns="0" tIns="0" rIns="0" bIns="0" rtlCol="0" anchor="ctr"/>
+          <a:lstStyle/>
+          <a:p>
+            <a:pPr indent="0" marL="0">
+              <a:buNone/>
+            </a:pPr>
+            <a:r>
+              <a:rPr lang="en-US" sz="900" dirty="0">
+                <a:solidFill>
+                  <a:srgbClr val="4A5262"/>
+                </a:solidFill>
+                <a:latin typeface="맑은 고딕" pitchFamily="34" charset="0"/>
+                <a:ea typeface="맑은 고딕" pitchFamily="34" charset="-122"/>
+                <a:cs typeface="맑은 고딕" pitchFamily="34" charset="-120"/>
+              </a:rPr>
+              <a:t>AI 솔루션 이용료 · 라이선스 · 구독료</a:t>
+            </a:r>
+            <a:endParaRPr lang="en-US" sz="900" dirty="0"/>
+          </a:p>
+        </p:txBody>
+      </p:sp>
+      <p:sp>
+        <p:nvSpPr>
+          <p:cNvPr id="30" name="Shape 28"/>
+          <p:cNvSpPr/>
+          <p:nvPr/>
+        </p:nvSpPr>
+        <p:spPr>
+          <a:xfrm>
+            <a:off x="7635240" y="4559808"/>
+            <a:ext cx="950976" cy="128016"/>
+          </a:xfrm>
+          <a:prstGeom prst="rect">
+            <a:avLst/>
+          </a:prstGeom>
+          <a:solidFill>
+            <a:srgbClr val="0075C9"/>
+          </a:solidFill>
+          <a:ln/>
+        </p:spPr>
+      </p:sp>
+      <p:sp>
+        <p:nvSpPr>
+          <p:cNvPr id="31" name="Text 29"/>
+          <p:cNvSpPr/>
+          <p:nvPr/>
+        </p:nvSpPr>
+        <p:spPr>
+          <a:xfrm>
+            <a:off x="10104120" y="4480560"/>
+            <a:ext cx="1371600" cy="286512"/>
+          </a:xfrm>
+          <a:prstGeom prst="rect">
+            <a:avLst/>
+          </a:prstGeom>
+          <a:noFill/>
+          <a:ln/>
+        </p:spPr>
+        <p:txBody>
+          <a:bodyPr wrap="square" lIns="0" tIns="0" rIns="0" bIns="0" rtlCol="0" anchor="ctr"/>
+          <a:lstStyle/>
+          <a:p>
+            <a:pPr algn="r" indent="0" marL="0">
+              <a:buNone/>
+            </a:pPr>
+            <a:r>
+              <a:rPr lang="en-US" sz="900" b="1" dirty="0">
+                <a:solidFill>
+                  <a:srgbClr val="101B33"/>
+                </a:solidFill>
+                <a:latin typeface="맑은 고딕" pitchFamily="34" charset="0"/>
+                <a:ea typeface="맑은 고딕" pitchFamily="34" charset="-122"/>
+                <a:cs typeface="맑은 고딕" pitchFamily="34" charset="-120"/>
+              </a:rPr>
+              <a:t>384만원</a:t>
+            </a:r>
+            <a:endParaRPr lang="en-US" sz="900" dirty="0"/>
+          </a:p>
+        </p:txBody>
+      </p:sp>
+      <p:sp>
+        <p:nvSpPr>
+          <p:cNvPr id="32" name="Shape 30"/>
+          <p:cNvSpPr/>
+          <p:nvPr/>
+        </p:nvSpPr>
+        <p:spPr>
+          <a:xfrm>
+            <a:off x="685800" y="4767072"/>
+            <a:ext cx="10789920" cy="0"/>
+          </a:xfrm>
+          <a:prstGeom prst="line">
+            <a:avLst/>
+          </a:prstGeom>
+          <a:noFill/>
+          <a:ln w="12700">
+            <a:solidFill>
+              <a:srgbClr val="DFE3EA"/>
+            </a:solidFill>
+            <a:prstDash val="solid"/>
+          </a:ln>
+        </p:spPr>
+      </p:sp>
+      <p:sp>
+        <p:nvSpPr>
+          <p:cNvPr id="33" name="Text 31"/>
+          <p:cNvSpPr/>
+          <p:nvPr/>
+        </p:nvSpPr>
+        <p:spPr>
+          <a:xfrm>
+            <a:off x="685800" y="4767072"/>
+            <a:ext cx="2103120" cy="286512"/>
+          </a:xfrm>
+          <a:prstGeom prst="rect">
+            <a:avLst/>
+          </a:prstGeom>
+          <a:noFill/>
+          <a:ln/>
+        </p:spPr>
+        <p:txBody>
+          <a:bodyPr wrap="square" lIns="0" tIns="0" rIns="0" bIns="0" rtlCol="0" anchor="ctr"/>
+          <a:lstStyle/>
+          <a:p>
+            <a:pPr indent="0" marL="0">
+              <a:buNone/>
+            </a:pPr>
+            <a:r>
+              <a:rPr lang="en-US" sz="900" b="1" dirty="0">
+                <a:solidFill>
+                  <a:srgbClr val="101B33"/>
+                </a:solidFill>
+                <a:latin typeface="맑은 고딕" pitchFamily="34" charset="0"/>
+                <a:ea typeface="맑은 고딕" pitchFamily="34" charset="-122"/>
+                <a:cs typeface="맑은 고딕" pitchFamily="34" charset="-120"/>
+              </a:rPr>
+              <a:t>수수료및사용료</a:t>
+            </a:r>
+            <a:endParaRPr lang="en-US" sz="900" dirty="0"/>
+          </a:p>
+        </p:txBody>
+      </p:sp>
+      <p:sp>
+        <p:nvSpPr>
+          <p:cNvPr id="34" name="Text 32"/>
+          <p:cNvSpPr/>
+          <p:nvPr/>
+        </p:nvSpPr>
+        <p:spPr>
+          <a:xfrm>
+            <a:off x="2834640" y="4767072"/>
+            <a:ext cx="4663440" cy="286512"/>
+          </a:xfrm>
+          <a:prstGeom prst="rect">
+            <a:avLst/>
+          </a:prstGeom>
+          <a:noFill/>
+          <a:ln/>
+        </p:spPr>
+        <p:txBody>
+          <a:bodyPr wrap="square" lIns="0" tIns="0" rIns="0" bIns="0" rtlCol="0" anchor="ctr"/>
+          <a:lstStyle/>
+          <a:p>
+            <a:pPr indent="0" marL="0">
+              <a:buNone/>
+            </a:pPr>
+            <a:r>
+              <a:rPr lang="en-US" sz="900" dirty="0">
+                <a:solidFill>
+                  <a:srgbClr val="4A5262"/>
+                </a:solidFill>
+                <a:latin typeface="맑은 고딕" pitchFamily="34" charset="0"/>
+                <a:ea typeface="맑은 고딕" pitchFamily="34" charset="-122"/>
+                <a:cs typeface="맑은 고딕" pitchFamily="34" charset="-120"/>
+              </a:rPr>
+              <a:t>산업재산권 출원등록</a:t>
+            </a:r>
+            <a:endParaRPr lang="en-US" sz="900" dirty="0"/>
+          </a:p>
+        </p:txBody>
+      </p:sp>
+      <p:sp>
+        <p:nvSpPr>
+          <p:cNvPr id="35" name="Shape 33"/>
+          <p:cNvSpPr/>
+          <p:nvPr/>
+        </p:nvSpPr>
+        <p:spPr>
+          <a:xfrm>
+            <a:off x="7635240" y="4846320"/>
+            <a:ext cx="396240" cy="128016"/>
+          </a:xfrm>
+          <a:prstGeom prst="rect">
+            <a:avLst/>
+          </a:prstGeom>
+          <a:solidFill>
+            <a:srgbClr val="0075C9"/>
+          </a:solidFill>
+          <a:ln/>
+        </p:spPr>
+      </p:sp>
+      <p:sp>
+        <p:nvSpPr>
+          <p:cNvPr id="36" name="Text 34"/>
+          <p:cNvSpPr/>
+          <p:nvPr/>
+        </p:nvSpPr>
+        <p:spPr>
+          <a:xfrm>
+            <a:off x="10104120" y="4767072"/>
+            <a:ext cx="1371600" cy="286512"/>
+          </a:xfrm>
+          <a:prstGeom prst="rect">
+            <a:avLst/>
+          </a:prstGeom>
+          <a:noFill/>
+          <a:ln/>
+        </p:spPr>
+        <p:txBody>
+          <a:bodyPr wrap="square" lIns="0" tIns="0" rIns="0" bIns="0" rtlCol="0" anchor="ctr"/>
+          <a:lstStyle/>
+          <a:p>
+            <a:pPr algn="r" indent="0" marL="0">
+              <a:buNone/>
+            </a:pPr>
+            <a:r>
+              <a:rPr lang="en-US" sz="900" b="1" dirty="0">
+                <a:solidFill>
+                  <a:srgbClr val="101B33"/>
+                </a:solidFill>
+                <a:latin typeface="맑은 고딕" pitchFamily="34" charset="0"/>
+                <a:ea typeface="맑은 고딕" pitchFamily="34" charset="-122"/>
+                <a:cs typeface="맑은 고딕" pitchFamily="34" charset="-120"/>
+              </a:rPr>
+              <a:t>160만원</a:t>
+            </a:r>
+            <a:endParaRPr lang="en-US" sz="900" dirty="0"/>
+          </a:p>
+        </p:txBody>
+      </p:sp>
+      <p:sp>
+        <p:nvSpPr>
+          <p:cNvPr id="37" name="Shape 35"/>
+          <p:cNvSpPr/>
+          <p:nvPr/>
+        </p:nvSpPr>
+        <p:spPr>
+          <a:xfrm>
+            <a:off x="685800" y="5053584"/>
+            <a:ext cx="10789920" cy="0"/>
+          </a:xfrm>
+          <a:prstGeom prst="line">
+            <a:avLst/>
+          </a:prstGeom>
+          <a:noFill/>
+          <a:ln w="12700">
+            <a:solidFill>
+              <a:srgbClr val="DFE3EA"/>
+            </a:solidFill>
+            <a:prstDash val="solid"/>
+          </a:ln>
+        </p:spPr>
+      </p:sp>
+      <p:sp>
+        <p:nvSpPr>
+          <p:cNvPr id="38" name="Text 36"/>
+          <p:cNvSpPr/>
+          <p:nvPr/>
+        </p:nvSpPr>
+        <p:spPr>
+          <a:xfrm>
+            <a:off x="685800" y="5053584"/>
+            <a:ext cx="2103120" cy="286512"/>
+          </a:xfrm>
+          <a:prstGeom prst="rect">
+            <a:avLst/>
+          </a:prstGeom>
+          <a:noFill/>
+          <a:ln/>
+        </p:spPr>
+        <p:txBody>
+          <a:bodyPr wrap="square" lIns="0" tIns="0" rIns="0" bIns="0" rtlCol="0" anchor="ctr"/>
+          <a:lstStyle/>
+          <a:p>
+            <a:pPr indent="0" marL="0">
+              <a:buNone/>
+            </a:pPr>
+            <a:r>
+              <a:rPr lang="en-US" sz="900" b="1" dirty="0">
+                <a:solidFill>
+                  <a:srgbClr val="101B33"/>
+                </a:solidFill>
+                <a:latin typeface="맑은 고딕" pitchFamily="34" charset="0"/>
+                <a:ea typeface="맑은 고딕" pitchFamily="34" charset="-122"/>
+                <a:cs typeface="맑은 고딕" pitchFamily="34" charset="-120"/>
+              </a:rPr>
+              <a:t>공고료및광고료</a:t>
+            </a:r>
+            <a:endParaRPr lang="en-US" sz="900" dirty="0"/>
+          </a:p>
+        </p:txBody>
+      </p:sp>
+      <p:sp>
+        <p:nvSpPr>
+          <p:cNvPr id="39" name="Text 37"/>
+          <p:cNvSpPr/>
+          <p:nvPr/>
+        </p:nvSpPr>
+        <p:spPr>
+          <a:xfrm>
+            <a:off x="2834640" y="5053584"/>
+            <a:ext cx="4663440" cy="286512"/>
+          </a:xfrm>
+          <a:prstGeom prst="rect">
+            <a:avLst/>
+          </a:prstGeom>
+          <a:noFill/>
+          <a:ln/>
+        </p:spPr>
+        <p:txBody>
+          <a:bodyPr wrap="square" lIns="0" tIns="0" rIns="0" bIns="0" rtlCol="0" anchor="ctr"/>
+          <a:lstStyle/>
+          <a:p>
+            <a:pPr indent="0" marL="0">
+              <a:buNone/>
+            </a:pPr>
+            <a:r>
+              <a:rPr lang="en-US" sz="900" dirty="0">
+                <a:solidFill>
+                  <a:srgbClr val="4A5262"/>
+                </a:solidFill>
+                <a:latin typeface="맑은 고딕" pitchFamily="34" charset="0"/>
+                <a:ea typeface="맑은 고딕" pitchFamily="34" charset="-122"/>
+                <a:cs typeface="맑은 고딕" pitchFamily="34" charset="-120"/>
+              </a:rPr>
+              <a:t>온라인 광고 집행</a:t>
+            </a:r>
+            <a:endParaRPr lang="en-US" sz="900" dirty="0"/>
+          </a:p>
+        </p:txBody>
+      </p:sp>
+      <p:sp>
+        <p:nvSpPr>
+          <p:cNvPr id="40" name="Shape 38"/>
+          <p:cNvSpPr/>
+          <p:nvPr/>
+        </p:nvSpPr>
+        <p:spPr>
+          <a:xfrm>
+            <a:off x="7635240" y="5132832"/>
+            <a:ext cx="633984" cy="128016"/>
+          </a:xfrm>
+          <a:prstGeom prst="rect">
+            <a:avLst/>
+          </a:prstGeom>
+          <a:solidFill>
+            <a:srgbClr val="0075C9"/>
+          </a:solidFill>
+          <a:ln/>
+        </p:spPr>
+      </p:sp>
+      <p:sp>
+        <p:nvSpPr>
+          <p:cNvPr id="41" name="Text 39"/>
+          <p:cNvSpPr/>
+          <p:nvPr/>
+        </p:nvSpPr>
+        <p:spPr>
+          <a:xfrm>
+            <a:off x="10104120" y="5053584"/>
+            <a:ext cx="1371600" cy="286512"/>
+          </a:xfrm>
+          <a:prstGeom prst="rect">
+            <a:avLst/>
+          </a:prstGeom>
+          <a:noFill/>
+          <a:ln/>
+        </p:spPr>
+        <p:txBody>
+          <a:bodyPr wrap="square" lIns="0" tIns="0" rIns="0" bIns="0" rtlCol="0" anchor="ctr"/>
+          <a:lstStyle/>
+          <a:p>
+            <a:pPr algn="r" indent="0" marL="0">
+              <a:buNone/>
+            </a:pPr>
+            <a:r>
+              <a:rPr lang="en-US" sz="900" b="1" dirty="0">
+                <a:solidFill>
+                  <a:srgbClr val="101B33"/>
+                </a:solidFill>
+                <a:latin typeface="맑은 고딕" pitchFamily="34" charset="0"/>
+                <a:ea typeface="맑은 고딕" pitchFamily="34" charset="-122"/>
+                <a:cs typeface="맑은 고딕" pitchFamily="34" charset="-120"/>
+              </a:rPr>
+              <a:t>256만원</a:t>
+            </a:r>
+            <a:endParaRPr lang="en-US" sz="900" dirty="0"/>
+          </a:p>
+        </p:txBody>
+      </p:sp>
+      <p:sp>
+        <p:nvSpPr>
+          <p:cNvPr id="42" name="Shape 40"/>
+          <p:cNvSpPr/>
+          <p:nvPr/>
+        </p:nvSpPr>
+        <p:spPr>
+          <a:xfrm>
+            <a:off x="685800" y="5340096"/>
+            <a:ext cx="10789920" cy="0"/>
+          </a:xfrm>
+          <a:prstGeom prst="line">
+            <a:avLst/>
+          </a:prstGeom>
+          <a:noFill/>
+          <a:ln w="12700">
+            <a:solidFill>
+              <a:srgbClr val="DFE3EA"/>
+            </a:solidFill>
+            <a:prstDash val="solid"/>
+          </a:ln>
+        </p:spPr>
+      </p:sp>
+      <p:sp>
+        <p:nvSpPr>
+          <p:cNvPr id="43" name="Text 41"/>
+          <p:cNvSpPr/>
+          <p:nvPr/>
+        </p:nvSpPr>
+        <p:spPr>
+          <a:xfrm>
+            <a:off x="685800" y="5340096"/>
+            <a:ext cx="2103120" cy="286512"/>
+          </a:xfrm>
+          <a:prstGeom prst="rect">
+            <a:avLst/>
+          </a:prstGeom>
+          <a:noFill/>
+          <a:ln/>
+        </p:spPr>
+        <p:txBody>
+          <a:bodyPr wrap="square" lIns="0" tIns="0" rIns="0" bIns="0" rtlCol="0" anchor="ctr"/>
+          <a:lstStyle/>
+          <a:p>
+            <a:pPr indent="0" marL="0">
+              <a:buNone/>
+            </a:pPr>
+            <a:r>
+              <a:rPr lang="en-US" sz="900" b="1" dirty="0">
+                <a:solidFill>
+                  <a:srgbClr val="101B33"/>
+                </a:solidFill>
+                <a:latin typeface="맑은 고딕" pitchFamily="34" charset="0"/>
+                <a:ea typeface="맑은 고딕" pitchFamily="34" charset="-122"/>
+                <a:cs typeface="맑은 고딕" pitchFamily="34" charset="-120"/>
+              </a:rPr>
+              <a:t>전문가활용비</a:t>
+            </a:r>
+            <a:endParaRPr lang="en-US" sz="900" dirty="0"/>
+          </a:p>
+        </p:txBody>
+      </p:sp>
+      <p:sp>
+        <p:nvSpPr>
+          <p:cNvPr id="44" name="Text 42"/>
+          <p:cNvSpPr/>
+          <p:nvPr/>
+        </p:nvSpPr>
+        <p:spPr>
+          <a:xfrm>
+            <a:off x="2834640" y="5340096"/>
+            <a:ext cx="4663440" cy="286512"/>
+          </a:xfrm>
+          <a:prstGeom prst="rect">
+            <a:avLst/>
+          </a:prstGeom>
+          <a:noFill/>
+          <a:ln/>
+        </p:spPr>
+        <p:txBody>
+          <a:bodyPr wrap="square" lIns="0" tIns="0" rIns="0" bIns="0" rtlCol="0" anchor="ctr"/>
+          <a:lstStyle/>
+          <a:p>
+            <a:pPr indent="0" marL="0">
+              <a:buNone/>
+            </a:pPr>
+            <a:r>
+              <a:rPr lang="en-US" sz="900" dirty="0">
+                <a:solidFill>
+                  <a:srgbClr val="4A5262"/>
+                </a:solidFill>
+                <a:latin typeface="맑은 고딕" pitchFamily="34" charset="0"/>
+                <a:ea typeface="맑은 고딕" pitchFamily="34" charset="-122"/>
+                <a:cs typeface="맑은 고딕" pitchFamily="34" charset="-120"/>
+              </a:rPr>
+              <a:t>외부 전문가 자문</a:t>
+            </a:r>
+            <a:endParaRPr lang="en-US" sz="900" dirty="0"/>
+          </a:p>
+        </p:txBody>
+      </p:sp>
+      <p:sp>
+        <p:nvSpPr>
+          <p:cNvPr id="45" name="Shape 43"/>
+          <p:cNvSpPr/>
+          <p:nvPr/>
+        </p:nvSpPr>
+        <p:spPr>
+          <a:xfrm>
+            <a:off x="7635240" y="5419344"/>
+            <a:ext cx="396240" cy="128016"/>
+          </a:xfrm>
+          <a:prstGeom prst="rect">
+            <a:avLst/>
+          </a:prstGeom>
+          <a:solidFill>
+            <a:srgbClr val="0075C9"/>
+          </a:solidFill>
+          <a:ln/>
+        </p:spPr>
+      </p:sp>
+      <p:sp>
+        <p:nvSpPr>
+          <p:cNvPr id="46" name="Text 44"/>
+          <p:cNvSpPr/>
+          <p:nvPr/>
+        </p:nvSpPr>
+        <p:spPr>
+          <a:xfrm>
+            <a:off x="10104120" y="5340096"/>
+            <a:ext cx="1371600" cy="286512"/>
+          </a:xfrm>
+          <a:prstGeom prst="rect">
+            <a:avLst/>
+          </a:prstGeom>
+          <a:noFill/>
+          <a:ln/>
+        </p:spPr>
+        <p:txBody>
+          <a:bodyPr wrap="square" lIns="0" tIns="0" rIns="0" bIns="0" rtlCol="0" anchor="ctr"/>
+          <a:lstStyle/>
+          <a:p>
+            <a:pPr algn="r" indent="0" marL="0">
+              <a:buNone/>
+            </a:pPr>
+            <a:r>
+              <a:rPr lang="en-US" sz="900" b="1" dirty="0">
+                <a:solidFill>
+                  <a:srgbClr val="101B33"/>
+                </a:solidFill>
+                <a:latin typeface="맑은 고딕" pitchFamily="34" charset="0"/>
+                <a:ea typeface="맑은 고딕" pitchFamily="34" charset="-122"/>
+                <a:cs typeface="맑은 고딕" pitchFamily="34" charset="-120"/>
+              </a:rPr>
+              <a:t>160만원</a:t>
+            </a:r>
+            <a:endParaRPr lang="en-US" sz="900" dirty="0"/>
+          </a:p>
+        </p:txBody>
+      </p:sp>
+      <p:sp>
+        <p:nvSpPr>
+          <p:cNvPr id="47" name="Shape 45"/>
+          <p:cNvSpPr/>
+          <p:nvPr/>
+        </p:nvSpPr>
+        <p:spPr>
+          <a:xfrm>
+            <a:off x="685800" y="5626608"/>
+            <a:ext cx="10789920" cy="0"/>
+          </a:xfrm>
+          <a:prstGeom prst="line">
+            <a:avLst/>
+          </a:prstGeom>
+          <a:noFill/>
+          <a:ln w="12700">
+            <a:solidFill>
+              <a:srgbClr val="DFE3EA"/>
+            </a:solidFill>
+            <a:prstDash val="solid"/>
+          </a:ln>
+        </p:spPr>
+      </p:sp>
+      <p:sp>
+        <p:nvSpPr>
+          <p:cNvPr id="48" name="Text 46"/>
+          <p:cNvSpPr/>
+          <p:nvPr/>
+        </p:nvSpPr>
+        <p:spPr>
+          <a:xfrm>
+            <a:off x="685800" y="5626608"/>
+            <a:ext cx="2103120" cy="286512"/>
+          </a:xfrm>
+          <a:prstGeom prst="rect">
+            <a:avLst/>
+          </a:prstGeom>
+          <a:noFill/>
+          <a:ln/>
+        </p:spPr>
+        <p:txBody>
+          <a:bodyPr wrap="square" lIns="0" tIns="0" rIns="0" bIns="0" rtlCol="0" anchor="ctr"/>
+          <a:lstStyle/>
+          <a:p>
+            <a:pPr indent="0" marL="0">
+              <a:buNone/>
+            </a:pPr>
+            <a:r>
+              <a:rPr lang="en-US" sz="900" b="1" dirty="0">
+                <a:solidFill>
+                  <a:srgbClr val="101B33"/>
+                </a:solidFill>
+                <a:latin typeface="맑은 고딕" pitchFamily="34" charset="0"/>
+                <a:ea typeface="맑은 고딕" pitchFamily="34" charset="-122"/>
+                <a:cs typeface="맑은 고딕" pitchFamily="34" charset="-120"/>
+              </a:rPr>
+              <a:t>임차비</a:t>
+            </a:r>
+            <a:endParaRPr lang="en-US" sz="900" dirty="0"/>
+          </a:p>
+        </p:txBody>
+      </p:sp>
+      <p:sp>
+        <p:nvSpPr>
+          <p:cNvPr id="49" name="Text 47"/>
+          <p:cNvSpPr/>
+          <p:nvPr/>
+        </p:nvSpPr>
+        <p:spPr>
+          <a:xfrm>
+            <a:off x="2834640" y="5626608"/>
+            <a:ext cx="4663440" cy="286512"/>
+          </a:xfrm>
+          <a:prstGeom prst="rect">
+            <a:avLst/>
+          </a:prstGeom>
+          <a:noFill/>
+          <a:ln/>
+        </p:spPr>
+        <p:txBody>
+          <a:bodyPr wrap="square" lIns="0" tIns="0" rIns="0" bIns="0" rtlCol="0" anchor="ctr"/>
+          <a:lstStyle/>
+          <a:p>
+            <a:pPr indent="0" marL="0">
+              <a:buNone/>
+            </a:pPr>
+            <a:r>
+              <a:rPr lang="en-US" sz="900" dirty="0">
+                <a:solidFill>
+                  <a:srgbClr val="4A5262"/>
+                </a:solidFill>
+                <a:latin typeface="맑은 고딕" pitchFamily="34" charset="0"/>
+                <a:ea typeface="맑은 고딕" pitchFamily="34" charset="-122"/>
+                <a:cs typeface="맑은 고딕" pitchFamily="34" charset="-120"/>
+              </a:rPr>
+              <a:t>렌더 장비 · 실증용 패널 임차</a:t>
+            </a:r>
+            <a:endParaRPr lang="en-US" sz="900" dirty="0"/>
+          </a:p>
+        </p:txBody>
+      </p:sp>
+      <p:sp>
+        <p:nvSpPr>
+          <p:cNvPr id="50" name="Shape 48"/>
+          <p:cNvSpPr/>
+          <p:nvPr/>
+        </p:nvSpPr>
+        <p:spPr>
+          <a:xfrm>
+            <a:off x="7635240" y="5705856"/>
+            <a:ext cx="792480" cy="128016"/>
+          </a:xfrm>
+          <a:prstGeom prst="rect">
+            <a:avLst/>
+          </a:prstGeom>
+          <a:solidFill>
+            <a:srgbClr val="0075C9"/>
+          </a:solidFill>
+          <a:ln/>
+        </p:spPr>
+      </p:sp>
+      <p:sp>
+        <p:nvSpPr>
+          <p:cNvPr id="51" name="Text 49"/>
+          <p:cNvSpPr/>
+          <p:nvPr/>
+        </p:nvSpPr>
+        <p:spPr>
+          <a:xfrm>
+            <a:off x="10104120" y="5626608"/>
+            <a:ext cx="1371600" cy="286512"/>
+          </a:xfrm>
+          <a:prstGeom prst="rect">
+            <a:avLst/>
+          </a:prstGeom>
+          <a:noFill/>
+          <a:ln/>
+        </p:spPr>
+        <p:txBody>
+          <a:bodyPr wrap="square" lIns="0" tIns="0" rIns="0" bIns="0" rtlCol="0" anchor="ctr"/>
+          <a:lstStyle/>
+          <a:p>
+            <a:pPr algn="r" indent="0" marL="0">
+              <a:buNone/>
+            </a:pPr>
+            <a:r>
+              <a:rPr lang="en-US" sz="900" b="1" dirty="0">
+                <a:solidFill>
+                  <a:srgbClr val="101B33"/>
+                </a:solidFill>
+                <a:latin typeface="맑은 고딕" pitchFamily="34" charset="0"/>
+                <a:ea typeface="맑은 고딕" pitchFamily="34" charset="-122"/>
+                <a:cs typeface="맑은 고딕" pitchFamily="34" charset="-120"/>
+              </a:rPr>
+              <a:t>320만원</a:t>
+            </a:r>
+            <a:endParaRPr lang="en-US" sz="900" dirty="0"/>
+          </a:p>
+        </p:txBody>
+      </p:sp>
+      <p:sp>
+        <p:nvSpPr>
+          <p:cNvPr id="52" name="Shape 50"/>
+          <p:cNvSpPr/>
+          <p:nvPr/>
+        </p:nvSpPr>
+        <p:spPr>
+          <a:xfrm>
+            <a:off x="685800" y="5913120"/>
+            <a:ext cx="10789920" cy="0"/>
+          </a:xfrm>
+          <a:prstGeom prst="line">
+            <a:avLst/>
+          </a:prstGeom>
+          <a:noFill/>
+          <a:ln w="12700">
+            <a:solidFill>
+              <a:srgbClr val="DFE3EA"/>
+            </a:solidFill>
+            <a:prstDash val="solid"/>
+          </a:ln>
+        </p:spPr>
+      </p:sp>
+      <p:sp>
+        <p:nvSpPr>
+          <p:cNvPr id="53" name="Text 51"/>
+          <p:cNvSpPr/>
+          <p:nvPr/>
+        </p:nvSpPr>
+        <p:spPr>
+          <a:xfrm>
+            <a:off x="685800" y="5913120"/>
+            <a:ext cx="2103120" cy="286512"/>
+          </a:xfrm>
+          <a:prstGeom prst="rect">
+            <a:avLst/>
+          </a:prstGeom>
+          <a:noFill/>
+          <a:ln/>
+        </p:spPr>
+        <p:txBody>
+          <a:bodyPr wrap="square" lIns="0" tIns="0" rIns="0" bIns="0" rtlCol="0" anchor="ctr"/>
+          <a:lstStyle/>
+          <a:p>
+            <a:pPr indent="0" marL="0">
+              <a:buNone/>
+            </a:pPr>
+            <a:r>
+              <a:rPr lang="en-US" sz="900" b="1" dirty="0">
+                <a:solidFill>
+                  <a:srgbClr val="101B33"/>
+                </a:solidFill>
+                <a:latin typeface="맑은 고딕" pitchFamily="34" charset="0"/>
+                <a:ea typeface="맑은 고딕" pitchFamily="34" charset="-122"/>
+                <a:cs typeface="맑은 고딕" pitchFamily="34" charset="-120"/>
+              </a:rPr>
+              <a:t>재료구입비</a:t>
+            </a:r>
+            <a:endParaRPr lang="en-US" sz="900" dirty="0"/>
+          </a:p>
+        </p:txBody>
+      </p:sp>
+      <p:sp>
+        <p:nvSpPr>
+          <p:cNvPr id="54" name="Text 52"/>
+          <p:cNvSpPr/>
+          <p:nvPr/>
+        </p:nvSpPr>
+        <p:spPr>
+          <a:xfrm>
+            <a:off x="2834640" y="5913120"/>
+            <a:ext cx="4663440" cy="286512"/>
+          </a:xfrm>
+          <a:prstGeom prst="rect">
+            <a:avLst/>
+          </a:prstGeom>
+          <a:noFill/>
+          <a:ln/>
+        </p:spPr>
+        <p:txBody>
+          <a:bodyPr wrap="square" lIns="0" tIns="0" rIns="0" bIns="0" rtlCol="0" anchor="ctr"/>
+          <a:lstStyle/>
+          <a:p>
+            <a:pPr indent="0" marL="0">
+              <a:buNone/>
+            </a:pPr>
+            <a:r>
+              <a:rPr lang="en-US" sz="900" dirty="0">
+                <a:solidFill>
+                  <a:srgbClr val="4A5262"/>
+                </a:solidFill>
+                <a:latin typeface="맑은 고딕" pitchFamily="34" charset="0"/>
+                <a:ea typeface="맑은 고딕" pitchFamily="34" charset="-122"/>
+                <a:cs typeface="맑은 고딕" pitchFamily="34" charset="-120"/>
+              </a:rPr>
+              <a:t>실증 재료 · 데이터셋</a:t>
+            </a:r>
+            <a:endParaRPr lang="en-US" sz="900" dirty="0"/>
+          </a:p>
+        </p:txBody>
+      </p:sp>
+      <p:sp>
+        <p:nvSpPr>
+          <p:cNvPr id="55" name="Shape 53"/>
+          <p:cNvSpPr/>
+          <p:nvPr/>
+        </p:nvSpPr>
+        <p:spPr>
+          <a:xfrm>
+            <a:off x="7635240" y="5992368"/>
+            <a:ext cx="396240" cy="128016"/>
+          </a:xfrm>
+          <a:prstGeom prst="rect">
+            <a:avLst/>
+          </a:prstGeom>
+          <a:solidFill>
+            <a:srgbClr val="0075C9"/>
+          </a:solidFill>
+          <a:ln/>
+        </p:spPr>
+      </p:sp>
+      <p:sp>
+        <p:nvSpPr>
+          <p:cNvPr id="56" name="Text 54"/>
+          <p:cNvSpPr/>
+          <p:nvPr/>
+        </p:nvSpPr>
+        <p:spPr>
+          <a:xfrm>
+            <a:off x="10104120" y="5913120"/>
+            <a:ext cx="1371600" cy="286512"/>
+          </a:xfrm>
+          <a:prstGeom prst="rect">
+            <a:avLst/>
+          </a:prstGeom>
+          <a:noFill/>
+          <a:ln/>
+        </p:spPr>
+        <p:txBody>
+          <a:bodyPr wrap="square" lIns="0" tIns="0" rIns="0" bIns="0" rtlCol="0" anchor="ctr"/>
+          <a:lstStyle/>
+          <a:p>
+            <a:pPr algn="r" indent="0" marL="0">
+              <a:buNone/>
+            </a:pPr>
+            <a:r>
+              <a:rPr lang="en-US" sz="900" b="1" dirty="0">
+                <a:solidFill>
+                  <a:srgbClr val="101B33"/>
+                </a:solidFill>
+                <a:latin typeface="맑은 고딕" pitchFamily="34" charset="0"/>
+                <a:ea typeface="맑은 고딕" pitchFamily="34" charset="-122"/>
+                <a:cs typeface="맑은 고딕" pitchFamily="34" charset="-120"/>
+              </a:rPr>
+              <a:t>160만원</a:t>
+            </a:r>
+            <a:endParaRPr lang="en-US" sz="900" dirty="0"/>
+          </a:p>
+        </p:txBody>
+      </p:sp>
+      <p:sp>
+        <p:nvSpPr>
+          <p:cNvPr id="57" name="Shape 55"/>
+          <p:cNvSpPr/>
+          <p:nvPr/>
+        </p:nvSpPr>
+        <p:spPr>
+          <a:xfrm>
+            <a:off x="685800" y="6199632"/>
+            <a:ext cx="10789920" cy="0"/>
+          </a:xfrm>
+          <a:prstGeom prst="line">
+            <a:avLst/>
+          </a:prstGeom>
+          <a:noFill/>
+          <a:ln w="12700">
+            <a:solidFill>
+              <a:srgbClr val="DFE3EA"/>
+            </a:solidFill>
+            <a:prstDash val="solid"/>
+          </a:ln>
+        </p:spPr>
+      </p:sp>
+      <p:sp>
+        <p:nvSpPr>
+          <p:cNvPr id="58" name="Text 56"/>
+          <p:cNvSpPr/>
+          <p:nvPr/>
+        </p:nvSpPr>
+        <p:spPr>
+          <a:xfrm>
+            <a:off x="640080" y="6291072"/>
+            <a:ext cx="10881360" cy="384048"/>
+          </a:xfrm>
+          <a:prstGeom prst="rect">
+            <a:avLst/>
+          </a:prstGeom>
+          <a:noFill/>
+          <a:ln/>
+        </p:spPr>
+        <p:txBody>
+          <a:bodyPr wrap="square" lIns="0" tIns="0" rIns="0" bIns="0" rtlCol="0" anchor="ctr"/>
+          <a:lstStyle/>
+          <a:p>
+            <a:pPr indent="0" marL="0">
+              <a:lnSpc>
+                <a:spcPts val="1100"/>
+              </a:lnSpc>
+              <a:buNone/>
+            </a:pPr>
+            <a:r>
+              <a:rPr lang="en-US" sz="850" i="1" dirty="0">
+                <a:solidFill>
+                  <a:srgbClr val="9AA3B0"/>
+                </a:solidFill>
+                <a:latin typeface="맑은 고딕" pitchFamily="34" charset="0"/>
+                <a:ea typeface="맑은 고딕" pitchFamily="34" charset="-122"/>
+                <a:cs typeface="맑은 고딕" pitchFamily="34" charset="-120"/>
+              </a:rPr>
+              <a:t>총사업비는 아직 확정 전이라 집행기준 &lt;별표 11&gt;의 예시 금액(4,000만원)을 그대로 넣어 두었다. 실제 협약 금액이 나오면 amount만 고치고 build-deck.js를 다시 돌리면 표와 비율이 함께 바뀐다.</a:t>
+            </a:r>
+            <a:endParaRPr lang="en-US" sz="850" dirty="0"/>
+          </a:p>
+        </p:txBody>
+      </p:sp>
+      <p:sp>
+        <p:nvSpPr>
+          <p:cNvPr id="59" name="Text 57"/>
+          <p:cNvSpPr/>
+          <p:nvPr/>
+        </p:nvSpPr>
+        <p:spPr>
+          <a:xfrm>
+            <a:off x="11155680" y="6291072"/>
+            <a:ext cx="548640" cy="274320"/>
+          </a:xfrm>
+          <a:prstGeom prst="rect">
+            <a:avLst/>
+          </a:prstGeom>
+          <a:noFill/>
+          <a:ln/>
+        </p:spPr>
+        <p:txBody>
+          <a:bodyPr wrap="square" lIns="0" tIns="0" rIns="0" bIns="0" rtlCol="0" anchor="ctr"/>
+          <a:lstStyle/>
+          <a:p>
+            <a:pPr algn="r" indent="0" marL="0">
+              <a:buNone/>
+            </a:pPr>
+            <a:r>
+              <a:rPr lang="en-US" sz="1000" dirty="0">
+                <a:solidFill>
+                  <a:srgbClr val="9AA3B0"/>
+                </a:solidFill>
+                <a:latin typeface="맑은 고딕" pitchFamily="34" charset="0"/>
+                <a:ea typeface="맑은 고딕" pitchFamily="34" charset="-122"/>
+                <a:cs typeface="맑은 고딕" pitchFamily="34" charset="-120"/>
+              </a:rPr>
+              <a:t>14</a:t>
+            </a:r>
+            <a:endParaRPr lang="en-US" sz="1000" dirty="0"/>
+          </a:p>
+        </p:txBody>
+      </p:sp>
+    </p:spTree>
+  </p:cSld>
+  <p:clrMapOvr>
+    <a:masterClrMapping/>
+  </p:clrMapOvr>
+</p:sld>
+</file>
+
+<file path=ppt/slides/slide15.xml><?xml version="1.0" encoding="utf-8"?>
+<p:sld xmlns:a="http://schemas.openxmlformats.org/drawingml/2006/main" xmlns:r="http://schemas.openxmlformats.org/officeDocument/2006/relationships" xmlns:p="http://schemas.openxmlformats.org/presentationml/2006/main">
+  <p:cSld name="Slide 15">
+    <p:bg>
+      <p:bgPr>
+        <a:solidFill>
+          <a:srgbClr val="FFFFFF"/>
+        </a:solidFill>
+      </p:bgPr>
+    </p:bg>
+    <p:spTree>
+      <p:nvGrpSpPr>
+        <p:cNvPr id="1" name=""/>
+        <p:cNvGrpSpPr/>
+        <p:nvPr/>
+      </p:nvGrpSpPr>
+      <p:grpSpPr>
+        <a:xfrm>
+          <a:off x="0" y="0"/>
+          <a:ext cx="0" cy="0"/>
+          <a:chOff x="0" y="0"/>
+          <a:chExt cx="0" cy="0"/>
+        </a:xfrm>
+      </p:grpSpPr>
+      <p:sp>
+        <p:nvSpPr>
+          <p:cNvPr id="2" name="Text 0"/>
+          <p:cNvSpPr/>
+          <p:nvPr/>
+        </p:nvSpPr>
+        <p:spPr>
+          <a:xfrm>
+            <a:off x="640080" y="457200"/>
+            <a:ext cx="7315200" cy="274320"/>
+          </a:xfrm>
+          <a:prstGeom prst="rect">
+            <a:avLst/>
+          </a:prstGeom>
+          <a:noFill/>
+          <a:ln/>
+        </p:spPr>
+        <p:txBody>
+          <a:bodyPr wrap="square" lIns="0" tIns="0" rIns="0" bIns="0" rtlCol="0" anchor="ctr"/>
+          <a:lstStyle/>
+          <a:p>
+            <a:pPr indent="0" marL="0">
+              <a:buNone/>
+            </a:pPr>
+            <a:r>
+              <a:rPr lang="en-US" sz="1200" b="1" spc="200" kern="0" dirty="0">
+                <a:solidFill>
+                  <a:srgbClr val="0075C9"/>
+                </a:solidFill>
+                <a:latin typeface="맑은 고딕" pitchFamily="34" charset="0"/>
+                <a:ea typeface="맑은 고딕" pitchFamily="34" charset="-122"/>
+                <a:cs typeface="맑은 고딕" pitchFamily="34" charset="-120"/>
+              </a:rPr>
+              <a:t>BUDGET · 정부지원금</a:t>
+            </a:r>
+            <a:endParaRPr lang="en-US" sz="1200" dirty="0"/>
+          </a:p>
+        </p:txBody>
+      </p:sp>
+      <p:sp>
+        <p:nvSpPr>
+          <p:cNvPr id="3" name="Text 1"/>
+          <p:cNvSpPr/>
+          <p:nvPr/>
+        </p:nvSpPr>
+        <p:spPr>
+          <a:xfrm>
+            <a:off x="640080" y="749808"/>
+            <a:ext cx="8412480" cy="932688"/>
+          </a:xfrm>
+          <a:prstGeom prst="rect">
+            <a:avLst/>
+          </a:prstGeom>
+          <a:noFill/>
+          <a:ln/>
+        </p:spPr>
+        <p:txBody>
+          <a:bodyPr wrap="square" lIns="0" tIns="0" rIns="0" bIns="0" rtlCol="0" anchor="t"/>
+          <a:lstStyle/>
+          <a:p>
+            <a:pPr indent="0" marL="0">
+              <a:buNone/>
+            </a:pPr>
+            <a:r>
+              <a:rPr lang="en-US" sz="3000" b="1" dirty="0">
+                <a:solidFill>
+                  <a:srgbClr val="101B33"/>
+                </a:solidFill>
+                <a:latin typeface="맑은 고딕" pitchFamily="34" charset="0"/>
+                <a:ea typeface="맑은 고딕" pitchFamily="34" charset="-122"/>
+                <a:cs typeface="맑은 고딕" pitchFamily="34" charset="-120"/>
+              </a:rPr>
+              <a:t>무엇에 쓰고, 왜 필요한가</a:t>
+            </a:r>
+            <a:endParaRPr lang="en-US" sz="3000" dirty="0"/>
+          </a:p>
+        </p:txBody>
+      </p:sp>
+      <p:sp>
+        <p:nvSpPr>
+          <p:cNvPr id="4" name="Text 2"/>
+          <p:cNvSpPr/>
+          <p:nvPr/>
+        </p:nvSpPr>
+        <p:spPr>
+          <a:xfrm>
+            <a:off x="685800" y="1600200"/>
+            <a:ext cx="2377440" cy="237744"/>
+          </a:xfrm>
+          <a:prstGeom prst="rect">
+            <a:avLst/>
+          </a:prstGeom>
+          <a:noFill/>
+          <a:ln/>
+        </p:spPr>
+        <p:txBody>
+          <a:bodyPr wrap="square" lIns="0" tIns="0" rIns="0" bIns="0" rtlCol="0" anchor="ctr"/>
+          <a:lstStyle/>
+          <a:p>
+            <a:pPr indent="0" marL="0">
+              <a:buNone/>
+            </a:pPr>
+            <a:r>
+              <a:rPr lang="en-US" sz="950" b="1" spc="100" kern="0" dirty="0">
+                <a:solidFill>
+                  <a:srgbClr val="0075C9"/>
+                </a:solidFill>
+                <a:latin typeface="맑은 고딕" pitchFamily="34" charset="0"/>
+                <a:ea typeface="맑은 고딕" pitchFamily="34" charset="-122"/>
+                <a:cs typeface="맑은 고딕" pitchFamily="34" charset="-120"/>
+              </a:rPr>
+              <a:t>비목 · 세목</a:t>
+            </a:r>
+            <a:endParaRPr lang="en-US" sz="950" dirty="0"/>
+          </a:p>
+        </p:txBody>
+      </p:sp>
+      <p:sp>
+        <p:nvSpPr>
+          <p:cNvPr id="5" name="Text 3"/>
+          <p:cNvSpPr/>
+          <p:nvPr/>
+        </p:nvSpPr>
+        <p:spPr>
+          <a:xfrm>
+            <a:off x="3108960" y="1600200"/>
+            <a:ext cx="1371600" cy="237744"/>
+          </a:xfrm>
+          <a:prstGeom prst="rect">
+            <a:avLst/>
+          </a:prstGeom>
+          <a:noFill/>
+          <a:ln/>
+        </p:spPr>
+        <p:txBody>
+          <a:bodyPr wrap="square" lIns="0" tIns="0" rIns="0" bIns="0" rtlCol="0" anchor="ctr"/>
+          <a:lstStyle/>
+          <a:p>
+            <a:pPr indent="0" marL="0">
+              <a:buNone/>
+            </a:pPr>
+            <a:r>
+              <a:rPr lang="en-US" sz="950" b="1" spc="100" kern="0" dirty="0">
+                <a:solidFill>
+                  <a:srgbClr val="0075C9"/>
+                </a:solidFill>
+                <a:latin typeface="맑은 고딕" pitchFamily="34" charset="0"/>
+                <a:ea typeface="맑은 고딕" pitchFamily="34" charset="-122"/>
+                <a:cs typeface="맑은 고딕" pitchFamily="34" charset="-120"/>
+              </a:rPr>
+              <a:t>집행항목</a:t>
+            </a:r>
+            <a:endParaRPr lang="en-US" sz="950" dirty="0"/>
+          </a:p>
+        </p:txBody>
+      </p:sp>
+      <p:sp>
+        <p:nvSpPr>
+          <p:cNvPr id="6" name="Text 4"/>
+          <p:cNvSpPr/>
+          <p:nvPr/>
+        </p:nvSpPr>
+        <p:spPr>
+          <a:xfrm>
+            <a:off x="4526280" y="1600200"/>
+            <a:ext cx="2743200" cy="237744"/>
+          </a:xfrm>
+          <a:prstGeom prst="rect">
+            <a:avLst/>
+          </a:prstGeom>
+          <a:noFill/>
+          <a:ln/>
+        </p:spPr>
+        <p:txBody>
+          <a:bodyPr wrap="square" lIns="0" tIns="0" rIns="0" bIns="0" rtlCol="0" anchor="ctr"/>
+          <a:lstStyle/>
+          <a:p>
+            <a:pPr indent="0" marL="0">
+              <a:buNone/>
+            </a:pPr>
+            <a:r>
+              <a:rPr lang="en-US" sz="950" b="1" spc="100" kern="0" dirty="0">
+                <a:solidFill>
+                  <a:srgbClr val="0075C9"/>
+                </a:solidFill>
+                <a:latin typeface="맑은 고딕" pitchFamily="34" charset="0"/>
+                <a:ea typeface="맑은 고딕" pitchFamily="34" charset="-122"/>
+                <a:cs typeface="맑은 고딕" pitchFamily="34" charset="-120"/>
+              </a:rPr>
+              <a:t>우리 지출</a:t>
+            </a:r>
+            <a:endParaRPr lang="en-US" sz="950" dirty="0"/>
+          </a:p>
+        </p:txBody>
+      </p:sp>
+      <p:sp>
+        <p:nvSpPr>
+          <p:cNvPr id="7" name="Text 5"/>
+          <p:cNvSpPr/>
+          <p:nvPr/>
+        </p:nvSpPr>
+        <p:spPr>
+          <a:xfrm>
+            <a:off x="7315200" y="1600200"/>
+            <a:ext cx="4160520" cy="237744"/>
+          </a:xfrm>
+          <a:prstGeom prst="rect">
+            <a:avLst/>
+          </a:prstGeom>
+          <a:noFill/>
+          <a:ln/>
+        </p:spPr>
+        <p:txBody>
+          <a:bodyPr wrap="square" lIns="0" tIns="0" rIns="0" bIns="0" rtlCol="0" anchor="ctr"/>
+          <a:lstStyle/>
+          <a:p>
+            <a:pPr indent="0" marL="0">
+              <a:buNone/>
+            </a:pPr>
+            <a:r>
+              <a:rPr lang="en-US" sz="950" b="1" spc="100" kern="0" dirty="0">
+                <a:solidFill>
+                  <a:srgbClr val="0075C9"/>
+                </a:solidFill>
+                <a:latin typeface="맑은 고딕" pitchFamily="34" charset="0"/>
+                <a:ea typeface="맑은 고딕" pitchFamily="34" charset="-122"/>
+                <a:cs typeface="맑은 고딕" pitchFamily="34" charset="-120"/>
+              </a:rPr>
+              <a:t>필요한 이유</a:t>
+            </a:r>
+            <a:endParaRPr lang="en-US" sz="950" dirty="0"/>
+          </a:p>
+        </p:txBody>
+      </p:sp>
+      <p:sp>
+        <p:nvSpPr>
+          <p:cNvPr id="8" name="Shape 6"/>
+          <p:cNvSpPr/>
+          <p:nvPr/>
+        </p:nvSpPr>
+        <p:spPr>
+          <a:xfrm>
+            <a:off x="685800" y="1856232"/>
+            <a:ext cx="10789920" cy="0"/>
+          </a:xfrm>
+          <a:prstGeom prst="line">
+            <a:avLst/>
+          </a:prstGeom>
+          <a:noFill/>
+          <a:ln w="19050">
+            <a:solidFill>
+              <a:srgbClr val="101B33"/>
+            </a:solidFill>
+            <a:prstDash val="solid"/>
+          </a:ln>
+        </p:spPr>
+      </p:sp>
+      <p:sp>
+        <p:nvSpPr>
+          <p:cNvPr id="9" name="Text 7"/>
+          <p:cNvSpPr/>
+          <p:nvPr/>
+        </p:nvSpPr>
+        <p:spPr>
+          <a:xfrm>
+            <a:off x="685800" y="1929384"/>
+            <a:ext cx="2377440" cy="406908"/>
+          </a:xfrm>
+          <a:prstGeom prst="rect">
+            <a:avLst/>
+          </a:prstGeom>
+          <a:noFill/>
+          <a:ln/>
+        </p:spPr>
+        <p:txBody>
+          <a:bodyPr wrap="square" lIns="0" tIns="0" rIns="0" bIns="0" rtlCol="0" anchor="ctr"/>
+          <a:lstStyle/>
+          <a:p>
+            <a:pPr indent="0" marL="0">
+              <a:buNone/>
+            </a:pPr>
+            <a:r>
+              <a:rPr lang="en-US" sz="850" dirty="0">
+                <a:solidFill>
+                  <a:srgbClr val="4A5262"/>
+                </a:solidFill>
+                <a:latin typeface="맑은 고딕" pitchFamily="34" charset="0"/>
+                <a:ea typeface="맑은 고딕" pitchFamily="34" charset="-122"/>
+                <a:cs typeface="맑은 고딕" pitchFamily="34" charset="-120"/>
+              </a:rPr>
+              <a:t>운영비(210)-일반용역비(14)</a:t>
+            </a:r>
+            <a:endParaRPr lang="en-US" sz="850" dirty="0"/>
+          </a:p>
+        </p:txBody>
+      </p:sp>
+      <p:sp>
+        <p:nvSpPr>
+          <p:cNvPr id="10" name="Text 8"/>
+          <p:cNvSpPr/>
+          <p:nvPr/>
+        </p:nvSpPr>
+        <p:spPr>
+          <a:xfrm>
+            <a:off x="3108960" y="1929384"/>
+            <a:ext cx="1371600" cy="406908"/>
+          </a:xfrm>
+          <a:prstGeom prst="rect">
+            <a:avLst/>
+          </a:prstGeom>
+          <a:noFill/>
+          <a:ln/>
+        </p:spPr>
+        <p:txBody>
+          <a:bodyPr wrap="square" lIns="0" tIns="0" rIns="0" bIns="0" rtlCol="0" anchor="ctr"/>
+          <a:lstStyle/>
+          <a:p>
+            <a:pPr indent="0" marL="0">
+              <a:buNone/>
+            </a:pPr>
+            <a:r>
+              <a:rPr lang="en-US" sz="950" b="1" dirty="0">
+                <a:solidFill>
+                  <a:srgbClr val="101B33"/>
+                </a:solidFill>
+                <a:latin typeface="맑은 고딕" pitchFamily="34" charset="0"/>
+                <a:ea typeface="맑은 고딕" pitchFamily="34" charset="-122"/>
+                <a:cs typeface="맑은 고딕" pitchFamily="34" charset="-120"/>
+              </a:rPr>
+              <a:t>제품·서비스 고도화</a:t>
+            </a:r>
+            <a:endParaRPr lang="en-US" sz="950" dirty="0"/>
+          </a:p>
+        </p:txBody>
+      </p:sp>
+      <p:sp>
+        <p:nvSpPr>
+          <p:cNvPr id="11" name="Text 9"/>
+          <p:cNvSpPr/>
+          <p:nvPr/>
+        </p:nvSpPr>
+        <p:spPr>
+          <a:xfrm>
+            <a:off x="4526280" y="1929384"/>
+            <a:ext cx="2743200" cy="406908"/>
+          </a:xfrm>
+          <a:prstGeom prst="rect">
+            <a:avLst/>
+          </a:prstGeom>
+          <a:noFill/>
+          <a:ln/>
+        </p:spPr>
+        <p:txBody>
+          <a:bodyPr wrap="square" lIns="0" tIns="0" rIns="0" bIns="0" rtlCol="0" anchor="ctr"/>
+          <a:lstStyle/>
+          <a:p>
+            <a:pPr indent="0" marL="0">
+              <a:buNone/>
+            </a:pPr>
+            <a:r>
+              <a:rPr lang="en-US" sz="950" b="1" dirty="0">
+                <a:solidFill>
+                  <a:srgbClr val="1C2536"/>
+                </a:solidFill>
+                <a:latin typeface="맑은 고딕" pitchFamily="34" charset="0"/>
+                <a:ea typeface="맑은 고딕" pitchFamily="34" charset="-122"/>
+                <a:cs typeface="맑은 고딕" pitchFamily="34" charset="-120"/>
+              </a:rPr>
+              <a:t>온 미디어아트 에디트 고도화 외주</a:t>
+            </a:r>
+            <a:endParaRPr lang="en-US" sz="950" dirty="0"/>
+          </a:p>
+        </p:txBody>
+      </p:sp>
+      <p:sp>
+        <p:nvSpPr>
+          <p:cNvPr id="12" name="Text 10"/>
+          <p:cNvSpPr/>
+          <p:nvPr/>
+        </p:nvSpPr>
+        <p:spPr>
+          <a:xfrm>
+            <a:off x="7315200" y="1929384"/>
+            <a:ext cx="4160520" cy="406908"/>
+          </a:xfrm>
+          <a:prstGeom prst="rect">
+            <a:avLst/>
+          </a:prstGeom>
+          <a:noFill/>
+          <a:ln/>
+        </p:spPr>
+        <p:txBody>
+          <a:bodyPr wrap="square" lIns="0" tIns="0" rIns="0" bIns="0" rtlCol="0" anchor="ctr"/>
+          <a:lstStyle/>
+          <a:p>
+            <a:pPr indent="0" marL="0">
+              <a:lnSpc>
+                <a:spcPts val="1100"/>
+              </a:lnSpc>
+              <a:buNone/>
+            </a:pPr>
+            <a:r>
+              <a:rPr lang="en-US" sz="850" dirty="0">
+                <a:solidFill>
+                  <a:srgbClr val="4A5262"/>
+                </a:solidFill>
+                <a:latin typeface="맑은 고딕" pitchFamily="34" charset="0"/>
+                <a:ea typeface="맑은 고딕" pitchFamily="34" charset="-122"/>
+                <a:cs typeface="맑은 고딕" pitchFamily="34" charset="-120"/>
+              </a:rPr>
+              <a:t>오늘 만든 에디터는 브라우저 안에서만 돌고 설정도 고객 브라우저에만 남는다. 여러 담당자가 같은 건을 이어 보려면 서버가 필요하다.</a:t>
+            </a:r>
+            <a:endParaRPr lang="en-US" sz="850" dirty="0"/>
+          </a:p>
+        </p:txBody>
+      </p:sp>
+      <p:sp>
+        <p:nvSpPr>
+          <p:cNvPr id="13" name="Shape 11"/>
+          <p:cNvSpPr/>
+          <p:nvPr/>
+        </p:nvSpPr>
+        <p:spPr>
+          <a:xfrm>
+            <a:off x="685800" y="2372868"/>
+            <a:ext cx="10789920" cy="0"/>
+          </a:xfrm>
+          <a:prstGeom prst="line">
+            <a:avLst/>
+          </a:prstGeom>
+          <a:noFill/>
+          <a:ln w="12700">
+            <a:solidFill>
+              <a:srgbClr val="DFE3EA"/>
+            </a:solidFill>
+            <a:prstDash val="solid"/>
+          </a:ln>
+        </p:spPr>
+      </p:sp>
+      <p:sp>
+        <p:nvSpPr>
+          <p:cNvPr id="14" name="Text 12"/>
+          <p:cNvSpPr/>
+          <p:nvPr/>
+        </p:nvSpPr>
+        <p:spPr>
+          <a:xfrm>
+            <a:off x="685800" y="2427732"/>
+            <a:ext cx="2377440" cy="406908"/>
+          </a:xfrm>
+          <a:prstGeom prst="rect">
+            <a:avLst/>
+          </a:prstGeom>
+          <a:noFill/>
+          <a:ln/>
+        </p:spPr>
+        <p:txBody>
+          <a:bodyPr wrap="square" lIns="0" tIns="0" rIns="0" bIns="0" rtlCol="0" anchor="ctr"/>
+          <a:lstStyle/>
+          <a:p>
+            <a:pPr indent="0" marL="0">
+              <a:buNone/>
+            </a:pPr>
+            <a:r>
+              <a:rPr lang="en-US" sz="850" dirty="0">
+                <a:solidFill>
+                  <a:srgbClr val="4A5262"/>
+                </a:solidFill>
+                <a:latin typeface="맑은 고딕" pitchFamily="34" charset="0"/>
+                <a:ea typeface="맑은 고딕" pitchFamily="34" charset="-122"/>
+                <a:cs typeface="맑은 고딕" pitchFamily="34" charset="-120"/>
+              </a:rPr>
+              <a:t>운영비(210)-일반용역비(14)</a:t>
+            </a:r>
+            <a:endParaRPr lang="en-US" sz="850" dirty="0"/>
+          </a:p>
+        </p:txBody>
+      </p:sp>
+      <p:sp>
+        <p:nvSpPr>
+          <p:cNvPr id="15" name="Text 13"/>
+          <p:cNvSpPr/>
+          <p:nvPr/>
+        </p:nvSpPr>
+        <p:spPr>
+          <a:xfrm>
+            <a:off x="3108960" y="2427732"/>
+            <a:ext cx="1371600" cy="406908"/>
+          </a:xfrm>
+          <a:prstGeom prst="rect">
+            <a:avLst/>
+          </a:prstGeom>
+          <a:noFill/>
+          <a:ln/>
+        </p:spPr>
+        <p:txBody>
+          <a:bodyPr wrap="square" lIns="0" tIns="0" rIns="0" bIns="0" rtlCol="0" anchor="ctr"/>
+          <a:lstStyle/>
+          <a:p>
+            <a:pPr indent="0" marL="0">
+              <a:buNone/>
+            </a:pPr>
+            <a:r>
+              <a:rPr lang="en-US" sz="950" b="1" dirty="0">
+                <a:solidFill>
+                  <a:srgbClr val="101B33"/>
+                </a:solidFill>
+                <a:latin typeface="맑은 고딕" pitchFamily="34" charset="0"/>
+                <a:ea typeface="맑은 고딕" pitchFamily="34" charset="-122"/>
+                <a:cs typeface="맑은 고딕" pitchFamily="34" charset="-120"/>
+              </a:rPr>
+              <a:t>AI 활용 도입</a:t>
+            </a:r>
+            <a:endParaRPr lang="en-US" sz="950" dirty="0"/>
+          </a:p>
+        </p:txBody>
+      </p:sp>
+      <p:sp>
+        <p:nvSpPr>
+          <p:cNvPr id="16" name="Text 14"/>
+          <p:cNvSpPr/>
+          <p:nvPr/>
+        </p:nvSpPr>
+        <p:spPr>
+          <a:xfrm>
+            <a:off x="4526280" y="2427732"/>
+            <a:ext cx="2743200" cy="406908"/>
+          </a:xfrm>
+          <a:prstGeom prst="rect">
+            <a:avLst/>
+          </a:prstGeom>
+          <a:noFill/>
+          <a:ln/>
+        </p:spPr>
+        <p:txBody>
+          <a:bodyPr wrap="square" lIns="0" tIns="0" rIns="0" bIns="0" rtlCol="0" anchor="ctr"/>
+          <a:lstStyle/>
+          <a:p>
+            <a:pPr indent="0" marL="0">
+              <a:buNone/>
+            </a:pPr>
+            <a:r>
+              <a:rPr lang="en-US" sz="950" b="1" dirty="0">
+                <a:solidFill>
+                  <a:srgbClr val="1C2536"/>
+                </a:solidFill>
+                <a:latin typeface="맑은 고딕" pitchFamily="34" charset="0"/>
+                <a:ea typeface="맑은 고딕" pitchFamily="34" charset="-122"/>
+                <a:cs typeface="맑은 고딕" pitchFamily="34" charset="-120"/>
+              </a:rPr>
+              <a:t>공공 API · 기관 DB 연동 모듈</a:t>
+            </a:r>
+            <a:endParaRPr lang="en-US" sz="950" dirty="0"/>
+          </a:p>
+        </p:txBody>
+      </p:sp>
+      <p:sp>
+        <p:nvSpPr>
+          <p:cNvPr id="17" name="Text 15"/>
+          <p:cNvSpPr/>
+          <p:nvPr/>
+        </p:nvSpPr>
+        <p:spPr>
+          <a:xfrm>
+            <a:off x="7315200" y="2427732"/>
+            <a:ext cx="4160520" cy="406908"/>
+          </a:xfrm>
+          <a:prstGeom prst="rect">
+            <a:avLst/>
+          </a:prstGeom>
+          <a:noFill/>
+          <a:ln/>
+        </p:spPr>
+        <p:txBody>
+          <a:bodyPr wrap="square" lIns="0" tIns="0" rIns="0" bIns="0" rtlCol="0" anchor="ctr"/>
+          <a:lstStyle/>
+          <a:p>
+            <a:pPr indent="0" marL="0">
+              <a:lnSpc>
+                <a:spcPts val="1100"/>
+              </a:lnSpc>
+              <a:buNone/>
+            </a:pPr>
+            <a:r>
+              <a:rPr lang="en-US" sz="850" dirty="0">
+                <a:solidFill>
+                  <a:srgbClr val="4A5262"/>
+                </a:solidFill>
+                <a:latin typeface="맑은 고딕" pitchFamily="34" charset="0"/>
+                <a:ea typeface="맑은 고딕" pitchFamily="34" charset="-122"/>
+                <a:cs typeface="맑은 고딕" pitchFamily="34" charset="-120"/>
+              </a:rPr>
+              <a:t>AX의 핵심이 여기다. 지금은 작품마다 따로 붙이고 있어 현장이 늘면 그만큼 손이 든다.</a:t>
+            </a:r>
+            <a:endParaRPr lang="en-US" sz="850" dirty="0"/>
+          </a:p>
+        </p:txBody>
+      </p:sp>
+      <p:sp>
+        <p:nvSpPr>
+          <p:cNvPr id="18" name="Shape 16"/>
+          <p:cNvSpPr/>
+          <p:nvPr/>
+        </p:nvSpPr>
+        <p:spPr>
+          <a:xfrm>
+            <a:off x="685800" y="2871216"/>
+            <a:ext cx="10789920" cy="0"/>
+          </a:xfrm>
+          <a:prstGeom prst="line">
+            <a:avLst/>
+          </a:prstGeom>
+          <a:noFill/>
+          <a:ln w="12700">
+            <a:solidFill>
+              <a:srgbClr val="DFE3EA"/>
+            </a:solidFill>
+            <a:prstDash val="solid"/>
+          </a:ln>
+        </p:spPr>
+      </p:sp>
+      <p:sp>
+        <p:nvSpPr>
+          <p:cNvPr id="19" name="Text 17"/>
+          <p:cNvSpPr/>
+          <p:nvPr/>
+        </p:nvSpPr>
+        <p:spPr>
+          <a:xfrm>
+            <a:off x="685800" y="2926080"/>
+            <a:ext cx="2377440" cy="406908"/>
+          </a:xfrm>
+          <a:prstGeom prst="rect">
+            <a:avLst/>
+          </a:prstGeom>
+          <a:noFill/>
+          <a:ln/>
+        </p:spPr>
+        <p:txBody>
+          <a:bodyPr wrap="square" lIns="0" tIns="0" rIns="0" bIns="0" rtlCol="0" anchor="ctr"/>
+          <a:lstStyle/>
+          <a:p>
+            <a:pPr indent="0" marL="0">
+              <a:buNone/>
+            </a:pPr>
+            <a:r>
+              <a:rPr lang="en-US" sz="850" dirty="0">
+                <a:solidFill>
+                  <a:srgbClr val="4A5262"/>
+                </a:solidFill>
+                <a:latin typeface="맑은 고딕" pitchFamily="34" charset="0"/>
+                <a:ea typeface="맑은 고딕" pitchFamily="34" charset="-122"/>
+                <a:cs typeface="맑은 고딕" pitchFamily="34" charset="-120"/>
+              </a:rPr>
+              <a:t>운영비(210)-일반용역비(14)</a:t>
+            </a:r>
+            <a:endParaRPr lang="en-US" sz="850" dirty="0"/>
+          </a:p>
+        </p:txBody>
+      </p:sp>
+      <p:sp>
+        <p:nvSpPr>
+          <p:cNvPr id="20" name="Text 18"/>
+          <p:cNvSpPr/>
+          <p:nvPr/>
+        </p:nvSpPr>
+        <p:spPr>
+          <a:xfrm>
+            <a:off x="3108960" y="2926080"/>
+            <a:ext cx="1371600" cy="406908"/>
+          </a:xfrm>
+          <a:prstGeom prst="rect">
+            <a:avLst/>
+          </a:prstGeom>
+          <a:noFill/>
+          <a:ln/>
+        </p:spPr>
+        <p:txBody>
+          <a:bodyPr wrap="square" lIns="0" tIns="0" rIns="0" bIns="0" rtlCol="0" anchor="ctr"/>
+          <a:lstStyle/>
+          <a:p>
+            <a:pPr indent="0" marL="0">
+              <a:buNone/>
+            </a:pPr>
+            <a:r>
+              <a:rPr lang="en-US" sz="950" b="1" dirty="0">
+                <a:solidFill>
+                  <a:srgbClr val="101B33"/>
+                </a:solidFill>
+                <a:latin typeface="맑은 고딕" pitchFamily="34" charset="0"/>
+                <a:ea typeface="맑은 고딕" pitchFamily="34" charset="-122"/>
+                <a:cs typeface="맑은 고딕" pitchFamily="34" charset="-120"/>
+              </a:rPr>
+              <a:t>홍보비</a:t>
+            </a:r>
+            <a:endParaRPr lang="en-US" sz="950" dirty="0"/>
+          </a:p>
+        </p:txBody>
+      </p:sp>
+      <p:sp>
+        <p:nvSpPr>
+          <p:cNvPr id="21" name="Text 19"/>
+          <p:cNvSpPr/>
+          <p:nvPr/>
+        </p:nvSpPr>
+        <p:spPr>
+          <a:xfrm>
+            <a:off x="4526280" y="2926080"/>
+            <a:ext cx="2743200" cy="406908"/>
+          </a:xfrm>
+          <a:prstGeom prst="rect">
+            <a:avLst/>
+          </a:prstGeom>
+          <a:noFill/>
+          <a:ln/>
+        </p:spPr>
+        <p:txBody>
+          <a:bodyPr wrap="square" lIns="0" tIns="0" rIns="0" bIns="0" rtlCol="0" anchor="ctr"/>
+          <a:lstStyle/>
+          <a:p>
+            <a:pPr indent="0" marL="0">
+              <a:buNone/>
+            </a:pPr>
+            <a:r>
+              <a:rPr lang="en-US" sz="950" b="1" dirty="0">
+                <a:solidFill>
+                  <a:srgbClr val="1C2536"/>
+                </a:solidFill>
+                <a:latin typeface="맑은 고딕" pitchFamily="34" charset="0"/>
+                <a:ea typeface="맑은 고딕" pitchFamily="34" charset="-122"/>
+                <a:cs typeface="맑은 고딕" pitchFamily="34" charset="-120"/>
+              </a:rPr>
+              <a:t>다국어 홍보 시퀀스 확장 · 현지 감수</a:t>
+            </a:r>
+            <a:endParaRPr lang="en-US" sz="950" dirty="0"/>
+          </a:p>
+        </p:txBody>
+      </p:sp>
+      <p:sp>
+        <p:nvSpPr>
+          <p:cNvPr id="22" name="Text 20"/>
+          <p:cNvSpPr/>
+          <p:nvPr/>
+        </p:nvSpPr>
+        <p:spPr>
+          <a:xfrm>
+            <a:off x="7315200" y="2926080"/>
+            <a:ext cx="4160520" cy="406908"/>
+          </a:xfrm>
+          <a:prstGeom prst="rect">
+            <a:avLst/>
+          </a:prstGeom>
+          <a:noFill/>
+          <a:ln/>
+        </p:spPr>
+        <p:txBody>
+          <a:bodyPr wrap="square" lIns="0" tIns="0" rIns="0" bIns="0" rtlCol="0" anchor="ctr"/>
+          <a:lstStyle/>
+          <a:p>
+            <a:pPr indent="0" marL="0">
+              <a:lnSpc>
+                <a:spcPts val="1100"/>
+              </a:lnSpc>
+              <a:buNone/>
+            </a:pPr>
+            <a:r>
+              <a:rPr lang="en-US" sz="850" dirty="0">
+                <a:solidFill>
+                  <a:srgbClr val="4A5262"/>
+                </a:solidFill>
+                <a:latin typeface="맑은 고딕" pitchFamily="34" charset="0"/>
+                <a:ea typeface="맑은 고딕" pitchFamily="34" charset="-122"/>
+                <a:cs typeface="맑은 고딕" pitchFamily="34" charset="-120"/>
+              </a:rPr>
+              <a:t>번역 초벌은 만들어 두었다. 공공기관 대상 문구라 어투 감수가 필요하다.</a:t>
+            </a:r>
+            <a:endParaRPr lang="en-US" sz="850" dirty="0"/>
+          </a:p>
+        </p:txBody>
+      </p:sp>
+      <p:sp>
+        <p:nvSpPr>
+          <p:cNvPr id="23" name="Shape 21"/>
+          <p:cNvSpPr/>
+          <p:nvPr/>
+        </p:nvSpPr>
+        <p:spPr>
+          <a:xfrm>
+            <a:off x="685800" y="3369564"/>
+            <a:ext cx="10789920" cy="0"/>
+          </a:xfrm>
+          <a:prstGeom prst="line">
+            <a:avLst/>
+          </a:prstGeom>
+          <a:noFill/>
+          <a:ln w="12700">
+            <a:solidFill>
+              <a:srgbClr val="DFE3EA"/>
+            </a:solidFill>
+            <a:prstDash val="solid"/>
+          </a:ln>
+        </p:spPr>
+      </p:sp>
+      <p:sp>
+        <p:nvSpPr>
+          <p:cNvPr id="24" name="Text 22"/>
+          <p:cNvSpPr/>
+          <p:nvPr/>
+        </p:nvSpPr>
+        <p:spPr>
+          <a:xfrm>
+            <a:off x="685800" y="3424428"/>
+            <a:ext cx="2377440" cy="406908"/>
+          </a:xfrm>
+          <a:prstGeom prst="rect">
+            <a:avLst/>
+          </a:prstGeom>
+          <a:noFill/>
+          <a:ln/>
+        </p:spPr>
+        <p:txBody>
+          <a:bodyPr wrap="square" lIns="0" tIns="0" rIns="0" bIns="0" rtlCol="0" anchor="ctr"/>
+          <a:lstStyle/>
+          <a:p>
+            <a:pPr indent="0" marL="0">
+              <a:buNone/>
+            </a:pPr>
+            <a:r>
+              <a:rPr lang="en-US" sz="850" dirty="0">
+                <a:solidFill>
+                  <a:srgbClr val="4A5262"/>
+                </a:solidFill>
+                <a:latin typeface="맑은 고딕" pitchFamily="34" charset="0"/>
+                <a:ea typeface="맑은 고딕" pitchFamily="34" charset="-122"/>
+                <a:cs typeface="맑은 고딕" pitchFamily="34" charset="-120"/>
+              </a:rPr>
+              <a:t>운영비(210)-일반수용비(01)</a:t>
+            </a:r>
+            <a:endParaRPr lang="en-US" sz="850" dirty="0"/>
+          </a:p>
+        </p:txBody>
+      </p:sp>
+      <p:sp>
+        <p:nvSpPr>
+          <p:cNvPr id="25" name="Text 23"/>
+          <p:cNvSpPr/>
+          <p:nvPr/>
+        </p:nvSpPr>
+        <p:spPr>
+          <a:xfrm>
+            <a:off x="3108960" y="3424428"/>
+            <a:ext cx="1371600" cy="406908"/>
+          </a:xfrm>
+          <a:prstGeom prst="rect">
+            <a:avLst/>
+          </a:prstGeom>
+          <a:noFill/>
+          <a:ln/>
+        </p:spPr>
+        <p:txBody>
+          <a:bodyPr wrap="square" lIns="0" tIns="0" rIns="0" bIns="0" rtlCol="0" anchor="ctr"/>
+          <a:lstStyle/>
+          <a:p>
+            <a:pPr indent="0" marL="0">
+              <a:buNone/>
+            </a:pPr>
+            <a:r>
+              <a:rPr lang="en-US" sz="950" b="1" dirty="0">
+                <a:solidFill>
+                  <a:srgbClr val="101B33"/>
+                </a:solidFill>
+                <a:latin typeface="맑은 고딕" pitchFamily="34" charset="0"/>
+                <a:ea typeface="맑은 고딕" pitchFamily="34" charset="-122"/>
+                <a:cs typeface="맑은 고딕" pitchFamily="34" charset="-120"/>
+              </a:rPr>
+              <a:t>수수료및사용료</a:t>
+            </a:r>
+            <a:endParaRPr lang="en-US" sz="950" dirty="0"/>
+          </a:p>
+        </p:txBody>
+      </p:sp>
+      <p:sp>
+        <p:nvSpPr>
+          <p:cNvPr id="26" name="Text 24"/>
+          <p:cNvSpPr/>
+          <p:nvPr/>
+        </p:nvSpPr>
+        <p:spPr>
+          <a:xfrm>
+            <a:off x="4526280" y="3424428"/>
+            <a:ext cx="2743200" cy="406908"/>
+          </a:xfrm>
+          <a:prstGeom prst="rect">
+            <a:avLst/>
+          </a:prstGeom>
+          <a:noFill/>
+          <a:ln/>
+        </p:spPr>
+        <p:txBody>
+          <a:bodyPr wrap="square" lIns="0" tIns="0" rIns="0" bIns="0" rtlCol="0" anchor="ctr"/>
+          <a:lstStyle/>
+          <a:p>
+            <a:pPr indent="0" marL="0">
+              <a:buNone/>
+            </a:pPr>
+            <a:r>
+              <a:rPr lang="en-US" sz="950" b="1" dirty="0">
+                <a:solidFill>
+                  <a:srgbClr val="B0442C"/>
+                </a:solidFill>
+                <a:latin typeface="맑은 고딕" pitchFamily="34" charset="0"/>
+                <a:ea typeface="맑은 고딕" pitchFamily="34" charset="-122"/>
+                <a:cs typeface="맑은 고딕" pitchFamily="34" charset="-120"/>
+              </a:rPr>
+              <a:t>AI 솔루션 이용료 · 라이선스 · 구독료</a:t>
+            </a:r>
+            <a:endParaRPr lang="en-US" sz="950" dirty="0"/>
+          </a:p>
+        </p:txBody>
+      </p:sp>
+      <p:sp>
+        <p:nvSpPr>
+          <p:cNvPr id="27" name="Text 25"/>
+          <p:cNvSpPr/>
+          <p:nvPr/>
+        </p:nvSpPr>
+        <p:spPr>
+          <a:xfrm>
+            <a:off x="7315200" y="3424428"/>
+            <a:ext cx="4160520" cy="406908"/>
+          </a:xfrm>
+          <a:prstGeom prst="rect">
+            <a:avLst/>
+          </a:prstGeom>
+          <a:noFill/>
+          <a:ln/>
+        </p:spPr>
+        <p:txBody>
+          <a:bodyPr wrap="square" lIns="0" tIns="0" rIns="0" bIns="0" rtlCol="0" anchor="ctr"/>
+          <a:lstStyle/>
+          <a:p>
+            <a:pPr indent="0" marL="0">
+              <a:lnSpc>
+                <a:spcPts val="1100"/>
+              </a:lnSpc>
+              <a:buNone/>
+            </a:pPr>
+            <a:r>
+              <a:rPr lang="en-US" sz="850" dirty="0">
+                <a:solidFill>
+                  <a:srgbClr val="4A5262"/>
+                </a:solidFill>
+                <a:latin typeface="맑은 고딕" pitchFamily="34" charset="0"/>
+                <a:ea typeface="맑은 고딕" pitchFamily="34" charset="-122"/>
+                <a:cs typeface="맑은 고딕" pitchFamily="34" charset="-120"/>
+              </a:rPr>
+              <a:t>협약기간 이내분만 집행 가능하므로 연 단위 결제 대신 월 결제로 끊는다.</a:t>
+            </a:r>
+            <a:endParaRPr lang="en-US" sz="850" dirty="0"/>
+          </a:p>
+        </p:txBody>
+      </p:sp>
+      <p:sp>
+        <p:nvSpPr>
+          <p:cNvPr id="28" name="Shape 26"/>
+          <p:cNvSpPr/>
+          <p:nvPr/>
+        </p:nvSpPr>
+        <p:spPr>
+          <a:xfrm>
+            <a:off x="685800" y="3867912"/>
+            <a:ext cx="10789920" cy="0"/>
+          </a:xfrm>
+          <a:prstGeom prst="line">
+            <a:avLst/>
+          </a:prstGeom>
+          <a:noFill/>
+          <a:ln w="12700">
+            <a:solidFill>
+              <a:srgbClr val="DFE3EA"/>
+            </a:solidFill>
+            <a:prstDash val="solid"/>
+          </a:ln>
+        </p:spPr>
+      </p:sp>
+      <p:sp>
+        <p:nvSpPr>
+          <p:cNvPr id="29" name="Text 27"/>
+          <p:cNvSpPr/>
+          <p:nvPr/>
+        </p:nvSpPr>
+        <p:spPr>
+          <a:xfrm>
+            <a:off x="685800" y="3922776"/>
+            <a:ext cx="2377440" cy="406908"/>
+          </a:xfrm>
+          <a:prstGeom prst="rect">
+            <a:avLst/>
+          </a:prstGeom>
+          <a:noFill/>
+          <a:ln/>
+        </p:spPr>
+        <p:txBody>
+          <a:bodyPr wrap="square" lIns="0" tIns="0" rIns="0" bIns="0" rtlCol="0" anchor="ctr"/>
+          <a:lstStyle/>
+          <a:p>
+            <a:pPr indent="0" marL="0">
+              <a:buNone/>
+            </a:pPr>
+            <a:r>
+              <a:rPr lang="en-US" sz="850" dirty="0">
+                <a:solidFill>
+                  <a:srgbClr val="4A5262"/>
+                </a:solidFill>
+                <a:latin typeface="맑은 고딕" pitchFamily="34" charset="0"/>
+                <a:ea typeface="맑은 고딕" pitchFamily="34" charset="-122"/>
+                <a:cs typeface="맑은 고딕" pitchFamily="34" charset="-120"/>
+              </a:rPr>
+              <a:t>운영비(210)-일반수용비(01)</a:t>
+            </a:r>
+            <a:endParaRPr lang="en-US" sz="850" dirty="0"/>
+          </a:p>
+        </p:txBody>
+      </p:sp>
+      <p:sp>
+        <p:nvSpPr>
+          <p:cNvPr id="30" name="Text 28"/>
+          <p:cNvSpPr/>
+          <p:nvPr/>
+        </p:nvSpPr>
+        <p:spPr>
+          <a:xfrm>
+            <a:off x="3108960" y="3922776"/>
+            <a:ext cx="1371600" cy="406908"/>
+          </a:xfrm>
+          <a:prstGeom prst="rect">
+            <a:avLst/>
+          </a:prstGeom>
+          <a:noFill/>
+          <a:ln/>
+        </p:spPr>
+        <p:txBody>
+          <a:bodyPr wrap="square" lIns="0" tIns="0" rIns="0" bIns="0" rtlCol="0" anchor="ctr"/>
+          <a:lstStyle/>
+          <a:p>
+            <a:pPr indent="0" marL="0">
+              <a:buNone/>
+            </a:pPr>
+            <a:r>
+              <a:rPr lang="en-US" sz="950" b="1" dirty="0">
+                <a:solidFill>
+                  <a:srgbClr val="101B33"/>
+                </a:solidFill>
+                <a:latin typeface="맑은 고딕" pitchFamily="34" charset="0"/>
+                <a:ea typeface="맑은 고딕" pitchFamily="34" charset="-122"/>
+                <a:cs typeface="맑은 고딕" pitchFamily="34" charset="-120"/>
+              </a:rPr>
+              <a:t>수수료및사용료</a:t>
+            </a:r>
+            <a:endParaRPr lang="en-US" sz="950" dirty="0"/>
+          </a:p>
+        </p:txBody>
+      </p:sp>
+      <p:sp>
+        <p:nvSpPr>
+          <p:cNvPr id="31" name="Text 29"/>
+          <p:cNvSpPr/>
+          <p:nvPr/>
+        </p:nvSpPr>
+        <p:spPr>
+          <a:xfrm>
+            <a:off x="4526280" y="3922776"/>
+            <a:ext cx="2743200" cy="406908"/>
+          </a:xfrm>
+          <a:prstGeom prst="rect">
+            <a:avLst/>
+          </a:prstGeom>
+          <a:noFill/>
+          <a:ln/>
+        </p:spPr>
+        <p:txBody>
+          <a:bodyPr wrap="square" lIns="0" tIns="0" rIns="0" bIns="0" rtlCol="0" anchor="ctr"/>
+          <a:lstStyle/>
+          <a:p>
+            <a:pPr indent="0" marL="0">
+              <a:buNone/>
+            </a:pPr>
+            <a:r>
+              <a:rPr lang="en-US" sz="950" b="1" dirty="0">
+                <a:solidFill>
+                  <a:srgbClr val="1C2536"/>
+                </a:solidFill>
+                <a:latin typeface="맑은 고딕" pitchFamily="34" charset="0"/>
+                <a:ea typeface="맑은 고딕" pitchFamily="34" charset="-122"/>
+                <a:cs typeface="맑은 고딕" pitchFamily="34" charset="-120"/>
+              </a:rPr>
+              <a:t>산업재산권 출원등록</a:t>
+            </a:r>
+            <a:endParaRPr lang="en-US" sz="950" dirty="0"/>
+          </a:p>
+        </p:txBody>
+      </p:sp>
+      <p:sp>
+        <p:nvSpPr>
+          <p:cNvPr id="32" name="Text 30"/>
+          <p:cNvSpPr/>
+          <p:nvPr/>
+        </p:nvSpPr>
+        <p:spPr>
+          <a:xfrm>
+            <a:off x="7315200" y="3922776"/>
+            <a:ext cx="4160520" cy="406908"/>
+          </a:xfrm>
+          <a:prstGeom prst="rect">
+            <a:avLst/>
+          </a:prstGeom>
+          <a:noFill/>
+          <a:ln/>
+        </p:spPr>
+        <p:txBody>
+          <a:bodyPr wrap="square" lIns="0" tIns="0" rIns="0" bIns="0" rtlCol="0" anchor="ctr"/>
+          <a:lstStyle/>
+          <a:p>
+            <a:pPr indent="0" marL="0">
+              <a:lnSpc>
+                <a:spcPts val="1100"/>
+              </a:lnSpc>
+              <a:buNone/>
+            </a:pPr>
+            <a:r>
+              <a:rPr lang="en-US" sz="850" dirty="0">
+                <a:solidFill>
+                  <a:srgbClr val="4A5262"/>
+                </a:solidFill>
+                <a:latin typeface="맑은 고딕" pitchFamily="34" charset="0"/>
+                <a:ea typeface="맑은 고딕" pitchFamily="34" charset="-122"/>
+                <a:cs typeface="맑은 고딕" pitchFamily="34" charset="-120"/>
+              </a:rPr>
+              <a:t>협약기간 안에 출원·취득이 가능한 건만 집행할 수 있다.</a:t>
+            </a:r>
+            <a:endParaRPr lang="en-US" sz="850" dirty="0"/>
+          </a:p>
+        </p:txBody>
+      </p:sp>
+      <p:sp>
+        <p:nvSpPr>
+          <p:cNvPr id="33" name="Shape 31"/>
+          <p:cNvSpPr/>
+          <p:nvPr/>
+        </p:nvSpPr>
+        <p:spPr>
+          <a:xfrm>
+            <a:off x="685800" y="4366260"/>
+            <a:ext cx="10789920" cy="0"/>
+          </a:xfrm>
+          <a:prstGeom prst="line">
+            <a:avLst/>
+          </a:prstGeom>
+          <a:noFill/>
+          <a:ln w="12700">
+            <a:solidFill>
+              <a:srgbClr val="DFE3EA"/>
+            </a:solidFill>
+            <a:prstDash val="solid"/>
+          </a:ln>
+        </p:spPr>
+      </p:sp>
+      <p:sp>
+        <p:nvSpPr>
+          <p:cNvPr id="34" name="Text 32"/>
+          <p:cNvSpPr/>
+          <p:nvPr/>
+        </p:nvSpPr>
+        <p:spPr>
+          <a:xfrm>
+            <a:off x="685800" y="4421124"/>
+            <a:ext cx="2377440" cy="406908"/>
+          </a:xfrm>
+          <a:prstGeom prst="rect">
+            <a:avLst/>
+          </a:prstGeom>
+          <a:noFill/>
+          <a:ln/>
+        </p:spPr>
+        <p:txBody>
+          <a:bodyPr wrap="square" lIns="0" tIns="0" rIns="0" bIns="0" rtlCol="0" anchor="ctr"/>
+          <a:lstStyle/>
+          <a:p>
+            <a:pPr indent="0" marL="0">
+              <a:buNone/>
+            </a:pPr>
+            <a:r>
+              <a:rPr lang="en-US" sz="850" dirty="0">
+                <a:solidFill>
+                  <a:srgbClr val="4A5262"/>
+                </a:solidFill>
+                <a:latin typeface="맑은 고딕" pitchFamily="34" charset="0"/>
+                <a:ea typeface="맑은 고딕" pitchFamily="34" charset="-122"/>
+                <a:cs typeface="맑은 고딕" pitchFamily="34" charset="-120"/>
+              </a:rPr>
+              <a:t>운영비(210)-일반수용비(01)</a:t>
+            </a:r>
+            <a:endParaRPr lang="en-US" sz="850" dirty="0"/>
+          </a:p>
+        </p:txBody>
+      </p:sp>
+      <p:sp>
+        <p:nvSpPr>
+          <p:cNvPr id="35" name="Text 33"/>
+          <p:cNvSpPr/>
+          <p:nvPr/>
+        </p:nvSpPr>
+        <p:spPr>
+          <a:xfrm>
+            <a:off x="3108960" y="4421124"/>
+            <a:ext cx="1371600" cy="406908"/>
+          </a:xfrm>
+          <a:prstGeom prst="rect">
+            <a:avLst/>
+          </a:prstGeom>
+          <a:noFill/>
+          <a:ln/>
+        </p:spPr>
+        <p:txBody>
+          <a:bodyPr wrap="square" lIns="0" tIns="0" rIns="0" bIns="0" rtlCol="0" anchor="ctr"/>
+          <a:lstStyle/>
+          <a:p>
+            <a:pPr indent="0" marL="0">
+              <a:buNone/>
+            </a:pPr>
+            <a:r>
+              <a:rPr lang="en-US" sz="950" b="1" dirty="0">
+                <a:solidFill>
+                  <a:srgbClr val="101B33"/>
+                </a:solidFill>
+                <a:latin typeface="맑은 고딕" pitchFamily="34" charset="0"/>
+                <a:ea typeface="맑은 고딕" pitchFamily="34" charset="-122"/>
+                <a:cs typeface="맑은 고딕" pitchFamily="34" charset="-120"/>
+              </a:rPr>
+              <a:t>공고료및광고료</a:t>
+            </a:r>
+            <a:endParaRPr lang="en-US" sz="950" dirty="0"/>
+          </a:p>
+        </p:txBody>
+      </p:sp>
+      <p:sp>
+        <p:nvSpPr>
+          <p:cNvPr id="36" name="Text 34"/>
+          <p:cNvSpPr/>
+          <p:nvPr/>
+        </p:nvSpPr>
+        <p:spPr>
+          <a:xfrm>
+            <a:off x="4526280" y="4421124"/>
+            <a:ext cx="2743200" cy="406908"/>
+          </a:xfrm>
+          <a:prstGeom prst="rect">
+            <a:avLst/>
+          </a:prstGeom>
+          <a:noFill/>
+          <a:ln/>
+        </p:spPr>
+        <p:txBody>
+          <a:bodyPr wrap="square" lIns="0" tIns="0" rIns="0" bIns="0" rtlCol="0" anchor="ctr"/>
+          <a:lstStyle/>
+          <a:p>
+            <a:pPr indent="0" marL="0">
+              <a:buNone/>
+            </a:pPr>
+            <a:r>
+              <a:rPr lang="en-US" sz="950" b="1" dirty="0">
+                <a:solidFill>
+                  <a:srgbClr val="1C2536"/>
+                </a:solidFill>
+                <a:latin typeface="맑은 고딕" pitchFamily="34" charset="0"/>
+                <a:ea typeface="맑은 고딕" pitchFamily="34" charset="-122"/>
+                <a:cs typeface="맑은 고딕" pitchFamily="34" charset="-120"/>
+              </a:rPr>
+              <a:t>온라인 광고 집행</a:t>
+            </a:r>
+            <a:endParaRPr lang="en-US" sz="950" dirty="0"/>
+          </a:p>
+        </p:txBody>
+      </p:sp>
+      <p:sp>
+        <p:nvSpPr>
+          <p:cNvPr id="37" name="Text 35"/>
+          <p:cNvSpPr/>
+          <p:nvPr/>
+        </p:nvSpPr>
+        <p:spPr>
+          <a:xfrm>
+            <a:off x="7315200" y="4421124"/>
+            <a:ext cx="4160520" cy="406908"/>
+          </a:xfrm>
+          <a:prstGeom prst="rect">
+            <a:avLst/>
+          </a:prstGeom>
+          <a:noFill/>
+          <a:ln/>
+        </p:spPr>
+        <p:txBody>
+          <a:bodyPr wrap="square" lIns="0" tIns="0" rIns="0" bIns="0" rtlCol="0" anchor="ctr"/>
+          <a:lstStyle/>
+          <a:p>
+            <a:pPr indent="0" marL="0">
+              <a:lnSpc>
+                <a:spcPts val="1100"/>
+              </a:lnSpc>
+              <a:buNone/>
+            </a:pPr>
+            <a:r>
+              <a:rPr lang="en-US" sz="850" dirty="0">
+                <a:solidFill>
+                  <a:srgbClr val="4A5262"/>
+                </a:solidFill>
+                <a:latin typeface="맑은 고딕" pitchFamily="34" charset="0"/>
+                <a:ea typeface="맑은 고딕" pitchFamily="34" charset="-122"/>
+                <a:cs typeface="맑은 고딕" pitchFamily="34" charset="-120"/>
+              </a:rPr>
+              <a:t>우리가 직접 집행하면 광고료, 대행사에 맡기면 일반용역비다. 비목이 갈리므로 미리 정해 둔다.</a:t>
+            </a:r>
+            <a:endParaRPr lang="en-US" sz="850" dirty="0"/>
+          </a:p>
+        </p:txBody>
+      </p:sp>
+      <p:sp>
+        <p:nvSpPr>
+          <p:cNvPr id="38" name="Shape 36"/>
+          <p:cNvSpPr/>
+          <p:nvPr/>
+        </p:nvSpPr>
+        <p:spPr>
+          <a:xfrm>
+            <a:off x="685800" y="4864608"/>
+            <a:ext cx="10789920" cy="0"/>
+          </a:xfrm>
+          <a:prstGeom prst="line">
+            <a:avLst/>
+          </a:prstGeom>
+          <a:noFill/>
+          <a:ln w="12700">
+            <a:solidFill>
+              <a:srgbClr val="DFE3EA"/>
+            </a:solidFill>
+            <a:prstDash val="solid"/>
+          </a:ln>
+        </p:spPr>
+      </p:sp>
+      <p:sp>
+        <p:nvSpPr>
+          <p:cNvPr id="39" name="Text 37"/>
+          <p:cNvSpPr/>
+          <p:nvPr/>
+        </p:nvSpPr>
+        <p:spPr>
+          <a:xfrm>
+            <a:off x="685800" y="4919472"/>
+            <a:ext cx="2377440" cy="406908"/>
+          </a:xfrm>
+          <a:prstGeom prst="rect">
+            <a:avLst/>
+          </a:prstGeom>
+          <a:noFill/>
+          <a:ln/>
+        </p:spPr>
+        <p:txBody>
+          <a:bodyPr wrap="square" lIns="0" tIns="0" rIns="0" bIns="0" rtlCol="0" anchor="ctr"/>
+          <a:lstStyle/>
+          <a:p>
+            <a:pPr indent="0" marL="0">
+              <a:buNone/>
+            </a:pPr>
+            <a:r>
+              <a:rPr lang="en-US" sz="850" dirty="0">
+                <a:solidFill>
+                  <a:srgbClr val="4A5262"/>
+                </a:solidFill>
+                <a:latin typeface="맑은 고딕" pitchFamily="34" charset="0"/>
+                <a:ea typeface="맑은 고딕" pitchFamily="34" charset="-122"/>
+                <a:cs typeface="맑은 고딕" pitchFamily="34" charset="-120"/>
+              </a:rPr>
+              <a:t>운영비(210)-일반수용비(01)</a:t>
+            </a:r>
+            <a:endParaRPr lang="en-US" sz="850" dirty="0"/>
+          </a:p>
+        </p:txBody>
+      </p:sp>
+      <p:sp>
+        <p:nvSpPr>
+          <p:cNvPr id="40" name="Text 38"/>
+          <p:cNvSpPr/>
+          <p:nvPr/>
+        </p:nvSpPr>
+        <p:spPr>
+          <a:xfrm>
+            <a:off x="3108960" y="4919472"/>
+            <a:ext cx="1371600" cy="406908"/>
+          </a:xfrm>
+          <a:prstGeom prst="rect">
+            <a:avLst/>
+          </a:prstGeom>
+          <a:noFill/>
+          <a:ln/>
+        </p:spPr>
+        <p:txBody>
+          <a:bodyPr wrap="square" lIns="0" tIns="0" rIns="0" bIns="0" rtlCol="0" anchor="ctr"/>
+          <a:lstStyle/>
+          <a:p>
+            <a:pPr indent="0" marL="0">
+              <a:buNone/>
+            </a:pPr>
+            <a:r>
+              <a:rPr lang="en-US" sz="950" b="1" dirty="0">
+                <a:solidFill>
+                  <a:srgbClr val="101B33"/>
+                </a:solidFill>
+                <a:latin typeface="맑은 고딕" pitchFamily="34" charset="0"/>
+                <a:ea typeface="맑은 고딕" pitchFamily="34" charset="-122"/>
+                <a:cs typeface="맑은 고딕" pitchFamily="34" charset="-120"/>
+              </a:rPr>
+              <a:t>전문가활용비</a:t>
+            </a:r>
+            <a:endParaRPr lang="en-US" sz="950" dirty="0"/>
+          </a:p>
+        </p:txBody>
+      </p:sp>
+      <p:sp>
+        <p:nvSpPr>
+          <p:cNvPr id="41" name="Text 39"/>
+          <p:cNvSpPr/>
+          <p:nvPr/>
+        </p:nvSpPr>
+        <p:spPr>
+          <a:xfrm>
+            <a:off x="4526280" y="4919472"/>
+            <a:ext cx="2743200" cy="406908"/>
+          </a:xfrm>
+          <a:prstGeom prst="rect">
+            <a:avLst/>
+          </a:prstGeom>
+          <a:noFill/>
+          <a:ln/>
+        </p:spPr>
+        <p:txBody>
+          <a:bodyPr wrap="square" lIns="0" tIns="0" rIns="0" bIns="0" rtlCol="0" anchor="ctr"/>
+          <a:lstStyle/>
+          <a:p>
+            <a:pPr indent="0" marL="0">
+              <a:buNone/>
+            </a:pPr>
+            <a:r>
+              <a:rPr lang="en-US" sz="950" b="1" dirty="0">
+                <a:solidFill>
+                  <a:srgbClr val="1C2536"/>
+                </a:solidFill>
+                <a:latin typeface="맑은 고딕" pitchFamily="34" charset="0"/>
+                <a:ea typeface="맑은 고딕" pitchFamily="34" charset="-122"/>
+                <a:cs typeface="맑은 고딕" pitchFamily="34" charset="-120"/>
+              </a:rPr>
+              <a:t>외부 전문가 자문</a:t>
+            </a:r>
+            <a:endParaRPr lang="en-US" sz="950" dirty="0"/>
+          </a:p>
+        </p:txBody>
+      </p:sp>
+      <p:sp>
+        <p:nvSpPr>
+          <p:cNvPr id="42" name="Text 40"/>
+          <p:cNvSpPr/>
+          <p:nvPr/>
+        </p:nvSpPr>
+        <p:spPr>
+          <a:xfrm>
+            <a:off x="7315200" y="4919472"/>
+            <a:ext cx="4160520" cy="406908"/>
+          </a:xfrm>
+          <a:prstGeom prst="rect">
+            <a:avLst/>
+          </a:prstGeom>
+          <a:noFill/>
+          <a:ln/>
+        </p:spPr>
+        <p:txBody>
+          <a:bodyPr wrap="square" lIns="0" tIns="0" rIns="0" bIns="0" rtlCol="0" anchor="ctr"/>
+          <a:lstStyle/>
+          <a:p>
+            <a:pPr indent="0" marL="0">
+              <a:lnSpc>
+                <a:spcPts val="1100"/>
+              </a:lnSpc>
+              <a:buNone/>
+            </a:pPr>
+            <a:r>
+              <a:rPr lang="en-US" sz="850" dirty="0">
+                <a:solidFill>
+                  <a:srgbClr val="4A5262"/>
+                </a:solidFill>
+                <a:latin typeface="맑은 고딕" pitchFamily="34" charset="0"/>
+                <a:ea typeface="맑은 고딕" pitchFamily="34" charset="-122"/>
+                <a:cs typeface="맑은 고딕" pitchFamily="34" charset="-120"/>
+              </a:rPr>
+              <a:t>시간당 10만원·1일 30만원 한도. 1인에게 사업비의 30% 이상이 가면 주관기관이 제한할 수 있다.</a:t>
+            </a:r>
+            <a:endParaRPr lang="en-US" sz="850" dirty="0"/>
+          </a:p>
+        </p:txBody>
+      </p:sp>
+      <p:sp>
+        <p:nvSpPr>
+          <p:cNvPr id="43" name="Shape 41"/>
+          <p:cNvSpPr/>
+          <p:nvPr/>
+        </p:nvSpPr>
+        <p:spPr>
+          <a:xfrm>
+            <a:off x="685800" y="5362956"/>
+            <a:ext cx="10789920" cy="0"/>
+          </a:xfrm>
+          <a:prstGeom prst="line">
+            <a:avLst/>
+          </a:prstGeom>
+          <a:noFill/>
+          <a:ln w="12700">
+            <a:solidFill>
+              <a:srgbClr val="DFE3EA"/>
+            </a:solidFill>
+            <a:prstDash val="solid"/>
+          </a:ln>
+        </p:spPr>
+      </p:sp>
+      <p:sp>
+        <p:nvSpPr>
+          <p:cNvPr id="44" name="Text 42"/>
+          <p:cNvSpPr/>
+          <p:nvPr/>
+        </p:nvSpPr>
+        <p:spPr>
+          <a:xfrm>
+            <a:off x="685800" y="5417820"/>
+            <a:ext cx="2377440" cy="406908"/>
+          </a:xfrm>
+          <a:prstGeom prst="rect">
+            <a:avLst/>
+          </a:prstGeom>
+          <a:noFill/>
+          <a:ln/>
+        </p:spPr>
+        <p:txBody>
+          <a:bodyPr wrap="square" lIns="0" tIns="0" rIns="0" bIns="0" rtlCol="0" anchor="ctr"/>
+          <a:lstStyle/>
+          <a:p>
+            <a:pPr indent="0" marL="0">
+              <a:buNone/>
+            </a:pPr>
+            <a:r>
+              <a:rPr lang="en-US" sz="850" dirty="0">
+                <a:solidFill>
+                  <a:srgbClr val="4A5262"/>
+                </a:solidFill>
+                <a:latin typeface="맑은 고딕" pitchFamily="34" charset="0"/>
+                <a:ea typeface="맑은 고딕" pitchFamily="34" charset="-122"/>
+                <a:cs typeface="맑은 고딕" pitchFamily="34" charset="-120"/>
+              </a:rPr>
+              <a:t>운영비(210)-임차료(07)</a:t>
+            </a:r>
+            <a:endParaRPr lang="en-US" sz="850" dirty="0"/>
+          </a:p>
+        </p:txBody>
+      </p:sp>
+      <p:sp>
+        <p:nvSpPr>
+          <p:cNvPr id="45" name="Text 43"/>
+          <p:cNvSpPr/>
+          <p:nvPr/>
+        </p:nvSpPr>
+        <p:spPr>
+          <a:xfrm>
+            <a:off x="3108960" y="5417820"/>
+            <a:ext cx="1371600" cy="406908"/>
+          </a:xfrm>
+          <a:prstGeom prst="rect">
+            <a:avLst/>
+          </a:prstGeom>
+          <a:noFill/>
+          <a:ln/>
+        </p:spPr>
+        <p:txBody>
+          <a:bodyPr wrap="square" lIns="0" tIns="0" rIns="0" bIns="0" rtlCol="0" anchor="ctr"/>
+          <a:lstStyle/>
+          <a:p>
+            <a:pPr indent="0" marL="0">
+              <a:buNone/>
+            </a:pPr>
+            <a:r>
+              <a:rPr lang="en-US" sz="950" b="1" dirty="0">
+                <a:solidFill>
+                  <a:srgbClr val="101B33"/>
+                </a:solidFill>
+                <a:latin typeface="맑은 고딕" pitchFamily="34" charset="0"/>
+                <a:ea typeface="맑은 고딕" pitchFamily="34" charset="-122"/>
+                <a:cs typeface="맑은 고딕" pitchFamily="34" charset="-120"/>
+              </a:rPr>
+              <a:t>임차비</a:t>
+            </a:r>
+            <a:endParaRPr lang="en-US" sz="950" dirty="0"/>
+          </a:p>
+        </p:txBody>
+      </p:sp>
+      <p:sp>
+        <p:nvSpPr>
+          <p:cNvPr id="46" name="Text 44"/>
+          <p:cNvSpPr/>
+          <p:nvPr/>
+        </p:nvSpPr>
+        <p:spPr>
+          <a:xfrm>
+            <a:off x="4526280" y="5417820"/>
+            <a:ext cx="2743200" cy="406908"/>
+          </a:xfrm>
+          <a:prstGeom prst="rect">
+            <a:avLst/>
+          </a:prstGeom>
+          <a:noFill/>
+          <a:ln/>
+        </p:spPr>
+        <p:txBody>
+          <a:bodyPr wrap="square" lIns="0" tIns="0" rIns="0" bIns="0" rtlCol="0" anchor="ctr"/>
+          <a:lstStyle/>
+          <a:p>
+            <a:pPr indent="0" marL="0">
+              <a:buNone/>
+            </a:pPr>
+            <a:r>
+              <a:rPr lang="en-US" sz="950" b="1" dirty="0">
+                <a:solidFill>
+                  <a:srgbClr val="1C2536"/>
+                </a:solidFill>
+                <a:latin typeface="맑은 고딕" pitchFamily="34" charset="0"/>
+                <a:ea typeface="맑은 고딕" pitchFamily="34" charset="-122"/>
+                <a:cs typeface="맑은 고딕" pitchFamily="34" charset="-120"/>
+              </a:rPr>
+              <a:t>렌더 장비 · 실증용 패널 임차</a:t>
+            </a:r>
+            <a:endParaRPr lang="en-US" sz="950" dirty="0"/>
+          </a:p>
+        </p:txBody>
+      </p:sp>
+      <p:sp>
+        <p:nvSpPr>
+          <p:cNvPr id="47" name="Text 45"/>
+          <p:cNvSpPr/>
+          <p:nvPr/>
+        </p:nvSpPr>
+        <p:spPr>
+          <a:xfrm>
+            <a:off x="7315200" y="5417820"/>
+            <a:ext cx="4160520" cy="406908"/>
+          </a:xfrm>
+          <a:prstGeom prst="rect">
+            <a:avLst/>
+          </a:prstGeom>
+          <a:noFill/>
+          <a:ln/>
+        </p:spPr>
+        <p:txBody>
+          <a:bodyPr wrap="square" lIns="0" tIns="0" rIns="0" bIns="0" rtlCol="0" anchor="ctr"/>
+          <a:lstStyle/>
+          <a:p>
+            <a:pPr indent="0" marL="0">
+              <a:lnSpc>
+                <a:spcPts val="1100"/>
+              </a:lnSpc>
+              <a:buNone/>
+            </a:pPr>
+            <a:r>
+              <a:rPr lang="en-US" sz="850" dirty="0">
+                <a:solidFill>
+                  <a:srgbClr val="4A5262"/>
+                </a:solidFill>
+                <a:latin typeface="맑은 고딕" pitchFamily="34" charset="0"/>
+                <a:ea typeface="맑은 고딕" pitchFamily="34" charset="-122"/>
+                <a:cs typeface="맑은 고딕" pitchFamily="34" charset="-120"/>
+              </a:rPr>
+              <a:t>기기·장비는 1개월 이상 사용하는 것만 임차료로 잡힌다. 총 임차기간은 협약기간을 넘길 수 없다.</a:t>
+            </a:r>
+            <a:endParaRPr lang="en-US" sz="850" dirty="0"/>
+          </a:p>
+        </p:txBody>
+      </p:sp>
+      <p:sp>
+        <p:nvSpPr>
+          <p:cNvPr id="48" name="Shape 46"/>
+          <p:cNvSpPr/>
+          <p:nvPr/>
+        </p:nvSpPr>
+        <p:spPr>
+          <a:xfrm>
+            <a:off x="685800" y="5861304"/>
+            <a:ext cx="10789920" cy="0"/>
+          </a:xfrm>
+          <a:prstGeom prst="line">
+            <a:avLst/>
+          </a:prstGeom>
+          <a:noFill/>
+          <a:ln w="12700">
+            <a:solidFill>
+              <a:srgbClr val="DFE3EA"/>
+            </a:solidFill>
+            <a:prstDash val="solid"/>
+          </a:ln>
+        </p:spPr>
+      </p:sp>
+      <p:sp>
+        <p:nvSpPr>
+          <p:cNvPr id="49" name="Text 47"/>
+          <p:cNvSpPr/>
+          <p:nvPr/>
+        </p:nvSpPr>
+        <p:spPr>
+          <a:xfrm>
+            <a:off x="685800" y="5916168"/>
+            <a:ext cx="2377440" cy="406908"/>
+          </a:xfrm>
+          <a:prstGeom prst="rect">
+            <a:avLst/>
+          </a:prstGeom>
+          <a:noFill/>
+          <a:ln/>
+        </p:spPr>
+        <p:txBody>
+          <a:bodyPr wrap="square" lIns="0" tIns="0" rIns="0" bIns="0" rtlCol="0" anchor="ctr"/>
+          <a:lstStyle/>
+          <a:p>
+            <a:pPr indent="0" marL="0">
+              <a:buNone/>
+            </a:pPr>
+            <a:r>
+              <a:rPr lang="en-US" sz="850" dirty="0">
+                <a:solidFill>
+                  <a:srgbClr val="4A5262"/>
+                </a:solidFill>
+                <a:latin typeface="맑은 고딕" pitchFamily="34" charset="0"/>
+                <a:ea typeface="맑은 고딕" pitchFamily="34" charset="-122"/>
+                <a:cs typeface="맑은 고딕" pitchFamily="34" charset="-120"/>
+              </a:rPr>
+              <a:t>운영비(210)-재료비(11)</a:t>
+            </a:r>
+            <a:endParaRPr lang="en-US" sz="850" dirty="0"/>
+          </a:p>
+        </p:txBody>
+      </p:sp>
+      <p:sp>
+        <p:nvSpPr>
+          <p:cNvPr id="50" name="Text 48"/>
+          <p:cNvSpPr/>
+          <p:nvPr/>
+        </p:nvSpPr>
+        <p:spPr>
+          <a:xfrm>
+            <a:off x="3108960" y="5916168"/>
+            <a:ext cx="1371600" cy="406908"/>
+          </a:xfrm>
+          <a:prstGeom prst="rect">
+            <a:avLst/>
+          </a:prstGeom>
+          <a:noFill/>
+          <a:ln/>
+        </p:spPr>
+        <p:txBody>
+          <a:bodyPr wrap="square" lIns="0" tIns="0" rIns="0" bIns="0" rtlCol="0" anchor="ctr"/>
+          <a:lstStyle/>
+          <a:p>
+            <a:pPr indent="0" marL="0">
+              <a:buNone/>
+            </a:pPr>
+            <a:r>
+              <a:rPr lang="en-US" sz="950" b="1" dirty="0">
+                <a:solidFill>
+                  <a:srgbClr val="101B33"/>
+                </a:solidFill>
+                <a:latin typeface="맑은 고딕" pitchFamily="34" charset="0"/>
+                <a:ea typeface="맑은 고딕" pitchFamily="34" charset="-122"/>
+                <a:cs typeface="맑은 고딕" pitchFamily="34" charset="-120"/>
+              </a:rPr>
+              <a:t>재료구입비</a:t>
+            </a:r>
+            <a:endParaRPr lang="en-US" sz="950" dirty="0"/>
+          </a:p>
+        </p:txBody>
+      </p:sp>
+      <p:sp>
+        <p:nvSpPr>
+          <p:cNvPr id="51" name="Text 49"/>
+          <p:cNvSpPr/>
+          <p:nvPr/>
+        </p:nvSpPr>
+        <p:spPr>
+          <a:xfrm>
+            <a:off x="4526280" y="5916168"/>
+            <a:ext cx="2743200" cy="406908"/>
+          </a:xfrm>
+          <a:prstGeom prst="rect">
+            <a:avLst/>
+          </a:prstGeom>
+          <a:noFill/>
+          <a:ln/>
+        </p:spPr>
+        <p:txBody>
+          <a:bodyPr wrap="square" lIns="0" tIns="0" rIns="0" bIns="0" rtlCol="0" anchor="ctr"/>
+          <a:lstStyle/>
+          <a:p>
+            <a:pPr indent="0" marL="0">
+              <a:buNone/>
+            </a:pPr>
+            <a:r>
+              <a:rPr lang="en-US" sz="950" b="1" dirty="0">
+                <a:solidFill>
+                  <a:srgbClr val="1C2536"/>
+                </a:solidFill>
+                <a:latin typeface="맑은 고딕" pitchFamily="34" charset="0"/>
+                <a:ea typeface="맑은 고딕" pitchFamily="34" charset="-122"/>
+                <a:cs typeface="맑은 고딕" pitchFamily="34" charset="-120"/>
+              </a:rPr>
+              <a:t>실증 재료 · 데이터셋</a:t>
+            </a:r>
+            <a:endParaRPr lang="en-US" sz="950" dirty="0"/>
+          </a:p>
+        </p:txBody>
+      </p:sp>
+      <p:sp>
+        <p:nvSpPr>
+          <p:cNvPr id="52" name="Text 50"/>
+          <p:cNvSpPr/>
+          <p:nvPr/>
+        </p:nvSpPr>
+        <p:spPr>
+          <a:xfrm>
+            <a:off x="7315200" y="5916168"/>
+            <a:ext cx="4160520" cy="406908"/>
+          </a:xfrm>
+          <a:prstGeom prst="rect">
+            <a:avLst/>
+          </a:prstGeom>
+          <a:noFill/>
+          <a:ln/>
+        </p:spPr>
+        <p:txBody>
+          <a:bodyPr wrap="square" lIns="0" tIns="0" rIns="0" bIns="0" rtlCol="0" anchor="ctr"/>
+          <a:lstStyle/>
+          <a:p>
+            <a:pPr indent="0" marL="0">
+              <a:lnSpc>
+                <a:spcPts val="1100"/>
+              </a:lnSpc>
+              <a:buNone/>
+            </a:pPr>
+            <a:r>
+              <a:rPr lang="en-US" sz="850" dirty="0">
+                <a:solidFill>
+                  <a:srgbClr val="4A5262"/>
+                </a:solidFill>
+                <a:latin typeface="맑은 고딕" pitchFamily="34" charset="0"/>
+                <a:ea typeface="맑은 고딕" pitchFamily="34" charset="-122"/>
+                <a:cs typeface="맑은 고딕" pitchFamily="34" charset="-120"/>
+              </a:rPr>
+              <a:t>데이터 등 무형 재료도 재료비로 잡힌다. 품목당 구매합계 100만원 이상이면 비교견적서가 필요하다.</a:t>
+            </a:r>
+            <a:endParaRPr lang="en-US" sz="850" dirty="0"/>
+          </a:p>
+        </p:txBody>
+      </p:sp>
+      <p:sp>
+        <p:nvSpPr>
+          <p:cNvPr id="53" name="Shape 51"/>
+          <p:cNvSpPr/>
+          <p:nvPr/>
+        </p:nvSpPr>
+        <p:spPr>
+          <a:xfrm>
+            <a:off x="685800" y="6359652"/>
+            <a:ext cx="10789920" cy="0"/>
+          </a:xfrm>
+          <a:prstGeom prst="line">
+            <a:avLst/>
+          </a:prstGeom>
+          <a:noFill/>
+          <a:ln w="12700">
+            <a:solidFill>
+              <a:srgbClr val="DFE3EA"/>
+            </a:solidFill>
+            <a:prstDash val="solid"/>
+          </a:ln>
+        </p:spPr>
+      </p:sp>
+      <p:sp>
+        <p:nvSpPr>
+          <p:cNvPr id="54" name="Text 52"/>
+          <p:cNvSpPr/>
+          <p:nvPr/>
+        </p:nvSpPr>
+        <p:spPr>
+          <a:xfrm>
+            <a:off x="11155680" y="6291072"/>
+            <a:ext cx="548640" cy="274320"/>
+          </a:xfrm>
+          <a:prstGeom prst="rect">
+            <a:avLst/>
+          </a:prstGeom>
+          <a:noFill/>
+          <a:ln/>
+        </p:spPr>
+        <p:txBody>
+          <a:bodyPr wrap="square" lIns="0" tIns="0" rIns="0" bIns="0" rtlCol="0" anchor="ctr"/>
+          <a:lstStyle/>
+          <a:p>
+            <a:pPr algn="r" indent="0" marL="0">
+              <a:buNone/>
+            </a:pPr>
+            <a:r>
+              <a:rPr lang="en-US" sz="1000" dirty="0">
+                <a:solidFill>
+                  <a:srgbClr val="9AA3B0"/>
+                </a:solidFill>
+                <a:latin typeface="맑은 고딕" pitchFamily="34" charset="0"/>
+                <a:ea typeface="맑은 고딕" pitchFamily="34" charset="-122"/>
+                <a:cs typeface="맑은 고딕" pitchFamily="34" charset="-120"/>
+              </a:rPr>
+              <a:t>15</a:t>
+            </a:r>
+            <a:endParaRPr lang="en-US" sz="1000" dirty="0"/>
+          </a:p>
+        </p:txBody>
+      </p:sp>
+    </p:spTree>
+  </p:cSld>
+  <p:clrMapOvr>
+    <a:masterClrMapping/>
+  </p:clrMapOvr>
+</p:sld>
+</file>
+
+<file path=ppt/slides/slide16.xml><?xml version="1.0" encoding="utf-8"?>
+<p:sld xmlns:a="http://schemas.openxmlformats.org/drawingml/2006/main" xmlns:r="http://schemas.openxmlformats.org/officeDocument/2006/relationships" xmlns:p="http://schemas.openxmlformats.org/presentationml/2006/main">
+  <p:cSld name="Slide 16">
+    <p:bg>
+      <p:bgPr>
+        <a:solidFill>
+          <a:srgbClr val="FFFFFF"/>
+        </a:solidFill>
+      </p:bgPr>
+    </p:bg>
+    <p:spTree>
+      <p:nvGrpSpPr>
+        <p:cNvPr id="1" name=""/>
+        <p:cNvGrpSpPr/>
+        <p:nvPr/>
+      </p:nvGrpSpPr>
+      <p:grpSpPr>
+        <a:xfrm>
+          <a:off x="0" y="0"/>
+          <a:ext cx="0" cy="0"/>
+          <a:chOff x="0" y="0"/>
+          <a:chExt cx="0" cy="0"/>
+        </a:xfrm>
+      </p:grpSpPr>
+      <p:sp>
+        <p:nvSpPr>
+          <p:cNvPr id="2" name="Text 0"/>
+          <p:cNvSpPr/>
+          <p:nvPr/>
+        </p:nvSpPr>
+        <p:spPr>
+          <a:xfrm>
+            <a:off x="640080" y="457200"/>
+            <a:ext cx="7315200" cy="274320"/>
+          </a:xfrm>
+          <a:prstGeom prst="rect">
+            <a:avLst/>
+          </a:prstGeom>
+          <a:noFill/>
+          <a:ln/>
+        </p:spPr>
+        <p:txBody>
+          <a:bodyPr wrap="square" lIns="0" tIns="0" rIns="0" bIns="0" rtlCol="0" anchor="ctr"/>
+          <a:lstStyle/>
+          <a:p>
+            <a:pPr indent="0" marL="0">
+              <a:buNone/>
+            </a:pPr>
+            <a:r>
+              <a:rPr lang="en-US" sz="1200" b="1" spc="200" kern="0" dirty="0">
+                <a:solidFill>
+                  <a:srgbClr val="0075C9"/>
+                </a:solidFill>
+                <a:latin typeface="맑은 고딕" pitchFamily="34" charset="0"/>
+                <a:ea typeface="맑은 고딕" pitchFamily="34" charset="-122"/>
+                <a:cs typeface="맑은 고딕" pitchFamily="34" charset="-120"/>
+              </a:rPr>
+              <a:t>BUDGET · 대응자금</a:t>
+            </a:r>
+            <a:endParaRPr lang="en-US" sz="1200" dirty="0"/>
+          </a:p>
+        </p:txBody>
+      </p:sp>
+      <p:sp>
+        <p:nvSpPr>
+          <p:cNvPr id="3" name="Text 1"/>
+          <p:cNvSpPr/>
+          <p:nvPr/>
+        </p:nvSpPr>
+        <p:spPr>
+          <a:xfrm>
+            <a:off x="640080" y="749808"/>
+            <a:ext cx="8412480" cy="932688"/>
+          </a:xfrm>
+          <a:prstGeom prst="rect">
+            <a:avLst/>
+          </a:prstGeom>
+          <a:noFill/>
+          <a:ln/>
+        </p:spPr>
+        <p:txBody>
+          <a:bodyPr wrap="square" lIns="0" tIns="0" rIns="0" bIns="0" rtlCol="0" anchor="t"/>
+          <a:lstStyle/>
+          <a:p>
+            <a:pPr indent="0" marL="0">
+              <a:buNone/>
+            </a:pPr>
+            <a:r>
+              <a:rPr lang="en-US" sz="3000" b="1" dirty="0">
+                <a:solidFill>
+                  <a:srgbClr val="101B33"/>
+                </a:solidFill>
+                <a:latin typeface="맑은 고딕" pitchFamily="34" charset="0"/>
+                <a:ea typeface="맑은 고딕" pitchFamily="34" charset="-122"/>
+                <a:cs typeface="맑은 고딕" pitchFamily="34" charset="-120"/>
+              </a:rPr>
+              <a:t>20%는 현물로 채운다</a:t>
+            </a:r>
+            <a:endParaRPr lang="en-US" sz="3000" dirty="0"/>
+          </a:p>
+        </p:txBody>
+      </p:sp>
+      <p:sp>
+        <p:nvSpPr>
+          <p:cNvPr id="4" name="Text 2"/>
+          <p:cNvSpPr/>
+          <p:nvPr/>
+        </p:nvSpPr>
+        <p:spPr>
+          <a:xfrm>
+            <a:off x="640080" y="1783080"/>
+            <a:ext cx="10881360" cy="274320"/>
+          </a:xfrm>
+          <a:prstGeom prst="rect">
+            <a:avLst/>
+          </a:prstGeom>
+          <a:noFill/>
+          <a:ln/>
+        </p:spPr>
+        <p:txBody>
+          <a:bodyPr wrap="square" lIns="0" tIns="0" rIns="0" bIns="0" rtlCol="0" anchor="ctr"/>
+          <a:lstStyle/>
+          <a:p>
+            <a:pPr indent="0" marL="0">
+              <a:buNone/>
+            </a:pPr>
+            <a:r>
+              <a:rPr lang="en-US" sz="1100" dirty="0">
+                <a:solidFill>
+                  <a:srgbClr val="4A5262"/>
+                </a:solidFill>
+                <a:latin typeface="맑은 고딕" pitchFamily="34" charset="0"/>
+                <a:ea typeface="맑은 고딕" pitchFamily="34" charset="-122"/>
+                <a:cs typeface="맑은 고딕" pitchFamily="34" charset="-120"/>
+              </a:rPr>
+              <a:t>대응자금은 100% 소진이 필수이며, 계획에 대해 주관기관 사전 승인이 필요하다.</a:t>
+            </a:r>
+            <a:endParaRPr lang="en-US" sz="1100" dirty="0"/>
+          </a:p>
+        </p:txBody>
+      </p:sp>
+      <p:sp>
+        <p:nvSpPr>
+          <p:cNvPr id="5" name="Shape 3"/>
+          <p:cNvSpPr/>
+          <p:nvPr/>
+        </p:nvSpPr>
+        <p:spPr>
+          <a:xfrm>
+            <a:off x="640080" y="2286000"/>
+            <a:ext cx="3520440" cy="1965960"/>
+          </a:xfrm>
+          <a:prstGeom prst="roundRect">
+            <a:avLst>
+              <a:gd name="adj" fmla="val 2791"/>
+            </a:avLst>
+          </a:prstGeom>
+          <a:solidFill>
+            <a:srgbClr val="FFFFFF"/>
+          </a:solidFill>
+          <a:ln w="12700">
+            <a:solidFill>
+              <a:srgbClr val="DFE3EA"/>
+            </a:solidFill>
+            <a:prstDash val="solid"/>
+          </a:ln>
+          <a:effectLst>
+            <a:outerShdw sx="100000" sy="100000" kx="0" ky="0" algn="bl" rotWithShape="0" blurRad="152400" dist="38100" dir="5400000">
+              <a:srgbClr val="101B33">
+                <a:alpha val="7000"/>
+              </a:srgbClr>
+            </a:outerShdw>
+          </a:effectLst>
+        </p:spPr>
+      </p:sp>
+      <p:sp>
+        <p:nvSpPr>
+          <p:cNvPr id="6" name="Shape 4"/>
+          <p:cNvSpPr/>
+          <p:nvPr/>
+        </p:nvSpPr>
+        <p:spPr>
+          <a:xfrm>
+            <a:off x="914400" y="2560320"/>
+            <a:ext cx="420624" cy="420624"/>
+          </a:xfrm>
+          <a:prstGeom prst="ellipse">
+            <a:avLst/>
+          </a:prstGeom>
+          <a:solidFill>
+            <a:srgbClr val="101B33"/>
+          </a:solidFill>
+          <a:ln w="12700">
+            <a:solidFill>
+              <a:srgbClr val="101B33"/>
+            </a:solidFill>
+            <a:prstDash val="solid"/>
+          </a:ln>
+        </p:spPr>
+      </p:sp>
+      <p:sp>
+        <p:nvSpPr>
+          <p:cNvPr id="7" name="Text 5"/>
+          <p:cNvSpPr/>
+          <p:nvPr/>
+        </p:nvSpPr>
+        <p:spPr>
+          <a:xfrm>
+            <a:off x="914400" y="2560320"/>
+            <a:ext cx="420624" cy="420624"/>
+          </a:xfrm>
+          <a:prstGeom prst="rect">
+            <a:avLst/>
+          </a:prstGeom>
+          <a:noFill/>
+          <a:ln/>
+        </p:spPr>
+        <p:txBody>
+          <a:bodyPr wrap="square" lIns="0" tIns="0" rIns="0" bIns="0" rtlCol="0" anchor="ctr"/>
+          <a:lstStyle/>
+          <a:p>
+            <a:pPr algn="ctr" indent="0" marL="0">
+              <a:buNone/>
+            </a:pPr>
+            <a:r>
+              <a:rPr lang="en-US" sz="1300" b="1" dirty="0">
+                <a:solidFill>
+                  <a:srgbClr val="FFFFFF"/>
+                </a:solidFill>
+                <a:latin typeface="맑은 고딕" pitchFamily="34" charset="0"/>
+                <a:ea typeface="맑은 고딕" pitchFamily="34" charset="-122"/>
+                <a:cs typeface="맑은 고딕" pitchFamily="34" charset="-120"/>
+              </a:rPr>
+              <a:t>01</a:t>
+            </a:r>
+            <a:endParaRPr lang="en-US" sz="1300" dirty="0"/>
+          </a:p>
+        </p:txBody>
+      </p:sp>
+      <p:sp>
+        <p:nvSpPr>
+          <p:cNvPr id="8" name="Text 6"/>
+          <p:cNvSpPr/>
+          <p:nvPr/>
+        </p:nvSpPr>
+        <p:spPr>
+          <a:xfrm>
+            <a:off x="914400" y="3090672"/>
+            <a:ext cx="2971800" cy="292608"/>
+          </a:xfrm>
+          <a:prstGeom prst="rect">
+            <a:avLst/>
+          </a:prstGeom>
+          <a:noFill/>
+          <a:ln/>
+        </p:spPr>
+        <p:txBody>
+          <a:bodyPr wrap="square" lIns="0" tIns="0" rIns="0" bIns="0" rtlCol="0" anchor="ctr"/>
+          <a:lstStyle/>
+          <a:p>
+            <a:pPr indent="0" marL="0">
+              <a:buNone/>
+            </a:pPr>
+            <a:r>
+              <a:rPr lang="en-US" sz="1400" b="1" dirty="0">
+                <a:solidFill>
+                  <a:srgbClr val="101B33"/>
+                </a:solidFill>
+                <a:latin typeface="맑은 고딕" pitchFamily="34" charset="0"/>
+                <a:ea typeface="맑은 고딕" pitchFamily="34" charset="-122"/>
+                <a:cs typeface="맑은 고딕" pitchFamily="34" charset="-120"/>
+              </a:rPr>
+              <a:t>대표자 인건비</a:t>
+            </a:r>
+            <a:endParaRPr lang="en-US" sz="1400" dirty="0"/>
+          </a:p>
+        </p:txBody>
+      </p:sp>
+      <p:sp>
+        <p:nvSpPr>
+          <p:cNvPr id="9" name="Text 7"/>
+          <p:cNvSpPr/>
+          <p:nvPr/>
+        </p:nvSpPr>
+        <p:spPr>
+          <a:xfrm>
+            <a:off x="914400" y="3383280"/>
+            <a:ext cx="2971800" cy="274320"/>
+          </a:xfrm>
+          <a:prstGeom prst="rect">
+            <a:avLst/>
+          </a:prstGeom>
+          <a:noFill/>
+          <a:ln/>
+        </p:spPr>
+        <p:txBody>
+          <a:bodyPr wrap="square" lIns="0" tIns="0" rIns="0" bIns="0" rtlCol="0" anchor="ctr"/>
+          <a:lstStyle/>
+          <a:p>
+            <a:pPr indent="0" marL="0">
+              <a:buNone/>
+            </a:pPr>
+            <a:r>
+              <a:rPr lang="en-US" sz="1300" b="1" dirty="0">
+                <a:solidFill>
+                  <a:srgbClr val="0075C9"/>
+                </a:solidFill>
+                <a:latin typeface="맑은 고딕" pitchFamily="34" charset="0"/>
+                <a:ea typeface="맑은 고딕" pitchFamily="34" charset="-122"/>
+                <a:cs typeface="맑은 고딕" pitchFamily="34" charset="-120"/>
+              </a:rPr>
+              <a:t>480만원</a:t>
+            </a:r>
+            <a:endParaRPr lang="en-US" sz="1300" dirty="0"/>
+          </a:p>
+        </p:txBody>
+      </p:sp>
+      <p:sp>
+        <p:nvSpPr>
+          <p:cNvPr id="10" name="Text 8"/>
+          <p:cNvSpPr/>
+          <p:nvPr/>
+        </p:nvSpPr>
+        <p:spPr>
+          <a:xfrm>
+            <a:off x="914400" y="3694176"/>
+            <a:ext cx="2971800" cy="457200"/>
+          </a:xfrm>
+          <a:prstGeom prst="rect">
+            <a:avLst/>
+          </a:prstGeom>
+          <a:noFill/>
+          <a:ln/>
+        </p:spPr>
+        <p:txBody>
+          <a:bodyPr wrap="square" lIns="0" tIns="0" rIns="0" bIns="0" rtlCol="0" anchor="ctr"/>
+          <a:lstStyle/>
+          <a:p>
+            <a:pPr indent="0" marL="0">
+              <a:lnSpc>
+                <a:spcPts val="1200"/>
+              </a:lnSpc>
+              <a:buNone/>
+            </a:pPr>
+            <a:r>
+              <a:rPr lang="en-US" sz="950" dirty="0">
+                <a:solidFill>
+                  <a:srgbClr val="4A5262"/>
+                </a:solidFill>
+                <a:latin typeface="맑은 고딕" pitchFamily="34" charset="0"/>
+                <a:ea typeface="맑은 고딕" pitchFamily="34" charset="-122"/>
+                <a:cs typeface="맑은 고딕" pitchFamily="34" charset="-120"/>
+              </a:rPr>
+              <a:t>박성실 대표 · 과제참여율 기준</a:t>
+            </a:r>
+            <a:endParaRPr lang="en-US" sz="950" dirty="0"/>
+          </a:p>
+        </p:txBody>
+      </p:sp>
+      <p:sp>
+        <p:nvSpPr>
+          <p:cNvPr id="11" name="Shape 9"/>
+          <p:cNvSpPr/>
+          <p:nvPr/>
+        </p:nvSpPr>
+        <p:spPr>
+          <a:xfrm>
+            <a:off x="4416552" y="2286000"/>
+            <a:ext cx="3520440" cy="1965960"/>
+          </a:xfrm>
+          <a:prstGeom prst="roundRect">
+            <a:avLst>
+              <a:gd name="adj" fmla="val 2791"/>
+            </a:avLst>
+          </a:prstGeom>
+          <a:solidFill>
+            <a:srgbClr val="FFFFFF"/>
+          </a:solidFill>
+          <a:ln w="12700">
+            <a:solidFill>
+              <a:srgbClr val="DFE3EA"/>
+            </a:solidFill>
+            <a:prstDash val="solid"/>
+          </a:ln>
+          <a:effectLst>
+            <a:outerShdw sx="100000" sy="100000" kx="0" ky="0" algn="bl" rotWithShape="0" blurRad="152400" dist="38100" dir="5400000">
+              <a:srgbClr val="101B33">
+                <a:alpha val="7000"/>
+              </a:srgbClr>
+            </a:outerShdw>
+          </a:effectLst>
+        </p:spPr>
+      </p:sp>
+      <p:sp>
+        <p:nvSpPr>
+          <p:cNvPr id="12" name="Shape 10"/>
+          <p:cNvSpPr/>
+          <p:nvPr/>
+        </p:nvSpPr>
+        <p:spPr>
+          <a:xfrm>
+            <a:off x="4690872" y="2560320"/>
+            <a:ext cx="420624" cy="420624"/>
+          </a:xfrm>
+          <a:prstGeom prst="ellipse">
+            <a:avLst/>
+          </a:prstGeom>
+          <a:solidFill>
+            <a:srgbClr val="101B33"/>
+          </a:solidFill>
+          <a:ln w="12700">
+            <a:solidFill>
+              <a:srgbClr val="101B33"/>
+            </a:solidFill>
+            <a:prstDash val="solid"/>
+          </a:ln>
+        </p:spPr>
+      </p:sp>
+      <p:sp>
+        <p:nvSpPr>
+          <p:cNvPr id="13" name="Text 11"/>
+          <p:cNvSpPr/>
+          <p:nvPr/>
+        </p:nvSpPr>
+        <p:spPr>
+          <a:xfrm>
+            <a:off x="4690872" y="2560320"/>
+            <a:ext cx="420624" cy="420624"/>
+          </a:xfrm>
+          <a:prstGeom prst="rect">
+            <a:avLst/>
+          </a:prstGeom>
+          <a:noFill/>
+          <a:ln/>
+        </p:spPr>
+        <p:txBody>
+          <a:bodyPr wrap="square" lIns="0" tIns="0" rIns="0" bIns="0" rtlCol="0" anchor="ctr"/>
+          <a:lstStyle/>
+          <a:p>
+            <a:pPr algn="ctr" indent="0" marL="0">
+              <a:buNone/>
+            </a:pPr>
+            <a:r>
+              <a:rPr lang="en-US" sz="1300" b="1" dirty="0">
+                <a:solidFill>
+                  <a:srgbClr val="FFFFFF"/>
+                </a:solidFill>
+                <a:latin typeface="맑은 고딕" pitchFamily="34" charset="0"/>
+                <a:ea typeface="맑은 고딕" pitchFamily="34" charset="-122"/>
+                <a:cs typeface="맑은 고딕" pitchFamily="34" charset="-120"/>
+              </a:rPr>
+              <a:t>02</a:t>
+            </a:r>
+            <a:endParaRPr lang="en-US" sz="1300" dirty="0"/>
+          </a:p>
+        </p:txBody>
+      </p:sp>
+      <p:sp>
+        <p:nvSpPr>
+          <p:cNvPr id="14" name="Text 12"/>
+          <p:cNvSpPr/>
+          <p:nvPr/>
+        </p:nvSpPr>
+        <p:spPr>
+          <a:xfrm>
+            <a:off x="4690872" y="3090672"/>
+            <a:ext cx="2971800" cy="292608"/>
+          </a:xfrm>
+          <a:prstGeom prst="rect">
+            <a:avLst/>
+          </a:prstGeom>
+          <a:noFill/>
+          <a:ln/>
+        </p:spPr>
+        <p:txBody>
+          <a:bodyPr wrap="square" lIns="0" tIns="0" rIns="0" bIns="0" rtlCol="0" anchor="ctr"/>
+          <a:lstStyle/>
+          <a:p>
+            <a:pPr indent="0" marL="0">
+              <a:buNone/>
+            </a:pPr>
+            <a:r>
+              <a:rPr lang="en-US" sz="1400" b="1" dirty="0">
+                <a:solidFill>
+                  <a:srgbClr val="101B33"/>
+                </a:solidFill>
+                <a:latin typeface="맑은 고딕" pitchFamily="34" charset="0"/>
+                <a:ea typeface="맑은 고딕" pitchFamily="34" charset="-122"/>
+                <a:cs typeface="맑은 고딕" pitchFamily="34" charset="-120"/>
+              </a:rPr>
+              <a:t>사업장 임차료</a:t>
+            </a:r>
+            <a:endParaRPr lang="en-US" sz="1400" dirty="0"/>
+          </a:p>
+        </p:txBody>
+      </p:sp>
+      <p:sp>
+        <p:nvSpPr>
+          <p:cNvPr id="15" name="Text 13"/>
+          <p:cNvSpPr/>
+          <p:nvPr/>
+        </p:nvSpPr>
+        <p:spPr>
+          <a:xfrm>
+            <a:off x="4690872" y="3383280"/>
+            <a:ext cx="2971800" cy="274320"/>
+          </a:xfrm>
+          <a:prstGeom prst="rect">
+            <a:avLst/>
+          </a:prstGeom>
+          <a:noFill/>
+          <a:ln/>
+        </p:spPr>
+        <p:txBody>
+          <a:bodyPr wrap="square" lIns="0" tIns="0" rIns="0" bIns="0" rtlCol="0" anchor="ctr"/>
+          <a:lstStyle/>
+          <a:p>
+            <a:pPr indent="0" marL="0">
+              <a:buNone/>
+            </a:pPr>
+            <a:r>
+              <a:rPr lang="en-US" sz="1300" b="1" dirty="0">
+                <a:solidFill>
+                  <a:srgbClr val="0075C9"/>
+                </a:solidFill>
+                <a:latin typeface="맑은 고딕" pitchFamily="34" charset="0"/>
+                <a:ea typeface="맑은 고딕" pitchFamily="34" charset="-122"/>
+                <a:cs typeface="맑은 고딕" pitchFamily="34" charset="-120"/>
+              </a:rPr>
+              <a:t>256만원</a:t>
+            </a:r>
+            <a:endParaRPr lang="en-US" sz="1300" dirty="0"/>
+          </a:p>
+        </p:txBody>
+      </p:sp>
+      <p:sp>
+        <p:nvSpPr>
+          <p:cNvPr id="16" name="Text 14"/>
+          <p:cNvSpPr/>
+          <p:nvPr/>
+        </p:nvSpPr>
+        <p:spPr>
+          <a:xfrm>
+            <a:off x="4690872" y="3694176"/>
+            <a:ext cx="2971800" cy="457200"/>
+          </a:xfrm>
+          <a:prstGeom prst="rect">
+            <a:avLst/>
+          </a:prstGeom>
+          <a:noFill/>
+          <a:ln/>
+        </p:spPr>
+        <p:txBody>
+          <a:bodyPr wrap="square" lIns="0" tIns="0" rIns="0" bIns="0" rtlCol="0" anchor="ctr"/>
+          <a:lstStyle/>
+          <a:p>
+            <a:pPr indent="0" marL="0">
+              <a:lnSpc>
+                <a:spcPts val="1200"/>
+              </a:lnSpc>
+              <a:buNone/>
+            </a:pPr>
+            <a:r>
+              <a:rPr lang="en-US" sz="950" dirty="0">
+                <a:solidFill>
+                  <a:srgbClr val="4A5262"/>
+                </a:solidFill>
+                <a:latin typeface="맑은 고딕" pitchFamily="34" charset="0"/>
+                <a:ea typeface="맑은 고딕" pitchFamily="34" charset="-122"/>
+                <a:cs typeface="맑은 고딕" pitchFamily="34" charset="-120"/>
+              </a:rPr>
+              <a:t>대구 수성구 사무실 월 임차료</a:t>
+            </a:r>
+            <a:endParaRPr lang="en-US" sz="950" dirty="0"/>
+          </a:p>
+        </p:txBody>
+      </p:sp>
+      <p:sp>
+        <p:nvSpPr>
+          <p:cNvPr id="17" name="Shape 15"/>
+          <p:cNvSpPr/>
+          <p:nvPr/>
+        </p:nvSpPr>
+        <p:spPr>
+          <a:xfrm>
+            <a:off x="8193024" y="2286000"/>
+            <a:ext cx="3520440" cy="1965960"/>
+          </a:xfrm>
+          <a:prstGeom prst="roundRect">
+            <a:avLst>
+              <a:gd name="adj" fmla="val 2791"/>
+            </a:avLst>
+          </a:prstGeom>
+          <a:solidFill>
+            <a:srgbClr val="FFFFFF"/>
+          </a:solidFill>
+          <a:ln w="12700">
+            <a:solidFill>
+              <a:srgbClr val="DFE3EA"/>
+            </a:solidFill>
+            <a:prstDash val="solid"/>
+          </a:ln>
+          <a:effectLst>
+            <a:outerShdw sx="100000" sy="100000" kx="0" ky="0" algn="bl" rotWithShape="0" blurRad="152400" dist="38100" dir="5400000">
+              <a:srgbClr val="101B33">
+                <a:alpha val="7000"/>
+              </a:srgbClr>
+            </a:outerShdw>
+          </a:effectLst>
+        </p:spPr>
+      </p:sp>
+      <p:sp>
+        <p:nvSpPr>
+          <p:cNvPr id="18" name="Shape 16"/>
+          <p:cNvSpPr/>
+          <p:nvPr/>
+        </p:nvSpPr>
+        <p:spPr>
+          <a:xfrm>
+            <a:off x="8467344" y="2560320"/>
+            <a:ext cx="420624" cy="420624"/>
+          </a:xfrm>
+          <a:prstGeom prst="ellipse">
+            <a:avLst/>
+          </a:prstGeom>
+          <a:solidFill>
+            <a:srgbClr val="101B33"/>
+          </a:solidFill>
+          <a:ln w="12700">
+            <a:solidFill>
+              <a:srgbClr val="101B33"/>
+            </a:solidFill>
+            <a:prstDash val="solid"/>
+          </a:ln>
+        </p:spPr>
+      </p:sp>
+      <p:sp>
+        <p:nvSpPr>
+          <p:cNvPr id="19" name="Text 17"/>
+          <p:cNvSpPr/>
+          <p:nvPr/>
+        </p:nvSpPr>
+        <p:spPr>
+          <a:xfrm>
+            <a:off x="8467344" y="2560320"/>
+            <a:ext cx="420624" cy="420624"/>
+          </a:xfrm>
+          <a:prstGeom prst="rect">
+            <a:avLst/>
+          </a:prstGeom>
+          <a:noFill/>
+          <a:ln/>
+        </p:spPr>
+        <p:txBody>
+          <a:bodyPr wrap="square" lIns="0" tIns="0" rIns="0" bIns="0" rtlCol="0" anchor="ctr"/>
+          <a:lstStyle/>
+          <a:p>
+            <a:pPr algn="ctr" indent="0" marL="0">
+              <a:buNone/>
+            </a:pPr>
+            <a:r>
+              <a:rPr lang="en-US" sz="1300" b="1" dirty="0">
+                <a:solidFill>
+                  <a:srgbClr val="FFFFFF"/>
+                </a:solidFill>
+                <a:latin typeface="맑은 고딕" pitchFamily="34" charset="0"/>
+                <a:ea typeface="맑은 고딕" pitchFamily="34" charset="-122"/>
+                <a:cs typeface="맑은 고딕" pitchFamily="34" charset="-120"/>
+              </a:rPr>
+              <a:t>03</a:t>
+            </a:r>
+            <a:endParaRPr lang="en-US" sz="1300" dirty="0"/>
+          </a:p>
+        </p:txBody>
+      </p:sp>
+      <p:sp>
+        <p:nvSpPr>
+          <p:cNvPr id="20" name="Text 18"/>
+          <p:cNvSpPr/>
+          <p:nvPr/>
+        </p:nvSpPr>
+        <p:spPr>
+          <a:xfrm>
+            <a:off x="8467344" y="3090672"/>
+            <a:ext cx="2971800" cy="292608"/>
+          </a:xfrm>
+          <a:prstGeom prst="rect">
+            <a:avLst/>
+          </a:prstGeom>
+          <a:noFill/>
+          <a:ln/>
+        </p:spPr>
+        <p:txBody>
+          <a:bodyPr wrap="square" lIns="0" tIns="0" rIns="0" bIns="0" rtlCol="0" anchor="ctr"/>
+          <a:lstStyle/>
+          <a:p>
+            <a:pPr indent="0" marL="0">
+              <a:buNone/>
+            </a:pPr>
+            <a:r>
+              <a:rPr lang="en-US" sz="1400" b="1" dirty="0">
+                <a:solidFill>
+                  <a:srgbClr val="101B33"/>
+                </a:solidFill>
+                <a:latin typeface="맑은 고딕" pitchFamily="34" charset="0"/>
+                <a:ea typeface="맑은 고딕" pitchFamily="34" charset="-122"/>
+                <a:cs typeface="맑은 고딕" pitchFamily="34" charset="-120"/>
+              </a:rPr>
+              <a:t>수수료및사용료</a:t>
+            </a:r>
+            <a:endParaRPr lang="en-US" sz="1400" dirty="0"/>
+          </a:p>
+        </p:txBody>
+      </p:sp>
+      <p:sp>
+        <p:nvSpPr>
+          <p:cNvPr id="21" name="Text 19"/>
+          <p:cNvSpPr/>
+          <p:nvPr/>
+        </p:nvSpPr>
+        <p:spPr>
+          <a:xfrm>
+            <a:off x="8467344" y="3383280"/>
+            <a:ext cx="2971800" cy="274320"/>
+          </a:xfrm>
+          <a:prstGeom prst="rect">
+            <a:avLst/>
+          </a:prstGeom>
+          <a:noFill/>
+          <a:ln/>
+        </p:spPr>
+        <p:txBody>
+          <a:bodyPr wrap="square" lIns="0" tIns="0" rIns="0" bIns="0" rtlCol="0" anchor="ctr"/>
+          <a:lstStyle/>
+          <a:p>
+            <a:pPr indent="0" marL="0">
+              <a:buNone/>
+            </a:pPr>
+            <a:r>
+              <a:rPr lang="en-US" sz="1300" b="1" dirty="0">
+                <a:solidFill>
+                  <a:srgbClr val="0075C9"/>
+                </a:solidFill>
+                <a:latin typeface="맑은 고딕" pitchFamily="34" charset="0"/>
+                <a:ea typeface="맑은 고딕" pitchFamily="34" charset="-122"/>
+                <a:cs typeface="맑은 고딕" pitchFamily="34" charset="-120"/>
+              </a:rPr>
+              <a:t>64만원</a:t>
+            </a:r>
+            <a:endParaRPr lang="en-US" sz="1300" dirty="0"/>
+          </a:p>
+        </p:txBody>
+      </p:sp>
+      <p:sp>
+        <p:nvSpPr>
+          <p:cNvPr id="22" name="Text 20"/>
+          <p:cNvSpPr/>
+          <p:nvPr/>
+        </p:nvSpPr>
+        <p:spPr>
+          <a:xfrm>
+            <a:off x="8467344" y="3694176"/>
+            <a:ext cx="2971800" cy="457200"/>
+          </a:xfrm>
+          <a:prstGeom prst="rect">
+            <a:avLst/>
+          </a:prstGeom>
+          <a:noFill/>
+          <a:ln/>
+        </p:spPr>
+        <p:txBody>
+          <a:bodyPr wrap="square" lIns="0" tIns="0" rIns="0" bIns="0" rtlCol="0" anchor="ctr"/>
+          <a:lstStyle/>
+          <a:p>
+            <a:pPr indent="0" marL="0">
+              <a:lnSpc>
+                <a:spcPts val="1200"/>
+              </a:lnSpc>
+              <a:buNone/>
+            </a:pPr>
+            <a:r>
+              <a:rPr lang="en-US" sz="950" dirty="0">
+                <a:solidFill>
+                  <a:srgbClr val="4A5262"/>
+                </a:solidFill>
+                <a:latin typeface="맑은 고딕" pitchFamily="34" charset="0"/>
+                <a:ea typeface="맑은 고딕" pitchFamily="34" charset="-122"/>
+                <a:cs typeface="맑은 고딕" pitchFamily="34" charset="-120"/>
+              </a:rPr>
+              <a:t>이행(지급)보증보험증권 수수료</a:t>
+            </a:r>
+            <a:endParaRPr lang="en-US" sz="950" dirty="0"/>
+          </a:p>
+        </p:txBody>
+      </p:sp>
+      <p:sp>
+        <p:nvSpPr>
+          <p:cNvPr id="23" name="Text 21"/>
+          <p:cNvSpPr/>
+          <p:nvPr/>
+        </p:nvSpPr>
+        <p:spPr>
+          <a:xfrm>
+            <a:off x="640080" y="4526280"/>
+            <a:ext cx="5486400" cy="237744"/>
+          </a:xfrm>
+          <a:prstGeom prst="rect">
+            <a:avLst/>
+          </a:prstGeom>
+          <a:noFill/>
+          <a:ln/>
+        </p:spPr>
+        <p:txBody>
+          <a:bodyPr wrap="square" lIns="0" tIns="0" rIns="0" bIns="0" rtlCol="0" anchor="ctr"/>
+          <a:lstStyle/>
+          <a:p>
+            <a:pPr indent="0" marL="0">
+              <a:buNone/>
+            </a:pPr>
+            <a:r>
+              <a:rPr lang="en-US" sz="1150" b="1" dirty="0">
+                <a:solidFill>
+                  <a:srgbClr val="0075C9"/>
+                </a:solidFill>
+                <a:latin typeface="맑은 고딕" pitchFamily="34" charset="0"/>
+                <a:ea typeface="맑은 고딕" pitchFamily="34" charset="-122"/>
+                <a:cs typeface="맑은 고딕" pitchFamily="34" charset="-120"/>
+              </a:rPr>
+              <a:t>비목별 증빙자료</a:t>
+            </a:r>
+            <a:endParaRPr lang="en-US" sz="1150" dirty="0"/>
+          </a:p>
+        </p:txBody>
+      </p:sp>
+      <p:sp>
+        <p:nvSpPr>
+          <p:cNvPr id="24" name="Text 22"/>
+          <p:cNvSpPr/>
+          <p:nvPr/>
+        </p:nvSpPr>
+        <p:spPr>
+          <a:xfrm>
+            <a:off x="685800" y="4800600"/>
+            <a:ext cx="1600200" cy="292608"/>
+          </a:xfrm>
+          <a:prstGeom prst="rect">
+            <a:avLst/>
+          </a:prstGeom>
+          <a:noFill/>
+          <a:ln/>
+        </p:spPr>
+        <p:txBody>
+          <a:bodyPr wrap="square" lIns="0" tIns="0" rIns="0" bIns="0" rtlCol="0" anchor="ctr"/>
+          <a:lstStyle/>
+          <a:p>
+            <a:pPr indent="0" marL="0">
+              <a:buNone/>
+            </a:pPr>
+            <a:r>
+              <a:rPr lang="en-US" sz="900" b="1" dirty="0">
+                <a:solidFill>
+                  <a:srgbClr val="101B33"/>
+                </a:solidFill>
+                <a:latin typeface="맑은 고딕" pitchFamily="34" charset="0"/>
+                <a:ea typeface="맑은 고딕" pitchFamily="34" charset="-122"/>
+                <a:cs typeface="맑은 고딕" pitchFamily="34" charset="-120"/>
+              </a:rPr>
+              <a:t>일반용역비</a:t>
+            </a:r>
+            <a:endParaRPr lang="en-US" sz="900" dirty="0"/>
+          </a:p>
+        </p:txBody>
+      </p:sp>
+      <p:sp>
+        <p:nvSpPr>
+          <p:cNvPr id="25" name="Text 23"/>
+          <p:cNvSpPr/>
+          <p:nvPr/>
+        </p:nvSpPr>
+        <p:spPr>
+          <a:xfrm>
+            <a:off x="2377440" y="4800600"/>
+            <a:ext cx="9098280" cy="292608"/>
+          </a:xfrm>
+          <a:prstGeom prst="rect">
+            <a:avLst/>
+          </a:prstGeom>
+          <a:noFill/>
+          <a:ln/>
+        </p:spPr>
+        <p:txBody>
+          <a:bodyPr wrap="square" lIns="0" tIns="0" rIns="0" bIns="0" rtlCol="0" anchor="ctr"/>
+          <a:lstStyle/>
+          <a:p>
+            <a:pPr indent="0" marL="0">
+              <a:buNone/>
+            </a:pPr>
+            <a:r>
+              <a:rPr lang="en-US" sz="850" dirty="0">
+                <a:solidFill>
+                  <a:srgbClr val="4A5262"/>
+                </a:solidFill>
+                <a:latin typeface="맑은 고딕" pitchFamily="34" charset="0"/>
+                <a:ea typeface="맑은 고딕" pitchFamily="34" charset="-122"/>
+                <a:cs typeface="맑은 고딕" pitchFamily="34" charset="-120"/>
+              </a:rPr>
+              <a:t>계획서·완료보고서 / 계약서 / 견적서·비교견적서 / 집행증빙 / 검수조서 또는 결과보고서(증빙사진 필수)</a:t>
+            </a:r>
+            <a:endParaRPr lang="en-US" sz="850" dirty="0"/>
+          </a:p>
+        </p:txBody>
+      </p:sp>
+      <p:sp>
+        <p:nvSpPr>
+          <p:cNvPr id="26" name="Text 24"/>
+          <p:cNvSpPr/>
+          <p:nvPr/>
+        </p:nvSpPr>
+        <p:spPr>
+          <a:xfrm>
+            <a:off x="685800" y="5093208"/>
+            <a:ext cx="1600200" cy="292608"/>
+          </a:xfrm>
+          <a:prstGeom prst="rect">
+            <a:avLst/>
+          </a:prstGeom>
+          <a:noFill/>
+          <a:ln/>
+        </p:spPr>
+        <p:txBody>
+          <a:bodyPr wrap="square" lIns="0" tIns="0" rIns="0" bIns="0" rtlCol="0" anchor="ctr"/>
+          <a:lstStyle/>
+          <a:p>
+            <a:pPr indent="0" marL="0">
+              <a:buNone/>
+            </a:pPr>
+            <a:r>
+              <a:rPr lang="en-US" sz="900" b="1" dirty="0">
+                <a:solidFill>
+                  <a:srgbClr val="101B33"/>
+                </a:solidFill>
+                <a:latin typeface="맑은 고딕" pitchFamily="34" charset="0"/>
+                <a:ea typeface="맑은 고딕" pitchFamily="34" charset="-122"/>
+                <a:cs typeface="맑은 고딕" pitchFamily="34" charset="-120"/>
+              </a:rPr>
+              <a:t>일반수용비</a:t>
+            </a:r>
+            <a:endParaRPr lang="en-US" sz="900" dirty="0"/>
+          </a:p>
+        </p:txBody>
+      </p:sp>
+      <p:sp>
+        <p:nvSpPr>
+          <p:cNvPr id="27" name="Text 25"/>
+          <p:cNvSpPr/>
+          <p:nvPr/>
+        </p:nvSpPr>
+        <p:spPr>
+          <a:xfrm>
+            <a:off x="2377440" y="5093208"/>
+            <a:ext cx="9098280" cy="292608"/>
+          </a:xfrm>
+          <a:prstGeom prst="rect">
+            <a:avLst/>
+          </a:prstGeom>
+          <a:noFill/>
+          <a:ln/>
+        </p:spPr>
+        <p:txBody>
+          <a:bodyPr wrap="square" lIns="0" tIns="0" rIns="0" bIns="0" rtlCol="0" anchor="ctr"/>
+          <a:lstStyle/>
+          <a:p>
+            <a:pPr indent="0" marL="0">
+              <a:buNone/>
+            </a:pPr>
+            <a:r>
+              <a:rPr lang="en-US" sz="850" dirty="0">
+                <a:solidFill>
+                  <a:srgbClr val="4A5262"/>
+                </a:solidFill>
+                <a:latin typeface="맑은 고딕" pitchFamily="34" charset="0"/>
+                <a:ea typeface="맑은 고딕" pitchFamily="34" charset="-122"/>
+                <a:cs typeface="맑은 고딕" pitchFamily="34" charset="-120"/>
+              </a:rPr>
+              <a:t>견적서 / 집행증빙(전자세금계산서+사업자등록증+통장사본 또는 카드매출전표+사업자등록증) / 광고는 집행내역서·광고리포트</a:t>
+            </a:r>
+            <a:endParaRPr lang="en-US" sz="850" dirty="0"/>
+          </a:p>
+        </p:txBody>
+      </p:sp>
+      <p:sp>
+        <p:nvSpPr>
+          <p:cNvPr id="28" name="Text 26"/>
+          <p:cNvSpPr/>
+          <p:nvPr/>
+        </p:nvSpPr>
+        <p:spPr>
+          <a:xfrm>
+            <a:off x="685800" y="5385816"/>
+            <a:ext cx="1600200" cy="292608"/>
+          </a:xfrm>
+          <a:prstGeom prst="rect">
+            <a:avLst/>
+          </a:prstGeom>
+          <a:noFill/>
+          <a:ln/>
+        </p:spPr>
+        <p:txBody>
+          <a:bodyPr wrap="square" lIns="0" tIns="0" rIns="0" bIns="0" rtlCol="0" anchor="ctr"/>
+          <a:lstStyle/>
+          <a:p>
+            <a:pPr indent="0" marL="0">
+              <a:buNone/>
+            </a:pPr>
+            <a:r>
+              <a:rPr lang="en-US" sz="900" b="1" dirty="0">
+                <a:solidFill>
+                  <a:srgbClr val="101B33"/>
+                </a:solidFill>
+                <a:latin typeface="맑은 고딕" pitchFamily="34" charset="0"/>
+                <a:ea typeface="맑은 고딕" pitchFamily="34" charset="-122"/>
+                <a:cs typeface="맑은 고딕" pitchFamily="34" charset="-120"/>
+              </a:rPr>
+              <a:t>전문가활용비</a:t>
+            </a:r>
+            <a:endParaRPr lang="en-US" sz="900" dirty="0"/>
+          </a:p>
+        </p:txBody>
+      </p:sp>
+      <p:sp>
+        <p:nvSpPr>
+          <p:cNvPr id="29" name="Text 27"/>
+          <p:cNvSpPr/>
+          <p:nvPr/>
+        </p:nvSpPr>
+        <p:spPr>
+          <a:xfrm>
+            <a:off x="2377440" y="5385816"/>
+            <a:ext cx="9098280" cy="292608"/>
+          </a:xfrm>
+          <a:prstGeom prst="rect">
+            <a:avLst/>
+          </a:prstGeom>
+          <a:noFill/>
+          <a:ln/>
+        </p:spPr>
+        <p:txBody>
+          <a:bodyPr wrap="square" lIns="0" tIns="0" rIns="0" bIns="0" rtlCol="0" anchor="ctr"/>
+          <a:lstStyle/>
+          <a:p>
+            <a:pPr indent="0" marL="0">
+              <a:buNone/>
+            </a:pPr>
+            <a:r>
+              <a:rPr lang="en-US" sz="850" dirty="0">
+                <a:solidFill>
+                  <a:srgbClr val="4A5262"/>
+                </a:solidFill>
+                <a:latin typeface="맑은 고딕" pitchFamily="34" charset="0"/>
+                <a:ea typeface="맑은 고딕" pitchFamily="34" charset="-122"/>
+                <a:cs typeface="맑은 고딕" pitchFamily="34" charset="-120"/>
+              </a:rPr>
+              <a:t>자문계획서·결과보고서(증빙사진·이력·일자·시간) / 수당지급조서 / 전문가 이력 확인자료</a:t>
+            </a:r>
+            <a:endParaRPr lang="en-US" sz="850" dirty="0"/>
+          </a:p>
+        </p:txBody>
+      </p:sp>
+      <p:sp>
+        <p:nvSpPr>
+          <p:cNvPr id="30" name="Text 28"/>
+          <p:cNvSpPr/>
+          <p:nvPr/>
+        </p:nvSpPr>
+        <p:spPr>
+          <a:xfrm>
+            <a:off x="685800" y="5678424"/>
+            <a:ext cx="1600200" cy="292608"/>
+          </a:xfrm>
+          <a:prstGeom prst="rect">
+            <a:avLst/>
+          </a:prstGeom>
+          <a:noFill/>
+          <a:ln/>
+        </p:spPr>
+        <p:txBody>
+          <a:bodyPr wrap="square" lIns="0" tIns="0" rIns="0" bIns="0" rtlCol="0" anchor="ctr"/>
+          <a:lstStyle/>
+          <a:p>
+            <a:pPr indent="0" marL="0">
+              <a:buNone/>
+            </a:pPr>
+            <a:r>
+              <a:rPr lang="en-US" sz="900" b="1" dirty="0">
+                <a:solidFill>
+                  <a:srgbClr val="101B33"/>
+                </a:solidFill>
+                <a:latin typeface="맑은 고딕" pitchFamily="34" charset="0"/>
+                <a:ea typeface="맑은 고딕" pitchFamily="34" charset="-122"/>
+                <a:cs typeface="맑은 고딕" pitchFamily="34" charset="-120"/>
+              </a:rPr>
+              <a:t>임차료</a:t>
+            </a:r>
+            <a:endParaRPr lang="en-US" sz="900" dirty="0"/>
+          </a:p>
+        </p:txBody>
+      </p:sp>
+      <p:sp>
+        <p:nvSpPr>
+          <p:cNvPr id="31" name="Text 29"/>
+          <p:cNvSpPr/>
+          <p:nvPr/>
+        </p:nvSpPr>
+        <p:spPr>
+          <a:xfrm>
+            <a:off x="2377440" y="5678424"/>
+            <a:ext cx="9098280" cy="292608"/>
+          </a:xfrm>
+          <a:prstGeom prst="rect">
+            <a:avLst/>
+          </a:prstGeom>
+          <a:noFill/>
+          <a:ln/>
+        </p:spPr>
+        <p:txBody>
+          <a:bodyPr wrap="square" lIns="0" tIns="0" rIns="0" bIns="0" rtlCol="0" anchor="ctr"/>
+          <a:lstStyle/>
+          <a:p>
+            <a:pPr indent="0" marL="0">
+              <a:buNone/>
+            </a:pPr>
+            <a:r>
+              <a:rPr lang="en-US" sz="850" dirty="0">
+                <a:solidFill>
+                  <a:srgbClr val="4A5262"/>
+                </a:solidFill>
+                <a:latin typeface="맑은 고딕" pitchFamily="34" charset="0"/>
+                <a:ea typeface="맑은 고딕" pitchFamily="34" charset="-122"/>
+                <a:cs typeface="맑은 고딕" pitchFamily="34" charset="-120"/>
+              </a:rPr>
+              <a:t>사용계획서·결과보고서(증빙사진) / 계약서 / 견적서 / 집행증빙 / 반납증명서</a:t>
+            </a:r>
+            <a:endParaRPr lang="en-US" sz="850" dirty="0"/>
+          </a:p>
+        </p:txBody>
+      </p:sp>
+      <p:sp>
+        <p:nvSpPr>
+          <p:cNvPr id="32" name="Text 30"/>
+          <p:cNvSpPr/>
+          <p:nvPr/>
+        </p:nvSpPr>
+        <p:spPr>
+          <a:xfrm>
+            <a:off x="685800" y="5971032"/>
+            <a:ext cx="1600200" cy="292608"/>
+          </a:xfrm>
+          <a:prstGeom prst="rect">
+            <a:avLst/>
+          </a:prstGeom>
+          <a:noFill/>
+          <a:ln/>
+        </p:spPr>
+        <p:txBody>
+          <a:bodyPr wrap="square" lIns="0" tIns="0" rIns="0" bIns="0" rtlCol="0" anchor="ctr"/>
+          <a:lstStyle/>
+          <a:p>
+            <a:pPr indent="0" marL="0">
+              <a:buNone/>
+            </a:pPr>
+            <a:r>
+              <a:rPr lang="en-US" sz="900" b="1" dirty="0">
+                <a:solidFill>
+                  <a:srgbClr val="101B33"/>
+                </a:solidFill>
+                <a:latin typeface="맑은 고딕" pitchFamily="34" charset="0"/>
+                <a:ea typeface="맑은 고딕" pitchFamily="34" charset="-122"/>
+                <a:cs typeface="맑은 고딕" pitchFamily="34" charset="-120"/>
+              </a:rPr>
+              <a:t>재료비</a:t>
+            </a:r>
+            <a:endParaRPr lang="en-US" sz="900" dirty="0"/>
+          </a:p>
+        </p:txBody>
+      </p:sp>
+      <p:sp>
+        <p:nvSpPr>
+          <p:cNvPr id="33" name="Text 31"/>
+          <p:cNvSpPr/>
+          <p:nvPr/>
+        </p:nvSpPr>
+        <p:spPr>
+          <a:xfrm>
+            <a:off x="2377440" y="5971032"/>
+            <a:ext cx="9098280" cy="292608"/>
+          </a:xfrm>
+          <a:prstGeom prst="rect">
+            <a:avLst/>
+          </a:prstGeom>
+          <a:noFill/>
+          <a:ln/>
+        </p:spPr>
+        <p:txBody>
+          <a:bodyPr wrap="square" lIns="0" tIns="0" rIns="0" bIns="0" rtlCol="0" anchor="ctr"/>
+          <a:lstStyle/>
+          <a:p>
+            <a:pPr indent="0" marL="0">
+              <a:buNone/>
+            </a:pPr>
+            <a:r>
+              <a:rPr lang="en-US" sz="850" dirty="0">
+                <a:solidFill>
+                  <a:srgbClr val="4A5262"/>
+                </a:solidFill>
+                <a:latin typeface="맑은 고딕" pitchFamily="34" charset="0"/>
+                <a:ea typeface="맑은 고딕" pitchFamily="34" charset="-122"/>
+                <a:cs typeface="맑은 고딕" pitchFamily="34" charset="-120"/>
+              </a:rPr>
+              <a:t>재료비 활용계획서 / 견적서·비교견적서(품목·수량 필수) / 집행증빙 / 검수조서(증빙사진 필수)</a:t>
+            </a:r>
+            <a:endParaRPr lang="en-US" sz="850" dirty="0"/>
+          </a:p>
+        </p:txBody>
+      </p:sp>
+      <p:sp>
+        <p:nvSpPr>
+          <p:cNvPr id="34" name="Text 32"/>
+          <p:cNvSpPr/>
+          <p:nvPr/>
+        </p:nvSpPr>
+        <p:spPr>
+          <a:xfrm>
+            <a:off x="685800" y="6263640"/>
+            <a:ext cx="1600200" cy="292608"/>
+          </a:xfrm>
+          <a:prstGeom prst="rect">
+            <a:avLst/>
+          </a:prstGeom>
+          <a:noFill/>
+          <a:ln/>
+        </p:spPr>
+        <p:txBody>
+          <a:bodyPr wrap="square" lIns="0" tIns="0" rIns="0" bIns="0" rtlCol="0" anchor="ctr"/>
+          <a:lstStyle/>
+          <a:p>
+            <a:pPr indent="0" marL="0">
+              <a:buNone/>
+            </a:pPr>
+            <a:r>
+              <a:rPr lang="en-US" sz="900" b="1" dirty="0">
+                <a:solidFill>
+                  <a:srgbClr val="101B33"/>
+                </a:solidFill>
+                <a:latin typeface="맑은 고딕" pitchFamily="34" charset="0"/>
+                <a:ea typeface="맑은 고딕" pitchFamily="34" charset="-122"/>
+                <a:cs typeface="맑은 고딕" pitchFamily="34" charset="-120"/>
+              </a:rPr>
+              <a:t>대응자금(현물)</a:t>
+            </a:r>
+            <a:endParaRPr lang="en-US" sz="900" dirty="0"/>
+          </a:p>
+        </p:txBody>
+      </p:sp>
+      <p:sp>
+        <p:nvSpPr>
+          <p:cNvPr id="35" name="Text 33"/>
+          <p:cNvSpPr/>
+          <p:nvPr/>
+        </p:nvSpPr>
+        <p:spPr>
+          <a:xfrm>
+            <a:off x="2377440" y="6263640"/>
+            <a:ext cx="9098280" cy="292608"/>
+          </a:xfrm>
+          <a:prstGeom prst="rect">
+            <a:avLst/>
+          </a:prstGeom>
+          <a:noFill/>
+          <a:ln/>
+        </p:spPr>
+        <p:txBody>
+          <a:bodyPr wrap="square" lIns="0" tIns="0" rIns="0" bIns="0" rtlCol="0" anchor="ctr"/>
+          <a:lstStyle/>
+          <a:p>
+            <a:pPr indent="0" marL="0">
+              <a:buNone/>
+            </a:pPr>
+            <a:r>
+              <a:rPr lang="en-US" sz="850" dirty="0">
+                <a:solidFill>
+                  <a:srgbClr val="4A5262"/>
+                </a:solidFill>
+                <a:latin typeface="맑은 고딕" pitchFamily="34" charset="0"/>
+                <a:ea typeface="맑은 고딕" pitchFamily="34" charset="-122"/>
+                <a:cs typeface="맑은 고딕" pitchFamily="34" charset="-120"/>
+              </a:rPr>
+              <a:t>대응자금(현물) 납부 확인서 / 신분확인서 / 원천징수영수증 또는 최저임금 고시문 / 임대차계약서·공간사진·이체확인증</a:t>
+            </a:r>
+            <a:endParaRPr lang="en-US" sz="850" dirty="0"/>
+          </a:p>
+        </p:txBody>
+      </p:sp>
+      <p:sp>
+        <p:nvSpPr>
+          <p:cNvPr id="36" name="Text 34"/>
+          <p:cNvSpPr/>
+          <p:nvPr/>
+        </p:nvSpPr>
+        <p:spPr>
+          <a:xfrm>
+            <a:off x="11155680" y="6291072"/>
+            <a:ext cx="548640" cy="274320"/>
+          </a:xfrm>
+          <a:prstGeom prst="rect">
+            <a:avLst/>
+          </a:prstGeom>
+          <a:noFill/>
+          <a:ln/>
+        </p:spPr>
+        <p:txBody>
+          <a:bodyPr wrap="square" lIns="0" tIns="0" rIns="0" bIns="0" rtlCol="0" anchor="ctr"/>
+          <a:lstStyle/>
+          <a:p>
+            <a:pPr algn="r" indent="0" marL="0">
+              <a:buNone/>
+            </a:pPr>
+            <a:r>
+              <a:rPr lang="en-US" sz="1000" dirty="0">
+                <a:solidFill>
+                  <a:srgbClr val="9AA3B0"/>
+                </a:solidFill>
+                <a:latin typeface="맑은 고딕" pitchFamily="34" charset="0"/>
+                <a:ea typeface="맑은 고딕" pitchFamily="34" charset="-122"/>
+                <a:cs typeface="맑은 고딕" pitchFamily="34" charset="-120"/>
+              </a:rPr>
+              <a:t>16</a:t>
+            </a:r>
+            <a:endParaRPr lang="en-US" sz="1000" dirty="0"/>
+          </a:p>
+        </p:txBody>
+      </p:sp>
+    </p:spTree>
+  </p:cSld>
+  <p:clrMapOvr>
+    <a:masterClrMapping/>
+  </p:clrMapOvr>
+</p:sld>
+</file>
+
+<file path=ppt/slides/slide17.xml><?xml version="1.0" encoding="utf-8"?>
+<p:sld xmlns:a="http://schemas.openxmlformats.org/drawingml/2006/main" xmlns:r="http://schemas.openxmlformats.org/officeDocument/2006/relationships" xmlns:p="http://schemas.openxmlformats.org/presentationml/2006/main">
+  <p:cSld name="Slide 17">
+    <p:bg>
+      <p:bgPr>
+        <a:solidFill>
+          <a:srgbClr val="FFFFFF"/>
+        </a:solidFill>
+      </p:bgPr>
+    </p:bg>
+    <p:spTree>
+      <p:nvGrpSpPr>
+        <p:cNvPr id="1" name=""/>
+        <p:cNvGrpSpPr/>
+        <p:nvPr/>
+      </p:nvGrpSpPr>
+      <p:grpSpPr>
+        <a:xfrm>
+          <a:off x="0" y="0"/>
+          <a:ext cx="0" cy="0"/>
+          <a:chOff x="0" y="0"/>
+          <a:chExt cx="0" cy="0"/>
+        </a:xfrm>
+      </p:grpSpPr>
+      <p:sp>
+        <p:nvSpPr>
+          <p:cNvPr id="2" name="Text 0"/>
+          <p:cNvSpPr/>
+          <p:nvPr/>
+        </p:nvSpPr>
+        <p:spPr>
+          <a:xfrm>
+            <a:off x="640080" y="457200"/>
+            <a:ext cx="7315200" cy="274320"/>
+          </a:xfrm>
+          <a:prstGeom prst="rect">
+            <a:avLst/>
+          </a:prstGeom>
+          <a:noFill/>
+          <a:ln/>
+        </p:spPr>
+        <p:txBody>
+          <a:bodyPr wrap="square" lIns="0" tIns="0" rIns="0" bIns="0" rtlCol="0" anchor="ctr"/>
+          <a:lstStyle/>
+          <a:p>
+            <a:pPr indent="0" marL="0">
+              <a:buNone/>
+            </a:pPr>
+            <a:r>
+              <a:rPr lang="en-US" sz="1200" b="1" spc="200" kern="0" dirty="0">
+                <a:solidFill>
+                  <a:srgbClr val="0075C9"/>
+                </a:solidFill>
+                <a:latin typeface="맑은 고딕" pitchFamily="34" charset="0"/>
+                <a:ea typeface="맑은 고딕" pitchFamily="34" charset="-122"/>
+                <a:cs typeface="맑은 고딕" pitchFamily="34" charset="-120"/>
+              </a:rPr>
+              <a:t>BUDGET · 집행</a:t>
+            </a:r>
+            <a:endParaRPr lang="en-US" sz="1200" dirty="0"/>
+          </a:p>
+        </p:txBody>
+      </p:sp>
+      <p:sp>
+        <p:nvSpPr>
+          <p:cNvPr id="3" name="Text 1"/>
+          <p:cNvSpPr/>
+          <p:nvPr/>
+        </p:nvSpPr>
+        <p:spPr>
+          <a:xfrm>
+            <a:off x="640080" y="749808"/>
+            <a:ext cx="8412480" cy="932688"/>
+          </a:xfrm>
+          <a:prstGeom prst="rect">
+            <a:avLst/>
+          </a:prstGeom>
+          <a:noFill/>
+          <a:ln/>
+        </p:spPr>
+        <p:txBody>
+          <a:bodyPr wrap="square" lIns="0" tIns="0" rIns="0" bIns="0" rtlCol="0" anchor="t"/>
+          <a:lstStyle/>
+          <a:p>
+            <a:pPr indent="0" marL="0">
+              <a:buNone/>
+            </a:pPr>
+            <a:r>
+              <a:rPr lang="en-US" sz="3000" b="1" dirty="0">
+                <a:solidFill>
+                  <a:srgbClr val="101B33"/>
+                </a:solidFill>
+                <a:latin typeface="맑은 고딕" pitchFamily="34" charset="0"/>
+                <a:ea typeface="맑은 고딕" pitchFamily="34" charset="-122"/>
+                <a:cs typeface="맑은 고딕" pitchFamily="34" charset="-120"/>
+              </a:rPr>
+              <a:t>미리 알고 가는 열 가지</a:t>
+            </a:r>
+            <a:endParaRPr lang="en-US" sz="3000" dirty="0"/>
+          </a:p>
+        </p:txBody>
+      </p:sp>
+      <p:sp>
+        <p:nvSpPr>
+          <p:cNvPr id="4" name="Text 2"/>
+          <p:cNvSpPr/>
+          <p:nvPr/>
+        </p:nvSpPr>
+        <p:spPr>
+          <a:xfrm>
+            <a:off x="640080" y="1783080"/>
+            <a:ext cx="10881360" cy="274320"/>
+          </a:xfrm>
+          <a:prstGeom prst="rect">
+            <a:avLst/>
+          </a:prstGeom>
+          <a:noFill/>
+          <a:ln/>
+        </p:spPr>
+        <p:txBody>
+          <a:bodyPr wrap="square" lIns="0" tIns="0" rIns="0" bIns="0" rtlCol="0" anchor="ctr"/>
+          <a:lstStyle/>
+          <a:p>
+            <a:pPr indent="0" marL="0">
+              <a:buNone/>
+            </a:pPr>
+            <a:r>
+              <a:rPr lang="en-US" sz="1050" dirty="0">
+                <a:solidFill>
+                  <a:srgbClr val="4A5262"/>
+                </a:solidFill>
+                <a:latin typeface="맑은 고딕" pitchFamily="34" charset="0"/>
+                <a:ea typeface="맑은 고딕" pitchFamily="34" charset="-122"/>
+                <a:cs typeface="맑은 고딕" pitchFamily="34" charset="-120"/>
+              </a:rPr>
+              <a:t>소상공인 사업비 집행기준 &lt;별표 11&gt; · 집행 유의사항 &lt;별표 12&gt;에서 우리 사업에 걸리는 것만 추렸다.</a:t>
+            </a:r>
+            <a:endParaRPr lang="en-US" sz="1050" dirty="0"/>
+          </a:p>
+        </p:txBody>
+      </p:sp>
+      <p:sp>
+        <p:nvSpPr>
+          <p:cNvPr id="5" name="Shape 3"/>
+          <p:cNvSpPr/>
+          <p:nvPr/>
+        </p:nvSpPr>
+        <p:spPr>
+          <a:xfrm>
+            <a:off x="640080" y="2240280"/>
+            <a:ext cx="41148" cy="786384"/>
+          </a:xfrm>
+          <a:prstGeom prst="rect">
+            <a:avLst/>
+          </a:prstGeom>
+          <a:solidFill>
+            <a:srgbClr val="0075C9"/>
+          </a:solidFill>
+          <a:ln/>
+        </p:spPr>
+      </p:sp>
+      <p:sp>
+        <p:nvSpPr>
+          <p:cNvPr id="6" name="Text 4"/>
+          <p:cNvSpPr/>
+          <p:nvPr/>
+        </p:nvSpPr>
+        <p:spPr>
+          <a:xfrm>
+            <a:off x="841248" y="2258568"/>
+            <a:ext cx="5074920" cy="256032"/>
+          </a:xfrm>
+          <a:prstGeom prst="rect">
+            <a:avLst/>
+          </a:prstGeom>
+          <a:noFill/>
+          <a:ln/>
+        </p:spPr>
+        <p:txBody>
+          <a:bodyPr wrap="square" lIns="0" tIns="0" rIns="0" bIns="0" rtlCol="0" anchor="ctr"/>
+          <a:lstStyle/>
+          <a:p>
+            <a:pPr indent="0" marL="0">
+              <a:buNone/>
+            </a:pPr>
+            <a:r>
+              <a:rPr lang="en-US" sz="1100" b="1" dirty="0">
+                <a:solidFill>
+                  <a:srgbClr val="101B33"/>
+                </a:solidFill>
+                <a:latin typeface="맑은 고딕" pitchFamily="34" charset="0"/>
+                <a:ea typeface="맑은 고딕" pitchFamily="34" charset="-122"/>
+                <a:cs typeface="맑은 고딕" pitchFamily="34" charset="-120"/>
+              </a:rPr>
+              <a:t>부가세 10%는 사업비로 못 쓴다</a:t>
+            </a:r>
+            <a:endParaRPr lang="en-US" sz="1100" dirty="0"/>
+          </a:p>
+        </p:txBody>
+      </p:sp>
+      <p:sp>
+        <p:nvSpPr>
+          <p:cNvPr id="7" name="Text 5"/>
+          <p:cNvSpPr/>
+          <p:nvPr/>
+        </p:nvSpPr>
+        <p:spPr>
+          <a:xfrm>
+            <a:off x="841248" y="2514600"/>
+            <a:ext cx="5074920" cy="502920"/>
+          </a:xfrm>
+          <a:prstGeom prst="rect">
+            <a:avLst/>
+          </a:prstGeom>
+          <a:noFill/>
+          <a:ln/>
+        </p:spPr>
+        <p:txBody>
+          <a:bodyPr wrap="square" lIns="0" tIns="0" rIns="0" bIns="0" rtlCol="0" anchor="t"/>
+          <a:lstStyle/>
+          <a:p>
+            <a:pPr indent="0" marL="0">
+              <a:lnSpc>
+                <a:spcPts val="1150"/>
+              </a:lnSpc>
+              <a:buNone/>
+            </a:pPr>
+            <a:r>
+              <a:rPr lang="en-US" sz="880" dirty="0">
+                <a:solidFill>
+                  <a:srgbClr val="4A5262"/>
+                </a:solidFill>
+                <a:latin typeface="맑은 고딕" pitchFamily="34" charset="0"/>
+                <a:ea typeface="맑은 고딕" pitchFamily="34" charset="-122"/>
+                <a:cs typeface="맑은 고딕" pitchFamily="34" charset="-120"/>
+              </a:rPr>
+              <a:t>모든 견적을 공급가액 기준으로 받고, 부가세는 우리 돈으로 낸다. 4,000만원 사업이면 부가세만 400만원이 따로 든다.</a:t>
+            </a:r>
+            <a:endParaRPr lang="en-US" sz="880" dirty="0"/>
+          </a:p>
+        </p:txBody>
+      </p:sp>
+      <p:sp>
+        <p:nvSpPr>
+          <p:cNvPr id="8" name="Shape 6"/>
+          <p:cNvSpPr/>
+          <p:nvPr/>
+        </p:nvSpPr>
+        <p:spPr>
+          <a:xfrm>
+            <a:off x="6309360" y="2240280"/>
+            <a:ext cx="41148" cy="786384"/>
+          </a:xfrm>
+          <a:prstGeom prst="rect">
+            <a:avLst/>
+          </a:prstGeom>
+          <a:solidFill>
+            <a:srgbClr val="B0442C"/>
+          </a:solidFill>
+          <a:ln/>
+        </p:spPr>
+      </p:sp>
+      <p:sp>
+        <p:nvSpPr>
+          <p:cNvPr id="9" name="Text 7"/>
+          <p:cNvSpPr/>
+          <p:nvPr/>
+        </p:nvSpPr>
+        <p:spPr>
+          <a:xfrm>
+            <a:off x="6510528" y="2258568"/>
+            <a:ext cx="5074920" cy="256032"/>
+          </a:xfrm>
+          <a:prstGeom prst="rect">
+            <a:avLst/>
+          </a:prstGeom>
+          <a:noFill/>
+          <a:ln/>
+        </p:spPr>
+        <p:txBody>
+          <a:bodyPr wrap="square" lIns="0" tIns="0" rIns="0" bIns="0" rtlCol="0" anchor="ctr"/>
+          <a:lstStyle/>
+          <a:p>
+            <a:pPr indent="0" marL="0">
+              <a:buNone/>
+            </a:pPr>
+            <a:r>
+              <a:rPr lang="en-US" sz="1100" b="1" dirty="0">
+                <a:solidFill>
+                  <a:srgbClr val="B0442C"/>
+                </a:solidFill>
+                <a:latin typeface="맑은 고딕" pitchFamily="34" charset="0"/>
+                <a:ea typeface="맑은 고딕" pitchFamily="34" charset="-122"/>
+                <a:cs typeface="맑은 고딕" pitchFamily="34" charset="-120"/>
+              </a:rPr>
+              <a:t>해외 업체와 직접 거래는 집행 불가</a:t>
+            </a:r>
+            <a:endParaRPr lang="en-US" sz="1100" dirty="0"/>
+          </a:p>
+        </p:txBody>
+      </p:sp>
+      <p:sp>
+        <p:nvSpPr>
+          <p:cNvPr id="10" name="Text 8"/>
+          <p:cNvSpPr/>
+          <p:nvPr/>
+        </p:nvSpPr>
+        <p:spPr>
+          <a:xfrm>
+            <a:off x="6510528" y="2514600"/>
+            <a:ext cx="5074920" cy="502920"/>
+          </a:xfrm>
+          <a:prstGeom prst="rect">
+            <a:avLst/>
+          </a:prstGeom>
+          <a:noFill/>
+          <a:ln/>
+        </p:spPr>
+        <p:txBody>
+          <a:bodyPr wrap="square" lIns="0" tIns="0" rIns="0" bIns="0" rtlCol="0" anchor="t"/>
+          <a:lstStyle/>
+          <a:p>
+            <a:pPr indent="0" marL="0">
+              <a:lnSpc>
+                <a:spcPts val="1150"/>
+              </a:lnSpc>
+              <a:buNone/>
+            </a:pPr>
+            <a:r>
+              <a:rPr lang="en-US" sz="880" dirty="0">
+                <a:solidFill>
+                  <a:srgbClr val="4A5262"/>
+                </a:solidFill>
+                <a:latin typeface="맑은 고딕" pitchFamily="34" charset="0"/>
+                <a:ea typeface="맑은 고딕" pitchFamily="34" charset="-122"/>
+                <a:cs typeface="맑은 고딕" pitchFamily="34" charset="-120"/>
+              </a:rPr>
+              <a:t>생성형 AI API·클라우드 GPU는 대부분 해외 결제다. 국내 총판이나 리셀러를 통해 전자세금계산서를 받아야 한다. 우리 서비스에서 가장 걸리기 쉬운 항목이다.</a:t>
+            </a:r>
+            <a:endParaRPr lang="en-US" sz="880" dirty="0"/>
+          </a:p>
+        </p:txBody>
+      </p:sp>
+      <p:sp>
+        <p:nvSpPr>
+          <p:cNvPr id="11" name="Shape 9"/>
+          <p:cNvSpPr/>
+          <p:nvPr/>
+        </p:nvSpPr>
+        <p:spPr>
+          <a:xfrm>
+            <a:off x="640080" y="3118104"/>
+            <a:ext cx="41148" cy="786384"/>
+          </a:xfrm>
+          <a:prstGeom prst="rect">
+            <a:avLst/>
+          </a:prstGeom>
+          <a:solidFill>
+            <a:srgbClr val="0F7A4A"/>
+          </a:solidFill>
+          <a:ln/>
+        </p:spPr>
+      </p:sp>
+      <p:sp>
+        <p:nvSpPr>
+          <p:cNvPr id="12" name="Text 10"/>
+          <p:cNvSpPr/>
+          <p:nvPr/>
+        </p:nvSpPr>
+        <p:spPr>
+          <a:xfrm>
+            <a:off x="841248" y="3136392"/>
+            <a:ext cx="5074920" cy="256032"/>
+          </a:xfrm>
+          <a:prstGeom prst="rect">
+            <a:avLst/>
+          </a:prstGeom>
+          <a:noFill/>
+          <a:ln/>
+        </p:spPr>
+        <p:txBody>
+          <a:bodyPr wrap="square" lIns="0" tIns="0" rIns="0" bIns="0" rtlCol="0" anchor="ctr"/>
+          <a:lstStyle/>
+          <a:p>
+            <a:pPr indent="0" marL="0">
+              <a:buNone/>
+            </a:pPr>
+            <a:r>
+              <a:rPr lang="en-US" sz="1100" b="1" dirty="0">
+                <a:solidFill>
+                  <a:srgbClr val="0F7A4A"/>
+                </a:solidFill>
+                <a:latin typeface="맑은 고딕" pitchFamily="34" charset="0"/>
+                <a:ea typeface="맑은 고딕" pitchFamily="34" charset="-122"/>
+                <a:cs typeface="맑은 고딕" pitchFamily="34" charset="-120"/>
+              </a:rPr>
+              <a:t>여성기업이라 수의계약 한도가 5천만원</a:t>
+            </a:r>
+            <a:endParaRPr lang="en-US" sz="1100" dirty="0"/>
+          </a:p>
+        </p:txBody>
+      </p:sp>
+      <p:sp>
+        <p:nvSpPr>
+          <p:cNvPr id="13" name="Text 11"/>
+          <p:cNvSpPr/>
+          <p:nvPr/>
+        </p:nvSpPr>
+        <p:spPr>
+          <a:xfrm>
+            <a:off x="841248" y="3392424"/>
+            <a:ext cx="5074920" cy="502920"/>
+          </a:xfrm>
+          <a:prstGeom prst="rect">
+            <a:avLst/>
+          </a:prstGeom>
+          <a:noFill/>
+          <a:ln/>
+        </p:spPr>
+        <p:txBody>
+          <a:bodyPr wrap="square" lIns="0" tIns="0" rIns="0" bIns="0" rtlCol="0" anchor="t"/>
+          <a:lstStyle/>
+          <a:p>
+            <a:pPr indent="0" marL="0">
+              <a:lnSpc>
+                <a:spcPts val="1150"/>
+              </a:lnSpc>
+              <a:buNone/>
+            </a:pPr>
+            <a:r>
+              <a:rPr lang="en-US" sz="880" dirty="0">
+                <a:solidFill>
+                  <a:srgbClr val="4A5262"/>
+                </a:solidFill>
+                <a:latin typeface="맑은 고딕" pitchFamily="34" charset="0"/>
+                <a:ea typeface="맑은 고딕" pitchFamily="34" charset="-122"/>
+                <a:cs typeface="맑은 고딕" pitchFamily="34" charset="-120"/>
+              </a:rPr>
+              <a:t>일반기업·소기업·소상공인은 2천만원까지지만 여성기업은 5천만원까지다. 계약 체결 시점에 여성기업 확인서가 유효해야 한다. 우리 확인서는 2028.11.06까지다.</a:t>
+            </a:r>
+            <a:endParaRPr lang="en-US" sz="880" dirty="0"/>
+          </a:p>
+        </p:txBody>
+      </p:sp>
+      <p:sp>
+        <p:nvSpPr>
+          <p:cNvPr id="14" name="Shape 12"/>
+          <p:cNvSpPr/>
+          <p:nvPr/>
+        </p:nvSpPr>
+        <p:spPr>
+          <a:xfrm>
+            <a:off x="6309360" y="3118104"/>
+            <a:ext cx="41148" cy="786384"/>
+          </a:xfrm>
+          <a:prstGeom prst="rect">
+            <a:avLst/>
+          </a:prstGeom>
+          <a:solidFill>
+            <a:srgbClr val="0075C9"/>
+          </a:solidFill>
+          <a:ln/>
+        </p:spPr>
+      </p:sp>
+      <p:sp>
+        <p:nvSpPr>
+          <p:cNvPr id="15" name="Text 13"/>
+          <p:cNvSpPr/>
+          <p:nvPr/>
+        </p:nvSpPr>
+        <p:spPr>
+          <a:xfrm>
+            <a:off x="6510528" y="3136392"/>
+            <a:ext cx="5074920" cy="256032"/>
+          </a:xfrm>
+          <a:prstGeom prst="rect">
+            <a:avLst/>
+          </a:prstGeom>
+          <a:noFill/>
+          <a:ln/>
+        </p:spPr>
+        <p:txBody>
+          <a:bodyPr wrap="square" lIns="0" tIns="0" rIns="0" bIns="0" rtlCol="0" anchor="ctr"/>
+          <a:lstStyle/>
+          <a:p>
+            <a:pPr indent="0" marL="0">
+              <a:buNone/>
+            </a:pPr>
+            <a:r>
+              <a:rPr lang="en-US" sz="1100" b="1" dirty="0">
+                <a:solidFill>
+                  <a:srgbClr val="101B33"/>
+                </a:solidFill>
+                <a:latin typeface="맑은 고딕" pitchFamily="34" charset="0"/>
+                <a:ea typeface="맑은 고딕" pitchFamily="34" charset="-122"/>
+                <a:cs typeface="맑은 고딕" pitchFamily="34" charset="-120"/>
+              </a:rPr>
+              <a:t>사전 공문 승인이 필요한 두 경우</a:t>
+            </a:r>
+            <a:endParaRPr lang="en-US" sz="1100" dirty="0"/>
+          </a:p>
+        </p:txBody>
+      </p:sp>
+      <p:sp>
+        <p:nvSpPr>
+          <p:cNvPr id="16" name="Text 14"/>
+          <p:cNvSpPr/>
+          <p:nvPr/>
+        </p:nvSpPr>
+        <p:spPr>
+          <a:xfrm>
+            <a:off x="6510528" y="3392424"/>
+            <a:ext cx="5074920" cy="502920"/>
+          </a:xfrm>
+          <a:prstGeom prst="rect">
+            <a:avLst/>
+          </a:prstGeom>
+          <a:noFill/>
+          <a:ln/>
+        </p:spPr>
+        <p:txBody>
+          <a:bodyPr wrap="square" lIns="0" tIns="0" rIns="0" bIns="0" rtlCol="0" anchor="t"/>
+          <a:lstStyle/>
+          <a:p>
+            <a:pPr indent="0" marL="0">
+              <a:lnSpc>
+                <a:spcPts val="1150"/>
+              </a:lnSpc>
+              <a:buNone/>
+            </a:pPr>
+            <a:r>
+              <a:rPr lang="en-US" sz="880" dirty="0">
+                <a:solidFill>
+                  <a:srgbClr val="4A5262"/>
+                </a:solidFill>
+                <a:latin typeface="맑은 고딕" pitchFamily="34" charset="0"/>
+                <a:ea typeface="맑은 고딕" pitchFamily="34" charset="-122"/>
+                <a:cs typeface="맑은 고딕" pitchFamily="34" charset="-120"/>
+              </a:rPr>
+              <a:t>① 외주용역 공급가액 2천만원 이상 또는 업력 1년 이하 업체와 계약할 때 ② 집행항목별 공급가액이 정부지원금의 50% 이상일 때. 승인 전에 결제하면 인정되지 않는다.</a:t>
+            </a:r>
+            <a:endParaRPr lang="en-US" sz="880" dirty="0"/>
+          </a:p>
+        </p:txBody>
+      </p:sp>
+      <p:sp>
+        <p:nvSpPr>
+          <p:cNvPr id="17" name="Shape 15"/>
+          <p:cNvSpPr/>
+          <p:nvPr/>
+        </p:nvSpPr>
+        <p:spPr>
+          <a:xfrm>
+            <a:off x="640080" y="3995928"/>
+            <a:ext cx="41148" cy="786384"/>
+          </a:xfrm>
+          <a:prstGeom prst="rect">
+            <a:avLst/>
+          </a:prstGeom>
+          <a:solidFill>
+            <a:srgbClr val="0075C9"/>
+          </a:solidFill>
+          <a:ln/>
+        </p:spPr>
+      </p:sp>
+      <p:sp>
+        <p:nvSpPr>
+          <p:cNvPr id="18" name="Text 16"/>
+          <p:cNvSpPr/>
+          <p:nvPr/>
+        </p:nvSpPr>
+        <p:spPr>
+          <a:xfrm>
+            <a:off x="841248" y="4014216"/>
+            <a:ext cx="5074920" cy="256032"/>
+          </a:xfrm>
+          <a:prstGeom prst="rect">
+            <a:avLst/>
+          </a:prstGeom>
+          <a:noFill/>
+          <a:ln/>
+        </p:spPr>
+        <p:txBody>
+          <a:bodyPr wrap="square" lIns="0" tIns="0" rIns="0" bIns="0" rtlCol="0" anchor="ctr"/>
+          <a:lstStyle/>
+          <a:p>
+            <a:pPr indent="0" marL="0">
+              <a:buNone/>
+            </a:pPr>
+            <a:r>
+              <a:rPr lang="en-US" sz="1100" b="1" dirty="0">
+                <a:solidFill>
+                  <a:srgbClr val="101B33"/>
+                </a:solidFill>
+                <a:latin typeface="맑은 고딕" pitchFamily="34" charset="0"/>
+                <a:ea typeface="맑은 고딕" pitchFamily="34" charset="-122"/>
+                <a:cs typeface="맑은 고딕" pitchFamily="34" charset="-120"/>
+              </a:rPr>
+              <a:t>구독료·라이선스는 협약기간 이내분만</a:t>
+            </a:r>
+            <a:endParaRPr lang="en-US" sz="1100" dirty="0"/>
+          </a:p>
+        </p:txBody>
+      </p:sp>
+      <p:sp>
+        <p:nvSpPr>
+          <p:cNvPr id="19" name="Text 17"/>
+          <p:cNvSpPr/>
+          <p:nvPr/>
+        </p:nvSpPr>
+        <p:spPr>
+          <a:xfrm>
+            <a:off x="841248" y="4270248"/>
+            <a:ext cx="5074920" cy="502920"/>
+          </a:xfrm>
+          <a:prstGeom prst="rect">
+            <a:avLst/>
+          </a:prstGeom>
+          <a:noFill/>
+          <a:ln/>
+        </p:spPr>
+        <p:txBody>
+          <a:bodyPr wrap="square" lIns="0" tIns="0" rIns="0" bIns="0" rtlCol="0" anchor="t"/>
+          <a:lstStyle/>
+          <a:p>
+            <a:pPr indent="0" marL="0">
+              <a:lnSpc>
+                <a:spcPts val="1150"/>
+              </a:lnSpc>
+              <a:buNone/>
+            </a:pPr>
+            <a:r>
+              <a:rPr lang="en-US" sz="880" dirty="0">
+                <a:solidFill>
+                  <a:srgbClr val="4A5262"/>
+                </a:solidFill>
+                <a:latin typeface="맑은 고딕" pitchFamily="34" charset="0"/>
+                <a:ea typeface="맑은 고딕" pitchFamily="34" charset="-122"/>
+                <a:cs typeface="맑은 고딕" pitchFamily="34" charset="-120"/>
+              </a:rPr>
+              <a:t>연 단위로 끊으면 협약기간을 넘는 몫은 인정되지 않는다. 월 결제로 끊는다.</a:t>
+            </a:r>
+            <a:endParaRPr lang="en-US" sz="880" dirty="0"/>
+          </a:p>
+        </p:txBody>
+      </p:sp>
+      <p:sp>
+        <p:nvSpPr>
+          <p:cNvPr id="20" name="Shape 18"/>
+          <p:cNvSpPr/>
+          <p:nvPr/>
+        </p:nvSpPr>
+        <p:spPr>
+          <a:xfrm>
+            <a:off x="6309360" y="3995928"/>
+            <a:ext cx="41148" cy="786384"/>
+          </a:xfrm>
+          <a:prstGeom prst="rect">
+            <a:avLst/>
+          </a:prstGeom>
+          <a:solidFill>
+            <a:srgbClr val="0075C9"/>
+          </a:solidFill>
+          <a:ln/>
+        </p:spPr>
+      </p:sp>
+      <p:sp>
+        <p:nvSpPr>
+          <p:cNvPr id="21" name="Text 19"/>
+          <p:cNvSpPr/>
+          <p:nvPr/>
+        </p:nvSpPr>
+        <p:spPr>
+          <a:xfrm>
+            <a:off x="6510528" y="4014216"/>
+            <a:ext cx="5074920" cy="256032"/>
+          </a:xfrm>
+          <a:prstGeom prst="rect">
+            <a:avLst/>
+          </a:prstGeom>
+          <a:noFill/>
+          <a:ln/>
+        </p:spPr>
+        <p:txBody>
+          <a:bodyPr wrap="square" lIns="0" tIns="0" rIns="0" bIns="0" rtlCol="0" anchor="ctr"/>
+          <a:lstStyle/>
+          <a:p>
+            <a:pPr indent="0" marL="0">
+              <a:buNone/>
+            </a:pPr>
+            <a:r>
+              <a:rPr lang="en-US" sz="1100" b="1" dirty="0">
+                <a:solidFill>
+                  <a:srgbClr val="101B33"/>
+                </a:solidFill>
+                <a:latin typeface="맑은 고딕" pitchFamily="34" charset="0"/>
+                <a:ea typeface="맑은 고딕" pitchFamily="34" charset="-122"/>
+                <a:cs typeface="맑은 고딕" pitchFamily="34" charset="-120"/>
+              </a:rPr>
+              <a:t>사업비카드 또는 세금계산서만</a:t>
+            </a:r>
+            <a:endParaRPr lang="en-US" sz="1100" dirty="0"/>
+          </a:p>
+        </p:txBody>
+      </p:sp>
+      <p:sp>
+        <p:nvSpPr>
+          <p:cNvPr id="22" name="Text 20"/>
+          <p:cNvSpPr/>
+          <p:nvPr/>
+        </p:nvSpPr>
+        <p:spPr>
+          <a:xfrm>
+            <a:off x="6510528" y="4270248"/>
+            <a:ext cx="5074920" cy="502920"/>
+          </a:xfrm>
+          <a:prstGeom prst="rect">
+            <a:avLst/>
+          </a:prstGeom>
+          <a:noFill/>
+          <a:ln/>
+        </p:spPr>
+        <p:txBody>
+          <a:bodyPr wrap="square" lIns="0" tIns="0" rIns="0" bIns="0" rtlCol="0" anchor="t"/>
+          <a:lstStyle/>
+          <a:p>
+            <a:pPr indent="0" marL="0">
+              <a:lnSpc>
+                <a:spcPts val="1150"/>
+              </a:lnSpc>
+              <a:buNone/>
+            </a:pPr>
+            <a:r>
+              <a:rPr lang="en-US" sz="880" dirty="0">
+                <a:solidFill>
+                  <a:srgbClr val="4A5262"/>
+                </a:solidFill>
+                <a:latin typeface="맑은 고딕" pitchFamily="34" charset="0"/>
+                <a:ea typeface="맑은 고딕" pitchFamily="34" charset="-122"/>
+                <a:cs typeface="맑은 고딕" pitchFamily="34" charset="-120"/>
+              </a:rPr>
+              <a:t>e나라도움 전용 사업비카드가 원칙이고 개인·법인카드는 금지다. 협약 시 신고한 사업비 통장에서의 직접 계좌이체만 인정된다.</a:t>
+            </a:r>
+            <a:endParaRPr lang="en-US" sz="880" dirty="0"/>
+          </a:p>
+        </p:txBody>
+      </p:sp>
+      <p:sp>
+        <p:nvSpPr>
+          <p:cNvPr id="23" name="Shape 21"/>
+          <p:cNvSpPr/>
+          <p:nvPr/>
+        </p:nvSpPr>
+        <p:spPr>
+          <a:xfrm>
+            <a:off x="640080" y="4873752"/>
+            <a:ext cx="41148" cy="786384"/>
+          </a:xfrm>
+          <a:prstGeom prst="rect">
+            <a:avLst/>
+          </a:prstGeom>
+          <a:solidFill>
+            <a:srgbClr val="0075C9"/>
+          </a:solidFill>
+          <a:ln/>
+        </p:spPr>
+      </p:sp>
+      <p:sp>
+        <p:nvSpPr>
+          <p:cNvPr id="24" name="Text 22"/>
+          <p:cNvSpPr/>
+          <p:nvPr/>
+        </p:nvSpPr>
+        <p:spPr>
+          <a:xfrm>
+            <a:off x="841248" y="4892040"/>
+            <a:ext cx="5074920" cy="256032"/>
+          </a:xfrm>
+          <a:prstGeom prst="rect">
+            <a:avLst/>
+          </a:prstGeom>
+          <a:noFill/>
+          <a:ln/>
+        </p:spPr>
+        <p:txBody>
+          <a:bodyPr wrap="square" lIns="0" tIns="0" rIns="0" bIns="0" rtlCol="0" anchor="ctr"/>
+          <a:lstStyle/>
+          <a:p>
+            <a:pPr indent="0" marL="0">
+              <a:buNone/>
+            </a:pPr>
+            <a:r>
+              <a:rPr lang="en-US" sz="1100" b="1" dirty="0">
+                <a:solidFill>
+                  <a:srgbClr val="101B33"/>
+                </a:solidFill>
+                <a:latin typeface="맑은 고딕" pitchFamily="34" charset="0"/>
+                <a:ea typeface="맑은 고딕" pitchFamily="34" charset="-122"/>
+                <a:cs typeface="맑은 고딕" pitchFamily="34" charset="-120"/>
+              </a:rPr>
+              <a:t>대응자금은 100% 소진이 필수</a:t>
+            </a:r>
+            <a:endParaRPr lang="en-US" sz="1100" dirty="0"/>
+          </a:p>
+        </p:txBody>
+      </p:sp>
+      <p:sp>
+        <p:nvSpPr>
+          <p:cNvPr id="25" name="Text 23"/>
+          <p:cNvSpPr/>
+          <p:nvPr/>
+        </p:nvSpPr>
+        <p:spPr>
+          <a:xfrm>
+            <a:off x="841248" y="5148072"/>
+            <a:ext cx="5074920" cy="502920"/>
+          </a:xfrm>
+          <a:prstGeom prst="rect">
+            <a:avLst/>
+          </a:prstGeom>
+          <a:noFill/>
+          <a:ln/>
+        </p:spPr>
+        <p:txBody>
+          <a:bodyPr wrap="square" lIns="0" tIns="0" rIns="0" bIns="0" rtlCol="0" anchor="t"/>
+          <a:lstStyle/>
+          <a:p>
+            <a:pPr indent="0" marL="0">
+              <a:lnSpc>
+                <a:spcPts val="1150"/>
+              </a:lnSpc>
+              <a:buNone/>
+            </a:pPr>
+            <a:r>
+              <a:rPr lang="en-US" sz="880" dirty="0">
+                <a:solidFill>
+                  <a:srgbClr val="4A5262"/>
+                </a:solidFill>
+                <a:latin typeface="맑은 고딕" pitchFamily="34" charset="0"/>
+                <a:ea typeface="맑은 고딕" pitchFamily="34" charset="-122"/>
+                <a:cs typeface="맑은 고딕" pitchFamily="34" charset="-120"/>
+              </a:rPr>
+              <a:t>계획에 대해 주관기관 사전 승인을 받아야 하고, 쓰다 남기면 안 된다.</a:t>
+            </a:r>
+            <a:endParaRPr lang="en-US" sz="880" dirty="0"/>
+          </a:p>
+        </p:txBody>
+      </p:sp>
+      <p:sp>
+        <p:nvSpPr>
+          <p:cNvPr id="26" name="Shape 24"/>
+          <p:cNvSpPr/>
+          <p:nvPr/>
+        </p:nvSpPr>
+        <p:spPr>
+          <a:xfrm>
+            <a:off x="6309360" y="4873752"/>
+            <a:ext cx="41148" cy="786384"/>
+          </a:xfrm>
+          <a:prstGeom prst="rect">
+            <a:avLst/>
+          </a:prstGeom>
+          <a:solidFill>
+            <a:srgbClr val="0075C9"/>
+          </a:solidFill>
+          <a:ln/>
+        </p:spPr>
+      </p:sp>
+      <p:sp>
+        <p:nvSpPr>
+          <p:cNvPr id="27" name="Text 25"/>
+          <p:cNvSpPr/>
+          <p:nvPr/>
+        </p:nvSpPr>
+        <p:spPr>
+          <a:xfrm>
+            <a:off x="6510528" y="4892040"/>
+            <a:ext cx="5074920" cy="256032"/>
+          </a:xfrm>
+          <a:prstGeom prst="rect">
+            <a:avLst/>
+          </a:prstGeom>
+          <a:noFill/>
+          <a:ln/>
+        </p:spPr>
+        <p:txBody>
+          <a:bodyPr wrap="square" lIns="0" tIns="0" rIns="0" bIns="0" rtlCol="0" anchor="ctr"/>
+          <a:lstStyle/>
+          <a:p>
+            <a:pPr indent="0" marL="0">
+              <a:buNone/>
+            </a:pPr>
+            <a:r>
+              <a:rPr lang="en-US" sz="1100" b="1" dirty="0">
+                <a:solidFill>
+                  <a:srgbClr val="101B33"/>
+                </a:solidFill>
+                <a:latin typeface="맑은 고딕" pitchFamily="34" charset="0"/>
+                <a:ea typeface="맑은 고딕" pitchFamily="34" charset="-122"/>
+                <a:cs typeface="맑은 고딕" pitchFamily="34" charset="-120"/>
+              </a:rPr>
+              <a:t>선금은 계약금액의 50%를 넘길 수 없다</a:t>
+            </a:r>
+            <a:endParaRPr lang="en-US" sz="1100" dirty="0"/>
+          </a:p>
+        </p:txBody>
+      </p:sp>
+      <p:sp>
+        <p:nvSpPr>
+          <p:cNvPr id="28" name="Text 26"/>
+          <p:cNvSpPr/>
+          <p:nvPr/>
+        </p:nvSpPr>
+        <p:spPr>
+          <a:xfrm>
+            <a:off x="6510528" y="5148072"/>
+            <a:ext cx="5074920" cy="502920"/>
+          </a:xfrm>
+          <a:prstGeom prst="rect">
+            <a:avLst/>
+          </a:prstGeom>
+          <a:noFill/>
+          <a:ln/>
+        </p:spPr>
+        <p:txBody>
+          <a:bodyPr wrap="square" lIns="0" tIns="0" rIns="0" bIns="0" rtlCol="0" anchor="t"/>
+          <a:lstStyle/>
+          <a:p>
+            <a:pPr indent="0" marL="0">
+              <a:lnSpc>
+                <a:spcPts val="1150"/>
+              </a:lnSpc>
+              <a:buNone/>
+            </a:pPr>
+            <a:r>
+              <a:rPr lang="en-US" sz="880" dirty="0">
+                <a:solidFill>
+                  <a:srgbClr val="4A5262"/>
+                </a:solidFill>
+                <a:latin typeface="맑은 고딕" pitchFamily="34" charset="0"/>
+                <a:ea typeface="맑은 고딕" pitchFamily="34" charset="-122"/>
+                <a:cs typeface="맑은 고딕" pitchFamily="34" charset="-120"/>
+              </a:rPr>
+              <a:t>외주용역비는 수행 완료 후 일시납이 원칙이고, 예외적으로 선급금·잔금 분할이 가능하다.</a:t>
+            </a:r>
+            <a:endParaRPr lang="en-US" sz="880" dirty="0"/>
+          </a:p>
+        </p:txBody>
+      </p:sp>
+      <p:sp>
+        <p:nvSpPr>
+          <p:cNvPr id="29" name="Shape 27"/>
+          <p:cNvSpPr/>
+          <p:nvPr/>
+        </p:nvSpPr>
+        <p:spPr>
+          <a:xfrm>
+            <a:off x="640080" y="5751576"/>
+            <a:ext cx="41148" cy="786384"/>
+          </a:xfrm>
+          <a:prstGeom prst="rect">
+            <a:avLst/>
+          </a:prstGeom>
+          <a:solidFill>
+            <a:srgbClr val="0075C9"/>
+          </a:solidFill>
+          <a:ln/>
+        </p:spPr>
+      </p:sp>
+      <p:sp>
+        <p:nvSpPr>
+          <p:cNvPr id="30" name="Text 28"/>
+          <p:cNvSpPr/>
+          <p:nvPr/>
+        </p:nvSpPr>
+        <p:spPr>
+          <a:xfrm>
+            <a:off x="841248" y="5769864"/>
+            <a:ext cx="5074920" cy="256032"/>
+          </a:xfrm>
+          <a:prstGeom prst="rect">
+            <a:avLst/>
+          </a:prstGeom>
+          <a:noFill/>
+          <a:ln/>
+        </p:spPr>
+        <p:txBody>
+          <a:bodyPr wrap="square" lIns="0" tIns="0" rIns="0" bIns="0" rtlCol="0" anchor="ctr"/>
+          <a:lstStyle/>
+          <a:p>
+            <a:pPr indent="0" marL="0">
+              <a:buNone/>
+            </a:pPr>
+            <a:r>
+              <a:rPr lang="en-US" sz="1100" b="1" dirty="0">
+                <a:solidFill>
+                  <a:srgbClr val="101B33"/>
+                </a:solidFill>
+                <a:latin typeface="맑은 고딕" pitchFamily="34" charset="0"/>
+                <a:ea typeface="맑은 고딕" pitchFamily="34" charset="-122"/>
+                <a:cs typeface="맑은 고딕" pitchFamily="34" charset="-120"/>
+              </a:rPr>
+              <a:t>같은 거래처에 유사 건으로 쪼개 쓸 수 없다</a:t>
+            </a:r>
+            <a:endParaRPr lang="en-US" sz="1100" dirty="0"/>
+          </a:p>
+        </p:txBody>
+      </p:sp>
+      <p:sp>
+        <p:nvSpPr>
+          <p:cNvPr id="31" name="Text 29"/>
+          <p:cNvSpPr/>
+          <p:nvPr/>
+        </p:nvSpPr>
+        <p:spPr>
+          <a:xfrm>
+            <a:off x="841248" y="6025896"/>
+            <a:ext cx="5074920" cy="502920"/>
+          </a:xfrm>
+          <a:prstGeom prst="rect">
+            <a:avLst/>
+          </a:prstGeom>
+          <a:noFill/>
+          <a:ln/>
+        </p:spPr>
+        <p:txBody>
+          <a:bodyPr wrap="square" lIns="0" tIns="0" rIns="0" bIns="0" rtlCol="0" anchor="t"/>
+          <a:lstStyle/>
+          <a:p>
+            <a:pPr indent="0" marL="0">
+              <a:lnSpc>
+                <a:spcPts val="1150"/>
+              </a:lnSpc>
+              <a:buNone/>
+            </a:pPr>
+            <a:r>
+              <a:rPr lang="en-US" sz="880" dirty="0">
+                <a:solidFill>
+                  <a:srgbClr val="4A5262"/>
+                </a:solidFill>
+                <a:latin typeface="맑은 고딕" pitchFamily="34" charset="0"/>
+                <a:ea typeface="맑은 고딕" pitchFamily="34" charset="-122"/>
+                <a:cs typeface="맑은 고딕" pitchFamily="34" charset="-120"/>
+              </a:rPr>
+              <a:t>한도를 피하려고 나누면 집행 불가다.</a:t>
+            </a:r>
+            <a:endParaRPr lang="en-US" sz="880" dirty="0"/>
+          </a:p>
+        </p:txBody>
+      </p:sp>
+      <p:sp>
+        <p:nvSpPr>
+          <p:cNvPr id="32" name="Shape 30"/>
+          <p:cNvSpPr/>
+          <p:nvPr/>
+        </p:nvSpPr>
+        <p:spPr>
+          <a:xfrm>
+            <a:off x="6309360" y="5751576"/>
+            <a:ext cx="41148" cy="786384"/>
+          </a:xfrm>
+          <a:prstGeom prst="rect">
+            <a:avLst/>
+          </a:prstGeom>
+          <a:solidFill>
+            <a:srgbClr val="0075C9"/>
+          </a:solidFill>
+          <a:ln/>
+        </p:spPr>
+      </p:sp>
+      <p:sp>
+        <p:nvSpPr>
+          <p:cNvPr id="33" name="Text 31"/>
+          <p:cNvSpPr/>
+          <p:nvPr/>
+        </p:nvSpPr>
+        <p:spPr>
+          <a:xfrm>
+            <a:off x="6510528" y="5769864"/>
+            <a:ext cx="5074920" cy="256032"/>
+          </a:xfrm>
+          <a:prstGeom prst="rect">
+            <a:avLst/>
+          </a:prstGeom>
+          <a:noFill/>
+          <a:ln/>
+        </p:spPr>
+        <p:txBody>
+          <a:bodyPr wrap="square" lIns="0" tIns="0" rIns="0" bIns="0" rtlCol="0" anchor="ctr"/>
+          <a:lstStyle/>
+          <a:p>
+            <a:pPr indent="0" marL="0">
+              <a:buNone/>
+            </a:pPr>
+            <a:r>
+              <a:rPr lang="en-US" sz="1100" b="1" dirty="0">
+                <a:solidFill>
+                  <a:srgbClr val="101B33"/>
+                </a:solidFill>
+                <a:latin typeface="맑은 고딕" pitchFamily="34" charset="0"/>
+                <a:ea typeface="맑은 고딕" pitchFamily="34" charset="-122"/>
+                <a:cs typeface="맑은 고딕" pitchFamily="34" charset="-120"/>
+              </a:rPr>
+              <a:t>집행기간은 협약종료일까지</a:t>
+            </a:r>
+            <a:endParaRPr lang="en-US" sz="1100" dirty="0"/>
+          </a:p>
+        </p:txBody>
+      </p:sp>
+      <p:sp>
+        <p:nvSpPr>
+          <p:cNvPr id="34" name="Text 32"/>
+          <p:cNvSpPr/>
+          <p:nvPr/>
+        </p:nvSpPr>
+        <p:spPr>
+          <a:xfrm>
+            <a:off x="6510528" y="6025896"/>
+            <a:ext cx="5074920" cy="502920"/>
+          </a:xfrm>
+          <a:prstGeom prst="rect">
+            <a:avLst/>
+          </a:prstGeom>
+          <a:noFill/>
+          <a:ln/>
+        </p:spPr>
+        <p:txBody>
+          <a:bodyPr wrap="square" lIns="0" tIns="0" rIns="0" bIns="0" rtlCol="0" anchor="t"/>
+          <a:lstStyle/>
+          <a:p>
+            <a:pPr indent="0" marL="0">
+              <a:lnSpc>
+                <a:spcPts val="1150"/>
+              </a:lnSpc>
+              <a:buNone/>
+            </a:pPr>
+            <a:r>
+              <a:rPr lang="en-US" sz="880" dirty="0">
+                <a:solidFill>
+                  <a:srgbClr val="4A5262"/>
+                </a:solidFill>
+                <a:latin typeface="맑은 고딕" pitchFamily="34" charset="0"/>
+                <a:ea typeface="맑은 고딕" pitchFamily="34" charset="-122"/>
+                <a:cs typeface="맑은 고딕" pitchFamily="34" charset="-120"/>
+              </a:rPr>
+              <a:t>카드승인일·세금계산서 작성일·영수증 발행일이 전부 협약기간 안이어야 한다. 결과물과 검수확인도 그 안에 끝내야 한다.</a:t>
+            </a:r>
+            <a:endParaRPr lang="en-US" sz="880" dirty="0"/>
+          </a:p>
+        </p:txBody>
+      </p:sp>
+      <p:sp>
+        <p:nvSpPr>
+          <p:cNvPr id="35" name="Text 33"/>
+          <p:cNvSpPr/>
+          <p:nvPr/>
+        </p:nvSpPr>
+        <p:spPr>
+          <a:xfrm>
+            <a:off x="11155680" y="6291072"/>
+            <a:ext cx="548640" cy="274320"/>
+          </a:xfrm>
+          <a:prstGeom prst="rect">
+            <a:avLst/>
+          </a:prstGeom>
+          <a:noFill/>
+          <a:ln/>
+        </p:spPr>
+        <p:txBody>
+          <a:bodyPr wrap="square" lIns="0" tIns="0" rIns="0" bIns="0" rtlCol="0" anchor="ctr"/>
+          <a:lstStyle/>
+          <a:p>
+            <a:pPr algn="r" indent="0" marL="0">
+              <a:buNone/>
+            </a:pPr>
+            <a:r>
+              <a:rPr lang="en-US" sz="1000" dirty="0">
+                <a:solidFill>
+                  <a:srgbClr val="9AA3B0"/>
+                </a:solidFill>
+                <a:latin typeface="맑은 고딕" pitchFamily="34" charset="0"/>
+                <a:ea typeface="맑은 고딕" pitchFamily="34" charset="-122"/>
+                <a:cs typeface="맑은 고딕" pitchFamily="34" charset="-120"/>
+              </a:rPr>
+              <a:t>17</a:t>
+            </a:r>
+            <a:endParaRPr lang="en-US" sz="1000" dirty="0"/>
+          </a:p>
+        </p:txBody>
+      </p:sp>
+    </p:spTree>
+  </p:cSld>
+  <p:clrMapOvr>
+    <a:masterClrMapping/>
+  </p:clrMapOvr>
+</p:sld>
+</file>
+
+<file path=ppt/slides/slide18.xml><?xml version="1.0" encoding="utf-8"?>
+<p:sld xmlns:a="http://schemas.openxmlformats.org/drawingml/2006/main" xmlns:r="http://schemas.openxmlformats.org/officeDocument/2006/relationships" xmlns:p="http://schemas.openxmlformats.org/presentationml/2006/main">
+  <p:cSld name="Slide 18">
+    <p:bg>
+      <p:bgPr>
+        <a:solidFill>
+          <a:srgbClr val="101B33"/>
+        </a:solidFill>
+      </p:bgPr>
+    </p:bg>
+    <p:spTree>
+      <p:nvGrpSpPr>
+        <p:cNvPr id="1" name=""/>
+        <p:cNvGrpSpPr/>
+        <p:nvPr/>
+      </p:nvGrpSpPr>
+      <p:grpSpPr>
+        <a:xfrm>
+          <a:off x="0" y="0"/>
+          <a:ext cx="0" cy="0"/>
+          <a:chOff x="0" y="0"/>
+          <a:chExt cx="0" cy="0"/>
+        </a:xfrm>
+      </p:grpSpPr>
+      <p:sp>
+        <p:nvSpPr>
+          <p:cNvPr id="2" name="Text 0"/>
+          <p:cNvSpPr/>
+          <p:nvPr/>
+        </p:nvSpPr>
+        <p:spPr>
+          <a:xfrm>
+            <a:off x="640080" y="457200"/>
+            <a:ext cx="7315200" cy="274320"/>
+          </a:xfrm>
+          <a:prstGeom prst="rect">
+            <a:avLst/>
+          </a:prstGeom>
+          <a:noFill/>
+          <a:ln/>
+        </p:spPr>
+        <p:txBody>
+          <a:bodyPr wrap="square" lIns="0" tIns="0" rIns="0" bIns="0" rtlCol="0" anchor="ctr"/>
+          <a:lstStyle/>
+          <a:p>
+            <a:pPr indent="0" marL="0">
+              <a:buNone/>
+            </a:pPr>
+            <a:r>
+              <a:rPr lang="en-US" sz="1200" b="1" spc="200" kern="0" dirty="0">
+                <a:solidFill>
+                  <a:srgbClr val="0075C9"/>
+                </a:solidFill>
+                <a:latin typeface="맑은 고딕" pitchFamily="34" charset="0"/>
+                <a:ea typeface="맑은 고딕" pitchFamily="34" charset="-122"/>
+                <a:cs typeface="맑은 고딕" pitchFamily="34" charset="-120"/>
+              </a:rPr>
+              <a:t>STATUS</a:t>
+            </a:r>
+            <a:endParaRPr lang="en-US" sz="1200" dirty="0"/>
+          </a:p>
+        </p:txBody>
+      </p:sp>
+      <p:sp>
+        <p:nvSpPr>
+          <p:cNvPr id="3" name="Text 1"/>
+          <p:cNvSpPr/>
+          <p:nvPr/>
+        </p:nvSpPr>
+        <p:spPr>
+          <a:xfrm>
+            <a:off x="640080" y="749808"/>
+            <a:ext cx="8412480" cy="932688"/>
+          </a:xfrm>
+          <a:prstGeom prst="rect">
+            <a:avLst/>
+          </a:prstGeom>
+          <a:noFill/>
+          <a:ln/>
+        </p:spPr>
+        <p:txBody>
+          <a:bodyPr wrap="square" lIns="0" tIns="0" rIns="0" bIns="0" rtlCol="0" anchor="t"/>
+          <a:lstStyle/>
+          <a:p>
+            <a:pPr indent="0" marL="0">
+              <a:buNone/>
+            </a:pPr>
+            <a:r>
+              <a:rPr lang="en-US" sz="3000" b="1" dirty="0">
+                <a:solidFill>
+                  <a:srgbClr val="FFFFFF"/>
+                </a:solidFill>
+                <a:latin typeface="맑은 고딕" pitchFamily="34" charset="0"/>
+                <a:ea typeface="맑은 고딕" pitchFamily="34" charset="-122"/>
+                <a:cs typeface="맑은 고딕" pitchFamily="34" charset="-120"/>
+              </a:rPr>
+              <a:t>오늘 만든 것</a:t>
+            </a:r>
+            <a:endParaRPr lang="en-US" sz="3000" dirty="0"/>
+          </a:p>
+        </p:txBody>
+      </p:sp>
+      <p:sp>
+        <p:nvSpPr>
+          <p:cNvPr id="4" name="Text 2"/>
+          <p:cNvSpPr/>
+          <p:nvPr/>
+        </p:nvSpPr>
+        <p:spPr>
+          <a:xfrm>
+            <a:off x="640080" y="1783080"/>
+            <a:ext cx="10881360" cy="310896"/>
+          </a:xfrm>
+          <a:prstGeom prst="rect">
+            <a:avLst/>
+          </a:prstGeom>
+          <a:noFill/>
+          <a:ln/>
+        </p:spPr>
+        <p:txBody>
+          <a:bodyPr wrap="square" lIns="0" tIns="0" rIns="0" bIns="0" rtlCol="0" anchor="ctr"/>
+          <a:lstStyle/>
+          <a:p>
+            <a:pPr indent="0" marL="0">
+              <a:buNone/>
+            </a:pPr>
+            <a:r>
+              <a:rPr lang="en-US" sz="1050" dirty="0">
+                <a:solidFill>
+                  <a:srgbClr val="8FA0BE"/>
+                </a:solidFill>
+                <a:latin typeface="맑은 고딕" pitchFamily="34" charset="0"/>
+                <a:ea typeface="맑은 고딕" pitchFamily="34" charset="-122"/>
+                <a:cs typeface="맑은 고딕" pitchFamily="34" charset="-120"/>
+              </a:rPr>
+              <a:t>아래는 이번 협약 이전에 자체 비용으로 만든 결과물이다. 사업비로 집행한 것이 아니므로 정산 대상이 아니며, 고도화의 출발점으로 제시한다.</a:t>
+            </a:r>
+            <a:endParaRPr lang="en-US" sz="1050" dirty="0"/>
+          </a:p>
+        </p:txBody>
+      </p:sp>
+      <p:sp>
+        <p:nvSpPr>
+          <p:cNvPr id="5" name="Shape 3"/>
+          <p:cNvSpPr/>
+          <p:nvPr/>
+        </p:nvSpPr>
+        <p:spPr>
+          <a:xfrm>
+            <a:off x="685800" y="2459736"/>
+            <a:ext cx="182880" cy="182880"/>
+          </a:xfrm>
+          <a:prstGeom prst="ellipse">
+            <a:avLst/>
+          </a:prstGeom>
+          <a:solidFill>
+            <a:srgbClr val="0075C9"/>
+          </a:solidFill>
+          <a:ln w="12700">
+            <a:solidFill>
+              <a:srgbClr val="0075C9"/>
+            </a:solidFill>
+            <a:prstDash val="solid"/>
+          </a:ln>
+        </p:spPr>
+      </p:sp>
+      <p:sp>
+        <p:nvSpPr>
+          <p:cNvPr id="6" name="Text 4"/>
+          <p:cNvSpPr/>
+          <p:nvPr/>
+        </p:nvSpPr>
+        <p:spPr>
+          <a:xfrm>
+            <a:off x="1097280" y="2331720"/>
+            <a:ext cx="3291840" cy="310896"/>
+          </a:xfrm>
+          <a:prstGeom prst="rect">
+            <a:avLst/>
+          </a:prstGeom>
+          <a:noFill/>
+          <a:ln/>
+        </p:spPr>
+        <p:txBody>
+          <a:bodyPr wrap="square" lIns="0" tIns="0" rIns="0" bIns="0" rtlCol="0" anchor="ctr"/>
+          <a:lstStyle/>
+          <a:p>
+            <a:pPr indent="0" marL="0">
+              <a:buNone/>
+            </a:pPr>
+            <a:r>
+              <a:rPr lang="en-US" sz="1400" b="1" dirty="0">
+                <a:solidFill>
+                  <a:srgbClr val="FFFFFF"/>
+                </a:solidFill>
+                <a:latin typeface="맑은 고딕" pitchFamily="34" charset="0"/>
+                <a:ea typeface="맑은 고딕" pitchFamily="34" charset="-122"/>
+                <a:cs typeface="맑은 고딕" pitchFamily="34" charset="-120"/>
+              </a:rPr>
+              <a:t>온 미디어아트 에디트</a:t>
+            </a:r>
+            <a:endParaRPr lang="en-US" sz="1400" dirty="0"/>
+          </a:p>
+        </p:txBody>
+      </p:sp>
+      <p:sp>
+        <p:nvSpPr>
+          <p:cNvPr id="7" name="Text 5"/>
+          <p:cNvSpPr/>
+          <p:nvPr/>
+        </p:nvSpPr>
+        <p:spPr>
+          <a:xfrm>
+            <a:off x="4526280" y="2350008"/>
+            <a:ext cx="6949440" cy="566928"/>
+          </a:xfrm>
+          <a:prstGeom prst="rect">
+            <a:avLst/>
+          </a:prstGeom>
+          <a:noFill/>
+          <a:ln/>
+        </p:spPr>
+        <p:txBody>
+          <a:bodyPr wrap="square" lIns="0" tIns="0" rIns="0" bIns="0" rtlCol="0" anchor="t"/>
+          <a:lstStyle/>
+          <a:p>
+            <a:pPr indent="0" marL="0">
+              <a:lnSpc>
+                <a:spcPts val="1350"/>
+              </a:lnSpc>
+              <a:buNone/>
+            </a:pPr>
+            <a:r>
+              <a:rPr lang="en-US" sz="1000" dirty="0">
+                <a:solidFill>
+                  <a:srgbClr val="B9C6DC"/>
+                </a:solidFill>
+                <a:latin typeface="맑은 고딕" pitchFamily="34" charset="0"/>
+                <a:ea typeface="맑은 고딕" pitchFamily="34" charset="-122"/>
+                <a:cs typeface="맑은 고딕" pitchFamily="34" charset="-120"/>
+              </a:rPr>
+              <a:t>고객이 20가지 스타일 · 12가지 색으로 미디어아트를 직접 만드는 웹 도구. 만든 설정 그대로 제작 의뢰까지 이어진다.</a:t>
+            </a:r>
+            <a:endParaRPr lang="en-US" sz="1000" dirty="0"/>
+          </a:p>
+        </p:txBody>
+      </p:sp>
+      <p:sp>
+        <p:nvSpPr>
+          <p:cNvPr id="8" name="Shape 6"/>
+          <p:cNvSpPr/>
+          <p:nvPr/>
+        </p:nvSpPr>
+        <p:spPr>
+          <a:xfrm>
+            <a:off x="1097280" y="3008376"/>
+            <a:ext cx="10378440" cy="0"/>
+          </a:xfrm>
+          <a:prstGeom prst="line">
+            <a:avLst/>
+          </a:prstGeom>
+          <a:noFill/>
+          <a:ln w="12700">
+            <a:solidFill>
+              <a:srgbClr val="2C3A57"/>
+            </a:solidFill>
+            <a:prstDash val="solid"/>
+          </a:ln>
+        </p:spPr>
+      </p:sp>
+      <p:sp>
+        <p:nvSpPr>
+          <p:cNvPr id="9" name="Shape 7"/>
+          <p:cNvSpPr/>
+          <p:nvPr/>
+        </p:nvSpPr>
+        <p:spPr>
+          <a:xfrm>
+            <a:off x="685800" y="3246120"/>
+            <a:ext cx="182880" cy="182880"/>
+          </a:xfrm>
+          <a:prstGeom prst="ellipse">
+            <a:avLst/>
+          </a:prstGeom>
+          <a:solidFill>
+            <a:srgbClr val="0075C9"/>
+          </a:solidFill>
+          <a:ln w="12700">
+            <a:solidFill>
+              <a:srgbClr val="0075C9"/>
+            </a:solidFill>
+            <a:prstDash val="solid"/>
+          </a:ln>
+        </p:spPr>
+      </p:sp>
+      <p:sp>
+        <p:nvSpPr>
+          <p:cNvPr id="10" name="Text 8"/>
+          <p:cNvSpPr/>
+          <p:nvPr/>
+        </p:nvSpPr>
+        <p:spPr>
+          <a:xfrm>
+            <a:off x="1097280" y="3118104"/>
+            <a:ext cx="3291840" cy="310896"/>
+          </a:xfrm>
+          <a:prstGeom prst="rect">
+            <a:avLst/>
+          </a:prstGeom>
+          <a:noFill/>
+          <a:ln/>
+        </p:spPr>
+        <p:txBody>
+          <a:bodyPr wrap="square" lIns="0" tIns="0" rIns="0" bIns="0" rtlCol="0" anchor="ctr"/>
+          <a:lstStyle/>
+          <a:p>
+            <a:pPr indent="0" marL="0">
+              <a:buNone/>
+            </a:pPr>
+            <a:r>
+              <a:rPr lang="en-US" sz="1400" b="1" dirty="0">
+                <a:solidFill>
+                  <a:srgbClr val="FFFFFF"/>
+                </a:solidFill>
+                <a:latin typeface="맑은 고딕" pitchFamily="34" charset="0"/>
+                <a:ea typeface="맑은 고딕" pitchFamily="34" charset="-122"/>
+                <a:cs typeface="맑은 고딕" pitchFamily="34" charset="-120"/>
+              </a:rPr>
+              <a:t>결정론적 렌더 엔진</a:t>
+            </a:r>
+            <a:endParaRPr lang="en-US" sz="1400" dirty="0"/>
+          </a:p>
+        </p:txBody>
+      </p:sp>
+      <p:sp>
+        <p:nvSpPr>
+          <p:cNvPr id="11" name="Text 9"/>
+          <p:cNvSpPr/>
+          <p:nvPr/>
+        </p:nvSpPr>
+        <p:spPr>
+          <a:xfrm>
+            <a:off x="4526280" y="3136392"/>
+            <a:ext cx="6949440" cy="566928"/>
+          </a:xfrm>
+          <a:prstGeom prst="rect">
+            <a:avLst/>
+          </a:prstGeom>
+          <a:noFill/>
+          <a:ln/>
+        </p:spPr>
+        <p:txBody>
+          <a:bodyPr wrap="square" lIns="0" tIns="0" rIns="0" bIns="0" rtlCol="0" anchor="t"/>
+          <a:lstStyle/>
+          <a:p>
+            <a:pPr indent="0" marL="0">
+              <a:lnSpc>
+                <a:spcPts val="1350"/>
+              </a:lnSpc>
+              <a:buNone/>
+            </a:pPr>
+            <a:r>
+              <a:rPr lang="en-US" sz="1000" dirty="0">
+                <a:solidFill>
+                  <a:srgbClr val="B9C6DC"/>
+                </a:solidFill>
+                <a:latin typeface="맑은 고딕" pitchFamily="34" charset="0"/>
+                <a:ea typeface="맑은 고딕" pitchFamily="34" charset="-122"/>
+                <a:cs typeface="맑은 고딕" pitchFamily="34" charset="-120"/>
+              </a:rPr>
+              <a:t>같은 시드·같은 설정이면 언제 돌려도 같은 그림이 나온다. 고객이 화면에서 고른 그대로 4K 납품본이 되는 근거.</a:t>
+            </a:r>
+            <a:endParaRPr lang="en-US" sz="1000" dirty="0"/>
+          </a:p>
+        </p:txBody>
+      </p:sp>
+      <p:sp>
+        <p:nvSpPr>
+          <p:cNvPr id="12" name="Shape 10"/>
+          <p:cNvSpPr/>
+          <p:nvPr/>
+        </p:nvSpPr>
+        <p:spPr>
+          <a:xfrm>
+            <a:off x="1097280" y="3794760"/>
+            <a:ext cx="10378440" cy="0"/>
+          </a:xfrm>
+          <a:prstGeom prst="line">
+            <a:avLst/>
+          </a:prstGeom>
+          <a:noFill/>
+          <a:ln w="12700">
+            <a:solidFill>
+              <a:srgbClr val="2C3A57"/>
+            </a:solidFill>
+            <a:prstDash val="solid"/>
+          </a:ln>
+        </p:spPr>
+      </p:sp>
+      <p:sp>
+        <p:nvSpPr>
+          <p:cNvPr id="13" name="Shape 11"/>
+          <p:cNvSpPr/>
+          <p:nvPr/>
+        </p:nvSpPr>
+        <p:spPr>
+          <a:xfrm>
+            <a:off x="685800" y="4032504"/>
+            <a:ext cx="182880" cy="182880"/>
+          </a:xfrm>
+          <a:prstGeom prst="ellipse">
+            <a:avLst/>
+          </a:prstGeom>
+          <a:solidFill>
+            <a:srgbClr val="0075C9"/>
+          </a:solidFill>
+          <a:ln w="12700">
+            <a:solidFill>
+              <a:srgbClr val="0075C9"/>
+            </a:solidFill>
+            <a:prstDash val="solid"/>
+          </a:ln>
+        </p:spPr>
+      </p:sp>
+      <p:sp>
+        <p:nvSpPr>
+          <p:cNvPr id="14" name="Text 12"/>
+          <p:cNvSpPr/>
+          <p:nvPr/>
+        </p:nvSpPr>
+        <p:spPr>
+          <a:xfrm>
+            <a:off x="1097280" y="3904488"/>
+            <a:ext cx="3291840" cy="310896"/>
+          </a:xfrm>
+          <a:prstGeom prst="rect">
+            <a:avLst/>
+          </a:prstGeom>
+          <a:noFill/>
+          <a:ln/>
+        </p:spPr>
+        <p:txBody>
+          <a:bodyPr wrap="square" lIns="0" tIns="0" rIns="0" bIns="0" rtlCol="0" anchor="ctr"/>
+          <a:lstStyle/>
+          <a:p>
+            <a:pPr indent="0" marL="0">
+              <a:buNone/>
+            </a:pPr>
+            <a:r>
+              <a:rPr lang="en-US" sz="1400" b="1" dirty="0">
+                <a:solidFill>
+                  <a:srgbClr val="FFFFFF"/>
+                </a:solidFill>
+                <a:latin typeface="맑은 고딕" pitchFamily="34" charset="0"/>
+                <a:ea typeface="맑은 고딕" pitchFamily="34" charset="-122"/>
+                <a:cs typeface="맑은 고딕" pitchFamily="34" charset="-120"/>
+              </a:rPr>
+              <a:t>4K 렌더 파이프라인</a:t>
+            </a:r>
+            <a:endParaRPr lang="en-US" sz="1400" dirty="0"/>
+          </a:p>
+        </p:txBody>
+      </p:sp>
+      <p:sp>
+        <p:nvSpPr>
+          <p:cNvPr id="15" name="Text 13"/>
+          <p:cNvSpPr/>
+          <p:nvPr/>
+        </p:nvSpPr>
+        <p:spPr>
+          <a:xfrm>
+            <a:off x="4526280" y="3922776"/>
+            <a:ext cx="6949440" cy="566928"/>
+          </a:xfrm>
+          <a:prstGeom prst="rect">
+            <a:avLst/>
+          </a:prstGeom>
+          <a:noFill/>
+          <a:ln/>
+        </p:spPr>
+        <p:txBody>
+          <a:bodyPr wrap="square" lIns="0" tIns="0" rIns="0" bIns="0" rtlCol="0" anchor="t"/>
+          <a:lstStyle/>
+          <a:p>
+            <a:pPr indent="0" marL="0">
+              <a:lnSpc>
+                <a:spcPts val="1350"/>
+              </a:lnSpc>
+              <a:buNone/>
+            </a:pPr>
+            <a:r>
+              <a:rPr lang="en-US" sz="1000" dirty="0">
+                <a:solidFill>
+                  <a:srgbClr val="B9C6DC"/>
+                </a:solidFill>
+                <a:latin typeface="맑은 고딕" pitchFamily="34" charset="0"/>
+                <a:ea typeface="맑은 고딕" pitchFamily="34" charset="-122"/>
+                <a:cs typeface="맑은 고딕" pitchFamily="34" charset="-120"/>
+              </a:rPr>
+              <a:t>고객 설정 한 줄을 넣으면 프레임을 뽑아 H.264·HEVC·ProRes로 인코딩한다.</a:t>
+            </a:r>
+            <a:endParaRPr lang="en-US" sz="1000" dirty="0"/>
+          </a:p>
+        </p:txBody>
+      </p:sp>
+      <p:sp>
+        <p:nvSpPr>
+          <p:cNvPr id="16" name="Shape 14"/>
+          <p:cNvSpPr/>
+          <p:nvPr/>
+        </p:nvSpPr>
+        <p:spPr>
+          <a:xfrm>
+            <a:off x="1097280" y="4581144"/>
+            <a:ext cx="10378440" cy="0"/>
+          </a:xfrm>
+          <a:prstGeom prst="line">
+            <a:avLst/>
+          </a:prstGeom>
+          <a:noFill/>
+          <a:ln w="12700">
+            <a:solidFill>
+              <a:srgbClr val="2C3A57"/>
+            </a:solidFill>
+            <a:prstDash val="solid"/>
+          </a:ln>
+        </p:spPr>
+      </p:sp>
+      <p:sp>
+        <p:nvSpPr>
+          <p:cNvPr id="17" name="Shape 15"/>
+          <p:cNvSpPr/>
+          <p:nvPr/>
+        </p:nvSpPr>
+        <p:spPr>
+          <a:xfrm>
+            <a:off x="685800" y="4818888"/>
+            <a:ext cx="182880" cy="182880"/>
+          </a:xfrm>
+          <a:prstGeom prst="ellipse">
+            <a:avLst/>
+          </a:prstGeom>
+          <a:solidFill>
+            <a:srgbClr val="0075C9"/>
+          </a:solidFill>
+          <a:ln w="12700">
+            <a:solidFill>
+              <a:srgbClr val="0075C9"/>
+            </a:solidFill>
+            <a:prstDash val="solid"/>
+          </a:ln>
+        </p:spPr>
+      </p:sp>
+      <p:sp>
+        <p:nvSpPr>
+          <p:cNvPr id="18" name="Text 16"/>
+          <p:cNvSpPr/>
+          <p:nvPr/>
+        </p:nvSpPr>
+        <p:spPr>
+          <a:xfrm>
+            <a:off x="1097280" y="4690872"/>
+            <a:ext cx="3291840" cy="310896"/>
+          </a:xfrm>
+          <a:prstGeom prst="rect">
+            <a:avLst/>
+          </a:prstGeom>
+          <a:noFill/>
+          <a:ln/>
+        </p:spPr>
+        <p:txBody>
+          <a:bodyPr wrap="square" lIns="0" tIns="0" rIns="0" bIns="0" rtlCol="0" anchor="ctr"/>
+          <a:lstStyle/>
+          <a:p>
+            <a:pPr indent="0" marL="0">
+              <a:buNone/>
+            </a:pPr>
+            <a:r>
+              <a:rPr lang="en-US" sz="1400" b="1" dirty="0">
+                <a:solidFill>
+                  <a:srgbClr val="FFFFFF"/>
+                </a:solidFill>
+                <a:latin typeface="맑은 고딕" pitchFamily="34" charset="0"/>
+                <a:ea typeface="맑은 고딕" pitchFamily="34" charset="-122"/>
+                <a:cs typeface="맑은 고딕" pitchFamily="34" charset="-120"/>
+              </a:rPr>
+              <a:t>미디어아트 AX 소개 페이지</a:t>
+            </a:r>
+            <a:endParaRPr lang="en-US" sz="1400" dirty="0"/>
+          </a:p>
+        </p:txBody>
+      </p:sp>
+      <p:sp>
+        <p:nvSpPr>
+          <p:cNvPr id="19" name="Text 17"/>
+          <p:cNvSpPr/>
+          <p:nvPr/>
+        </p:nvSpPr>
+        <p:spPr>
+          <a:xfrm>
+            <a:off x="4526280" y="4709160"/>
+            <a:ext cx="6949440" cy="566928"/>
+          </a:xfrm>
+          <a:prstGeom prst="rect">
+            <a:avLst/>
+          </a:prstGeom>
+          <a:noFill/>
+          <a:ln/>
+        </p:spPr>
+        <p:txBody>
+          <a:bodyPr wrap="square" lIns="0" tIns="0" rIns="0" bIns="0" rtlCol="0" anchor="t"/>
+          <a:lstStyle/>
+          <a:p>
+            <a:pPr indent="0" marL="0">
+              <a:lnSpc>
+                <a:spcPts val="1350"/>
+              </a:lnSpc>
+              <a:buNone/>
+            </a:pPr>
+            <a:r>
+              <a:rPr lang="en-US" sz="1000" dirty="0">
+                <a:solidFill>
+                  <a:srgbClr val="B9C6DC"/>
+                </a:solidFill>
+                <a:latin typeface="맑은 고딕" pitchFamily="34" charset="0"/>
+                <a:ea typeface="맑은 고딕" pitchFamily="34" charset="-122"/>
+                <a:cs typeface="맑은 고딕" pitchFamily="34" charset="-120"/>
+              </a:rPr>
+              <a:t>서비스 홍보 시퀀스를 영상 파일이 아니라 편집표로 만들었다. 한국어·영어·일본어·중국어·아랍어 5개 국어.</a:t>
+            </a:r>
+            <a:endParaRPr lang="en-US" sz="1000" dirty="0"/>
+          </a:p>
+        </p:txBody>
+      </p:sp>
+      <p:sp>
+        <p:nvSpPr>
+          <p:cNvPr id="20" name="Shape 18"/>
+          <p:cNvSpPr/>
+          <p:nvPr/>
+        </p:nvSpPr>
+        <p:spPr>
+          <a:xfrm>
+            <a:off x="1097280" y="5367528"/>
+            <a:ext cx="10378440" cy="0"/>
+          </a:xfrm>
+          <a:prstGeom prst="line">
+            <a:avLst/>
+          </a:prstGeom>
+          <a:noFill/>
+          <a:ln w="12700">
+            <a:solidFill>
+              <a:srgbClr val="2C3A57"/>
+            </a:solidFill>
+            <a:prstDash val="solid"/>
+          </a:ln>
+        </p:spPr>
+      </p:sp>
+      <p:sp>
+        <p:nvSpPr>
+          <p:cNvPr id="21" name="Shape 19"/>
+          <p:cNvSpPr/>
+          <p:nvPr/>
+        </p:nvSpPr>
+        <p:spPr>
+          <a:xfrm>
+            <a:off x="685800" y="5605272"/>
+            <a:ext cx="182880" cy="182880"/>
+          </a:xfrm>
+          <a:prstGeom prst="ellipse">
+            <a:avLst/>
+          </a:prstGeom>
+          <a:solidFill>
+            <a:srgbClr val="0075C9"/>
+          </a:solidFill>
+          <a:ln w="12700">
+            <a:solidFill>
+              <a:srgbClr val="0075C9"/>
+            </a:solidFill>
+            <a:prstDash val="solid"/>
+          </a:ln>
+        </p:spPr>
+      </p:sp>
+      <p:sp>
+        <p:nvSpPr>
+          <p:cNvPr id="22" name="Text 20"/>
+          <p:cNvSpPr/>
+          <p:nvPr/>
+        </p:nvSpPr>
+        <p:spPr>
+          <a:xfrm>
+            <a:off x="1097280" y="5477256"/>
+            <a:ext cx="3291840" cy="310896"/>
+          </a:xfrm>
+          <a:prstGeom prst="rect">
+            <a:avLst/>
+          </a:prstGeom>
+          <a:noFill/>
+          <a:ln/>
+        </p:spPr>
+        <p:txBody>
+          <a:bodyPr wrap="square" lIns="0" tIns="0" rIns="0" bIns="0" rtlCol="0" anchor="ctr"/>
+          <a:lstStyle/>
+          <a:p>
+            <a:pPr indent="0" marL="0">
+              <a:buNone/>
+            </a:pPr>
+            <a:r>
+              <a:rPr lang="en-US" sz="1400" b="1" dirty="0">
+                <a:solidFill>
+                  <a:srgbClr val="FFFFFF"/>
+                </a:solidFill>
+                <a:latin typeface="맑은 고딕" pitchFamily="34" charset="0"/>
+                <a:ea typeface="맑은 고딕" pitchFamily="34" charset="-122"/>
+                <a:cs typeface="맑은 고딕" pitchFamily="34" charset="-120"/>
+              </a:rPr>
+              <a:t>제작 요청 창구</a:t>
+            </a:r>
+            <a:endParaRPr lang="en-US" sz="1400" dirty="0"/>
+          </a:p>
+        </p:txBody>
+      </p:sp>
+      <p:sp>
+        <p:nvSpPr>
+          <p:cNvPr id="23" name="Text 21"/>
+          <p:cNvSpPr/>
+          <p:nvPr/>
+        </p:nvSpPr>
+        <p:spPr>
+          <a:xfrm>
+            <a:off x="4526280" y="5495544"/>
+            <a:ext cx="6949440" cy="566928"/>
+          </a:xfrm>
+          <a:prstGeom prst="rect">
+            <a:avLst/>
+          </a:prstGeom>
+          <a:noFill/>
+          <a:ln/>
+        </p:spPr>
+        <p:txBody>
+          <a:bodyPr wrap="square" lIns="0" tIns="0" rIns="0" bIns="0" rtlCol="0" anchor="t"/>
+          <a:lstStyle/>
+          <a:p>
+            <a:pPr indent="0" marL="0">
+              <a:lnSpc>
+                <a:spcPts val="1350"/>
+              </a:lnSpc>
+              <a:buNone/>
+            </a:pPr>
+            <a:r>
+              <a:rPr lang="en-US" sz="1000" dirty="0">
+                <a:solidFill>
+                  <a:srgbClr val="B9C6DC"/>
+                </a:solidFill>
+                <a:latin typeface="맑은 고딕" pitchFamily="34" charset="0"/>
+                <a:ea typeface="맑은 고딕" pitchFamily="34" charset="-122"/>
+                <a:cs typeface="맑은 고딕" pitchFamily="34" charset="-120"/>
+              </a:rPr>
+              <a:t>기관 담당자가 현장 규격·연동 데이터·방향·납품 형태를 네 단계로 적어 보내는 화면.</a:t>
+            </a:r>
+            <a:endParaRPr lang="en-US" sz="1000" dirty="0"/>
+          </a:p>
+        </p:txBody>
+      </p:sp>
+      <p:sp>
+        <p:nvSpPr>
+          <p:cNvPr id="24" name="Shape 22"/>
+          <p:cNvSpPr/>
+          <p:nvPr/>
+        </p:nvSpPr>
+        <p:spPr>
+          <a:xfrm>
+            <a:off x="1097280" y="6153912"/>
+            <a:ext cx="10378440" cy="0"/>
+          </a:xfrm>
+          <a:prstGeom prst="line">
+            <a:avLst/>
+          </a:prstGeom>
+          <a:noFill/>
+          <a:ln w="12700">
+            <a:solidFill>
+              <a:srgbClr val="2C3A57"/>
+            </a:solidFill>
+            <a:prstDash val="solid"/>
+          </a:ln>
+        </p:spPr>
+      </p:sp>
+      <p:sp>
+        <p:nvSpPr>
+          <p:cNvPr id="25" name="Text 23"/>
+          <p:cNvSpPr/>
+          <p:nvPr/>
+        </p:nvSpPr>
+        <p:spPr>
+          <a:xfrm>
+            <a:off x="640080" y="6263640"/>
+            <a:ext cx="10881360" cy="274320"/>
+          </a:xfrm>
+          <a:prstGeom prst="rect">
+            <a:avLst/>
+          </a:prstGeom>
+          <a:noFill/>
+          <a:ln/>
+        </p:spPr>
+        <p:txBody>
+          <a:bodyPr wrap="square" lIns="0" tIns="0" rIns="0" bIns="0" rtlCol="0" anchor="ctr"/>
+          <a:lstStyle/>
+          <a:p>
+            <a:pPr indent="0" marL="0">
+              <a:buNone/>
+            </a:pPr>
+            <a:r>
+              <a:rPr lang="en-US" sz="1050" dirty="0">
+                <a:solidFill>
+                  <a:srgbClr val="0075C9"/>
+                </a:solidFill>
+                <a:latin typeface="맑은 고딕" pitchFamily="34" charset="0"/>
+                <a:ea typeface="맑은 고딕" pitchFamily="34" charset="-122"/>
+                <a:cs typeface="맑은 고딕" pitchFamily="34" charset="-120"/>
+              </a:rPr>
+              <a:t>publicbloom.art/studio  ·  publicbloom.art/ai  ·  publicbloom.art/ax-studio</a:t>
+            </a:r>
+            <a:endParaRPr lang="en-US" sz="1050" dirty="0"/>
+          </a:p>
+        </p:txBody>
+      </p:sp>
+      <p:sp>
+        <p:nvSpPr>
+          <p:cNvPr id="26" name="Text 24"/>
+          <p:cNvSpPr/>
+          <p:nvPr/>
+        </p:nvSpPr>
+        <p:spPr>
+          <a:xfrm>
+            <a:off x="11155680" y="6291072"/>
+            <a:ext cx="548640" cy="274320"/>
+          </a:xfrm>
+          <a:prstGeom prst="rect">
+            <a:avLst/>
+          </a:prstGeom>
+          <a:noFill/>
+          <a:ln/>
+        </p:spPr>
+        <p:txBody>
+          <a:bodyPr wrap="square" lIns="0" tIns="0" rIns="0" bIns="0" rtlCol="0" anchor="ctr"/>
+          <a:lstStyle/>
+          <a:p>
+            <a:pPr algn="r" indent="0" marL="0">
+              <a:buNone/>
+            </a:pPr>
+            <a:r>
+              <a:rPr lang="en-US" sz="1000" dirty="0">
+                <a:solidFill>
+                  <a:srgbClr val="9AA3B0"/>
+                </a:solidFill>
+                <a:latin typeface="맑은 고딕" pitchFamily="34" charset="0"/>
+                <a:ea typeface="맑은 고딕" pitchFamily="34" charset="-122"/>
+                <a:cs typeface="맑은 고딕" pitchFamily="34" charset="-120"/>
+              </a:rPr>
+              <a:t>18</a:t>
+            </a:r>
+            <a:endParaRPr lang="en-US" sz="1000" dirty="0"/>
+          </a:p>
+        </p:txBody>
+      </p:sp>
+    </p:spTree>
+  </p:cSld>
+  <p:clrMapOvr>
+    <a:masterClrMapping/>
+  </p:clrMapOvr>
+</p:sld>
+</file>
+
+<file path=ppt/slides/slide19.xml><?xml version="1.0" encoding="utf-8"?>
+<p:sld xmlns:a="http://schemas.openxmlformats.org/drawingml/2006/main" xmlns:r="http://schemas.openxmlformats.org/officeDocument/2006/relationships" xmlns:p="http://schemas.openxmlformats.org/presentationml/2006/main">
+  <p:cSld name="Slide 19">
     <p:bg>
       <p:bgPr>
         <a:solidFill>
@@ -7016,7 +14808,7 @@
                 <a:ea typeface="맑은 고딕" pitchFamily="34" charset="-122"/>
                 <a:cs typeface="맑은 고딕" pitchFamily="34" charset="-120"/>
               </a:rPr>
-              <a:t>AI · 코드 기반 미디어아트 제작</a:t>
+              <a:t>미디어아트 AX 서비스</a:t>
             </a:r>
             <a:endParaRPr lang="en-US" sz="1500" dirty="0"/>
           </a:p>
@@ -7049,17 +14841,6 @@
               </a:lnSpc>
               <a:buNone/>
             </a:pPr>
-            <a:r>
-              <a:rPr lang="en-US" sz="1000" dirty="0">
-                <a:solidFill>
-                  <a:srgbClr val="4A5262"/>
-                </a:solidFill>
-                <a:latin typeface="맑은 고딕" pitchFamily="34" charset="0"/>
-                <a:ea typeface="맑은 고딕" pitchFamily="34" charset="-122"/>
-                <a:cs typeface="맑은 고딕" pitchFamily="34" charset="-120"/>
-              </a:rPr>
-              <a:t>영상 편집이 아니라 코드로 만듭니다. 현장 화면 비율·해상도에 맞춰 다시 출력할 수 있고, 데이터를 연결하면 화면이 매일 달라집니다.</a:t>
-            </a:r>
             <a:endParaRPr lang="en-US" sz="1000" dirty="0"/>
           </a:p>
         </p:txBody>
@@ -7195,7 +14976,7 @@
                 <a:ea typeface="맑은 고딕" pitchFamily="34" charset="-122"/>
                 <a:cs typeface="맑은 고딕" pitchFamily="34" charset="-120"/>
               </a:rPr>
-              <a:t>빠른 제작</a:t>
+              <a:t>AI · 코드 기반 미디어아트 제작</a:t>
             </a:r>
             <a:endParaRPr lang="en-US" sz="1500" dirty="0"/>
           </a:p>
@@ -7237,7 +15018,7 @@
                 <a:ea typeface="맑은 고딕" pitchFamily="34" charset="-122"/>
                 <a:cs typeface="맑은 고딕" pitchFamily="34" charset="-120"/>
               </a:rPr>
-              <a:t>시안 3종을 요청 후 1주일 이내에 제시합니다. 영상 외주 제작이 통상 1개월 이상 걸리는 것과 비교되는 지점입니다.</a:t>
+              <a:t>영상 편집이 아니라 코드로 만듭니다. 현장 화면 비율·해상도에 맞춰 다시 출력할 수 있고, 데이터를 연결하면 화면이 매일 달라집니다.</a:t>
             </a:r>
             <a:endParaRPr lang="en-US" sz="1000" dirty="0"/>
           </a:p>
@@ -7374,7 +15155,7 @@
                 <a:ea typeface="맑은 고딕" pitchFamily="34" charset="-122"/>
                 <a:cs typeface="맑은 고딕" pitchFamily="34" charset="-120"/>
               </a:rPr>
-              <a:t>LED 패널 · LED 전광판 설치</a:t>
+              <a:t>빠른 제작</a:t>
             </a:r>
             <a:endParaRPr lang="en-US" sz="1500" dirty="0"/>
           </a:p>
@@ -7416,7 +15197,7 @@
                 <a:ea typeface="맑은 고딕" pitchFamily="34" charset="-122"/>
                 <a:cs typeface="맑은 고딕" pitchFamily="34" charset="-120"/>
               </a:rPr>
-              <a:t>로비 미디어월, 외벽 전광판, 세로형 사이니지를 사양 산정부터 공급·설치·배선까지 직접 시공합니다.</a:t>
+              <a:t>시안 3종을 요청 후 1주일 이내에 제시합니다. 영상 외주 제작이 통상 1개월 이상 걸리는 것과 비교되는 지점입니다.</a:t>
             </a:r>
             <a:endParaRPr lang="en-US" sz="1000" dirty="0"/>
           </a:p>
@@ -7553,7 +15334,7 @@
                 <a:ea typeface="맑은 고딕" pitchFamily="34" charset="-122"/>
                 <a:cs typeface="맑은 고딕" pitchFamily="34" charset="-120"/>
               </a:rPr>
-              <a:t>빔프로젝터 미디어파사드</a:t>
+              <a:t>LED 패널 · LED 전광판 설치</a:t>
             </a:r>
             <a:endParaRPr lang="en-US" sz="1500" dirty="0"/>
           </a:p>
@@ -7595,6 +15376,185 @@
                 <a:ea typeface="맑은 고딕" pitchFamily="34" charset="-122"/>
                 <a:cs typeface="맑은 고딕" pitchFamily="34" charset="-120"/>
               </a:rPr>
+              <a:t>로비 미디어월, 외벽 전광판, 세로형 사이니지를 사양 산정부터 공급·설치·배선까지 직접 시공합니다.</a:t>
+            </a:r>
+            <a:endParaRPr lang="en-US" sz="1000" dirty="0"/>
+          </a:p>
+        </p:txBody>
+      </p:sp>
+      <p:sp>
+        <p:nvSpPr>
+          <p:cNvPr id="25" name="Shape 23"/>
+          <p:cNvSpPr/>
+          <p:nvPr/>
+        </p:nvSpPr>
+        <p:spPr>
+          <a:xfrm>
+            <a:off x="11978640" y="2697480"/>
+            <a:ext cx="2606040" cy="3200400"/>
+          </a:xfrm>
+          <a:prstGeom prst="roundRect">
+            <a:avLst>
+              <a:gd name="adj" fmla="val 2105"/>
+            </a:avLst>
+          </a:prstGeom>
+          <a:solidFill>
+            <a:srgbClr val="FFFFFF"/>
+          </a:solidFill>
+          <a:ln w="12700">
+            <a:solidFill>
+              <a:srgbClr val="DFE3EA"/>
+            </a:solidFill>
+            <a:prstDash val="solid"/>
+          </a:ln>
+          <a:effectLst>
+            <a:outerShdw sx="100000" sy="100000" kx="0" ky="0" algn="bl" rotWithShape="0" blurRad="152400" dist="38100" dir="5400000">
+              <a:srgbClr val="101B33">
+                <a:alpha val="7000"/>
+              </a:srgbClr>
+            </a:outerShdw>
+          </a:effectLst>
+        </p:spPr>
+      </p:sp>
+      <p:sp>
+        <p:nvSpPr>
+          <p:cNvPr id="26" name="Shape 24"/>
+          <p:cNvSpPr/>
+          <p:nvPr/>
+        </p:nvSpPr>
+        <p:spPr>
+          <a:xfrm>
+            <a:off x="12298680" y="2990088"/>
+            <a:ext cx="420624" cy="420624"/>
+          </a:xfrm>
+          <a:prstGeom prst="ellipse">
+            <a:avLst/>
+          </a:prstGeom>
+          <a:solidFill>
+            <a:srgbClr val="0075C9"/>
+          </a:solidFill>
+          <a:ln w="12700">
+            <a:solidFill>
+              <a:srgbClr val="0075C9"/>
+            </a:solidFill>
+            <a:prstDash val="solid"/>
+          </a:ln>
+        </p:spPr>
+      </p:sp>
+      <p:sp>
+        <p:nvSpPr>
+          <p:cNvPr id="27" name="Text 25"/>
+          <p:cNvSpPr/>
+          <p:nvPr/>
+        </p:nvSpPr>
+        <p:spPr>
+          <a:xfrm>
+            <a:off x="12298680" y="2990088"/>
+            <a:ext cx="420624" cy="420624"/>
+          </a:xfrm>
+          <a:prstGeom prst="rect">
+            <a:avLst/>
+          </a:prstGeom>
+          <a:noFill/>
+          <a:ln/>
+        </p:spPr>
+        <p:txBody>
+          <a:bodyPr wrap="square" lIns="0" tIns="0" rIns="0" bIns="0" rtlCol="0" anchor="ctr"/>
+          <a:lstStyle/>
+          <a:p>
+            <a:pPr algn="ctr" indent="0" marL="0">
+              <a:buNone/>
+            </a:pPr>
+            <a:r>
+              <a:rPr lang="en-US" sz="1300" b="1" dirty="0">
+                <a:solidFill>
+                  <a:srgbClr val="FFFFFF"/>
+                </a:solidFill>
+                <a:latin typeface="맑은 고딕" pitchFamily="34" charset="0"/>
+                <a:ea typeface="맑은 고딕" pitchFamily="34" charset="-122"/>
+                <a:cs typeface="맑은 고딕" pitchFamily="34" charset="-120"/>
+              </a:rPr>
+              <a:t>05</a:t>
+            </a:r>
+            <a:endParaRPr lang="en-US" sz="1300" dirty="0"/>
+          </a:p>
+        </p:txBody>
+      </p:sp>
+      <p:sp>
+        <p:nvSpPr>
+          <p:cNvPr id="28" name="Text 26"/>
+          <p:cNvSpPr/>
+          <p:nvPr/>
+        </p:nvSpPr>
+        <p:spPr>
+          <a:xfrm>
+            <a:off x="12298680" y="3538728"/>
+            <a:ext cx="1965960" cy="658368"/>
+          </a:xfrm>
+          <a:prstGeom prst="rect">
+            <a:avLst/>
+          </a:prstGeom>
+          <a:noFill/>
+          <a:ln/>
+        </p:spPr>
+        <p:txBody>
+          <a:bodyPr wrap="square" lIns="0" tIns="0" rIns="0" bIns="0" rtlCol="0" anchor="t"/>
+          <a:lstStyle/>
+          <a:p>
+            <a:pPr indent="0" marL="0">
+              <a:buNone/>
+            </a:pPr>
+            <a:r>
+              <a:rPr lang="en-US" sz="1500" b="1" dirty="0">
+                <a:solidFill>
+                  <a:srgbClr val="101B33"/>
+                </a:solidFill>
+                <a:latin typeface="맑은 고딕" pitchFamily="34" charset="0"/>
+                <a:ea typeface="맑은 고딕" pitchFamily="34" charset="-122"/>
+                <a:cs typeface="맑은 고딕" pitchFamily="34" charset="-120"/>
+              </a:rPr>
+              <a:t>빔프로젝터 미디어파사드</a:t>
+            </a:r>
+            <a:endParaRPr lang="en-US" sz="1500" dirty="0"/>
+          </a:p>
+        </p:txBody>
+      </p:sp>
+      <p:sp>
+        <p:nvSpPr>
+          <p:cNvPr id="29" name="Text 27"/>
+          <p:cNvSpPr/>
+          <p:nvPr/>
+        </p:nvSpPr>
+        <p:spPr>
+          <a:xfrm>
+            <a:off x="12298680" y="4251960"/>
+            <a:ext cx="1965960" cy="1481328"/>
+          </a:xfrm>
+          <a:prstGeom prst="rect">
+            <a:avLst/>
+          </a:prstGeom>
+          <a:noFill/>
+          <a:ln/>
+        </p:spPr>
+        <p:txBody>
+          <a:bodyPr wrap="square" lIns="0" tIns="0" rIns="0" bIns="0" rtlCol="0" anchor="t"/>
+          <a:lstStyle/>
+          <a:p>
+            <a:pPr indent="0" marL="0">
+              <a:lnSpc>
+                <a:spcPts val="1500"/>
+              </a:lnSpc>
+              <a:buNone/>
+            </a:pPr>
+            <a:r>
+              <a:rPr lang="en-US" sz="1000" dirty="0">
+                <a:solidFill>
+                  <a:srgbClr val="4A5262"/>
+                </a:solidFill>
+                <a:latin typeface="맑은 고딕" pitchFamily="34" charset="0"/>
+                <a:ea typeface="맑은 고딕" pitchFamily="34" charset="-122"/>
+                <a:cs typeface="맑은 고딕" pitchFamily="34" charset="-120"/>
+              </a:rPr>
               <a:t>건물 외벽과 전시장 벽면에 빔프로젝터를 설치하고 프로젝션 매핑으로 미디어파사드를 만듭니다.</a:t>
             </a:r>
             <a:endParaRPr lang="en-US" sz="1000" dirty="0"/>
@@ -7603,7 +15563,7 @@
       </p:sp>
       <p:sp>
         <p:nvSpPr>
-          <p:cNvPr id="25" name="Text 23"/>
+          <p:cNvPr id="30" name="Text 28"/>
           <p:cNvSpPr/>
           <p:nvPr/>
         </p:nvSpPr>

--- a/docs/오늘은봄날_회사소개서.pptx
+++ b/docs/오늘은봄날_회사소개서.pptx
@@ -6830,7 +6830,7 @@
         <p:spPr>
           <a:xfrm>
             <a:off x="685800" y="3621024"/>
-            <a:ext cx="2103120" cy="286512"/>
+            <a:ext cx="2103120" cy="368373"/>
           </a:xfrm>
           <a:prstGeom prst="rect">
             <a:avLst/>
@@ -6869,7 +6869,7 @@
         <p:spPr>
           <a:xfrm>
             <a:off x="2834640" y="3621024"/>
-            <a:ext cx="4663440" cy="286512"/>
+            <a:ext cx="4663440" cy="368373"/>
           </a:xfrm>
           <a:prstGeom prst="rect">
             <a:avLst/>
@@ -6893,7 +6893,7 @@
                 <a:ea typeface="맑은 고딕" pitchFamily="34" charset="-122"/>
                 <a:cs typeface="맑은 고딕" pitchFamily="34" charset="-120"/>
               </a:rPr>
-              <a:t>온 미디어아트 에디트 고도화 외주</a:t>
+              <a:t>개발 외주 — 에디터 서버화 · 공공 API 연동</a:t>
             </a:r>
             <a:endParaRPr lang="en-US" sz="900" dirty="0"/>
           </a:p>
@@ -6907,8 +6907,8 @@
         </p:nvSpPr>
         <p:spPr>
           <a:xfrm>
-            <a:off x="7635240" y="3700272"/>
-            <a:ext cx="2377440" cy="128016"/>
+            <a:off x="7635240" y="3741202"/>
+            <a:ext cx="960120" cy="128016"/>
           </a:xfrm>
           <a:prstGeom prst="rect">
             <a:avLst/>
@@ -6927,8 +6927,8 @@
         </p:nvSpPr>
         <p:spPr>
           <a:xfrm>
-            <a:off x="10104120" y="3621024"/>
-            <a:ext cx="1371600" cy="286512"/>
+            <a:off x="9646920" y="3621024"/>
+            <a:ext cx="1143000" cy="368373"/>
           </a:xfrm>
           <a:prstGeom prst="rect">
             <a:avLst/>
@@ -6944,7 +6944,7 @@
               <a:buNone/>
             </a:pPr>
             <a:r>
-              <a:rPr lang="en-US" sz="900" b="1" dirty="0">
+              <a:rPr lang="en-US" sz="950" b="1" dirty="0">
                 <a:solidFill>
                   <a:srgbClr val="101B33"/>
                 </a:solidFill>
@@ -6952,21 +6952,60 @@
                 <a:ea typeface="맑은 고딕" pitchFamily="34" charset="-122"/>
                 <a:cs typeface="맑은 고딕" pitchFamily="34" charset="-120"/>
               </a:rPr>
-              <a:t>960만원</a:t>
-            </a:r>
-            <a:endParaRPr lang="en-US" sz="900" dirty="0"/>
-          </a:p>
-        </p:txBody>
-      </p:sp>
-      <p:sp>
-        <p:nvSpPr>
-          <p:cNvPr id="17" name="Shape 15"/>
-          <p:cNvSpPr/>
-          <p:nvPr/>
-        </p:nvSpPr>
-        <p:spPr>
-          <a:xfrm>
-            <a:off x="685800" y="3907536"/>
+              <a:t>600만원</a:t>
+            </a:r>
+            <a:endParaRPr lang="en-US" sz="950" dirty="0"/>
+          </a:p>
+        </p:txBody>
+      </p:sp>
+      <p:sp>
+        <p:nvSpPr>
+          <p:cNvPr id="17" name="Text 15"/>
+          <p:cNvSpPr/>
+          <p:nvPr/>
+        </p:nvSpPr>
+        <p:spPr>
+          <a:xfrm>
+            <a:off x="10835640" y="3621024"/>
+            <a:ext cx="640080" cy="368373"/>
+          </a:xfrm>
+          <a:prstGeom prst="rect">
+            <a:avLst/>
+          </a:prstGeom>
+          <a:noFill/>
+          <a:ln/>
+        </p:spPr>
+        <p:txBody>
+          <a:bodyPr wrap="square" lIns="0" tIns="0" rIns="0" bIns="0" rtlCol="0" anchor="ctr"/>
+          <a:lstStyle/>
+          <a:p>
+            <a:pPr algn="r" indent="0" marL="0">
+              <a:buNone/>
+            </a:pPr>
+            <a:r>
+              <a:rPr lang="en-US" sz="850" dirty="0">
+                <a:solidFill>
+                  <a:srgbClr val="9AA3B0"/>
+                </a:solidFill>
+                <a:latin typeface="맑은 고딕" pitchFamily="34" charset="0"/>
+                <a:ea typeface="맑은 고딕" pitchFamily="34" charset="-122"/>
+                <a:cs typeface="맑은 고딕" pitchFamily="34" charset="-120"/>
+              </a:rPr>
+              <a:t>18.8%</a:t>
+            </a:r>
+            <a:endParaRPr lang="en-US" sz="850" dirty="0"/>
+          </a:p>
+        </p:txBody>
+      </p:sp>
+      <p:sp>
+        <p:nvSpPr>
+          <p:cNvPr id="18" name="Shape 16"/>
+          <p:cNvSpPr/>
+          <p:nvPr/>
+        </p:nvSpPr>
+        <p:spPr>
+          <a:xfrm>
+            <a:off x="685800" y="3989397"/>
             <a:ext cx="10789920" cy="0"/>
           </a:xfrm>
           <a:prstGeom prst="line">
@@ -6983,14 +7022,14 @@
       </p:sp>
       <p:sp>
         <p:nvSpPr>
-          <p:cNvPr id="18" name="Text 16"/>
-          <p:cNvSpPr/>
-          <p:nvPr/>
-        </p:nvSpPr>
-        <p:spPr>
-          <a:xfrm>
-            <a:off x="685800" y="3907536"/>
-            <a:ext cx="2103120" cy="286512"/>
+          <p:cNvPr id="19" name="Text 17"/>
+          <p:cNvSpPr/>
+          <p:nvPr/>
+        </p:nvSpPr>
+        <p:spPr>
+          <a:xfrm>
+            <a:off x="685800" y="3989397"/>
+            <a:ext cx="2103120" cy="368373"/>
           </a:xfrm>
           <a:prstGeom prst="rect">
             <a:avLst/>
@@ -7014,7 +7053,7 @@
                 <a:ea typeface="맑은 고딕" pitchFamily="34" charset="-122"/>
                 <a:cs typeface="맑은 고딕" pitchFamily="34" charset="-120"/>
               </a:rPr>
-              <a:t>AI 활용 도입</a:t>
+              <a:t>전문가활용비</a:t>
             </a:r>
             <a:endParaRPr lang="en-US" sz="900" dirty="0"/>
           </a:p>
@@ -7022,14 +7061,14 @@
       </p:sp>
       <p:sp>
         <p:nvSpPr>
-          <p:cNvPr id="19" name="Text 17"/>
-          <p:cNvSpPr/>
-          <p:nvPr/>
-        </p:nvSpPr>
-        <p:spPr>
-          <a:xfrm>
-            <a:off x="2834640" y="3907536"/>
-            <a:ext cx="4663440" cy="286512"/>
+          <p:cNvPr id="20" name="Text 18"/>
+          <p:cNvSpPr/>
+          <p:nvPr/>
+        </p:nvSpPr>
+        <p:spPr>
+          <a:xfrm>
+            <a:off x="2834640" y="3989397"/>
+            <a:ext cx="4663440" cy="368373"/>
           </a:xfrm>
           <a:prstGeom prst="rect">
             <a:avLst/>
@@ -7053,7 +7092,7 @@
                 <a:ea typeface="맑은 고딕" pitchFamily="34" charset="-122"/>
                 <a:cs typeface="맑은 고딕" pitchFamily="34" charset="-120"/>
               </a:rPr>
-              <a:t>공공 API · 기관 DB 연동 모듈</a:t>
+              <a:t>멘토 자문</a:t>
             </a:r>
             <a:endParaRPr lang="en-US" sz="900" dirty="0"/>
           </a:p>
@@ -7061,14 +7100,14 @@
       </p:sp>
       <p:sp>
         <p:nvSpPr>
-          <p:cNvPr id="20" name="Shape 18"/>
-          <p:cNvSpPr/>
-          <p:nvPr/>
-        </p:nvSpPr>
-        <p:spPr>
-          <a:xfrm>
-            <a:off x="7635240" y="3986784"/>
-            <a:ext cx="1426464" cy="128016"/>
+          <p:cNvPr id="21" name="Shape 19"/>
+          <p:cNvSpPr/>
+          <p:nvPr/>
+        </p:nvSpPr>
+        <p:spPr>
+          <a:xfrm>
+            <a:off x="7635240" y="4109575"/>
+            <a:ext cx="320040" cy="128016"/>
           </a:xfrm>
           <a:prstGeom prst="rect">
             <a:avLst/>
@@ -7081,14 +7120,14 @@
       </p:sp>
       <p:sp>
         <p:nvSpPr>
-          <p:cNvPr id="21" name="Text 19"/>
-          <p:cNvSpPr/>
-          <p:nvPr/>
-        </p:nvSpPr>
-        <p:spPr>
-          <a:xfrm>
-            <a:off x="10104120" y="3907536"/>
-            <a:ext cx="1371600" cy="286512"/>
+          <p:cNvPr id="22" name="Text 20"/>
+          <p:cNvSpPr/>
+          <p:nvPr/>
+        </p:nvSpPr>
+        <p:spPr>
+          <a:xfrm>
+            <a:off x="9646920" y="3989397"/>
+            <a:ext cx="1143000" cy="368373"/>
           </a:xfrm>
           <a:prstGeom prst="rect">
             <a:avLst/>
@@ -7104,7 +7143,7 @@
               <a:buNone/>
             </a:pPr>
             <a:r>
-              <a:rPr lang="en-US" sz="900" b="1" dirty="0">
+              <a:rPr lang="en-US" sz="950" b="1" dirty="0">
                 <a:solidFill>
                   <a:srgbClr val="101B33"/>
                 </a:solidFill>
@@ -7112,21 +7151,60 @@
                 <a:ea typeface="맑은 고딕" pitchFamily="34" charset="-122"/>
                 <a:cs typeface="맑은 고딕" pitchFamily="34" charset="-120"/>
               </a:rPr>
-              <a:t>576만원</a:t>
-            </a:r>
-            <a:endParaRPr lang="en-US" sz="900" dirty="0"/>
-          </a:p>
-        </p:txBody>
-      </p:sp>
-      <p:sp>
-        <p:nvSpPr>
-          <p:cNvPr id="22" name="Shape 20"/>
-          <p:cNvSpPr/>
-          <p:nvPr/>
-        </p:nvSpPr>
-        <p:spPr>
-          <a:xfrm>
-            <a:off x="685800" y="4194048"/>
+              <a:t>200만원</a:t>
+            </a:r>
+            <a:endParaRPr lang="en-US" sz="950" dirty="0"/>
+          </a:p>
+        </p:txBody>
+      </p:sp>
+      <p:sp>
+        <p:nvSpPr>
+          <p:cNvPr id="23" name="Text 21"/>
+          <p:cNvSpPr/>
+          <p:nvPr/>
+        </p:nvSpPr>
+        <p:spPr>
+          <a:xfrm>
+            <a:off x="10835640" y="3989397"/>
+            <a:ext cx="640080" cy="368373"/>
+          </a:xfrm>
+          <a:prstGeom prst="rect">
+            <a:avLst/>
+          </a:prstGeom>
+          <a:noFill/>
+          <a:ln/>
+        </p:spPr>
+        <p:txBody>
+          <a:bodyPr wrap="square" lIns="0" tIns="0" rIns="0" bIns="0" rtlCol="0" anchor="ctr"/>
+          <a:lstStyle/>
+          <a:p>
+            <a:pPr algn="r" indent="0" marL="0">
+              <a:buNone/>
+            </a:pPr>
+            <a:r>
+              <a:rPr lang="en-US" sz="850" dirty="0">
+                <a:solidFill>
+                  <a:srgbClr val="9AA3B0"/>
+                </a:solidFill>
+                <a:latin typeface="맑은 고딕" pitchFamily="34" charset="0"/>
+                <a:ea typeface="맑은 고딕" pitchFamily="34" charset="-122"/>
+                <a:cs typeface="맑은 고딕" pitchFamily="34" charset="-120"/>
+              </a:rPr>
+              <a:t>6.3%</a:t>
+            </a:r>
+            <a:endParaRPr lang="en-US" sz="850" dirty="0"/>
+          </a:p>
+        </p:txBody>
+      </p:sp>
+      <p:sp>
+        <p:nvSpPr>
+          <p:cNvPr id="24" name="Shape 22"/>
+          <p:cNvSpPr/>
+          <p:nvPr/>
+        </p:nvSpPr>
+        <p:spPr>
+          <a:xfrm>
+            <a:off x="685800" y="4357769"/>
             <a:ext cx="10789920" cy="0"/>
           </a:xfrm>
           <a:prstGeom prst="line">
@@ -7143,14 +7221,14 @@
       </p:sp>
       <p:sp>
         <p:nvSpPr>
-          <p:cNvPr id="23" name="Text 21"/>
-          <p:cNvSpPr/>
-          <p:nvPr/>
-        </p:nvSpPr>
-        <p:spPr>
-          <a:xfrm>
-            <a:off x="685800" y="4194048"/>
-            <a:ext cx="2103120" cy="286512"/>
+          <p:cNvPr id="25" name="Text 23"/>
+          <p:cNvSpPr/>
+          <p:nvPr/>
+        </p:nvSpPr>
+        <p:spPr>
+          <a:xfrm>
+            <a:off x="685800" y="4357769"/>
+            <a:ext cx="2103120" cy="368373"/>
           </a:xfrm>
           <a:prstGeom prst="rect">
             <a:avLst/>
@@ -7174,7 +7252,7 @@
                 <a:ea typeface="맑은 고딕" pitchFamily="34" charset="-122"/>
                 <a:cs typeface="맑은 고딕" pitchFamily="34" charset="-120"/>
               </a:rPr>
-              <a:t>홍보비</a:t>
+              <a:t>공고료및광고료</a:t>
             </a:r>
             <a:endParaRPr lang="en-US" sz="900" dirty="0"/>
           </a:p>
@@ -7182,14 +7260,14 @@
       </p:sp>
       <p:sp>
         <p:nvSpPr>
-          <p:cNvPr id="24" name="Text 22"/>
-          <p:cNvSpPr/>
-          <p:nvPr/>
-        </p:nvSpPr>
-        <p:spPr>
-          <a:xfrm>
-            <a:off x="2834640" y="4194048"/>
-            <a:ext cx="4663440" cy="286512"/>
+          <p:cNvPr id="26" name="Text 24"/>
+          <p:cNvSpPr/>
+          <p:nvPr/>
+        </p:nvSpPr>
+        <p:spPr>
+          <a:xfrm>
+            <a:off x="2834640" y="4357769"/>
+            <a:ext cx="4663440" cy="368373"/>
           </a:xfrm>
           <a:prstGeom prst="rect">
             <a:avLst/>
@@ -7213,7 +7291,7 @@
                 <a:ea typeface="맑은 고딕" pitchFamily="34" charset="-122"/>
                 <a:cs typeface="맑은 고딕" pitchFamily="34" charset="-120"/>
               </a:rPr>
-              <a:t>다국어 홍보 시퀀스 확장 · 현지 감수</a:t>
+              <a:t>광고 집행</a:t>
             </a:r>
             <a:endParaRPr lang="en-US" sz="900" dirty="0"/>
           </a:p>
@@ -7221,14 +7299,14 @@
       </p:sp>
       <p:sp>
         <p:nvSpPr>
-          <p:cNvPr id="25" name="Shape 23"/>
-          <p:cNvSpPr/>
-          <p:nvPr/>
-        </p:nvSpPr>
-        <p:spPr>
-          <a:xfrm>
-            <a:off x="7635240" y="4273296"/>
-            <a:ext cx="554736" cy="128016"/>
+          <p:cNvPr id="27" name="Shape 25"/>
+          <p:cNvSpPr/>
+          <p:nvPr/>
+        </p:nvSpPr>
+        <p:spPr>
+          <a:xfrm>
+            <a:off x="7635240" y="4477947"/>
+            <a:ext cx="800100" cy="128016"/>
           </a:xfrm>
           <a:prstGeom prst="rect">
             <a:avLst/>
@@ -7241,14 +7319,14 @@
       </p:sp>
       <p:sp>
         <p:nvSpPr>
-          <p:cNvPr id="26" name="Text 24"/>
-          <p:cNvSpPr/>
-          <p:nvPr/>
-        </p:nvSpPr>
-        <p:spPr>
-          <a:xfrm>
-            <a:off x="10104120" y="4194048"/>
-            <a:ext cx="1371600" cy="286512"/>
+          <p:cNvPr id="28" name="Text 26"/>
+          <p:cNvSpPr/>
+          <p:nvPr/>
+        </p:nvSpPr>
+        <p:spPr>
+          <a:xfrm>
+            <a:off x="9646920" y="4357769"/>
+            <a:ext cx="1143000" cy="368373"/>
           </a:xfrm>
           <a:prstGeom prst="rect">
             <a:avLst/>
@@ -7264,7 +7342,7 @@
               <a:buNone/>
             </a:pPr>
             <a:r>
-              <a:rPr lang="en-US" sz="900" b="1" dirty="0">
+              <a:rPr lang="en-US" sz="950" b="1" dirty="0">
                 <a:solidFill>
                   <a:srgbClr val="101B33"/>
                 </a:solidFill>
@@ -7272,21 +7350,60 @@
                 <a:ea typeface="맑은 고딕" pitchFamily="34" charset="-122"/>
                 <a:cs typeface="맑은 고딕" pitchFamily="34" charset="-120"/>
               </a:rPr>
-              <a:t>224만원</a:t>
-            </a:r>
-            <a:endParaRPr lang="en-US" sz="900" dirty="0"/>
-          </a:p>
-        </p:txBody>
-      </p:sp>
-      <p:sp>
-        <p:nvSpPr>
-          <p:cNvPr id="27" name="Shape 25"/>
-          <p:cNvSpPr/>
-          <p:nvPr/>
-        </p:nvSpPr>
-        <p:spPr>
-          <a:xfrm>
-            <a:off x="685800" y="4480560"/>
+              <a:t>500만원</a:t>
+            </a:r>
+            <a:endParaRPr lang="en-US" sz="950" dirty="0"/>
+          </a:p>
+        </p:txBody>
+      </p:sp>
+      <p:sp>
+        <p:nvSpPr>
+          <p:cNvPr id="29" name="Text 27"/>
+          <p:cNvSpPr/>
+          <p:nvPr/>
+        </p:nvSpPr>
+        <p:spPr>
+          <a:xfrm>
+            <a:off x="10835640" y="4357769"/>
+            <a:ext cx="640080" cy="368373"/>
+          </a:xfrm>
+          <a:prstGeom prst="rect">
+            <a:avLst/>
+          </a:prstGeom>
+          <a:noFill/>
+          <a:ln/>
+        </p:spPr>
+        <p:txBody>
+          <a:bodyPr wrap="square" lIns="0" tIns="0" rIns="0" bIns="0" rtlCol="0" anchor="ctr"/>
+          <a:lstStyle/>
+          <a:p>
+            <a:pPr algn="r" indent="0" marL="0">
+              <a:buNone/>
+            </a:pPr>
+            <a:r>
+              <a:rPr lang="en-US" sz="850" dirty="0">
+                <a:solidFill>
+                  <a:srgbClr val="9AA3B0"/>
+                </a:solidFill>
+                <a:latin typeface="맑은 고딕" pitchFamily="34" charset="0"/>
+                <a:ea typeface="맑은 고딕" pitchFamily="34" charset="-122"/>
+                <a:cs typeface="맑은 고딕" pitchFamily="34" charset="-120"/>
+              </a:rPr>
+              <a:t>15.6%</a:t>
+            </a:r>
+            <a:endParaRPr lang="en-US" sz="850" dirty="0"/>
+          </a:p>
+        </p:txBody>
+      </p:sp>
+      <p:sp>
+        <p:nvSpPr>
+          <p:cNvPr id="30" name="Shape 28"/>
+          <p:cNvSpPr/>
+          <p:nvPr/>
+        </p:nvSpPr>
+        <p:spPr>
+          <a:xfrm>
+            <a:off x="685800" y="4726142"/>
             <a:ext cx="10789920" cy="0"/>
           </a:xfrm>
           <a:prstGeom prst="line">
@@ -7303,14 +7420,14 @@
       </p:sp>
       <p:sp>
         <p:nvSpPr>
-          <p:cNvPr id="28" name="Text 26"/>
-          <p:cNvSpPr/>
-          <p:nvPr/>
-        </p:nvSpPr>
-        <p:spPr>
-          <a:xfrm>
-            <a:off x="685800" y="4480560"/>
-            <a:ext cx="2103120" cy="286512"/>
+          <p:cNvPr id="31" name="Text 29"/>
+          <p:cNvSpPr/>
+          <p:nvPr/>
+        </p:nvSpPr>
+        <p:spPr>
+          <a:xfrm>
+            <a:off x="685800" y="4726142"/>
+            <a:ext cx="2103120" cy="368373"/>
           </a:xfrm>
           <a:prstGeom prst="rect">
             <a:avLst/>
@@ -7334,7 +7451,7 @@
                 <a:ea typeface="맑은 고딕" pitchFamily="34" charset="-122"/>
                 <a:cs typeface="맑은 고딕" pitchFamily="34" charset="-120"/>
               </a:rPr>
-              <a:t>수수료및사용료</a:t>
+              <a:t>임차비</a:t>
             </a:r>
             <a:endParaRPr lang="en-US" sz="900" dirty="0"/>
           </a:p>
@@ -7342,14 +7459,14 @@
       </p:sp>
       <p:sp>
         <p:nvSpPr>
-          <p:cNvPr id="29" name="Text 27"/>
-          <p:cNvSpPr/>
-          <p:nvPr/>
-        </p:nvSpPr>
-        <p:spPr>
-          <a:xfrm>
-            <a:off x="2834640" y="4480560"/>
-            <a:ext cx="4663440" cy="286512"/>
+          <p:cNvPr id="32" name="Text 30"/>
+          <p:cNvSpPr/>
+          <p:nvPr/>
+        </p:nvSpPr>
+        <p:spPr>
+          <a:xfrm>
+            <a:off x="2834640" y="4726142"/>
+            <a:ext cx="4663440" cy="368373"/>
           </a:xfrm>
           <a:prstGeom prst="rect">
             <a:avLst/>
@@ -7373,7 +7490,7 @@
                 <a:ea typeface="맑은 고딕" pitchFamily="34" charset="-122"/>
                 <a:cs typeface="맑은 고딕" pitchFamily="34" charset="-120"/>
               </a:rPr>
-              <a:t>AI 솔루션 이용료 · 라이선스 · 구독료</a:t>
+              <a:t>로컬 AI 렌더 장비 렌탈</a:t>
             </a:r>
             <a:endParaRPr lang="en-US" sz="900" dirty="0"/>
           </a:p>
@@ -7381,14 +7498,14 @@
       </p:sp>
       <p:sp>
         <p:nvSpPr>
-          <p:cNvPr id="30" name="Shape 28"/>
-          <p:cNvSpPr/>
-          <p:nvPr/>
-        </p:nvSpPr>
-        <p:spPr>
-          <a:xfrm>
-            <a:off x="7635240" y="4559808"/>
-            <a:ext cx="950976" cy="128016"/>
+          <p:cNvPr id="33" name="Shape 31"/>
+          <p:cNvSpPr/>
+          <p:nvPr/>
+        </p:nvSpPr>
+        <p:spPr>
+          <a:xfrm>
+            <a:off x="7635240" y="4846320"/>
+            <a:ext cx="1920240" cy="128016"/>
           </a:xfrm>
           <a:prstGeom prst="rect">
             <a:avLst/>
@@ -7401,14 +7518,14 @@
       </p:sp>
       <p:sp>
         <p:nvSpPr>
-          <p:cNvPr id="31" name="Text 29"/>
-          <p:cNvSpPr/>
-          <p:nvPr/>
-        </p:nvSpPr>
-        <p:spPr>
-          <a:xfrm>
-            <a:off x="10104120" y="4480560"/>
-            <a:ext cx="1371600" cy="286512"/>
+          <p:cNvPr id="34" name="Text 32"/>
+          <p:cNvSpPr/>
+          <p:nvPr/>
+        </p:nvSpPr>
+        <p:spPr>
+          <a:xfrm>
+            <a:off x="9646920" y="4726142"/>
+            <a:ext cx="1143000" cy="368373"/>
           </a:xfrm>
           <a:prstGeom prst="rect">
             <a:avLst/>
@@ -7424,7 +7541,7 @@
               <a:buNone/>
             </a:pPr>
             <a:r>
-              <a:rPr lang="en-US" sz="900" b="1" dirty="0">
+              <a:rPr lang="en-US" sz="950" b="1" dirty="0">
                 <a:solidFill>
                   <a:srgbClr val="101B33"/>
                 </a:solidFill>
@@ -7432,21 +7549,60 @@
                 <a:ea typeface="맑은 고딕" pitchFamily="34" charset="-122"/>
                 <a:cs typeface="맑은 고딕" pitchFamily="34" charset="-120"/>
               </a:rPr>
-              <a:t>384만원</a:t>
-            </a:r>
-            <a:endParaRPr lang="en-US" sz="900" dirty="0"/>
-          </a:p>
-        </p:txBody>
-      </p:sp>
-      <p:sp>
-        <p:nvSpPr>
-          <p:cNvPr id="32" name="Shape 30"/>
-          <p:cNvSpPr/>
-          <p:nvPr/>
-        </p:nvSpPr>
-        <p:spPr>
-          <a:xfrm>
-            <a:off x="685800" y="4767072"/>
+              <a:t>1,200만원</a:t>
+            </a:r>
+            <a:endParaRPr lang="en-US" sz="950" dirty="0"/>
+          </a:p>
+        </p:txBody>
+      </p:sp>
+      <p:sp>
+        <p:nvSpPr>
+          <p:cNvPr id="35" name="Text 33"/>
+          <p:cNvSpPr/>
+          <p:nvPr/>
+        </p:nvSpPr>
+        <p:spPr>
+          <a:xfrm>
+            <a:off x="10835640" y="4726142"/>
+            <a:ext cx="640080" cy="368373"/>
+          </a:xfrm>
+          <a:prstGeom prst="rect">
+            <a:avLst/>
+          </a:prstGeom>
+          <a:noFill/>
+          <a:ln/>
+        </p:spPr>
+        <p:txBody>
+          <a:bodyPr wrap="square" lIns="0" tIns="0" rIns="0" bIns="0" rtlCol="0" anchor="ctr"/>
+          <a:lstStyle/>
+          <a:p>
+            <a:pPr algn="r" indent="0" marL="0">
+              <a:buNone/>
+            </a:pPr>
+            <a:r>
+              <a:rPr lang="en-US" sz="850" dirty="0">
+                <a:solidFill>
+                  <a:srgbClr val="9AA3B0"/>
+                </a:solidFill>
+                <a:latin typeface="맑은 고딕" pitchFamily="34" charset="0"/>
+                <a:ea typeface="맑은 고딕" pitchFamily="34" charset="-122"/>
+                <a:cs typeface="맑은 고딕" pitchFamily="34" charset="-120"/>
+              </a:rPr>
+              <a:t>37.5%</a:t>
+            </a:r>
+            <a:endParaRPr lang="en-US" sz="850" dirty="0"/>
+          </a:p>
+        </p:txBody>
+      </p:sp>
+      <p:sp>
+        <p:nvSpPr>
+          <p:cNvPr id="36" name="Shape 34"/>
+          <p:cNvSpPr/>
+          <p:nvPr/>
+        </p:nvSpPr>
+        <p:spPr>
+          <a:xfrm>
+            <a:off x="685800" y="5094514"/>
             <a:ext cx="10789920" cy="0"/>
           </a:xfrm>
           <a:prstGeom prst="line">
@@ -7463,14 +7619,14 @@
       </p:sp>
       <p:sp>
         <p:nvSpPr>
-          <p:cNvPr id="33" name="Text 31"/>
-          <p:cNvSpPr/>
-          <p:nvPr/>
-        </p:nvSpPr>
-        <p:spPr>
-          <a:xfrm>
-            <a:off x="685800" y="4767072"/>
-            <a:ext cx="2103120" cy="286512"/>
+          <p:cNvPr id="37" name="Text 35"/>
+          <p:cNvSpPr/>
+          <p:nvPr/>
+        </p:nvSpPr>
+        <p:spPr>
+          <a:xfrm>
+            <a:off x="685800" y="5094514"/>
+            <a:ext cx="2103120" cy="368373"/>
           </a:xfrm>
           <a:prstGeom prst="rect">
             <a:avLst/>
@@ -7502,14 +7658,14 @@
       </p:sp>
       <p:sp>
         <p:nvSpPr>
-          <p:cNvPr id="34" name="Text 32"/>
-          <p:cNvSpPr/>
-          <p:nvPr/>
-        </p:nvSpPr>
-        <p:spPr>
-          <a:xfrm>
-            <a:off x="2834640" y="4767072"/>
-            <a:ext cx="4663440" cy="286512"/>
+          <p:cNvPr id="38" name="Text 36"/>
+          <p:cNvSpPr/>
+          <p:nvPr/>
+        </p:nvSpPr>
+        <p:spPr>
+          <a:xfrm>
+            <a:off x="2834640" y="5094514"/>
+            <a:ext cx="4663440" cy="368373"/>
           </a:xfrm>
           <a:prstGeom prst="rect">
             <a:avLst/>
@@ -7533,7 +7689,7 @@
                 <a:ea typeface="맑은 고딕" pitchFamily="34" charset="-122"/>
                 <a:cs typeface="맑은 고딕" pitchFamily="34" charset="-120"/>
               </a:rPr>
-              <a:t>산업재산권 출원등록</a:t>
+              <a:t>AI 구독비 · 라이선스</a:t>
             </a:r>
             <a:endParaRPr lang="en-US" sz="900" dirty="0"/>
           </a:p>
@@ -7541,14 +7697,14 @@
       </p:sp>
       <p:sp>
         <p:nvSpPr>
-          <p:cNvPr id="35" name="Shape 33"/>
-          <p:cNvSpPr/>
-          <p:nvPr/>
-        </p:nvSpPr>
-        <p:spPr>
-          <a:xfrm>
-            <a:off x="7635240" y="4846320"/>
-            <a:ext cx="396240" cy="128016"/>
+          <p:cNvPr id="39" name="Shape 37"/>
+          <p:cNvSpPr/>
+          <p:nvPr/>
+        </p:nvSpPr>
+        <p:spPr>
+          <a:xfrm>
+            <a:off x="7635240" y="5214693"/>
+            <a:ext cx="768096" cy="128016"/>
           </a:xfrm>
           <a:prstGeom prst="rect">
             <a:avLst/>
@@ -7561,14 +7717,14 @@
       </p:sp>
       <p:sp>
         <p:nvSpPr>
-          <p:cNvPr id="36" name="Text 34"/>
-          <p:cNvSpPr/>
-          <p:nvPr/>
-        </p:nvSpPr>
-        <p:spPr>
-          <a:xfrm>
-            <a:off x="10104120" y="4767072"/>
-            <a:ext cx="1371600" cy="286512"/>
+          <p:cNvPr id="40" name="Text 38"/>
+          <p:cNvSpPr/>
+          <p:nvPr/>
+        </p:nvSpPr>
+        <p:spPr>
+          <a:xfrm>
+            <a:off x="9646920" y="5094514"/>
+            <a:ext cx="1143000" cy="368373"/>
           </a:xfrm>
           <a:prstGeom prst="rect">
             <a:avLst/>
@@ -7584,7 +7740,7 @@
               <a:buNone/>
             </a:pPr>
             <a:r>
-              <a:rPr lang="en-US" sz="900" b="1" dirty="0">
+              <a:rPr lang="en-US" sz="950" b="1" dirty="0">
                 <a:solidFill>
                   <a:srgbClr val="101B33"/>
                 </a:solidFill>
@@ -7592,21 +7748,60 @@
                 <a:ea typeface="맑은 고딕" pitchFamily="34" charset="-122"/>
                 <a:cs typeface="맑은 고딕" pitchFamily="34" charset="-120"/>
               </a:rPr>
-              <a:t>160만원</a:t>
-            </a:r>
-            <a:endParaRPr lang="en-US" sz="900" dirty="0"/>
-          </a:p>
-        </p:txBody>
-      </p:sp>
-      <p:sp>
-        <p:nvSpPr>
-          <p:cNvPr id="37" name="Shape 35"/>
-          <p:cNvSpPr/>
-          <p:nvPr/>
-        </p:nvSpPr>
-        <p:spPr>
-          <a:xfrm>
-            <a:off x="685800" y="5053584"/>
+              <a:t>480만원</a:t>
+            </a:r>
+            <a:endParaRPr lang="en-US" sz="950" dirty="0"/>
+          </a:p>
+        </p:txBody>
+      </p:sp>
+      <p:sp>
+        <p:nvSpPr>
+          <p:cNvPr id="41" name="Text 39"/>
+          <p:cNvSpPr/>
+          <p:nvPr/>
+        </p:nvSpPr>
+        <p:spPr>
+          <a:xfrm>
+            <a:off x="10835640" y="5094514"/>
+            <a:ext cx="640080" cy="368373"/>
+          </a:xfrm>
+          <a:prstGeom prst="rect">
+            <a:avLst/>
+          </a:prstGeom>
+          <a:noFill/>
+          <a:ln/>
+        </p:spPr>
+        <p:txBody>
+          <a:bodyPr wrap="square" lIns="0" tIns="0" rIns="0" bIns="0" rtlCol="0" anchor="ctr"/>
+          <a:lstStyle/>
+          <a:p>
+            <a:pPr algn="r" indent="0" marL="0">
+              <a:buNone/>
+            </a:pPr>
+            <a:r>
+              <a:rPr lang="en-US" sz="850" dirty="0">
+                <a:solidFill>
+                  <a:srgbClr val="9AA3B0"/>
+                </a:solidFill>
+                <a:latin typeface="맑은 고딕" pitchFamily="34" charset="0"/>
+                <a:ea typeface="맑은 고딕" pitchFamily="34" charset="-122"/>
+                <a:cs typeface="맑은 고딕" pitchFamily="34" charset="-120"/>
+              </a:rPr>
+              <a:t>15.0%</a:t>
+            </a:r>
+            <a:endParaRPr lang="en-US" sz="850" dirty="0"/>
+          </a:p>
+        </p:txBody>
+      </p:sp>
+      <p:sp>
+        <p:nvSpPr>
+          <p:cNvPr id="42" name="Shape 40"/>
+          <p:cNvSpPr/>
+          <p:nvPr/>
+        </p:nvSpPr>
+        <p:spPr>
+          <a:xfrm>
+            <a:off x="685800" y="5462887"/>
             <a:ext cx="10789920" cy="0"/>
           </a:xfrm>
           <a:prstGeom prst="line">
@@ -7623,14 +7818,14 @@
       </p:sp>
       <p:sp>
         <p:nvSpPr>
-          <p:cNvPr id="38" name="Text 36"/>
-          <p:cNvSpPr/>
-          <p:nvPr/>
-        </p:nvSpPr>
-        <p:spPr>
-          <a:xfrm>
-            <a:off x="685800" y="5053584"/>
-            <a:ext cx="2103120" cy="286512"/>
+          <p:cNvPr id="43" name="Text 41"/>
+          <p:cNvSpPr/>
+          <p:nvPr/>
+        </p:nvSpPr>
+        <p:spPr>
+          <a:xfrm>
+            <a:off x="685800" y="5462887"/>
+            <a:ext cx="2103120" cy="368373"/>
           </a:xfrm>
           <a:prstGeom prst="rect">
             <a:avLst/>
@@ -7654,7 +7849,7 @@
                 <a:ea typeface="맑은 고딕" pitchFamily="34" charset="-122"/>
                 <a:cs typeface="맑은 고딕" pitchFamily="34" charset="-120"/>
               </a:rPr>
-              <a:t>공고료및광고료</a:t>
+              <a:t>수수료및사용료</a:t>
             </a:r>
             <a:endParaRPr lang="en-US" sz="900" dirty="0"/>
           </a:p>
@@ -7662,14 +7857,14 @@
       </p:sp>
       <p:sp>
         <p:nvSpPr>
-          <p:cNvPr id="39" name="Text 37"/>
-          <p:cNvSpPr/>
-          <p:nvPr/>
-        </p:nvSpPr>
-        <p:spPr>
-          <a:xfrm>
-            <a:off x="2834640" y="5053584"/>
-            <a:ext cx="4663440" cy="286512"/>
+          <p:cNvPr id="44" name="Text 42"/>
+          <p:cNvSpPr/>
+          <p:nvPr/>
+        </p:nvSpPr>
+        <p:spPr>
+          <a:xfrm>
+            <a:off x="2834640" y="5462887"/>
+            <a:ext cx="4663440" cy="368373"/>
           </a:xfrm>
           <a:prstGeom prst="rect">
             <a:avLst/>
@@ -7693,7 +7888,7 @@
                 <a:ea typeface="맑은 고딕" pitchFamily="34" charset="-122"/>
                 <a:cs typeface="맑은 고딕" pitchFamily="34" charset="-120"/>
               </a:rPr>
-              <a:t>온라인 광고 집행</a:t>
+              <a:t>산업재산권 출원등록</a:t>
             </a:r>
             <a:endParaRPr lang="en-US" sz="900" dirty="0"/>
           </a:p>
@@ -7701,14 +7896,14 @@
       </p:sp>
       <p:sp>
         <p:nvSpPr>
-          <p:cNvPr id="40" name="Shape 38"/>
-          <p:cNvSpPr/>
-          <p:nvPr/>
-        </p:nvSpPr>
-        <p:spPr>
-          <a:xfrm>
-            <a:off x="7635240" y="5132832"/>
-            <a:ext cx="633984" cy="128016"/>
+          <p:cNvPr id="45" name="Shape 43"/>
+          <p:cNvSpPr/>
+          <p:nvPr/>
+        </p:nvSpPr>
+        <p:spPr>
+          <a:xfrm>
+            <a:off x="7635240" y="5583065"/>
+            <a:ext cx="192024" cy="128016"/>
           </a:xfrm>
           <a:prstGeom prst="rect">
             <a:avLst/>
@@ -7721,14 +7916,14 @@
       </p:sp>
       <p:sp>
         <p:nvSpPr>
-          <p:cNvPr id="41" name="Text 39"/>
-          <p:cNvSpPr/>
-          <p:nvPr/>
-        </p:nvSpPr>
-        <p:spPr>
-          <a:xfrm>
-            <a:off x="10104120" y="5053584"/>
-            <a:ext cx="1371600" cy="286512"/>
+          <p:cNvPr id="46" name="Text 44"/>
+          <p:cNvSpPr/>
+          <p:nvPr/>
+        </p:nvSpPr>
+        <p:spPr>
+          <a:xfrm>
+            <a:off x="9646920" y="5462887"/>
+            <a:ext cx="1143000" cy="368373"/>
           </a:xfrm>
           <a:prstGeom prst="rect">
             <a:avLst/>
@@ -7744,7 +7939,7 @@
               <a:buNone/>
             </a:pPr>
             <a:r>
-              <a:rPr lang="en-US" sz="900" b="1" dirty="0">
+              <a:rPr lang="en-US" sz="950" b="1" dirty="0">
                 <a:solidFill>
                   <a:srgbClr val="101B33"/>
                 </a:solidFill>
@@ -7752,21 +7947,60 @@
                 <a:ea typeface="맑은 고딕" pitchFamily="34" charset="-122"/>
                 <a:cs typeface="맑은 고딕" pitchFamily="34" charset="-120"/>
               </a:rPr>
-              <a:t>256만원</a:t>
-            </a:r>
-            <a:endParaRPr lang="en-US" sz="900" dirty="0"/>
-          </a:p>
-        </p:txBody>
-      </p:sp>
-      <p:sp>
-        <p:nvSpPr>
-          <p:cNvPr id="42" name="Shape 40"/>
-          <p:cNvSpPr/>
-          <p:nvPr/>
-        </p:nvSpPr>
-        <p:spPr>
-          <a:xfrm>
-            <a:off x="685800" y="5340096"/>
+              <a:t>120만원</a:t>
+            </a:r>
+            <a:endParaRPr lang="en-US" sz="950" dirty="0"/>
+          </a:p>
+        </p:txBody>
+      </p:sp>
+      <p:sp>
+        <p:nvSpPr>
+          <p:cNvPr id="47" name="Text 45"/>
+          <p:cNvSpPr/>
+          <p:nvPr/>
+        </p:nvSpPr>
+        <p:spPr>
+          <a:xfrm>
+            <a:off x="10835640" y="5462887"/>
+            <a:ext cx="640080" cy="368373"/>
+          </a:xfrm>
+          <a:prstGeom prst="rect">
+            <a:avLst/>
+          </a:prstGeom>
+          <a:noFill/>
+          <a:ln/>
+        </p:spPr>
+        <p:txBody>
+          <a:bodyPr wrap="square" lIns="0" tIns="0" rIns="0" bIns="0" rtlCol="0" anchor="ctr"/>
+          <a:lstStyle/>
+          <a:p>
+            <a:pPr algn="r" indent="0" marL="0">
+              <a:buNone/>
+            </a:pPr>
+            <a:r>
+              <a:rPr lang="en-US" sz="850" dirty="0">
+                <a:solidFill>
+                  <a:srgbClr val="9AA3B0"/>
+                </a:solidFill>
+                <a:latin typeface="맑은 고딕" pitchFamily="34" charset="0"/>
+                <a:ea typeface="맑은 고딕" pitchFamily="34" charset="-122"/>
+                <a:cs typeface="맑은 고딕" pitchFamily="34" charset="-120"/>
+              </a:rPr>
+              <a:t>3.8%</a:t>
+            </a:r>
+            <a:endParaRPr lang="en-US" sz="850" dirty="0"/>
+          </a:p>
+        </p:txBody>
+      </p:sp>
+      <p:sp>
+        <p:nvSpPr>
+          <p:cNvPr id="48" name="Shape 46"/>
+          <p:cNvSpPr/>
+          <p:nvPr/>
+        </p:nvSpPr>
+        <p:spPr>
+          <a:xfrm>
+            <a:off x="685800" y="5831259"/>
             <a:ext cx="10789920" cy="0"/>
           </a:xfrm>
           <a:prstGeom prst="line">
@@ -7783,14 +8017,14 @@
       </p:sp>
       <p:sp>
         <p:nvSpPr>
-          <p:cNvPr id="43" name="Text 41"/>
-          <p:cNvSpPr/>
-          <p:nvPr/>
-        </p:nvSpPr>
-        <p:spPr>
-          <a:xfrm>
-            <a:off x="685800" y="5340096"/>
-            <a:ext cx="2103120" cy="286512"/>
+          <p:cNvPr id="49" name="Text 47"/>
+          <p:cNvSpPr/>
+          <p:nvPr/>
+        </p:nvSpPr>
+        <p:spPr>
+          <a:xfrm>
+            <a:off x="685800" y="5831259"/>
+            <a:ext cx="2103120" cy="368373"/>
           </a:xfrm>
           <a:prstGeom prst="rect">
             <a:avLst/>
@@ -7814,7 +8048,7 @@
                 <a:ea typeface="맑은 고딕" pitchFamily="34" charset="-122"/>
                 <a:cs typeface="맑은 고딕" pitchFamily="34" charset="-120"/>
               </a:rPr>
-              <a:t>전문가활용비</a:t>
+              <a:t>재료구입비</a:t>
             </a:r>
             <a:endParaRPr lang="en-US" sz="900" dirty="0"/>
           </a:p>
@@ -7822,14 +8056,14 @@
       </p:sp>
       <p:sp>
         <p:nvSpPr>
-          <p:cNvPr id="44" name="Text 42"/>
-          <p:cNvSpPr/>
-          <p:nvPr/>
-        </p:nvSpPr>
-        <p:spPr>
-          <a:xfrm>
-            <a:off x="2834640" y="5340096"/>
-            <a:ext cx="4663440" cy="286512"/>
+          <p:cNvPr id="50" name="Text 48"/>
+          <p:cNvSpPr/>
+          <p:nvPr/>
+        </p:nvSpPr>
+        <p:spPr>
+          <a:xfrm>
+            <a:off x="2834640" y="5831259"/>
+            <a:ext cx="4663440" cy="368373"/>
           </a:xfrm>
           <a:prstGeom prst="rect">
             <a:avLst/>
@@ -7853,7 +8087,7 @@
                 <a:ea typeface="맑은 고딕" pitchFamily="34" charset="-122"/>
                 <a:cs typeface="맑은 고딕" pitchFamily="34" charset="-120"/>
               </a:rPr>
-              <a:t>외부 전문가 자문</a:t>
+              <a:t>실증 재료 · 데이터셋</a:t>
             </a:r>
             <a:endParaRPr lang="en-US" sz="900" dirty="0"/>
           </a:p>
@@ -7861,14 +8095,14 @@
       </p:sp>
       <p:sp>
         <p:nvSpPr>
-          <p:cNvPr id="45" name="Shape 43"/>
-          <p:cNvSpPr/>
-          <p:nvPr/>
-        </p:nvSpPr>
-        <p:spPr>
-          <a:xfrm>
-            <a:off x="7635240" y="5419344"/>
-            <a:ext cx="396240" cy="128016"/>
+          <p:cNvPr id="51" name="Shape 49"/>
+          <p:cNvSpPr/>
+          <p:nvPr/>
+        </p:nvSpPr>
+        <p:spPr>
+          <a:xfrm>
+            <a:off x="7635240" y="5951438"/>
+            <a:ext cx="160020" cy="128016"/>
           </a:xfrm>
           <a:prstGeom prst="rect">
             <a:avLst/>
@@ -7881,14 +8115,14 @@
       </p:sp>
       <p:sp>
         <p:nvSpPr>
-          <p:cNvPr id="46" name="Text 44"/>
-          <p:cNvSpPr/>
-          <p:nvPr/>
-        </p:nvSpPr>
-        <p:spPr>
-          <a:xfrm>
-            <a:off x="10104120" y="5340096"/>
-            <a:ext cx="1371600" cy="286512"/>
+          <p:cNvPr id="52" name="Text 50"/>
+          <p:cNvSpPr/>
+          <p:nvPr/>
+        </p:nvSpPr>
+        <p:spPr>
+          <a:xfrm>
+            <a:off x="9646920" y="5831259"/>
+            <a:ext cx="1143000" cy="368373"/>
           </a:xfrm>
           <a:prstGeom prst="rect">
             <a:avLst/>
@@ -7904,7 +8138,7 @@
               <a:buNone/>
             </a:pPr>
             <a:r>
-              <a:rPr lang="en-US" sz="900" b="1" dirty="0">
+              <a:rPr lang="en-US" sz="950" b="1" dirty="0">
                 <a:solidFill>
                   <a:srgbClr val="101B33"/>
                 </a:solidFill>
@@ -7912,21 +8146,60 @@
                 <a:ea typeface="맑은 고딕" pitchFamily="34" charset="-122"/>
                 <a:cs typeface="맑은 고딕" pitchFamily="34" charset="-120"/>
               </a:rPr>
-              <a:t>160만원</a:t>
-            </a:r>
-            <a:endParaRPr lang="en-US" sz="900" dirty="0"/>
-          </a:p>
-        </p:txBody>
-      </p:sp>
-      <p:sp>
-        <p:nvSpPr>
-          <p:cNvPr id="47" name="Shape 45"/>
-          <p:cNvSpPr/>
-          <p:nvPr/>
-        </p:nvSpPr>
-        <p:spPr>
-          <a:xfrm>
-            <a:off x="685800" y="5626608"/>
+              <a:t>100만원</a:t>
+            </a:r>
+            <a:endParaRPr lang="en-US" sz="950" dirty="0"/>
+          </a:p>
+        </p:txBody>
+      </p:sp>
+      <p:sp>
+        <p:nvSpPr>
+          <p:cNvPr id="53" name="Text 51"/>
+          <p:cNvSpPr/>
+          <p:nvPr/>
+        </p:nvSpPr>
+        <p:spPr>
+          <a:xfrm>
+            <a:off x="10835640" y="5831259"/>
+            <a:ext cx="640080" cy="368373"/>
+          </a:xfrm>
+          <a:prstGeom prst="rect">
+            <a:avLst/>
+          </a:prstGeom>
+          <a:noFill/>
+          <a:ln/>
+        </p:spPr>
+        <p:txBody>
+          <a:bodyPr wrap="square" lIns="0" tIns="0" rIns="0" bIns="0" rtlCol="0" anchor="ctr"/>
+          <a:lstStyle/>
+          <a:p>
+            <a:pPr algn="r" indent="0" marL="0">
+              <a:buNone/>
+            </a:pPr>
+            <a:r>
+              <a:rPr lang="en-US" sz="850" dirty="0">
+                <a:solidFill>
+                  <a:srgbClr val="9AA3B0"/>
+                </a:solidFill>
+                <a:latin typeface="맑은 고딕" pitchFamily="34" charset="0"/>
+                <a:ea typeface="맑은 고딕" pitchFamily="34" charset="-122"/>
+                <a:cs typeface="맑은 고딕" pitchFamily="34" charset="-120"/>
+              </a:rPr>
+              <a:t>3.1%</a:t>
+            </a:r>
+            <a:endParaRPr lang="en-US" sz="850" dirty="0"/>
+          </a:p>
+        </p:txBody>
+      </p:sp>
+      <p:sp>
+        <p:nvSpPr>
+          <p:cNvPr id="54" name="Shape 52"/>
+          <p:cNvSpPr/>
+          <p:nvPr/>
+        </p:nvSpPr>
+        <p:spPr>
+          <a:xfrm>
+            <a:off x="685800" y="6199632"/>
             <a:ext cx="10789920" cy="0"/>
           </a:xfrm>
           <a:prstGeom prst="line">
@@ -7943,327 +8216,7 @@
       </p:sp>
       <p:sp>
         <p:nvSpPr>
-          <p:cNvPr id="48" name="Text 46"/>
-          <p:cNvSpPr/>
-          <p:nvPr/>
-        </p:nvSpPr>
-        <p:spPr>
-          <a:xfrm>
-            <a:off x="685800" y="5626608"/>
-            <a:ext cx="2103120" cy="286512"/>
-          </a:xfrm>
-          <a:prstGeom prst="rect">
-            <a:avLst/>
-          </a:prstGeom>
-          <a:noFill/>
-          <a:ln/>
-        </p:spPr>
-        <p:txBody>
-          <a:bodyPr wrap="square" lIns="0" tIns="0" rIns="0" bIns="0" rtlCol="0" anchor="ctr"/>
-          <a:lstStyle/>
-          <a:p>
-            <a:pPr indent="0" marL="0">
-              <a:buNone/>
-            </a:pPr>
-            <a:r>
-              <a:rPr lang="en-US" sz="900" b="1" dirty="0">
-                <a:solidFill>
-                  <a:srgbClr val="101B33"/>
-                </a:solidFill>
-                <a:latin typeface="맑은 고딕" pitchFamily="34" charset="0"/>
-                <a:ea typeface="맑은 고딕" pitchFamily="34" charset="-122"/>
-                <a:cs typeface="맑은 고딕" pitchFamily="34" charset="-120"/>
-              </a:rPr>
-              <a:t>임차비</a:t>
-            </a:r>
-            <a:endParaRPr lang="en-US" sz="900" dirty="0"/>
-          </a:p>
-        </p:txBody>
-      </p:sp>
-      <p:sp>
-        <p:nvSpPr>
-          <p:cNvPr id="49" name="Text 47"/>
-          <p:cNvSpPr/>
-          <p:nvPr/>
-        </p:nvSpPr>
-        <p:spPr>
-          <a:xfrm>
-            <a:off x="2834640" y="5626608"/>
-            <a:ext cx="4663440" cy="286512"/>
-          </a:xfrm>
-          <a:prstGeom prst="rect">
-            <a:avLst/>
-          </a:prstGeom>
-          <a:noFill/>
-          <a:ln/>
-        </p:spPr>
-        <p:txBody>
-          <a:bodyPr wrap="square" lIns="0" tIns="0" rIns="0" bIns="0" rtlCol="0" anchor="ctr"/>
-          <a:lstStyle/>
-          <a:p>
-            <a:pPr indent="0" marL="0">
-              <a:buNone/>
-            </a:pPr>
-            <a:r>
-              <a:rPr lang="en-US" sz="900" dirty="0">
-                <a:solidFill>
-                  <a:srgbClr val="4A5262"/>
-                </a:solidFill>
-                <a:latin typeface="맑은 고딕" pitchFamily="34" charset="0"/>
-                <a:ea typeface="맑은 고딕" pitchFamily="34" charset="-122"/>
-                <a:cs typeface="맑은 고딕" pitchFamily="34" charset="-120"/>
-              </a:rPr>
-              <a:t>렌더 장비 · 실증용 패널 임차</a:t>
-            </a:r>
-            <a:endParaRPr lang="en-US" sz="900" dirty="0"/>
-          </a:p>
-        </p:txBody>
-      </p:sp>
-      <p:sp>
-        <p:nvSpPr>
-          <p:cNvPr id="50" name="Shape 48"/>
-          <p:cNvSpPr/>
-          <p:nvPr/>
-        </p:nvSpPr>
-        <p:spPr>
-          <a:xfrm>
-            <a:off x="7635240" y="5705856"/>
-            <a:ext cx="792480" cy="128016"/>
-          </a:xfrm>
-          <a:prstGeom prst="rect">
-            <a:avLst/>
-          </a:prstGeom>
-          <a:solidFill>
-            <a:srgbClr val="0075C9"/>
-          </a:solidFill>
-          <a:ln/>
-        </p:spPr>
-      </p:sp>
-      <p:sp>
-        <p:nvSpPr>
-          <p:cNvPr id="51" name="Text 49"/>
-          <p:cNvSpPr/>
-          <p:nvPr/>
-        </p:nvSpPr>
-        <p:spPr>
-          <a:xfrm>
-            <a:off x="10104120" y="5626608"/>
-            <a:ext cx="1371600" cy="286512"/>
-          </a:xfrm>
-          <a:prstGeom prst="rect">
-            <a:avLst/>
-          </a:prstGeom>
-          <a:noFill/>
-          <a:ln/>
-        </p:spPr>
-        <p:txBody>
-          <a:bodyPr wrap="square" lIns="0" tIns="0" rIns="0" bIns="0" rtlCol="0" anchor="ctr"/>
-          <a:lstStyle/>
-          <a:p>
-            <a:pPr algn="r" indent="0" marL="0">
-              <a:buNone/>
-            </a:pPr>
-            <a:r>
-              <a:rPr lang="en-US" sz="900" b="1" dirty="0">
-                <a:solidFill>
-                  <a:srgbClr val="101B33"/>
-                </a:solidFill>
-                <a:latin typeface="맑은 고딕" pitchFamily="34" charset="0"/>
-                <a:ea typeface="맑은 고딕" pitchFamily="34" charset="-122"/>
-                <a:cs typeface="맑은 고딕" pitchFamily="34" charset="-120"/>
-              </a:rPr>
-              <a:t>320만원</a:t>
-            </a:r>
-            <a:endParaRPr lang="en-US" sz="900" dirty="0"/>
-          </a:p>
-        </p:txBody>
-      </p:sp>
-      <p:sp>
-        <p:nvSpPr>
-          <p:cNvPr id="52" name="Shape 50"/>
-          <p:cNvSpPr/>
-          <p:nvPr/>
-        </p:nvSpPr>
-        <p:spPr>
-          <a:xfrm>
-            <a:off x="685800" y="5913120"/>
-            <a:ext cx="10789920" cy="0"/>
-          </a:xfrm>
-          <a:prstGeom prst="line">
-            <a:avLst/>
-          </a:prstGeom>
-          <a:noFill/>
-          <a:ln w="12700">
-            <a:solidFill>
-              <a:srgbClr val="DFE3EA"/>
-            </a:solidFill>
-            <a:prstDash val="solid"/>
-          </a:ln>
-        </p:spPr>
-      </p:sp>
-      <p:sp>
-        <p:nvSpPr>
-          <p:cNvPr id="53" name="Text 51"/>
-          <p:cNvSpPr/>
-          <p:nvPr/>
-        </p:nvSpPr>
-        <p:spPr>
-          <a:xfrm>
-            <a:off x="685800" y="5913120"/>
-            <a:ext cx="2103120" cy="286512"/>
-          </a:xfrm>
-          <a:prstGeom prst="rect">
-            <a:avLst/>
-          </a:prstGeom>
-          <a:noFill/>
-          <a:ln/>
-        </p:spPr>
-        <p:txBody>
-          <a:bodyPr wrap="square" lIns="0" tIns="0" rIns="0" bIns="0" rtlCol="0" anchor="ctr"/>
-          <a:lstStyle/>
-          <a:p>
-            <a:pPr indent="0" marL="0">
-              <a:buNone/>
-            </a:pPr>
-            <a:r>
-              <a:rPr lang="en-US" sz="900" b="1" dirty="0">
-                <a:solidFill>
-                  <a:srgbClr val="101B33"/>
-                </a:solidFill>
-                <a:latin typeface="맑은 고딕" pitchFamily="34" charset="0"/>
-                <a:ea typeface="맑은 고딕" pitchFamily="34" charset="-122"/>
-                <a:cs typeface="맑은 고딕" pitchFamily="34" charset="-120"/>
-              </a:rPr>
-              <a:t>재료구입비</a:t>
-            </a:r>
-            <a:endParaRPr lang="en-US" sz="900" dirty="0"/>
-          </a:p>
-        </p:txBody>
-      </p:sp>
-      <p:sp>
-        <p:nvSpPr>
-          <p:cNvPr id="54" name="Text 52"/>
-          <p:cNvSpPr/>
-          <p:nvPr/>
-        </p:nvSpPr>
-        <p:spPr>
-          <a:xfrm>
-            <a:off x="2834640" y="5913120"/>
-            <a:ext cx="4663440" cy="286512"/>
-          </a:xfrm>
-          <a:prstGeom prst="rect">
-            <a:avLst/>
-          </a:prstGeom>
-          <a:noFill/>
-          <a:ln/>
-        </p:spPr>
-        <p:txBody>
-          <a:bodyPr wrap="square" lIns="0" tIns="0" rIns="0" bIns="0" rtlCol="0" anchor="ctr"/>
-          <a:lstStyle/>
-          <a:p>
-            <a:pPr indent="0" marL="0">
-              <a:buNone/>
-            </a:pPr>
-            <a:r>
-              <a:rPr lang="en-US" sz="900" dirty="0">
-                <a:solidFill>
-                  <a:srgbClr val="4A5262"/>
-                </a:solidFill>
-                <a:latin typeface="맑은 고딕" pitchFamily="34" charset="0"/>
-                <a:ea typeface="맑은 고딕" pitchFamily="34" charset="-122"/>
-                <a:cs typeface="맑은 고딕" pitchFamily="34" charset="-120"/>
-              </a:rPr>
-              <a:t>실증 재료 · 데이터셋</a:t>
-            </a:r>
-            <a:endParaRPr lang="en-US" sz="900" dirty="0"/>
-          </a:p>
-        </p:txBody>
-      </p:sp>
-      <p:sp>
-        <p:nvSpPr>
-          <p:cNvPr id="55" name="Shape 53"/>
-          <p:cNvSpPr/>
-          <p:nvPr/>
-        </p:nvSpPr>
-        <p:spPr>
-          <a:xfrm>
-            <a:off x="7635240" y="5992368"/>
-            <a:ext cx="396240" cy="128016"/>
-          </a:xfrm>
-          <a:prstGeom prst="rect">
-            <a:avLst/>
-          </a:prstGeom>
-          <a:solidFill>
-            <a:srgbClr val="0075C9"/>
-          </a:solidFill>
-          <a:ln/>
-        </p:spPr>
-      </p:sp>
-      <p:sp>
-        <p:nvSpPr>
-          <p:cNvPr id="56" name="Text 54"/>
-          <p:cNvSpPr/>
-          <p:nvPr/>
-        </p:nvSpPr>
-        <p:spPr>
-          <a:xfrm>
-            <a:off x="10104120" y="5913120"/>
-            <a:ext cx="1371600" cy="286512"/>
-          </a:xfrm>
-          <a:prstGeom prst="rect">
-            <a:avLst/>
-          </a:prstGeom>
-          <a:noFill/>
-          <a:ln/>
-        </p:spPr>
-        <p:txBody>
-          <a:bodyPr wrap="square" lIns="0" tIns="0" rIns="0" bIns="0" rtlCol="0" anchor="ctr"/>
-          <a:lstStyle/>
-          <a:p>
-            <a:pPr algn="r" indent="0" marL="0">
-              <a:buNone/>
-            </a:pPr>
-            <a:r>
-              <a:rPr lang="en-US" sz="900" b="1" dirty="0">
-                <a:solidFill>
-                  <a:srgbClr val="101B33"/>
-                </a:solidFill>
-                <a:latin typeface="맑은 고딕" pitchFamily="34" charset="0"/>
-                <a:ea typeface="맑은 고딕" pitchFamily="34" charset="-122"/>
-                <a:cs typeface="맑은 고딕" pitchFamily="34" charset="-120"/>
-              </a:rPr>
-              <a:t>160만원</a:t>
-            </a:r>
-            <a:endParaRPr lang="en-US" sz="900" dirty="0"/>
-          </a:p>
-        </p:txBody>
-      </p:sp>
-      <p:sp>
-        <p:nvSpPr>
-          <p:cNvPr id="57" name="Shape 55"/>
-          <p:cNvSpPr/>
-          <p:nvPr/>
-        </p:nvSpPr>
-        <p:spPr>
-          <a:xfrm>
-            <a:off x="685800" y="6199632"/>
-            <a:ext cx="10789920" cy="0"/>
-          </a:xfrm>
-          <a:prstGeom prst="line">
-            <a:avLst/>
-          </a:prstGeom>
-          <a:noFill/>
-          <a:ln w="12700">
-            <a:solidFill>
-              <a:srgbClr val="DFE3EA"/>
-            </a:solidFill>
-            <a:prstDash val="solid"/>
-          </a:ln>
-        </p:spPr>
-      </p:sp>
-      <p:sp>
-        <p:nvSpPr>
-          <p:cNvPr id="58" name="Text 56"/>
+          <p:cNvPr id="55" name="Text 53"/>
           <p:cNvSpPr/>
           <p:nvPr/>
         </p:nvSpPr>
@@ -8297,7 +8250,7 @@
                 <a:ea typeface="맑은 고딕" pitchFamily="34" charset="-122"/>
                 <a:cs typeface="맑은 고딕" pitchFamily="34" charset="-120"/>
               </a:rPr>
-              <a:t>총사업비는 아직 확정 전이라 집행기준 &lt;별표 11&gt;의 예시 금액(4,000만원)을 그대로 넣어 두었다. 실제 협약 금액이 나오면 amount만 고치고 build-deck.js를 다시 돌리면 표와 비율이 함께 바뀐다.</a:t>
+              <a:t>정부지원금 3,200만원 기준으로 항목별 금액을 확정했다. 총사업비는 대응자금 20%를 더한 4,000만원이다. 금액을 바꿀 때는 이 파일의 amount와 gov[].share만 고치고 build-deck.js를 다시 돌린다.</a:t>
             </a:r>
             <a:endParaRPr lang="en-US" sz="850" dirty="0"/>
           </a:p>
@@ -8305,7 +8258,7 @@
       </p:sp>
       <p:sp>
         <p:nvSpPr>
-          <p:cNvPr id="59" name="Text 57"/>
+          <p:cNvPr id="56" name="Text 54"/>
           <p:cNvSpPr/>
           <p:nvPr/>
         </p:nvSpPr>
@@ -8460,6 +8413,45 @@
         </p:nvSpPr>
         <p:spPr>
           <a:xfrm>
+            <a:off x="7315200" y="1298448"/>
+            <a:ext cx="4160520" cy="274320"/>
+          </a:xfrm>
+          <a:prstGeom prst="rect">
+            <a:avLst/>
+          </a:prstGeom>
+          <a:noFill/>
+          <a:ln/>
+        </p:spPr>
+        <p:txBody>
+          <a:bodyPr wrap="square" lIns="0" tIns="0" rIns="0" bIns="0" rtlCol="0" anchor="ctr"/>
+          <a:lstStyle/>
+          <a:p>
+            <a:pPr algn="r" indent="0" marL="0">
+              <a:buNone/>
+            </a:pPr>
+            <a:r>
+              <a:rPr lang="en-US" sz="1300" b="1" dirty="0">
+                <a:solidFill>
+                  <a:srgbClr val="101B33"/>
+                </a:solidFill>
+                <a:latin typeface="맑은 고딕" pitchFamily="34" charset="0"/>
+                <a:ea typeface="맑은 고딕" pitchFamily="34" charset="-122"/>
+                <a:cs typeface="맑은 고딕" pitchFamily="34" charset="-120"/>
+              </a:rPr>
+              <a:t>정부지원금 3,200만원</a:t>
+            </a:r>
+            <a:endParaRPr lang="en-US" sz="1300" dirty="0"/>
+          </a:p>
+        </p:txBody>
+      </p:sp>
+      <p:sp>
+        <p:nvSpPr>
+          <p:cNvPr id="5" name="Text 3"/>
+          <p:cNvSpPr/>
+          <p:nvPr/>
+        </p:nvSpPr>
+        <p:spPr>
+          <a:xfrm>
             <a:off x="685800" y="1600200"/>
             <a:ext cx="2377440" cy="237744"/>
           </a:xfrm>
@@ -8493,7 +8485,7 @@
       </p:sp>
       <p:sp>
         <p:nvSpPr>
-          <p:cNvPr id="5" name="Text 3"/>
+          <p:cNvPr id="6" name="Text 4"/>
           <p:cNvSpPr/>
           <p:nvPr/>
         </p:nvSpPr>
@@ -8532,7 +8524,7 @@
       </p:sp>
       <p:sp>
         <p:nvSpPr>
-          <p:cNvPr id="6" name="Text 4"/>
+          <p:cNvPr id="7" name="Text 5"/>
           <p:cNvSpPr/>
           <p:nvPr/>
         </p:nvSpPr>
@@ -8571,7 +8563,7 @@
       </p:sp>
       <p:sp>
         <p:nvSpPr>
-          <p:cNvPr id="7" name="Text 5"/>
+          <p:cNvPr id="8" name="Text 6"/>
           <p:cNvSpPr/>
           <p:nvPr/>
         </p:nvSpPr>
@@ -8610,7 +8602,7 @@
       </p:sp>
       <p:sp>
         <p:nvSpPr>
-          <p:cNvPr id="8" name="Shape 6"/>
+          <p:cNvPr id="9" name="Shape 7"/>
           <p:cNvSpPr/>
           <p:nvPr/>
         </p:nvSpPr>
@@ -8633,23 +8625,23 @@
       </p:sp>
       <p:sp>
         <p:nvSpPr>
-          <p:cNvPr id="9" name="Text 7"/>
-          <p:cNvSpPr/>
-          <p:nvPr/>
-        </p:nvSpPr>
-        <p:spPr>
-          <a:xfrm>
-            <a:off x="685800" y="1929384"/>
-            <a:ext cx="2377440" cy="406908"/>
-          </a:xfrm>
-          <a:prstGeom prst="rect">
-            <a:avLst/>
-          </a:prstGeom>
-          <a:noFill/>
-          <a:ln/>
-        </p:spPr>
-        <p:txBody>
-          <a:bodyPr wrap="square" lIns="0" tIns="0" rIns="0" bIns="0" rtlCol="0" anchor="ctr"/>
+          <p:cNvPr id="10" name="Text 8"/>
+          <p:cNvSpPr/>
+          <p:nvPr/>
+        </p:nvSpPr>
+        <p:spPr>
+          <a:xfrm>
+            <a:off x="685800" y="1947672"/>
+            <a:ext cx="2377440" cy="292608"/>
+          </a:xfrm>
+          <a:prstGeom prst="rect">
+            <a:avLst/>
+          </a:prstGeom>
+          <a:noFill/>
+          <a:ln/>
+        </p:spPr>
+        <p:txBody>
+          <a:bodyPr wrap="square" lIns="0" tIns="0" rIns="0" bIns="0" rtlCol="0" anchor="t"/>
           <a:lstStyle/>
           <a:p>
             <a:pPr indent="0" marL="0">
@@ -8672,23 +8664,23 @@
       </p:sp>
       <p:sp>
         <p:nvSpPr>
-          <p:cNvPr id="10" name="Text 8"/>
-          <p:cNvSpPr/>
-          <p:nvPr/>
-        </p:nvSpPr>
-        <p:spPr>
-          <a:xfrm>
-            <a:off x="3108960" y="1929384"/>
-            <a:ext cx="1371600" cy="406908"/>
-          </a:xfrm>
-          <a:prstGeom prst="rect">
-            <a:avLst/>
-          </a:prstGeom>
-          <a:noFill/>
-          <a:ln/>
-        </p:spPr>
-        <p:txBody>
-          <a:bodyPr wrap="square" lIns="0" tIns="0" rIns="0" bIns="0" rtlCol="0" anchor="ctr"/>
+          <p:cNvPr id="11" name="Text 9"/>
+          <p:cNvSpPr/>
+          <p:nvPr/>
+        </p:nvSpPr>
+        <p:spPr>
+          <a:xfrm>
+            <a:off x="3108960" y="1947672"/>
+            <a:ext cx="1371600" cy="292608"/>
+          </a:xfrm>
+          <a:prstGeom prst="rect">
+            <a:avLst/>
+          </a:prstGeom>
+          <a:noFill/>
+          <a:ln/>
+        </p:spPr>
+        <p:txBody>
+          <a:bodyPr wrap="square" lIns="0" tIns="0" rIns="0" bIns="0" rtlCol="0" anchor="t"/>
           <a:lstStyle/>
           <a:p>
             <a:pPr indent="0" marL="0">
@@ -8711,23 +8703,23 @@
       </p:sp>
       <p:sp>
         <p:nvSpPr>
-          <p:cNvPr id="11" name="Text 9"/>
-          <p:cNvSpPr/>
-          <p:nvPr/>
-        </p:nvSpPr>
-        <p:spPr>
-          <a:xfrm>
-            <a:off x="4526280" y="1929384"/>
-            <a:ext cx="2743200" cy="406908"/>
-          </a:xfrm>
-          <a:prstGeom prst="rect">
-            <a:avLst/>
-          </a:prstGeom>
-          <a:noFill/>
-          <a:ln/>
-        </p:spPr>
-        <p:txBody>
-          <a:bodyPr wrap="square" lIns="0" tIns="0" rIns="0" bIns="0" rtlCol="0" anchor="ctr"/>
+          <p:cNvPr id="12" name="Text 10"/>
+          <p:cNvSpPr/>
+          <p:nvPr/>
+        </p:nvSpPr>
+        <p:spPr>
+          <a:xfrm>
+            <a:off x="4526280" y="1947672"/>
+            <a:ext cx="2743200" cy="292608"/>
+          </a:xfrm>
+          <a:prstGeom prst="rect">
+            <a:avLst/>
+          </a:prstGeom>
+          <a:noFill/>
+          <a:ln/>
+        </p:spPr>
+        <p:txBody>
+          <a:bodyPr wrap="square" lIns="0" tIns="0" rIns="0" bIns="0" rtlCol="0" anchor="t"/>
           <a:lstStyle/>
           <a:p>
             <a:pPr indent="0" marL="0">
@@ -8742,7 +8734,7 @@
                 <a:ea typeface="맑은 고딕" pitchFamily="34" charset="-122"/>
                 <a:cs typeface="맑은 고딕" pitchFamily="34" charset="-120"/>
               </a:rPr>
-              <a:t>온 미디어아트 에디트 고도화 외주</a:t>
+              <a:t>개발 외주 — 에디터 서버화 · 공공 API 연동</a:t>
             </a:r>
             <a:endParaRPr lang="en-US" sz="950" dirty="0"/>
           </a:p>
@@ -8750,14 +8742,53 @@
       </p:sp>
       <p:sp>
         <p:nvSpPr>
-          <p:cNvPr id="12" name="Text 10"/>
+          <p:cNvPr id="13" name="Text 11"/>
+          <p:cNvSpPr/>
+          <p:nvPr/>
+        </p:nvSpPr>
+        <p:spPr>
+          <a:xfrm>
+            <a:off x="4526280" y="2221992"/>
+            <a:ext cx="2743200" cy="237744"/>
+          </a:xfrm>
+          <a:prstGeom prst="rect">
+            <a:avLst/>
+          </a:prstGeom>
+          <a:noFill/>
+          <a:ln/>
+        </p:spPr>
+        <p:txBody>
+          <a:bodyPr wrap="square" lIns="0" tIns="0" rIns="0" bIns="0" rtlCol="0" anchor="t"/>
+          <a:lstStyle/>
+          <a:p>
+            <a:pPr indent="0" marL="0">
+              <a:buNone/>
+            </a:pPr>
+            <a:r>
+              <a:rPr lang="en-US" sz="1200" b="1" dirty="0">
+                <a:solidFill>
+                  <a:srgbClr val="0075C9"/>
+                </a:solidFill>
+                <a:latin typeface="맑은 고딕" pitchFamily="34" charset="0"/>
+                <a:ea typeface="맑은 고딕" pitchFamily="34" charset="-122"/>
+                <a:cs typeface="맑은 고딕" pitchFamily="34" charset="-120"/>
+              </a:rPr>
+              <a:t>600만원</a:t>
+            </a:r>
+            <a:endParaRPr lang="en-US" sz="1200" dirty="0"/>
+          </a:p>
+        </p:txBody>
+      </p:sp>
+      <p:sp>
+        <p:nvSpPr>
+          <p:cNvPr id="14" name="Text 12"/>
           <p:cNvSpPr/>
           <p:nvPr/>
         </p:nvSpPr>
         <p:spPr>
           <a:xfrm>
             <a:off x="7315200" y="1929384"/>
-            <a:ext cx="4160520" cy="406908"/>
+            <a:ext cx="4160520" cy="542109"/>
           </a:xfrm>
           <a:prstGeom prst="rect">
             <a:avLst/>
@@ -8792,13 +8823,13 @@
       </p:sp>
       <p:sp>
         <p:nvSpPr>
-          <p:cNvPr id="13" name="Shape 11"/>
-          <p:cNvSpPr/>
-          <p:nvPr/>
-        </p:nvSpPr>
-        <p:spPr>
-          <a:xfrm>
-            <a:off x="685800" y="2372868"/>
+          <p:cNvPr id="15" name="Shape 13"/>
+          <p:cNvSpPr/>
+          <p:nvPr/>
+        </p:nvSpPr>
+        <p:spPr>
+          <a:xfrm>
+            <a:off x="685800" y="2508069"/>
             <a:ext cx="10789920" cy="0"/>
           </a:xfrm>
           <a:prstGeom prst="line">
@@ -8815,23 +8846,23 @@
       </p:sp>
       <p:sp>
         <p:nvSpPr>
-          <p:cNvPr id="14" name="Text 12"/>
-          <p:cNvSpPr/>
-          <p:nvPr/>
-        </p:nvSpPr>
-        <p:spPr>
-          <a:xfrm>
-            <a:off x="685800" y="2427732"/>
-            <a:ext cx="2377440" cy="406908"/>
-          </a:xfrm>
-          <a:prstGeom prst="rect">
-            <a:avLst/>
-          </a:prstGeom>
-          <a:noFill/>
-          <a:ln/>
-        </p:spPr>
-        <p:txBody>
-          <a:bodyPr wrap="square" lIns="0" tIns="0" rIns="0" bIns="0" rtlCol="0" anchor="ctr"/>
+          <p:cNvPr id="16" name="Text 14"/>
+          <p:cNvSpPr/>
+          <p:nvPr/>
+        </p:nvSpPr>
+        <p:spPr>
+          <a:xfrm>
+            <a:off x="685800" y="2581221"/>
+            <a:ext cx="2377440" cy="292608"/>
+          </a:xfrm>
+          <a:prstGeom prst="rect">
+            <a:avLst/>
+          </a:prstGeom>
+          <a:noFill/>
+          <a:ln/>
+        </p:spPr>
+        <p:txBody>
+          <a:bodyPr wrap="square" lIns="0" tIns="0" rIns="0" bIns="0" rtlCol="0" anchor="t"/>
           <a:lstStyle/>
           <a:p>
             <a:pPr indent="0" marL="0">
@@ -8846,7 +8877,7 @@
                 <a:ea typeface="맑은 고딕" pitchFamily="34" charset="-122"/>
                 <a:cs typeface="맑은 고딕" pitchFamily="34" charset="-120"/>
               </a:rPr>
-              <a:t>운영비(210)-일반용역비(14)</a:t>
+              <a:t>운영비(210)-일반수용비(01)</a:t>
             </a:r>
             <a:endParaRPr lang="en-US" sz="850" dirty="0"/>
           </a:p>
@@ -8854,23 +8885,23 @@
       </p:sp>
       <p:sp>
         <p:nvSpPr>
-          <p:cNvPr id="15" name="Text 13"/>
-          <p:cNvSpPr/>
-          <p:nvPr/>
-        </p:nvSpPr>
-        <p:spPr>
-          <a:xfrm>
-            <a:off x="3108960" y="2427732"/>
-            <a:ext cx="1371600" cy="406908"/>
-          </a:xfrm>
-          <a:prstGeom prst="rect">
-            <a:avLst/>
-          </a:prstGeom>
-          <a:noFill/>
-          <a:ln/>
-        </p:spPr>
-        <p:txBody>
-          <a:bodyPr wrap="square" lIns="0" tIns="0" rIns="0" bIns="0" rtlCol="0" anchor="ctr"/>
+          <p:cNvPr id="17" name="Text 15"/>
+          <p:cNvSpPr/>
+          <p:nvPr/>
+        </p:nvSpPr>
+        <p:spPr>
+          <a:xfrm>
+            <a:off x="3108960" y="2581221"/>
+            <a:ext cx="1371600" cy="292608"/>
+          </a:xfrm>
+          <a:prstGeom prst="rect">
+            <a:avLst/>
+          </a:prstGeom>
+          <a:noFill/>
+          <a:ln/>
+        </p:spPr>
+        <p:txBody>
+          <a:bodyPr wrap="square" lIns="0" tIns="0" rIns="0" bIns="0" rtlCol="0" anchor="t"/>
           <a:lstStyle/>
           <a:p>
             <a:pPr indent="0" marL="0">
@@ -8885,7 +8916,7 @@
                 <a:ea typeface="맑은 고딕" pitchFamily="34" charset="-122"/>
                 <a:cs typeface="맑은 고딕" pitchFamily="34" charset="-120"/>
               </a:rPr>
-              <a:t>AI 활용 도입</a:t>
+              <a:t>전문가활용비</a:t>
             </a:r>
             <a:endParaRPr lang="en-US" sz="950" dirty="0"/>
           </a:p>
@@ -8893,23 +8924,23 @@
       </p:sp>
       <p:sp>
         <p:nvSpPr>
-          <p:cNvPr id="16" name="Text 14"/>
-          <p:cNvSpPr/>
-          <p:nvPr/>
-        </p:nvSpPr>
-        <p:spPr>
-          <a:xfrm>
-            <a:off x="4526280" y="2427732"/>
-            <a:ext cx="2743200" cy="406908"/>
-          </a:xfrm>
-          <a:prstGeom prst="rect">
-            <a:avLst/>
-          </a:prstGeom>
-          <a:noFill/>
-          <a:ln/>
-        </p:spPr>
-        <p:txBody>
-          <a:bodyPr wrap="square" lIns="0" tIns="0" rIns="0" bIns="0" rtlCol="0" anchor="ctr"/>
+          <p:cNvPr id="18" name="Text 16"/>
+          <p:cNvSpPr/>
+          <p:nvPr/>
+        </p:nvSpPr>
+        <p:spPr>
+          <a:xfrm>
+            <a:off x="4526280" y="2581221"/>
+            <a:ext cx="2743200" cy="292608"/>
+          </a:xfrm>
+          <a:prstGeom prst="rect">
+            <a:avLst/>
+          </a:prstGeom>
+          <a:noFill/>
+          <a:ln/>
+        </p:spPr>
+        <p:txBody>
+          <a:bodyPr wrap="square" lIns="0" tIns="0" rIns="0" bIns="0" rtlCol="0" anchor="t"/>
           <a:lstStyle/>
           <a:p>
             <a:pPr indent="0" marL="0">
@@ -8918,13 +8949,13 @@
             <a:r>
               <a:rPr lang="en-US" sz="950" b="1" dirty="0">
                 <a:solidFill>
-                  <a:srgbClr val="1C2536"/>
-                </a:solidFill>
-                <a:latin typeface="맑은 고딕" pitchFamily="34" charset="0"/>
-                <a:ea typeface="맑은 고딕" pitchFamily="34" charset="-122"/>
-                <a:cs typeface="맑은 고딕" pitchFamily="34" charset="-120"/>
-              </a:rPr>
-              <a:t>공공 API · 기관 DB 연동 모듈</a:t>
+                  <a:srgbClr val="B0442C"/>
+                </a:solidFill>
+                <a:latin typeface="맑은 고딕" pitchFamily="34" charset="0"/>
+                <a:ea typeface="맑은 고딕" pitchFamily="34" charset="-122"/>
+                <a:cs typeface="맑은 고딕" pitchFamily="34" charset="-120"/>
+              </a:rPr>
+              <a:t>멘토 자문</a:t>
             </a:r>
             <a:endParaRPr lang="en-US" sz="950" dirty="0"/>
           </a:p>
@@ -8932,14 +8963,53 @@
       </p:sp>
       <p:sp>
         <p:nvSpPr>
-          <p:cNvPr id="17" name="Text 15"/>
-          <p:cNvSpPr/>
-          <p:nvPr/>
-        </p:nvSpPr>
-        <p:spPr>
-          <a:xfrm>
-            <a:off x="7315200" y="2427732"/>
-            <a:ext cx="4160520" cy="406908"/>
+          <p:cNvPr id="19" name="Text 17"/>
+          <p:cNvSpPr/>
+          <p:nvPr/>
+        </p:nvSpPr>
+        <p:spPr>
+          <a:xfrm>
+            <a:off x="4526280" y="2855541"/>
+            <a:ext cx="2743200" cy="237744"/>
+          </a:xfrm>
+          <a:prstGeom prst="rect">
+            <a:avLst/>
+          </a:prstGeom>
+          <a:noFill/>
+          <a:ln/>
+        </p:spPr>
+        <p:txBody>
+          <a:bodyPr wrap="square" lIns="0" tIns="0" rIns="0" bIns="0" rtlCol="0" anchor="t"/>
+          <a:lstStyle/>
+          <a:p>
+            <a:pPr indent="0" marL="0">
+              <a:buNone/>
+            </a:pPr>
+            <a:r>
+              <a:rPr lang="en-US" sz="1200" b="1" dirty="0">
+                <a:solidFill>
+                  <a:srgbClr val="0075C9"/>
+                </a:solidFill>
+                <a:latin typeface="맑은 고딕" pitchFamily="34" charset="0"/>
+                <a:ea typeface="맑은 고딕" pitchFamily="34" charset="-122"/>
+                <a:cs typeface="맑은 고딕" pitchFamily="34" charset="-120"/>
+              </a:rPr>
+              <a:t>200만원</a:t>
+            </a:r>
+            <a:endParaRPr lang="en-US" sz="1200" dirty="0"/>
+          </a:p>
+        </p:txBody>
+      </p:sp>
+      <p:sp>
+        <p:nvSpPr>
+          <p:cNvPr id="20" name="Text 18"/>
+          <p:cNvSpPr/>
+          <p:nvPr/>
+        </p:nvSpPr>
+        <p:spPr>
+          <a:xfrm>
+            <a:off x="7315200" y="2562933"/>
+            <a:ext cx="4160520" cy="542109"/>
           </a:xfrm>
           <a:prstGeom prst="rect">
             <a:avLst/>
@@ -8966,7 +9036,24 @@
                 <a:ea typeface="맑은 고딕" pitchFamily="34" charset="-122"/>
                 <a:cs typeface="맑은 고딕" pitchFamily="34" charset="-120"/>
               </a:rPr>
-              <a:t>AX의 핵심이 여기다. 지금은 작품마다 따로 붙이고 있어 현장이 늘면 그만큼 손이 든다.</a:t>
+              <a:t>개발 외주와 비목이 다르다. 멘토는 전문가활용비, 개발은 일반용역비로 나눠 잡아야 정산에서 막히지 않는다.  </a:t>
+            </a:r>
+            <a:pPr indent="0" marL="0">
+              <a:lnSpc>
+                <a:spcPts val="1100"/>
+              </a:lnSpc>
+              <a:buNone/>
+            </a:pPr>
+            <a:r>
+              <a:rPr lang="en-US" sz="850" b="1" dirty="0">
+                <a:solidFill>
+                  <a:srgbClr val="B0442C"/>
+                </a:solidFill>
+                <a:latin typeface="맑은 고딕" pitchFamily="34" charset="0"/>
+                <a:ea typeface="맑은 고딕" pitchFamily="34" charset="-122"/>
+                <a:cs typeface="맑은 고딕" pitchFamily="34" charset="-120"/>
+              </a:rPr>
+              <a:t>멘토기업에게 제품·솔루션·서비스를 제공받는 경우 금액과 무관하게 주관기관 공문 승인이 먼저다. 1회 125,000원을 넘는 멘토비는 기타소득세 8.8% 공제 후 집행한다.</a:t>
             </a:r>
             <a:endParaRPr lang="en-US" sz="850" dirty="0"/>
           </a:p>
@@ -8974,13 +9061,13 @@
       </p:sp>
       <p:sp>
         <p:nvSpPr>
-          <p:cNvPr id="18" name="Shape 16"/>
-          <p:cNvSpPr/>
-          <p:nvPr/>
-        </p:nvSpPr>
-        <p:spPr>
-          <a:xfrm>
-            <a:off x="685800" y="2871216"/>
+          <p:cNvPr id="21" name="Shape 19"/>
+          <p:cNvSpPr/>
+          <p:nvPr/>
+        </p:nvSpPr>
+        <p:spPr>
+          <a:xfrm>
+            <a:off x="685800" y="3141617"/>
             <a:ext cx="10789920" cy="0"/>
           </a:xfrm>
           <a:prstGeom prst="line">
@@ -8997,23 +9084,23 @@
       </p:sp>
       <p:sp>
         <p:nvSpPr>
-          <p:cNvPr id="19" name="Text 17"/>
-          <p:cNvSpPr/>
-          <p:nvPr/>
-        </p:nvSpPr>
-        <p:spPr>
-          <a:xfrm>
-            <a:off x="685800" y="2926080"/>
-            <a:ext cx="2377440" cy="406908"/>
-          </a:xfrm>
-          <a:prstGeom prst="rect">
-            <a:avLst/>
-          </a:prstGeom>
-          <a:noFill/>
-          <a:ln/>
-        </p:spPr>
-        <p:txBody>
-          <a:bodyPr wrap="square" lIns="0" tIns="0" rIns="0" bIns="0" rtlCol="0" anchor="ctr"/>
+          <p:cNvPr id="22" name="Text 20"/>
+          <p:cNvSpPr/>
+          <p:nvPr/>
+        </p:nvSpPr>
+        <p:spPr>
+          <a:xfrm>
+            <a:off x="685800" y="3214769"/>
+            <a:ext cx="2377440" cy="292608"/>
+          </a:xfrm>
+          <a:prstGeom prst="rect">
+            <a:avLst/>
+          </a:prstGeom>
+          <a:noFill/>
+          <a:ln/>
+        </p:spPr>
+        <p:txBody>
+          <a:bodyPr wrap="square" lIns="0" tIns="0" rIns="0" bIns="0" rtlCol="0" anchor="t"/>
           <a:lstStyle/>
           <a:p>
             <a:pPr indent="0" marL="0">
@@ -9028,7 +9115,7 @@
                 <a:ea typeface="맑은 고딕" pitchFamily="34" charset="-122"/>
                 <a:cs typeface="맑은 고딕" pitchFamily="34" charset="-120"/>
               </a:rPr>
-              <a:t>운영비(210)-일반용역비(14)</a:t>
+              <a:t>운영비(210)-일반수용비(01)</a:t>
             </a:r>
             <a:endParaRPr lang="en-US" sz="850" dirty="0"/>
           </a:p>
@@ -9036,23 +9123,23 @@
       </p:sp>
       <p:sp>
         <p:nvSpPr>
-          <p:cNvPr id="20" name="Text 18"/>
-          <p:cNvSpPr/>
-          <p:nvPr/>
-        </p:nvSpPr>
-        <p:spPr>
-          <a:xfrm>
-            <a:off x="3108960" y="2926080"/>
-            <a:ext cx="1371600" cy="406908"/>
-          </a:xfrm>
-          <a:prstGeom prst="rect">
-            <a:avLst/>
-          </a:prstGeom>
-          <a:noFill/>
-          <a:ln/>
-        </p:spPr>
-        <p:txBody>
-          <a:bodyPr wrap="square" lIns="0" tIns="0" rIns="0" bIns="0" rtlCol="0" anchor="ctr"/>
+          <p:cNvPr id="23" name="Text 21"/>
+          <p:cNvSpPr/>
+          <p:nvPr/>
+        </p:nvSpPr>
+        <p:spPr>
+          <a:xfrm>
+            <a:off x="3108960" y="3214769"/>
+            <a:ext cx="1371600" cy="292608"/>
+          </a:xfrm>
+          <a:prstGeom prst="rect">
+            <a:avLst/>
+          </a:prstGeom>
+          <a:noFill/>
+          <a:ln/>
+        </p:spPr>
+        <p:txBody>
+          <a:bodyPr wrap="square" lIns="0" tIns="0" rIns="0" bIns="0" rtlCol="0" anchor="t"/>
           <a:lstStyle/>
           <a:p>
             <a:pPr indent="0" marL="0">
@@ -9067,7 +9154,7 @@
                 <a:ea typeface="맑은 고딕" pitchFamily="34" charset="-122"/>
                 <a:cs typeface="맑은 고딕" pitchFamily="34" charset="-120"/>
               </a:rPr>
-              <a:t>홍보비</a:t>
+              <a:t>공고료및광고료</a:t>
             </a:r>
             <a:endParaRPr lang="en-US" sz="950" dirty="0"/>
           </a:p>
@@ -9075,23 +9162,23 @@
       </p:sp>
       <p:sp>
         <p:nvSpPr>
-          <p:cNvPr id="21" name="Text 19"/>
-          <p:cNvSpPr/>
-          <p:nvPr/>
-        </p:nvSpPr>
-        <p:spPr>
-          <a:xfrm>
-            <a:off x="4526280" y="2926080"/>
-            <a:ext cx="2743200" cy="406908"/>
-          </a:xfrm>
-          <a:prstGeom prst="rect">
-            <a:avLst/>
-          </a:prstGeom>
-          <a:noFill/>
-          <a:ln/>
-        </p:spPr>
-        <p:txBody>
-          <a:bodyPr wrap="square" lIns="0" tIns="0" rIns="0" bIns="0" rtlCol="0" anchor="ctr"/>
+          <p:cNvPr id="24" name="Text 22"/>
+          <p:cNvSpPr/>
+          <p:nvPr/>
+        </p:nvSpPr>
+        <p:spPr>
+          <a:xfrm>
+            <a:off x="4526280" y="3214769"/>
+            <a:ext cx="2743200" cy="292608"/>
+          </a:xfrm>
+          <a:prstGeom prst="rect">
+            <a:avLst/>
+          </a:prstGeom>
+          <a:noFill/>
+          <a:ln/>
+        </p:spPr>
+        <p:txBody>
+          <a:bodyPr wrap="square" lIns="0" tIns="0" rIns="0" bIns="0" rtlCol="0" anchor="t"/>
           <a:lstStyle/>
           <a:p>
             <a:pPr indent="0" marL="0">
@@ -9106,7 +9193,7 @@
                 <a:ea typeface="맑은 고딕" pitchFamily="34" charset="-122"/>
                 <a:cs typeface="맑은 고딕" pitchFamily="34" charset="-120"/>
               </a:rPr>
-              <a:t>다국어 홍보 시퀀스 확장 · 현지 감수</a:t>
+              <a:t>광고 집행</a:t>
             </a:r>
             <a:endParaRPr lang="en-US" sz="950" dirty="0"/>
           </a:p>
@@ -9114,14 +9201,53 @@
       </p:sp>
       <p:sp>
         <p:nvSpPr>
-          <p:cNvPr id="22" name="Text 20"/>
-          <p:cNvSpPr/>
-          <p:nvPr/>
-        </p:nvSpPr>
-        <p:spPr>
-          <a:xfrm>
-            <a:off x="7315200" y="2926080"/>
-            <a:ext cx="4160520" cy="406908"/>
+          <p:cNvPr id="25" name="Text 23"/>
+          <p:cNvSpPr/>
+          <p:nvPr/>
+        </p:nvSpPr>
+        <p:spPr>
+          <a:xfrm>
+            <a:off x="4526280" y="3489089"/>
+            <a:ext cx="2743200" cy="237744"/>
+          </a:xfrm>
+          <a:prstGeom prst="rect">
+            <a:avLst/>
+          </a:prstGeom>
+          <a:noFill/>
+          <a:ln/>
+        </p:spPr>
+        <p:txBody>
+          <a:bodyPr wrap="square" lIns="0" tIns="0" rIns="0" bIns="0" rtlCol="0" anchor="t"/>
+          <a:lstStyle/>
+          <a:p>
+            <a:pPr indent="0" marL="0">
+              <a:buNone/>
+            </a:pPr>
+            <a:r>
+              <a:rPr lang="en-US" sz="1200" b="1" dirty="0">
+                <a:solidFill>
+                  <a:srgbClr val="0075C9"/>
+                </a:solidFill>
+                <a:latin typeface="맑은 고딕" pitchFamily="34" charset="0"/>
+                <a:ea typeface="맑은 고딕" pitchFamily="34" charset="-122"/>
+                <a:cs typeface="맑은 고딕" pitchFamily="34" charset="-120"/>
+              </a:rPr>
+              <a:t>500만원</a:t>
+            </a:r>
+            <a:endParaRPr lang="en-US" sz="1200" dirty="0"/>
+          </a:p>
+        </p:txBody>
+      </p:sp>
+      <p:sp>
+        <p:nvSpPr>
+          <p:cNvPr id="26" name="Text 24"/>
+          <p:cNvSpPr/>
+          <p:nvPr/>
+        </p:nvSpPr>
+        <p:spPr>
+          <a:xfrm>
+            <a:off x="7315200" y="3196481"/>
+            <a:ext cx="4160520" cy="542109"/>
           </a:xfrm>
           <a:prstGeom prst="rect">
             <a:avLst/>
@@ -9148,7 +9274,7 @@
                 <a:ea typeface="맑은 고딕" pitchFamily="34" charset="-122"/>
                 <a:cs typeface="맑은 고딕" pitchFamily="34" charset="-120"/>
               </a:rPr>
-              <a:t>번역 초벌은 만들어 두었다. 공공기관 대상 문구라 어투 감수가 필요하다.</a:t>
+              <a:t>우리가 직접 집행하면 광고료(일반수용비), 대행사에 맡기면 일반용역비다. 계약 전에 어느 쪽인지 정해 둔다.</a:t>
             </a:r>
             <a:endParaRPr lang="en-US" sz="850" dirty="0"/>
           </a:p>
@@ -9156,13 +9282,13 @@
       </p:sp>
       <p:sp>
         <p:nvSpPr>
-          <p:cNvPr id="23" name="Shape 21"/>
-          <p:cNvSpPr/>
-          <p:nvPr/>
-        </p:nvSpPr>
-        <p:spPr>
-          <a:xfrm>
-            <a:off x="685800" y="3369564"/>
+          <p:cNvPr id="27" name="Shape 25"/>
+          <p:cNvSpPr/>
+          <p:nvPr/>
+        </p:nvSpPr>
+        <p:spPr>
+          <a:xfrm>
+            <a:off x="685800" y="3775166"/>
             <a:ext cx="10789920" cy="0"/>
           </a:xfrm>
           <a:prstGeom prst="line">
@@ -9179,23 +9305,23 @@
       </p:sp>
       <p:sp>
         <p:nvSpPr>
-          <p:cNvPr id="24" name="Text 22"/>
-          <p:cNvSpPr/>
-          <p:nvPr/>
-        </p:nvSpPr>
-        <p:spPr>
-          <a:xfrm>
-            <a:off x="685800" y="3424428"/>
-            <a:ext cx="2377440" cy="406908"/>
-          </a:xfrm>
-          <a:prstGeom prst="rect">
-            <a:avLst/>
-          </a:prstGeom>
-          <a:noFill/>
-          <a:ln/>
-        </p:spPr>
-        <p:txBody>
-          <a:bodyPr wrap="square" lIns="0" tIns="0" rIns="0" bIns="0" rtlCol="0" anchor="ctr"/>
+          <p:cNvPr id="28" name="Text 26"/>
+          <p:cNvSpPr/>
+          <p:nvPr/>
+        </p:nvSpPr>
+        <p:spPr>
+          <a:xfrm>
+            <a:off x="685800" y="3848318"/>
+            <a:ext cx="2377440" cy="292608"/>
+          </a:xfrm>
+          <a:prstGeom prst="rect">
+            <a:avLst/>
+          </a:prstGeom>
+          <a:noFill/>
+          <a:ln/>
+        </p:spPr>
+        <p:txBody>
+          <a:bodyPr wrap="square" lIns="0" tIns="0" rIns="0" bIns="0" rtlCol="0" anchor="t"/>
           <a:lstStyle/>
           <a:p>
             <a:pPr indent="0" marL="0">
@@ -9210,7 +9336,7 @@
                 <a:ea typeface="맑은 고딕" pitchFamily="34" charset="-122"/>
                 <a:cs typeface="맑은 고딕" pitchFamily="34" charset="-120"/>
               </a:rPr>
-              <a:t>운영비(210)-일반수용비(01)</a:t>
+              <a:t>운영비(210)-임차료(07)</a:t>
             </a:r>
             <a:endParaRPr lang="en-US" sz="850" dirty="0"/>
           </a:p>
@@ -9218,23 +9344,23 @@
       </p:sp>
       <p:sp>
         <p:nvSpPr>
-          <p:cNvPr id="25" name="Text 23"/>
-          <p:cNvSpPr/>
-          <p:nvPr/>
-        </p:nvSpPr>
-        <p:spPr>
-          <a:xfrm>
-            <a:off x="3108960" y="3424428"/>
-            <a:ext cx="1371600" cy="406908"/>
-          </a:xfrm>
-          <a:prstGeom prst="rect">
-            <a:avLst/>
-          </a:prstGeom>
-          <a:noFill/>
-          <a:ln/>
-        </p:spPr>
-        <p:txBody>
-          <a:bodyPr wrap="square" lIns="0" tIns="0" rIns="0" bIns="0" rtlCol="0" anchor="ctr"/>
+          <p:cNvPr id="29" name="Text 27"/>
+          <p:cNvSpPr/>
+          <p:nvPr/>
+        </p:nvSpPr>
+        <p:spPr>
+          <a:xfrm>
+            <a:off x="3108960" y="3848318"/>
+            <a:ext cx="1371600" cy="292608"/>
+          </a:xfrm>
+          <a:prstGeom prst="rect">
+            <a:avLst/>
+          </a:prstGeom>
+          <a:noFill/>
+          <a:ln/>
+        </p:spPr>
+        <p:txBody>
+          <a:bodyPr wrap="square" lIns="0" tIns="0" rIns="0" bIns="0" rtlCol="0" anchor="t"/>
           <a:lstStyle/>
           <a:p>
             <a:pPr indent="0" marL="0">
@@ -9249,7 +9375,7 @@
                 <a:ea typeface="맑은 고딕" pitchFamily="34" charset="-122"/>
                 <a:cs typeface="맑은 고딕" pitchFamily="34" charset="-120"/>
               </a:rPr>
-              <a:t>수수료및사용료</a:t>
+              <a:t>임차비</a:t>
             </a:r>
             <a:endParaRPr lang="en-US" sz="950" dirty="0"/>
           </a:p>
@@ -9257,23 +9383,23 @@
       </p:sp>
       <p:sp>
         <p:nvSpPr>
-          <p:cNvPr id="26" name="Text 24"/>
-          <p:cNvSpPr/>
-          <p:nvPr/>
-        </p:nvSpPr>
-        <p:spPr>
-          <a:xfrm>
-            <a:off x="4526280" y="3424428"/>
-            <a:ext cx="2743200" cy="406908"/>
-          </a:xfrm>
-          <a:prstGeom prst="rect">
-            <a:avLst/>
-          </a:prstGeom>
-          <a:noFill/>
-          <a:ln/>
-        </p:spPr>
-        <p:txBody>
-          <a:bodyPr wrap="square" lIns="0" tIns="0" rIns="0" bIns="0" rtlCol="0" anchor="ctr"/>
+          <p:cNvPr id="30" name="Text 28"/>
+          <p:cNvSpPr/>
+          <p:nvPr/>
+        </p:nvSpPr>
+        <p:spPr>
+          <a:xfrm>
+            <a:off x="4526280" y="3848318"/>
+            <a:ext cx="2743200" cy="292608"/>
+          </a:xfrm>
+          <a:prstGeom prst="rect">
+            <a:avLst/>
+          </a:prstGeom>
+          <a:noFill/>
+          <a:ln/>
+        </p:spPr>
+        <p:txBody>
+          <a:bodyPr wrap="square" lIns="0" tIns="0" rIns="0" bIns="0" rtlCol="0" anchor="t"/>
           <a:lstStyle/>
           <a:p>
             <a:pPr indent="0" marL="0">
@@ -9288,7 +9414,7 @@
                 <a:ea typeface="맑은 고딕" pitchFamily="34" charset="-122"/>
                 <a:cs typeface="맑은 고딕" pitchFamily="34" charset="-120"/>
               </a:rPr>
-              <a:t>AI 솔루션 이용료 · 라이선스 · 구독료</a:t>
+              <a:t>로컬 AI 렌더 장비 렌탈</a:t>
             </a:r>
             <a:endParaRPr lang="en-US" sz="950" dirty="0"/>
           </a:p>
@@ -9296,14 +9422,53 @@
       </p:sp>
       <p:sp>
         <p:nvSpPr>
-          <p:cNvPr id="27" name="Text 25"/>
-          <p:cNvSpPr/>
-          <p:nvPr/>
-        </p:nvSpPr>
-        <p:spPr>
-          <a:xfrm>
-            <a:off x="7315200" y="3424428"/>
-            <a:ext cx="4160520" cy="406908"/>
+          <p:cNvPr id="31" name="Text 29"/>
+          <p:cNvSpPr/>
+          <p:nvPr/>
+        </p:nvSpPr>
+        <p:spPr>
+          <a:xfrm>
+            <a:off x="4526280" y="4122638"/>
+            <a:ext cx="2743200" cy="237744"/>
+          </a:xfrm>
+          <a:prstGeom prst="rect">
+            <a:avLst/>
+          </a:prstGeom>
+          <a:noFill/>
+          <a:ln/>
+        </p:spPr>
+        <p:txBody>
+          <a:bodyPr wrap="square" lIns="0" tIns="0" rIns="0" bIns="0" rtlCol="0" anchor="t"/>
+          <a:lstStyle/>
+          <a:p>
+            <a:pPr indent="0" marL="0">
+              <a:buNone/>
+            </a:pPr>
+            <a:r>
+              <a:rPr lang="en-US" sz="1200" b="1" dirty="0">
+                <a:solidFill>
+                  <a:srgbClr val="0075C9"/>
+                </a:solidFill>
+                <a:latin typeface="맑은 고딕" pitchFamily="34" charset="0"/>
+                <a:ea typeface="맑은 고딕" pitchFamily="34" charset="-122"/>
+                <a:cs typeface="맑은 고딕" pitchFamily="34" charset="-120"/>
+              </a:rPr>
+              <a:t>1,200만원</a:t>
+            </a:r>
+            <a:endParaRPr lang="en-US" sz="1200" dirty="0"/>
+          </a:p>
+        </p:txBody>
+      </p:sp>
+      <p:sp>
+        <p:nvSpPr>
+          <p:cNvPr id="32" name="Text 30"/>
+          <p:cNvSpPr/>
+          <p:nvPr/>
+        </p:nvSpPr>
+        <p:spPr>
+          <a:xfrm>
+            <a:off x="7315200" y="3830030"/>
+            <a:ext cx="4160520" cy="542109"/>
           </a:xfrm>
           <a:prstGeom prst="rect">
             <a:avLst/>
@@ -9330,7 +9495,24 @@
                 <a:ea typeface="맑은 고딕" pitchFamily="34" charset="-122"/>
                 <a:cs typeface="맑은 고딕" pitchFamily="34" charset="-120"/>
               </a:rPr>
-              <a:t>협약기간 이내분만 집행 가능하므로 연 단위 결제 대신 월 결제로 끊는다.</a:t>
+              <a:t>4K 렌더와 로컬 추론을 우리 안에서 돌리기 위한 장비다. 정부지원금의 37.5%로 50% 선(1,600만원) 아래라 공문 승인 대상은 아니다.  </a:t>
+            </a:r>
+            <a:pPr indent="0" marL="0">
+              <a:lnSpc>
+                <a:spcPts val="1100"/>
+              </a:lnSpc>
+              <a:buNone/>
+            </a:pPr>
+            <a:r>
+              <a:rPr lang="en-US" sz="850" b="1" dirty="0">
+                <a:solidFill>
+                  <a:srgbClr val="B0442C"/>
+                </a:solidFill>
+                <a:latin typeface="맑은 고딕" pitchFamily="34" charset="0"/>
+                <a:ea typeface="맑은 고딕" pitchFamily="34" charset="-122"/>
+                <a:cs typeface="맑은 고딕" pitchFamily="34" charset="-120"/>
+              </a:rPr>
+              <a:t>사서 렌탈로 처리하는 것은 불가. 임차료 증빙에 반납증명서가 들어가고 총 임차기간이 협약기간을 넘길 수 없다. 실제 렌탈업체와 임대차계약을 맺어야 한다.</a:t>
             </a:r>
             <a:endParaRPr lang="en-US" sz="850" dirty="0"/>
           </a:p>
@@ -9338,13 +9520,13 @@
       </p:sp>
       <p:sp>
         <p:nvSpPr>
-          <p:cNvPr id="28" name="Shape 26"/>
-          <p:cNvSpPr/>
-          <p:nvPr/>
-        </p:nvSpPr>
-        <p:spPr>
-          <a:xfrm>
-            <a:off x="685800" y="3867912"/>
+          <p:cNvPr id="33" name="Shape 31"/>
+          <p:cNvSpPr/>
+          <p:nvPr/>
+        </p:nvSpPr>
+        <p:spPr>
+          <a:xfrm>
+            <a:off x="685800" y="4408714"/>
             <a:ext cx="10789920" cy="0"/>
           </a:xfrm>
           <a:prstGeom prst="line">
@@ -9361,23 +9543,23 @@
       </p:sp>
       <p:sp>
         <p:nvSpPr>
-          <p:cNvPr id="29" name="Text 27"/>
-          <p:cNvSpPr/>
-          <p:nvPr/>
-        </p:nvSpPr>
-        <p:spPr>
-          <a:xfrm>
-            <a:off x="685800" y="3922776"/>
-            <a:ext cx="2377440" cy="406908"/>
-          </a:xfrm>
-          <a:prstGeom prst="rect">
-            <a:avLst/>
-          </a:prstGeom>
-          <a:noFill/>
-          <a:ln/>
-        </p:spPr>
-        <p:txBody>
-          <a:bodyPr wrap="square" lIns="0" tIns="0" rIns="0" bIns="0" rtlCol="0" anchor="ctr"/>
+          <p:cNvPr id="34" name="Text 32"/>
+          <p:cNvSpPr/>
+          <p:nvPr/>
+        </p:nvSpPr>
+        <p:spPr>
+          <a:xfrm>
+            <a:off x="685800" y="4481866"/>
+            <a:ext cx="2377440" cy="292608"/>
+          </a:xfrm>
+          <a:prstGeom prst="rect">
+            <a:avLst/>
+          </a:prstGeom>
+          <a:noFill/>
+          <a:ln/>
+        </p:spPr>
+        <p:txBody>
+          <a:bodyPr wrap="square" lIns="0" tIns="0" rIns="0" bIns="0" rtlCol="0" anchor="t"/>
           <a:lstStyle/>
           <a:p>
             <a:pPr indent="0" marL="0">
@@ -9400,23 +9582,23 @@
       </p:sp>
       <p:sp>
         <p:nvSpPr>
-          <p:cNvPr id="30" name="Text 28"/>
-          <p:cNvSpPr/>
-          <p:nvPr/>
-        </p:nvSpPr>
-        <p:spPr>
-          <a:xfrm>
-            <a:off x="3108960" y="3922776"/>
-            <a:ext cx="1371600" cy="406908"/>
-          </a:xfrm>
-          <a:prstGeom prst="rect">
-            <a:avLst/>
-          </a:prstGeom>
-          <a:noFill/>
-          <a:ln/>
-        </p:spPr>
-        <p:txBody>
-          <a:bodyPr wrap="square" lIns="0" tIns="0" rIns="0" bIns="0" rtlCol="0" anchor="ctr"/>
+          <p:cNvPr id="35" name="Text 33"/>
+          <p:cNvSpPr/>
+          <p:nvPr/>
+        </p:nvSpPr>
+        <p:spPr>
+          <a:xfrm>
+            <a:off x="3108960" y="4481866"/>
+            <a:ext cx="1371600" cy="292608"/>
+          </a:xfrm>
+          <a:prstGeom prst="rect">
+            <a:avLst/>
+          </a:prstGeom>
+          <a:noFill/>
+          <a:ln/>
+        </p:spPr>
+        <p:txBody>
+          <a:bodyPr wrap="square" lIns="0" tIns="0" rIns="0" bIns="0" rtlCol="0" anchor="t"/>
           <a:lstStyle/>
           <a:p>
             <a:pPr indent="0" marL="0">
@@ -9439,23 +9621,23 @@
       </p:sp>
       <p:sp>
         <p:nvSpPr>
-          <p:cNvPr id="31" name="Text 29"/>
-          <p:cNvSpPr/>
-          <p:nvPr/>
-        </p:nvSpPr>
-        <p:spPr>
-          <a:xfrm>
-            <a:off x="4526280" y="3922776"/>
-            <a:ext cx="2743200" cy="406908"/>
-          </a:xfrm>
-          <a:prstGeom prst="rect">
-            <a:avLst/>
-          </a:prstGeom>
-          <a:noFill/>
-          <a:ln/>
-        </p:spPr>
-        <p:txBody>
-          <a:bodyPr wrap="square" lIns="0" tIns="0" rIns="0" bIns="0" rtlCol="0" anchor="ctr"/>
+          <p:cNvPr id="36" name="Text 34"/>
+          <p:cNvSpPr/>
+          <p:nvPr/>
+        </p:nvSpPr>
+        <p:spPr>
+          <a:xfrm>
+            <a:off x="4526280" y="4481866"/>
+            <a:ext cx="2743200" cy="292608"/>
+          </a:xfrm>
+          <a:prstGeom prst="rect">
+            <a:avLst/>
+          </a:prstGeom>
+          <a:noFill/>
+          <a:ln/>
+        </p:spPr>
+        <p:txBody>
+          <a:bodyPr wrap="square" lIns="0" tIns="0" rIns="0" bIns="0" rtlCol="0" anchor="t"/>
           <a:lstStyle/>
           <a:p>
             <a:pPr indent="0" marL="0">
@@ -9464,13 +9646,13 @@
             <a:r>
               <a:rPr lang="en-US" sz="950" b="1" dirty="0">
                 <a:solidFill>
-                  <a:srgbClr val="1C2536"/>
-                </a:solidFill>
-                <a:latin typeface="맑은 고딕" pitchFamily="34" charset="0"/>
-                <a:ea typeface="맑은 고딕" pitchFamily="34" charset="-122"/>
-                <a:cs typeface="맑은 고딕" pitchFamily="34" charset="-120"/>
-              </a:rPr>
-              <a:t>산업재산권 출원등록</a:t>
+                  <a:srgbClr val="B0442C"/>
+                </a:solidFill>
+                <a:latin typeface="맑은 고딕" pitchFamily="34" charset="0"/>
+                <a:ea typeface="맑은 고딕" pitchFamily="34" charset="-122"/>
+                <a:cs typeface="맑은 고딕" pitchFamily="34" charset="-120"/>
+              </a:rPr>
+              <a:t>AI 구독비 · 라이선스</a:t>
             </a:r>
             <a:endParaRPr lang="en-US" sz="950" dirty="0"/>
           </a:p>
@@ -9478,14 +9660,53 @@
       </p:sp>
       <p:sp>
         <p:nvSpPr>
-          <p:cNvPr id="32" name="Text 30"/>
-          <p:cNvSpPr/>
-          <p:nvPr/>
-        </p:nvSpPr>
-        <p:spPr>
-          <a:xfrm>
-            <a:off x="7315200" y="3922776"/>
-            <a:ext cx="4160520" cy="406908"/>
+          <p:cNvPr id="37" name="Text 35"/>
+          <p:cNvSpPr/>
+          <p:nvPr/>
+        </p:nvSpPr>
+        <p:spPr>
+          <a:xfrm>
+            <a:off x="4526280" y="4756186"/>
+            <a:ext cx="2743200" cy="237744"/>
+          </a:xfrm>
+          <a:prstGeom prst="rect">
+            <a:avLst/>
+          </a:prstGeom>
+          <a:noFill/>
+          <a:ln/>
+        </p:spPr>
+        <p:txBody>
+          <a:bodyPr wrap="square" lIns="0" tIns="0" rIns="0" bIns="0" rtlCol="0" anchor="t"/>
+          <a:lstStyle/>
+          <a:p>
+            <a:pPr indent="0" marL="0">
+              <a:buNone/>
+            </a:pPr>
+            <a:r>
+              <a:rPr lang="en-US" sz="1200" b="1" dirty="0">
+                <a:solidFill>
+                  <a:srgbClr val="0075C9"/>
+                </a:solidFill>
+                <a:latin typeface="맑은 고딕" pitchFamily="34" charset="0"/>
+                <a:ea typeface="맑은 고딕" pitchFamily="34" charset="-122"/>
+                <a:cs typeface="맑은 고딕" pitchFamily="34" charset="-120"/>
+              </a:rPr>
+              <a:t>480만원</a:t>
+            </a:r>
+            <a:endParaRPr lang="en-US" sz="1200" dirty="0"/>
+          </a:p>
+        </p:txBody>
+      </p:sp>
+      <p:sp>
+        <p:nvSpPr>
+          <p:cNvPr id="38" name="Text 36"/>
+          <p:cNvSpPr/>
+          <p:nvPr/>
+        </p:nvSpPr>
+        <p:spPr>
+          <a:xfrm>
+            <a:off x="7315200" y="4463578"/>
+            <a:ext cx="4160520" cy="542109"/>
           </a:xfrm>
           <a:prstGeom prst="rect">
             <a:avLst/>
@@ -9512,7 +9733,24 @@
                 <a:ea typeface="맑은 고딕" pitchFamily="34" charset="-122"/>
                 <a:cs typeface="맑은 고딕" pitchFamily="34" charset="-120"/>
               </a:rPr>
-              <a:t>협약기간 안에 출원·취득이 가능한 건만 집행할 수 있다.</a:t>
+              <a:t>협약기간 이내분만 인정되므로 연 결제 대신 월 결제로 끊는다.  </a:t>
+            </a:r>
+            <a:pPr indent="0" marL="0">
+              <a:lnSpc>
+                <a:spcPts val="1100"/>
+              </a:lnSpc>
+              <a:buNone/>
+            </a:pPr>
+            <a:r>
+              <a:rPr lang="en-US" sz="850" b="1" dirty="0">
+                <a:solidFill>
+                  <a:srgbClr val="B0442C"/>
+                </a:solidFill>
+                <a:latin typeface="맑은 고딕" pitchFamily="34" charset="0"/>
+                <a:ea typeface="맑은 고딕" pitchFamily="34" charset="-122"/>
+                <a:cs typeface="맑은 고딕" pitchFamily="34" charset="-120"/>
+              </a:rPr>
+              <a:t>해외 결제 주의. 국외 업체와의 직접 거래는 집행 불가라 국내 총판·리셀러를 통해 전자세금계산서를 받아야 한다.</a:t>
             </a:r>
             <a:endParaRPr lang="en-US" sz="850" dirty="0"/>
           </a:p>
@@ -9520,13 +9758,13 @@
       </p:sp>
       <p:sp>
         <p:nvSpPr>
-          <p:cNvPr id="33" name="Shape 31"/>
-          <p:cNvSpPr/>
-          <p:nvPr/>
-        </p:nvSpPr>
-        <p:spPr>
-          <a:xfrm>
-            <a:off x="685800" y="4366260"/>
+          <p:cNvPr id="39" name="Shape 37"/>
+          <p:cNvSpPr/>
+          <p:nvPr/>
+        </p:nvSpPr>
+        <p:spPr>
+          <a:xfrm>
+            <a:off x="685800" y="5042263"/>
             <a:ext cx="10789920" cy="0"/>
           </a:xfrm>
           <a:prstGeom prst="line">
@@ -9543,23 +9781,23 @@
       </p:sp>
       <p:sp>
         <p:nvSpPr>
-          <p:cNvPr id="34" name="Text 32"/>
-          <p:cNvSpPr/>
-          <p:nvPr/>
-        </p:nvSpPr>
-        <p:spPr>
-          <a:xfrm>
-            <a:off x="685800" y="4421124"/>
-            <a:ext cx="2377440" cy="406908"/>
-          </a:xfrm>
-          <a:prstGeom prst="rect">
-            <a:avLst/>
-          </a:prstGeom>
-          <a:noFill/>
-          <a:ln/>
-        </p:spPr>
-        <p:txBody>
-          <a:bodyPr wrap="square" lIns="0" tIns="0" rIns="0" bIns="0" rtlCol="0" anchor="ctr"/>
+          <p:cNvPr id="40" name="Text 38"/>
+          <p:cNvSpPr/>
+          <p:nvPr/>
+        </p:nvSpPr>
+        <p:spPr>
+          <a:xfrm>
+            <a:off x="685800" y="5115415"/>
+            <a:ext cx="2377440" cy="292608"/>
+          </a:xfrm>
+          <a:prstGeom prst="rect">
+            <a:avLst/>
+          </a:prstGeom>
+          <a:noFill/>
+          <a:ln/>
+        </p:spPr>
+        <p:txBody>
+          <a:bodyPr wrap="square" lIns="0" tIns="0" rIns="0" bIns="0" rtlCol="0" anchor="t"/>
           <a:lstStyle/>
           <a:p>
             <a:pPr indent="0" marL="0">
@@ -9582,23 +9820,23 @@
       </p:sp>
       <p:sp>
         <p:nvSpPr>
-          <p:cNvPr id="35" name="Text 33"/>
-          <p:cNvSpPr/>
-          <p:nvPr/>
-        </p:nvSpPr>
-        <p:spPr>
-          <a:xfrm>
-            <a:off x="3108960" y="4421124"/>
-            <a:ext cx="1371600" cy="406908"/>
-          </a:xfrm>
-          <a:prstGeom prst="rect">
-            <a:avLst/>
-          </a:prstGeom>
-          <a:noFill/>
-          <a:ln/>
-        </p:spPr>
-        <p:txBody>
-          <a:bodyPr wrap="square" lIns="0" tIns="0" rIns="0" bIns="0" rtlCol="0" anchor="ctr"/>
+          <p:cNvPr id="41" name="Text 39"/>
+          <p:cNvSpPr/>
+          <p:nvPr/>
+        </p:nvSpPr>
+        <p:spPr>
+          <a:xfrm>
+            <a:off x="3108960" y="5115415"/>
+            <a:ext cx="1371600" cy="292608"/>
+          </a:xfrm>
+          <a:prstGeom prst="rect">
+            <a:avLst/>
+          </a:prstGeom>
+          <a:noFill/>
+          <a:ln/>
+        </p:spPr>
+        <p:txBody>
+          <a:bodyPr wrap="square" lIns="0" tIns="0" rIns="0" bIns="0" rtlCol="0" anchor="t"/>
           <a:lstStyle/>
           <a:p>
             <a:pPr indent="0" marL="0">
@@ -9613,7 +9851,7 @@
                 <a:ea typeface="맑은 고딕" pitchFamily="34" charset="-122"/>
                 <a:cs typeface="맑은 고딕" pitchFamily="34" charset="-120"/>
               </a:rPr>
-              <a:t>공고료및광고료</a:t>
+              <a:t>수수료및사용료</a:t>
             </a:r>
             <a:endParaRPr lang="en-US" sz="950" dirty="0"/>
           </a:p>
@@ -9621,23 +9859,23 @@
       </p:sp>
       <p:sp>
         <p:nvSpPr>
-          <p:cNvPr id="36" name="Text 34"/>
-          <p:cNvSpPr/>
-          <p:nvPr/>
-        </p:nvSpPr>
-        <p:spPr>
-          <a:xfrm>
-            <a:off x="4526280" y="4421124"/>
-            <a:ext cx="2743200" cy="406908"/>
-          </a:xfrm>
-          <a:prstGeom prst="rect">
-            <a:avLst/>
-          </a:prstGeom>
-          <a:noFill/>
-          <a:ln/>
-        </p:spPr>
-        <p:txBody>
-          <a:bodyPr wrap="square" lIns="0" tIns="0" rIns="0" bIns="0" rtlCol="0" anchor="ctr"/>
+          <p:cNvPr id="42" name="Text 40"/>
+          <p:cNvSpPr/>
+          <p:nvPr/>
+        </p:nvSpPr>
+        <p:spPr>
+          <a:xfrm>
+            <a:off x="4526280" y="5115415"/>
+            <a:ext cx="2743200" cy="292608"/>
+          </a:xfrm>
+          <a:prstGeom prst="rect">
+            <a:avLst/>
+          </a:prstGeom>
+          <a:noFill/>
+          <a:ln/>
+        </p:spPr>
+        <p:txBody>
+          <a:bodyPr wrap="square" lIns="0" tIns="0" rIns="0" bIns="0" rtlCol="0" anchor="t"/>
           <a:lstStyle/>
           <a:p>
             <a:pPr indent="0" marL="0">
@@ -9652,7 +9890,7 @@
                 <a:ea typeface="맑은 고딕" pitchFamily="34" charset="-122"/>
                 <a:cs typeface="맑은 고딕" pitchFamily="34" charset="-120"/>
               </a:rPr>
-              <a:t>온라인 광고 집행</a:t>
+              <a:t>산업재산권 출원등록</a:t>
             </a:r>
             <a:endParaRPr lang="en-US" sz="950" dirty="0"/>
           </a:p>
@@ -9660,14 +9898,53 @@
       </p:sp>
       <p:sp>
         <p:nvSpPr>
-          <p:cNvPr id="37" name="Text 35"/>
-          <p:cNvSpPr/>
-          <p:nvPr/>
-        </p:nvSpPr>
-        <p:spPr>
-          <a:xfrm>
-            <a:off x="7315200" y="4421124"/>
-            <a:ext cx="4160520" cy="406908"/>
+          <p:cNvPr id="43" name="Text 41"/>
+          <p:cNvSpPr/>
+          <p:nvPr/>
+        </p:nvSpPr>
+        <p:spPr>
+          <a:xfrm>
+            <a:off x="4526280" y="5389735"/>
+            <a:ext cx="2743200" cy="237744"/>
+          </a:xfrm>
+          <a:prstGeom prst="rect">
+            <a:avLst/>
+          </a:prstGeom>
+          <a:noFill/>
+          <a:ln/>
+        </p:spPr>
+        <p:txBody>
+          <a:bodyPr wrap="square" lIns="0" tIns="0" rIns="0" bIns="0" rtlCol="0" anchor="t"/>
+          <a:lstStyle/>
+          <a:p>
+            <a:pPr indent="0" marL="0">
+              <a:buNone/>
+            </a:pPr>
+            <a:r>
+              <a:rPr lang="en-US" sz="1200" b="1" dirty="0">
+                <a:solidFill>
+                  <a:srgbClr val="0075C9"/>
+                </a:solidFill>
+                <a:latin typeface="맑은 고딕" pitchFamily="34" charset="0"/>
+                <a:ea typeface="맑은 고딕" pitchFamily="34" charset="-122"/>
+                <a:cs typeface="맑은 고딕" pitchFamily="34" charset="-120"/>
+              </a:rPr>
+              <a:t>120만원</a:t>
+            </a:r>
+            <a:endParaRPr lang="en-US" sz="1200" dirty="0"/>
+          </a:p>
+        </p:txBody>
+      </p:sp>
+      <p:sp>
+        <p:nvSpPr>
+          <p:cNvPr id="44" name="Text 42"/>
+          <p:cNvSpPr/>
+          <p:nvPr/>
+        </p:nvSpPr>
+        <p:spPr>
+          <a:xfrm>
+            <a:off x="7315200" y="5097127"/>
+            <a:ext cx="4160520" cy="542109"/>
           </a:xfrm>
           <a:prstGeom prst="rect">
             <a:avLst/>
@@ -9694,7 +9971,7 @@
                 <a:ea typeface="맑은 고딕" pitchFamily="34" charset="-122"/>
                 <a:cs typeface="맑은 고딕" pitchFamily="34" charset="-120"/>
               </a:rPr>
-              <a:t>우리가 직접 집행하면 광고료, 대행사에 맡기면 일반용역비다. 비목이 갈리므로 미리 정해 둔다.</a:t>
+              <a:t>협약기간 안에 출원·취득이 가능한 건만 집행할 수 있다.</a:t>
             </a:r>
             <a:endParaRPr lang="en-US" sz="850" dirty="0"/>
           </a:p>
@@ -9702,13 +9979,13 @@
       </p:sp>
       <p:sp>
         <p:nvSpPr>
-          <p:cNvPr id="38" name="Shape 36"/>
-          <p:cNvSpPr/>
-          <p:nvPr/>
-        </p:nvSpPr>
-        <p:spPr>
-          <a:xfrm>
-            <a:off x="685800" y="4864608"/>
+          <p:cNvPr id="45" name="Shape 43"/>
+          <p:cNvSpPr/>
+          <p:nvPr/>
+        </p:nvSpPr>
+        <p:spPr>
+          <a:xfrm>
+            <a:off x="685800" y="5675811"/>
             <a:ext cx="10789920" cy="0"/>
           </a:xfrm>
           <a:prstGeom prst="line">
@@ -9725,23 +10002,23 @@
       </p:sp>
       <p:sp>
         <p:nvSpPr>
-          <p:cNvPr id="39" name="Text 37"/>
-          <p:cNvSpPr/>
-          <p:nvPr/>
-        </p:nvSpPr>
-        <p:spPr>
-          <a:xfrm>
-            <a:off x="685800" y="4919472"/>
-            <a:ext cx="2377440" cy="406908"/>
-          </a:xfrm>
-          <a:prstGeom prst="rect">
-            <a:avLst/>
-          </a:prstGeom>
-          <a:noFill/>
-          <a:ln/>
-        </p:spPr>
-        <p:txBody>
-          <a:bodyPr wrap="square" lIns="0" tIns="0" rIns="0" bIns="0" rtlCol="0" anchor="ctr"/>
+          <p:cNvPr id="46" name="Text 44"/>
+          <p:cNvSpPr/>
+          <p:nvPr/>
+        </p:nvSpPr>
+        <p:spPr>
+          <a:xfrm>
+            <a:off x="685800" y="5748963"/>
+            <a:ext cx="2377440" cy="292608"/>
+          </a:xfrm>
+          <a:prstGeom prst="rect">
+            <a:avLst/>
+          </a:prstGeom>
+          <a:noFill/>
+          <a:ln/>
+        </p:spPr>
+        <p:txBody>
+          <a:bodyPr wrap="square" lIns="0" tIns="0" rIns="0" bIns="0" rtlCol="0" anchor="t"/>
           <a:lstStyle/>
           <a:p>
             <a:pPr indent="0" marL="0">
@@ -9756,7 +10033,7 @@
                 <a:ea typeface="맑은 고딕" pitchFamily="34" charset="-122"/>
                 <a:cs typeface="맑은 고딕" pitchFamily="34" charset="-120"/>
               </a:rPr>
-              <a:t>운영비(210)-일반수용비(01)</a:t>
+              <a:t>운영비(210)-재료비(11)</a:t>
             </a:r>
             <a:endParaRPr lang="en-US" sz="850" dirty="0"/>
           </a:p>
@@ -9764,23 +10041,23 @@
       </p:sp>
       <p:sp>
         <p:nvSpPr>
-          <p:cNvPr id="40" name="Text 38"/>
-          <p:cNvSpPr/>
-          <p:nvPr/>
-        </p:nvSpPr>
-        <p:spPr>
-          <a:xfrm>
-            <a:off x="3108960" y="4919472"/>
-            <a:ext cx="1371600" cy="406908"/>
-          </a:xfrm>
-          <a:prstGeom prst="rect">
-            <a:avLst/>
-          </a:prstGeom>
-          <a:noFill/>
-          <a:ln/>
-        </p:spPr>
-        <p:txBody>
-          <a:bodyPr wrap="square" lIns="0" tIns="0" rIns="0" bIns="0" rtlCol="0" anchor="ctr"/>
+          <p:cNvPr id="47" name="Text 45"/>
+          <p:cNvSpPr/>
+          <p:nvPr/>
+        </p:nvSpPr>
+        <p:spPr>
+          <a:xfrm>
+            <a:off x="3108960" y="5748963"/>
+            <a:ext cx="1371600" cy="292608"/>
+          </a:xfrm>
+          <a:prstGeom prst="rect">
+            <a:avLst/>
+          </a:prstGeom>
+          <a:noFill/>
+          <a:ln/>
+        </p:spPr>
+        <p:txBody>
+          <a:bodyPr wrap="square" lIns="0" tIns="0" rIns="0" bIns="0" rtlCol="0" anchor="t"/>
           <a:lstStyle/>
           <a:p>
             <a:pPr indent="0" marL="0">
@@ -9795,7 +10072,7 @@
                 <a:ea typeface="맑은 고딕" pitchFamily="34" charset="-122"/>
                 <a:cs typeface="맑은 고딕" pitchFamily="34" charset="-120"/>
               </a:rPr>
-              <a:t>전문가활용비</a:t>
+              <a:t>재료구입비</a:t>
             </a:r>
             <a:endParaRPr lang="en-US" sz="950" dirty="0"/>
           </a:p>
@@ -9803,23 +10080,23 @@
       </p:sp>
       <p:sp>
         <p:nvSpPr>
-          <p:cNvPr id="41" name="Text 39"/>
-          <p:cNvSpPr/>
-          <p:nvPr/>
-        </p:nvSpPr>
-        <p:spPr>
-          <a:xfrm>
-            <a:off x="4526280" y="4919472"/>
-            <a:ext cx="2743200" cy="406908"/>
-          </a:xfrm>
-          <a:prstGeom prst="rect">
-            <a:avLst/>
-          </a:prstGeom>
-          <a:noFill/>
-          <a:ln/>
-        </p:spPr>
-        <p:txBody>
-          <a:bodyPr wrap="square" lIns="0" tIns="0" rIns="0" bIns="0" rtlCol="0" anchor="ctr"/>
+          <p:cNvPr id="48" name="Text 46"/>
+          <p:cNvSpPr/>
+          <p:nvPr/>
+        </p:nvSpPr>
+        <p:spPr>
+          <a:xfrm>
+            <a:off x="4526280" y="5748963"/>
+            <a:ext cx="2743200" cy="292608"/>
+          </a:xfrm>
+          <a:prstGeom prst="rect">
+            <a:avLst/>
+          </a:prstGeom>
+          <a:noFill/>
+          <a:ln/>
+        </p:spPr>
+        <p:txBody>
+          <a:bodyPr wrap="square" lIns="0" tIns="0" rIns="0" bIns="0" rtlCol="0" anchor="t"/>
           <a:lstStyle/>
           <a:p>
             <a:pPr indent="0" marL="0">
@@ -9834,7 +10111,7 @@
                 <a:ea typeface="맑은 고딕" pitchFamily="34" charset="-122"/>
                 <a:cs typeface="맑은 고딕" pitchFamily="34" charset="-120"/>
               </a:rPr>
-              <a:t>외부 전문가 자문</a:t>
+              <a:t>실증 재료 · 데이터셋</a:t>
             </a:r>
             <a:endParaRPr lang="en-US" sz="950" dirty="0"/>
           </a:p>
@@ -9842,14 +10119,53 @@
       </p:sp>
       <p:sp>
         <p:nvSpPr>
-          <p:cNvPr id="42" name="Text 40"/>
-          <p:cNvSpPr/>
-          <p:nvPr/>
-        </p:nvSpPr>
-        <p:spPr>
-          <a:xfrm>
-            <a:off x="7315200" y="4919472"/>
-            <a:ext cx="4160520" cy="406908"/>
+          <p:cNvPr id="49" name="Text 47"/>
+          <p:cNvSpPr/>
+          <p:nvPr/>
+        </p:nvSpPr>
+        <p:spPr>
+          <a:xfrm>
+            <a:off x="4526280" y="6023283"/>
+            <a:ext cx="2743200" cy="237744"/>
+          </a:xfrm>
+          <a:prstGeom prst="rect">
+            <a:avLst/>
+          </a:prstGeom>
+          <a:noFill/>
+          <a:ln/>
+        </p:spPr>
+        <p:txBody>
+          <a:bodyPr wrap="square" lIns="0" tIns="0" rIns="0" bIns="0" rtlCol="0" anchor="t"/>
+          <a:lstStyle/>
+          <a:p>
+            <a:pPr indent="0" marL="0">
+              <a:buNone/>
+            </a:pPr>
+            <a:r>
+              <a:rPr lang="en-US" sz="1200" b="1" dirty="0">
+                <a:solidFill>
+                  <a:srgbClr val="0075C9"/>
+                </a:solidFill>
+                <a:latin typeface="맑은 고딕" pitchFamily="34" charset="0"/>
+                <a:ea typeface="맑은 고딕" pitchFamily="34" charset="-122"/>
+                <a:cs typeface="맑은 고딕" pitchFamily="34" charset="-120"/>
+              </a:rPr>
+              <a:t>100만원</a:t>
+            </a:r>
+            <a:endParaRPr lang="en-US" sz="1200" dirty="0"/>
+          </a:p>
+        </p:txBody>
+      </p:sp>
+      <p:sp>
+        <p:nvSpPr>
+          <p:cNvPr id="50" name="Text 48"/>
+          <p:cNvSpPr/>
+          <p:nvPr/>
+        </p:nvSpPr>
+        <p:spPr>
+          <a:xfrm>
+            <a:off x="7315200" y="5730675"/>
+            <a:ext cx="4160520" cy="542109"/>
           </a:xfrm>
           <a:prstGeom prst="rect">
             <a:avLst/>
@@ -9876,7 +10192,7 @@
                 <a:ea typeface="맑은 고딕" pitchFamily="34" charset="-122"/>
                 <a:cs typeface="맑은 고딕" pitchFamily="34" charset="-120"/>
               </a:rPr>
-              <a:t>시간당 10만원·1일 30만원 한도. 1인에게 사업비의 30% 이상이 가면 주관기관이 제한할 수 있다.</a:t>
+              <a:t>데이터 등 무형 재료도 재료비다. 품목당 구매합계 100만원 이상이면 비교견적서가 필요하다.</a:t>
             </a:r>
             <a:endParaRPr lang="en-US" sz="850" dirty="0"/>
           </a:p>
@@ -9884,13 +10200,13 @@
       </p:sp>
       <p:sp>
         <p:nvSpPr>
-          <p:cNvPr id="43" name="Shape 41"/>
-          <p:cNvSpPr/>
-          <p:nvPr/>
-        </p:nvSpPr>
-        <p:spPr>
-          <a:xfrm>
-            <a:off x="685800" y="5362956"/>
+          <p:cNvPr id="51" name="Shape 49"/>
+          <p:cNvSpPr/>
+          <p:nvPr/>
+        </p:nvSpPr>
+        <p:spPr>
+          <a:xfrm>
+            <a:off x="685800" y="6309360"/>
             <a:ext cx="10789920" cy="0"/>
           </a:xfrm>
           <a:prstGeom prst="line">
@@ -9907,371 +10223,7 @@
       </p:sp>
       <p:sp>
         <p:nvSpPr>
-          <p:cNvPr id="44" name="Text 42"/>
-          <p:cNvSpPr/>
-          <p:nvPr/>
-        </p:nvSpPr>
-        <p:spPr>
-          <a:xfrm>
-            <a:off x="685800" y="5417820"/>
-            <a:ext cx="2377440" cy="406908"/>
-          </a:xfrm>
-          <a:prstGeom prst="rect">
-            <a:avLst/>
-          </a:prstGeom>
-          <a:noFill/>
-          <a:ln/>
-        </p:spPr>
-        <p:txBody>
-          <a:bodyPr wrap="square" lIns="0" tIns="0" rIns="0" bIns="0" rtlCol="0" anchor="ctr"/>
-          <a:lstStyle/>
-          <a:p>
-            <a:pPr indent="0" marL="0">
-              <a:buNone/>
-            </a:pPr>
-            <a:r>
-              <a:rPr lang="en-US" sz="850" dirty="0">
-                <a:solidFill>
-                  <a:srgbClr val="4A5262"/>
-                </a:solidFill>
-                <a:latin typeface="맑은 고딕" pitchFamily="34" charset="0"/>
-                <a:ea typeface="맑은 고딕" pitchFamily="34" charset="-122"/>
-                <a:cs typeface="맑은 고딕" pitchFamily="34" charset="-120"/>
-              </a:rPr>
-              <a:t>운영비(210)-임차료(07)</a:t>
-            </a:r>
-            <a:endParaRPr lang="en-US" sz="850" dirty="0"/>
-          </a:p>
-        </p:txBody>
-      </p:sp>
-      <p:sp>
-        <p:nvSpPr>
-          <p:cNvPr id="45" name="Text 43"/>
-          <p:cNvSpPr/>
-          <p:nvPr/>
-        </p:nvSpPr>
-        <p:spPr>
-          <a:xfrm>
-            <a:off x="3108960" y="5417820"/>
-            <a:ext cx="1371600" cy="406908"/>
-          </a:xfrm>
-          <a:prstGeom prst="rect">
-            <a:avLst/>
-          </a:prstGeom>
-          <a:noFill/>
-          <a:ln/>
-        </p:spPr>
-        <p:txBody>
-          <a:bodyPr wrap="square" lIns="0" tIns="0" rIns="0" bIns="0" rtlCol="0" anchor="ctr"/>
-          <a:lstStyle/>
-          <a:p>
-            <a:pPr indent="0" marL="0">
-              <a:buNone/>
-            </a:pPr>
-            <a:r>
-              <a:rPr lang="en-US" sz="950" b="1" dirty="0">
-                <a:solidFill>
-                  <a:srgbClr val="101B33"/>
-                </a:solidFill>
-                <a:latin typeface="맑은 고딕" pitchFamily="34" charset="0"/>
-                <a:ea typeface="맑은 고딕" pitchFamily="34" charset="-122"/>
-                <a:cs typeface="맑은 고딕" pitchFamily="34" charset="-120"/>
-              </a:rPr>
-              <a:t>임차비</a:t>
-            </a:r>
-            <a:endParaRPr lang="en-US" sz="950" dirty="0"/>
-          </a:p>
-        </p:txBody>
-      </p:sp>
-      <p:sp>
-        <p:nvSpPr>
-          <p:cNvPr id="46" name="Text 44"/>
-          <p:cNvSpPr/>
-          <p:nvPr/>
-        </p:nvSpPr>
-        <p:spPr>
-          <a:xfrm>
-            <a:off x="4526280" y="5417820"/>
-            <a:ext cx="2743200" cy="406908"/>
-          </a:xfrm>
-          <a:prstGeom prst="rect">
-            <a:avLst/>
-          </a:prstGeom>
-          <a:noFill/>
-          <a:ln/>
-        </p:spPr>
-        <p:txBody>
-          <a:bodyPr wrap="square" lIns="0" tIns="0" rIns="0" bIns="0" rtlCol="0" anchor="ctr"/>
-          <a:lstStyle/>
-          <a:p>
-            <a:pPr indent="0" marL="0">
-              <a:buNone/>
-            </a:pPr>
-            <a:r>
-              <a:rPr lang="en-US" sz="950" b="1" dirty="0">
-                <a:solidFill>
-                  <a:srgbClr val="1C2536"/>
-                </a:solidFill>
-                <a:latin typeface="맑은 고딕" pitchFamily="34" charset="0"/>
-                <a:ea typeface="맑은 고딕" pitchFamily="34" charset="-122"/>
-                <a:cs typeface="맑은 고딕" pitchFamily="34" charset="-120"/>
-              </a:rPr>
-              <a:t>렌더 장비 · 실증용 패널 임차</a:t>
-            </a:r>
-            <a:endParaRPr lang="en-US" sz="950" dirty="0"/>
-          </a:p>
-        </p:txBody>
-      </p:sp>
-      <p:sp>
-        <p:nvSpPr>
-          <p:cNvPr id="47" name="Text 45"/>
-          <p:cNvSpPr/>
-          <p:nvPr/>
-        </p:nvSpPr>
-        <p:spPr>
-          <a:xfrm>
-            <a:off x="7315200" y="5417820"/>
-            <a:ext cx="4160520" cy="406908"/>
-          </a:xfrm>
-          <a:prstGeom prst="rect">
-            <a:avLst/>
-          </a:prstGeom>
-          <a:noFill/>
-          <a:ln/>
-        </p:spPr>
-        <p:txBody>
-          <a:bodyPr wrap="square" lIns="0" tIns="0" rIns="0" bIns="0" rtlCol="0" anchor="ctr"/>
-          <a:lstStyle/>
-          <a:p>
-            <a:pPr indent="0" marL="0">
-              <a:lnSpc>
-                <a:spcPts val="1100"/>
-              </a:lnSpc>
-              <a:buNone/>
-            </a:pPr>
-            <a:r>
-              <a:rPr lang="en-US" sz="850" dirty="0">
-                <a:solidFill>
-                  <a:srgbClr val="4A5262"/>
-                </a:solidFill>
-                <a:latin typeface="맑은 고딕" pitchFamily="34" charset="0"/>
-                <a:ea typeface="맑은 고딕" pitchFamily="34" charset="-122"/>
-                <a:cs typeface="맑은 고딕" pitchFamily="34" charset="-120"/>
-              </a:rPr>
-              <a:t>기기·장비는 1개월 이상 사용하는 것만 임차료로 잡힌다. 총 임차기간은 협약기간을 넘길 수 없다.</a:t>
-            </a:r>
-            <a:endParaRPr lang="en-US" sz="850" dirty="0"/>
-          </a:p>
-        </p:txBody>
-      </p:sp>
-      <p:sp>
-        <p:nvSpPr>
-          <p:cNvPr id="48" name="Shape 46"/>
-          <p:cNvSpPr/>
-          <p:nvPr/>
-        </p:nvSpPr>
-        <p:spPr>
-          <a:xfrm>
-            <a:off x="685800" y="5861304"/>
-            <a:ext cx="10789920" cy="0"/>
-          </a:xfrm>
-          <a:prstGeom prst="line">
-            <a:avLst/>
-          </a:prstGeom>
-          <a:noFill/>
-          <a:ln w="12700">
-            <a:solidFill>
-              <a:srgbClr val="DFE3EA"/>
-            </a:solidFill>
-            <a:prstDash val="solid"/>
-          </a:ln>
-        </p:spPr>
-      </p:sp>
-      <p:sp>
-        <p:nvSpPr>
-          <p:cNvPr id="49" name="Text 47"/>
-          <p:cNvSpPr/>
-          <p:nvPr/>
-        </p:nvSpPr>
-        <p:spPr>
-          <a:xfrm>
-            <a:off x="685800" y="5916168"/>
-            <a:ext cx="2377440" cy="406908"/>
-          </a:xfrm>
-          <a:prstGeom prst="rect">
-            <a:avLst/>
-          </a:prstGeom>
-          <a:noFill/>
-          <a:ln/>
-        </p:spPr>
-        <p:txBody>
-          <a:bodyPr wrap="square" lIns="0" tIns="0" rIns="0" bIns="0" rtlCol="0" anchor="ctr"/>
-          <a:lstStyle/>
-          <a:p>
-            <a:pPr indent="0" marL="0">
-              <a:buNone/>
-            </a:pPr>
-            <a:r>
-              <a:rPr lang="en-US" sz="850" dirty="0">
-                <a:solidFill>
-                  <a:srgbClr val="4A5262"/>
-                </a:solidFill>
-                <a:latin typeface="맑은 고딕" pitchFamily="34" charset="0"/>
-                <a:ea typeface="맑은 고딕" pitchFamily="34" charset="-122"/>
-                <a:cs typeface="맑은 고딕" pitchFamily="34" charset="-120"/>
-              </a:rPr>
-              <a:t>운영비(210)-재료비(11)</a:t>
-            </a:r>
-            <a:endParaRPr lang="en-US" sz="850" dirty="0"/>
-          </a:p>
-        </p:txBody>
-      </p:sp>
-      <p:sp>
-        <p:nvSpPr>
-          <p:cNvPr id="50" name="Text 48"/>
-          <p:cNvSpPr/>
-          <p:nvPr/>
-        </p:nvSpPr>
-        <p:spPr>
-          <a:xfrm>
-            <a:off x="3108960" y="5916168"/>
-            <a:ext cx="1371600" cy="406908"/>
-          </a:xfrm>
-          <a:prstGeom prst="rect">
-            <a:avLst/>
-          </a:prstGeom>
-          <a:noFill/>
-          <a:ln/>
-        </p:spPr>
-        <p:txBody>
-          <a:bodyPr wrap="square" lIns="0" tIns="0" rIns="0" bIns="0" rtlCol="0" anchor="ctr"/>
-          <a:lstStyle/>
-          <a:p>
-            <a:pPr indent="0" marL="0">
-              <a:buNone/>
-            </a:pPr>
-            <a:r>
-              <a:rPr lang="en-US" sz="950" b="1" dirty="0">
-                <a:solidFill>
-                  <a:srgbClr val="101B33"/>
-                </a:solidFill>
-                <a:latin typeface="맑은 고딕" pitchFamily="34" charset="0"/>
-                <a:ea typeface="맑은 고딕" pitchFamily="34" charset="-122"/>
-                <a:cs typeface="맑은 고딕" pitchFamily="34" charset="-120"/>
-              </a:rPr>
-              <a:t>재료구입비</a:t>
-            </a:r>
-            <a:endParaRPr lang="en-US" sz="950" dirty="0"/>
-          </a:p>
-        </p:txBody>
-      </p:sp>
-      <p:sp>
-        <p:nvSpPr>
-          <p:cNvPr id="51" name="Text 49"/>
-          <p:cNvSpPr/>
-          <p:nvPr/>
-        </p:nvSpPr>
-        <p:spPr>
-          <a:xfrm>
-            <a:off x="4526280" y="5916168"/>
-            <a:ext cx="2743200" cy="406908"/>
-          </a:xfrm>
-          <a:prstGeom prst="rect">
-            <a:avLst/>
-          </a:prstGeom>
-          <a:noFill/>
-          <a:ln/>
-        </p:spPr>
-        <p:txBody>
-          <a:bodyPr wrap="square" lIns="0" tIns="0" rIns="0" bIns="0" rtlCol="0" anchor="ctr"/>
-          <a:lstStyle/>
-          <a:p>
-            <a:pPr indent="0" marL="0">
-              <a:buNone/>
-            </a:pPr>
-            <a:r>
-              <a:rPr lang="en-US" sz="950" b="1" dirty="0">
-                <a:solidFill>
-                  <a:srgbClr val="1C2536"/>
-                </a:solidFill>
-                <a:latin typeface="맑은 고딕" pitchFamily="34" charset="0"/>
-                <a:ea typeface="맑은 고딕" pitchFamily="34" charset="-122"/>
-                <a:cs typeface="맑은 고딕" pitchFamily="34" charset="-120"/>
-              </a:rPr>
-              <a:t>실증 재료 · 데이터셋</a:t>
-            </a:r>
-            <a:endParaRPr lang="en-US" sz="950" dirty="0"/>
-          </a:p>
-        </p:txBody>
-      </p:sp>
-      <p:sp>
-        <p:nvSpPr>
           <p:cNvPr id="52" name="Text 50"/>
-          <p:cNvSpPr/>
-          <p:nvPr/>
-        </p:nvSpPr>
-        <p:spPr>
-          <a:xfrm>
-            <a:off x="7315200" y="5916168"/>
-            <a:ext cx="4160520" cy="406908"/>
-          </a:xfrm>
-          <a:prstGeom prst="rect">
-            <a:avLst/>
-          </a:prstGeom>
-          <a:noFill/>
-          <a:ln/>
-        </p:spPr>
-        <p:txBody>
-          <a:bodyPr wrap="square" lIns="0" tIns="0" rIns="0" bIns="0" rtlCol="0" anchor="ctr"/>
-          <a:lstStyle/>
-          <a:p>
-            <a:pPr indent="0" marL="0">
-              <a:lnSpc>
-                <a:spcPts val="1100"/>
-              </a:lnSpc>
-              <a:buNone/>
-            </a:pPr>
-            <a:r>
-              <a:rPr lang="en-US" sz="850" dirty="0">
-                <a:solidFill>
-                  <a:srgbClr val="4A5262"/>
-                </a:solidFill>
-                <a:latin typeface="맑은 고딕" pitchFamily="34" charset="0"/>
-                <a:ea typeface="맑은 고딕" pitchFamily="34" charset="-122"/>
-                <a:cs typeface="맑은 고딕" pitchFamily="34" charset="-120"/>
-              </a:rPr>
-              <a:t>데이터 등 무형 재료도 재료비로 잡힌다. 품목당 구매합계 100만원 이상이면 비교견적서가 필요하다.</a:t>
-            </a:r>
-            <a:endParaRPr lang="en-US" sz="850" dirty="0"/>
-          </a:p>
-        </p:txBody>
-      </p:sp>
-      <p:sp>
-        <p:nvSpPr>
-          <p:cNvPr id="53" name="Shape 51"/>
-          <p:cNvSpPr/>
-          <p:nvPr/>
-        </p:nvSpPr>
-        <p:spPr>
-          <a:xfrm>
-            <a:off x="685800" y="6359652"/>
-            <a:ext cx="10789920" cy="0"/>
-          </a:xfrm>
-          <a:prstGeom prst="line">
-            <a:avLst/>
-          </a:prstGeom>
-          <a:noFill/>
-          <a:ln w="12700">
-            <a:solidFill>
-              <a:srgbClr val="DFE3EA"/>
-            </a:solidFill>
-            <a:prstDash val="solid"/>
-          </a:ln>
-        </p:spPr>
-      </p:sp>
-      <p:sp>
-        <p:nvSpPr>
-          <p:cNvPr id="54" name="Text 52"/>
           <p:cNvSpPr/>
           <p:nvPr/>
         </p:nvSpPr>

--- a/docs/오늘은봄날_회사소개서.pptx
+++ b/docs/오늘은봄날_회사소개서.pptx
@@ -19,14 +19,9 @@
     <p:sldId id="267" r:id="rId13"/>
     <p:sldId id="268" r:id="rId14"/>
     <p:sldId id="269" r:id="rId15"/>
-    <p:sldId id="270" r:id="rId16"/>
-    <p:sldId id="271" r:id="rId17"/>
-    <p:sldId id="272" r:id="rId18"/>
-    <p:sldId id="273" r:id="rId19"/>
-    <p:sldId id="274" r:id="rId20"/>
   </p:sldIdLst>
   <p:notesMasterIdLst>
-    <p:notesMasterId r:id="rId21"/>
+    <p:notesMasterId r:id="rId16"/>
   </p:notesMasterIdLst>
   <p:sldSz cx="12192000" cy="6858000"/>
   <p:notesSz cx="6858000" cy="12192000"/>
@@ -1242,446 +1237,6 @@
             <a:fld id="{F7021451-1387-4CA6-816F-3879F97B5CBC}" type="slidenum">
               <a:rPr lang="en-US"/>
               <a:t>14</a:t>
-            </a:fld>
-            <a:endParaRPr lang="en-US"/>
-          </a:p>
-        </p:txBody>
-      </p:sp>
-    </p:spTree>
-    <p:extLst>
-      <p:ext uri="{BB962C8B-B14F-4D97-AF65-F5344CB8AC3E}">
-        <p14:creationId xmlns:p14="http://schemas.microsoft.com/office/powerpoint/2010/main" val="1024086991"/>
-      </p:ext>
-    </p:extLst>
-  </p:cSld>
-  <p:clrMapOvr>
-    <a:masterClrMapping/>
-  </p:clrMapOvr>
-</p:notes>
-</file>
-
-<file path=ppt/notesSlides/notesSlide15.xml><?xml version="1.0" encoding="utf-8"?>
-<p:notes xmlns:a="http://schemas.openxmlformats.org/drawingml/2006/main" xmlns:r="http://schemas.openxmlformats.org/officeDocument/2006/relationships" xmlns:p="http://schemas.openxmlformats.org/presentationml/2006/main">
-  <p:cSld>
-    <p:spTree>
-      <p:nvGrpSpPr>
-        <p:cNvPr id="1" name=""/>
-        <p:cNvGrpSpPr/>
-        <p:nvPr/>
-      </p:nvGrpSpPr>
-      <p:grpSpPr>
-        <a:xfrm>
-          <a:off x="0" y="0"/>
-          <a:ext cx="0" cy="0"/>
-          <a:chOff x="0" y="0"/>
-          <a:chExt cx="0" cy="0"/>
-        </a:xfrm>
-      </p:grpSpPr>
-      <p:sp>
-        <p:nvSpPr>
-          <p:cNvPr id="2" name="Slide Image Placeholder 1"/>
-          <p:cNvSpPr>
-            <a:spLocks noGrp="1" noRot="1" noChangeAspect="1"/>
-          </p:cNvSpPr>
-          <p:nvPr>
-            <p:ph type="sldImg"/>
-          </p:nvPr>
-        </p:nvSpPr>
-        <p:spPr/>
-      </p:sp>
-      <p:sp>
-        <p:nvSpPr>
-          <p:cNvPr id="3" name="Notes Placeholder 2"/>
-          <p:cNvSpPr>
-            <a:spLocks noGrp="1"/>
-          </p:cNvSpPr>
-          <p:nvPr>
-            <p:ph type="body" idx="1"/>
-          </p:nvPr>
-        </p:nvSpPr>
-        <p:spPr/>
-        <p:txBody>
-          <a:bodyPr/>
-          <a:lstStyle/>
-          <a:p>
-            <a:r>
-              <a:rPr lang="en-US" dirty="0"/>
-              <a:t/>
-            </a:r>
-            <a:endParaRPr lang="en-US" dirty="0"/>
-          </a:p>
-        </p:txBody>
-      </p:sp>
-      <p:sp>
-        <p:nvSpPr>
-          <p:cNvPr id="4" name="Slide Number Placeholder 3"/>
-          <p:cNvSpPr>
-            <a:spLocks noGrp="1"/>
-          </p:cNvSpPr>
-          <p:nvPr>
-            <p:ph type="sldNum" sz="quarter" idx="10"/>
-          </p:nvPr>
-        </p:nvSpPr>
-        <p:spPr/>
-        <p:txBody>
-          <a:bodyPr/>
-          <a:lstStyle/>
-          <a:p>
-            <a:fld id="{F7021451-1387-4CA6-816F-3879F97B5CBC}" type="slidenum">
-              <a:rPr lang="en-US"/>
-              <a:t>15</a:t>
-            </a:fld>
-            <a:endParaRPr lang="en-US"/>
-          </a:p>
-        </p:txBody>
-      </p:sp>
-    </p:spTree>
-    <p:extLst>
-      <p:ext uri="{BB962C8B-B14F-4D97-AF65-F5344CB8AC3E}">
-        <p14:creationId xmlns:p14="http://schemas.microsoft.com/office/powerpoint/2010/main" val="1024086991"/>
-      </p:ext>
-    </p:extLst>
-  </p:cSld>
-  <p:clrMapOvr>
-    <a:masterClrMapping/>
-  </p:clrMapOvr>
-</p:notes>
-</file>
-
-<file path=ppt/notesSlides/notesSlide16.xml><?xml version="1.0" encoding="utf-8"?>
-<p:notes xmlns:a="http://schemas.openxmlformats.org/drawingml/2006/main" xmlns:r="http://schemas.openxmlformats.org/officeDocument/2006/relationships" xmlns:p="http://schemas.openxmlformats.org/presentationml/2006/main">
-  <p:cSld>
-    <p:spTree>
-      <p:nvGrpSpPr>
-        <p:cNvPr id="1" name=""/>
-        <p:cNvGrpSpPr/>
-        <p:nvPr/>
-      </p:nvGrpSpPr>
-      <p:grpSpPr>
-        <a:xfrm>
-          <a:off x="0" y="0"/>
-          <a:ext cx="0" cy="0"/>
-          <a:chOff x="0" y="0"/>
-          <a:chExt cx="0" cy="0"/>
-        </a:xfrm>
-      </p:grpSpPr>
-      <p:sp>
-        <p:nvSpPr>
-          <p:cNvPr id="2" name="Slide Image Placeholder 1"/>
-          <p:cNvSpPr>
-            <a:spLocks noGrp="1" noRot="1" noChangeAspect="1"/>
-          </p:cNvSpPr>
-          <p:nvPr>
-            <p:ph type="sldImg"/>
-          </p:nvPr>
-        </p:nvSpPr>
-        <p:spPr/>
-      </p:sp>
-      <p:sp>
-        <p:nvSpPr>
-          <p:cNvPr id="3" name="Notes Placeholder 2"/>
-          <p:cNvSpPr>
-            <a:spLocks noGrp="1"/>
-          </p:cNvSpPr>
-          <p:nvPr>
-            <p:ph type="body" idx="1"/>
-          </p:nvPr>
-        </p:nvSpPr>
-        <p:spPr/>
-        <p:txBody>
-          <a:bodyPr/>
-          <a:lstStyle/>
-          <a:p>
-            <a:r>
-              <a:rPr lang="en-US" dirty="0"/>
-              <a:t/>
-            </a:r>
-            <a:endParaRPr lang="en-US" dirty="0"/>
-          </a:p>
-        </p:txBody>
-      </p:sp>
-      <p:sp>
-        <p:nvSpPr>
-          <p:cNvPr id="4" name="Slide Number Placeholder 3"/>
-          <p:cNvSpPr>
-            <a:spLocks noGrp="1"/>
-          </p:cNvSpPr>
-          <p:nvPr>
-            <p:ph type="sldNum" sz="quarter" idx="10"/>
-          </p:nvPr>
-        </p:nvSpPr>
-        <p:spPr/>
-        <p:txBody>
-          <a:bodyPr/>
-          <a:lstStyle/>
-          <a:p>
-            <a:fld id="{F7021451-1387-4CA6-816F-3879F97B5CBC}" type="slidenum">
-              <a:rPr lang="en-US"/>
-              <a:t>16</a:t>
-            </a:fld>
-            <a:endParaRPr lang="en-US"/>
-          </a:p>
-        </p:txBody>
-      </p:sp>
-    </p:spTree>
-    <p:extLst>
-      <p:ext uri="{BB962C8B-B14F-4D97-AF65-F5344CB8AC3E}">
-        <p14:creationId xmlns:p14="http://schemas.microsoft.com/office/powerpoint/2010/main" val="1024086991"/>
-      </p:ext>
-    </p:extLst>
-  </p:cSld>
-  <p:clrMapOvr>
-    <a:masterClrMapping/>
-  </p:clrMapOvr>
-</p:notes>
-</file>
-
-<file path=ppt/notesSlides/notesSlide17.xml><?xml version="1.0" encoding="utf-8"?>
-<p:notes xmlns:a="http://schemas.openxmlformats.org/drawingml/2006/main" xmlns:r="http://schemas.openxmlformats.org/officeDocument/2006/relationships" xmlns:p="http://schemas.openxmlformats.org/presentationml/2006/main">
-  <p:cSld>
-    <p:spTree>
-      <p:nvGrpSpPr>
-        <p:cNvPr id="1" name=""/>
-        <p:cNvGrpSpPr/>
-        <p:nvPr/>
-      </p:nvGrpSpPr>
-      <p:grpSpPr>
-        <a:xfrm>
-          <a:off x="0" y="0"/>
-          <a:ext cx="0" cy="0"/>
-          <a:chOff x="0" y="0"/>
-          <a:chExt cx="0" cy="0"/>
-        </a:xfrm>
-      </p:grpSpPr>
-      <p:sp>
-        <p:nvSpPr>
-          <p:cNvPr id="2" name="Slide Image Placeholder 1"/>
-          <p:cNvSpPr>
-            <a:spLocks noGrp="1" noRot="1" noChangeAspect="1"/>
-          </p:cNvSpPr>
-          <p:nvPr>
-            <p:ph type="sldImg"/>
-          </p:nvPr>
-        </p:nvSpPr>
-        <p:spPr/>
-      </p:sp>
-      <p:sp>
-        <p:nvSpPr>
-          <p:cNvPr id="3" name="Notes Placeholder 2"/>
-          <p:cNvSpPr>
-            <a:spLocks noGrp="1"/>
-          </p:cNvSpPr>
-          <p:nvPr>
-            <p:ph type="body" idx="1"/>
-          </p:nvPr>
-        </p:nvSpPr>
-        <p:spPr/>
-        <p:txBody>
-          <a:bodyPr/>
-          <a:lstStyle/>
-          <a:p>
-            <a:r>
-              <a:rPr lang="en-US" dirty="0"/>
-              <a:t/>
-            </a:r>
-            <a:endParaRPr lang="en-US" dirty="0"/>
-          </a:p>
-        </p:txBody>
-      </p:sp>
-      <p:sp>
-        <p:nvSpPr>
-          <p:cNvPr id="4" name="Slide Number Placeholder 3"/>
-          <p:cNvSpPr>
-            <a:spLocks noGrp="1"/>
-          </p:cNvSpPr>
-          <p:nvPr>
-            <p:ph type="sldNum" sz="quarter" idx="10"/>
-          </p:nvPr>
-        </p:nvSpPr>
-        <p:spPr/>
-        <p:txBody>
-          <a:bodyPr/>
-          <a:lstStyle/>
-          <a:p>
-            <a:fld id="{F7021451-1387-4CA6-816F-3879F97B5CBC}" type="slidenum">
-              <a:rPr lang="en-US"/>
-              <a:t>17</a:t>
-            </a:fld>
-            <a:endParaRPr lang="en-US"/>
-          </a:p>
-        </p:txBody>
-      </p:sp>
-    </p:spTree>
-    <p:extLst>
-      <p:ext uri="{BB962C8B-B14F-4D97-AF65-F5344CB8AC3E}">
-        <p14:creationId xmlns:p14="http://schemas.microsoft.com/office/powerpoint/2010/main" val="1024086991"/>
-      </p:ext>
-    </p:extLst>
-  </p:cSld>
-  <p:clrMapOvr>
-    <a:masterClrMapping/>
-  </p:clrMapOvr>
-</p:notes>
-</file>
-
-<file path=ppt/notesSlides/notesSlide18.xml><?xml version="1.0" encoding="utf-8"?>
-<p:notes xmlns:a="http://schemas.openxmlformats.org/drawingml/2006/main" xmlns:r="http://schemas.openxmlformats.org/officeDocument/2006/relationships" xmlns:p="http://schemas.openxmlformats.org/presentationml/2006/main">
-  <p:cSld>
-    <p:spTree>
-      <p:nvGrpSpPr>
-        <p:cNvPr id="1" name=""/>
-        <p:cNvGrpSpPr/>
-        <p:nvPr/>
-      </p:nvGrpSpPr>
-      <p:grpSpPr>
-        <a:xfrm>
-          <a:off x="0" y="0"/>
-          <a:ext cx="0" cy="0"/>
-          <a:chOff x="0" y="0"/>
-          <a:chExt cx="0" cy="0"/>
-        </a:xfrm>
-      </p:grpSpPr>
-      <p:sp>
-        <p:nvSpPr>
-          <p:cNvPr id="2" name="Slide Image Placeholder 1"/>
-          <p:cNvSpPr>
-            <a:spLocks noGrp="1" noRot="1" noChangeAspect="1"/>
-          </p:cNvSpPr>
-          <p:nvPr>
-            <p:ph type="sldImg"/>
-          </p:nvPr>
-        </p:nvSpPr>
-        <p:spPr/>
-      </p:sp>
-      <p:sp>
-        <p:nvSpPr>
-          <p:cNvPr id="3" name="Notes Placeholder 2"/>
-          <p:cNvSpPr>
-            <a:spLocks noGrp="1"/>
-          </p:cNvSpPr>
-          <p:nvPr>
-            <p:ph type="body" idx="1"/>
-          </p:nvPr>
-        </p:nvSpPr>
-        <p:spPr/>
-        <p:txBody>
-          <a:bodyPr/>
-          <a:lstStyle/>
-          <a:p>
-            <a:r>
-              <a:rPr lang="en-US" dirty="0"/>
-              <a:t/>
-            </a:r>
-            <a:endParaRPr lang="en-US" dirty="0"/>
-          </a:p>
-        </p:txBody>
-      </p:sp>
-      <p:sp>
-        <p:nvSpPr>
-          <p:cNvPr id="4" name="Slide Number Placeholder 3"/>
-          <p:cNvSpPr>
-            <a:spLocks noGrp="1"/>
-          </p:cNvSpPr>
-          <p:nvPr>
-            <p:ph type="sldNum" sz="quarter" idx="10"/>
-          </p:nvPr>
-        </p:nvSpPr>
-        <p:spPr/>
-        <p:txBody>
-          <a:bodyPr/>
-          <a:lstStyle/>
-          <a:p>
-            <a:fld id="{F7021451-1387-4CA6-816F-3879F97B5CBC}" type="slidenum">
-              <a:rPr lang="en-US"/>
-              <a:t>18</a:t>
-            </a:fld>
-            <a:endParaRPr lang="en-US"/>
-          </a:p>
-        </p:txBody>
-      </p:sp>
-    </p:spTree>
-    <p:extLst>
-      <p:ext uri="{BB962C8B-B14F-4D97-AF65-F5344CB8AC3E}">
-        <p14:creationId xmlns:p14="http://schemas.microsoft.com/office/powerpoint/2010/main" val="1024086991"/>
-      </p:ext>
-    </p:extLst>
-  </p:cSld>
-  <p:clrMapOvr>
-    <a:masterClrMapping/>
-  </p:clrMapOvr>
-</p:notes>
-</file>
-
-<file path=ppt/notesSlides/notesSlide19.xml><?xml version="1.0" encoding="utf-8"?>
-<p:notes xmlns:a="http://schemas.openxmlformats.org/drawingml/2006/main" xmlns:r="http://schemas.openxmlformats.org/officeDocument/2006/relationships" xmlns:p="http://schemas.openxmlformats.org/presentationml/2006/main">
-  <p:cSld>
-    <p:spTree>
-      <p:nvGrpSpPr>
-        <p:cNvPr id="1" name=""/>
-        <p:cNvGrpSpPr/>
-        <p:nvPr/>
-      </p:nvGrpSpPr>
-      <p:grpSpPr>
-        <a:xfrm>
-          <a:off x="0" y="0"/>
-          <a:ext cx="0" cy="0"/>
-          <a:chOff x="0" y="0"/>
-          <a:chExt cx="0" cy="0"/>
-        </a:xfrm>
-      </p:grpSpPr>
-      <p:sp>
-        <p:nvSpPr>
-          <p:cNvPr id="2" name="Slide Image Placeholder 1"/>
-          <p:cNvSpPr>
-            <a:spLocks noGrp="1" noRot="1" noChangeAspect="1"/>
-          </p:cNvSpPr>
-          <p:nvPr>
-            <p:ph type="sldImg"/>
-          </p:nvPr>
-        </p:nvSpPr>
-        <p:spPr/>
-      </p:sp>
-      <p:sp>
-        <p:nvSpPr>
-          <p:cNvPr id="3" name="Notes Placeholder 2"/>
-          <p:cNvSpPr>
-            <a:spLocks noGrp="1"/>
-          </p:cNvSpPr>
-          <p:nvPr>
-            <p:ph type="body" idx="1"/>
-          </p:nvPr>
-        </p:nvSpPr>
-        <p:spPr/>
-        <p:txBody>
-          <a:bodyPr/>
-          <a:lstStyle/>
-          <a:p>
-            <a:r>
-              <a:rPr lang="en-US" dirty="0"/>
-              <a:t/>
-            </a:r>
-            <a:endParaRPr lang="en-US" dirty="0"/>
-          </a:p>
-        </p:txBody>
-      </p:sp>
-      <p:sp>
-        <p:nvSpPr>
-          <p:cNvPr id="4" name="Slide Number Placeholder 3"/>
-          <p:cNvSpPr>
-            <a:spLocks noGrp="1"/>
-          </p:cNvSpPr>
-          <p:nvPr>
-            <p:ph type="sldNum" sz="quarter" idx="10"/>
-          </p:nvPr>
-        </p:nvSpPr>
-        <p:spPr/>
-        <p:txBody>
-          <a:bodyPr/>
-          <a:lstStyle/>
-          <a:p>
-            <a:fld id="{F7021451-1387-4CA6-816F-3879F97B5CBC}" type="slidenum">
-              <a:rPr lang="en-US"/>
-              <a:t>19</a:t>
             </a:fld>
             <a:endParaRPr lang="en-US"/>
           </a:p>
@@ -6374,7 +5929,7 @@
                 <a:ea typeface="맑은 고딕" pitchFamily="34" charset="-122"/>
                 <a:cs typeface="맑은 고딕" pitchFamily="34" charset="-120"/>
               </a:rPr>
-              <a:t>19</a:t>
+              <a:t>13</a:t>
             </a:r>
             <a:endParaRPr lang="en-US" sz="1000" dirty="0"/>
           </a:p>
@@ -6391,7305 +5946,6 @@
 <file path=ppt/slides/slide14.xml><?xml version="1.0" encoding="utf-8"?>
 <p:sld xmlns:a="http://schemas.openxmlformats.org/drawingml/2006/main" xmlns:r="http://schemas.openxmlformats.org/officeDocument/2006/relationships" xmlns:p="http://schemas.openxmlformats.org/presentationml/2006/main">
   <p:cSld name="Slide 14">
-    <p:bg>
-      <p:bgPr>
-        <a:solidFill>
-          <a:srgbClr val="FFFFFF"/>
-        </a:solidFill>
-      </p:bgPr>
-    </p:bg>
-    <p:spTree>
-      <p:nvGrpSpPr>
-        <p:cNvPr id="1" name=""/>
-        <p:cNvGrpSpPr/>
-        <p:nvPr/>
-      </p:nvGrpSpPr>
-      <p:grpSpPr>
-        <a:xfrm>
-          <a:off x="0" y="0"/>
-          <a:ext cx="0" cy="0"/>
-          <a:chOff x="0" y="0"/>
-          <a:chExt cx="0" cy="0"/>
-        </a:xfrm>
-      </p:grpSpPr>
-      <p:sp>
-        <p:nvSpPr>
-          <p:cNvPr id="2" name="Text 0"/>
-          <p:cNvSpPr/>
-          <p:nvPr/>
-        </p:nvSpPr>
-        <p:spPr>
-          <a:xfrm>
-            <a:off x="640080" y="457200"/>
-            <a:ext cx="7315200" cy="274320"/>
-          </a:xfrm>
-          <a:prstGeom prst="rect">
-            <a:avLst/>
-          </a:prstGeom>
-          <a:noFill/>
-          <a:ln/>
-        </p:spPr>
-        <p:txBody>
-          <a:bodyPr wrap="square" lIns="0" tIns="0" rIns="0" bIns="0" rtlCol="0" anchor="ctr"/>
-          <a:lstStyle/>
-          <a:p>
-            <a:pPr indent="0" marL="0">
-              <a:buNone/>
-            </a:pPr>
-            <a:r>
-              <a:rPr lang="en-US" sz="1200" b="1" spc="200" kern="0" dirty="0">
-                <a:solidFill>
-                  <a:srgbClr val="0075C9"/>
-                </a:solidFill>
-                <a:latin typeface="맑은 고딕" pitchFamily="34" charset="0"/>
-                <a:ea typeface="맑은 고딕" pitchFamily="34" charset="-122"/>
-                <a:cs typeface="맑은 고딕" pitchFamily="34" charset="-120"/>
-              </a:rPr>
-              <a:t>BUDGET</a:t>
-            </a:r>
-            <a:endParaRPr lang="en-US" sz="1200" dirty="0"/>
-          </a:p>
-        </p:txBody>
-      </p:sp>
-      <p:sp>
-        <p:nvSpPr>
-          <p:cNvPr id="3" name="Text 1"/>
-          <p:cNvSpPr/>
-          <p:nvPr/>
-        </p:nvSpPr>
-        <p:spPr>
-          <a:xfrm>
-            <a:off x="640080" y="749808"/>
-            <a:ext cx="8412480" cy="932688"/>
-          </a:xfrm>
-          <a:prstGeom prst="rect">
-            <a:avLst/>
-          </a:prstGeom>
-          <a:noFill/>
-          <a:ln/>
-        </p:spPr>
-        <p:txBody>
-          <a:bodyPr wrap="square" lIns="0" tIns="0" rIns="0" bIns="0" rtlCol="0" anchor="t"/>
-          <a:lstStyle/>
-          <a:p>
-            <a:pPr indent="0" marL="0">
-              <a:buNone/>
-            </a:pPr>
-            <a:r>
-              <a:rPr lang="en-US" sz="3200" b="1" dirty="0">
-                <a:solidFill>
-                  <a:srgbClr val="101B33"/>
-                </a:solidFill>
-                <a:latin typeface="맑은 고딕" pitchFamily="34" charset="0"/>
-                <a:ea typeface="맑은 고딕" pitchFamily="34" charset="-122"/>
-                <a:cs typeface="맑은 고딕" pitchFamily="34" charset="-120"/>
-              </a:rPr>
-              <a:t>사업비 구성</a:t>
-            </a:r>
-            <a:endParaRPr lang="en-US" sz="3200" dirty="0"/>
-          </a:p>
-        </p:txBody>
-      </p:sp>
-      <p:sp>
-        <p:nvSpPr>
-          <p:cNvPr id="4" name="Shape 2"/>
-          <p:cNvSpPr/>
-          <p:nvPr/>
-        </p:nvSpPr>
-        <p:spPr>
-          <a:xfrm>
-            <a:off x="640080" y="1920240"/>
-            <a:ext cx="10881360" cy="1371600"/>
-          </a:xfrm>
-          <a:prstGeom prst="roundRect">
-            <a:avLst>
-              <a:gd name="adj" fmla="val 4000"/>
-            </a:avLst>
-          </a:prstGeom>
-          <a:solidFill>
-            <a:srgbClr val="F7F8FA"/>
-          </a:solidFill>
-          <a:ln w="12700">
-            <a:solidFill>
-              <a:srgbClr val="DFE3EA"/>
-            </a:solidFill>
-            <a:prstDash val="solid"/>
-          </a:ln>
-          <a:effectLst>
-            <a:outerShdw sx="100000" sy="100000" kx="0" ky="0" algn="bl" rotWithShape="0" blurRad="152400" dist="38100" dir="5400000">
-              <a:srgbClr val="101B33">
-                <a:alpha val="7000"/>
-              </a:srgbClr>
-            </a:outerShdw>
-          </a:effectLst>
-        </p:spPr>
-      </p:sp>
-      <p:sp>
-        <p:nvSpPr>
-          <p:cNvPr id="5" name="Text 3"/>
-          <p:cNvSpPr/>
-          <p:nvPr/>
-        </p:nvSpPr>
-        <p:spPr>
-          <a:xfrm>
-            <a:off x="1005840" y="2148840"/>
-            <a:ext cx="1828800" cy="292608"/>
-          </a:xfrm>
-          <a:prstGeom prst="rect">
-            <a:avLst/>
-          </a:prstGeom>
-          <a:noFill/>
-          <a:ln/>
-        </p:spPr>
-        <p:txBody>
-          <a:bodyPr wrap="square" lIns="0" tIns="0" rIns="0" bIns="0" rtlCol="0" anchor="ctr"/>
-          <a:lstStyle/>
-          <a:p>
-            <a:pPr indent="0" marL="0">
-              <a:buNone/>
-            </a:pPr>
-            <a:r>
-              <a:rPr lang="en-US" sz="1200" b="1" dirty="0">
-                <a:solidFill>
-                  <a:srgbClr val="4A5262"/>
-                </a:solidFill>
-                <a:latin typeface="맑은 고딕" pitchFamily="34" charset="0"/>
-                <a:ea typeface="맑은 고딕" pitchFamily="34" charset="-122"/>
-                <a:cs typeface="맑은 고딕" pitchFamily="34" charset="-120"/>
-              </a:rPr>
-              <a:t>총 사업비</a:t>
-            </a:r>
-            <a:endParaRPr lang="en-US" sz="1200" dirty="0"/>
-          </a:p>
-        </p:txBody>
-      </p:sp>
-      <p:sp>
-        <p:nvSpPr>
-          <p:cNvPr id="6" name="Text 4"/>
-          <p:cNvSpPr/>
-          <p:nvPr/>
-        </p:nvSpPr>
-        <p:spPr>
-          <a:xfrm>
-            <a:off x="1005840" y="2450592"/>
-            <a:ext cx="2743200" cy="548640"/>
-          </a:xfrm>
-          <a:prstGeom prst="rect">
-            <a:avLst/>
-          </a:prstGeom>
-          <a:noFill/>
-          <a:ln/>
-        </p:spPr>
-        <p:txBody>
-          <a:bodyPr wrap="square" lIns="0" tIns="0" rIns="0" bIns="0" rtlCol="0" anchor="ctr"/>
-          <a:lstStyle/>
-          <a:p>
-            <a:pPr indent="0" marL="0">
-              <a:buNone/>
-            </a:pPr>
-            <a:r>
-              <a:rPr lang="en-US" sz="3000" b="1" dirty="0">
-                <a:solidFill>
-                  <a:srgbClr val="101B33"/>
-                </a:solidFill>
-                <a:latin typeface="맑은 고딕" pitchFamily="34" charset="0"/>
-                <a:ea typeface="맑은 고딕" pitchFamily="34" charset="-122"/>
-                <a:cs typeface="맑은 고딕" pitchFamily="34" charset="-120"/>
-              </a:rPr>
-              <a:t>4,000만원</a:t>
-            </a:r>
-            <a:endParaRPr lang="en-US" sz="3000" dirty="0"/>
-          </a:p>
-        </p:txBody>
-      </p:sp>
-      <p:sp>
-        <p:nvSpPr>
-          <p:cNvPr id="7" name="Shape 5"/>
-          <p:cNvSpPr/>
-          <p:nvPr/>
-        </p:nvSpPr>
-        <p:spPr>
-          <a:xfrm>
-            <a:off x="4206240" y="2395728"/>
-            <a:ext cx="5559552" cy="566928"/>
-          </a:xfrm>
-          <a:prstGeom prst="rect">
-            <a:avLst/>
-          </a:prstGeom>
-          <a:solidFill>
-            <a:srgbClr val="0075C9"/>
-          </a:solidFill>
-          <a:ln/>
-        </p:spPr>
-      </p:sp>
-      <p:sp>
-        <p:nvSpPr>
-          <p:cNvPr id="8" name="Shape 6"/>
-          <p:cNvSpPr/>
-          <p:nvPr/>
-        </p:nvSpPr>
-        <p:spPr>
-          <a:xfrm>
-            <a:off x="9765792" y="2395728"/>
-            <a:ext cx="1389888" cy="566928"/>
-          </a:xfrm>
-          <a:prstGeom prst="rect">
-            <a:avLst/>
-          </a:prstGeom>
-          <a:solidFill>
-            <a:srgbClr val="101B33"/>
-          </a:solidFill>
-          <a:ln/>
-        </p:spPr>
-      </p:sp>
-      <p:sp>
-        <p:nvSpPr>
-          <p:cNvPr id="9" name="Text 7"/>
-          <p:cNvSpPr/>
-          <p:nvPr/>
-        </p:nvSpPr>
-        <p:spPr>
-          <a:xfrm>
-            <a:off x="4352544" y="2395728"/>
-            <a:ext cx="5285232" cy="566928"/>
-          </a:xfrm>
-          <a:prstGeom prst="rect">
-            <a:avLst/>
-          </a:prstGeom>
-          <a:noFill/>
-          <a:ln/>
-        </p:spPr>
-        <p:txBody>
-          <a:bodyPr wrap="square" lIns="0" tIns="0" rIns="0" bIns="0" rtlCol="0" anchor="ctr"/>
-          <a:lstStyle/>
-          <a:p>
-            <a:pPr indent="0" marL="0">
-              <a:buNone/>
-            </a:pPr>
-            <a:r>
-              <a:rPr lang="en-US" sz="1250" b="1" dirty="0">
-                <a:solidFill>
-                  <a:srgbClr val="FFFFFF"/>
-                </a:solidFill>
-                <a:latin typeface="맑은 고딕" pitchFamily="34" charset="0"/>
-                <a:ea typeface="맑은 고딕" pitchFamily="34" charset="-122"/>
-                <a:cs typeface="맑은 고딕" pitchFamily="34" charset="-120"/>
-              </a:rPr>
-              <a:t>정부지원금 80%   3,200만원</a:t>
-            </a:r>
-            <a:endParaRPr lang="en-US" sz="1250" dirty="0"/>
-          </a:p>
-        </p:txBody>
-      </p:sp>
-      <p:sp>
-        <p:nvSpPr>
-          <p:cNvPr id="10" name="Text 8"/>
-          <p:cNvSpPr/>
-          <p:nvPr/>
-        </p:nvSpPr>
-        <p:spPr>
-          <a:xfrm>
-            <a:off x="9875520" y="2377440"/>
-            <a:ext cx="1389888" cy="603504"/>
-          </a:xfrm>
-          <a:prstGeom prst="rect">
-            <a:avLst/>
-          </a:prstGeom>
-          <a:noFill/>
-          <a:ln/>
-        </p:spPr>
-        <p:txBody>
-          <a:bodyPr wrap="square" lIns="0" tIns="0" rIns="0" bIns="0" rtlCol="0" anchor="ctr"/>
-          <a:lstStyle/>
-          <a:p>
-            <a:pPr indent="0" marL="0">
-              <a:lnSpc>
-                <a:spcPts val="1100"/>
-              </a:lnSpc>
-              <a:buNone/>
-            </a:pPr>
-            <a:r>
-              <a:rPr lang="en-US" sz="950" b="1" dirty="0">
-                <a:solidFill>
-                  <a:srgbClr val="FFFFFF"/>
-                </a:solidFill>
-                <a:latin typeface="맑은 고딕" pitchFamily="34" charset="0"/>
-                <a:ea typeface="맑은 고딕" pitchFamily="34" charset="-122"/>
-                <a:cs typeface="맑은 고딕" pitchFamily="34" charset="-120"/>
-              </a:rPr>
-              <a:t>대응자금 20%</a:t>
-            </a:r>
-            <a:endParaRPr lang="en-US" sz="950" dirty="0"/>
-          </a:p>
-          <a:p>
-            <a:pPr indent="0" marL="0">
-              <a:lnSpc>
-                <a:spcPts val="1100"/>
-              </a:lnSpc>
-              <a:buNone/>
-            </a:pPr>
-            <a:r>
-              <a:rPr lang="en-US" sz="950" b="1" dirty="0">
-                <a:solidFill>
-                  <a:srgbClr val="FFFFFF"/>
-                </a:solidFill>
-                <a:latin typeface="맑은 고딕" pitchFamily="34" charset="0"/>
-                <a:ea typeface="맑은 고딕" pitchFamily="34" charset="-122"/>
-                <a:cs typeface="맑은 고딕" pitchFamily="34" charset="-120"/>
-              </a:rPr>
-              <a:t>800만원</a:t>
-            </a:r>
-            <a:endParaRPr lang="en-US" sz="950" dirty="0"/>
-          </a:p>
-        </p:txBody>
-      </p:sp>
-      <p:sp>
-        <p:nvSpPr>
-          <p:cNvPr id="11" name="Text 9"/>
-          <p:cNvSpPr/>
-          <p:nvPr/>
-        </p:nvSpPr>
-        <p:spPr>
-          <a:xfrm>
-            <a:off x="4206240" y="3054096"/>
-            <a:ext cx="6949440" cy="274320"/>
-          </a:xfrm>
-          <a:prstGeom prst="rect">
-            <a:avLst/>
-          </a:prstGeom>
-          <a:noFill/>
-          <a:ln/>
-        </p:spPr>
-        <p:txBody>
-          <a:bodyPr wrap="square" lIns="0" tIns="0" rIns="0" bIns="0" rtlCol="0" anchor="ctr"/>
-          <a:lstStyle/>
-          <a:p>
-            <a:pPr indent="0" marL="0">
-              <a:buNone/>
-            </a:pPr>
-            <a:r>
-              <a:rPr lang="en-US" sz="950" dirty="0">
-                <a:solidFill>
-                  <a:srgbClr val="4A5262"/>
-                </a:solidFill>
-                <a:latin typeface="맑은 고딕" pitchFamily="34" charset="0"/>
-                <a:ea typeface="맑은 고딕" pitchFamily="34" charset="-122"/>
-                <a:cs typeface="맑은 고딕" pitchFamily="34" charset="-120"/>
-              </a:rPr>
-              <a:t>대응자금은 현금 또는 현물. 현물은 대표자·기 고용 인력 인건비, 사무실 임차료, 이행보증보험증권 수수료.</a:t>
-            </a:r>
-            <a:endParaRPr lang="en-US" sz="950" dirty="0"/>
-          </a:p>
-        </p:txBody>
-      </p:sp>
-      <p:sp>
-        <p:nvSpPr>
-          <p:cNvPr id="12" name="Text 10"/>
-          <p:cNvSpPr/>
-          <p:nvPr/>
-        </p:nvSpPr>
-        <p:spPr>
-          <a:xfrm>
-            <a:off x="640080" y="3346704"/>
-            <a:ext cx="5486400" cy="237744"/>
-          </a:xfrm>
-          <a:prstGeom prst="rect">
-            <a:avLst/>
-          </a:prstGeom>
-          <a:noFill/>
-          <a:ln/>
-        </p:spPr>
-        <p:txBody>
-          <a:bodyPr wrap="square" lIns="0" tIns="0" rIns="0" bIns="0" rtlCol="0" anchor="ctr"/>
-          <a:lstStyle/>
-          <a:p>
-            <a:pPr indent="0" marL="0">
-              <a:buNone/>
-            </a:pPr>
-            <a:r>
-              <a:rPr lang="en-US" sz="1100" b="1" dirty="0">
-                <a:solidFill>
-                  <a:srgbClr val="0075C9"/>
-                </a:solidFill>
-                <a:latin typeface="맑은 고딕" pitchFamily="34" charset="0"/>
-                <a:ea typeface="맑은 고딕" pitchFamily="34" charset="-122"/>
-                <a:cs typeface="맑은 고딕" pitchFamily="34" charset="-120"/>
-              </a:rPr>
-              <a:t>정부지원금 비목별 배분</a:t>
-            </a:r>
-            <a:endParaRPr lang="en-US" sz="1100" dirty="0"/>
-          </a:p>
-        </p:txBody>
-      </p:sp>
-      <p:sp>
-        <p:nvSpPr>
-          <p:cNvPr id="13" name="Text 11"/>
-          <p:cNvSpPr/>
-          <p:nvPr/>
-        </p:nvSpPr>
-        <p:spPr>
-          <a:xfrm>
-            <a:off x="685800" y="3621024"/>
-            <a:ext cx="2103120" cy="368373"/>
-          </a:xfrm>
-          <a:prstGeom prst="rect">
-            <a:avLst/>
-          </a:prstGeom>
-          <a:noFill/>
-          <a:ln/>
-        </p:spPr>
-        <p:txBody>
-          <a:bodyPr wrap="square" lIns="0" tIns="0" rIns="0" bIns="0" rtlCol="0" anchor="ctr"/>
-          <a:lstStyle/>
-          <a:p>
-            <a:pPr indent="0" marL="0">
-              <a:buNone/>
-            </a:pPr>
-            <a:r>
-              <a:rPr lang="en-US" sz="900" b="1" dirty="0">
-                <a:solidFill>
-                  <a:srgbClr val="101B33"/>
-                </a:solidFill>
-                <a:latin typeface="맑은 고딕" pitchFamily="34" charset="0"/>
-                <a:ea typeface="맑은 고딕" pitchFamily="34" charset="-122"/>
-                <a:cs typeface="맑은 고딕" pitchFamily="34" charset="-120"/>
-              </a:rPr>
-              <a:t>제품·서비스 고도화</a:t>
-            </a:r>
-            <a:endParaRPr lang="en-US" sz="900" dirty="0"/>
-          </a:p>
-        </p:txBody>
-      </p:sp>
-      <p:sp>
-        <p:nvSpPr>
-          <p:cNvPr id="14" name="Text 12"/>
-          <p:cNvSpPr/>
-          <p:nvPr/>
-        </p:nvSpPr>
-        <p:spPr>
-          <a:xfrm>
-            <a:off x="2834640" y="3621024"/>
-            <a:ext cx="4663440" cy="368373"/>
-          </a:xfrm>
-          <a:prstGeom prst="rect">
-            <a:avLst/>
-          </a:prstGeom>
-          <a:noFill/>
-          <a:ln/>
-        </p:spPr>
-        <p:txBody>
-          <a:bodyPr wrap="square" lIns="0" tIns="0" rIns="0" bIns="0" rtlCol="0" anchor="ctr"/>
-          <a:lstStyle/>
-          <a:p>
-            <a:pPr indent="0" marL="0">
-              <a:buNone/>
-            </a:pPr>
-            <a:r>
-              <a:rPr lang="en-US" sz="900" dirty="0">
-                <a:solidFill>
-                  <a:srgbClr val="4A5262"/>
-                </a:solidFill>
-                <a:latin typeface="맑은 고딕" pitchFamily="34" charset="0"/>
-                <a:ea typeface="맑은 고딕" pitchFamily="34" charset="-122"/>
-                <a:cs typeface="맑은 고딕" pitchFamily="34" charset="-120"/>
-              </a:rPr>
-              <a:t>개발 외주 — 에디터 서버화 · 공공 API 연동</a:t>
-            </a:r>
-            <a:endParaRPr lang="en-US" sz="900" dirty="0"/>
-          </a:p>
-        </p:txBody>
-      </p:sp>
-      <p:sp>
-        <p:nvSpPr>
-          <p:cNvPr id="15" name="Shape 13"/>
-          <p:cNvSpPr/>
-          <p:nvPr/>
-        </p:nvSpPr>
-        <p:spPr>
-          <a:xfrm>
-            <a:off x="7635240" y="3741202"/>
-            <a:ext cx="960120" cy="128016"/>
-          </a:xfrm>
-          <a:prstGeom prst="rect">
-            <a:avLst/>
-          </a:prstGeom>
-          <a:solidFill>
-            <a:srgbClr val="0075C9"/>
-          </a:solidFill>
-          <a:ln/>
-        </p:spPr>
-      </p:sp>
-      <p:sp>
-        <p:nvSpPr>
-          <p:cNvPr id="16" name="Text 14"/>
-          <p:cNvSpPr/>
-          <p:nvPr/>
-        </p:nvSpPr>
-        <p:spPr>
-          <a:xfrm>
-            <a:off x="9646920" y="3621024"/>
-            <a:ext cx="1143000" cy="368373"/>
-          </a:xfrm>
-          <a:prstGeom prst="rect">
-            <a:avLst/>
-          </a:prstGeom>
-          <a:noFill/>
-          <a:ln/>
-        </p:spPr>
-        <p:txBody>
-          <a:bodyPr wrap="square" lIns="0" tIns="0" rIns="0" bIns="0" rtlCol="0" anchor="ctr"/>
-          <a:lstStyle/>
-          <a:p>
-            <a:pPr algn="r" indent="0" marL="0">
-              <a:buNone/>
-            </a:pPr>
-            <a:r>
-              <a:rPr lang="en-US" sz="950" b="1" dirty="0">
-                <a:solidFill>
-                  <a:srgbClr val="101B33"/>
-                </a:solidFill>
-                <a:latin typeface="맑은 고딕" pitchFamily="34" charset="0"/>
-                <a:ea typeface="맑은 고딕" pitchFamily="34" charset="-122"/>
-                <a:cs typeface="맑은 고딕" pitchFamily="34" charset="-120"/>
-              </a:rPr>
-              <a:t>600만원</a:t>
-            </a:r>
-            <a:endParaRPr lang="en-US" sz="950" dirty="0"/>
-          </a:p>
-        </p:txBody>
-      </p:sp>
-      <p:sp>
-        <p:nvSpPr>
-          <p:cNvPr id="17" name="Text 15"/>
-          <p:cNvSpPr/>
-          <p:nvPr/>
-        </p:nvSpPr>
-        <p:spPr>
-          <a:xfrm>
-            <a:off x="10835640" y="3621024"/>
-            <a:ext cx="640080" cy="368373"/>
-          </a:xfrm>
-          <a:prstGeom prst="rect">
-            <a:avLst/>
-          </a:prstGeom>
-          <a:noFill/>
-          <a:ln/>
-        </p:spPr>
-        <p:txBody>
-          <a:bodyPr wrap="square" lIns="0" tIns="0" rIns="0" bIns="0" rtlCol="0" anchor="ctr"/>
-          <a:lstStyle/>
-          <a:p>
-            <a:pPr algn="r" indent="0" marL="0">
-              <a:buNone/>
-            </a:pPr>
-            <a:r>
-              <a:rPr lang="en-US" sz="850" dirty="0">
-                <a:solidFill>
-                  <a:srgbClr val="9AA3B0"/>
-                </a:solidFill>
-                <a:latin typeface="맑은 고딕" pitchFamily="34" charset="0"/>
-                <a:ea typeface="맑은 고딕" pitchFamily="34" charset="-122"/>
-                <a:cs typeface="맑은 고딕" pitchFamily="34" charset="-120"/>
-              </a:rPr>
-              <a:t>18.8%</a:t>
-            </a:r>
-            <a:endParaRPr lang="en-US" sz="850" dirty="0"/>
-          </a:p>
-        </p:txBody>
-      </p:sp>
-      <p:sp>
-        <p:nvSpPr>
-          <p:cNvPr id="18" name="Shape 16"/>
-          <p:cNvSpPr/>
-          <p:nvPr/>
-        </p:nvSpPr>
-        <p:spPr>
-          <a:xfrm>
-            <a:off x="685800" y="3989397"/>
-            <a:ext cx="10789920" cy="0"/>
-          </a:xfrm>
-          <a:prstGeom prst="line">
-            <a:avLst/>
-          </a:prstGeom>
-          <a:noFill/>
-          <a:ln w="12700">
-            <a:solidFill>
-              <a:srgbClr val="DFE3EA"/>
-            </a:solidFill>
-            <a:prstDash val="solid"/>
-          </a:ln>
-        </p:spPr>
-      </p:sp>
-      <p:sp>
-        <p:nvSpPr>
-          <p:cNvPr id="19" name="Text 17"/>
-          <p:cNvSpPr/>
-          <p:nvPr/>
-        </p:nvSpPr>
-        <p:spPr>
-          <a:xfrm>
-            <a:off x="685800" y="3989397"/>
-            <a:ext cx="2103120" cy="368373"/>
-          </a:xfrm>
-          <a:prstGeom prst="rect">
-            <a:avLst/>
-          </a:prstGeom>
-          <a:noFill/>
-          <a:ln/>
-        </p:spPr>
-        <p:txBody>
-          <a:bodyPr wrap="square" lIns="0" tIns="0" rIns="0" bIns="0" rtlCol="0" anchor="ctr"/>
-          <a:lstStyle/>
-          <a:p>
-            <a:pPr indent="0" marL="0">
-              <a:buNone/>
-            </a:pPr>
-            <a:r>
-              <a:rPr lang="en-US" sz="900" b="1" dirty="0">
-                <a:solidFill>
-                  <a:srgbClr val="101B33"/>
-                </a:solidFill>
-                <a:latin typeface="맑은 고딕" pitchFamily="34" charset="0"/>
-                <a:ea typeface="맑은 고딕" pitchFamily="34" charset="-122"/>
-                <a:cs typeface="맑은 고딕" pitchFamily="34" charset="-120"/>
-              </a:rPr>
-              <a:t>전문가활용비</a:t>
-            </a:r>
-            <a:endParaRPr lang="en-US" sz="900" dirty="0"/>
-          </a:p>
-        </p:txBody>
-      </p:sp>
-      <p:sp>
-        <p:nvSpPr>
-          <p:cNvPr id="20" name="Text 18"/>
-          <p:cNvSpPr/>
-          <p:nvPr/>
-        </p:nvSpPr>
-        <p:spPr>
-          <a:xfrm>
-            <a:off x="2834640" y="3989397"/>
-            <a:ext cx="4663440" cy="368373"/>
-          </a:xfrm>
-          <a:prstGeom prst="rect">
-            <a:avLst/>
-          </a:prstGeom>
-          <a:noFill/>
-          <a:ln/>
-        </p:spPr>
-        <p:txBody>
-          <a:bodyPr wrap="square" lIns="0" tIns="0" rIns="0" bIns="0" rtlCol="0" anchor="ctr"/>
-          <a:lstStyle/>
-          <a:p>
-            <a:pPr indent="0" marL="0">
-              <a:buNone/>
-            </a:pPr>
-            <a:r>
-              <a:rPr lang="en-US" sz="900" dirty="0">
-                <a:solidFill>
-                  <a:srgbClr val="4A5262"/>
-                </a:solidFill>
-                <a:latin typeface="맑은 고딕" pitchFamily="34" charset="0"/>
-                <a:ea typeface="맑은 고딕" pitchFamily="34" charset="-122"/>
-                <a:cs typeface="맑은 고딕" pitchFamily="34" charset="-120"/>
-              </a:rPr>
-              <a:t>멘토 자문</a:t>
-            </a:r>
-            <a:endParaRPr lang="en-US" sz="900" dirty="0"/>
-          </a:p>
-        </p:txBody>
-      </p:sp>
-      <p:sp>
-        <p:nvSpPr>
-          <p:cNvPr id="21" name="Shape 19"/>
-          <p:cNvSpPr/>
-          <p:nvPr/>
-        </p:nvSpPr>
-        <p:spPr>
-          <a:xfrm>
-            <a:off x="7635240" y="4109575"/>
-            <a:ext cx="320040" cy="128016"/>
-          </a:xfrm>
-          <a:prstGeom prst="rect">
-            <a:avLst/>
-          </a:prstGeom>
-          <a:solidFill>
-            <a:srgbClr val="0075C9"/>
-          </a:solidFill>
-          <a:ln/>
-        </p:spPr>
-      </p:sp>
-      <p:sp>
-        <p:nvSpPr>
-          <p:cNvPr id="22" name="Text 20"/>
-          <p:cNvSpPr/>
-          <p:nvPr/>
-        </p:nvSpPr>
-        <p:spPr>
-          <a:xfrm>
-            <a:off x="9646920" y="3989397"/>
-            <a:ext cx="1143000" cy="368373"/>
-          </a:xfrm>
-          <a:prstGeom prst="rect">
-            <a:avLst/>
-          </a:prstGeom>
-          <a:noFill/>
-          <a:ln/>
-        </p:spPr>
-        <p:txBody>
-          <a:bodyPr wrap="square" lIns="0" tIns="0" rIns="0" bIns="0" rtlCol="0" anchor="ctr"/>
-          <a:lstStyle/>
-          <a:p>
-            <a:pPr algn="r" indent="0" marL="0">
-              <a:buNone/>
-            </a:pPr>
-            <a:r>
-              <a:rPr lang="en-US" sz="950" b="1" dirty="0">
-                <a:solidFill>
-                  <a:srgbClr val="101B33"/>
-                </a:solidFill>
-                <a:latin typeface="맑은 고딕" pitchFamily="34" charset="0"/>
-                <a:ea typeface="맑은 고딕" pitchFamily="34" charset="-122"/>
-                <a:cs typeface="맑은 고딕" pitchFamily="34" charset="-120"/>
-              </a:rPr>
-              <a:t>200만원</a:t>
-            </a:r>
-            <a:endParaRPr lang="en-US" sz="950" dirty="0"/>
-          </a:p>
-        </p:txBody>
-      </p:sp>
-      <p:sp>
-        <p:nvSpPr>
-          <p:cNvPr id="23" name="Text 21"/>
-          <p:cNvSpPr/>
-          <p:nvPr/>
-        </p:nvSpPr>
-        <p:spPr>
-          <a:xfrm>
-            <a:off x="10835640" y="3989397"/>
-            <a:ext cx="640080" cy="368373"/>
-          </a:xfrm>
-          <a:prstGeom prst="rect">
-            <a:avLst/>
-          </a:prstGeom>
-          <a:noFill/>
-          <a:ln/>
-        </p:spPr>
-        <p:txBody>
-          <a:bodyPr wrap="square" lIns="0" tIns="0" rIns="0" bIns="0" rtlCol="0" anchor="ctr"/>
-          <a:lstStyle/>
-          <a:p>
-            <a:pPr algn="r" indent="0" marL="0">
-              <a:buNone/>
-            </a:pPr>
-            <a:r>
-              <a:rPr lang="en-US" sz="850" dirty="0">
-                <a:solidFill>
-                  <a:srgbClr val="9AA3B0"/>
-                </a:solidFill>
-                <a:latin typeface="맑은 고딕" pitchFamily="34" charset="0"/>
-                <a:ea typeface="맑은 고딕" pitchFamily="34" charset="-122"/>
-                <a:cs typeface="맑은 고딕" pitchFamily="34" charset="-120"/>
-              </a:rPr>
-              <a:t>6.3%</a:t>
-            </a:r>
-            <a:endParaRPr lang="en-US" sz="850" dirty="0"/>
-          </a:p>
-        </p:txBody>
-      </p:sp>
-      <p:sp>
-        <p:nvSpPr>
-          <p:cNvPr id="24" name="Shape 22"/>
-          <p:cNvSpPr/>
-          <p:nvPr/>
-        </p:nvSpPr>
-        <p:spPr>
-          <a:xfrm>
-            <a:off x="685800" y="4357769"/>
-            <a:ext cx="10789920" cy="0"/>
-          </a:xfrm>
-          <a:prstGeom prst="line">
-            <a:avLst/>
-          </a:prstGeom>
-          <a:noFill/>
-          <a:ln w="12700">
-            <a:solidFill>
-              <a:srgbClr val="DFE3EA"/>
-            </a:solidFill>
-            <a:prstDash val="solid"/>
-          </a:ln>
-        </p:spPr>
-      </p:sp>
-      <p:sp>
-        <p:nvSpPr>
-          <p:cNvPr id="25" name="Text 23"/>
-          <p:cNvSpPr/>
-          <p:nvPr/>
-        </p:nvSpPr>
-        <p:spPr>
-          <a:xfrm>
-            <a:off x="685800" y="4357769"/>
-            <a:ext cx="2103120" cy="368373"/>
-          </a:xfrm>
-          <a:prstGeom prst="rect">
-            <a:avLst/>
-          </a:prstGeom>
-          <a:noFill/>
-          <a:ln/>
-        </p:spPr>
-        <p:txBody>
-          <a:bodyPr wrap="square" lIns="0" tIns="0" rIns="0" bIns="0" rtlCol="0" anchor="ctr"/>
-          <a:lstStyle/>
-          <a:p>
-            <a:pPr indent="0" marL="0">
-              <a:buNone/>
-            </a:pPr>
-            <a:r>
-              <a:rPr lang="en-US" sz="900" b="1" dirty="0">
-                <a:solidFill>
-                  <a:srgbClr val="101B33"/>
-                </a:solidFill>
-                <a:latin typeface="맑은 고딕" pitchFamily="34" charset="0"/>
-                <a:ea typeface="맑은 고딕" pitchFamily="34" charset="-122"/>
-                <a:cs typeface="맑은 고딕" pitchFamily="34" charset="-120"/>
-              </a:rPr>
-              <a:t>공고료및광고료</a:t>
-            </a:r>
-            <a:endParaRPr lang="en-US" sz="900" dirty="0"/>
-          </a:p>
-        </p:txBody>
-      </p:sp>
-      <p:sp>
-        <p:nvSpPr>
-          <p:cNvPr id="26" name="Text 24"/>
-          <p:cNvSpPr/>
-          <p:nvPr/>
-        </p:nvSpPr>
-        <p:spPr>
-          <a:xfrm>
-            <a:off x="2834640" y="4357769"/>
-            <a:ext cx="4663440" cy="368373"/>
-          </a:xfrm>
-          <a:prstGeom prst="rect">
-            <a:avLst/>
-          </a:prstGeom>
-          <a:noFill/>
-          <a:ln/>
-        </p:spPr>
-        <p:txBody>
-          <a:bodyPr wrap="square" lIns="0" tIns="0" rIns="0" bIns="0" rtlCol="0" anchor="ctr"/>
-          <a:lstStyle/>
-          <a:p>
-            <a:pPr indent="0" marL="0">
-              <a:buNone/>
-            </a:pPr>
-            <a:r>
-              <a:rPr lang="en-US" sz="900" dirty="0">
-                <a:solidFill>
-                  <a:srgbClr val="4A5262"/>
-                </a:solidFill>
-                <a:latin typeface="맑은 고딕" pitchFamily="34" charset="0"/>
-                <a:ea typeface="맑은 고딕" pitchFamily="34" charset="-122"/>
-                <a:cs typeface="맑은 고딕" pitchFamily="34" charset="-120"/>
-              </a:rPr>
-              <a:t>광고 집행</a:t>
-            </a:r>
-            <a:endParaRPr lang="en-US" sz="900" dirty="0"/>
-          </a:p>
-        </p:txBody>
-      </p:sp>
-      <p:sp>
-        <p:nvSpPr>
-          <p:cNvPr id="27" name="Shape 25"/>
-          <p:cNvSpPr/>
-          <p:nvPr/>
-        </p:nvSpPr>
-        <p:spPr>
-          <a:xfrm>
-            <a:off x="7635240" y="4477947"/>
-            <a:ext cx="800100" cy="128016"/>
-          </a:xfrm>
-          <a:prstGeom prst="rect">
-            <a:avLst/>
-          </a:prstGeom>
-          <a:solidFill>
-            <a:srgbClr val="0075C9"/>
-          </a:solidFill>
-          <a:ln/>
-        </p:spPr>
-      </p:sp>
-      <p:sp>
-        <p:nvSpPr>
-          <p:cNvPr id="28" name="Text 26"/>
-          <p:cNvSpPr/>
-          <p:nvPr/>
-        </p:nvSpPr>
-        <p:spPr>
-          <a:xfrm>
-            <a:off x="9646920" y="4357769"/>
-            <a:ext cx="1143000" cy="368373"/>
-          </a:xfrm>
-          <a:prstGeom prst="rect">
-            <a:avLst/>
-          </a:prstGeom>
-          <a:noFill/>
-          <a:ln/>
-        </p:spPr>
-        <p:txBody>
-          <a:bodyPr wrap="square" lIns="0" tIns="0" rIns="0" bIns="0" rtlCol="0" anchor="ctr"/>
-          <a:lstStyle/>
-          <a:p>
-            <a:pPr algn="r" indent="0" marL="0">
-              <a:buNone/>
-            </a:pPr>
-            <a:r>
-              <a:rPr lang="en-US" sz="950" b="1" dirty="0">
-                <a:solidFill>
-                  <a:srgbClr val="101B33"/>
-                </a:solidFill>
-                <a:latin typeface="맑은 고딕" pitchFamily="34" charset="0"/>
-                <a:ea typeface="맑은 고딕" pitchFamily="34" charset="-122"/>
-                <a:cs typeface="맑은 고딕" pitchFamily="34" charset="-120"/>
-              </a:rPr>
-              <a:t>500만원</a:t>
-            </a:r>
-            <a:endParaRPr lang="en-US" sz="950" dirty="0"/>
-          </a:p>
-        </p:txBody>
-      </p:sp>
-      <p:sp>
-        <p:nvSpPr>
-          <p:cNvPr id="29" name="Text 27"/>
-          <p:cNvSpPr/>
-          <p:nvPr/>
-        </p:nvSpPr>
-        <p:spPr>
-          <a:xfrm>
-            <a:off x="10835640" y="4357769"/>
-            <a:ext cx="640080" cy="368373"/>
-          </a:xfrm>
-          <a:prstGeom prst="rect">
-            <a:avLst/>
-          </a:prstGeom>
-          <a:noFill/>
-          <a:ln/>
-        </p:spPr>
-        <p:txBody>
-          <a:bodyPr wrap="square" lIns="0" tIns="0" rIns="0" bIns="0" rtlCol="0" anchor="ctr"/>
-          <a:lstStyle/>
-          <a:p>
-            <a:pPr algn="r" indent="0" marL="0">
-              <a:buNone/>
-            </a:pPr>
-            <a:r>
-              <a:rPr lang="en-US" sz="850" dirty="0">
-                <a:solidFill>
-                  <a:srgbClr val="9AA3B0"/>
-                </a:solidFill>
-                <a:latin typeface="맑은 고딕" pitchFamily="34" charset="0"/>
-                <a:ea typeface="맑은 고딕" pitchFamily="34" charset="-122"/>
-                <a:cs typeface="맑은 고딕" pitchFamily="34" charset="-120"/>
-              </a:rPr>
-              <a:t>15.6%</a:t>
-            </a:r>
-            <a:endParaRPr lang="en-US" sz="850" dirty="0"/>
-          </a:p>
-        </p:txBody>
-      </p:sp>
-      <p:sp>
-        <p:nvSpPr>
-          <p:cNvPr id="30" name="Shape 28"/>
-          <p:cNvSpPr/>
-          <p:nvPr/>
-        </p:nvSpPr>
-        <p:spPr>
-          <a:xfrm>
-            <a:off x="685800" y="4726142"/>
-            <a:ext cx="10789920" cy="0"/>
-          </a:xfrm>
-          <a:prstGeom prst="line">
-            <a:avLst/>
-          </a:prstGeom>
-          <a:noFill/>
-          <a:ln w="12700">
-            <a:solidFill>
-              <a:srgbClr val="DFE3EA"/>
-            </a:solidFill>
-            <a:prstDash val="solid"/>
-          </a:ln>
-        </p:spPr>
-      </p:sp>
-      <p:sp>
-        <p:nvSpPr>
-          <p:cNvPr id="31" name="Text 29"/>
-          <p:cNvSpPr/>
-          <p:nvPr/>
-        </p:nvSpPr>
-        <p:spPr>
-          <a:xfrm>
-            <a:off x="685800" y="4726142"/>
-            <a:ext cx="2103120" cy="368373"/>
-          </a:xfrm>
-          <a:prstGeom prst="rect">
-            <a:avLst/>
-          </a:prstGeom>
-          <a:noFill/>
-          <a:ln/>
-        </p:spPr>
-        <p:txBody>
-          <a:bodyPr wrap="square" lIns="0" tIns="0" rIns="0" bIns="0" rtlCol="0" anchor="ctr"/>
-          <a:lstStyle/>
-          <a:p>
-            <a:pPr indent="0" marL="0">
-              <a:buNone/>
-            </a:pPr>
-            <a:r>
-              <a:rPr lang="en-US" sz="900" b="1" dirty="0">
-                <a:solidFill>
-                  <a:srgbClr val="101B33"/>
-                </a:solidFill>
-                <a:latin typeface="맑은 고딕" pitchFamily="34" charset="0"/>
-                <a:ea typeface="맑은 고딕" pitchFamily="34" charset="-122"/>
-                <a:cs typeface="맑은 고딕" pitchFamily="34" charset="-120"/>
-              </a:rPr>
-              <a:t>임차비</a:t>
-            </a:r>
-            <a:endParaRPr lang="en-US" sz="900" dirty="0"/>
-          </a:p>
-        </p:txBody>
-      </p:sp>
-      <p:sp>
-        <p:nvSpPr>
-          <p:cNvPr id="32" name="Text 30"/>
-          <p:cNvSpPr/>
-          <p:nvPr/>
-        </p:nvSpPr>
-        <p:spPr>
-          <a:xfrm>
-            <a:off x="2834640" y="4726142"/>
-            <a:ext cx="4663440" cy="368373"/>
-          </a:xfrm>
-          <a:prstGeom prst="rect">
-            <a:avLst/>
-          </a:prstGeom>
-          <a:noFill/>
-          <a:ln/>
-        </p:spPr>
-        <p:txBody>
-          <a:bodyPr wrap="square" lIns="0" tIns="0" rIns="0" bIns="0" rtlCol="0" anchor="ctr"/>
-          <a:lstStyle/>
-          <a:p>
-            <a:pPr indent="0" marL="0">
-              <a:buNone/>
-            </a:pPr>
-            <a:r>
-              <a:rPr lang="en-US" sz="900" dirty="0">
-                <a:solidFill>
-                  <a:srgbClr val="4A5262"/>
-                </a:solidFill>
-                <a:latin typeface="맑은 고딕" pitchFamily="34" charset="0"/>
-                <a:ea typeface="맑은 고딕" pitchFamily="34" charset="-122"/>
-                <a:cs typeface="맑은 고딕" pitchFamily="34" charset="-120"/>
-              </a:rPr>
-              <a:t>로컬 AI 렌더 장비 렌탈</a:t>
-            </a:r>
-            <a:endParaRPr lang="en-US" sz="900" dirty="0"/>
-          </a:p>
-        </p:txBody>
-      </p:sp>
-      <p:sp>
-        <p:nvSpPr>
-          <p:cNvPr id="33" name="Shape 31"/>
-          <p:cNvSpPr/>
-          <p:nvPr/>
-        </p:nvSpPr>
-        <p:spPr>
-          <a:xfrm>
-            <a:off x="7635240" y="4846320"/>
-            <a:ext cx="1920240" cy="128016"/>
-          </a:xfrm>
-          <a:prstGeom prst="rect">
-            <a:avLst/>
-          </a:prstGeom>
-          <a:solidFill>
-            <a:srgbClr val="0075C9"/>
-          </a:solidFill>
-          <a:ln/>
-        </p:spPr>
-      </p:sp>
-      <p:sp>
-        <p:nvSpPr>
-          <p:cNvPr id="34" name="Text 32"/>
-          <p:cNvSpPr/>
-          <p:nvPr/>
-        </p:nvSpPr>
-        <p:spPr>
-          <a:xfrm>
-            <a:off x="9646920" y="4726142"/>
-            <a:ext cx="1143000" cy="368373"/>
-          </a:xfrm>
-          <a:prstGeom prst="rect">
-            <a:avLst/>
-          </a:prstGeom>
-          <a:noFill/>
-          <a:ln/>
-        </p:spPr>
-        <p:txBody>
-          <a:bodyPr wrap="square" lIns="0" tIns="0" rIns="0" bIns="0" rtlCol="0" anchor="ctr"/>
-          <a:lstStyle/>
-          <a:p>
-            <a:pPr algn="r" indent="0" marL="0">
-              <a:buNone/>
-            </a:pPr>
-            <a:r>
-              <a:rPr lang="en-US" sz="950" b="1" dirty="0">
-                <a:solidFill>
-                  <a:srgbClr val="101B33"/>
-                </a:solidFill>
-                <a:latin typeface="맑은 고딕" pitchFamily="34" charset="0"/>
-                <a:ea typeface="맑은 고딕" pitchFamily="34" charset="-122"/>
-                <a:cs typeface="맑은 고딕" pitchFamily="34" charset="-120"/>
-              </a:rPr>
-              <a:t>1,200만원</a:t>
-            </a:r>
-            <a:endParaRPr lang="en-US" sz="950" dirty="0"/>
-          </a:p>
-        </p:txBody>
-      </p:sp>
-      <p:sp>
-        <p:nvSpPr>
-          <p:cNvPr id="35" name="Text 33"/>
-          <p:cNvSpPr/>
-          <p:nvPr/>
-        </p:nvSpPr>
-        <p:spPr>
-          <a:xfrm>
-            <a:off x="10835640" y="4726142"/>
-            <a:ext cx="640080" cy="368373"/>
-          </a:xfrm>
-          <a:prstGeom prst="rect">
-            <a:avLst/>
-          </a:prstGeom>
-          <a:noFill/>
-          <a:ln/>
-        </p:spPr>
-        <p:txBody>
-          <a:bodyPr wrap="square" lIns="0" tIns="0" rIns="0" bIns="0" rtlCol="0" anchor="ctr"/>
-          <a:lstStyle/>
-          <a:p>
-            <a:pPr algn="r" indent="0" marL="0">
-              <a:buNone/>
-            </a:pPr>
-            <a:r>
-              <a:rPr lang="en-US" sz="850" dirty="0">
-                <a:solidFill>
-                  <a:srgbClr val="9AA3B0"/>
-                </a:solidFill>
-                <a:latin typeface="맑은 고딕" pitchFamily="34" charset="0"/>
-                <a:ea typeface="맑은 고딕" pitchFamily="34" charset="-122"/>
-                <a:cs typeface="맑은 고딕" pitchFamily="34" charset="-120"/>
-              </a:rPr>
-              <a:t>37.5%</a:t>
-            </a:r>
-            <a:endParaRPr lang="en-US" sz="850" dirty="0"/>
-          </a:p>
-        </p:txBody>
-      </p:sp>
-      <p:sp>
-        <p:nvSpPr>
-          <p:cNvPr id="36" name="Shape 34"/>
-          <p:cNvSpPr/>
-          <p:nvPr/>
-        </p:nvSpPr>
-        <p:spPr>
-          <a:xfrm>
-            <a:off x="685800" y="5094514"/>
-            <a:ext cx="10789920" cy="0"/>
-          </a:xfrm>
-          <a:prstGeom prst="line">
-            <a:avLst/>
-          </a:prstGeom>
-          <a:noFill/>
-          <a:ln w="12700">
-            <a:solidFill>
-              <a:srgbClr val="DFE3EA"/>
-            </a:solidFill>
-            <a:prstDash val="solid"/>
-          </a:ln>
-        </p:spPr>
-      </p:sp>
-      <p:sp>
-        <p:nvSpPr>
-          <p:cNvPr id="37" name="Text 35"/>
-          <p:cNvSpPr/>
-          <p:nvPr/>
-        </p:nvSpPr>
-        <p:spPr>
-          <a:xfrm>
-            <a:off x="685800" y="5094514"/>
-            <a:ext cx="2103120" cy="368373"/>
-          </a:xfrm>
-          <a:prstGeom prst="rect">
-            <a:avLst/>
-          </a:prstGeom>
-          <a:noFill/>
-          <a:ln/>
-        </p:spPr>
-        <p:txBody>
-          <a:bodyPr wrap="square" lIns="0" tIns="0" rIns="0" bIns="0" rtlCol="0" anchor="ctr"/>
-          <a:lstStyle/>
-          <a:p>
-            <a:pPr indent="0" marL="0">
-              <a:buNone/>
-            </a:pPr>
-            <a:r>
-              <a:rPr lang="en-US" sz="900" b="1" dirty="0">
-                <a:solidFill>
-                  <a:srgbClr val="101B33"/>
-                </a:solidFill>
-                <a:latin typeface="맑은 고딕" pitchFamily="34" charset="0"/>
-                <a:ea typeface="맑은 고딕" pitchFamily="34" charset="-122"/>
-                <a:cs typeface="맑은 고딕" pitchFamily="34" charset="-120"/>
-              </a:rPr>
-              <a:t>수수료및사용료</a:t>
-            </a:r>
-            <a:endParaRPr lang="en-US" sz="900" dirty="0"/>
-          </a:p>
-        </p:txBody>
-      </p:sp>
-      <p:sp>
-        <p:nvSpPr>
-          <p:cNvPr id="38" name="Text 36"/>
-          <p:cNvSpPr/>
-          <p:nvPr/>
-        </p:nvSpPr>
-        <p:spPr>
-          <a:xfrm>
-            <a:off x="2834640" y="5094514"/>
-            <a:ext cx="4663440" cy="368373"/>
-          </a:xfrm>
-          <a:prstGeom prst="rect">
-            <a:avLst/>
-          </a:prstGeom>
-          <a:noFill/>
-          <a:ln/>
-        </p:spPr>
-        <p:txBody>
-          <a:bodyPr wrap="square" lIns="0" tIns="0" rIns="0" bIns="0" rtlCol="0" anchor="ctr"/>
-          <a:lstStyle/>
-          <a:p>
-            <a:pPr indent="0" marL="0">
-              <a:buNone/>
-            </a:pPr>
-            <a:r>
-              <a:rPr lang="en-US" sz="900" dirty="0">
-                <a:solidFill>
-                  <a:srgbClr val="4A5262"/>
-                </a:solidFill>
-                <a:latin typeface="맑은 고딕" pitchFamily="34" charset="0"/>
-                <a:ea typeface="맑은 고딕" pitchFamily="34" charset="-122"/>
-                <a:cs typeface="맑은 고딕" pitchFamily="34" charset="-120"/>
-              </a:rPr>
-              <a:t>AI 구독비 · 라이선스</a:t>
-            </a:r>
-            <a:endParaRPr lang="en-US" sz="900" dirty="0"/>
-          </a:p>
-        </p:txBody>
-      </p:sp>
-      <p:sp>
-        <p:nvSpPr>
-          <p:cNvPr id="39" name="Shape 37"/>
-          <p:cNvSpPr/>
-          <p:nvPr/>
-        </p:nvSpPr>
-        <p:spPr>
-          <a:xfrm>
-            <a:off x="7635240" y="5214693"/>
-            <a:ext cx="768096" cy="128016"/>
-          </a:xfrm>
-          <a:prstGeom prst="rect">
-            <a:avLst/>
-          </a:prstGeom>
-          <a:solidFill>
-            <a:srgbClr val="0075C9"/>
-          </a:solidFill>
-          <a:ln/>
-        </p:spPr>
-      </p:sp>
-      <p:sp>
-        <p:nvSpPr>
-          <p:cNvPr id="40" name="Text 38"/>
-          <p:cNvSpPr/>
-          <p:nvPr/>
-        </p:nvSpPr>
-        <p:spPr>
-          <a:xfrm>
-            <a:off x="9646920" y="5094514"/>
-            <a:ext cx="1143000" cy="368373"/>
-          </a:xfrm>
-          <a:prstGeom prst="rect">
-            <a:avLst/>
-          </a:prstGeom>
-          <a:noFill/>
-          <a:ln/>
-        </p:spPr>
-        <p:txBody>
-          <a:bodyPr wrap="square" lIns="0" tIns="0" rIns="0" bIns="0" rtlCol="0" anchor="ctr"/>
-          <a:lstStyle/>
-          <a:p>
-            <a:pPr algn="r" indent="0" marL="0">
-              <a:buNone/>
-            </a:pPr>
-            <a:r>
-              <a:rPr lang="en-US" sz="950" b="1" dirty="0">
-                <a:solidFill>
-                  <a:srgbClr val="101B33"/>
-                </a:solidFill>
-                <a:latin typeface="맑은 고딕" pitchFamily="34" charset="0"/>
-                <a:ea typeface="맑은 고딕" pitchFamily="34" charset="-122"/>
-                <a:cs typeface="맑은 고딕" pitchFamily="34" charset="-120"/>
-              </a:rPr>
-              <a:t>480만원</a:t>
-            </a:r>
-            <a:endParaRPr lang="en-US" sz="950" dirty="0"/>
-          </a:p>
-        </p:txBody>
-      </p:sp>
-      <p:sp>
-        <p:nvSpPr>
-          <p:cNvPr id="41" name="Text 39"/>
-          <p:cNvSpPr/>
-          <p:nvPr/>
-        </p:nvSpPr>
-        <p:spPr>
-          <a:xfrm>
-            <a:off x="10835640" y="5094514"/>
-            <a:ext cx="640080" cy="368373"/>
-          </a:xfrm>
-          <a:prstGeom prst="rect">
-            <a:avLst/>
-          </a:prstGeom>
-          <a:noFill/>
-          <a:ln/>
-        </p:spPr>
-        <p:txBody>
-          <a:bodyPr wrap="square" lIns="0" tIns="0" rIns="0" bIns="0" rtlCol="0" anchor="ctr"/>
-          <a:lstStyle/>
-          <a:p>
-            <a:pPr algn="r" indent="0" marL="0">
-              <a:buNone/>
-            </a:pPr>
-            <a:r>
-              <a:rPr lang="en-US" sz="850" dirty="0">
-                <a:solidFill>
-                  <a:srgbClr val="9AA3B0"/>
-                </a:solidFill>
-                <a:latin typeface="맑은 고딕" pitchFamily="34" charset="0"/>
-                <a:ea typeface="맑은 고딕" pitchFamily="34" charset="-122"/>
-                <a:cs typeface="맑은 고딕" pitchFamily="34" charset="-120"/>
-              </a:rPr>
-              <a:t>15.0%</a:t>
-            </a:r>
-            <a:endParaRPr lang="en-US" sz="850" dirty="0"/>
-          </a:p>
-        </p:txBody>
-      </p:sp>
-      <p:sp>
-        <p:nvSpPr>
-          <p:cNvPr id="42" name="Shape 40"/>
-          <p:cNvSpPr/>
-          <p:nvPr/>
-        </p:nvSpPr>
-        <p:spPr>
-          <a:xfrm>
-            <a:off x="685800" y="5462887"/>
-            <a:ext cx="10789920" cy="0"/>
-          </a:xfrm>
-          <a:prstGeom prst="line">
-            <a:avLst/>
-          </a:prstGeom>
-          <a:noFill/>
-          <a:ln w="12700">
-            <a:solidFill>
-              <a:srgbClr val="DFE3EA"/>
-            </a:solidFill>
-            <a:prstDash val="solid"/>
-          </a:ln>
-        </p:spPr>
-      </p:sp>
-      <p:sp>
-        <p:nvSpPr>
-          <p:cNvPr id="43" name="Text 41"/>
-          <p:cNvSpPr/>
-          <p:nvPr/>
-        </p:nvSpPr>
-        <p:spPr>
-          <a:xfrm>
-            <a:off x="685800" y="5462887"/>
-            <a:ext cx="2103120" cy="368373"/>
-          </a:xfrm>
-          <a:prstGeom prst="rect">
-            <a:avLst/>
-          </a:prstGeom>
-          <a:noFill/>
-          <a:ln/>
-        </p:spPr>
-        <p:txBody>
-          <a:bodyPr wrap="square" lIns="0" tIns="0" rIns="0" bIns="0" rtlCol="0" anchor="ctr"/>
-          <a:lstStyle/>
-          <a:p>
-            <a:pPr indent="0" marL="0">
-              <a:buNone/>
-            </a:pPr>
-            <a:r>
-              <a:rPr lang="en-US" sz="900" b="1" dirty="0">
-                <a:solidFill>
-                  <a:srgbClr val="101B33"/>
-                </a:solidFill>
-                <a:latin typeface="맑은 고딕" pitchFamily="34" charset="0"/>
-                <a:ea typeface="맑은 고딕" pitchFamily="34" charset="-122"/>
-                <a:cs typeface="맑은 고딕" pitchFamily="34" charset="-120"/>
-              </a:rPr>
-              <a:t>수수료및사용료</a:t>
-            </a:r>
-            <a:endParaRPr lang="en-US" sz="900" dirty="0"/>
-          </a:p>
-        </p:txBody>
-      </p:sp>
-      <p:sp>
-        <p:nvSpPr>
-          <p:cNvPr id="44" name="Text 42"/>
-          <p:cNvSpPr/>
-          <p:nvPr/>
-        </p:nvSpPr>
-        <p:spPr>
-          <a:xfrm>
-            <a:off x="2834640" y="5462887"/>
-            <a:ext cx="4663440" cy="368373"/>
-          </a:xfrm>
-          <a:prstGeom prst="rect">
-            <a:avLst/>
-          </a:prstGeom>
-          <a:noFill/>
-          <a:ln/>
-        </p:spPr>
-        <p:txBody>
-          <a:bodyPr wrap="square" lIns="0" tIns="0" rIns="0" bIns="0" rtlCol="0" anchor="ctr"/>
-          <a:lstStyle/>
-          <a:p>
-            <a:pPr indent="0" marL="0">
-              <a:buNone/>
-            </a:pPr>
-            <a:r>
-              <a:rPr lang="en-US" sz="900" dirty="0">
-                <a:solidFill>
-                  <a:srgbClr val="4A5262"/>
-                </a:solidFill>
-                <a:latin typeface="맑은 고딕" pitchFamily="34" charset="0"/>
-                <a:ea typeface="맑은 고딕" pitchFamily="34" charset="-122"/>
-                <a:cs typeface="맑은 고딕" pitchFamily="34" charset="-120"/>
-              </a:rPr>
-              <a:t>산업재산권 출원등록</a:t>
-            </a:r>
-            <a:endParaRPr lang="en-US" sz="900" dirty="0"/>
-          </a:p>
-        </p:txBody>
-      </p:sp>
-      <p:sp>
-        <p:nvSpPr>
-          <p:cNvPr id="45" name="Shape 43"/>
-          <p:cNvSpPr/>
-          <p:nvPr/>
-        </p:nvSpPr>
-        <p:spPr>
-          <a:xfrm>
-            <a:off x="7635240" y="5583065"/>
-            <a:ext cx="192024" cy="128016"/>
-          </a:xfrm>
-          <a:prstGeom prst="rect">
-            <a:avLst/>
-          </a:prstGeom>
-          <a:solidFill>
-            <a:srgbClr val="0075C9"/>
-          </a:solidFill>
-          <a:ln/>
-        </p:spPr>
-      </p:sp>
-      <p:sp>
-        <p:nvSpPr>
-          <p:cNvPr id="46" name="Text 44"/>
-          <p:cNvSpPr/>
-          <p:nvPr/>
-        </p:nvSpPr>
-        <p:spPr>
-          <a:xfrm>
-            <a:off x="9646920" y="5462887"/>
-            <a:ext cx="1143000" cy="368373"/>
-          </a:xfrm>
-          <a:prstGeom prst="rect">
-            <a:avLst/>
-          </a:prstGeom>
-          <a:noFill/>
-          <a:ln/>
-        </p:spPr>
-        <p:txBody>
-          <a:bodyPr wrap="square" lIns="0" tIns="0" rIns="0" bIns="0" rtlCol="0" anchor="ctr"/>
-          <a:lstStyle/>
-          <a:p>
-            <a:pPr algn="r" indent="0" marL="0">
-              <a:buNone/>
-            </a:pPr>
-            <a:r>
-              <a:rPr lang="en-US" sz="950" b="1" dirty="0">
-                <a:solidFill>
-                  <a:srgbClr val="101B33"/>
-                </a:solidFill>
-                <a:latin typeface="맑은 고딕" pitchFamily="34" charset="0"/>
-                <a:ea typeface="맑은 고딕" pitchFamily="34" charset="-122"/>
-                <a:cs typeface="맑은 고딕" pitchFamily="34" charset="-120"/>
-              </a:rPr>
-              <a:t>120만원</a:t>
-            </a:r>
-            <a:endParaRPr lang="en-US" sz="950" dirty="0"/>
-          </a:p>
-        </p:txBody>
-      </p:sp>
-      <p:sp>
-        <p:nvSpPr>
-          <p:cNvPr id="47" name="Text 45"/>
-          <p:cNvSpPr/>
-          <p:nvPr/>
-        </p:nvSpPr>
-        <p:spPr>
-          <a:xfrm>
-            <a:off x="10835640" y="5462887"/>
-            <a:ext cx="640080" cy="368373"/>
-          </a:xfrm>
-          <a:prstGeom prst="rect">
-            <a:avLst/>
-          </a:prstGeom>
-          <a:noFill/>
-          <a:ln/>
-        </p:spPr>
-        <p:txBody>
-          <a:bodyPr wrap="square" lIns="0" tIns="0" rIns="0" bIns="0" rtlCol="0" anchor="ctr"/>
-          <a:lstStyle/>
-          <a:p>
-            <a:pPr algn="r" indent="0" marL="0">
-              <a:buNone/>
-            </a:pPr>
-            <a:r>
-              <a:rPr lang="en-US" sz="850" dirty="0">
-                <a:solidFill>
-                  <a:srgbClr val="9AA3B0"/>
-                </a:solidFill>
-                <a:latin typeface="맑은 고딕" pitchFamily="34" charset="0"/>
-                <a:ea typeface="맑은 고딕" pitchFamily="34" charset="-122"/>
-                <a:cs typeface="맑은 고딕" pitchFamily="34" charset="-120"/>
-              </a:rPr>
-              <a:t>3.8%</a:t>
-            </a:r>
-            <a:endParaRPr lang="en-US" sz="850" dirty="0"/>
-          </a:p>
-        </p:txBody>
-      </p:sp>
-      <p:sp>
-        <p:nvSpPr>
-          <p:cNvPr id="48" name="Shape 46"/>
-          <p:cNvSpPr/>
-          <p:nvPr/>
-        </p:nvSpPr>
-        <p:spPr>
-          <a:xfrm>
-            <a:off x="685800" y="5831259"/>
-            <a:ext cx="10789920" cy="0"/>
-          </a:xfrm>
-          <a:prstGeom prst="line">
-            <a:avLst/>
-          </a:prstGeom>
-          <a:noFill/>
-          <a:ln w="12700">
-            <a:solidFill>
-              <a:srgbClr val="DFE3EA"/>
-            </a:solidFill>
-            <a:prstDash val="solid"/>
-          </a:ln>
-        </p:spPr>
-      </p:sp>
-      <p:sp>
-        <p:nvSpPr>
-          <p:cNvPr id="49" name="Text 47"/>
-          <p:cNvSpPr/>
-          <p:nvPr/>
-        </p:nvSpPr>
-        <p:spPr>
-          <a:xfrm>
-            <a:off x="685800" y="5831259"/>
-            <a:ext cx="2103120" cy="368373"/>
-          </a:xfrm>
-          <a:prstGeom prst="rect">
-            <a:avLst/>
-          </a:prstGeom>
-          <a:noFill/>
-          <a:ln/>
-        </p:spPr>
-        <p:txBody>
-          <a:bodyPr wrap="square" lIns="0" tIns="0" rIns="0" bIns="0" rtlCol="0" anchor="ctr"/>
-          <a:lstStyle/>
-          <a:p>
-            <a:pPr indent="0" marL="0">
-              <a:buNone/>
-            </a:pPr>
-            <a:r>
-              <a:rPr lang="en-US" sz="900" b="1" dirty="0">
-                <a:solidFill>
-                  <a:srgbClr val="101B33"/>
-                </a:solidFill>
-                <a:latin typeface="맑은 고딕" pitchFamily="34" charset="0"/>
-                <a:ea typeface="맑은 고딕" pitchFamily="34" charset="-122"/>
-                <a:cs typeface="맑은 고딕" pitchFamily="34" charset="-120"/>
-              </a:rPr>
-              <a:t>재료구입비</a:t>
-            </a:r>
-            <a:endParaRPr lang="en-US" sz="900" dirty="0"/>
-          </a:p>
-        </p:txBody>
-      </p:sp>
-      <p:sp>
-        <p:nvSpPr>
-          <p:cNvPr id="50" name="Text 48"/>
-          <p:cNvSpPr/>
-          <p:nvPr/>
-        </p:nvSpPr>
-        <p:spPr>
-          <a:xfrm>
-            <a:off x="2834640" y="5831259"/>
-            <a:ext cx="4663440" cy="368373"/>
-          </a:xfrm>
-          <a:prstGeom prst="rect">
-            <a:avLst/>
-          </a:prstGeom>
-          <a:noFill/>
-          <a:ln/>
-        </p:spPr>
-        <p:txBody>
-          <a:bodyPr wrap="square" lIns="0" tIns="0" rIns="0" bIns="0" rtlCol="0" anchor="ctr"/>
-          <a:lstStyle/>
-          <a:p>
-            <a:pPr indent="0" marL="0">
-              <a:buNone/>
-            </a:pPr>
-            <a:r>
-              <a:rPr lang="en-US" sz="900" dirty="0">
-                <a:solidFill>
-                  <a:srgbClr val="4A5262"/>
-                </a:solidFill>
-                <a:latin typeface="맑은 고딕" pitchFamily="34" charset="0"/>
-                <a:ea typeface="맑은 고딕" pitchFamily="34" charset="-122"/>
-                <a:cs typeface="맑은 고딕" pitchFamily="34" charset="-120"/>
-              </a:rPr>
-              <a:t>실증 재료 · 데이터셋</a:t>
-            </a:r>
-            <a:endParaRPr lang="en-US" sz="900" dirty="0"/>
-          </a:p>
-        </p:txBody>
-      </p:sp>
-      <p:sp>
-        <p:nvSpPr>
-          <p:cNvPr id="51" name="Shape 49"/>
-          <p:cNvSpPr/>
-          <p:nvPr/>
-        </p:nvSpPr>
-        <p:spPr>
-          <a:xfrm>
-            <a:off x="7635240" y="5951438"/>
-            <a:ext cx="160020" cy="128016"/>
-          </a:xfrm>
-          <a:prstGeom prst="rect">
-            <a:avLst/>
-          </a:prstGeom>
-          <a:solidFill>
-            <a:srgbClr val="0075C9"/>
-          </a:solidFill>
-          <a:ln/>
-        </p:spPr>
-      </p:sp>
-      <p:sp>
-        <p:nvSpPr>
-          <p:cNvPr id="52" name="Text 50"/>
-          <p:cNvSpPr/>
-          <p:nvPr/>
-        </p:nvSpPr>
-        <p:spPr>
-          <a:xfrm>
-            <a:off x="9646920" y="5831259"/>
-            <a:ext cx="1143000" cy="368373"/>
-          </a:xfrm>
-          <a:prstGeom prst="rect">
-            <a:avLst/>
-          </a:prstGeom>
-          <a:noFill/>
-          <a:ln/>
-        </p:spPr>
-        <p:txBody>
-          <a:bodyPr wrap="square" lIns="0" tIns="0" rIns="0" bIns="0" rtlCol="0" anchor="ctr"/>
-          <a:lstStyle/>
-          <a:p>
-            <a:pPr algn="r" indent="0" marL="0">
-              <a:buNone/>
-            </a:pPr>
-            <a:r>
-              <a:rPr lang="en-US" sz="950" b="1" dirty="0">
-                <a:solidFill>
-                  <a:srgbClr val="101B33"/>
-                </a:solidFill>
-                <a:latin typeface="맑은 고딕" pitchFamily="34" charset="0"/>
-                <a:ea typeface="맑은 고딕" pitchFamily="34" charset="-122"/>
-                <a:cs typeface="맑은 고딕" pitchFamily="34" charset="-120"/>
-              </a:rPr>
-              <a:t>100만원</a:t>
-            </a:r>
-            <a:endParaRPr lang="en-US" sz="950" dirty="0"/>
-          </a:p>
-        </p:txBody>
-      </p:sp>
-      <p:sp>
-        <p:nvSpPr>
-          <p:cNvPr id="53" name="Text 51"/>
-          <p:cNvSpPr/>
-          <p:nvPr/>
-        </p:nvSpPr>
-        <p:spPr>
-          <a:xfrm>
-            <a:off x="10835640" y="5831259"/>
-            <a:ext cx="640080" cy="368373"/>
-          </a:xfrm>
-          <a:prstGeom prst="rect">
-            <a:avLst/>
-          </a:prstGeom>
-          <a:noFill/>
-          <a:ln/>
-        </p:spPr>
-        <p:txBody>
-          <a:bodyPr wrap="square" lIns="0" tIns="0" rIns="0" bIns="0" rtlCol="0" anchor="ctr"/>
-          <a:lstStyle/>
-          <a:p>
-            <a:pPr algn="r" indent="0" marL="0">
-              <a:buNone/>
-            </a:pPr>
-            <a:r>
-              <a:rPr lang="en-US" sz="850" dirty="0">
-                <a:solidFill>
-                  <a:srgbClr val="9AA3B0"/>
-                </a:solidFill>
-                <a:latin typeface="맑은 고딕" pitchFamily="34" charset="0"/>
-                <a:ea typeface="맑은 고딕" pitchFamily="34" charset="-122"/>
-                <a:cs typeface="맑은 고딕" pitchFamily="34" charset="-120"/>
-              </a:rPr>
-              <a:t>3.1%</a:t>
-            </a:r>
-            <a:endParaRPr lang="en-US" sz="850" dirty="0"/>
-          </a:p>
-        </p:txBody>
-      </p:sp>
-      <p:sp>
-        <p:nvSpPr>
-          <p:cNvPr id="54" name="Shape 52"/>
-          <p:cNvSpPr/>
-          <p:nvPr/>
-        </p:nvSpPr>
-        <p:spPr>
-          <a:xfrm>
-            <a:off x="685800" y="6199632"/>
-            <a:ext cx="10789920" cy="0"/>
-          </a:xfrm>
-          <a:prstGeom prst="line">
-            <a:avLst/>
-          </a:prstGeom>
-          <a:noFill/>
-          <a:ln w="12700">
-            <a:solidFill>
-              <a:srgbClr val="DFE3EA"/>
-            </a:solidFill>
-            <a:prstDash val="solid"/>
-          </a:ln>
-        </p:spPr>
-      </p:sp>
-      <p:sp>
-        <p:nvSpPr>
-          <p:cNvPr id="55" name="Text 53"/>
-          <p:cNvSpPr/>
-          <p:nvPr/>
-        </p:nvSpPr>
-        <p:spPr>
-          <a:xfrm>
-            <a:off x="640080" y="6291072"/>
-            <a:ext cx="10881360" cy="384048"/>
-          </a:xfrm>
-          <a:prstGeom prst="rect">
-            <a:avLst/>
-          </a:prstGeom>
-          <a:noFill/>
-          <a:ln/>
-        </p:spPr>
-        <p:txBody>
-          <a:bodyPr wrap="square" lIns="0" tIns="0" rIns="0" bIns="0" rtlCol="0" anchor="ctr"/>
-          <a:lstStyle/>
-          <a:p>
-            <a:pPr indent="0" marL="0">
-              <a:lnSpc>
-                <a:spcPts val="1100"/>
-              </a:lnSpc>
-              <a:buNone/>
-            </a:pPr>
-            <a:r>
-              <a:rPr lang="en-US" sz="850" i="1" dirty="0">
-                <a:solidFill>
-                  <a:srgbClr val="9AA3B0"/>
-                </a:solidFill>
-                <a:latin typeface="맑은 고딕" pitchFamily="34" charset="0"/>
-                <a:ea typeface="맑은 고딕" pitchFamily="34" charset="-122"/>
-                <a:cs typeface="맑은 고딕" pitchFamily="34" charset="-120"/>
-              </a:rPr>
-              <a:t>정부지원금 3,200만원 기준으로 항목별 금액을 확정했다. 총사업비는 대응자금 20%를 더한 4,000만원이다. 금액을 바꿀 때는 이 파일의 amount와 gov[].share만 고치고 build-deck.js를 다시 돌린다.</a:t>
-            </a:r>
-            <a:endParaRPr lang="en-US" sz="850" dirty="0"/>
-          </a:p>
-        </p:txBody>
-      </p:sp>
-      <p:sp>
-        <p:nvSpPr>
-          <p:cNvPr id="56" name="Text 54"/>
-          <p:cNvSpPr/>
-          <p:nvPr/>
-        </p:nvSpPr>
-        <p:spPr>
-          <a:xfrm>
-            <a:off x="11155680" y="6291072"/>
-            <a:ext cx="548640" cy="274320"/>
-          </a:xfrm>
-          <a:prstGeom prst="rect">
-            <a:avLst/>
-          </a:prstGeom>
-          <a:noFill/>
-          <a:ln/>
-        </p:spPr>
-        <p:txBody>
-          <a:bodyPr wrap="square" lIns="0" tIns="0" rIns="0" bIns="0" rtlCol="0" anchor="ctr"/>
-          <a:lstStyle/>
-          <a:p>
-            <a:pPr algn="r" indent="0" marL="0">
-              <a:buNone/>
-            </a:pPr>
-            <a:r>
-              <a:rPr lang="en-US" sz="1000" dirty="0">
-                <a:solidFill>
-                  <a:srgbClr val="9AA3B0"/>
-                </a:solidFill>
-                <a:latin typeface="맑은 고딕" pitchFamily="34" charset="0"/>
-                <a:ea typeface="맑은 고딕" pitchFamily="34" charset="-122"/>
-                <a:cs typeface="맑은 고딕" pitchFamily="34" charset="-120"/>
-              </a:rPr>
-              <a:t>14</a:t>
-            </a:r>
-            <a:endParaRPr lang="en-US" sz="1000" dirty="0"/>
-          </a:p>
-        </p:txBody>
-      </p:sp>
-    </p:spTree>
-  </p:cSld>
-  <p:clrMapOvr>
-    <a:masterClrMapping/>
-  </p:clrMapOvr>
-</p:sld>
-</file>
-
-<file path=ppt/slides/slide15.xml><?xml version="1.0" encoding="utf-8"?>
-<p:sld xmlns:a="http://schemas.openxmlformats.org/drawingml/2006/main" xmlns:r="http://schemas.openxmlformats.org/officeDocument/2006/relationships" xmlns:p="http://schemas.openxmlformats.org/presentationml/2006/main">
-  <p:cSld name="Slide 15">
-    <p:bg>
-      <p:bgPr>
-        <a:solidFill>
-          <a:srgbClr val="FFFFFF"/>
-        </a:solidFill>
-      </p:bgPr>
-    </p:bg>
-    <p:spTree>
-      <p:nvGrpSpPr>
-        <p:cNvPr id="1" name=""/>
-        <p:cNvGrpSpPr/>
-        <p:nvPr/>
-      </p:nvGrpSpPr>
-      <p:grpSpPr>
-        <a:xfrm>
-          <a:off x="0" y="0"/>
-          <a:ext cx="0" cy="0"/>
-          <a:chOff x="0" y="0"/>
-          <a:chExt cx="0" cy="0"/>
-        </a:xfrm>
-      </p:grpSpPr>
-      <p:sp>
-        <p:nvSpPr>
-          <p:cNvPr id="2" name="Text 0"/>
-          <p:cNvSpPr/>
-          <p:nvPr/>
-        </p:nvSpPr>
-        <p:spPr>
-          <a:xfrm>
-            <a:off x="640080" y="457200"/>
-            <a:ext cx="7315200" cy="274320"/>
-          </a:xfrm>
-          <a:prstGeom prst="rect">
-            <a:avLst/>
-          </a:prstGeom>
-          <a:noFill/>
-          <a:ln/>
-        </p:spPr>
-        <p:txBody>
-          <a:bodyPr wrap="square" lIns="0" tIns="0" rIns="0" bIns="0" rtlCol="0" anchor="ctr"/>
-          <a:lstStyle/>
-          <a:p>
-            <a:pPr indent="0" marL="0">
-              <a:buNone/>
-            </a:pPr>
-            <a:r>
-              <a:rPr lang="en-US" sz="1200" b="1" spc="200" kern="0" dirty="0">
-                <a:solidFill>
-                  <a:srgbClr val="0075C9"/>
-                </a:solidFill>
-                <a:latin typeface="맑은 고딕" pitchFamily="34" charset="0"/>
-                <a:ea typeface="맑은 고딕" pitchFamily="34" charset="-122"/>
-                <a:cs typeface="맑은 고딕" pitchFamily="34" charset="-120"/>
-              </a:rPr>
-              <a:t>BUDGET · 정부지원금</a:t>
-            </a:r>
-            <a:endParaRPr lang="en-US" sz="1200" dirty="0"/>
-          </a:p>
-        </p:txBody>
-      </p:sp>
-      <p:sp>
-        <p:nvSpPr>
-          <p:cNvPr id="3" name="Text 1"/>
-          <p:cNvSpPr/>
-          <p:nvPr/>
-        </p:nvSpPr>
-        <p:spPr>
-          <a:xfrm>
-            <a:off x="640080" y="749808"/>
-            <a:ext cx="8412480" cy="932688"/>
-          </a:xfrm>
-          <a:prstGeom prst="rect">
-            <a:avLst/>
-          </a:prstGeom>
-          <a:noFill/>
-          <a:ln/>
-        </p:spPr>
-        <p:txBody>
-          <a:bodyPr wrap="square" lIns="0" tIns="0" rIns="0" bIns="0" rtlCol="0" anchor="t"/>
-          <a:lstStyle/>
-          <a:p>
-            <a:pPr indent="0" marL="0">
-              <a:buNone/>
-            </a:pPr>
-            <a:r>
-              <a:rPr lang="en-US" sz="3000" b="1" dirty="0">
-                <a:solidFill>
-                  <a:srgbClr val="101B33"/>
-                </a:solidFill>
-                <a:latin typeface="맑은 고딕" pitchFamily="34" charset="0"/>
-                <a:ea typeface="맑은 고딕" pitchFamily="34" charset="-122"/>
-                <a:cs typeface="맑은 고딕" pitchFamily="34" charset="-120"/>
-              </a:rPr>
-              <a:t>무엇에 쓰고, 왜 필요한가</a:t>
-            </a:r>
-            <a:endParaRPr lang="en-US" sz="3000" dirty="0"/>
-          </a:p>
-        </p:txBody>
-      </p:sp>
-      <p:sp>
-        <p:nvSpPr>
-          <p:cNvPr id="4" name="Text 2"/>
-          <p:cNvSpPr/>
-          <p:nvPr/>
-        </p:nvSpPr>
-        <p:spPr>
-          <a:xfrm>
-            <a:off x="7315200" y="1298448"/>
-            <a:ext cx="4160520" cy="274320"/>
-          </a:xfrm>
-          <a:prstGeom prst="rect">
-            <a:avLst/>
-          </a:prstGeom>
-          <a:noFill/>
-          <a:ln/>
-        </p:spPr>
-        <p:txBody>
-          <a:bodyPr wrap="square" lIns="0" tIns="0" rIns="0" bIns="0" rtlCol="0" anchor="ctr"/>
-          <a:lstStyle/>
-          <a:p>
-            <a:pPr algn="r" indent="0" marL="0">
-              <a:buNone/>
-            </a:pPr>
-            <a:r>
-              <a:rPr lang="en-US" sz="1300" b="1" dirty="0">
-                <a:solidFill>
-                  <a:srgbClr val="101B33"/>
-                </a:solidFill>
-                <a:latin typeface="맑은 고딕" pitchFamily="34" charset="0"/>
-                <a:ea typeface="맑은 고딕" pitchFamily="34" charset="-122"/>
-                <a:cs typeface="맑은 고딕" pitchFamily="34" charset="-120"/>
-              </a:rPr>
-              <a:t>정부지원금 3,200만원</a:t>
-            </a:r>
-            <a:endParaRPr lang="en-US" sz="1300" dirty="0"/>
-          </a:p>
-        </p:txBody>
-      </p:sp>
-      <p:sp>
-        <p:nvSpPr>
-          <p:cNvPr id="5" name="Text 3"/>
-          <p:cNvSpPr/>
-          <p:nvPr/>
-        </p:nvSpPr>
-        <p:spPr>
-          <a:xfrm>
-            <a:off x="685800" y="1600200"/>
-            <a:ext cx="2377440" cy="237744"/>
-          </a:xfrm>
-          <a:prstGeom prst="rect">
-            <a:avLst/>
-          </a:prstGeom>
-          <a:noFill/>
-          <a:ln/>
-        </p:spPr>
-        <p:txBody>
-          <a:bodyPr wrap="square" lIns="0" tIns="0" rIns="0" bIns="0" rtlCol="0" anchor="ctr"/>
-          <a:lstStyle/>
-          <a:p>
-            <a:pPr indent="0" marL="0">
-              <a:buNone/>
-            </a:pPr>
-            <a:r>
-              <a:rPr lang="en-US" sz="950" b="1" spc="100" kern="0" dirty="0">
-                <a:solidFill>
-                  <a:srgbClr val="0075C9"/>
-                </a:solidFill>
-                <a:latin typeface="맑은 고딕" pitchFamily="34" charset="0"/>
-                <a:ea typeface="맑은 고딕" pitchFamily="34" charset="-122"/>
-                <a:cs typeface="맑은 고딕" pitchFamily="34" charset="-120"/>
-              </a:rPr>
-              <a:t>비목 · 세목</a:t>
-            </a:r>
-            <a:endParaRPr lang="en-US" sz="950" dirty="0"/>
-          </a:p>
-        </p:txBody>
-      </p:sp>
-      <p:sp>
-        <p:nvSpPr>
-          <p:cNvPr id="6" name="Text 4"/>
-          <p:cNvSpPr/>
-          <p:nvPr/>
-        </p:nvSpPr>
-        <p:spPr>
-          <a:xfrm>
-            <a:off x="3108960" y="1600200"/>
-            <a:ext cx="1371600" cy="237744"/>
-          </a:xfrm>
-          <a:prstGeom prst="rect">
-            <a:avLst/>
-          </a:prstGeom>
-          <a:noFill/>
-          <a:ln/>
-        </p:spPr>
-        <p:txBody>
-          <a:bodyPr wrap="square" lIns="0" tIns="0" rIns="0" bIns="0" rtlCol="0" anchor="ctr"/>
-          <a:lstStyle/>
-          <a:p>
-            <a:pPr indent="0" marL="0">
-              <a:buNone/>
-            </a:pPr>
-            <a:r>
-              <a:rPr lang="en-US" sz="950" b="1" spc="100" kern="0" dirty="0">
-                <a:solidFill>
-                  <a:srgbClr val="0075C9"/>
-                </a:solidFill>
-                <a:latin typeface="맑은 고딕" pitchFamily="34" charset="0"/>
-                <a:ea typeface="맑은 고딕" pitchFamily="34" charset="-122"/>
-                <a:cs typeface="맑은 고딕" pitchFamily="34" charset="-120"/>
-              </a:rPr>
-              <a:t>집행항목</a:t>
-            </a:r>
-            <a:endParaRPr lang="en-US" sz="950" dirty="0"/>
-          </a:p>
-        </p:txBody>
-      </p:sp>
-      <p:sp>
-        <p:nvSpPr>
-          <p:cNvPr id="7" name="Text 5"/>
-          <p:cNvSpPr/>
-          <p:nvPr/>
-        </p:nvSpPr>
-        <p:spPr>
-          <a:xfrm>
-            <a:off x="4526280" y="1600200"/>
-            <a:ext cx="2743200" cy="237744"/>
-          </a:xfrm>
-          <a:prstGeom prst="rect">
-            <a:avLst/>
-          </a:prstGeom>
-          <a:noFill/>
-          <a:ln/>
-        </p:spPr>
-        <p:txBody>
-          <a:bodyPr wrap="square" lIns="0" tIns="0" rIns="0" bIns="0" rtlCol="0" anchor="ctr"/>
-          <a:lstStyle/>
-          <a:p>
-            <a:pPr indent="0" marL="0">
-              <a:buNone/>
-            </a:pPr>
-            <a:r>
-              <a:rPr lang="en-US" sz="950" b="1" spc="100" kern="0" dirty="0">
-                <a:solidFill>
-                  <a:srgbClr val="0075C9"/>
-                </a:solidFill>
-                <a:latin typeface="맑은 고딕" pitchFamily="34" charset="0"/>
-                <a:ea typeface="맑은 고딕" pitchFamily="34" charset="-122"/>
-                <a:cs typeface="맑은 고딕" pitchFamily="34" charset="-120"/>
-              </a:rPr>
-              <a:t>우리 지출</a:t>
-            </a:r>
-            <a:endParaRPr lang="en-US" sz="950" dirty="0"/>
-          </a:p>
-        </p:txBody>
-      </p:sp>
-      <p:sp>
-        <p:nvSpPr>
-          <p:cNvPr id="8" name="Text 6"/>
-          <p:cNvSpPr/>
-          <p:nvPr/>
-        </p:nvSpPr>
-        <p:spPr>
-          <a:xfrm>
-            <a:off x="7315200" y="1600200"/>
-            <a:ext cx="4160520" cy="237744"/>
-          </a:xfrm>
-          <a:prstGeom prst="rect">
-            <a:avLst/>
-          </a:prstGeom>
-          <a:noFill/>
-          <a:ln/>
-        </p:spPr>
-        <p:txBody>
-          <a:bodyPr wrap="square" lIns="0" tIns="0" rIns="0" bIns="0" rtlCol="0" anchor="ctr"/>
-          <a:lstStyle/>
-          <a:p>
-            <a:pPr indent="0" marL="0">
-              <a:buNone/>
-            </a:pPr>
-            <a:r>
-              <a:rPr lang="en-US" sz="950" b="1" spc="100" kern="0" dirty="0">
-                <a:solidFill>
-                  <a:srgbClr val="0075C9"/>
-                </a:solidFill>
-                <a:latin typeface="맑은 고딕" pitchFamily="34" charset="0"/>
-                <a:ea typeface="맑은 고딕" pitchFamily="34" charset="-122"/>
-                <a:cs typeface="맑은 고딕" pitchFamily="34" charset="-120"/>
-              </a:rPr>
-              <a:t>필요한 이유</a:t>
-            </a:r>
-            <a:endParaRPr lang="en-US" sz="950" dirty="0"/>
-          </a:p>
-        </p:txBody>
-      </p:sp>
-      <p:sp>
-        <p:nvSpPr>
-          <p:cNvPr id="9" name="Shape 7"/>
-          <p:cNvSpPr/>
-          <p:nvPr/>
-        </p:nvSpPr>
-        <p:spPr>
-          <a:xfrm>
-            <a:off x="685800" y="1856232"/>
-            <a:ext cx="10789920" cy="0"/>
-          </a:xfrm>
-          <a:prstGeom prst="line">
-            <a:avLst/>
-          </a:prstGeom>
-          <a:noFill/>
-          <a:ln w="19050">
-            <a:solidFill>
-              <a:srgbClr val="101B33"/>
-            </a:solidFill>
-            <a:prstDash val="solid"/>
-          </a:ln>
-        </p:spPr>
-      </p:sp>
-      <p:sp>
-        <p:nvSpPr>
-          <p:cNvPr id="10" name="Text 8"/>
-          <p:cNvSpPr/>
-          <p:nvPr/>
-        </p:nvSpPr>
-        <p:spPr>
-          <a:xfrm>
-            <a:off x="685800" y="1947672"/>
-            <a:ext cx="2377440" cy="292608"/>
-          </a:xfrm>
-          <a:prstGeom prst="rect">
-            <a:avLst/>
-          </a:prstGeom>
-          <a:noFill/>
-          <a:ln/>
-        </p:spPr>
-        <p:txBody>
-          <a:bodyPr wrap="square" lIns="0" tIns="0" rIns="0" bIns="0" rtlCol="0" anchor="t"/>
-          <a:lstStyle/>
-          <a:p>
-            <a:pPr indent="0" marL="0">
-              <a:buNone/>
-            </a:pPr>
-            <a:r>
-              <a:rPr lang="en-US" sz="850" dirty="0">
-                <a:solidFill>
-                  <a:srgbClr val="4A5262"/>
-                </a:solidFill>
-                <a:latin typeface="맑은 고딕" pitchFamily="34" charset="0"/>
-                <a:ea typeface="맑은 고딕" pitchFamily="34" charset="-122"/>
-                <a:cs typeface="맑은 고딕" pitchFamily="34" charset="-120"/>
-              </a:rPr>
-              <a:t>운영비(210)-일반용역비(14)</a:t>
-            </a:r>
-            <a:endParaRPr lang="en-US" sz="850" dirty="0"/>
-          </a:p>
-        </p:txBody>
-      </p:sp>
-      <p:sp>
-        <p:nvSpPr>
-          <p:cNvPr id="11" name="Text 9"/>
-          <p:cNvSpPr/>
-          <p:nvPr/>
-        </p:nvSpPr>
-        <p:spPr>
-          <a:xfrm>
-            <a:off x="3108960" y="1947672"/>
-            <a:ext cx="1371600" cy="292608"/>
-          </a:xfrm>
-          <a:prstGeom prst="rect">
-            <a:avLst/>
-          </a:prstGeom>
-          <a:noFill/>
-          <a:ln/>
-        </p:spPr>
-        <p:txBody>
-          <a:bodyPr wrap="square" lIns="0" tIns="0" rIns="0" bIns="0" rtlCol="0" anchor="t"/>
-          <a:lstStyle/>
-          <a:p>
-            <a:pPr indent="0" marL="0">
-              <a:buNone/>
-            </a:pPr>
-            <a:r>
-              <a:rPr lang="en-US" sz="950" b="1" dirty="0">
-                <a:solidFill>
-                  <a:srgbClr val="101B33"/>
-                </a:solidFill>
-                <a:latin typeface="맑은 고딕" pitchFamily="34" charset="0"/>
-                <a:ea typeface="맑은 고딕" pitchFamily="34" charset="-122"/>
-                <a:cs typeface="맑은 고딕" pitchFamily="34" charset="-120"/>
-              </a:rPr>
-              <a:t>제품·서비스 고도화</a:t>
-            </a:r>
-            <a:endParaRPr lang="en-US" sz="950" dirty="0"/>
-          </a:p>
-        </p:txBody>
-      </p:sp>
-      <p:sp>
-        <p:nvSpPr>
-          <p:cNvPr id="12" name="Text 10"/>
-          <p:cNvSpPr/>
-          <p:nvPr/>
-        </p:nvSpPr>
-        <p:spPr>
-          <a:xfrm>
-            <a:off x="4526280" y="1947672"/>
-            <a:ext cx="2743200" cy="292608"/>
-          </a:xfrm>
-          <a:prstGeom prst="rect">
-            <a:avLst/>
-          </a:prstGeom>
-          <a:noFill/>
-          <a:ln/>
-        </p:spPr>
-        <p:txBody>
-          <a:bodyPr wrap="square" lIns="0" tIns="0" rIns="0" bIns="0" rtlCol="0" anchor="t"/>
-          <a:lstStyle/>
-          <a:p>
-            <a:pPr indent="0" marL="0">
-              <a:buNone/>
-            </a:pPr>
-            <a:r>
-              <a:rPr lang="en-US" sz="950" b="1" dirty="0">
-                <a:solidFill>
-                  <a:srgbClr val="1C2536"/>
-                </a:solidFill>
-                <a:latin typeface="맑은 고딕" pitchFamily="34" charset="0"/>
-                <a:ea typeface="맑은 고딕" pitchFamily="34" charset="-122"/>
-                <a:cs typeface="맑은 고딕" pitchFamily="34" charset="-120"/>
-              </a:rPr>
-              <a:t>개발 외주 — 에디터 서버화 · 공공 API 연동</a:t>
-            </a:r>
-            <a:endParaRPr lang="en-US" sz="950" dirty="0"/>
-          </a:p>
-        </p:txBody>
-      </p:sp>
-      <p:sp>
-        <p:nvSpPr>
-          <p:cNvPr id="13" name="Text 11"/>
-          <p:cNvSpPr/>
-          <p:nvPr/>
-        </p:nvSpPr>
-        <p:spPr>
-          <a:xfrm>
-            <a:off x="4526280" y="2221992"/>
-            <a:ext cx="2743200" cy="237744"/>
-          </a:xfrm>
-          <a:prstGeom prst="rect">
-            <a:avLst/>
-          </a:prstGeom>
-          <a:noFill/>
-          <a:ln/>
-        </p:spPr>
-        <p:txBody>
-          <a:bodyPr wrap="square" lIns="0" tIns="0" rIns="0" bIns="0" rtlCol="0" anchor="t"/>
-          <a:lstStyle/>
-          <a:p>
-            <a:pPr indent="0" marL="0">
-              <a:buNone/>
-            </a:pPr>
-            <a:r>
-              <a:rPr lang="en-US" sz="1200" b="1" dirty="0">
-                <a:solidFill>
-                  <a:srgbClr val="0075C9"/>
-                </a:solidFill>
-                <a:latin typeface="맑은 고딕" pitchFamily="34" charset="0"/>
-                <a:ea typeface="맑은 고딕" pitchFamily="34" charset="-122"/>
-                <a:cs typeface="맑은 고딕" pitchFamily="34" charset="-120"/>
-              </a:rPr>
-              <a:t>600만원</a:t>
-            </a:r>
-            <a:endParaRPr lang="en-US" sz="1200" dirty="0"/>
-          </a:p>
-        </p:txBody>
-      </p:sp>
-      <p:sp>
-        <p:nvSpPr>
-          <p:cNvPr id="14" name="Text 12"/>
-          <p:cNvSpPr/>
-          <p:nvPr/>
-        </p:nvSpPr>
-        <p:spPr>
-          <a:xfrm>
-            <a:off x="7315200" y="1929384"/>
-            <a:ext cx="4160520" cy="542109"/>
-          </a:xfrm>
-          <a:prstGeom prst="rect">
-            <a:avLst/>
-          </a:prstGeom>
-          <a:noFill/>
-          <a:ln/>
-        </p:spPr>
-        <p:txBody>
-          <a:bodyPr wrap="square" lIns="0" tIns="0" rIns="0" bIns="0" rtlCol="0" anchor="ctr"/>
-          <a:lstStyle/>
-          <a:p>
-            <a:pPr indent="0" marL="0">
-              <a:lnSpc>
-                <a:spcPts val="1100"/>
-              </a:lnSpc>
-              <a:buNone/>
-            </a:pPr>
-            <a:r>
-              <a:rPr lang="en-US" sz="850" dirty="0">
-                <a:solidFill>
-                  <a:srgbClr val="4A5262"/>
-                </a:solidFill>
-                <a:latin typeface="맑은 고딕" pitchFamily="34" charset="0"/>
-                <a:ea typeface="맑은 고딕" pitchFamily="34" charset="-122"/>
-                <a:cs typeface="맑은 고딕" pitchFamily="34" charset="-120"/>
-              </a:rPr>
-              <a:t>오늘 만든 에디터는 브라우저 안에서만 돌고 설정도 고객 브라우저에만 남는다. 여러 담당자가 같은 건을 이어 보려면 서버가 필요하다.</a:t>
-            </a:r>
-            <a:endParaRPr lang="en-US" sz="850" dirty="0"/>
-          </a:p>
-        </p:txBody>
-      </p:sp>
-      <p:sp>
-        <p:nvSpPr>
-          <p:cNvPr id="15" name="Shape 13"/>
-          <p:cNvSpPr/>
-          <p:nvPr/>
-        </p:nvSpPr>
-        <p:spPr>
-          <a:xfrm>
-            <a:off x="685800" y="2508069"/>
-            <a:ext cx="10789920" cy="0"/>
-          </a:xfrm>
-          <a:prstGeom prst="line">
-            <a:avLst/>
-          </a:prstGeom>
-          <a:noFill/>
-          <a:ln w="12700">
-            <a:solidFill>
-              <a:srgbClr val="DFE3EA"/>
-            </a:solidFill>
-            <a:prstDash val="solid"/>
-          </a:ln>
-        </p:spPr>
-      </p:sp>
-      <p:sp>
-        <p:nvSpPr>
-          <p:cNvPr id="16" name="Text 14"/>
-          <p:cNvSpPr/>
-          <p:nvPr/>
-        </p:nvSpPr>
-        <p:spPr>
-          <a:xfrm>
-            <a:off x="685800" y="2581221"/>
-            <a:ext cx="2377440" cy="292608"/>
-          </a:xfrm>
-          <a:prstGeom prst="rect">
-            <a:avLst/>
-          </a:prstGeom>
-          <a:noFill/>
-          <a:ln/>
-        </p:spPr>
-        <p:txBody>
-          <a:bodyPr wrap="square" lIns="0" tIns="0" rIns="0" bIns="0" rtlCol="0" anchor="t"/>
-          <a:lstStyle/>
-          <a:p>
-            <a:pPr indent="0" marL="0">
-              <a:buNone/>
-            </a:pPr>
-            <a:r>
-              <a:rPr lang="en-US" sz="850" dirty="0">
-                <a:solidFill>
-                  <a:srgbClr val="4A5262"/>
-                </a:solidFill>
-                <a:latin typeface="맑은 고딕" pitchFamily="34" charset="0"/>
-                <a:ea typeface="맑은 고딕" pitchFamily="34" charset="-122"/>
-                <a:cs typeface="맑은 고딕" pitchFamily="34" charset="-120"/>
-              </a:rPr>
-              <a:t>운영비(210)-일반수용비(01)</a:t>
-            </a:r>
-            <a:endParaRPr lang="en-US" sz="850" dirty="0"/>
-          </a:p>
-        </p:txBody>
-      </p:sp>
-      <p:sp>
-        <p:nvSpPr>
-          <p:cNvPr id="17" name="Text 15"/>
-          <p:cNvSpPr/>
-          <p:nvPr/>
-        </p:nvSpPr>
-        <p:spPr>
-          <a:xfrm>
-            <a:off x="3108960" y="2581221"/>
-            <a:ext cx="1371600" cy="292608"/>
-          </a:xfrm>
-          <a:prstGeom prst="rect">
-            <a:avLst/>
-          </a:prstGeom>
-          <a:noFill/>
-          <a:ln/>
-        </p:spPr>
-        <p:txBody>
-          <a:bodyPr wrap="square" lIns="0" tIns="0" rIns="0" bIns="0" rtlCol="0" anchor="t"/>
-          <a:lstStyle/>
-          <a:p>
-            <a:pPr indent="0" marL="0">
-              <a:buNone/>
-            </a:pPr>
-            <a:r>
-              <a:rPr lang="en-US" sz="950" b="1" dirty="0">
-                <a:solidFill>
-                  <a:srgbClr val="101B33"/>
-                </a:solidFill>
-                <a:latin typeface="맑은 고딕" pitchFamily="34" charset="0"/>
-                <a:ea typeface="맑은 고딕" pitchFamily="34" charset="-122"/>
-                <a:cs typeface="맑은 고딕" pitchFamily="34" charset="-120"/>
-              </a:rPr>
-              <a:t>전문가활용비</a:t>
-            </a:r>
-            <a:endParaRPr lang="en-US" sz="950" dirty="0"/>
-          </a:p>
-        </p:txBody>
-      </p:sp>
-      <p:sp>
-        <p:nvSpPr>
-          <p:cNvPr id="18" name="Text 16"/>
-          <p:cNvSpPr/>
-          <p:nvPr/>
-        </p:nvSpPr>
-        <p:spPr>
-          <a:xfrm>
-            <a:off x="4526280" y="2581221"/>
-            <a:ext cx="2743200" cy="292608"/>
-          </a:xfrm>
-          <a:prstGeom prst="rect">
-            <a:avLst/>
-          </a:prstGeom>
-          <a:noFill/>
-          <a:ln/>
-        </p:spPr>
-        <p:txBody>
-          <a:bodyPr wrap="square" lIns="0" tIns="0" rIns="0" bIns="0" rtlCol="0" anchor="t"/>
-          <a:lstStyle/>
-          <a:p>
-            <a:pPr indent="0" marL="0">
-              <a:buNone/>
-            </a:pPr>
-            <a:r>
-              <a:rPr lang="en-US" sz="950" b="1" dirty="0">
-                <a:solidFill>
-                  <a:srgbClr val="B0442C"/>
-                </a:solidFill>
-                <a:latin typeface="맑은 고딕" pitchFamily="34" charset="0"/>
-                <a:ea typeface="맑은 고딕" pitchFamily="34" charset="-122"/>
-                <a:cs typeface="맑은 고딕" pitchFamily="34" charset="-120"/>
-              </a:rPr>
-              <a:t>멘토 자문</a:t>
-            </a:r>
-            <a:endParaRPr lang="en-US" sz="950" dirty="0"/>
-          </a:p>
-        </p:txBody>
-      </p:sp>
-      <p:sp>
-        <p:nvSpPr>
-          <p:cNvPr id="19" name="Text 17"/>
-          <p:cNvSpPr/>
-          <p:nvPr/>
-        </p:nvSpPr>
-        <p:spPr>
-          <a:xfrm>
-            <a:off x="4526280" y="2855541"/>
-            <a:ext cx="2743200" cy="237744"/>
-          </a:xfrm>
-          <a:prstGeom prst="rect">
-            <a:avLst/>
-          </a:prstGeom>
-          <a:noFill/>
-          <a:ln/>
-        </p:spPr>
-        <p:txBody>
-          <a:bodyPr wrap="square" lIns="0" tIns="0" rIns="0" bIns="0" rtlCol="0" anchor="t"/>
-          <a:lstStyle/>
-          <a:p>
-            <a:pPr indent="0" marL="0">
-              <a:buNone/>
-            </a:pPr>
-            <a:r>
-              <a:rPr lang="en-US" sz="1200" b="1" dirty="0">
-                <a:solidFill>
-                  <a:srgbClr val="0075C9"/>
-                </a:solidFill>
-                <a:latin typeface="맑은 고딕" pitchFamily="34" charset="0"/>
-                <a:ea typeface="맑은 고딕" pitchFamily="34" charset="-122"/>
-                <a:cs typeface="맑은 고딕" pitchFamily="34" charset="-120"/>
-              </a:rPr>
-              <a:t>200만원</a:t>
-            </a:r>
-            <a:endParaRPr lang="en-US" sz="1200" dirty="0"/>
-          </a:p>
-        </p:txBody>
-      </p:sp>
-      <p:sp>
-        <p:nvSpPr>
-          <p:cNvPr id="20" name="Text 18"/>
-          <p:cNvSpPr/>
-          <p:nvPr/>
-        </p:nvSpPr>
-        <p:spPr>
-          <a:xfrm>
-            <a:off x="7315200" y="2562933"/>
-            <a:ext cx="4160520" cy="542109"/>
-          </a:xfrm>
-          <a:prstGeom prst="rect">
-            <a:avLst/>
-          </a:prstGeom>
-          <a:noFill/>
-          <a:ln/>
-        </p:spPr>
-        <p:txBody>
-          <a:bodyPr wrap="square" lIns="0" tIns="0" rIns="0" bIns="0" rtlCol="0" anchor="ctr"/>
-          <a:lstStyle/>
-          <a:p>
-            <a:pPr indent="0" marL="0">
-              <a:lnSpc>
-                <a:spcPts val="1100"/>
-              </a:lnSpc>
-              <a:buNone/>
-            </a:pPr>
-            <a:r>
-              <a:rPr lang="en-US" sz="850" dirty="0">
-                <a:solidFill>
-                  <a:srgbClr val="4A5262"/>
-                </a:solidFill>
-                <a:latin typeface="맑은 고딕" pitchFamily="34" charset="0"/>
-                <a:ea typeface="맑은 고딕" pitchFamily="34" charset="-122"/>
-                <a:cs typeface="맑은 고딕" pitchFamily="34" charset="-120"/>
-              </a:rPr>
-              <a:t>개발 외주와 비목이 다르다. 멘토는 전문가활용비, 개발은 일반용역비로 나눠 잡아야 정산에서 막히지 않는다.  </a:t>
-            </a:r>
-            <a:pPr indent="0" marL="0">
-              <a:lnSpc>
-                <a:spcPts val="1100"/>
-              </a:lnSpc>
-              <a:buNone/>
-            </a:pPr>
-            <a:r>
-              <a:rPr lang="en-US" sz="850" b="1" dirty="0">
-                <a:solidFill>
-                  <a:srgbClr val="B0442C"/>
-                </a:solidFill>
-                <a:latin typeface="맑은 고딕" pitchFamily="34" charset="0"/>
-                <a:ea typeface="맑은 고딕" pitchFamily="34" charset="-122"/>
-                <a:cs typeface="맑은 고딕" pitchFamily="34" charset="-120"/>
-              </a:rPr>
-              <a:t>멘토기업에게 제품·솔루션·서비스를 제공받는 경우 금액과 무관하게 주관기관 공문 승인이 먼저다. 1회 125,000원을 넘는 멘토비는 기타소득세 8.8% 공제 후 집행한다.</a:t>
-            </a:r>
-            <a:endParaRPr lang="en-US" sz="850" dirty="0"/>
-          </a:p>
-        </p:txBody>
-      </p:sp>
-      <p:sp>
-        <p:nvSpPr>
-          <p:cNvPr id="21" name="Shape 19"/>
-          <p:cNvSpPr/>
-          <p:nvPr/>
-        </p:nvSpPr>
-        <p:spPr>
-          <a:xfrm>
-            <a:off x="685800" y="3141617"/>
-            <a:ext cx="10789920" cy="0"/>
-          </a:xfrm>
-          <a:prstGeom prst="line">
-            <a:avLst/>
-          </a:prstGeom>
-          <a:noFill/>
-          <a:ln w="12700">
-            <a:solidFill>
-              <a:srgbClr val="DFE3EA"/>
-            </a:solidFill>
-            <a:prstDash val="solid"/>
-          </a:ln>
-        </p:spPr>
-      </p:sp>
-      <p:sp>
-        <p:nvSpPr>
-          <p:cNvPr id="22" name="Text 20"/>
-          <p:cNvSpPr/>
-          <p:nvPr/>
-        </p:nvSpPr>
-        <p:spPr>
-          <a:xfrm>
-            <a:off x="685800" y="3214769"/>
-            <a:ext cx="2377440" cy="292608"/>
-          </a:xfrm>
-          <a:prstGeom prst="rect">
-            <a:avLst/>
-          </a:prstGeom>
-          <a:noFill/>
-          <a:ln/>
-        </p:spPr>
-        <p:txBody>
-          <a:bodyPr wrap="square" lIns="0" tIns="0" rIns="0" bIns="0" rtlCol="0" anchor="t"/>
-          <a:lstStyle/>
-          <a:p>
-            <a:pPr indent="0" marL="0">
-              <a:buNone/>
-            </a:pPr>
-            <a:r>
-              <a:rPr lang="en-US" sz="850" dirty="0">
-                <a:solidFill>
-                  <a:srgbClr val="4A5262"/>
-                </a:solidFill>
-                <a:latin typeface="맑은 고딕" pitchFamily="34" charset="0"/>
-                <a:ea typeface="맑은 고딕" pitchFamily="34" charset="-122"/>
-                <a:cs typeface="맑은 고딕" pitchFamily="34" charset="-120"/>
-              </a:rPr>
-              <a:t>운영비(210)-일반수용비(01)</a:t>
-            </a:r>
-            <a:endParaRPr lang="en-US" sz="850" dirty="0"/>
-          </a:p>
-        </p:txBody>
-      </p:sp>
-      <p:sp>
-        <p:nvSpPr>
-          <p:cNvPr id="23" name="Text 21"/>
-          <p:cNvSpPr/>
-          <p:nvPr/>
-        </p:nvSpPr>
-        <p:spPr>
-          <a:xfrm>
-            <a:off x="3108960" y="3214769"/>
-            <a:ext cx="1371600" cy="292608"/>
-          </a:xfrm>
-          <a:prstGeom prst="rect">
-            <a:avLst/>
-          </a:prstGeom>
-          <a:noFill/>
-          <a:ln/>
-        </p:spPr>
-        <p:txBody>
-          <a:bodyPr wrap="square" lIns="0" tIns="0" rIns="0" bIns="0" rtlCol="0" anchor="t"/>
-          <a:lstStyle/>
-          <a:p>
-            <a:pPr indent="0" marL="0">
-              <a:buNone/>
-            </a:pPr>
-            <a:r>
-              <a:rPr lang="en-US" sz="950" b="1" dirty="0">
-                <a:solidFill>
-                  <a:srgbClr val="101B33"/>
-                </a:solidFill>
-                <a:latin typeface="맑은 고딕" pitchFamily="34" charset="0"/>
-                <a:ea typeface="맑은 고딕" pitchFamily="34" charset="-122"/>
-                <a:cs typeface="맑은 고딕" pitchFamily="34" charset="-120"/>
-              </a:rPr>
-              <a:t>공고료및광고료</a:t>
-            </a:r>
-            <a:endParaRPr lang="en-US" sz="950" dirty="0"/>
-          </a:p>
-        </p:txBody>
-      </p:sp>
-      <p:sp>
-        <p:nvSpPr>
-          <p:cNvPr id="24" name="Text 22"/>
-          <p:cNvSpPr/>
-          <p:nvPr/>
-        </p:nvSpPr>
-        <p:spPr>
-          <a:xfrm>
-            <a:off x="4526280" y="3214769"/>
-            <a:ext cx="2743200" cy="292608"/>
-          </a:xfrm>
-          <a:prstGeom prst="rect">
-            <a:avLst/>
-          </a:prstGeom>
-          <a:noFill/>
-          <a:ln/>
-        </p:spPr>
-        <p:txBody>
-          <a:bodyPr wrap="square" lIns="0" tIns="0" rIns="0" bIns="0" rtlCol="0" anchor="t"/>
-          <a:lstStyle/>
-          <a:p>
-            <a:pPr indent="0" marL="0">
-              <a:buNone/>
-            </a:pPr>
-            <a:r>
-              <a:rPr lang="en-US" sz="950" b="1" dirty="0">
-                <a:solidFill>
-                  <a:srgbClr val="1C2536"/>
-                </a:solidFill>
-                <a:latin typeface="맑은 고딕" pitchFamily="34" charset="0"/>
-                <a:ea typeface="맑은 고딕" pitchFamily="34" charset="-122"/>
-                <a:cs typeface="맑은 고딕" pitchFamily="34" charset="-120"/>
-              </a:rPr>
-              <a:t>광고 집행</a:t>
-            </a:r>
-            <a:endParaRPr lang="en-US" sz="950" dirty="0"/>
-          </a:p>
-        </p:txBody>
-      </p:sp>
-      <p:sp>
-        <p:nvSpPr>
-          <p:cNvPr id="25" name="Text 23"/>
-          <p:cNvSpPr/>
-          <p:nvPr/>
-        </p:nvSpPr>
-        <p:spPr>
-          <a:xfrm>
-            <a:off x="4526280" y="3489089"/>
-            <a:ext cx="2743200" cy="237744"/>
-          </a:xfrm>
-          <a:prstGeom prst="rect">
-            <a:avLst/>
-          </a:prstGeom>
-          <a:noFill/>
-          <a:ln/>
-        </p:spPr>
-        <p:txBody>
-          <a:bodyPr wrap="square" lIns="0" tIns="0" rIns="0" bIns="0" rtlCol="0" anchor="t"/>
-          <a:lstStyle/>
-          <a:p>
-            <a:pPr indent="0" marL="0">
-              <a:buNone/>
-            </a:pPr>
-            <a:r>
-              <a:rPr lang="en-US" sz="1200" b="1" dirty="0">
-                <a:solidFill>
-                  <a:srgbClr val="0075C9"/>
-                </a:solidFill>
-                <a:latin typeface="맑은 고딕" pitchFamily="34" charset="0"/>
-                <a:ea typeface="맑은 고딕" pitchFamily="34" charset="-122"/>
-                <a:cs typeface="맑은 고딕" pitchFamily="34" charset="-120"/>
-              </a:rPr>
-              <a:t>500만원</a:t>
-            </a:r>
-            <a:endParaRPr lang="en-US" sz="1200" dirty="0"/>
-          </a:p>
-        </p:txBody>
-      </p:sp>
-      <p:sp>
-        <p:nvSpPr>
-          <p:cNvPr id="26" name="Text 24"/>
-          <p:cNvSpPr/>
-          <p:nvPr/>
-        </p:nvSpPr>
-        <p:spPr>
-          <a:xfrm>
-            <a:off x="7315200" y="3196481"/>
-            <a:ext cx="4160520" cy="542109"/>
-          </a:xfrm>
-          <a:prstGeom prst="rect">
-            <a:avLst/>
-          </a:prstGeom>
-          <a:noFill/>
-          <a:ln/>
-        </p:spPr>
-        <p:txBody>
-          <a:bodyPr wrap="square" lIns="0" tIns="0" rIns="0" bIns="0" rtlCol="0" anchor="ctr"/>
-          <a:lstStyle/>
-          <a:p>
-            <a:pPr indent="0" marL="0">
-              <a:lnSpc>
-                <a:spcPts val="1100"/>
-              </a:lnSpc>
-              <a:buNone/>
-            </a:pPr>
-            <a:r>
-              <a:rPr lang="en-US" sz="850" dirty="0">
-                <a:solidFill>
-                  <a:srgbClr val="4A5262"/>
-                </a:solidFill>
-                <a:latin typeface="맑은 고딕" pitchFamily="34" charset="0"/>
-                <a:ea typeface="맑은 고딕" pitchFamily="34" charset="-122"/>
-                <a:cs typeface="맑은 고딕" pitchFamily="34" charset="-120"/>
-              </a:rPr>
-              <a:t>우리가 직접 집행하면 광고료(일반수용비), 대행사에 맡기면 일반용역비다. 계약 전에 어느 쪽인지 정해 둔다.</a:t>
-            </a:r>
-            <a:endParaRPr lang="en-US" sz="850" dirty="0"/>
-          </a:p>
-        </p:txBody>
-      </p:sp>
-      <p:sp>
-        <p:nvSpPr>
-          <p:cNvPr id="27" name="Shape 25"/>
-          <p:cNvSpPr/>
-          <p:nvPr/>
-        </p:nvSpPr>
-        <p:spPr>
-          <a:xfrm>
-            <a:off x="685800" y="3775166"/>
-            <a:ext cx="10789920" cy="0"/>
-          </a:xfrm>
-          <a:prstGeom prst="line">
-            <a:avLst/>
-          </a:prstGeom>
-          <a:noFill/>
-          <a:ln w="12700">
-            <a:solidFill>
-              <a:srgbClr val="DFE3EA"/>
-            </a:solidFill>
-            <a:prstDash val="solid"/>
-          </a:ln>
-        </p:spPr>
-      </p:sp>
-      <p:sp>
-        <p:nvSpPr>
-          <p:cNvPr id="28" name="Text 26"/>
-          <p:cNvSpPr/>
-          <p:nvPr/>
-        </p:nvSpPr>
-        <p:spPr>
-          <a:xfrm>
-            <a:off x="685800" y="3848318"/>
-            <a:ext cx="2377440" cy="292608"/>
-          </a:xfrm>
-          <a:prstGeom prst="rect">
-            <a:avLst/>
-          </a:prstGeom>
-          <a:noFill/>
-          <a:ln/>
-        </p:spPr>
-        <p:txBody>
-          <a:bodyPr wrap="square" lIns="0" tIns="0" rIns="0" bIns="0" rtlCol="0" anchor="t"/>
-          <a:lstStyle/>
-          <a:p>
-            <a:pPr indent="0" marL="0">
-              <a:buNone/>
-            </a:pPr>
-            <a:r>
-              <a:rPr lang="en-US" sz="850" dirty="0">
-                <a:solidFill>
-                  <a:srgbClr val="4A5262"/>
-                </a:solidFill>
-                <a:latin typeface="맑은 고딕" pitchFamily="34" charset="0"/>
-                <a:ea typeface="맑은 고딕" pitchFamily="34" charset="-122"/>
-                <a:cs typeface="맑은 고딕" pitchFamily="34" charset="-120"/>
-              </a:rPr>
-              <a:t>운영비(210)-임차료(07)</a:t>
-            </a:r>
-            <a:endParaRPr lang="en-US" sz="850" dirty="0"/>
-          </a:p>
-        </p:txBody>
-      </p:sp>
-      <p:sp>
-        <p:nvSpPr>
-          <p:cNvPr id="29" name="Text 27"/>
-          <p:cNvSpPr/>
-          <p:nvPr/>
-        </p:nvSpPr>
-        <p:spPr>
-          <a:xfrm>
-            <a:off x="3108960" y="3848318"/>
-            <a:ext cx="1371600" cy="292608"/>
-          </a:xfrm>
-          <a:prstGeom prst="rect">
-            <a:avLst/>
-          </a:prstGeom>
-          <a:noFill/>
-          <a:ln/>
-        </p:spPr>
-        <p:txBody>
-          <a:bodyPr wrap="square" lIns="0" tIns="0" rIns="0" bIns="0" rtlCol="0" anchor="t"/>
-          <a:lstStyle/>
-          <a:p>
-            <a:pPr indent="0" marL="0">
-              <a:buNone/>
-            </a:pPr>
-            <a:r>
-              <a:rPr lang="en-US" sz="950" b="1" dirty="0">
-                <a:solidFill>
-                  <a:srgbClr val="101B33"/>
-                </a:solidFill>
-                <a:latin typeface="맑은 고딕" pitchFamily="34" charset="0"/>
-                <a:ea typeface="맑은 고딕" pitchFamily="34" charset="-122"/>
-                <a:cs typeface="맑은 고딕" pitchFamily="34" charset="-120"/>
-              </a:rPr>
-              <a:t>임차비</a:t>
-            </a:r>
-            <a:endParaRPr lang="en-US" sz="950" dirty="0"/>
-          </a:p>
-        </p:txBody>
-      </p:sp>
-      <p:sp>
-        <p:nvSpPr>
-          <p:cNvPr id="30" name="Text 28"/>
-          <p:cNvSpPr/>
-          <p:nvPr/>
-        </p:nvSpPr>
-        <p:spPr>
-          <a:xfrm>
-            <a:off x="4526280" y="3848318"/>
-            <a:ext cx="2743200" cy="292608"/>
-          </a:xfrm>
-          <a:prstGeom prst="rect">
-            <a:avLst/>
-          </a:prstGeom>
-          <a:noFill/>
-          <a:ln/>
-        </p:spPr>
-        <p:txBody>
-          <a:bodyPr wrap="square" lIns="0" tIns="0" rIns="0" bIns="0" rtlCol="0" anchor="t"/>
-          <a:lstStyle/>
-          <a:p>
-            <a:pPr indent="0" marL="0">
-              <a:buNone/>
-            </a:pPr>
-            <a:r>
-              <a:rPr lang="en-US" sz="950" b="1" dirty="0">
-                <a:solidFill>
-                  <a:srgbClr val="B0442C"/>
-                </a:solidFill>
-                <a:latin typeface="맑은 고딕" pitchFamily="34" charset="0"/>
-                <a:ea typeface="맑은 고딕" pitchFamily="34" charset="-122"/>
-                <a:cs typeface="맑은 고딕" pitchFamily="34" charset="-120"/>
-              </a:rPr>
-              <a:t>로컬 AI 렌더 장비 렌탈</a:t>
-            </a:r>
-            <a:endParaRPr lang="en-US" sz="950" dirty="0"/>
-          </a:p>
-        </p:txBody>
-      </p:sp>
-      <p:sp>
-        <p:nvSpPr>
-          <p:cNvPr id="31" name="Text 29"/>
-          <p:cNvSpPr/>
-          <p:nvPr/>
-        </p:nvSpPr>
-        <p:spPr>
-          <a:xfrm>
-            <a:off x="4526280" y="4122638"/>
-            <a:ext cx="2743200" cy="237744"/>
-          </a:xfrm>
-          <a:prstGeom prst="rect">
-            <a:avLst/>
-          </a:prstGeom>
-          <a:noFill/>
-          <a:ln/>
-        </p:spPr>
-        <p:txBody>
-          <a:bodyPr wrap="square" lIns="0" tIns="0" rIns="0" bIns="0" rtlCol="0" anchor="t"/>
-          <a:lstStyle/>
-          <a:p>
-            <a:pPr indent="0" marL="0">
-              <a:buNone/>
-            </a:pPr>
-            <a:r>
-              <a:rPr lang="en-US" sz="1200" b="1" dirty="0">
-                <a:solidFill>
-                  <a:srgbClr val="0075C9"/>
-                </a:solidFill>
-                <a:latin typeface="맑은 고딕" pitchFamily="34" charset="0"/>
-                <a:ea typeface="맑은 고딕" pitchFamily="34" charset="-122"/>
-                <a:cs typeface="맑은 고딕" pitchFamily="34" charset="-120"/>
-              </a:rPr>
-              <a:t>1,200만원</a:t>
-            </a:r>
-            <a:endParaRPr lang="en-US" sz="1200" dirty="0"/>
-          </a:p>
-        </p:txBody>
-      </p:sp>
-      <p:sp>
-        <p:nvSpPr>
-          <p:cNvPr id="32" name="Text 30"/>
-          <p:cNvSpPr/>
-          <p:nvPr/>
-        </p:nvSpPr>
-        <p:spPr>
-          <a:xfrm>
-            <a:off x="7315200" y="3830030"/>
-            <a:ext cx="4160520" cy="542109"/>
-          </a:xfrm>
-          <a:prstGeom prst="rect">
-            <a:avLst/>
-          </a:prstGeom>
-          <a:noFill/>
-          <a:ln/>
-        </p:spPr>
-        <p:txBody>
-          <a:bodyPr wrap="square" lIns="0" tIns="0" rIns="0" bIns="0" rtlCol="0" anchor="ctr"/>
-          <a:lstStyle/>
-          <a:p>
-            <a:pPr indent="0" marL="0">
-              <a:lnSpc>
-                <a:spcPts val="1100"/>
-              </a:lnSpc>
-              <a:buNone/>
-            </a:pPr>
-            <a:r>
-              <a:rPr lang="en-US" sz="850" dirty="0">
-                <a:solidFill>
-                  <a:srgbClr val="4A5262"/>
-                </a:solidFill>
-                <a:latin typeface="맑은 고딕" pitchFamily="34" charset="0"/>
-                <a:ea typeface="맑은 고딕" pitchFamily="34" charset="-122"/>
-                <a:cs typeface="맑은 고딕" pitchFamily="34" charset="-120"/>
-              </a:rPr>
-              <a:t>4K 렌더와 로컬 추론을 우리 안에서 돌리기 위한 장비다. 정부지원금의 37.5%로 50% 선(1,600만원) 아래라 공문 승인 대상은 아니다.  </a:t>
-            </a:r>
-            <a:pPr indent="0" marL="0">
-              <a:lnSpc>
-                <a:spcPts val="1100"/>
-              </a:lnSpc>
-              <a:buNone/>
-            </a:pPr>
-            <a:r>
-              <a:rPr lang="en-US" sz="850" b="1" dirty="0">
-                <a:solidFill>
-                  <a:srgbClr val="B0442C"/>
-                </a:solidFill>
-                <a:latin typeface="맑은 고딕" pitchFamily="34" charset="0"/>
-                <a:ea typeface="맑은 고딕" pitchFamily="34" charset="-122"/>
-                <a:cs typeface="맑은 고딕" pitchFamily="34" charset="-120"/>
-              </a:rPr>
-              <a:t>사서 렌탈로 처리하는 것은 불가. 임차료 증빙에 반납증명서가 들어가고 총 임차기간이 협약기간을 넘길 수 없다. 실제 렌탈업체와 임대차계약을 맺어야 한다.</a:t>
-            </a:r>
-            <a:endParaRPr lang="en-US" sz="850" dirty="0"/>
-          </a:p>
-        </p:txBody>
-      </p:sp>
-      <p:sp>
-        <p:nvSpPr>
-          <p:cNvPr id="33" name="Shape 31"/>
-          <p:cNvSpPr/>
-          <p:nvPr/>
-        </p:nvSpPr>
-        <p:spPr>
-          <a:xfrm>
-            <a:off x="685800" y="4408714"/>
-            <a:ext cx="10789920" cy="0"/>
-          </a:xfrm>
-          <a:prstGeom prst="line">
-            <a:avLst/>
-          </a:prstGeom>
-          <a:noFill/>
-          <a:ln w="12700">
-            <a:solidFill>
-              <a:srgbClr val="DFE3EA"/>
-            </a:solidFill>
-            <a:prstDash val="solid"/>
-          </a:ln>
-        </p:spPr>
-      </p:sp>
-      <p:sp>
-        <p:nvSpPr>
-          <p:cNvPr id="34" name="Text 32"/>
-          <p:cNvSpPr/>
-          <p:nvPr/>
-        </p:nvSpPr>
-        <p:spPr>
-          <a:xfrm>
-            <a:off x="685800" y="4481866"/>
-            <a:ext cx="2377440" cy="292608"/>
-          </a:xfrm>
-          <a:prstGeom prst="rect">
-            <a:avLst/>
-          </a:prstGeom>
-          <a:noFill/>
-          <a:ln/>
-        </p:spPr>
-        <p:txBody>
-          <a:bodyPr wrap="square" lIns="0" tIns="0" rIns="0" bIns="0" rtlCol="0" anchor="t"/>
-          <a:lstStyle/>
-          <a:p>
-            <a:pPr indent="0" marL="0">
-              <a:buNone/>
-            </a:pPr>
-            <a:r>
-              <a:rPr lang="en-US" sz="850" dirty="0">
-                <a:solidFill>
-                  <a:srgbClr val="4A5262"/>
-                </a:solidFill>
-                <a:latin typeface="맑은 고딕" pitchFamily="34" charset="0"/>
-                <a:ea typeface="맑은 고딕" pitchFamily="34" charset="-122"/>
-                <a:cs typeface="맑은 고딕" pitchFamily="34" charset="-120"/>
-              </a:rPr>
-              <a:t>운영비(210)-일반수용비(01)</a:t>
-            </a:r>
-            <a:endParaRPr lang="en-US" sz="850" dirty="0"/>
-          </a:p>
-        </p:txBody>
-      </p:sp>
-      <p:sp>
-        <p:nvSpPr>
-          <p:cNvPr id="35" name="Text 33"/>
-          <p:cNvSpPr/>
-          <p:nvPr/>
-        </p:nvSpPr>
-        <p:spPr>
-          <a:xfrm>
-            <a:off x="3108960" y="4481866"/>
-            <a:ext cx="1371600" cy="292608"/>
-          </a:xfrm>
-          <a:prstGeom prst="rect">
-            <a:avLst/>
-          </a:prstGeom>
-          <a:noFill/>
-          <a:ln/>
-        </p:spPr>
-        <p:txBody>
-          <a:bodyPr wrap="square" lIns="0" tIns="0" rIns="0" bIns="0" rtlCol="0" anchor="t"/>
-          <a:lstStyle/>
-          <a:p>
-            <a:pPr indent="0" marL="0">
-              <a:buNone/>
-            </a:pPr>
-            <a:r>
-              <a:rPr lang="en-US" sz="950" b="1" dirty="0">
-                <a:solidFill>
-                  <a:srgbClr val="101B33"/>
-                </a:solidFill>
-                <a:latin typeface="맑은 고딕" pitchFamily="34" charset="0"/>
-                <a:ea typeface="맑은 고딕" pitchFamily="34" charset="-122"/>
-                <a:cs typeface="맑은 고딕" pitchFamily="34" charset="-120"/>
-              </a:rPr>
-              <a:t>수수료및사용료</a:t>
-            </a:r>
-            <a:endParaRPr lang="en-US" sz="950" dirty="0"/>
-          </a:p>
-        </p:txBody>
-      </p:sp>
-      <p:sp>
-        <p:nvSpPr>
-          <p:cNvPr id="36" name="Text 34"/>
-          <p:cNvSpPr/>
-          <p:nvPr/>
-        </p:nvSpPr>
-        <p:spPr>
-          <a:xfrm>
-            <a:off x="4526280" y="4481866"/>
-            <a:ext cx="2743200" cy="292608"/>
-          </a:xfrm>
-          <a:prstGeom prst="rect">
-            <a:avLst/>
-          </a:prstGeom>
-          <a:noFill/>
-          <a:ln/>
-        </p:spPr>
-        <p:txBody>
-          <a:bodyPr wrap="square" lIns="0" tIns="0" rIns="0" bIns="0" rtlCol="0" anchor="t"/>
-          <a:lstStyle/>
-          <a:p>
-            <a:pPr indent="0" marL="0">
-              <a:buNone/>
-            </a:pPr>
-            <a:r>
-              <a:rPr lang="en-US" sz="950" b="1" dirty="0">
-                <a:solidFill>
-                  <a:srgbClr val="B0442C"/>
-                </a:solidFill>
-                <a:latin typeface="맑은 고딕" pitchFamily="34" charset="0"/>
-                <a:ea typeface="맑은 고딕" pitchFamily="34" charset="-122"/>
-                <a:cs typeface="맑은 고딕" pitchFamily="34" charset="-120"/>
-              </a:rPr>
-              <a:t>AI 구독비 · 라이선스</a:t>
-            </a:r>
-            <a:endParaRPr lang="en-US" sz="950" dirty="0"/>
-          </a:p>
-        </p:txBody>
-      </p:sp>
-      <p:sp>
-        <p:nvSpPr>
-          <p:cNvPr id="37" name="Text 35"/>
-          <p:cNvSpPr/>
-          <p:nvPr/>
-        </p:nvSpPr>
-        <p:spPr>
-          <a:xfrm>
-            <a:off x="4526280" y="4756186"/>
-            <a:ext cx="2743200" cy="237744"/>
-          </a:xfrm>
-          <a:prstGeom prst="rect">
-            <a:avLst/>
-          </a:prstGeom>
-          <a:noFill/>
-          <a:ln/>
-        </p:spPr>
-        <p:txBody>
-          <a:bodyPr wrap="square" lIns="0" tIns="0" rIns="0" bIns="0" rtlCol="0" anchor="t"/>
-          <a:lstStyle/>
-          <a:p>
-            <a:pPr indent="0" marL="0">
-              <a:buNone/>
-            </a:pPr>
-            <a:r>
-              <a:rPr lang="en-US" sz="1200" b="1" dirty="0">
-                <a:solidFill>
-                  <a:srgbClr val="0075C9"/>
-                </a:solidFill>
-                <a:latin typeface="맑은 고딕" pitchFamily="34" charset="0"/>
-                <a:ea typeface="맑은 고딕" pitchFamily="34" charset="-122"/>
-                <a:cs typeface="맑은 고딕" pitchFamily="34" charset="-120"/>
-              </a:rPr>
-              <a:t>480만원</a:t>
-            </a:r>
-            <a:endParaRPr lang="en-US" sz="1200" dirty="0"/>
-          </a:p>
-        </p:txBody>
-      </p:sp>
-      <p:sp>
-        <p:nvSpPr>
-          <p:cNvPr id="38" name="Text 36"/>
-          <p:cNvSpPr/>
-          <p:nvPr/>
-        </p:nvSpPr>
-        <p:spPr>
-          <a:xfrm>
-            <a:off x="7315200" y="4463578"/>
-            <a:ext cx="4160520" cy="542109"/>
-          </a:xfrm>
-          <a:prstGeom prst="rect">
-            <a:avLst/>
-          </a:prstGeom>
-          <a:noFill/>
-          <a:ln/>
-        </p:spPr>
-        <p:txBody>
-          <a:bodyPr wrap="square" lIns="0" tIns="0" rIns="0" bIns="0" rtlCol="0" anchor="ctr"/>
-          <a:lstStyle/>
-          <a:p>
-            <a:pPr indent="0" marL="0">
-              <a:lnSpc>
-                <a:spcPts val="1100"/>
-              </a:lnSpc>
-              <a:buNone/>
-            </a:pPr>
-            <a:r>
-              <a:rPr lang="en-US" sz="850" dirty="0">
-                <a:solidFill>
-                  <a:srgbClr val="4A5262"/>
-                </a:solidFill>
-                <a:latin typeface="맑은 고딕" pitchFamily="34" charset="0"/>
-                <a:ea typeface="맑은 고딕" pitchFamily="34" charset="-122"/>
-                <a:cs typeface="맑은 고딕" pitchFamily="34" charset="-120"/>
-              </a:rPr>
-              <a:t>협약기간 이내분만 인정되므로 연 결제 대신 월 결제로 끊는다.  </a:t>
-            </a:r>
-            <a:pPr indent="0" marL="0">
-              <a:lnSpc>
-                <a:spcPts val="1100"/>
-              </a:lnSpc>
-              <a:buNone/>
-            </a:pPr>
-            <a:r>
-              <a:rPr lang="en-US" sz="850" b="1" dirty="0">
-                <a:solidFill>
-                  <a:srgbClr val="B0442C"/>
-                </a:solidFill>
-                <a:latin typeface="맑은 고딕" pitchFamily="34" charset="0"/>
-                <a:ea typeface="맑은 고딕" pitchFamily="34" charset="-122"/>
-                <a:cs typeface="맑은 고딕" pitchFamily="34" charset="-120"/>
-              </a:rPr>
-              <a:t>해외 결제 주의. 국외 업체와의 직접 거래는 집행 불가라 국내 총판·리셀러를 통해 전자세금계산서를 받아야 한다.</a:t>
-            </a:r>
-            <a:endParaRPr lang="en-US" sz="850" dirty="0"/>
-          </a:p>
-        </p:txBody>
-      </p:sp>
-      <p:sp>
-        <p:nvSpPr>
-          <p:cNvPr id="39" name="Shape 37"/>
-          <p:cNvSpPr/>
-          <p:nvPr/>
-        </p:nvSpPr>
-        <p:spPr>
-          <a:xfrm>
-            <a:off x="685800" y="5042263"/>
-            <a:ext cx="10789920" cy="0"/>
-          </a:xfrm>
-          <a:prstGeom prst="line">
-            <a:avLst/>
-          </a:prstGeom>
-          <a:noFill/>
-          <a:ln w="12700">
-            <a:solidFill>
-              <a:srgbClr val="DFE3EA"/>
-            </a:solidFill>
-            <a:prstDash val="solid"/>
-          </a:ln>
-        </p:spPr>
-      </p:sp>
-      <p:sp>
-        <p:nvSpPr>
-          <p:cNvPr id="40" name="Text 38"/>
-          <p:cNvSpPr/>
-          <p:nvPr/>
-        </p:nvSpPr>
-        <p:spPr>
-          <a:xfrm>
-            <a:off x="685800" y="5115415"/>
-            <a:ext cx="2377440" cy="292608"/>
-          </a:xfrm>
-          <a:prstGeom prst="rect">
-            <a:avLst/>
-          </a:prstGeom>
-          <a:noFill/>
-          <a:ln/>
-        </p:spPr>
-        <p:txBody>
-          <a:bodyPr wrap="square" lIns="0" tIns="0" rIns="0" bIns="0" rtlCol="0" anchor="t"/>
-          <a:lstStyle/>
-          <a:p>
-            <a:pPr indent="0" marL="0">
-              <a:buNone/>
-            </a:pPr>
-            <a:r>
-              <a:rPr lang="en-US" sz="850" dirty="0">
-                <a:solidFill>
-                  <a:srgbClr val="4A5262"/>
-                </a:solidFill>
-                <a:latin typeface="맑은 고딕" pitchFamily="34" charset="0"/>
-                <a:ea typeface="맑은 고딕" pitchFamily="34" charset="-122"/>
-                <a:cs typeface="맑은 고딕" pitchFamily="34" charset="-120"/>
-              </a:rPr>
-              <a:t>운영비(210)-일반수용비(01)</a:t>
-            </a:r>
-            <a:endParaRPr lang="en-US" sz="850" dirty="0"/>
-          </a:p>
-        </p:txBody>
-      </p:sp>
-      <p:sp>
-        <p:nvSpPr>
-          <p:cNvPr id="41" name="Text 39"/>
-          <p:cNvSpPr/>
-          <p:nvPr/>
-        </p:nvSpPr>
-        <p:spPr>
-          <a:xfrm>
-            <a:off x="3108960" y="5115415"/>
-            <a:ext cx="1371600" cy="292608"/>
-          </a:xfrm>
-          <a:prstGeom prst="rect">
-            <a:avLst/>
-          </a:prstGeom>
-          <a:noFill/>
-          <a:ln/>
-        </p:spPr>
-        <p:txBody>
-          <a:bodyPr wrap="square" lIns="0" tIns="0" rIns="0" bIns="0" rtlCol="0" anchor="t"/>
-          <a:lstStyle/>
-          <a:p>
-            <a:pPr indent="0" marL="0">
-              <a:buNone/>
-            </a:pPr>
-            <a:r>
-              <a:rPr lang="en-US" sz="950" b="1" dirty="0">
-                <a:solidFill>
-                  <a:srgbClr val="101B33"/>
-                </a:solidFill>
-                <a:latin typeface="맑은 고딕" pitchFamily="34" charset="0"/>
-                <a:ea typeface="맑은 고딕" pitchFamily="34" charset="-122"/>
-                <a:cs typeface="맑은 고딕" pitchFamily="34" charset="-120"/>
-              </a:rPr>
-              <a:t>수수료및사용료</a:t>
-            </a:r>
-            <a:endParaRPr lang="en-US" sz="950" dirty="0"/>
-          </a:p>
-        </p:txBody>
-      </p:sp>
-      <p:sp>
-        <p:nvSpPr>
-          <p:cNvPr id="42" name="Text 40"/>
-          <p:cNvSpPr/>
-          <p:nvPr/>
-        </p:nvSpPr>
-        <p:spPr>
-          <a:xfrm>
-            <a:off x="4526280" y="5115415"/>
-            <a:ext cx="2743200" cy="292608"/>
-          </a:xfrm>
-          <a:prstGeom prst="rect">
-            <a:avLst/>
-          </a:prstGeom>
-          <a:noFill/>
-          <a:ln/>
-        </p:spPr>
-        <p:txBody>
-          <a:bodyPr wrap="square" lIns="0" tIns="0" rIns="0" bIns="0" rtlCol="0" anchor="t"/>
-          <a:lstStyle/>
-          <a:p>
-            <a:pPr indent="0" marL="0">
-              <a:buNone/>
-            </a:pPr>
-            <a:r>
-              <a:rPr lang="en-US" sz="950" b="1" dirty="0">
-                <a:solidFill>
-                  <a:srgbClr val="1C2536"/>
-                </a:solidFill>
-                <a:latin typeface="맑은 고딕" pitchFamily="34" charset="0"/>
-                <a:ea typeface="맑은 고딕" pitchFamily="34" charset="-122"/>
-                <a:cs typeface="맑은 고딕" pitchFamily="34" charset="-120"/>
-              </a:rPr>
-              <a:t>산업재산권 출원등록</a:t>
-            </a:r>
-            <a:endParaRPr lang="en-US" sz="950" dirty="0"/>
-          </a:p>
-        </p:txBody>
-      </p:sp>
-      <p:sp>
-        <p:nvSpPr>
-          <p:cNvPr id="43" name="Text 41"/>
-          <p:cNvSpPr/>
-          <p:nvPr/>
-        </p:nvSpPr>
-        <p:spPr>
-          <a:xfrm>
-            <a:off x="4526280" y="5389735"/>
-            <a:ext cx="2743200" cy="237744"/>
-          </a:xfrm>
-          <a:prstGeom prst="rect">
-            <a:avLst/>
-          </a:prstGeom>
-          <a:noFill/>
-          <a:ln/>
-        </p:spPr>
-        <p:txBody>
-          <a:bodyPr wrap="square" lIns="0" tIns="0" rIns="0" bIns="0" rtlCol="0" anchor="t"/>
-          <a:lstStyle/>
-          <a:p>
-            <a:pPr indent="0" marL="0">
-              <a:buNone/>
-            </a:pPr>
-            <a:r>
-              <a:rPr lang="en-US" sz="1200" b="1" dirty="0">
-                <a:solidFill>
-                  <a:srgbClr val="0075C9"/>
-                </a:solidFill>
-                <a:latin typeface="맑은 고딕" pitchFamily="34" charset="0"/>
-                <a:ea typeface="맑은 고딕" pitchFamily="34" charset="-122"/>
-                <a:cs typeface="맑은 고딕" pitchFamily="34" charset="-120"/>
-              </a:rPr>
-              <a:t>120만원</a:t>
-            </a:r>
-            <a:endParaRPr lang="en-US" sz="1200" dirty="0"/>
-          </a:p>
-        </p:txBody>
-      </p:sp>
-      <p:sp>
-        <p:nvSpPr>
-          <p:cNvPr id="44" name="Text 42"/>
-          <p:cNvSpPr/>
-          <p:nvPr/>
-        </p:nvSpPr>
-        <p:spPr>
-          <a:xfrm>
-            <a:off x="7315200" y="5097127"/>
-            <a:ext cx="4160520" cy="542109"/>
-          </a:xfrm>
-          <a:prstGeom prst="rect">
-            <a:avLst/>
-          </a:prstGeom>
-          <a:noFill/>
-          <a:ln/>
-        </p:spPr>
-        <p:txBody>
-          <a:bodyPr wrap="square" lIns="0" tIns="0" rIns="0" bIns="0" rtlCol="0" anchor="ctr"/>
-          <a:lstStyle/>
-          <a:p>
-            <a:pPr indent="0" marL="0">
-              <a:lnSpc>
-                <a:spcPts val="1100"/>
-              </a:lnSpc>
-              <a:buNone/>
-            </a:pPr>
-            <a:r>
-              <a:rPr lang="en-US" sz="850" dirty="0">
-                <a:solidFill>
-                  <a:srgbClr val="4A5262"/>
-                </a:solidFill>
-                <a:latin typeface="맑은 고딕" pitchFamily="34" charset="0"/>
-                <a:ea typeface="맑은 고딕" pitchFamily="34" charset="-122"/>
-                <a:cs typeface="맑은 고딕" pitchFamily="34" charset="-120"/>
-              </a:rPr>
-              <a:t>협약기간 안에 출원·취득이 가능한 건만 집행할 수 있다.</a:t>
-            </a:r>
-            <a:endParaRPr lang="en-US" sz="850" dirty="0"/>
-          </a:p>
-        </p:txBody>
-      </p:sp>
-      <p:sp>
-        <p:nvSpPr>
-          <p:cNvPr id="45" name="Shape 43"/>
-          <p:cNvSpPr/>
-          <p:nvPr/>
-        </p:nvSpPr>
-        <p:spPr>
-          <a:xfrm>
-            <a:off x="685800" y="5675811"/>
-            <a:ext cx="10789920" cy="0"/>
-          </a:xfrm>
-          <a:prstGeom prst="line">
-            <a:avLst/>
-          </a:prstGeom>
-          <a:noFill/>
-          <a:ln w="12700">
-            <a:solidFill>
-              <a:srgbClr val="DFE3EA"/>
-            </a:solidFill>
-            <a:prstDash val="solid"/>
-          </a:ln>
-        </p:spPr>
-      </p:sp>
-      <p:sp>
-        <p:nvSpPr>
-          <p:cNvPr id="46" name="Text 44"/>
-          <p:cNvSpPr/>
-          <p:nvPr/>
-        </p:nvSpPr>
-        <p:spPr>
-          <a:xfrm>
-            <a:off x="685800" y="5748963"/>
-            <a:ext cx="2377440" cy="292608"/>
-          </a:xfrm>
-          <a:prstGeom prst="rect">
-            <a:avLst/>
-          </a:prstGeom>
-          <a:noFill/>
-          <a:ln/>
-        </p:spPr>
-        <p:txBody>
-          <a:bodyPr wrap="square" lIns="0" tIns="0" rIns="0" bIns="0" rtlCol="0" anchor="t"/>
-          <a:lstStyle/>
-          <a:p>
-            <a:pPr indent="0" marL="0">
-              <a:buNone/>
-            </a:pPr>
-            <a:r>
-              <a:rPr lang="en-US" sz="850" dirty="0">
-                <a:solidFill>
-                  <a:srgbClr val="4A5262"/>
-                </a:solidFill>
-                <a:latin typeface="맑은 고딕" pitchFamily="34" charset="0"/>
-                <a:ea typeface="맑은 고딕" pitchFamily="34" charset="-122"/>
-                <a:cs typeface="맑은 고딕" pitchFamily="34" charset="-120"/>
-              </a:rPr>
-              <a:t>운영비(210)-재료비(11)</a:t>
-            </a:r>
-            <a:endParaRPr lang="en-US" sz="850" dirty="0"/>
-          </a:p>
-        </p:txBody>
-      </p:sp>
-      <p:sp>
-        <p:nvSpPr>
-          <p:cNvPr id="47" name="Text 45"/>
-          <p:cNvSpPr/>
-          <p:nvPr/>
-        </p:nvSpPr>
-        <p:spPr>
-          <a:xfrm>
-            <a:off x="3108960" y="5748963"/>
-            <a:ext cx="1371600" cy="292608"/>
-          </a:xfrm>
-          <a:prstGeom prst="rect">
-            <a:avLst/>
-          </a:prstGeom>
-          <a:noFill/>
-          <a:ln/>
-        </p:spPr>
-        <p:txBody>
-          <a:bodyPr wrap="square" lIns="0" tIns="0" rIns="0" bIns="0" rtlCol="0" anchor="t"/>
-          <a:lstStyle/>
-          <a:p>
-            <a:pPr indent="0" marL="0">
-              <a:buNone/>
-            </a:pPr>
-            <a:r>
-              <a:rPr lang="en-US" sz="950" b="1" dirty="0">
-                <a:solidFill>
-                  <a:srgbClr val="101B33"/>
-                </a:solidFill>
-                <a:latin typeface="맑은 고딕" pitchFamily="34" charset="0"/>
-                <a:ea typeface="맑은 고딕" pitchFamily="34" charset="-122"/>
-                <a:cs typeface="맑은 고딕" pitchFamily="34" charset="-120"/>
-              </a:rPr>
-              <a:t>재료구입비</a:t>
-            </a:r>
-            <a:endParaRPr lang="en-US" sz="950" dirty="0"/>
-          </a:p>
-        </p:txBody>
-      </p:sp>
-      <p:sp>
-        <p:nvSpPr>
-          <p:cNvPr id="48" name="Text 46"/>
-          <p:cNvSpPr/>
-          <p:nvPr/>
-        </p:nvSpPr>
-        <p:spPr>
-          <a:xfrm>
-            <a:off x="4526280" y="5748963"/>
-            <a:ext cx="2743200" cy="292608"/>
-          </a:xfrm>
-          <a:prstGeom prst="rect">
-            <a:avLst/>
-          </a:prstGeom>
-          <a:noFill/>
-          <a:ln/>
-        </p:spPr>
-        <p:txBody>
-          <a:bodyPr wrap="square" lIns="0" tIns="0" rIns="0" bIns="0" rtlCol="0" anchor="t"/>
-          <a:lstStyle/>
-          <a:p>
-            <a:pPr indent="0" marL="0">
-              <a:buNone/>
-            </a:pPr>
-            <a:r>
-              <a:rPr lang="en-US" sz="950" b="1" dirty="0">
-                <a:solidFill>
-                  <a:srgbClr val="1C2536"/>
-                </a:solidFill>
-                <a:latin typeface="맑은 고딕" pitchFamily="34" charset="0"/>
-                <a:ea typeface="맑은 고딕" pitchFamily="34" charset="-122"/>
-                <a:cs typeface="맑은 고딕" pitchFamily="34" charset="-120"/>
-              </a:rPr>
-              <a:t>실증 재료 · 데이터셋</a:t>
-            </a:r>
-            <a:endParaRPr lang="en-US" sz="950" dirty="0"/>
-          </a:p>
-        </p:txBody>
-      </p:sp>
-      <p:sp>
-        <p:nvSpPr>
-          <p:cNvPr id="49" name="Text 47"/>
-          <p:cNvSpPr/>
-          <p:nvPr/>
-        </p:nvSpPr>
-        <p:spPr>
-          <a:xfrm>
-            <a:off x="4526280" y="6023283"/>
-            <a:ext cx="2743200" cy="237744"/>
-          </a:xfrm>
-          <a:prstGeom prst="rect">
-            <a:avLst/>
-          </a:prstGeom>
-          <a:noFill/>
-          <a:ln/>
-        </p:spPr>
-        <p:txBody>
-          <a:bodyPr wrap="square" lIns="0" tIns="0" rIns="0" bIns="0" rtlCol="0" anchor="t"/>
-          <a:lstStyle/>
-          <a:p>
-            <a:pPr indent="0" marL="0">
-              <a:buNone/>
-            </a:pPr>
-            <a:r>
-              <a:rPr lang="en-US" sz="1200" b="1" dirty="0">
-                <a:solidFill>
-                  <a:srgbClr val="0075C9"/>
-                </a:solidFill>
-                <a:latin typeface="맑은 고딕" pitchFamily="34" charset="0"/>
-                <a:ea typeface="맑은 고딕" pitchFamily="34" charset="-122"/>
-                <a:cs typeface="맑은 고딕" pitchFamily="34" charset="-120"/>
-              </a:rPr>
-              <a:t>100만원</a:t>
-            </a:r>
-            <a:endParaRPr lang="en-US" sz="1200" dirty="0"/>
-          </a:p>
-        </p:txBody>
-      </p:sp>
-      <p:sp>
-        <p:nvSpPr>
-          <p:cNvPr id="50" name="Text 48"/>
-          <p:cNvSpPr/>
-          <p:nvPr/>
-        </p:nvSpPr>
-        <p:spPr>
-          <a:xfrm>
-            <a:off x="7315200" y="5730675"/>
-            <a:ext cx="4160520" cy="542109"/>
-          </a:xfrm>
-          <a:prstGeom prst="rect">
-            <a:avLst/>
-          </a:prstGeom>
-          <a:noFill/>
-          <a:ln/>
-        </p:spPr>
-        <p:txBody>
-          <a:bodyPr wrap="square" lIns="0" tIns="0" rIns="0" bIns="0" rtlCol="0" anchor="ctr"/>
-          <a:lstStyle/>
-          <a:p>
-            <a:pPr indent="0" marL="0">
-              <a:lnSpc>
-                <a:spcPts val="1100"/>
-              </a:lnSpc>
-              <a:buNone/>
-            </a:pPr>
-            <a:r>
-              <a:rPr lang="en-US" sz="850" dirty="0">
-                <a:solidFill>
-                  <a:srgbClr val="4A5262"/>
-                </a:solidFill>
-                <a:latin typeface="맑은 고딕" pitchFamily="34" charset="0"/>
-                <a:ea typeface="맑은 고딕" pitchFamily="34" charset="-122"/>
-                <a:cs typeface="맑은 고딕" pitchFamily="34" charset="-120"/>
-              </a:rPr>
-              <a:t>데이터 등 무형 재료도 재료비다. 품목당 구매합계 100만원 이상이면 비교견적서가 필요하다.</a:t>
-            </a:r>
-            <a:endParaRPr lang="en-US" sz="850" dirty="0"/>
-          </a:p>
-        </p:txBody>
-      </p:sp>
-      <p:sp>
-        <p:nvSpPr>
-          <p:cNvPr id="51" name="Shape 49"/>
-          <p:cNvSpPr/>
-          <p:nvPr/>
-        </p:nvSpPr>
-        <p:spPr>
-          <a:xfrm>
-            <a:off x="685800" y="6309360"/>
-            <a:ext cx="10789920" cy="0"/>
-          </a:xfrm>
-          <a:prstGeom prst="line">
-            <a:avLst/>
-          </a:prstGeom>
-          <a:noFill/>
-          <a:ln w="12700">
-            <a:solidFill>
-              <a:srgbClr val="DFE3EA"/>
-            </a:solidFill>
-            <a:prstDash val="solid"/>
-          </a:ln>
-        </p:spPr>
-      </p:sp>
-      <p:sp>
-        <p:nvSpPr>
-          <p:cNvPr id="52" name="Text 50"/>
-          <p:cNvSpPr/>
-          <p:nvPr/>
-        </p:nvSpPr>
-        <p:spPr>
-          <a:xfrm>
-            <a:off x="11155680" y="6291072"/>
-            <a:ext cx="548640" cy="274320"/>
-          </a:xfrm>
-          <a:prstGeom prst="rect">
-            <a:avLst/>
-          </a:prstGeom>
-          <a:noFill/>
-          <a:ln/>
-        </p:spPr>
-        <p:txBody>
-          <a:bodyPr wrap="square" lIns="0" tIns="0" rIns="0" bIns="0" rtlCol="0" anchor="ctr"/>
-          <a:lstStyle/>
-          <a:p>
-            <a:pPr algn="r" indent="0" marL="0">
-              <a:buNone/>
-            </a:pPr>
-            <a:r>
-              <a:rPr lang="en-US" sz="1000" dirty="0">
-                <a:solidFill>
-                  <a:srgbClr val="9AA3B0"/>
-                </a:solidFill>
-                <a:latin typeface="맑은 고딕" pitchFamily="34" charset="0"/>
-                <a:ea typeface="맑은 고딕" pitchFamily="34" charset="-122"/>
-                <a:cs typeface="맑은 고딕" pitchFamily="34" charset="-120"/>
-              </a:rPr>
-              <a:t>15</a:t>
-            </a:r>
-            <a:endParaRPr lang="en-US" sz="1000" dirty="0"/>
-          </a:p>
-        </p:txBody>
-      </p:sp>
-    </p:spTree>
-  </p:cSld>
-  <p:clrMapOvr>
-    <a:masterClrMapping/>
-  </p:clrMapOvr>
-</p:sld>
-</file>
-
-<file path=ppt/slides/slide16.xml><?xml version="1.0" encoding="utf-8"?>
-<p:sld xmlns:a="http://schemas.openxmlformats.org/drawingml/2006/main" xmlns:r="http://schemas.openxmlformats.org/officeDocument/2006/relationships" xmlns:p="http://schemas.openxmlformats.org/presentationml/2006/main">
-  <p:cSld name="Slide 16">
-    <p:bg>
-      <p:bgPr>
-        <a:solidFill>
-          <a:srgbClr val="FFFFFF"/>
-        </a:solidFill>
-      </p:bgPr>
-    </p:bg>
-    <p:spTree>
-      <p:nvGrpSpPr>
-        <p:cNvPr id="1" name=""/>
-        <p:cNvGrpSpPr/>
-        <p:nvPr/>
-      </p:nvGrpSpPr>
-      <p:grpSpPr>
-        <a:xfrm>
-          <a:off x="0" y="0"/>
-          <a:ext cx="0" cy="0"/>
-          <a:chOff x="0" y="0"/>
-          <a:chExt cx="0" cy="0"/>
-        </a:xfrm>
-      </p:grpSpPr>
-      <p:sp>
-        <p:nvSpPr>
-          <p:cNvPr id="2" name="Text 0"/>
-          <p:cNvSpPr/>
-          <p:nvPr/>
-        </p:nvSpPr>
-        <p:spPr>
-          <a:xfrm>
-            <a:off x="640080" y="457200"/>
-            <a:ext cx="7315200" cy="274320"/>
-          </a:xfrm>
-          <a:prstGeom prst="rect">
-            <a:avLst/>
-          </a:prstGeom>
-          <a:noFill/>
-          <a:ln/>
-        </p:spPr>
-        <p:txBody>
-          <a:bodyPr wrap="square" lIns="0" tIns="0" rIns="0" bIns="0" rtlCol="0" anchor="ctr"/>
-          <a:lstStyle/>
-          <a:p>
-            <a:pPr indent="0" marL="0">
-              <a:buNone/>
-            </a:pPr>
-            <a:r>
-              <a:rPr lang="en-US" sz="1200" b="1" spc="200" kern="0" dirty="0">
-                <a:solidFill>
-                  <a:srgbClr val="0075C9"/>
-                </a:solidFill>
-                <a:latin typeface="맑은 고딕" pitchFamily="34" charset="0"/>
-                <a:ea typeface="맑은 고딕" pitchFamily="34" charset="-122"/>
-                <a:cs typeface="맑은 고딕" pitchFamily="34" charset="-120"/>
-              </a:rPr>
-              <a:t>BUDGET · 대응자금</a:t>
-            </a:r>
-            <a:endParaRPr lang="en-US" sz="1200" dirty="0"/>
-          </a:p>
-        </p:txBody>
-      </p:sp>
-      <p:sp>
-        <p:nvSpPr>
-          <p:cNvPr id="3" name="Text 1"/>
-          <p:cNvSpPr/>
-          <p:nvPr/>
-        </p:nvSpPr>
-        <p:spPr>
-          <a:xfrm>
-            <a:off x="640080" y="749808"/>
-            <a:ext cx="8412480" cy="932688"/>
-          </a:xfrm>
-          <a:prstGeom prst="rect">
-            <a:avLst/>
-          </a:prstGeom>
-          <a:noFill/>
-          <a:ln/>
-        </p:spPr>
-        <p:txBody>
-          <a:bodyPr wrap="square" lIns="0" tIns="0" rIns="0" bIns="0" rtlCol="0" anchor="t"/>
-          <a:lstStyle/>
-          <a:p>
-            <a:pPr indent="0" marL="0">
-              <a:buNone/>
-            </a:pPr>
-            <a:r>
-              <a:rPr lang="en-US" sz="3000" b="1" dirty="0">
-                <a:solidFill>
-                  <a:srgbClr val="101B33"/>
-                </a:solidFill>
-                <a:latin typeface="맑은 고딕" pitchFamily="34" charset="0"/>
-                <a:ea typeface="맑은 고딕" pitchFamily="34" charset="-122"/>
-                <a:cs typeface="맑은 고딕" pitchFamily="34" charset="-120"/>
-              </a:rPr>
-              <a:t>20%는 현물로 채운다</a:t>
-            </a:r>
-            <a:endParaRPr lang="en-US" sz="3000" dirty="0"/>
-          </a:p>
-        </p:txBody>
-      </p:sp>
-      <p:sp>
-        <p:nvSpPr>
-          <p:cNvPr id="4" name="Text 2"/>
-          <p:cNvSpPr/>
-          <p:nvPr/>
-        </p:nvSpPr>
-        <p:spPr>
-          <a:xfrm>
-            <a:off x="640080" y="1783080"/>
-            <a:ext cx="10881360" cy="274320"/>
-          </a:xfrm>
-          <a:prstGeom prst="rect">
-            <a:avLst/>
-          </a:prstGeom>
-          <a:noFill/>
-          <a:ln/>
-        </p:spPr>
-        <p:txBody>
-          <a:bodyPr wrap="square" lIns="0" tIns="0" rIns="0" bIns="0" rtlCol="0" anchor="ctr"/>
-          <a:lstStyle/>
-          <a:p>
-            <a:pPr indent="0" marL="0">
-              <a:buNone/>
-            </a:pPr>
-            <a:r>
-              <a:rPr lang="en-US" sz="1100" dirty="0">
-                <a:solidFill>
-                  <a:srgbClr val="4A5262"/>
-                </a:solidFill>
-                <a:latin typeface="맑은 고딕" pitchFamily="34" charset="0"/>
-                <a:ea typeface="맑은 고딕" pitchFamily="34" charset="-122"/>
-                <a:cs typeface="맑은 고딕" pitchFamily="34" charset="-120"/>
-              </a:rPr>
-              <a:t>대응자금은 100% 소진이 필수이며, 계획에 대해 주관기관 사전 승인이 필요하다.</a:t>
-            </a:r>
-            <a:endParaRPr lang="en-US" sz="1100" dirty="0"/>
-          </a:p>
-        </p:txBody>
-      </p:sp>
-      <p:sp>
-        <p:nvSpPr>
-          <p:cNvPr id="5" name="Shape 3"/>
-          <p:cNvSpPr/>
-          <p:nvPr/>
-        </p:nvSpPr>
-        <p:spPr>
-          <a:xfrm>
-            <a:off x="640080" y="2286000"/>
-            <a:ext cx="3520440" cy="1965960"/>
-          </a:xfrm>
-          <a:prstGeom prst="roundRect">
-            <a:avLst>
-              <a:gd name="adj" fmla="val 2791"/>
-            </a:avLst>
-          </a:prstGeom>
-          <a:solidFill>
-            <a:srgbClr val="FFFFFF"/>
-          </a:solidFill>
-          <a:ln w="12700">
-            <a:solidFill>
-              <a:srgbClr val="DFE3EA"/>
-            </a:solidFill>
-            <a:prstDash val="solid"/>
-          </a:ln>
-          <a:effectLst>
-            <a:outerShdw sx="100000" sy="100000" kx="0" ky="0" algn="bl" rotWithShape="0" blurRad="152400" dist="38100" dir="5400000">
-              <a:srgbClr val="101B33">
-                <a:alpha val="7000"/>
-              </a:srgbClr>
-            </a:outerShdw>
-          </a:effectLst>
-        </p:spPr>
-      </p:sp>
-      <p:sp>
-        <p:nvSpPr>
-          <p:cNvPr id="6" name="Shape 4"/>
-          <p:cNvSpPr/>
-          <p:nvPr/>
-        </p:nvSpPr>
-        <p:spPr>
-          <a:xfrm>
-            <a:off x="914400" y="2560320"/>
-            <a:ext cx="420624" cy="420624"/>
-          </a:xfrm>
-          <a:prstGeom prst="ellipse">
-            <a:avLst/>
-          </a:prstGeom>
-          <a:solidFill>
-            <a:srgbClr val="101B33"/>
-          </a:solidFill>
-          <a:ln w="12700">
-            <a:solidFill>
-              <a:srgbClr val="101B33"/>
-            </a:solidFill>
-            <a:prstDash val="solid"/>
-          </a:ln>
-        </p:spPr>
-      </p:sp>
-      <p:sp>
-        <p:nvSpPr>
-          <p:cNvPr id="7" name="Text 5"/>
-          <p:cNvSpPr/>
-          <p:nvPr/>
-        </p:nvSpPr>
-        <p:spPr>
-          <a:xfrm>
-            <a:off x="914400" y="2560320"/>
-            <a:ext cx="420624" cy="420624"/>
-          </a:xfrm>
-          <a:prstGeom prst="rect">
-            <a:avLst/>
-          </a:prstGeom>
-          <a:noFill/>
-          <a:ln/>
-        </p:spPr>
-        <p:txBody>
-          <a:bodyPr wrap="square" lIns="0" tIns="0" rIns="0" bIns="0" rtlCol="0" anchor="ctr"/>
-          <a:lstStyle/>
-          <a:p>
-            <a:pPr algn="ctr" indent="0" marL="0">
-              <a:buNone/>
-            </a:pPr>
-            <a:r>
-              <a:rPr lang="en-US" sz="1300" b="1" dirty="0">
-                <a:solidFill>
-                  <a:srgbClr val="FFFFFF"/>
-                </a:solidFill>
-                <a:latin typeface="맑은 고딕" pitchFamily="34" charset="0"/>
-                <a:ea typeface="맑은 고딕" pitchFamily="34" charset="-122"/>
-                <a:cs typeface="맑은 고딕" pitchFamily="34" charset="-120"/>
-              </a:rPr>
-              <a:t>01</a:t>
-            </a:r>
-            <a:endParaRPr lang="en-US" sz="1300" dirty="0"/>
-          </a:p>
-        </p:txBody>
-      </p:sp>
-      <p:sp>
-        <p:nvSpPr>
-          <p:cNvPr id="8" name="Text 6"/>
-          <p:cNvSpPr/>
-          <p:nvPr/>
-        </p:nvSpPr>
-        <p:spPr>
-          <a:xfrm>
-            <a:off x="914400" y="3090672"/>
-            <a:ext cx="2971800" cy="292608"/>
-          </a:xfrm>
-          <a:prstGeom prst="rect">
-            <a:avLst/>
-          </a:prstGeom>
-          <a:noFill/>
-          <a:ln/>
-        </p:spPr>
-        <p:txBody>
-          <a:bodyPr wrap="square" lIns="0" tIns="0" rIns="0" bIns="0" rtlCol="0" anchor="ctr"/>
-          <a:lstStyle/>
-          <a:p>
-            <a:pPr indent="0" marL="0">
-              <a:buNone/>
-            </a:pPr>
-            <a:r>
-              <a:rPr lang="en-US" sz="1400" b="1" dirty="0">
-                <a:solidFill>
-                  <a:srgbClr val="101B33"/>
-                </a:solidFill>
-                <a:latin typeface="맑은 고딕" pitchFamily="34" charset="0"/>
-                <a:ea typeface="맑은 고딕" pitchFamily="34" charset="-122"/>
-                <a:cs typeface="맑은 고딕" pitchFamily="34" charset="-120"/>
-              </a:rPr>
-              <a:t>대표자 인건비</a:t>
-            </a:r>
-            <a:endParaRPr lang="en-US" sz="1400" dirty="0"/>
-          </a:p>
-        </p:txBody>
-      </p:sp>
-      <p:sp>
-        <p:nvSpPr>
-          <p:cNvPr id="9" name="Text 7"/>
-          <p:cNvSpPr/>
-          <p:nvPr/>
-        </p:nvSpPr>
-        <p:spPr>
-          <a:xfrm>
-            <a:off x="914400" y="3383280"/>
-            <a:ext cx="2971800" cy="274320"/>
-          </a:xfrm>
-          <a:prstGeom prst="rect">
-            <a:avLst/>
-          </a:prstGeom>
-          <a:noFill/>
-          <a:ln/>
-        </p:spPr>
-        <p:txBody>
-          <a:bodyPr wrap="square" lIns="0" tIns="0" rIns="0" bIns="0" rtlCol="0" anchor="ctr"/>
-          <a:lstStyle/>
-          <a:p>
-            <a:pPr indent="0" marL="0">
-              <a:buNone/>
-            </a:pPr>
-            <a:r>
-              <a:rPr lang="en-US" sz="1300" b="1" dirty="0">
-                <a:solidFill>
-                  <a:srgbClr val="0075C9"/>
-                </a:solidFill>
-                <a:latin typeface="맑은 고딕" pitchFamily="34" charset="0"/>
-                <a:ea typeface="맑은 고딕" pitchFamily="34" charset="-122"/>
-                <a:cs typeface="맑은 고딕" pitchFamily="34" charset="-120"/>
-              </a:rPr>
-              <a:t>480만원</a:t>
-            </a:r>
-            <a:endParaRPr lang="en-US" sz="1300" dirty="0"/>
-          </a:p>
-        </p:txBody>
-      </p:sp>
-      <p:sp>
-        <p:nvSpPr>
-          <p:cNvPr id="10" name="Text 8"/>
-          <p:cNvSpPr/>
-          <p:nvPr/>
-        </p:nvSpPr>
-        <p:spPr>
-          <a:xfrm>
-            <a:off x="914400" y="3694176"/>
-            <a:ext cx="2971800" cy="457200"/>
-          </a:xfrm>
-          <a:prstGeom prst="rect">
-            <a:avLst/>
-          </a:prstGeom>
-          <a:noFill/>
-          <a:ln/>
-        </p:spPr>
-        <p:txBody>
-          <a:bodyPr wrap="square" lIns="0" tIns="0" rIns="0" bIns="0" rtlCol="0" anchor="ctr"/>
-          <a:lstStyle/>
-          <a:p>
-            <a:pPr indent="0" marL="0">
-              <a:lnSpc>
-                <a:spcPts val="1200"/>
-              </a:lnSpc>
-              <a:buNone/>
-            </a:pPr>
-            <a:r>
-              <a:rPr lang="en-US" sz="950" dirty="0">
-                <a:solidFill>
-                  <a:srgbClr val="4A5262"/>
-                </a:solidFill>
-                <a:latin typeface="맑은 고딕" pitchFamily="34" charset="0"/>
-                <a:ea typeface="맑은 고딕" pitchFamily="34" charset="-122"/>
-                <a:cs typeface="맑은 고딕" pitchFamily="34" charset="-120"/>
-              </a:rPr>
-              <a:t>박성실 대표 · 과제참여율 기준</a:t>
-            </a:r>
-            <a:endParaRPr lang="en-US" sz="950" dirty="0"/>
-          </a:p>
-        </p:txBody>
-      </p:sp>
-      <p:sp>
-        <p:nvSpPr>
-          <p:cNvPr id="11" name="Shape 9"/>
-          <p:cNvSpPr/>
-          <p:nvPr/>
-        </p:nvSpPr>
-        <p:spPr>
-          <a:xfrm>
-            <a:off x="4416552" y="2286000"/>
-            <a:ext cx="3520440" cy="1965960"/>
-          </a:xfrm>
-          <a:prstGeom prst="roundRect">
-            <a:avLst>
-              <a:gd name="adj" fmla="val 2791"/>
-            </a:avLst>
-          </a:prstGeom>
-          <a:solidFill>
-            <a:srgbClr val="FFFFFF"/>
-          </a:solidFill>
-          <a:ln w="12700">
-            <a:solidFill>
-              <a:srgbClr val="DFE3EA"/>
-            </a:solidFill>
-            <a:prstDash val="solid"/>
-          </a:ln>
-          <a:effectLst>
-            <a:outerShdw sx="100000" sy="100000" kx="0" ky="0" algn="bl" rotWithShape="0" blurRad="152400" dist="38100" dir="5400000">
-              <a:srgbClr val="101B33">
-                <a:alpha val="7000"/>
-              </a:srgbClr>
-            </a:outerShdw>
-          </a:effectLst>
-        </p:spPr>
-      </p:sp>
-      <p:sp>
-        <p:nvSpPr>
-          <p:cNvPr id="12" name="Shape 10"/>
-          <p:cNvSpPr/>
-          <p:nvPr/>
-        </p:nvSpPr>
-        <p:spPr>
-          <a:xfrm>
-            <a:off x="4690872" y="2560320"/>
-            <a:ext cx="420624" cy="420624"/>
-          </a:xfrm>
-          <a:prstGeom prst="ellipse">
-            <a:avLst/>
-          </a:prstGeom>
-          <a:solidFill>
-            <a:srgbClr val="101B33"/>
-          </a:solidFill>
-          <a:ln w="12700">
-            <a:solidFill>
-              <a:srgbClr val="101B33"/>
-            </a:solidFill>
-            <a:prstDash val="solid"/>
-          </a:ln>
-        </p:spPr>
-      </p:sp>
-      <p:sp>
-        <p:nvSpPr>
-          <p:cNvPr id="13" name="Text 11"/>
-          <p:cNvSpPr/>
-          <p:nvPr/>
-        </p:nvSpPr>
-        <p:spPr>
-          <a:xfrm>
-            <a:off x="4690872" y="2560320"/>
-            <a:ext cx="420624" cy="420624"/>
-          </a:xfrm>
-          <a:prstGeom prst="rect">
-            <a:avLst/>
-          </a:prstGeom>
-          <a:noFill/>
-          <a:ln/>
-        </p:spPr>
-        <p:txBody>
-          <a:bodyPr wrap="square" lIns="0" tIns="0" rIns="0" bIns="0" rtlCol="0" anchor="ctr"/>
-          <a:lstStyle/>
-          <a:p>
-            <a:pPr algn="ctr" indent="0" marL="0">
-              <a:buNone/>
-            </a:pPr>
-            <a:r>
-              <a:rPr lang="en-US" sz="1300" b="1" dirty="0">
-                <a:solidFill>
-                  <a:srgbClr val="FFFFFF"/>
-                </a:solidFill>
-                <a:latin typeface="맑은 고딕" pitchFamily="34" charset="0"/>
-                <a:ea typeface="맑은 고딕" pitchFamily="34" charset="-122"/>
-                <a:cs typeface="맑은 고딕" pitchFamily="34" charset="-120"/>
-              </a:rPr>
-              <a:t>02</a:t>
-            </a:r>
-            <a:endParaRPr lang="en-US" sz="1300" dirty="0"/>
-          </a:p>
-        </p:txBody>
-      </p:sp>
-      <p:sp>
-        <p:nvSpPr>
-          <p:cNvPr id="14" name="Text 12"/>
-          <p:cNvSpPr/>
-          <p:nvPr/>
-        </p:nvSpPr>
-        <p:spPr>
-          <a:xfrm>
-            <a:off x="4690872" y="3090672"/>
-            <a:ext cx="2971800" cy="292608"/>
-          </a:xfrm>
-          <a:prstGeom prst="rect">
-            <a:avLst/>
-          </a:prstGeom>
-          <a:noFill/>
-          <a:ln/>
-        </p:spPr>
-        <p:txBody>
-          <a:bodyPr wrap="square" lIns="0" tIns="0" rIns="0" bIns="0" rtlCol="0" anchor="ctr"/>
-          <a:lstStyle/>
-          <a:p>
-            <a:pPr indent="0" marL="0">
-              <a:buNone/>
-            </a:pPr>
-            <a:r>
-              <a:rPr lang="en-US" sz="1400" b="1" dirty="0">
-                <a:solidFill>
-                  <a:srgbClr val="101B33"/>
-                </a:solidFill>
-                <a:latin typeface="맑은 고딕" pitchFamily="34" charset="0"/>
-                <a:ea typeface="맑은 고딕" pitchFamily="34" charset="-122"/>
-                <a:cs typeface="맑은 고딕" pitchFamily="34" charset="-120"/>
-              </a:rPr>
-              <a:t>사업장 임차료</a:t>
-            </a:r>
-            <a:endParaRPr lang="en-US" sz="1400" dirty="0"/>
-          </a:p>
-        </p:txBody>
-      </p:sp>
-      <p:sp>
-        <p:nvSpPr>
-          <p:cNvPr id="15" name="Text 13"/>
-          <p:cNvSpPr/>
-          <p:nvPr/>
-        </p:nvSpPr>
-        <p:spPr>
-          <a:xfrm>
-            <a:off x="4690872" y="3383280"/>
-            <a:ext cx="2971800" cy="274320"/>
-          </a:xfrm>
-          <a:prstGeom prst="rect">
-            <a:avLst/>
-          </a:prstGeom>
-          <a:noFill/>
-          <a:ln/>
-        </p:spPr>
-        <p:txBody>
-          <a:bodyPr wrap="square" lIns="0" tIns="0" rIns="0" bIns="0" rtlCol="0" anchor="ctr"/>
-          <a:lstStyle/>
-          <a:p>
-            <a:pPr indent="0" marL="0">
-              <a:buNone/>
-            </a:pPr>
-            <a:r>
-              <a:rPr lang="en-US" sz="1300" b="1" dirty="0">
-                <a:solidFill>
-                  <a:srgbClr val="0075C9"/>
-                </a:solidFill>
-                <a:latin typeface="맑은 고딕" pitchFamily="34" charset="0"/>
-                <a:ea typeface="맑은 고딕" pitchFamily="34" charset="-122"/>
-                <a:cs typeface="맑은 고딕" pitchFamily="34" charset="-120"/>
-              </a:rPr>
-              <a:t>256만원</a:t>
-            </a:r>
-            <a:endParaRPr lang="en-US" sz="1300" dirty="0"/>
-          </a:p>
-        </p:txBody>
-      </p:sp>
-      <p:sp>
-        <p:nvSpPr>
-          <p:cNvPr id="16" name="Text 14"/>
-          <p:cNvSpPr/>
-          <p:nvPr/>
-        </p:nvSpPr>
-        <p:spPr>
-          <a:xfrm>
-            <a:off x="4690872" y="3694176"/>
-            <a:ext cx="2971800" cy="457200"/>
-          </a:xfrm>
-          <a:prstGeom prst="rect">
-            <a:avLst/>
-          </a:prstGeom>
-          <a:noFill/>
-          <a:ln/>
-        </p:spPr>
-        <p:txBody>
-          <a:bodyPr wrap="square" lIns="0" tIns="0" rIns="0" bIns="0" rtlCol="0" anchor="ctr"/>
-          <a:lstStyle/>
-          <a:p>
-            <a:pPr indent="0" marL="0">
-              <a:lnSpc>
-                <a:spcPts val="1200"/>
-              </a:lnSpc>
-              <a:buNone/>
-            </a:pPr>
-            <a:r>
-              <a:rPr lang="en-US" sz="950" dirty="0">
-                <a:solidFill>
-                  <a:srgbClr val="4A5262"/>
-                </a:solidFill>
-                <a:latin typeface="맑은 고딕" pitchFamily="34" charset="0"/>
-                <a:ea typeface="맑은 고딕" pitchFamily="34" charset="-122"/>
-                <a:cs typeface="맑은 고딕" pitchFamily="34" charset="-120"/>
-              </a:rPr>
-              <a:t>대구 수성구 사무실 월 임차료</a:t>
-            </a:r>
-            <a:endParaRPr lang="en-US" sz="950" dirty="0"/>
-          </a:p>
-        </p:txBody>
-      </p:sp>
-      <p:sp>
-        <p:nvSpPr>
-          <p:cNvPr id="17" name="Shape 15"/>
-          <p:cNvSpPr/>
-          <p:nvPr/>
-        </p:nvSpPr>
-        <p:spPr>
-          <a:xfrm>
-            <a:off x="8193024" y="2286000"/>
-            <a:ext cx="3520440" cy="1965960"/>
-          </a:xfrm>
-          <a:prstGeom prst="roundRect">
-            <a:avLst>
-              <a:gd name="adj" fmla="val 2791"/>
-            </a:avLst>
-          </a:prstGeom>
-          <a:solidFill>
-            <a:srgbClr val="FFFFFF"/>
-          </a:solidFill>
-          <a:ln w="12700">
-            <a:solidFill>
-              <a:srgbClr val="DFE3EA"/>
-            </a:solidFill>
-            <a:prstDash val="solid"/>
-          </a:ln>
-          <a:effectLst>
-            <a:outerShdw sx="100000" sy="100000" kx="0" ky="0" algn="bl" rotWithShape="0" blurRad="152400" dist="38100" dir="5400000">
-              <a:srgbClr val="101B33">
-                <a:alpha val="7000"/>
-              </a:srgbClr>
-            </a:outerShdw>
-          </a:effectLst>
-        </p:spPr>
-      </p:sp>
-      <p:sp>
-        <p:nvSpPr>
-          <p:cNvPr id="18" name="Shape 16"/>
-          <p:cNvSpPr/>
-          <p:nvPr/>
-        </p:nvSpPr>
-        <p:spPr>
-          <a:xfrm>
-            <a:off x="8467344" y="2560320"/>
-            <a:ext cx="420624" cy="420624"/>
-          </a:xfrm>
-          <a:prstGeom prst="ellipse">
-            <a:avLst/>
-          </a:prstGeom>
-          <a:solidFill>
-            <a:srgbClr val="101B33"/>
-          </a:solidFill>
-          <a:ln w="12700">
-            <a:solidFill>
-              <a:srgbClr val="101B33"/>
-            </a:solidFill>
-            <a:prstDash val="solid"/>
-          </a:ln>
-        </p:spPr>
-      </p:sp>
-      <p:sp>
-        <p:nvSpPr>
-          <p:cNvPr id="19" name="Text 17"/>
-          <p:cNvSpPr/>
-          <p:nvPr/>
-        </p:nvSpPr>
-        <p:spPr>
-          <a:xfrm>
-            <a:off x="8467344" y="2560320"/>
-            <a:ext cx="420624" cy="420624"/>
-          </a:xfrm>
-          <a:prstGeom prst="rect">
-            <a:avLst/>
-          </a:prstGeom>
-          <a:noFill/>
-          <a:ln/>
-        </p:spPr>
-        <p:txBody>
-          <a:bodyPr wrap="square" lIns="0" tIns="0" rIns="0" bIns="0" rtlCol="0" anchor="ctr"/>
-          <a:lstStyle/>
-          <a:p>
-            <a:pPr algn="ctr" indent="0" marL="0">
-              <a:buNone/>
-            </a:pPr>
-            <a:r>
-              <a:rPr lang="en-US" sz="1300" b="1" dirty="0">
-                <a:solidFill>
-                  <a:srgbClr val="FFFFFF"/>
-                </a:solidFill>
-                <a:latin typeface="맑은 고딕" pitchFamily="34" charset="0"/>
-                <a:ea typeface="맑은 고딕" pitchFamily="34" charset="-122"/>
-                <a:cs typeface="맑은 고딕" pitchFamily="34" charset="-120"/>
-              </a:rPr>
-              <a:t>03</a:t>
-            </a:r>
-            <a:endParaRPr lang="en-US" sz="1300" dirty="0"/>
-          </a:p>
-        </p:txBody>
-      </p:sp>
-      <p:sp>
-        <p:nvSpPr>
-          <p:cNvPr id="20" name="Text 18"/>
-          <p:cNvSpPr/>
-          <p:nvPr/>
-        </p:nvSpPr>
-        <p:spPr>
-          <a:xfrm>
-            <a:off x="8467344" y="3090672"/>
-            <a:ext cx="2971800" cy="292608"/>
-          </a:xfrm>
-          <a:prstGeom prst="rect">
-            <a:avLst/>
-          </a:prstGeom>
-          <a:noFill/>
-          <a:ln/>
-        </p:spPr>
-        <p:txBody>
-          <a:bodyPr wrap="square" lIns="0" tIns="0" rIns="0" bIns="0" rtlCol="0" anchor="ctr"/>
-          <a:lstStyle/>
-          <a:p>
-            <a:pPr indent="0" marL="0">
-              <a:buNone/>
-            </a:pPr>
-            <a:r>
-              <a:rPr lang="en-US" sz="1400" b="1" dirty="0">
-                <a:solidFill>
-                  <a:srgbClr val="101B33"/>
-                </a:solidFill>
-                <a:latin typeface="맑은 고딕" pitchFamily="34" charset="0"/>
-                <a:ea typeface="맑은 고딕" pitchFamily="34" charset="-122"/>
-                <a:cs typeface="맑은 고딕" pitchFamily="34" charset="-120"/>
-              </a:rPr>
-              <a:t>수수료및사용료</a:t>
-            </a:r>
-            <a:endParaRPr lang="en-US" sz="1400" dirty="0"/>
-          </a:p>
-        </p:txBody>
-      </p:sp>
-      <p:sp>
-        <p:nvSpPr>
-          <p:cNvPr id="21" name="Text 19"/>
-          <p:cNvSpPr/>
-          <p:nvPr/>
-        </p:nvSpPr>
-        <p:spPr>
-          <a:xfrm>
-            <a:off x="8467344" y="3383280"/>
-            <a:ext cx="2971800" cy="274320"/>
-          </a:xfrm>
-          <a:prstGeom prst="rect">
-            <a:avLst/>
-          </a:prstGeom>
-          <a:noFill/>
-          <a:ln/>
-        </p:spPr>
-        <p:txBody>
-          <a:bodyPr wrap="square" lIns="0" tIns="0" rIns="0" bIns="0" rtlCol="0" anchor="ctr"/>
-          <a:lstStyle/>
-          <a:p>
-            <a:pPr indent="0" marL="0">
-              <a:buNone/>
-            </a:pPr>
-            <a:r>
-              <a:rPr lang="en-US" sz="1300" b="1" dirty="0">
-                <a:solidFill>
-                  <a:srgbClr val="0075C9"/>
-                </a:solidFill>
-                <a:latin typeface="맑은 고딕" pitchFamily="34" charset="0"/>
-                <a:ea typeface="맑은 고딕" pitchFamily="34" charset="-122"/>
-                <a:cs typeface="맑은 고딕" pitchFamily="34" charset="-120"/>
-              </a:rPr>
-              <a:t>64만원</a:t>
-            </a:r>
-            <a:endParaRPr lang="en-US" sz="1300" dirty="0"/>
-          </a:p>
-        </p:txBody>
-      </p:sp>
-      <p:sp>
-        <p:nvSpPr>
-          <p:cNvPr id="22" name="Text 20"/>
-          <p:cNvSpPr/>
-          <p:nvPr/>
-        </p:nvSpPr>
-        <p:spPr>
-          <a:xfrm>
-            <a:off x="8467344" y="3694176"/>
-            <a:ext cx="2971800" cy="457200"/>
-          </a:xfrm>
-          <a:prstGeom prst="rect">
-            <a:avLst/>
-          </a:prstGeom>
-          <a:noFill/>
-          <a:ln/>
-        </p:spPr>
-        <p:txBody>
-          <a:bodyPr wrap="square" lIns="0" tIns="0" rIns="0" bIns="0" rtlCol="0" anchor="ctr"/>
-          <a:lstStyle/>
-          <a:p>
-            <a:pPr indent="0" marL="0">
-              <a:lnSpc>
-                <a:spcPts val="1200"/>
-              </a:lnSpc>
-              <a:buNone/>
-            </a:pPr>
-            <a:r>
-              <a:rPr lang="en-US" sz="950" dirty="0">
-                <a:solidFill>
-                  <a:srgbClr val="4A5262"/>
-                </a:solidFill>
-                <a:latin typeface="맑은 고딕" pitchFamily="34" charset="0"/>
-                <a:ea typeface="맑은 고딕" pitchFamily="34" charset="-122"/>
-                <a:cs typeface="맑은 고딕" pitchFamily="34" charset="-120"/>
-              </a:rPr>
-              <a:t>이행(지급)보증보험증권 수수료</a:t>
-            </a:r>
-            <a:endParaRPr lang="en-US" sz="950" dirty="0"/>
-          </a:p>
-        </p:txBody>
-      </p:sp>
-      <p:sp>
-        <p:nvSpPr>
-          <p:cNvPr id="23" name="Text 21"/>
-          <p:cNvSpPr/>
-          <p:nvPr/>
-        </p:nvSpPr>
-        <p:spPr>
-          <a:xfrm>
-            <a:off x="640080" y="4526280"/>
-            <a:ext cx="5486400" cy="237744"/>
-          </a:xfrm>
-          <a:prstGeom prst="rect">
-            <a:avLst/>
-          </a:prstGeom>
-          <a:noFill/>
-          <a:ln/>
-        </p:spPr>
-        <p:txBody>
-          <a:bodyPr wrap="square" lIns="0" tIns="0" rIns="0" bIns="0" rtlCol="0" anchor="ctr"/>
-          <a:lstStyle/>
-          <a:p>
-            <a:pPr indent="0" marL="0">
-              <a:buNone/>
-            </a:pPr>
-            <a:r>
-              <a:rPr lang="en-US" sz="1150" b="1" dirty="0">
-                <a:solidFill>
-                  <a:srgbClr val="0075C9"/>
-                </a:solidFill>
-                <a:latin typeface="맑은 고딕" pitchFamily="34" charset="0"/>
-                <a:ea typeface="맑은 고딕" pitchFamily="34" charset="-122"/>
-                <a:cs typeface="맑은 고딕" pitchFamily="34" charset="-120"/>
-              </a:rPr>
-              <a:t>비목별 증빙자료</a:t>
-            </a:r>
-            <a:endParaRPr lang="en-US" sz="1150" dirty="0"/>
-          </a:p>
-        </p:txBody>
-      </p:sp>
-      <p:sp>
-        <p:nvSpPr>
-          <p:cNvPr id="24" name="Text 22"/>
-          <p:cNvSpPr/>
-          <p:nvPr/>
-        </p:nvSpPr>
-        <p:spPr>
-          <a:xfrm>
-            <a:off x="685800" y="4800600"/>
-            <a:ext cx="1600200" cy="292608"/>
-          </a:xfrm>
-          <a:prstGeom prst="rect">
-            <a:avLst/>
-          </a:prstGeom>
-          <a:noFill/>
-          <a:ln/>
-        </p:spPr>
-        <p:txBody>
-          <a:bodyPr wrap="square" lIns="0" tIns="0" rIns="0" bIns="0" rtlCol="0" anchor="ctr"/>
-          <a:lstStyle/>
-          <a:p>
-            <a:pPr indent="0" marL="0">
-              <a:buNone/>
-            </a:pPr>
-            <a:r>
-              <a:rPr lang="en-US" sz="900" b="1" dirty="0">
-                <a:solidFill>
-                  <a:srgbClr val="101B33"/>
-                </a:solidFill>
-                <a:latin typeface="맑은 고딕" pitchFamily="34" charset="0"/>
-                <a:ea typeface="맑은 고딕" pitchFamily="34" charset="-122"/>
-                <a:cs typeface="맑은 고딕" pitchFamily="34" charset="-120"/>
-              </a:rPr>
-              <a:t>일반용역비</a:t>
-            </a:r>
-            <a:endParaRPr lang="en-US" sz="900" dirty="0"/>
-          </a:p>
-        </p:txBody>
-      </p:sp>
-      <p:sp>
-        <p:nvSpPr>
-          <p:cNvPr id="25" name="Text 23"/>
-          <p:cNvSpPr/>
-          <p:nvPr/>
-        </p:nvSpPr>
-        <p:spPr>
-          <a:xfrm>
-            <a:off x="2377440" y="4800600"/>
-            <a:ext cx="9098280" cy="292608"/>
-          </a:xfrm>
-          <a:prstGeom prst="rect">
-            <a:avLst/>
-          </a:prstGeom>
-          <a:noFill/>
-          <a:ln/>
-        </p:spPr>
-        <p:txBody>
-          <a:bodyPr wrap="square" lIns="0" tIns="0" rIns="0" bIns="0" rtlCol="0" anchor="ctr"/>
-          <a:lstStyle/>
-          <a:p>
-            <a:pPr indent="0" marL="0">
-              <a:buNone/>
-            </a:pPr>
-            <a:r>
-              <a:rPr lang="en-US" sz="850" dirty="0">
-                <a:solidFill>
-                  <a:srgbClr val="4A5262"/>
-                </a:solidFill>
-                <a:latin typeface="맑은 고딕" pitchFamily="34" charset="0"/>
-                <a:ea typeface="맑은 고딕" pitchFamily="34" charset="-122"/>
-                <a:cs typeface="맑은 고딕" pitchFamily="34" charset="-120"/>
-              </a:rPr>
-              <a:t>계획서·완료보고서 / 계약서 / 견적서·비교견적서 / 집행증빙 / 검수조서 또는 결과보고서(증빙사진 필수)</a:t>
-            </a:r>
-            <a:endParaRPr lang="en-US" sz="850" dirty="0"/>
-          </a:p>
-        </p:txBody>
-      </p:sp>
-      <p:sp>
-        <p:nvSpPr>
-          <p:cNvPr id="26" name="Text 24"/>
-          <p:cNvSpPr/>
-          <p:nvPr/>
-        </p:nvSpPr>
-        <p:spPr>
-          <a:xfrm>
-            <a:off x="685800" y="5093208"/>
-            <a:ext cx="1600200" cy="292608"/>
-          </a:xfrm>
-          <a:prstGeom prst="rect">
-            <a:avLst/>
-          </a:prstGeom>
-          <a:noFill/>
-          <a:ln/>
-        </p:spPr>
-        <p:txBody>
-          <a:bodyPr wrap="square" lIns="0" tIns="0" rIns="0" bIns="0" rtlCol="0" anchor="ctr"/>
-          <a:lstStyle/>
-          <a:p>
-            <a:pPr indent="0" marL="0">
-              <a:buNone/>
-            </a:pPr>
-            <a:r>
-              <a:rPr lang="en-US" sz="900" b="1" dirty="0">
-                <a:solidFill>
-                  <a:srgbClr val="101B33"/>
-                </a:solidFill>
-                <a:latin typeface="맑은 고딕" pitchFamily="34" charset="0"/>
-                <a:ea typeface="맑은 고딕" pitchFamily="34" charset="-122"/>
-                <a:cs typeface="맑은 고딕" pitchFamily="34" charset="-120"/>
-              </a:rPr>
-              <a:t>일반수용비</a:t>
-            </a:r>
-            <a:endParaRPr lang="en-US" sz="900" dirty="0"/>
-          </a:p>
-        </p:txBody>
-      </p:sp>
-      <p:sp>
-        <p:nvSpPr>
-          <p:cNvPr id="27" name="Text 25"/>
-          <p:cNvSpPr/>
-          <p:nvPr/>
-        </p:nvSpPr>
-        <p:spPr>
-          <a:xfrm>
-            <a:off x="2377440" y="5093208"/>
-            <a:ext cx="9098280" cy="292608"/>
-          </a:xfrm>
-          <a:prstGeom prst="rect">
-            <a:avLst/>
-          </a:prstGeom>
-          <a:noFill/>
-          <a:ln/>
-        </p:spPr>
-        <p:txBody>
-          <a:bodyPr wrap="square" lIns="0" tIns="0" rIns="0" bIns="0" rtlCol="0" anchor="ctr"/>
-          <a:lstStyle/>
-          <a:p>
-            <a:pPr indent="0" marL="0">
-              <a:buNone/>
-            </a:pPr>
-            <a:r>
-              <a:rPr lang="en-US" sz="850" dirty="0">
-                <a:solidFill>
-                  <a:srgbClr val="4A5262"/>
-                </a:solidFill>
-                <a:latin typeface="맑은 고딕" pitchFamily="34" charset="0"/>
-                <a:ea typeface="맑은 고딕" pitchFamily="34" charset="-122"/>
-                <a:cs typeface="맑은 고딕" pitchFamily="34" charset="-120"/>
-              </a:rPr>
-              <a:t>견적서 / 집행증빙(전자세금계산서+사업자등록증+통장사본 또는 카드매출전표+사업자등록증) / 광고는 집행내역서·광고리포트</a:t>
-            </a:r>
-            <a:endParaRPr lang="en-US" sz="850" dirty="0"/>
-          </a:p>
-        </p:txBody>
-      </p:sp>
-      <p:sp>
-        <p:nvSpPr>
-          <p:cNvPr id="28" name="Text 26"/>
-          <p:cNvSpPr/>
-          <p:nvPr/>
-        </p:nvSpPr>
-        <p:spPr>
-          <a:xfrm>
-            <a:off x="685800" y="5385816"/>
-            <a:ext cx="1600200" cy="292608"/>
-          </a:xfrm>
-          <a:prstGeom prst="rect">
-            <a:avLst/>
-          </a:prstGeom>
-          <a:noFill/>
-          <a:ln/>
-        </p:spPr>
-        <p:txBody>
-          <a:bodyPr wrap="square" lIns="0" tIns="0" rIns="0" bIns="0" rtlCol="0" anchor="ctr"/>
-          <a:lstStyle/>
-          <a:p>
-            <a:pPr indent="0" marL="0">
-              <a:buNone/>
-            </a:pPr>
-            <a:r>
-              <a:rPr lang="en-US" sz="900" b="1" dirty="0">
-                <a:solidFill>
-                  <a:srgbClr val="101B33"/>
-                </a:solidFill>
-                <a:latin typeface="맑은 고딕" pitchFamily="34" charset="0"/>
-                <a:ea typeface="맑은 고딕" pitchFamily="34" charset="-122"/>
-                <a:cs typeface="맑은 고딕" pitchFamily="34" charset="-120"/>
-              </a:rPr>
-              <a:t>전문가활용비</a:t>
-            </a:r>
-            <a:endParaRPr lang="en-US" sz="900" dirty="0"/>
-          </a:p>
-        </p:txBody>
-      </p:sp>
-      <p:sp>
-        <p:nvSpPr>
-          <p:cNvPr id="29" name="Text 27"/>
-          <p:cNvSpPr/>
-          <p:nvPr/>
-        </p:nvSpPr>
-        <p:spPr>
-          <a:xfrm>
-            <a:off x="2377440" y="5385816"/>
-            <a:ext cx="9098280" cy="292608"/>
-          </a:xfrm>
-          <a:prstGeom prst="rect">
-            <a:avLst/>
-          </a:prstGeom>
-          <a:noFill/>
-          <a:ln/>
-        </p:spPr>
-        <p:txBody>
-          <a:bodyPr wrap="square" lIns="0" tIns="0" rIns="0" bIns="0" rtlCol="0" anchor="ctr"/>
-          <a:lstStyle/>
-          <a:p>
-            <a:pPr indent="0" marL="0">
-              <a:buNone/>
-            </a:pPr>
-            <a:r>
-              <a:rPr lang="en-US" sz="850" dirty="0">
-                <a:solidFill>
-                  <a:srgbClr val="4A5262"/>
-                </a:solidFill>
-                <a:latin typeface="맑은 고딕" pitchFamily="34" charset="0"/>
-                <a:ea typeface="맑은 고딕" pitchFamily="34" charset="-122"/>
-                <a:cs typeface="맑은 고딕" pitchFamily="34" charset="-120"/>
-              </a:rPr>
-              <a:t>자문계획서·결과보고서(증빙사진·이력·일자·시간) / 수당지급조서 / 전문가 이력 확인자료</a:t>
-            </a:r>
-            <a:endParaRPr lang="en-US" sz="850" dirty="0"/>
-          </a:p>
-        </p:txBody>
-      </p:sp>
-      <p:sp>
-        <p:nvSpPr>
-          <p:cNvPr id="30" name="Text 28"/>
-          <p:cNvSpPr/>
-          <p:nvPr/>
-        </p:nvSpPr>
-        <p:spPr>
-          <a:xfrm>
-            <a:off x="685800" y="5678424"/>
-            <a:ext cx="1600200" cy="292608"/>
-          </a:xfrm>
-          <a:prstGeom prst="rect">
-            <a:avLst/>
-          </a:prstGeom>
-          <a:noFill/>
-          <a:ln/>
-        </p:spPr>
-        <p:txBody>
-          <a:bodyPr wrap="square" lIns="0" tIns="0" rIns="0" bIns="0" rtlCol="0" anchor="ctr"/>
-          <a:lstStyle/>
-          <a:p>
-            <a:pPr indent="0" marL="0">
-              <a:buNone/>
-            </a:pPr>
-            <a:r>
-              <a:rPr lang="en-US" sz="900" b="1" dirty="0">
-                <a:solidFill>
-                  <a:srgbClr val="101B33"/>
-                </a:solidFill>
-                <a:latin typeface="맑은 고딕" pitchFamily="34" charset="0"/>
-                <a:ea typeface="맑은 고딕" pitchFamily="34" charset="-122"/>
-                <a:cs typeface="맑은 고딕" pitchFamily="34" charset="-120"/>
-              </a:rPr>
-              <a:t>임차료</a:t>
-            </a:r>
-            <a:endParaRPr lang="en-US" sz="900" dirty="0"/>
-          </a:p>
-        </p:txBody>
-      </p:sp>
-      <p:sp>
-        <p:nvSpPr>
-          <p:cNvPr id="31" name="Text 29"/>
-          <p:cNvSpPr/>
-          <p:nvPr/>
-        </p:nvSpPr>
-        <p:spPr>
-          <a:xfrm>
-            <a:off x="2377440" y="5678424"/>
-            <a:ext cx="9098280" cy="292608"/>
-          </a:xfrm>
-          <a:prstGeom prst="rect">
-            <a:avLst/>
-          </a:prstGeom>
-          <a:noFill/>
-          <a:ln/>
-        </p:spPr>
-        <p:txBody>
-          <a:bodyPr wrap="square" lIns="0" tIns="0" rIns="0" bIns="0" rtlCol="0" anchor="ctr"/>
-          <a:lstStyle/>
-          <a:p>
-            <a:pPr indent="0" marL="0">
-              <a:buNone/>
-            </a:pPr>
-            <a:r>
-              <a:rPr lang="en-US" sz="850" dirty="0">
-                <a:solidFill>
-                  <a:srgbClr val="4A5262"/>
-                </a:solidFill>
-                <a:latin typeface="맑은 고딕" pitchFamily="34" charset="0"/>
-                <a:ea typeface="맑은 고딕" pitchFamily="34" charset="-122"/>
-                <a:cs typeface="맑은 고딕" pitchFamily="34" charset="-120"/>
-              </a:rPr>
-              <a:t>사용계획서·결과보고서(증빙사진) / 계약서 / 견적서 / 집행증빙 / 반납증명서</a:t>
-            </a:r>
-            <a:endParaRPr lang="en-US" sz="850" dirty="0"/>
-          </a:p>
-        </p:txBody>
-      </p:sp>
-      <p:sp>
-        <p:nvSpPr>
-          <p:cNvPr id="32" name="Text 30"/>
-          <p:cNvSpPr/>
-          <p:nvPr/>
-        </p:nvSpPr>
-        <p:spPr>
-          <a:xfrm>
-            <a:off x="685800" y="5971032"/>
-            <a:ext cx="1600200" cy="292608"/>
-          </a:xfrm>
-          <a:prstGeom prst="rect">
-            <a:avLst/>
-          </a:prstGeom>
-          <a:noFill/>
-          <a:ln/>
-        </p:spPr>
-        <p:txBody>
-          <a:bodyPr wrap="square" lIns="0" tIns="0" rIns="0" bIns="0" rtlCol="0" anchor="ctr"/>
-          <a:lstStyle/>
-          <a:p>
-            <a:pPr indent="0" marL="0">
-              <a:buNone/>
-            </a:pPr>
-            <a:r>
-              <a:rPr lang="en-US" sz="900" b="1" dirty="0">
-                <a:solidFill>
-                  <a:srgbClr val="101B33"/>
-                </a:solidFill>
-                <a:latin typeface="맑은 고딕" pitchFamily="34" charset="0"/>
-                <a:ea typeface="맑은 고딕" pitchFamily="34" charset="-122"/>
-                <a:cs typeface="맑은 고딕" pitchFamily="34" charset="-120"/>
-              </a:rPr>
-              <a:t>재료비</a:t>
-            </a:r>
-            <a:endParaRPr lang="en-US" sz="900" dirty="0"/>
-          </a:p>
-        </p:txBody>
-      </p:sp>
-      <p:sp>
-        <p:nvSpPr>
-          <p:cNvPr id="33" name="Text 31"/>
-          <p:cNvSpPr/>
-          <p:nvPr/>
-        </p:nvSpPr>
-        <p:spPr>
-          <a:xfrm>
-            <a:off x="2377440" y="5971032"/>
-            <a:ext cx="9098280" cy="292608"/>
-          </a:xfrm>
-          <a:prstGeom prst="rect">
-            <a:avLst/>
-          </a:prstGeom>
-          <a:noFill/>
-          <a:ln/>
-        </p:spPr>
-        <p:txBody>
-          <a:bodyPr wrap="square" lIns="0" tIns="0" rIns="0" bIns="0" rtlCol="0" anchor="ctr"/>
-          <a:lstStyle/>
-          <a:p>
-            <a:pPr indent="0" marL="0">
-              <a:buNone/>
-            </a:pPr>
-            <a:r>
-              <a:rPr lang="en-US" sz="850" dirty="0">
-                <a:solidFill>
-                  <a:srgbClr val="4A5262"/>
-                </a:solidFill>
-                <a:latin typeface="맑은 고딕" pitchFamily="34" charset="0"/>
-                <a:ea typeface="맑은 고딕" pitchFamily="34" charset="-122"/>
-                <a:cs typeface="맑은 고딕" pitchFamily="34" charset="-120"/>
-              </a:rPr>
-              <a:t>재료비 활용계획서 / 견적서·비교견적서(품목·수량 필수) / 집행증빙 / 검수조서(증빙사진 필수)</a:t>
-            </a:r>
-            <a:endParaRPr lang="en-US" sz="850" dirty="0"/>
-          </a:p>
-        </p:txBody>
-      </p:sp>
-      <p:sp>
-        <p:nvSpPr>
-          <p:cNvPr id="34" name="Text 32"/>
-          <p:cNvSpPr/>
-          <p:nvPr/>
-        </p:nvSpPr>
-        <p:spPr>
-          <a:xfrm>
-            <a:off x="685800" y="6263640"/>
-            <a:ext cx="1600200" cy="292608"/>
-          </a:xfrm>
-          <a:prstGeom prst="rect">
-            <a:avLst/>
-          </a:prstGeom>
-          <a:noFill/>
-          <a:ln/>
-        </p:spPr>
-        <p:txBody>
-          <a:bodyPr wrap="square" lIns="0" tIns="0" rIns="0" bIns="0" rtlCol="0" anchor="ctr"/>
-          <a:lstStyle/>
-          <a:p>
-            <a:pPr indent="0" marL="0">
-              <a:buNone/>
-            </a:pPr>
-            <a:r>
-              <a:rPr lang="en-US" sz="900" b="1" dirty="0">
-                <a:solidFill>
-                  <a:srgbClr val="101B33"/>
-                </a:solidFill>
-                <a:latin typeface="맑은 고딕" pitchFamily="34" charset="0"/>
-                <a:ea typeface="맑은 고딕" pitchFamily="34" charset="-122"/>
-                <a:cs typeface="맑은 고딕" pitchFamily="34" charset="-120"/>
-              </a:rPr>
-              <a:t>대응자금(현물)</a:t>
-            </a:r>
-            <a:endParaRPr lang="en-US" sz="900" dirty="0"/>
-          </a:p>
-        </p:txBody>
-      </p:sp>
-      <p:sp>
-        <p:nvSpPr>
-          <p:cNvPr id="35" name="Text 33"/>
-          <p:cNvSpPr/>
-          <p:nvPr/>
-        </p:nvSpPr>
-        <p:spPr>
-          <a:xfrm>
-            <a:off x="2377440" y="6263640"/>
-            <a:ext cx="9098280" cy="292608"/>
-          </a:xfrm>
-          <a:prstGeom prst="rect">
-            <a:avLst/>
-          </a:prstGeom>
-          <a:noFill/>
-          <a:ln/>
-        </p:spPr>
-        <p:txBody>
-          <a:bodyPr wrap="square" lIns="0" tIns="0" rIns="0" bIns="0" rtlCol="0" anchor="ctr"/>
-          <a:lstStyle/>
-          <a:p>
-            <a:pPr indent="0" marL="0">
-              <a:buNone/>
-            </a:pPr>
-            <a:r>
-              <a:rPr lang="en-US" sz="850" dirty="0">
-                <a:solidFill>
-                  <a:srgbClr val="4A5262"/>
-                </a:solidFill>
-                <a:latin typeface="맑은 고딕" pitchFamily="34" charset="0"/>
-                <a:ea typeface="맑은 고딕" pitchFamily="34" charset="-122"/>
-                <a:cs typeface="맑은 고딕" pitchFamily="34" charset="-120"/>
-              </a:rPr>
-              <a:t>대응자금(현물) 납부 확인서 / 신분확인서 / 원천징수영수증 또는 최저임금 고시문 / 임대차계약서·공간사진·이체확인증</a:t>
-            </a:r>
-            <a:endParaRPr lang="en-US" sz="850" dirty="0"/>
-          </a:p>
-        </p:txBody>
-      </p:sp>
-      <p:sp>
-        <p:nvSpPr>
-          <p:cNvPr id="36" name="Text 34"/>
-          <p:cNvSpPr/>
-          <p:nvPr/>
-        </p:nvSpPr>
-        <p:spPr>
-          <a:xfrm>
-            <a:off x="11155680" y="6291072"/>
-            <a:ext cx="548640" cy="274320"/>
-          </a:xfrm>
-          <a:prstGeom prst="rect">
-            <a:avLst/>
-          </a:prstGeom>
-          <a:noFill/>
-          <a:ln/>
-        </p:spPr>
-        <p:txBody>
-          <a:bodyPr wrap="square" lIns="0" tIns="0" rIns="0" bIns="0" rtlCol="0" anchor="ctr"/>
-          <a:lstStyle/>
-          <a:p>
-            <a:pPr algn="r" indent="0" marL="0">
-              <a:buNone/>
-            </a:pPr>
-            <a:r>
-              <a:rPr lang="en-US" sz="1000" dirty="0">
-                <a:solidFill>
-                  <a:srgbClr val="9AA3B0"/>
-                </a:solidFill>
-                <a:latin typeface="맑은 고딕" pitchFamily="34" charset="0"/>
-                <a:ea typeface="맑은 고딕" pitchFamily="34" charset="-122"/>
-                <a:cs typeface="맑은 고딕" pitchFamily="34" charset="-120"/>
-              </a:rPr>
-              <a:t>16</a:t>
-            </a:r>
-            <a:endParaRPr lang="en-US" sz="1000" dirty="0"/>
-          </a:p>
-        </p:txBody>
-      </p:sp>
-    </p:spTree>
-  </p:cSld>
-  <p:clrMapOvr>
-    <a:masterClrMapping/>
-  </p:clrMapOvr>
-</p:sld>
-</file>
-
-<file path=ppt/slides/slide17.xml><?xml version="1.0" encoding="utf-8"?>
-<p:sld xmlns:a="http://schemas.openxmlformats.org/drawingml/2006/main" xmlns:r="http://schemas.openxmlformats.org/officeDocument/2006/relationships" xmlns:p="http://schemas.openxmlformats.org/presentationml/2006/main">
-  <p:cSld name="Slide 17">
-    <p:bg>
-      <p:bgPr>
-        <a:solidFill>
-          <a:srgbClr val="FFFFFF"/>
-        </a:solidFill>
-      </p:bgPr>
-    </p:bg>
-    <p:spTree>
-      <p:nvGrpSpPr>
-        <p:cNvPr id="1" name=""/>
-        <p:cNvGrpSpPr/>
-        <p:nvPr/>
-      </p:nvGrpSpPr>
-      <p:grpSpPr>
-        <a:xfrm>
-          <a:off x="0" y="0"/>
-          <a:ext cx="0" cy="0"/>
-          <a:chOff x="0" y="0"/>
-          <a:chExt cx="0" cy="0"/>
-        </a:xfrm>
-      </p:grpSpPr>
-      <p:sp>
-        <p:nvSpPr>
-          <p:cNvPr id="2" name="Text 0"/>
-          <p:cNvSpPr/>
-          <p:nvPr/>
-        </p:nvSpPr>
-        <p:spPr>
-          <a:xfrm>
-            <a:off x="640080" y="457200"/>
-            <a:ext cx="7315200" cy="274320"/>
-          </a:xfrm>
-          <a:prstGeom prst="rect">
-            <a:avLst/>
-          </a:prstGeom>
-          <a:noFill/>
-          <a:ln/>
-        </p:spPr>
-        <p:txBody>
-          <a:bodyPr wrap="square" lIns="0" tIns="0" rIns="0" bIns="0" rtlCol="0" anchor="ctr"/>
-          <a:lstStyle/>
-          <a:p>
-            <a:pPr indent="0" marL="0">
-              <a:buNone/>
-            </a:pPr>
-            <a:r>
-              <a:rPr lang="en-US" sz="1200" b="1" spc="200" kern="0" dirty="0">
-                <a:solidFill>
-                  <a:srgbClr val="0075C9"/>
-                </a:solidFill>
-                <a:latin typeface="맑은 고딕" pitchFamily="34" charset="0"/>
-                <a:ea typeface="맑은 고딕" pitchFamily="34" charset="-122"/>
-                <a:cs typeface="맑은 고딕" pitchFamily="34" charset="-120"/>
-              </a:rPr>
-              <a:t>BUDGET · 집행</a:t>
-            </a:r>
-            <a:endParaRPr lang="en-US" sz="1200" dirty="0"/>
-          </a:p>
-        </p:txBody>
-      </p:sp>
-      <p:sp>
-        <p:nvSpPr>
-          <p:cNvPr id="3" name="Text 1"/>
-          <p:cNvSpPr/>
-          <p:nvPr/>
-        </p:nvSpPr>
-        <p:spPr>
-          <a:xfrm>
-            <a:off x="640080" y="749808"/>
-            <a:ext cx="8412480" cy="932688"/>
-          </a:xfrm>
-          <a:prstGeom prst="rect">
-            <a:avLst/>
-          </a:prstGeom>
-          <a:noFill/>
-          <a:ln/>
-        </p:spPr>
-        <p:txBody>
-          <a:bodyPr wrap="square" lIns="0" tIns="0" rIns="0" bIns="0" rtlCol="0" anchor="t"/>
-          <a:lstStyle/>
-          <a:p>
-            <a:pPr indent="0" marL="0">
-              <a:buNone/>
-            </a:pPr>
-            <a:r>
-              <a:rPr lang="en-US" sz="3000" b="1" dirty="0">
-                <a:solidFill>
-                  <a:srgbClr val="101B33"/>
-                </a:solidFill>
-                <a:latin typeface="맑은 고딕" pitchFamily="34" charset="0"/>
-                <a:ea typeface="맑은 고딕" pitchFamily="34" charset="-122"/>
-                <a:cs typeface="맑은 고딕" pitchFamily="34" charset="-120"/>
-              </a:rPr>
-              <a:t>미리 알고 가는 열 가지</a:t>
-            </a:r>
-            <a:endParaRPr lang="en-US" sz="3000" dirty="0"/>
-          </a:p>
-        </p:txBody>
-      </p:sp>
-      <p:sp>
-        <p:nvSpPr>
-          <p:cNvPr id="4" name="Text 2"/>
-          <p:cNvSpPr/>
-          <p:nvPr/>
-        </p:nvSpPr>
-        <p:spPr>
-          <a:xfrm>
-            <a:off x="640080" y="1783080"/>
-            <a:ext cx="10881360" cy="274320"/>
-          </a:xfrm>
-          <a:prstGeom prst="rect">
-            <a:avLst/>
-          </a:prstGeom>
-          <a:noFill/>
-          <a:ln/>
-        </p:spPr>
-        <p:txBody>
-          <a:bodyPr wrap="square" lIns="0" tIns="0" rIns="0" bIns="0" rtlCol="0" anchor="ctr"/>
-          <a:lstStyle/>
-          <a:p>
-            <a:pPr indent="0" marL="0">
-              <a:buNone/>
-            </a:pPr>
-            <a:r>
-              <a:rPr lang="en-US" sz="1050" dirty="0">
-                <a:solidFill>
-                  <a:srgbClr val="4A5262"/>
-                </a:solidFill>
-                <a:latin typeface="맑은 고딕" pitchFamily="34" charset="0"/>
-                <a:ea typeface="맑은 고딕" pitchFamily="34" charset="-122"/>
-                <a:cs typeface="맑은 고딕" pitchFamily="34" charset="-120"/>
-              </a:rPr>
-              <a:t>소상공인 사업비 집행기준 &lt;별표 11&gt; · 집행 유의사항 &lt;별표 12&gt;에서 우리 사업에 걸리는 것만 추렸다.</a:t>
-            </a:r>
-            <a:endParaRPr lang="en-US" sz="1050" dirty="0"/>
-          </a:p>
-        </p:txBody>
-      </p:sp>
-      <p:sp>
-        <p:nvSpPr>
-          <p:cNvPr id="5" name="Shape 3"/>
-          <p:cNvSpPr/>
-          <p:nvPr/>
-        </p:nvSpPr>
-        <p:spPr>
-          <a:xfrm>
-            <a:off x="640080" y="2240280"/>
-            <a:ext cx="41148" cy="786384"/>
-          </a:xfrm>
-          <a:prstGeom prst="rect">
-            <a:avLst/>
-          </a:prstGeom>
-          <a:solidFill>
-            <a:srgbClr val="0075C9"/>
-          </a:solidFill>
-          <a:ln/>
-        </p:spPr>
-      </p:sp>
-      <p:sp>
-        <p:nvSpPr>
-          <p:cNvPr id="6" name="Text 4"/>
-          <p:cNvSpPr/>
-          <p:nvPr/>
-        </p:nvSpPr>
-        <p:spPr>
-          <a:xfrm>
-            <a:off x="841248" y="2258568"/>
-            <a:ext cx="5074920" cy="256032"/>
-          </a:xfrm>
-          <a:prstGeom prst="rect">
-            <a:avLst/>
-          </a:prstGeom>
-          <a:noFill/>
-          <a:ln/>
-        </p:spPr>
-        <p:txBody>
-          <a:bodyPr wrap="square" lIns="0" tIns="0" rIns="0" bIns="0" rtlCol="0" anchor="ctr"/>
-          <a:lstStyle/>
-          <a:p>
-            <a:pPr indent="0" marL="0">
-              <a:buNone/>
-            </a:pPr>
-            <a:r>
-              <a:rPr lang="en-US" sz="1100" b="1" dirty="0">
-                <a:solidFill>
-                  <a:srgbClr val="101B33"/>
-                </a:solidFill>
-                <a:latin typeface="맑은 고딕" pitchFamily="34" charset="0"/>
-                <a:ea typeface="맑은 고딕" pitchFamily="34" charset="-122"/>
-                <a:cs typeface="맑은 고딕" pitchFamily="34" charset="-120"/>
-              </a:rPr>
-              <a:t>부가세 10%는 사업비로 못 쓴다</a:t>
-            </a:r>
-            <a:endParaRPr lang="en-US" sz="1100" dirty="0"/>
-          </a:p>
-        </p:txBody>
-      </p:sp>
-      <p:sp>
-        <p:nvSpPr>
-          <p:cNvPr id="7" name="Text 5"/>
-          <p:cNvSpPr/>
-          <p:nvPr/>
-        </p:nvSpPr>
-        <p:spPr>
-          <a:xfrm>
-            <a:off x="841248" y="2514600"/>
-            <a:ext cx="5074920" cy="502920"/>
-          </a:xfrm>
-          <a:prstGeom prst="rect">
-            <a:avLst/>
-          </a:prstGeom>
-          <a:noFill/>
-          <a:ln/>
-        </p:spPr>
-        <p:txBody>
-          <a:bodyPr wrap="square" lIns="0" tIns="0" rIns="0" bIns="0" rtlCol="0" anchor="t"/>
-          <a:lstStyle/>
-          <a:p>
-            <a:pPr indent="0" marL="0">
-              <a:lnSpc>
-                <a:spcPts val="1150"/>
-              </a:lnSpc>
-              <a:buNone/>
-            </a:pPr>
-            <a:r>
-              <a:rPr lang="en-US" sz="880" dirty="0">
-                <a:solidFill>
-                  <a:srgbClr val="4A5262"/>
-                </a:solidFill>
-                <a:latin typeface="맑은 고딕" pitchFamily="34" charset="0"/>
-                <a:ea typeface="맑은 고딕" pitchFamily="34" charset="-122"/>
-                <a:cs typeface="맑은 고딕" pitchFamily="34" charset="-120"/>
-              </a:rPr>
-              <a:t>모든 견적을 공급가액 기준으로 받고, 부가세는 우리 돈으로 낸다. 4,000만원 사업이면 부가세만 400만원이 따로 든다.</a:t>
-            </a:r>
-            <a:endParaRPr lang="en-US" sz="880" dirty="0"/>
-          </a:p>
-        </p:txBody>
-      </p:sp>
-      <p:sp>
-        <p:nvSpPr>
-          <p:cNvPr id="8" name="Shape 6"/>
-          <p:cNvSpPr/>
-          <p:nvPr/>
-        </p:nvSpPr>
-        <p:spPr>
-          <a:xfrm>
-            <a:off x="6309360" y="2240280"/>
-            <a:ext cx="41148" cy="786384"/>
-          </a:xfrm>
-          <a:prstGeom prst="rect">
-            <a:avLst/>
-          </a:prstGeom>
-          <a:solidFill>
-            <a:srgbClr val="B0442C"/>
-          </a:solidFill>
-          <a:ln/>
-        </p:spPr>
-      </p:sp>
-      <p:sp>
-        <p:nvSpPr>
-          <p:cNvPr id="9" name="Text 7"/>
-          <p:cNvSpPr/>
-          <p:nvPr/>
-        </p:nvSpPr>
-        <p:spPr>
-          <a:xfrm>
-            <a:off x="6510528" y="2258568"/>
-            <a:ext cx="5074920" cy="256032"/>
-          </a:xfrm>
-          <a:prstGeom prst="rect">
-            <a:avLst/>
-          </a:prstGeom>
-          <a:noFill/>
-          <a:ln/>
-        </p:spPr>
-        <p:txBody>
-          <a:bodyPr wrap="square" lIns="0" tIns="0" rIns="0" bIns="0" rtlCol="0" anchor="ctr"/>
-          <a:lstStyle/>
-          <a:p>
-            <a:pPr indent="0" marL="0">
-              <a:buNone/>
-            </a:pPr>
-            <a:r>
-              <a:rPr lang="en-US" sz="1100" b="1" dirty="0">
-                <a:solidFill>
-                  <a:srgbClr val="B0442C"/>
-                </a:solidFill>
-                <a:latin typeface="맑은 고딕" pitchFamily="34" charset="0"/>
-                <a:ea typeface="맑은 고딕" pitchFamily="34" charset="-122"/>
-                <a:cs typeface="맑은 고딕" pitchFamily="34" charset="-120"/>
-              </a:rPr>
-              <a:t>해외 업체와 직접 거래는 집행 불가</a:t>
-            </a:r>
-            <a:endParaRPr lang="en-US" sz="1100" dirty="0"/>
-          </a:p>
-        </p:txBody>
-      </p:sp>
-      <p:sp>
-        <p:nvSpPr>
-          <p:cNvPr id="10" name="Text 8"/>
-          <p:cNvSpPr/>
-          <p:nvPr/>
-        </p:nvSpPr>
-        <p:spPr>
-          <a:xfrm>
-            <a:off x="6510528" y="2514600"/>
-            <a:ext cx="5074920" cy="502920"/>
-          </a:xfrm>
-          <a:prstGeom prst="rect">
-            <a:avLst/>
-          </a:prstGeom>
-          <a:noFill/>
-          <a:ln/>
-        </p:spPr>
-        <p:txBody>
-          <a:bodyPr wrap="square" lIns="0" tIns="0" rIns="0" bIns="0" rtlCol="0" anchor="t"/>
-          <a:lstStyle/>
-          <a:p>
-            <a:pPr indent="0" marL="0">
-              <a:lnSpc>
-                <a:spcPts val="1150"/>
-              </a:lnSpc>
-              <a:buNone/>
-            </a:pPr>
-            <a:r>
-              <a:rPr lang="en-US" sz="880" dirty="0">
-                <a:solidFill>
-                  <a:srgbClr val="4A5262"/>
-                </a:solidFill>
-                <a:latin typeface="맑은 고딕" pitchFamily="34" charset="0"/>
-                <a:ea typeface="맑은 고딕" pitchFamily="34" charset="-122"/>
-                <a:cs typeface="맑은 고딕" pitchFamily="34" charset="-120"/>
-              </a:rPr>
-              <a:t>생성형 AI API·클라우드 GPU는 대부분 해외 결제다. 국내 총판이나 리셀러를 통해 전자세금계산서를 받아야 한다. 우리 서비스에서 가장 걸리기 쉬운 항목이다.</a:t>
-            </a:r>
-            <a:endParaRPr lang="en-US" sz="880" dirty="0"/>
-          </a:p>
-        </p:txBody>
-      </p:sp>
-      <p:sp>
-        <p:nvSpPr>
-          <p:cNvPr id="11" name="Shape 9"/>
-          <p:cNvSpPr/>
-          <p:nvPr/>
-        </p:nvSpPr>
-        <p:spPr>
-          <a:xfrm>
-            <a:off x="640080" y="3118104"/>
-            <a:ext cx="41148" cy="786384"/>
-          </a:xfrm>
-          <a:prstGeom prst="rect">
-            <a:avLst/>
-          </a:prstGeom>
-          <a:solidFill>
-            <a:srgbClr val="0F7A4A"/>
-          </a:solidFill>
-          <a:ln/>
-        </p:spPr>
-      </p:sp>
-      <p:sp>
-        <p:nvSpPr>
-          <p:cNvPr id="12" name="Text 10"/>
-          <p:cNvSpPr/>
-          <p:nvPr/>
-        </p:nvSpPr>
-        <p:spPr>
-          <a:xfrm>
-            <a:off x="841248" y="3136392"/>
-            <a:ext cx="5074920" cy="256032"/>
-          </a:xfrm>
-          <a:prstGeom prst="rect">
-            <a:avLst/>
-          </a:prstGeom>
-          <a:noFill/>
-          <a:ln/>
-        </p:spPr>
-        <p:txBody>
-          <a:bodyPr wrap="square" lIns="0" tIns="0" rIns="0" bIns="0" rtlCol="0" anchor="ctr"/>
-          <a:lstStyle/>
-          <a:p>
-            <a:pPr indent="0" marL="0">
-              <a:buNone/>
-            </a:pPr>
-            <a:r>
-              <a:rPr lang="en-US" sz="1100" b="1" dirty="0">
-                <a:solidFill>
-                  <a:srgbClr val="0F7A4A"/>
-                </a:solidFill>
-                <a:latin typeface="맑은 고딕" pitchFamily="34" charset="0"/>
-                <a:ea typeface="맑은 고딕" pitchFamily="34" charset="-122"/>
-                <a:cs typeface="맑은 고딕" pitchFamily="34" charset="-120"/>
-              </a:rPr>
-              <a:t>여성기업이라 수의계약 한도가 5천만원</a:t>
-            </a:r>
-            <a:endParaRPr lang="en-US" sz="1100" dirty="0"/>
-          </a:p>
-        </p:txBody>
-      </p:sp>
-      <p:sp>
-        <p:nvSpPr>
-          <p:cNvPr id="13" name="Text 11"/>
-          <p:cNvSpPr/>
-          <p:nvPr/>
-        </p:nvSpPr>
-        <p:spPr>
-          <a:xfrm>
-            <a:off x="841248" y="3392424"/>
-            <a:ext cx="5074920" cy="502920"/>
-          </a:xfrm>
-          <a:prstGeom prst="rect">
-            <a:avLst/>
-          </a:prstGeom>
-          <a:noFill/>
-          <a:ln/>
-        </p:spPr>
-        <p:txBody>
-          <a:bodyPr wrap="square" lIns="0" tIns="0" rIns="0" bIns="0" rtlCol="0" anchor="t"/>
-          <a:lstStyle/>
-          <a:p>
-            <a:pPr indent="0" marL="0">
-              <a:lnSpc>
-                <a:spcPts val="1150"/>
-              </a:lnSpc>
-              <a:buNone/>
-            </a:pPr>
-            <a:r>
-              <a:rPr lang="en-US" sz="880" dirty="0">
-                <a:solidFill>
-                  <a:srgbClr val="4A5262"/>
-                </a:solidFill>
-                <a:latin typeface="맑은 고딕" pitchFamily="34" charset="0"/>
-                <a:ea typeface="맑은 고딕" pitchFamily="34" charset="-122"/>
-                <a:cs typeface="맑은 고딕" pitchFamily="34" charset="-120"/>
-              </a:rPr>
-              <a:t>일반기업·소기업·소상공인은 2천만원까지지만 여성기업은 5천만원까지다. 계약 체결 시점에 여성기업 확인서가 유효해야 한다. 우리 확인서는 2028.11.06까지다.</a:t>
-            </a:r>
-            <a:endParaRPr lang="en-US" sz="880" dirty="0"/>
-          </a:p>
-        </p:txBody>
-      </p:sp>
-      <p:sp>
-        <p:nvSpPr>
-          <p:cNvPr id="14" name="Shape 12"/>
-          <p:cNvSpPr/>
-          <p:nvPr/>
-        </p:nvSpPr>
-        <p:spPr>
-          <a:xfrm>
-            <a:off x="6309360" y="3118104"/>
-            <a:ext cx="41148" cy="786384"/>
-          </a:xfrm>
-          <a:prstGeom prst="rect">
-            <a:avLst/>
-          </a:prstGeom>
-          <a:solidFill>
-            <a:srgbClr val="0075C9"/>
-          </a:solidFill>
-          <a:ln/>
-        </p:spPr>
-      </p:sp>
-      <p:sp>
-        <p:nvSpPr>
-          <p:cNvPr id="15" name="Text 13"/>
-          <p:cNvSpPr/>
-          <p:nvPr/>
-        </p:nvSpPr>
-        <p:spPr>
-          <a:xfrm>
-            <a:off x="6510528" y="3136392"/>
-            <a:ext cx="5074920" cy="256032"/>
-          </a:xfrm>
-          <a:prstGeom prst="rect">
-            <a:avLst/>
-          </a:prstGeom>
-          <a:noFill/>
-          <a:ln/>
-        </p:spPr>
-        <p:txBody>
-          <a:bodyPr wrap="square" lIns="0" tIns="0" rIns="0" bIns="0" rtlCol="0" anchor="ctr"/>
-          <a:lstStyle/>
-          <a:p>
-            <a:pPr indent="0" marL="0">
-              <a:buNone/>
-            </a:pPr>
-            <a:r>
-              <a:rPr lang="en-US" sz="1100" b="1" dirty="0">
-                <a:solidFill>
-                  <a:srgbClr val="101B33"/>
-                </a:solidFill>
-                <a:latin typeface="맑은 고딕" pitchFamily="34" charset="0"/>
-                <a:ea typeface="맑은 고딕" pitchFamily="34" charset="-122"/>
-                <a:cs typeface="맑은 고딕" pitchFamily="34" charset="-120"/>
-              </a:rPr>
-              <a:t>사전 공문 승인이 필요한 두 경우</a:t>
-            </a:r>
-            <a:endParaRPr lang="en-US" sz="1100" dirty="0"/>
-          </a:p>
-        </p:txBody>
-      </p:sp>
-      <p:sp>
-        <p:nvSpPr>
-          <p:cNvPr id="16" name="Text 14"/>
-          <p:cNvSpPr/>
-          <p:nvPr/>
-        </p:nvSpPr>
-        <p:spPr>
-          <a:xfrm>
-            <a:off x="6510528" y="3392424"/>
-            <a:ext cx="5074920" cy="502920"/>
-          </a:xfrm>
-          <a:prstGeom prst="rect">
-            <a:avLst/>
-          </a:prstGeom>
-          <a:noFill/>
-          <a:ln/>
-        </p:spPr>
-        <p:txBody>
-          <a:bodyPr wrap="square" lIns="0" tIns="0" rIns="0" bIns="0" rtlCol="0" anchor="t"/>
-          <a:lstStyle/>
-          <a:p>
-            <a:pPr indent="0" marL="0">
-              <a:lnSpc>
-                <a:spcPts val="1150"/>
-              </a:lnSpc>
-              <a:buNone/>
-            </a:pPr>
-            <a:r>
-              <a:rPr lang="en-US" sz="880" dirty="0">
-                <a:solidFill>
-                  <a:srgbClr val="4A5262"/>
-                </a:solidFill>
-                <a:latin typeface="맑은 고딕" pitchFamily="34" charset="0"/>
-                <a:ea typeface="맑은 고딕" pitchFamily="34" charset="-122"/>
-                <a:cs typeface="맑은 고딕" pitchFamily="34" charset="-120"/>
-              </a:rPr>
-              <a:t>① 외주용역 공급가액 2천만원 이상 또는 업력 1년 이하 업체와 계약할 때 ② 집행항목별 공급가액이 정부지원금의 50% 이상일 때. 승인 전에 결제하면 인정되지 않는다.</a:t>
-            </a:r>
-            <a:endParaRPr lang="en-US" sz="880" dirty="0"/>
-          </a:p>
-        </p:txBody>
-      </p:sp>
-      <p:sp>
-        <p:nvSpPr>
-          <p:cNvPr id="17" name="Shape 15"/>
-          <p:cNvSpPr/>
-          <p:nvPr/>
-        </p:nvSpPr>
-        <p:spPr>
-          <a:xfrm>
-            <a:off x="640080" y="3995928"/>
-            <a:ext cx="41148" cy="786384"/>
-          </a:xfrm>
-          <a:prstGeom prst="rect">
-            <a:avLst/>
-          </a:prstGeom>
-          <a:solidFill>
-            <a:srgbClr val="0075C9"/>
-          </a:solidFill>
-          <a:ln/>
-        </p:spPr>
-      </p:sp>
-      <p:sp>
-        <p:nvSpPr>
-          <p:cNvPr id="18" name="Text 16"/>
-          <p:cNvSpPr/>
-          <p:nvPr/>
-        </p:nvSpPr>
-        <p:spPr>
-          <a:xfrm>
-            <a:off x="841248" y="4014216"/>
-            <a:ext cx="5074920" cy="256032"/>
-          </a:xfrm>
-          <a:prstGeom prst="rect">
-            <a:avLst/>
-          </a:prstGeom>
-          <a:noFill/>
-          <a:ln/>
-        </p:spPr>
-        <p:txBody>
-          <a:bodyPr wrap="square" lIns="0" tIns="0" rIns="0" bIns="0" rtlCol="0" anchor="ctr"/>
-          <a:lstStyle/>
-          <a:p>
-            <a:pPr indent="0" marL="0">
-              <a:buNone/>
-            </a:pPr>
-            <a:r>
-              <a:rPr lang="en-US" sz="1100" b="1" dirty="0">
-                <a:solidFill>
-                  <a:srgbClr val="101B33"/>
-                </a:solidFill>
-                <a:latin typeface="맑은 고딕" pitchFamily="34" charset="0"/>
-                <a:ea typeface="맑은 고딕" pitchFamily="34" charset="-122"/>
-                <a:cs typeface="맑은 고딕" pitchFamily="34" charset="-120"/>
-              </a:rPr>
-              <a:t>구독료·라이선스는 협약기간 이내분만</a:t>
-            </a:r>
-            <a:endParaRPr lang="en-US" sz="1100" dirty="0"/>
-          </a:p>
-        </p:txBody>
-      </p:sp>
-      <p:sp>
-        <p:nvSpPr>
-          <p:cNvPr id="19" name="Text 17"/>
-          <p:cNvSpPr/>
-          <p:nvPr/>
-        </p:nvSpPr>
-        <p:spPr>
-          <a:xfrm>
-            <a:off x="841248" y="4270248"/>
-            <a:ext cx="5074920" cy="502920"/>
-          </a:xfrm>
-          <a:prstGeom prst="rect">
-            <a:avLst/>
-          </a:prstGeom>
-          <a:noFill/>
-          <a:ln/>
-        </p:spPr>
-        <p:txBody>
-          <a:bodyPr wrap="square" lIns="0" tIns="0" rIns="0" bIns="0" rtlCol="0" anchor="t"/>
-          <a:lstStyle/>
-          <a:p>
-            <a:pPr indent="0" marL="0">
-              <a:lnSpc>
-                <a:spcPts val="1150"/>
-              </a:lnSpc>
-              <a:buNone/>
-            </a:pPr>
-            <a:r>
-              <a:rPr lang="en-US" sz="880" dirty="0">
-                <a:solidFill>
-                  <a:srgbClr val="4A5262"/>
-                </a:solidFill>
-                <a:latin typeface="맑은 고딕" pitchFamily="34" charset="0"/>
-                <a:ea typeface="맑은 고딕" pitchFamily="34" charset="-122"/>
-                <a:cs typeface="맑은 고딕" pitchFamily="34" charset="-120"/>
-              </a:rPr>
-              <a:t>연 단위로 끊으면 협약기간을 넘는 몫은 인정되지 않는다. 월 결제로 끊는다.</a:t>
-            </a:r>
-            <a:endParaRPr lang="en-US" sz="880" dirty="0"/>
-          </a:p>
-        </p:txBody>
-      </p:sp>
-      <p:sp>
-        <p:nvSpPr>
-          <p:cNvPr id="20" name="Shape 18"/>
-          <p:cNvSpPr/>
-          <p:nvPr/>
-        </p:nvSpPr>
-        <p:spPr>
-          <a:xfrm>
-            <a:off x="6309360" y="3995928"/>
-            <a:ext cx="41148" cy="786384"/>
-          </a:xfrm>
-          <a:prstGeom prst="rect">
-            <a:avLst/>
-          </a:prstGeom>
-          <a:solidFill>
-            <a:srgbClr val="0075C9"/>
-          </a:solidFill>
-          <a:ln/>
-        </p:spPr>
-      </p:sp>
-      <p:sp>
-        <p:nvSpPr>
-          <p:cNvPr id="21" name="Text 19"/>
-          <p:cNvSpPr/>
-          <p:nvPr/>
-        </p:nvSpPr>
-        <p:spPr>
-          <a:xfrm>
-            <a:off x="6510528" y="4014216"/>
-            <a:ext cx="5074920" cy="256032"/>
-          </a:xfrm>
-          <a:prstGeom prst="rect">
-            <a:avLst/>
-          </a:prstGeom>
-          <a:noFill/>
-          <a:ln/>
-        </p:spPr>
-        <p:txBody>
-          <a:bodyPr wrap="square" lIns="0" tIns="0" rIns="0" bIns="0" rtlCol="0" anchor="ctr"/>
-          <a:lstStyle/>
-          <a:p>
-            <a:pPr indent="0" marL="0">
-              <a:buNone/>
-            </a:pPr>
-            <a:r>
-              <a:rPr lang="en-US" sz="1100" b="1" dirty="0">
-                <a:solidFill>
-                  <a:srgbClr val="101B33"/>
-                </a:solidFill>
-                <a:latin typeface="맑은 고딕" pitchFamily="34" charset="0"/>
-                <a:ea typeface="맑은 고딕" pitchFamily="34" charset="-122"/>
-                <a:cs typeface="맑은 고딕" pitchFamily="34" charset="-120"/>
-              </a:rPr>
-              <a:t>사업비카드 또는 세금계산서만</a:t>
-            </a:r>
-            <a:endParaRPr lang="en-US" sz="1100" dirty="0"/>
-          </a:p>
-        </p:txBody>
-      </p:sp>
-      <p:sp>
-        <p:nvSpPr>
-          <p:cNvPr id="22" name="Text 20"/>
-          <p:cNvSpPr/>
-          <p:nvPr/>
-        </p:nvSpPr>
-        <p:spPr>
-          <a:xfrm>
-            <a:off x="6510528" y="4270248"/>
-            <a:ext cx="5074920" cy="502920"/>
-          </a:xfrm>
-          <a:prstGeom prst="rect">
-            <a:avLst/>
-          </a:prstGeom>
-          <a:noFill/>
-          <a:ln/>
-        </p:spPr>
-        <p:txBody>
-          <a:bodyPr wrap="square" lIns="0" tIns="0" rIns="0" bIns="0" rtlCol="0" anchor="t"/>
-          <a:lstStyle/>
-          <a:p>
-            <a:pPr indent="0" marL="0">
-              <a:lnSpc>
-                <a:spcPts val="1150"/>
-              </a:lnSpc>
-              <a:buNone/>
-            </a:pPr>
-            <a:r>
-              <a:rPr lang="en-US" sz="880" dirty="0">
-                <a:solidFill>
-                  <a:srgbClr val="4A5262"/>
-                </a:solidFill>
-                <a:latin typeface="맑은 고딕" pitchFamily="34" charset="0"/>
-                <a:ea typeface="맑은 고딕" pitchFamily="34" charset="-122"/>
-                <a:cs typeface="맑은 고딕" pitchFamily="34" charset="-120"/>
-              </a:rPr>
-              <a:t>e나라도움 전용 사업비카드가 원칙이고 개인·법인카드는 금지다. 협약 시 신고한 사업비 통장에서의 직접 계좌이체만 인정된다.</a:t>
-            </a:r>
-            <a:endParaRPr lang="en-US" sz="880" dirty="0"/>
-          </a:p>
-        </p:txBody>
-      </p:sp>
-      <p:sp>
-        <p:nvSpPr>
-          <p:cNvPr id="23" name="Shape 21"/>
-          <p:cNvSpPr/>
-          <p:nvPr/>
-        </p:nvSpPr>
-        <p:spPr>
-          <a:xfrm>
-            <a:off x="640080" y="4873752"/>
-            <a:ext cx="41148" cy="786384"/>
-          </a:xfrm>
-          <a:prstGeom prst="rect">
-            <a:avLst/>
-          </a:prstGeom>
-          <a:solidFill>
-            <a:srgbClr val="0075C9"/>
-          </a:solidFill>
-          <a:ln/>
-        </p:spPr>
-      </p:sp>
-      <p:sp>
-        <p:nvSpPr>
-          <p:cNvPr id="24" name="Text 22"/>
-          <p:cNvSpPr/>
-          <p:nvPr/>
-        </p:nvSpPr>
-        <p:spPr>
-          <a:xfrm>
-            <a:off x="841248" y="4892040"/>
-            <a:ext cx="5074920" cy="256032"/>
-          </a:xfrm>
-          <a:prstGeom prst="rect">
-            <a:avLst/>
-          </a:prstGeom>
-          <a:noFill/>
-          <a:ln/>
-        </p:spPr>
-        <p:txBody>
-          <a:bodyPr wrap="square" lIns="0" tIns="0" rIns="0" bIns="0" rtlCol="0" anchor="ctr"/>
-          <a:lstStyle/>
-          <a:p>
-            <a:pPr indent="0" marL="0">
-              <a:buNone/>
-            </a:pPr>
-            <a:r>
-              <a:rPr lang="en-US" sz="1100" b="1" dirty="0">
-                <a:solidFill>
-                  <a:srgbClr val="101B33"/>
-                </a:solidFill>
-                <a:latin typeface="맑은 고딕" pitchFamily="34" charset="0"/>
-                <a:ea typeface="맑은 고딕" pitchFamily="34" charset="-122"/>
-                <a:cs typeface="맑은 고딕" pitchFamily="34" charset="-120"/>
-              </a:rPr>
-              <a:t>대응자금은 100% 소진이 필수</a:t>
-            </a:r>
-            <a:endParaRPr lang="en-US" sz="1100" dirty="0"/>
-          </a:p>
-        </p:txBody>
-      </p:sp>
-      <p:sp>
-        <p:nvSpPr>
-          <p:cNvPr id="25" name="Text 23"/>
-          <p:cNvSpPr/>
-          <p:nvPr/>
-        </p:nvSpPr>
-        <p:spPr>
-          <a:xfrm>
-            <a:off x="841248" y="5148072"/>
-            <a:ext cx="5074920" cy="502920"/>
-          </a:xfrm>
-          <a:prstGeom prst="rect">
-            <a:avLst/>
-          </a:prstGeom>
-          <a:noFill/>
-          <a:ln/>
-        </p:spPr>
-        <p:txBody>
-          <a:bodyPr wrap="square" lIns="0" tIns="0" rIns="0" bIns="0" rtlCol="0" anchor="t"/>
-          <a:lstStyle/>
-          <a:p>
-            <a:pPr indent="0" marL="0">
-              <a:lnSpc>
-                <a:spcPts val="1150"/>
-              </a:lnSpc>
-              <a:buNone/>
-            </a:pPr>
-            <a:r>
-              <a:rPr lang="en-US" sz="880" dirty="0">
-                <a:solidFill>
-                  <a:srgbClr val="4A5262"/>
-                </a:solidFill>
-                <a:latin typeface="맑은 고딕" pitchFamily="34" charset="0"/>
-                <a:ea typeface="맑은 고딕" pitchFamily="34" charset="-122"/>
-                <a:cs typeface="맑은 고딕" pitchFamily="34" charset="-120"/>
-              </a:rPr>
-              <a:t>계획에 대해 주관기관 사전 승인을 받아야 하고, 쓰다 남기면 안 된다.</a:t>
-            </a:r>
-            <a:endParaRPr lang="en-US" sz="880" dirty="0"/>
-          </a:p>
-        </p:txBody>
-      </p:sp>
-      <p:sp>
-        <p:nvSpPr>
-          <p:cNvPr id="26" name="Shape 24"/>
-          <p:cNvSpPr/>
-          <p:nvPr/>
-        </p:nvSpPr>
-        <p:spPr>
-          <a:xfrm>
-            <a:off x="6309360" y="4873752"/>
-            <a:ext cx="41148" cy="786384"/>
-          </a:xfrm>
-          <a:prstGeom prst="rect">
-            <a:avLst/>
-          </a:prstGeom>
-          <a:solidFill>
-            <a:srgbClr val="0075C9"/>
-          </a:solidFill>
-          <a:ln/>
-        </p:spPr>
-      </p:sp>
-      <p:sp>
-        <p:nvSpPr>
-          <p:cNvPr id="27" name="Text 25"/>
-          <p:cNvSpPr/>
-          <p:nvPr/>
-        </p:nvSpPr>
-        <p:spPr>
-          <a:xfrm>
-            <a:off x="6510528" y="4892040"/>
-            <a:ext cx="5074920" cy="256032"/>
-          </a:xfrm>
-          <a:prstGeom prst="rect">
-            <a:avLst/>
-          </a:prstGeom>
-          <a:noFill/>
-          <a:ln/>
-        </p:spPr>
-        <p:txBody>
-          <a:bodyPr wrap="square" lIns="0" tIns="0" rIns="0" bIns="0" rtlCol="0" anchor="ctr"/>
-          <a:lstStyle/>
-          <a:p>
-            <a:pPr indent="0" marL="0">
-              <a:buNone/>
-            </a:pPr>
-            <a:r>
-              <a:rPr lang="en-US" sz="1100" b="1" dirty="0">
-                <a:solidFill>
-                  <a:srgbClr val="101B33"/>
-                </a:solidFill>
-                <a:latin typeface="맑은 고딕" pitchFamily="34" charset="0"/>
-                <a:ea typeface="맑은 고딕" pitchFamily="34" charset="-122"/>
-                <a:cs typeface="맑은 고딕" pitchFamily="34" charset="-120"/>
-              </a:rPr>
-              <a:t>선금은 계약금액의 50%를 넘길 수 없다</a:t>
-            </a:r>
-            <a:endParaRPr lang="en-US" sz="1100" dirty="0"/>
-          </a:p>
-        </p:txBody>
-      </p:sp>
-      <p:sp>
-        <p:nvSpPr>
-          <p:cNvPr id="28" name="Text 26"/>
-          <p:cNvSpPr/>
-          <p:nvPr/>
-        </p:nvSpPr>
-        <p:spPr>
-          <a:xfrm>
-            <a:off x="6510528" y="5148072"/>
-            <a:ext cx="5074920" cy="502920"/>
-          </a:xfrm>
-          <a:prstGeom prst="rect">
-            <a:avLst/>
-          </a:prstGeom>
-          <a:noFill/>
-          <a:ln/>
-        </p:spPr>
-        <p:txBody>
-          <a:bodyPr wrap="square" lIns="0" tIns="0" rIns="0" bIns="0" rtlCol="0" anchor="t"/>
-          <a:lstStyle/>
-          <a:p>
-            <a:pPr indent="0" marL="0">
-              <a:lnSpc>
-                <a:spcPts val="1150"/>
-              </a:lnSpc>
-              <a:buNone/>
-            </a:pPr>
-            <a:r>
-              <a:rPr lang="en-US" sz="880" dirty="0">
-                <a:solidFill>
-                  <a:srgbClr val="4A5262"/>
-                </a:solidFill>
-                <a:latin typeface="맑은 고딕" pitchFamily="34" charset="0"/>
-                <a:ea typeface="맑은 고딕" pitchFamily="34" charset="-122"/>
-                <a:cs typeface="맑은 고딕" pitchFamily="34" charset="-120"/>
-              </a:rPr>
-              <a:t>외주용역비는 수행 완료 후 일시납이 원칙이고, 예외적으로 선급금·잔금 분할이 가능하다.</a:t>
-            </a:r>
-            <a:endParaRPr lang="en-US" sz="880" dirty="0"/>
-          </a:p>
-        </p:txBody>
-      </p:sp>
-      <p:sp>
-        <p:nvSpPr>
-          <p:cNvPr id="29" name="Shape 27"/>
-          <p:cNvSpPr/>
-          <p:nvPr/>
-        </p:nvSpPr>
-        <p:spPr>
-          <a:xfrm>
-            <a:off x="640080" y="5751576"/>
-            <a:ext cx="41148" cy="786384"/>
-          </a:xfrm>
-          <a:prstGeom prst="rect">
-            <a:avLst/>
-          </a:prstGeom>
-          <a:solidFill>
-            <a:srgbClr val="0075C9"/>
-          </a:solidFill>
-          <a:ln/>
-        </p:spPr>
-      </p:sp>
-      <p:sp>
-        <p:nvSpPr>
-          <p:cNvPr id="30" name="Text 28"/>
-          <p:cNvSpPr/>
-          <p:nvPr/>
-        </p:nvSpPr>
-        <p:spPr>
-          <a:xfrm>
-            <a:off x="841248" y="5769864"/>
-            <a:ext cx="5074920" cy="256032"/>
-          </a:xfrm>
-          <a:prstGeom prst="rect">
-            <a:avLst/>
-          </a:prstGeom>
-          <a:noFill/>
-          <a:ln/>
-        </p:spPr>
-        <p:txBody>
-          <a:bodyPr wrap="square" lIns="0" tIns="0" rIns="0" bIns="0" rtlCol="0" anchor="ctr"/>
-          <a:lstStyle/>
-          <a:p>
-            <a:pPr indent="0" marL="0">
-              <a:buNone/>
-            </a:pPr>
-            <a:r>
-              <a:rPr lang="en-US" sz="1100" b="1" dirty="0">
-                <a:solidFill>
-                  <a:srgbClr val="101B33"/>
-                </a:solidFill>
-                <a:latin typeface="맑은 고딕" pitchFamily="34" charset="0"/>
-                <a:ea typeface="맑은 고딕" pitchFamily="34" charset="-122"/>
-                <a:cs typeface="맑은 고딕" pitchFamily="34" charset="-120"/>
-              </a:rPr>
-              <a:t>같은 거래처에 유사 건으로 쪼개 쓸 수 없다</a:t>
-            </a:r>
-            <a:endParaRPr lang="en-US" sz="1100" dirty="0"/>
-          </a:p>
-        </p:txBody>
-      </p:sp>
-      <p:sp>
-        <p:nvSpPr>
-          <p:cNvPr id="31" name="Text 29"/>
-          <p:cNvSpPr/>
-          <p:nvPr/>
-        </p:nvSpPr>
-        <p:spPr>
-          <a:xfrm>
-            <a:off x="841248" y="6025896"/>
-            <a:ext cx="5074920" cy="502920"/>
-          </a:xfrm>
-          <a:prstGeom prst="rect">
-            <a:avLst/>
-          </a:prstGeom>
-          <a:noFill/>
-          <a:ln/>
-        </p:spPr>
-        <p:txBody>
-          <a:bodyPr wrap="square" lIns="0" tIns="0" rIns="0" bIns="0" rtlCol="0" anchor="t"/>
-          <a:lstStyle/>
-          <a:p>
-            <a:pPr indent="0" marL="0">
-              <a:lnSpc>
-                <a:spcPts val="1150"/>
-              </a:lnSpc>
-              <a:buNone/>
-            </a:pPr>
-            <a:r>
-              <a:rPr lang="en-US" sz="880" dirty="0">
-                <a:solidFill>
-                  <a:srgbClr val="4A5262"/>
-                </a:solidFill>
-                <a:latin typeface="맑은 고딕" pitchFamily="34" charset="0"/>
-                <a:ea typeface="맑은 고딕" pitchFamily="34" charset="-122"/>
-                <a:cs typeface="맑은 고딕" pitchFamily="34" charset="-120"/>
-              </a:rPr>
-              <a:t>한도를 피하려고 나누면 집행 불가다.</a:t>
-            </a:r>
-            <a:endParaRPr lang="en-US" sz="880" dirty="0"/>
-          </a:p>
-        </p:txBody>
-      </p:sp>
-      <p:sp>
-        <p:nvSpPr>
-          <p:cNvPr id="32" name="Shape 30"/>
-          <p:cNvSpPr/>
-          <p:nvPr/>
-        </p:nvSpPr>
-        <p:spPr>
-          <a:xfrm>
-            <a:off x="6309360" y="5751576"/>
-            <a:ext cx="41148" cy="786384"/>
-          </a:xfrm>
-          <a:prstGeom prst="rect">
-            <a:avLst/>
-          </a:prstGeom>
-          <a:solidFill>
-            <a:srgbClr val="0075C9"/>
-          </a:solidFill>
-          <a:ln/>
-        </p:spPr>
-      </p:sp>
-      <p:sp>
-        <p:nvSpPr>
-          <p:cNvPr id="33" name="Text 31"/>
-          <p:cNvSpPr/>
-          <p:nvPr/>
-        </p:nvSpPr>
-        <p:spPr>
-          <a:xfrm>
-            <a:off x="6510528" y="5769864"/>
-            <a:ext cx="5074920" cy="256032"/>
-          </a:xfrm>
-          <a:prstGeom prst="rect">
-            <a:avLst/>
-          </a:prstGeom>
-          <a:noFill/>
-          <a:ln/>
-        </p:spPr>
-        <p:txBody>
-          <a:bodyPr wrap="square" lIns="0" tIns="0" rIns="0" bIns="0" rtlCol="0" anchor="ctr"/>
-          <a:lstStyle/>
-          <a:p>
-            <a:pPr indent="0" marL="0">
-              <a:buNone/>
-            </a:pPr>
-            <a:r>
-              <a:rPr lang="en-US" sz="1100" b="1" dirty="0">
-                <a:solidFill>
-                  <a:srgbClr val="101B33"/>
-                </a:solidFill>
-                <a:latin typeface="맑은 고딕" pitchFamily="34" charset="0"/>
-                <a:ea typeface="맑은 고딕" pitchFamily="34" charset="-122"/>
-                <a:cs typeface="맑은 고딕" pitchFamily="34" charset="-120"/>
-              </a:rPr>
-              <a:t>집행기간은 협약종료일까지</a:t>
-            </a:r>
-            <a:endParaRPr lang="en-US" sz="1100" dirty="0"/>
-          </a:p>
-        </p:txBody>
-      </p:sp>
-      <p:sp>
-        <p:nvSpPr>
-          <p:cNvPr id="34" name="Text 32"/>
-          <p:cNvSpPr/>
-          <p:nvPr/>
-        </p:nvSpPr>
-        <p:spPr>
-          <a:xfrm>
-            <a:off x="6510528" y="6025896"/>
-            <a:ext cx="5074920" cy="502920"/>
-          </a:xfrm>
-          <a:prstGeom prst="rect">
-            <a:avLst/>
-          </a:prstGeom>
-          <a:noFill/>
-          <a:ln/>
-        </p:spPr>
-        <p:txBody>
-          <a:bodyPr wrap="square" lIns="0" tIns="0" rIns="0" bIns="0" rtlCol="0" anchor="t"/>
-          <a:lstStyle/>
-          <a:p>
-            <a:pPr indent="0" marL="0">
-              <a:lnSpc>
-                <a:spcPts val="1150"/>
-              </a:lnSpc>
-              <a:buNone/>
-            </a:pPr>
-            <a:r>
-              <a:rPr lang="en-US" sz="880" dirty="0">
-                <a:solidFill>
-                  <a:srgbClr val="4A5262"/>
-                </a:solidFill>
-                <a:latin typeface="맑은 고딕" pitchFamily="34" charset="0"/>
-                <a:ea typeface="맑은 고딕" pitchFamily="34" charset="-122"/>
-                <a:cs typeface="맑은 고딕" pitchFamily="34" charset="-120"/>
-              </a:rPr>
-              <a:t>카드승인일·세금계산서 작성일·영수증 발행일이 전부 협약기간 안이어야 한다. 결과물과 검수확인도 그 안에 끝내야 한다.</a:t>
-            </a:r>
-            <a:endParaRPr lang="en-US" sz="880" dirty="0"/>
-          </a:p>
-        </p:txBody>
-      </p:sp>
-      <p:sp>
-        <p:nvSpPr>
-          <p:cNvPr id="35" name="Text 33"/>
-          <p:cNvSpPr/>
-          <p:nvPr/>
-        </p:nvSpPr>
-        <p:spPr>
-          <a:xfrm>
-            <a:off x="11155680" y="6291072"/>
-            <a:ext cx="548640" cy="274320"/>
-          </a:xfrm>
-          <a:prstGeom prst="rect">
-            <a:avLst/>
-          </a:prstGeom>
-          <a:noFill/>
-          <a:ln/>
-        </p:spPr>
-        <p:txBody>
-          <a:bodyPr wrap="square" lIns="0" tIns="0" rIns="0" bIns="0" rtlCol="0" anchor="ctr"/>
-          <a:lstStyle/>
-          <a:p>
-            <a:pPr algn="r" indent="0" marL="0">
-              <a:buNone/>
-            </a:pPr>
-            <a:r>
-              <a:rPr lang="en-US" sz="1000" dirty="0">
-                <a:solidFill>
-                  <a:srgbClr val="9AA3B0"/>
-                </a:solidFill>
-                <a:latin typeface="맑은 고딕" pitchFamily="34" charset="0"/>
-                <a:ea typeface="맑은 고딕" pitchFamily="34" charset="-122"/>
-                <a:cs typeface="맑은 고딕" pitchFamily="34" charset="-120"/>
-              </a:rPr>
-              <a:t>17</a:t>
-            </a:r>
-            <a:endParaRPr lang="en-US" sz="1000" dirty="0"/>
-          </a:p>
-        </p:txBody>
-      </p:sp>
-    </p:spTree>
-  </p:cSld>
-  <p:clrMapOvr>
-    <a:masterClrMapping/>
-  </p:clrMapOvr>
-</p:sld>
-</file>
-
-<file path=ppt/slides/slide18.xml><?xml version="1.0" encoding="utf-8"?>
-<p:sld xmlns:a="http://schemas.openxmlformats.org/drawingml/2006/main" xmlns:r="http://schemas.openxmlformats.org/officeDocument/2006/relationships" xmlns:p="http://schemas.openxmlformats.org/presentationml/2006/main">
-  <p:cSld name="Slide 18">
-    <p:bg>
-      <p:bgPr>
-        <a:solidFill>
-          <a:srgbClr val="101B33"/>
-        </a:solidFill>
-      </p:bgPr>
-    </p:bg>
-    <p:spTree>
-      <p:nvGrpSpPr>
-        <p:cNvPr id="1" name=""/>
-        <p:cNvGrpSpPr/>
-        <p:nvPr/>
-      </p:nvGrpSpPr>
-      <p:grpSpPr>
-        <a:xfrm>
-          <a:off x="0" y="0"/>
-          <a:ext cx="0" cy="0"/>
-          <a:chOff x="0" y="0"/>
-          <a:chExt cx="0" cy="0"/>
-        </a:xfrm>
-      </p:grpSpPr>
-      <p:sp>
-        <p:nvSpPr>
-          <p:cNvPr id="2" name="Text 0"/>
-          <p:cNvSpPr/>
-          <p:nvPr/>
-        </p:nvSpPr>
-        <p:spPr>
-          <a:xfrm>
-            <a:off x="640080" y="457200"/>
-            <a:ext cx="7315200" cy="274320"/>
-          </a:xfrm>
-          <a:prstGeom prst="rect">
-            <a:avLst/>
-          </a:prstGeom>
-          <a:noFill/>
-          <a:ln/>
-        </p:spPr>
-        <p:txBody>
-          <a:bodyPr wrap="square" lIns="0" tIns="0" rIns="0" bIns="0" rtlCol="0" anchor="ctr"/>
-          <a:lstStyle/>
-          <a:p>
-            <a:pPr indent="0" marL="0">
-              <a:buNone/>
-            </a:pPr>
-            <a:r>
-              <a:rPr lang="en-US" sz="1200" b="1" spc="200" kern="0" dirty="0">
-                <a:solidFill>
-                  <a:srgbClr val="0075C9"/>
-                </a:solidFill>
-                <a:latin typeface="맑은 고딕" pitchFamily="34" charset="0"/>
-                <a:ea typeface="맑은 고딕" pitchFamily="34" charset="-122"/>
-                <a:cs typeface="맑은 고딕" pitchFamily="34" charset="-120"/>
-              </a:rPr>
-              <a:t>STATUS</a:t>
-            </a:r>
-            <a:endParaRPr lang="en-US" sz="1200" dirty="0"/>
-          </a:p>
-        </p:txBody>
-      </p:sp>
-      <p:sp>
-        <p:nvSpPr>
-          <p:cNvPr id="3" name="Text 1"/>
-          <p:cNvSpPr/>
-          <p:nvPr/>
-        </p:nvSpPr>
-        <p:spPr>
-          <a:xfrm>
-            <a:off x="640080" y="749808"/>
-            <a:ext cx="8412480" cy="932688"/>
-          </a:xfrm>
-          <a:prstGeom prst="rect">
-            <a:avLst/>
-          </a:prstGeom>
-          <a:noFill/>
-          <a:ln/>
-        </p:spPr>
-        <p:txBody>
-          <a:bodyPr wrap="square" lIns="0" tIns="0" rIns="0" bIns="0" rtlCol="0" anchor="t"/>
-          <a:lstStyle/>
-          <a:p>
-            <a:pPr indent="0" marL="0">
-              <a:buNone/>
-            </a:pPr>
-            <a:r>
-              <a:rPr lang="en-US" sz="3000" b="1" dirty="0">
-                <a:solidFill>
-                  <a:srgbClr val="FFFFFF"/>
-                </a:solidFill>
-                <a:latin typeface="맑은 고딕" pitchFamily="34" charset="0"/>
-                <a:ea typeface="맑은 고딕" pitchFamily="34" charset="-122"/>
-                <a:cs typeface="맑은 고딕" pitchFamily="34" charset="-120"/>
-              </a:rPr>
-              <a:t>오늘 만든 것</a:t>
-            </a:r>
-            <a:endParaRPr lang="en-US" sz="3000" dirty="0"/>
-          </a:p>
-        </p:txBody>
-      </p:sp>
-      <p:sp>
-        <p:nvSpPr>
-          <p:cNvPr id="4" name="Text 2"/>
-          <p:cNvSpPr/>
-          <p:nvPr/>
-        </p:nvSpPr>
-        <p:spPr>
-          <a:xfrm>
-            <a:off x="640080" y="1783080"/>
-            <a:ext cx="10881360" cy="310896"/>
-          </a:xfrm>
-          <a:prstGeom prst="rect">
-            <a:avLst/>
-          </a:prstGeom>
-          <a:noFill/>
-          <a:ln/>
-        </p:spPr>
-        <p:txBody>
-          <a:bodyPr wrap="square" lIns="0" tIns="0" rIns="0" bIns="0" rtlCol="0" anchor="ctr"/>
-          <a:lstStyle/>
-          <a:p>
-            <a:pPr indent="0" marL="0">
-              <a:buNone/>
-            </a:pPr>
-            <a:r>
-              <a:rPr lang="en-US" sz="1050" dirty="0">
-                <a:solidFill>
-                  <a:srgbClr val="8FA0BE"/>
-                </a:solidFill>
-                <a:latin typeface="맑은 고딕" pitchFamily="34" charset="0"/>
-                <a:ea typeface="맑은 고딕" pitchFamily="34" charset="-122"/>
-                <a:cs typeface="맑은 고딕" pitchFamily="34" charset="-120"/>
-              </a:rPr>
-              <a:t>아래는 이번 협약 이전에 자체 비용으로 만든 결과물이다. 사업비로 집행한 것이 아니므로 정산 대상이 아니며, 고도화의 출발점으로 제시한다.</a:t>
-            </a:r>
-            <a:endParaRPr lang="en-US" sz="1050" dirty="0"/>
-          </a:p>
-        </p:txBody>
-      </p:sp>
-      <p:sp>
-        <p:nvSpPr>
-          <p:cNvPr id="5" name="Shape 3"/>
-          <p:cNvSpPr/>
-          <p:nvPr/>
-        </p:nvSpPr>
-        <p:spPr>
-          <a:xfrm>
-            <a:off x="685800" y="2459736"/>
-            <a:ext cx="182880" cy="182880"/>
-          </a:xfrm>
-          <a:prstGeom prst="ellipse">
-            <a:avLst/>
-          </a:prstGeom>
-          <a:solidFill>
-            <a:srgbClr val="0075C9"/>
-          </a:solidFill>
-          <a:ln w="12700">
-            <a:solidFill>
-              <a:srgbClr val="0075C9"/>
-            </a:solidFill>
-            <a:prstDash val="solid"/>
-          </a:ln>
-        </p:spPr>
-      </p:sp>
-      <p:sp>
-        <p:nvSpPr>
-          <p:cNvPr id="6" name="Text 4"/>
-          <p:cNvSpPr/>
-          <p:nvPr/>
-        </p:nvSpPr>
-        <p:spPr>
-          <a:xfrm>
-            <a:off x="1097280" y="2331720"/>
-            <a:ext cx="3291840" cy="310896"/>
-          </a:xfrm>
-          <a:prstGeom prst="rect">
-            <a:avLst/>
-          </a:prstGeom>
-          <a:noFill/>
-          <a:ln/>
-        </p:spPr>
-        <p:txBody>
-          <a:bodyPr wrap="square" lIns="0" tIns="0" rIns="0" bIns="0" rtlCol="0" anchor="ctr"/>
-          <a:lstStyle/>
-          <a:p>
-            <a:pPr indent="0" marL="0">
-              <a:buNone/>
-            </a:pPr>
-            <a:r>
-              <a:rPr lang="en-US" sz="1400" b="1" dirty="0">
-                <a:solidFill>
-                  <a:srgbClr val="FFFFFF"/>
-                </a:solidFill>
-                <a:latin typeface="맑은 고딕" pitchFamily="34" charset="0"/>
-                <a:ea typeface="맑은 고딕" pitchFamily="34" charset="-122"/>
-                <a:cs typeface="맑은 고딕" pitchFamily="34" charset="-120"/>
-              </a:rPr>
-              <a:t>온 미디어아트 에디트</a:t>
-            </a:r>
-            <a:endParaRPr lang="en-US" sz="1400" dirty="0"/>
-          </a:p>
-        </p:txBody>
-      </p:sp>
-      <p:sp>
-        <p:nvSpPr>
-          <p:cNvPr id="7" name="Text 5"/>
-          <p:cNvSpPr/>
-          <p:nvPr/>
-        </p:nvSpPr>
-        <p:spPr>
-          <a:xfrm>
-            <a:off x="4526280" y="2350008"/>
-            <a:ext cx="6949440" cy="566928"/>
-          </a:xfrm>
-          <a:prstGeom prst="rect">
-            <a:avLst/>
-          </a:prstGeom>
-          <a:noFill/>
-          <a:ln/>
-        </p:spPr>
-        <p:txBody>
-          <a:bodyPr wrap="square" lIns="0" tIns="0" rIns="0" bIns="0" rtlCol="0" anchor="t"/>
-          <a:lstStyle/>
-          <a:p>
-            <a:pPr indent="0" marL="0">
-              <a:lnSpc>
-                <a:spcPts val="1350"/>
-              </a:lnSpc>
-              <a:buNone/>
-            </a:pPr>
-            <a:r>
-              <a:rPr lang="en-US" sz="1000" dirty="0">
-                <a:solidFill>
-                  <a:srgbClr val="B9C6DC"/>
-                </a:solidFill>
-                <a:latin typeface="맑은 고딕" pitchFamily="34" charset="0"/>
-                <a:ea typeface="맑은 고딕" pitchFamily="34" charset="-122"/>
-                <a:cs typeface="맑은 고딕" pitchFamily="34" charset="-120"/>
-              </a:rPr>
-              <a:t>고객이 20가지 스타일 · 12가지 색으로 미디어아트를 직접 만드는 웹 도구. 만든 설정 그대로 제작 의뢰까지 이어진다.</a:t>
-            </a:r>
-            <a:endParaRPr lang="en-US" sz="1000" dirty="0"/>
-          </a:p>
-        </p:txBody>
-      </p:sp>
-      <p:sp>
-        <p:nvSpPr>
-          <p:cNvPr id="8" name="Shape 6"/>
-          <p:cNvSpPr/>
-          <p:nvPr/>
-        </p:nvSpPr>
-        <p:spPr>
-          <a:xfrm>
-            <a:off x="1097280" y="3008376"/>
-            <a:ext cx="10378440" cy="0"/>
-          </a:xfrm>
-          <a:prstGeom prst="line">
-            <a:avLst/>
-          </a:prstGeom>
-          <a:noFill/>
-          <a:ln w="12700">
-            <a:solidFill>
-              <a:srgbClr val="2C3A57"/>
-            </a:solidFill>
-            <a:prstDash val="solid"/>
-          </a:ln>
-        </p:spPr>
-      </p:sp>
-      <p:sp>
-        <p:nvSpPr>
-          <p:cNvPr id="9" name="Shape 7"/>
-          <p:cNvSpPr/>
-          <p:nvPr/>
-        </p:nvSpPr>
-        <p:spPr>
-          <a:xfrm>
-            <a:off x="685800" y="3246120"/>
-            <a:ext cx="182880" cy="182880"/>
-          </a:xfrm>
-          <a:prstGeom prst="ellipse">
-            <a:avLst/>
-          </a:prstGeom>
-          <a:solidFill>
-            <a:srgbClr val="0075C9"/>
-          </a:solidFill>
-          <a:ln w="12700">
-            <a:solidFill>
-              <a:srgbClr val="0075C9"/>
-            </a:solidFill>
-            <a:prstDash val="solid"/>
-          </a:ln>
-        </p:spPr>
-      </p:sp>
-      <p:sp>
-        <p:nvSpPr>
-          <p:cNvPr id="10" name="Text 8"/>
-          <p:cNvSpPr/>
-          <p:nvPr/>
-        </p:nvSpPr>
-        <p:spPr>
-          <a:xfrm>
-            <a:off x="1097280" y="3118104"/>
-            <a:ext cx="3291840" cy="310896"/>
-          </a:xfrm>
-          <a:prstGeom prst="rect">
-            <a:avLst/>
-          </a:prstGeom>
-          <a:noFill/>
-          <a:ln/>
-        </p:spPr>
-        <p:txBody>
-          <a:bodyPr wrap="square" lIns="0" tIns="0" rIns="0" bIns="0" rtlCol="0" anchor="ctr"/>
-          <a:lstStyle/>
-          <a:p>
-            <a:pPr indent="0" marL="0">
-              <a:buNone/>
-            </a:pPr>
-            <a:r>
-              <a:rPr lang="en-US" sz="1400" b="1" dirty="0">
-                <a:solidFill>
-                  <a:srgbClr val="FFFFFF"/>
-                </a:solidFill>
-                <a:latin typeface="맑은 고딕" pitchFamily="34" charset="0"/>
-                <a:ea typeface="맑은 고딕" pitchFamily="34" charset="-122"/>
-                <a:cs typeface="맑은 고딕" pitchFamily="34" charset="-120"/>
-              </a:rPr>
-              <a:t>결정론적 렌더 엔진</a:t>
-            </a:r>
-            <a:endParaRPr lang="en-US" sz="1400" dirty="0"/>
-          </a:p>
-        </p:txBody>
-      </p:sp>
-      <p:sp>
-        <p:nvSpPr>
-          <p:cNvPr id="11" name="Text 9"/>
-          <p:cNvSpPr/>
-          <p:nvPr/>
-        </p:nvSpPr>
-        <p:spPr>
-          <a:xfrm>
-            <a:off x="4526280" y="3136392"/>
-            <a:ext cx="6949440" cy="566928"/>
-          </a:xfrm>
-          <a:prstGeom prst="rect">
-            <a:avLst/>
-          </a:prstGeom>
-          <a:noFill/>
-          <a:ln/>
-        </p:spPr>
-        <p:txBody>
-          <a:bodyPr wrap="square" lIns="0" tIns="0" rIns="0" bIns="0" rtlCol="0" anchor="t"/>
-          <a:lstStyle/>
-          <a:p>
-            <a:pPr indent="0" marL="0">
-              <a:lnSpc>
-                <a:spcPts val="1350"/>
-              </a:lnSpc>
-              <a:buNone/>
-            </a:pPr>
-            <a:r>
-              <a:rPr lang="en-US" sz="1000" dirty="0">
-                <a:solidFill>
-                  <a:srgbClr val="B9C6DC"/>
-                </a:solidFill>
-                <a:latin typeface="맑은 고딕" pitchFamily="34" charset="0"/>
-                <a:ea typeface="맑은 고딕" pitchFamily="34" charset="-122"/>
-                <a:cs typeface="맑은 고딕" pitchFamily="34" charset="-120"/>
-              </a:rPr>
-              <a:t>같은 시드·같은 설정이면 언제 돌려도 같은 그림이 나온다. 고객이 화면에서 고른 그대로 4K 납품본이 되는 근거.</a:t>
-            </a:r>
-            <a:endParaRPr lang="en-US" sz="1000" dirty="0"/>
-          </a:p>
-        </p:txBody>
-      </p:sp>
-      <p:sp>
-        <p:nvSpPr>
-          <p:cNvPr id="12" name="Shape 10"/>
-          <p:cNvSpPr/>
-          <p:nvPr/>
-        </p:nvSpPr>
-        <p:spPr>
-          <a:xfrm>
-            <a:off x="1097280" y="3794760"/>
-            <a:ext cx="10378440" cy="0"/>
-          </a:xfrm>
-          <a:prstGeom prst="line">
-            <a:avLst/>
-          </a:prstGeom>
-          <a:noFill/>
-          <a:ln w="12700">
-            <a:solidFill>
-              <a:srgbClr val="2C3A57"/>
-            </a:solidFill>
-            <a:prstDash val="solid"/>
-          </a:ln>
-        </p:spPr>
-      </p:sp>
-      <p:sp>
-        <p:nvSpPr>
-          <p:cNvPr id="13" name="Shape 11"/>
-          <p:cNvSpPr/>
-          <p:nvPr/>
-        </p:nvSpPr>
-        <p:spPr>
-          <a:xfrm>
-            <a:off x="685800" y="4032504"/>
-            <a:ext cx="182880" cy="182880"/>
-          </a:xfrm>
-          <a:prstGeom prst="ellipse">
-            <a:avLst/>
-          </a:prstGeom>
-          <a:solidFill>
-            <a:srgbClr val="0075C9"/>
-          </a:solidFill>
-          <a:ln w="12700">
-            <a:solidFill>
-              <a:srgbClr val="0075C9"/>
-            </a:solidFill>
-            <a:prstDash val="solid"/>
-          </a:ln>
-        </p:spPr>
-      </p:sp>
-      <p:sp>
-        <p:nvSpPr>
-          <p:cNvPr id="14" name="Text 12"/>
-          <p:cNvSpPr/>
-          <p:nvPr/>
-        </p:nvSpPr>
-        <p:spPr>
-          <a:xfrm>
-            <a:off x="1097280" y="3904488"/>
-            <a:ext cx="3291840" cy="310896"/>
-          </a:xfrm>
-          <a:prstGeom prst="rect">
-            <a:avLst/>
-          </a:prstGeom>
-          <a:noFill/>
-          <a:ln/>
-        </p:spPr>
-        <p:txBody>
-          <a:bodyPr wrap="square" lIns="0" tIns="0" rIns="0" bIns="0" rtlCol="0" anchor="ctr"/>
-          <a:lstStyle/>
-          <a:p>
-            <a:pPr indent="0" marL="0">
-              <a:buNone/>
-            </a:pPr>
-            <a:r>
-              <a:rPr lang="en-US" sz="1400" b="1" dirty="0">
-                <a:solidFill>
-                  <a:srgbClr val="FFFFFF"/>
-                </a:solidFill>
-                <a:latin typeface="맑은 고딕" pitchFamily="34" charset="0"/>
-                <a:ea typeface="맑은 고딕" pitchFamily="34" charset="-122"/>
-                <a:cs typeface="맑은 고딕" pitchFamily="34" charset="-120"/>
-              </a:rPr>
-              <a:t>4K 렌더 파이프라인</a:t>
-            </a:r>
-            <a:endParaRPr lang="en-US" sz="1400" dirty="0"/>
-          </a:p>
-        </p:txBody>
-      </p:sp>
-      <p:sp>
-        <p:nvSpPr>
-          <p:cNvPr id="15" name="Text 13"/>
-          <p:cNvSpPr/>
-          <p:nvPr/>
-        </p:nvSpPr>
-        <p:spPr>
-          <a:xfrm>
-            <a:off x="4526280" y="3922776"/>
-            <a:ext cx="6949440" cy="566928"/>
-          </a:xfrm>
-          <a:prstGeom prst="rect">
-            <a:avLst/>
-          </a:prstGeom>
-          <a:noFill/>
-          <a:ln/>
-        </p:spPr>
-        <p:txBody>
-          <a:bodyPr wrap="square" lIns="0" tIns="0" rIns="0" bIns="0" rtlCol="0" anchor="t"/>
-          <a:lstStyle/>
-          <a:p>
-            <a:pPr indent="0" marL="0">
-              <a:lnSpc>
-                <a:spcPts val="1350"/>
-              </a:lnSpc>
-              <a:buNone/>
-            </a:pPr>
-            <a:r>
-              <a:rPr lang="en-US" sz="1000" dirty="0">
-                <a:solidFill>
-                  <a:srgbClr val="B9C6DC"/>
-                </a:solidFill>
-                <a:latin typeface="맑은 고딕" pitchFamily="34" charset="0"/>
-                <a:ea typeface="맑은 고딕" pitchFamily="34" charset="-122"/>
-                <a:cs typeface="맑은 고딕" pitchFamily="34" charset="-120"/>
-              </a:rPr>
-              <a:t>고객 설정 한 줄을 넣으면 프레임을 뽑아 H.264·HEVC·ProRes로 인코딩한다.</a:t>
-            </a:r>
-            <a:endParaRPr lang="en-US" sz="1000" dirty="0"/>
-          </a:p>
-        </p:txBody>
-      </p:sp>
-      <p:sp>
-        <p:nvSpPr>
-          <p:cNvPr id="16" name="Shape 14"/>
-          <p:cNvSpPr/>
-          <p:nvPr/>
-        </p:nvSpPr>
-        <p:spPr>
-          <a:xfrm>
-            <a:off x="1097280" y="4581144"/>
-            <a:ext cx="10378440" cy="0"/>
-          </a:xfrm>
-          <a:prstGeom prst="line">
-            <a:avLst/>
-          </a:prstGeom>
-          <a:noFill/>
-          <a:ln w="12700">
-            <a:solidFill>
-              <a:srgbClr val="2C3A57"/>
-            </a:solidFill>
-            <a:prstDash val="solid"/>
-          </a:ln>
-        </p:spPr>
-      </p:sp>
-      <p:sp>
-        <p:nvSpPr>
-          <p:cNvPr id="17" name="Shape 15"/>
-          <p:cNvSpPr/>
-          <p:nvPr/>
-        </p:nvSpPr>
-        <p:spPr>
-          <a:xfrm>
-            <a:off x="685800" y="4818888"/>
-            <a:ext cx="182880" cy="182880"/>
-          </a:xfrm>
-          <a:prstGeom prst="ellipse">
-            <a:avLst/>
-          </a:prstGeom>
-          <a:solidFill>
-            <a:srgbClr val="0075C9"/>
-          </a:solidFill>
-          <a:ln w="12700">
-            <a:solidFill>
-              <a:srgbClr val="0075C9"/>
-            </a:solidFill>
-            <a:prstDash val="solid"/>
-          </a:ln>
-        </p:spPr>
-      </p:sp>
-      <p:sp>
-        <p:nvSpPr>
-          <p:cNvPr id="18" name="Text 16"/>
-          <p:cNvSpPr/>
-          <p:nvPr/>
-        </p:nvSpPr>
-        <p:spPr>
-          <a:xfrm>
-            <a:off x="1097280" y="4690872"/>
-            <a:ext cx="3291840" cy="310896"/>
-          </a:xfrm>
-          <a:prstGeom prst="rect">
-            <a:avLst/>
-          </a:prstGeom>
-          <a:noFill/>
-          <a:ln/>
-        </p:spPr>
-        <p:txBody>
-          <a:bodyPr wrap="square" lIns="0" tIns="0" rIns="0" bIns="0" rtlCol="0" anchor="ctr"/>
-          <a:lstStyle/>
-          <a:p>
-            <a:pPr indent="0" marL="0">
-              <a:buNone/>
-            </a:pPr>
-            <a:r>
-              <a:rPr lang="en-US" sz="1400" b="1" dirty="0">
-                <a:solidFill>
-                  <a:srgbClr val="FFFFFF"/>
-                </a:solidFill>
-                <a:latin typeface="맑은 고딕" pitchFamily="34" charset="0"/>
-                <a:ea typeface="맑은 고딕" pitchFamily="34" charset="-122"/>
-                <a:cs typeface="맑은 고딕" pitchFamily="34" charset="-120"/>
-              </a:rPr>
-              <a:t>미디어아트 AX 소개 페이지</a:t>
-            </a:r>
-            <a:endParaRPr lang="en-US" sz="1400" dirty="0"/>
-          </a:p>
-        </p:txBody>
-      </p:sp>
-      <p:sp>
-        <p:nvSpPr>
-          <p:cNvPr id="19" name="Text 17"/>
-          <p:cNvSpPr/>
-          <p:nvPr/>
-        </p:nvSpPr>
-        <p:spPr>
-          <a:xfrm>
-            <a:off x="4526280" y="4709160"/>
-            <a:ext cx="6949440" cy="566928"/>
-          </a:xfrm>
-          <a:prstGeom prst="rect">
-            <a:avLst/>
-          </a:prstGeom>
-          <a:noFill/>
-          <a:ln/>
-        </p:spPr>
-        <p:txBody>
-          <a:bodyPr wrap="square" lIns="0" tIns="0" rIns="0" bIns="0" rtlCol="0" anchor="t"/>
-          <a:lstStyle/>
-          <a:p>
-            <a:pPr indent="0" marL="0">
-              <a:lnSpc>
-                <a:spcPts val="1350"/>
-              </a:lnSpc>
-              <a:buNone/>
-            </a:pPr>
-            <a:r>
-              <a:rPr lang="en-US" sz="1000" dirty="0">
-                <a:solidFill>
-                  <a:srgbClr val="B9C6DC"/>
-                </a:solidFill>
-                <a:latin typeface="맑은 고딕" pitchFamily="34" charset="0"/>
-                <a:ea typeface="맑은 고딕" pitchFamily="34" charset="-122"/>
-                <a:cs typeface="맑은 고딕" pitchFamily="34" charset="-120"/>
-              </a:rPr>
-              <a:t>서비스 홍보 시퀀스를 영상 파일이 아니라 편집표로 만들었다. 한국어·영어·일본어·중국어·아랍어 5개 국어.</a:t>
-            </a:r>
-            <a:endParaRPr lang="en-US" sz="1000" dirty="0"/>
-          </a:p>
-        </p:txBody>
-      </p:sp>
-      <p:sp>
-        <p:nvSpPr>
-          <p:cNvPr id="20" name="Shape 18"/>
-          <p:cNvSpPr/>
-          <p:nvPr/>
-        </p:nvSpPr>
-        <p:spPr>
-          <a:xfrm>
-            <a:off x="1097280" y="5367528"/>
-            <a:ext cx="10378440" cy="0"/>
-          </a:xfrm>
-          <a:prstGeom prst="line">
-            <a:avLst/>
-          </a:prstGeom>
-          <a:noFill/>
-          <a:ln w="12700">
-            <a:solidFill>
-              <a:srgbClr val="2C3A57"/>
-            </a:solidFill>
-            <a:prstDash val="solid"/>
-          </a:ln>
-        </p:spPr>
-      </p:sp>
-      <p:sp>
-        <p:nvSpPr>
-          <p:cNvPr id="21" name="Shape 19"/>
-          <p:cNvSpPr/>
-          <p:nvPr/>
-        </p:nvSpPr>
-        <p:spPr>
-          <a:xfrm>
-            <a:off x="685800" y="5605272"/>
-            <a:ext cx="182880" cy="182880"/>
-          </a:xfrm>
-          <a:prstGeom prst="ellipse">
-            <a:avLst/>
-          </a:prstGeom>
-          <a:solidFill>
-            <a:srgbClr val="0075C9"/>
-          </a:solidFill>
-          <a:ln w="12700">
-            <a:solidFill>
-              <a:srgbClr val="0075C9"/>
-            </a:solidFill>
-            <a:prstDash val="solid"/>
-          </a:ln>
-        </p:spPr>
-      </p:sp>
-      <p:sp>
-        <p:nvSpPr>
-          <p:cNvPr id="22" name="Text 20"/>
-          <p:cNvSpPr/>
-          <p:nvPr/>
-        </p:nvSpPr>
-        <p:spPr>
-          <a:xfrm>
-            <a:off x="1097280" y="5477256"/>
-            <a:ext cx="3291840" cy="310896"/>
-          </a:xfrm>
-          <a:prstGeom prst="rect">
-            <a:avLst/>
-          </a:prstGeom>
-          <a:noFill/>
-          <a:ln/>
-        </p:spPr>
-        <p:txBody>
-          <a:bodyPr wrap="square" lIns="0" tIns="0" rIns="0" bIns="0" rtlCol="0" anchor="ctr"/>
-          <a:lstStyle/>
-          <a:p>
-            <a:pPr indent="0" marL="0">
-              <a:buNone/>
-            </a:pPr>
-            <a:r>
-              <a:rPr lang="en-US" sz="1400" b="1" dirty="0">
-                <a:solidFill>
-                  <a:srgbClr val="FFFFFF"/>
-                </a:solidFill>
-                <a:latin typeface="맑은 고딕" pitchFamily="34" charset="0"/>
-                <a:ea typeface="맑은 고딕" pitchFamily="34" charset="-122"/>
-                <a:cs typeface="맑은 고딕" pitchFamily="34" charset="-120"/>
-              </a:rPr>
-              <a:t>제작 요청 창구</a:t>
-            </a:r>
-            <a:endParaRPr lang="en-US" sz="1400" dirty="0"/>
-          </a:p>
-        </p:txBody>
-      </p:sp>
-      <p:sp>
-        <p:nvSpPr>
-          <p:cNvPr id="23" name="Text 21"/>
-          <p:cNvSpPr/>
-          <p:nvPr/>
-        </p:nvSpPr>
-        <p:spPr>
-          <a:xfrm>
-            <a:off x="4526280" y="5495544"/>
-            <a:ext cx="6949440" cy="566928"/>
-          </a:xfrm>
-          <a:prstGeom prst="rect">
-            <a:avLst/>
-          </a:prstGeom>
-          <a:noFill/>
-          <a:ln/>
-        </p:spPr>
-        <p:txBody>
-          <a:bodyPr wrap="square" lIns="0" tIns="0" rIns="0" bIns="0" rtlCol="0" anchor="t"/>
-          <a:lstStyle/>
-          <a:p>
-            <a:pPr indent="0" marL="0">
-              <a:lnSpc>
-                <a:spcPts val="1350"/>
-              </a:lnSpc>
-              <a:buNone/>
-            </a:pPr>
-            <a:r>
-              <a:rPr lang="en-US" sz="1000" dirty="0">
-                <a:solidFill>
-                  <a:srgbClr val="B9C6DC"/>
-                </a:solidFill>
-                <a:latin typeface="맑은 고딕" pitchFamily="34" charset="0"/>
-                <a:ea typeface="맑은 고딕" pitchFamily="34" charset="-122"/>
-                <a:cs typeface="맑은 고딕" pitchFamily="34" charset="-120"/>
-              </a:rPr>
-              <a:t>기관 담당자가 현장 규격·연동 데이터·방향·납품 형태를 네 단계로 적어 보내는 화면.</a:t>
-            </a:r>
-            <a:endParaRPr lang="en-US" sz="1000" dirty="0"/>
-          </a:p>
-        </p:txBody>
-      </p:sp>
-      <p:sp>
-        <p:nvSpPr>
-          <p:cNvPr id="24" name="Shape 22"/>
-          <p:cNvSpPr/>
-          <p:nvPr/>
-        </p:nvSpPr>
-        <p:spPr>
-          <a:xfrm>
-            <a:off x="1097280" y="6153912"/>
-            <a:ext cx="10378440" cy="0"/>
-          </a:xfrm>
-          <a:prstGeom prst="line">
-            <a:avLst/>
-          </a:prstGeom>
-          <a:noFill/>
-          <a:ln w="12700">
-            <a:solidFill>
-              <a:srgbClr val="2C3A57"/>
-            </a:solidFill>
-            <a:prstDash val="solid"/>
-          </a:ln>
-        </p:spPr>
-      </p:sp>
-      <p:sp>
-        <p:nvSpPr>
-          <p:cNvPr id="25" name="Text 23"/>
-          <p:cNvSpPr/>
-          <p:nvPr/>
-        </p:nvSpPr>
-        <p:spPr>
-          <a:xfrm>
-            <a:off x="640080" y="6263640"/>
-            <a:ext cx="10881360" cy="274320"/>
-          </a:xfrm>
-          <a:prstGeom prst="rect">
-            <a:avLst/>
-          </a:prstGeom>
-          <a:noFill/>
-          <a:ln/>
-        </p:spPr>
-        <p:txBody>
-          <a:bodyPr wrap="square" lIns="0" tIns="0" rIns="0" bIns="0" rtlCol="0" anchor="ctr"/>
-          <a:lstStyle/>
-          <a:p>
-            <a:pPr indent="0" marL="0">
-              <a:buNone/>
-            </a:pPr>
-            <a:r>
-              <a:rPr lang="en-US" sz="1050" dirty="0">
-                <a:solidFill>
-                  <a:srgbClr val="0075C9"/>
-                </a:solidFill>
-                <a:latin typeface="맑은 고딕" pitchFamily="34" charset="0"/>
-                <a:ea typeface="맑은 고딕" pitchFamily="34" charset="-122"/>
-                <a:cs typeface="맑은 고딕" pitchFamily="34" charset="-120"/>
-              </a:rPr>
-              <a:t>publicbloom.art/studio  ·  publicbloom.art/ai  ·  publicbloom.art/ax-studio</a:t>
-            </a:r>
-            <a:endParaRPr lang="en-US" sz="1050" dirty="0"/>
-          </a:p>
-        </p:txBody>
-      </p:sp>
-      <p:sp>
-        <p:nvSpPr>
-          <p:cNvPr id="26" name="Text 24"/>
-          <p:cNvSpPr/>
-          <p:nvPr/>
-        </p:nvSpPr>
-        <p:spPr>
-          <a:xfrm>
-            <a:off x="11155680" y="6291072"/>
-            <a:ext cx="548640" cy="274320"/>
-          </a:xfrm>
-          <a:prstGeom prst="rect">
-            <a:avLst/>
-          </a:prstGeom>
-          <a:noFill/>
-          <a:ln/>
-        </p:spPr>
-        <p:txBody>
-          <a:bodyPr wrap="square" lIns="0" tIns="0" rIns="0" bIns="0" rtlCol="0" anchor="ctr"/>
-          <a:lstStyle/>
-          <a:p>
-            <a:pPr algn="r" indent="0" marL="0">
-              <a:buNone/>
-            </a:pPr>
-            <a:r>
-              <a:rPr lang="en-US" sz="1000" dirty="0">
-                <a:solidFill>
-                  <a:srgbClr val="9AA3B0"/>
-                </a:solidFill>
-                <a:latin typeface="맑은 고딕" pitchFamily="34" charset="0"/>
-                <a:ea typeface="맑은 고딕" pitchFamily="34" charset="-122"/>
-                <a:cs typeface="맑은 고딕" pitchFamily="34" charset="-120"/>
-              </a:rPr>
-              <a:t>18</a:t>
-            </a:r>
-            <a:endParaRPr lang="en-US" sz="1000" dirty="0"/>
-          </a:p>
-        </p:txBody>
-      </p:sp>
-    </p:spTree>
-  </p:cSld>
-  <p:clrMapOvr>
-    <a:masterClrMapping/>
-  </p:clrMapOvr>
-</p:sld>
-</file>
-
-<file path=ppt/slides/slide19.xml><?xml version="1.0" encoding="utf-8"?>
-<p:sld xmlns:a="http://schemas.openxmlformats.org/drawingml/2006/main" xmlns:r="http://schemas.openxmlformats.org/officeDocument/2006/relationships" xmlns:p="http://schemas.openxmlformats.org/presentationml/2006/main">
-  <p:cSld name="Slide 19">
     <p:bg>
       <p:bgPr>
         <a:solidFill>

--- a/docs/오늘은봄날_회사소개서.pptx
+++ b/docs/오늘은봄날_회사소개서.pptx
@@ -2343,6 +2343,10 @@
             <a:prstDash val="solid"/>
           </a:ln>
         </p:spPr>
+        <p:txBody>
+          <a:bodyPr/>
+          <a:p/>
+        </p:txBody>
       </p:sp>
       <p:sp>
         <p:nvSpPr>
@@ -2526,6 +2530,10 @@
             <a:prstDash val="solid"/>
           </a:ln>
         </p:spPr>
+        <p:txBody>
+          <a:bodyPr/>
+          <a:p/>
+        </p:txBody>
       </p:sp>
       <p:sp>
         <p:nvSpPr>
@@ -2787,6 +2795,10 @@
             </a:outerShdw>
           </a:effectLst>
         </p:spPr>
+        <p:txBody>
+          <a:bodyPr/>
+          <a:p/>
+        </p:txBody>
       </p:sp>
       <p:sp>
         <p:nvSpPr>
@@ -2812,6 +2824,10 @@
             <a:prstDash val="solid"/>
           </a:ln>
         </p:spPr>
+        <p:txBody>
+          <a:bodyPr/>
+          <a:p/>
+        </p:txBody>
       </p:sp>
       <p:sp>
         <p:nvSpPr>
@@ -2966,6 +2982,10 @@
             </a:outerShdw>
           </a:effectLst>
         </p:spPr>
+        <p:txBody>
+          <a:bodyPr/>
+          <a:p/>
+        </p:txBody>
       </p:sp>
       <p:sp>
         <p:nvSpPr>
@@ -2991,6 +3011,10 @@
             <a:prstDash val="solid"/>
           </a:ln>
         </p:spPr>
+        <p:txBody>
+          <a:bodyPr/>
+          <a:p/>
+        </p:txBody>
       </p:sp>
       <p:sp>
         <p:nvSpPr>
@@ -3145,6 +3169,10 @@
             </a:outerShdw>
           </a:effectLst>
         </p:spPr>
+        <p:txBody>
+          <a:bodyPr/>
+          <a:p/>
+        </p:txBody>
       </p:sp>
       <p:sp>
         <p:nvSpPr>
@@ -3170,6 +3198,10 @@
             <a:prstDash val="solid"/>
           </a:ln>
         </p:spPr>
+        <p:txBody>
+          <a:bodyPr/>
+          <a:p/>
+        </p:txBody>
       </p:sp>
       <p:sp>
         <p:nvSpPr>
@@ -3551,6 +3583,10 @@
             </a:outerShdw>
           </a:effectLst>
         </p:spPr>
+        <p:txBody>
+          <a:bodyPr/>
+          <a:p/>
+        </p:txBody>
       </p:sp>
       <p:sp>
         <p:nvSpPr>
@@ -3576,6 +3612,10 @@
             <a:prstDash val="solid"/>
           </a:ln>
         </p:spPr>
+        <p:txBody>
+          <a:bodyPr/>
+          <a:p/>
+        </p:txBody>
       </p:sp>
       <p:sp>
         <p:nvSpPr>
@@ -3730,6 +3770,10 @@
             </a:outerShdw>
           </a:effectLst>
         </p:spPr>
+        <p:txBody>
+          <a:bodyPr/>
+          <a:p/>
+        </p:txBody>
       </p:sp>
       <p:sp>
         <p:nvSpPr>
@@ -3755,6 +3799,10 @@
             <a:prstDash val="solid"/>
           </a:ln>
         </p:spPr>
+        <p:txBody>
+          <a:bodyPr/>
+          <a:p/>
+        </p:txBody>
       </p:sp>
       <p:sp>
         <p:nvSpPr>
@@ -3909,6 +3957,10 @@
             </a:outerShdw>
           </a:effectLst>
         </p:spPr>
+        <p:txBody>
+          <a:bodyPr/>
+          <a:p/>
+        </p:txBody>
       </p:sp>
       <p:sp>
         <p:nvSpPr>
@@ -3934,6 +3986,10 @@
             <a:prstDash val="solid"/>
           </a:ln>
         </p:spPr>
+        <p:txBody>
+          <a:bodyPr/>
+          <a:p/>
+        </p:txBody>
       </p:sp>
       <p:sp>
         <p:nvSpPr>
@@ -4088,6 +4144,10 @@
             </a:outerShdw>
           </a:effectLst>
         </p:spPr>
+        <p:txBody>
+          <a:bodyPr/>
+          <a:p/>
+        </p:txBody>
       </p:sp>
       <p:sp>
         <p:nvSpPr>
@@ -4113,6 +4173,10 @@
             <a:prstDash val="solid"/>
           </a:ln>
         </p:spPr>
+        <p:txBody>
+          <a:bodyPr/>
+          <a:p/>
+        </p:txBody>
       </p:sp>
       <p:sp>
         <p:nvSpPr>
@@ -5025,7 +5089,7 @@
                 <a:ea typeface="맑은 고딕" pitchFamily="34" charset="-122"/>
                 <a:cs typeface="맑은 고딕" pitchFamily="34" charset="-120"/>
               </a:rPr>
-              <a:t>위 현장은 상상연필과 함께 수행한 레퍼런스입니다. 오늘은 봄날 명의의 납품 실적은 대구 북구청 사이니지 미디어아트 3편이며, 입찰·수의계약용 실적증명서는 요청 시 발송합니다.</a:t>
+              <a:t>위 현장은 오늘은 봄날이 수행한 레퍼런스입니다. 입찰·수의계약용 실적증명서는 요청 시 발송합니다.</a:t>
             </a:r>
             <a:endParaRPr lang="en-US" sz="1000" dirty="0"/>
           </a:p>
@@ -5252,6 +5316,10 @@
             </a:outerShdw>
           </a:effectLst>
         </p:spPr>
+        <p:txBody>
+          <a:bodyPr/>
+          <a:p/>
+        </p:txBody>
       </p:sp>
       <p:sp>
         <p:nvSpPr>
@@ -5403,6 +5471,10 @@
             </a:outerShdw>
           </a:effectLst>
         </p:spPr>
+        <p:txBody>
+          <a:bodyPr/>
+          <a:p/>
+        </p:txBody>
       </p:sp>
       <p:sp>
         <p:nvSpPr>
@@ -5554,6 +5626,10 @@
             </a:outerShdw>
           </a:effectLst>
         </p:spPr>
+        <p:txBody>
+          <a:bodyPr/>
+          <a:p/>
+        </p:txBody>
       </p:sp>
       <p:sp>
         <p:nvSpPr>
@@ -5705,6 +5781,10 @@
             </a:outerShdw>
           </a:effectLst>
         </p:spPr>
+        <p:txBody>
+          <a:bodyPr/>
+          <a:p/>
+        </p:txBody>
       </p:sp>
       <p:sp>
         <p:nvSpPr>
@@ -5856,6 +5936,10 @@
             </a:outerShdw>
           </a:effectLst>
         </p:spPr>
+        <p:txBody>
+          <a:bodyPr/>
+          <a:p/>
+        </p:txBody>
       </p:sp>
       <p:sp>
         <p:nvSpPr>
@@ -6168,6 +6252,10 @@
             <a:prstDash val="solid"/>
           </a:ln>
         </p:spPr>
+        <p:txBody>
+          <a:bodyPr/>
+          <a:p/>
+        </p:txBody>
       </p:sp>
       <p:sp>
         <p:nvSpPr>
@@ -6269,6 +6357,10 @@
             <a:prstDash val="solid"/>
           </a:ln>
         </p:spPr>
+        <p:txBody>
+          <a:bodyPr/>
+          <a:p/>
+        </p:txBody>
       </p:sp>
       <p:sp>
         <p:nvSpPr>
@@ -6370,6 +6462,10 @@
             <a:prstDash val="solid"/>
           </a:ln>
         </p:spPr>
+        <p:txBody>
+          <a:bodyPr/>
+          <a:p/>
+        </p:txBody>
       </p:sp>
       <p:sp>
         <p:nvSpPr>
@@ -6471,6 +6567,10 @@
             <a:prstDash val="solid"/>
           </a:ln>
         </p:spPr>
+        <p:txBody>
+          <a:bodyPr/>
+          <a:p/>
+        </p:txBody>
       </p:sp>
       <p:sp>
         <p:nvSpPr>
@@ -6572,6 +6672,10 @@
             <a:prstDash val="solid"/>
           </a:ln>
         </p:spPr>
+        <p:txBody>
+          <a:bodyPr/>
+          <a:p/>
+        </p:txBody>
       </p:sp>
       <p:sp>
         <p:nvSpPr>
@@ -6673,6 +6777,10 @@
             <a:prstDash val="solid"/>
           </a:ln>
         </p:spPr>
+        <p:txBody>
+          <a:bodyPr/>
+          <a:p/>
+        </p:txBody>
       </p:sp>
       <p:sp>
         <p:nvSpPr>
@@ -6918,6 +7026,10 @@
             </a:outerShdw>
           </a:effectLst>
         </p:spPr>
+        <p:txBody>
+          <a:bodyPr/>
+          <a:p/>
+        </p:txBody>
       </p:sp>
       <p:sp>
         <p:nvSpPr>
@@ -6943,6 +7055,10 @@
             <a:prstDash val="solid"/>
           </a:ln>
         </p:spPr>
+        <p:txBody>
+          <a:bodyPr/>
+          <a:p/>
+        </p:txBody>
       </p:sp>
       <p:sp>
         <p:nvSpPr>
@@ -7097,6 +7213,10 @@
             </a:outerShdw>
           </a:effectLst>
         </p:spPr>
+        <p:txBody>
+          <a:bodyPr/>
+          <a:p/>
+        </p:txBody>
       </p:sp>
       <p:sp>
         <p:nvSpPr>
@@ -7122,6 +7242,10 @@
             <a:prstDash val="solid"/>
           </a:ln>
         </p:spPr>
+        <p:txBody>
+          <a:bodyPr/>
+          <a:p/>
+        </p:txBody>
       </p:sp>
       <p:sp>
         <p:nvSpPr>
@@ -7276,6 +7400,10 @@
             </a:outerShdw>
           </a:effectLst>
         </p:spPr>
+        <p:txBody>
+          <a:bodyPr/>
+          <a:p/>
+        </p:txBody>
       </p:sp>
       <p:sp>
         <p:nvSpPr>
@@ -7301,6 +7429,10 @@
             <a:prstDash val="solid"/>
           </a:ln>
         </p:spPr>
+        <p:txBody>
+          <a:bodyPr/>
+          <a:p/>
+        </p:txBody>
       </p:sp>
       <p:sp>
         <p:nvSpPr>
@@ -7455,6 +7587,10 @@
             </a:outerShdw>
           </a:effectLst>
         </p:spPr>
+        <p:txBody>
+          <a:bodyPr/>
+          <a:p/>
+        </p:txBody>
       </p:sp>
       <p:sp>
         <p:nvSpPr>
@@ -7480,6 +7616,10 @@
             <a:prstDash val="solid"/>
           </a:ln>
         </p:spPr>
+        <p:txBody>
+          <a:bodyPr/>
+          <a:p/>
+        </p:txBody>
       </p:sp>
       <p:sp>
         <p:nvSpPr>
@@ -7783,6 +7923,10 @@
             </a:outerShdw>
           </a:effectLst>
         </p:spPr>
+        <p:txBody>
+          <a:bodyPr/>
+          <a:p/>
+        </p:txBody>
       </p:sp>
       <p:sp>
         <p:nvSpPr>
@@ -7940,6 +8084,10 @@
             </a:outerShdw>
           </a:effectLst>
         </p:spPr>
+        <p:txBody>
+          <a:bodyPr/>
+          <a:p/>
+        </p:txBody>
       </p:sp>
       <p:sp>
         <p:nvSpPr>
@@ -8108,6 +8256,10 @@
             </a:outerShdw>
           </a:effectLst>
         </p:spPr>
+        <p:txBody>
+          <a:bodyPr/>
+          <a:p/>
+        </p:txBody>
       </p:sp>
       <p:sp>
         <p:nvSpPr>
@@ -8521,6 +8673,10 @@
             <a:prstDash val="solid"/>
           </a:ln>
         </p:spPr>
+        <p:txBody>
+          <a:bodyPr/>
+          <a:p/>
+        </p:txBody>
       </p:sp>
       <p:sp>
         <p:nvSpPr>
@@ -8666,6 +8822,10 @@
             <a:prstDash val="solid"/>
           </a:ln>
         </p:spPr>
+        <p:txBody>
+          <a:bodyPr/>
+          <a:p/>
+        </p:txBody>
       </p:sp>
       <p:sp>
         <p:nvSpPr>
@@ -8811,6 +8971,10 @@
             <a:prstDash val="solid"/>
           </a:ln>
         </p:spPr>
+        <p:txBody>
+          <a:bodyPr/>
+          <a:p/>
+        </p:txBody>
       </p:sp>
       <p:sp>
         <p:nvSpPr>
@@ -9192,6 +9356,10 @@
             </a:outerShdw>
           </a:effectLst>
         </p:spPr>
+        <p:txBody>
+          <a:bodyPr/>
+          <a:p/>
+        </p:txBody>
       </p:sp>
       <p:sp>
         <p:nvSpPr>
@@ -9304,6 +9472,10 @@
             </a:outerShdw>
           </a:effectLst>
         </p:spPr>
+        <p:txBody>
+          <a:bodyPr/>
+          <a:p/>
+        </p:txBody>
       </p:sp>
       <p:sp>
         <p:nvSpPr>
@@ -9416,6 +9588,10 @@
             </a:outerShdw>
           </a:effectLst>
         </p:spPr>
+        <p:txBody>
+          <a:bodyPr/>
+          <a:p/>
+        </p:txBody>
       </p:sp>
       <p:sp>
         <p:nvSpPr>
@@ -9802,6 +9978,10 @@
             </a:outerShdw>
           </a:effectLst>
         </p:spPr>
+        <p:txBody>
+          <a:bodyPr/>
+          <a:p/>
+        </p:txBody>
       </p:sp>
       <p:sp>
         <p:nvSpPr>
@@ -9914,6 +10094,10 @@
             </a:outerShdw>
           </a:effectLst>
         </p:spPr>
+        <p:txBody>
+          <a:bodyPr/>
+          <a:p/>
+        </p:txBody>
       </p:sp>
       <p:sp>
         <p:nvSpPr>
@@ -10026,6 +10210,10 @@
             </a:outerShdw>
           </a:effectLst>
         </p:spPr>
+        <p:txBody>
+          <a:bodyPr/>
+          <a:p/>
+        </p:txBody>
       </p:sp>
       <p:sp>
         <p:nvSpPr>
@@ -10138,6 +10326,10 @@
             </a:outerShdw>
           </a:effectLst>
         </p:spPr>
+        <p:txBody>
+          <a:bodyPr/>
+          <a:p/>
+        </p:txBody>
       </p:sp>
       <p:sp>
         <p:nvSpPr>
@@ -10820,6 +11012,10 @@
             </a:outerShdw>
           </a:effectLst>
         </p:spPr>
+        <p:txBody>
+          <a:bodyPr/>
+          <a:p/>
+        </p:txBody>
       </p:sp>
       <p:pic>
         <p:nvPicPr>
@@ -10997,6 +11193,10 @@
             </a:outerShdw>
           </a:effectLst>
         </p:spPr>
+        <p:txBody>
+          <a:bodyPr/>
+          <a:p/>
+        </p:txBody>
       </p:sp>
       <p:pic>
         <p:nvPicPr>
@@ -11174,6 +11374,10 @@
             </a:outerShdw>
           </a:effectLst>
         </p:spPr>
+        <p:txBody>
+          <a:bodyPr/>
+          <a:p/>
+        </p:txBody>
       </p:sp>
       <p:pic>
         <p:nvPicPr>
@@ -11351,6 +11555,10 @@
             </a:outerShdw>
           </a:effectLst>
         </p:spPr>
+        <p:txBody>
+          <a:bodyPr/>
+          <a:p/>
+        </p:txBody>
       </p:sp>
       <p:pic>
         <p:nvPicPr>
@@ -11677,6 +11885,10 @@
             </a:outerShdw>
           </a:effectLst>
         </p:spPr>
+        <p:txBody>
+          <a:bodyPr/>
+          <a:p/>
+        </p:txBody>
       </p:sp>
       <p:sp>
         <p:nvSpPr>
@@ -11702,6 +11914,10 @@
             <a:prstDash val="solid"/>
           </a:ln>
         </p:spPr>
+        <p:txBody>
+          <a:bodyPr/>
+          <a:p/>
+        </p:txBody>
       </p:sp>
       <p:sp>
         <p:nvSpPr>
@@ -11895,6 +12111,10 @@
             </a:outerShdw>
           </a:effectLst>
         </p:spPr>
+        <p:txBody>
+          <a:bodyPr/>
+          <a:p/>
+        </p:txBody>
       </p:sp>
       <p:sp>
         <p:nvSpPr>
@@ -11920,6 +12140,10 @@
             <a:prstDash val="solid"/>
           </a:ln>
         </p:spPr>
+        <p:txBody>
+          <a:bodyPr/>
+          <a:p/>
+        </p:txBody>
       </p:sp>
       <p:sp>
         <p:nvSpPr>
@@ -12113,6 +12337,10 @@
             </a:outerShdw>
           </a:effectLst>
         </p:spPr>
+        <p:txBody>
+          <a:bodyPr/>
+          <a:p/>
+        </p:txBody>
       </p:sp>
       <p:sp>
         <p:nvSpPr>
@@ -12138,6 +12366,10 @@
             <a:prstDash val="solid"/>
           </a:ln>
         </p:spPr>
+        <p:txBody>
+          <a:bodyPr/>
+          <a:p/>
+        </p:txBody>
       </p:sp>
       <p:sp>
         <p:nvSpPr>
@@ -12331,6 +12563,10 @@
             </a:outerShdw>
           </a:effectLst>
         </p:spPr>
+        <p:txBody>
+          <a:bodyPr/>
+          <a:p/>
+        </p:txBody>
       </p:sp>
       <p:sp>
         <p:nvSpPr>
@@ -12356,6 +12592,10 @@
             <a:prstDash val="solid"/>
           </a:ln>
         </p:spPr>
+        <p:txBody>
+          <a:bodyPr/>
+          <a:p/>
+        </p:txBody>
       </p:sp>
       <p:sp>
         <p:nvSpPr>

--- a/docs/오늘은봄날_회사소개서.pptx
+++ b/docs/오늘은봄날_회사소개서.pptx
@@ -2343,10 +2343,6 @@
             <a:prstDash val="solid"/>
           </a:ln>
         </p:spPr>
-        <p:txBody>
-          <a:bodyPr/>
-          <a:p/>
-        </p:txBody>
       </p:sp>
       <p:sp>
         <p:nvSpPr>
@@ -2530,10 +2526,6 @@
             <a:prstDash val="solid"/>
           </a:ln>
         </p:spPr>
-        <p:txBody>
-          <a:bodyPr/>
-          <a:p/>
-        </p:txBody>
       </p:sp>
       <p:sp>
         <p:nvSpPr>
@@ -2795,10 +2787,6 @@
             </a:outerShdw>
           </a:effectLst>
         </p:spPr>
-        <p:txBody>
-          <a:bodyPr/>
-          <a:p/>
-        </p:txBody>
       </p:sp>
       <p:sp>
         <p:nvSpPr>
@@ -2824,10 +2812,6 @@
             <a:prstDash val="solid"/>
           </a:ln>
         </p:spPr>
-        <p:txBody>
-          <a:bodyPr/>
-          <a:p/>
-        </p:txBody>
       </p:sp>
       <p:sp>
         <p:nvSpPr>
@@ -2982,10 +2966,6 @@
             </a:outerShdw>
           </a:effectLst>
         </p:spPr>
-        <p:txBody>
-          <a:bodyPr/>
-          <a:p/>
-        </p:txBody>
       </p:sp>
       <p:sp>
         <p:nvSpPr>
@@ -3011,10 +2991,6 @@
             <a:prstDash val="solid"/>
           </a:ln>
         </p:spPr>
-        <p:txBody>
-          <a:bodyPr/>
-          <a:p/>
-        </p:txBody>
       </p:sp>
       <p:sp>
         <p:nvSpPr>
@@ -3169,10 +3145,6 @@
             </a:outerShdw>
           </a:effectLst>
         </p:spPr>
-        <p:txBody>
-          <a:bodyPr/>
-          <a:p/>
-        </p:txBody>
       </p:sp>
       <p:sp>
         <p:nvSpPr>
@@ -3198,10 +3170,6 @@
             <a:prstDash val="solid"/>
           </a:ln>
         </p:spPr>
-        <p:txBody>
-          <a:bodyPr/>
-          <a:p/>
-        </p:txBody>
       </p:sp>
       <p:sp>
         <p:nvSpPr>
@@ -3583,10 +3551,6 @@
             </a:outerShdw>
           </a:effectLst>
         </p:spPr>
-        <p:txBody>
-          <a:bodyPr/>
-          <a:p/>
-        </p:txBody>
       </p:sp>
       <p:sp>
         <p:nvSpPr>
@@ -3612,10 +3576,6 @@
             <a:prstDash val="solid"/>
           </a:ln>
         </p:spPr>
-        <p:txBody>
-          <a:bodyPr/>
-          <a:p/>
-        </p:txBody>
       </p:sp>
       <p:sp>
         <p:nvSpPr>
@@ -3770,10 +3730,6 @@
             </a:outerShdw>
           </a:effectLst>
         </p:spPr>
-        <p:txBody>
-          <a:bodyPr/>
-          <a:p/>
-        </p:txBody>
       </p:sp>
       <p:sp>
         <p:nvSpPr>
@@ -3799,10 +3755,6 @@
             <a:prstDash val="solid"/>
           </a:ln>
         </p:spPr>
-        <p:txBody>
-          <a:bodyPr/>
-          <a:p/>
-        </p:txBody>
       </p:sp>
       <p:sp>
         <p:nvSpPr>
@@ -3957,10 +3909,6 @@
             </a:outerShdw>
           </a:effectLst>
         </p:spPr>
-        <p:txBody>
-          <a:bodyPr/>
-          <a:p/>
-        </p:txBody>
       </p:sp>
       <p:sp>
         <p:nvSpPr>
@@ -3986,10 +3934,6 @@
             <a:prstDash val="solid"/>
           </a:ln>
         </p:spPr>
-        <p:txBody>
-          <a:bodyPr/>
-          <a:p/>
-        </p:txBody>
       </p:sp>
       <p:sp>
         <p:nvSpPr>
@@ -4144,10 +4088,6 @@
             </a:outerShdw>
           </a:effectLst>
         </p:spPr>
-        <p:txBody>
-          <a:bodyPr/>
-          <a:p/>
-        </p:txBody>
       </p:sp>
       <p:sp>
         <p:nvSpPr>
@@ -4173,10 +4113,6 @@
             <a:prstDash val="solid"/>
           </a:ln>
         </p:spPr>
-        <p:txBody>
-          <a:bodyPr/>
-          <a:p/>
-        </p:txBody>
       </p:sp>
       <p:sp>
         <p:nvSpPr>
@@ -5089,7 +5025,7 @@
                 <a:ea typeface="맑은 고딕" pitchFamily="34" charset="-122"/>
                 <a:cs typeface="맑은 고딕" pitchFamily="34" charset="-120"/>
               </a:rPr>
-              <a:t>위 현장은 오늘은 봄날이 수행한 레퍼런스입니다. 입찰·수의계약용 실적증명서는 요청 시 발송합니다.</a:t>
+              <a:t>위 현장은 상상연필과 함께 수행한 레퍼런스입니다. 오늘은 봄날 명의의 납품 실적은 대구 북구청 사이니지 미디어아트 3편이며, 입찰·수의계약용 실적증명서는 요청 시 발송합니다.</a:t>
             </a:r>
             <a:endParaRPr lang="en-US" sz="1000" dirty="0"/>
           </a:p>
@@ -5316,10 +5252,6 @@
             </a:outerShdw>
           </a:effectLst>
         </p:spPr>
-        <p:txBody>
-          <a:bodyPr/>
-          <a:p/>
-        </p:txBody>
       </p:sp>
       <p:sp>
         <p:nvSpPr>
@@ -5471,10 +5403,6 @@
             </a:outerShdw>
           </a:effectLst>
         </p:spPr>
-        <p:txBody>
-          <a:bodyPr/>
-          <a:p/>
-        </p:txBody>
       </p:sp>
       <p:sp>
         <p:nvSpPr>
@@ -5626,10 +5554,6 @@
             </a:outerShdw>
           </a:effectLst>
         </p:spPr>
-        <p:txBody>
-          <a:bodyPr/>
-          <a:p/>
-        </p:txBody>
       </p:sp>
       <p:sp>
         <p:nvSpPr>
@@ -5781,10 +5705,6 @@
             </a:outerShdw>
           </a:effectLst>
         </p:spPr>
-        <p:txBody>
-          <a:bodyPr/>
-          <a:p/>
-        </p:txBody>
       </p:sp>
       <p:sp>
         <p:nvSpPr>
@@ -5936,10 +5856,6 @@
             </a:outerShdw>
           </a:effectLst>
         </p:spPr>
-        <p:txBody>
-          <a:bodyPr/>
-          <a:p/>
-        </p:txBody>
       </p:sp>
       <p:sp>
         <p:nvSpPr>
@@ -6252,10 +6168,6 @@
             <a:prstDash val="solid"/>
           </a:ln>
         </p:spPr>
-        <p:txBody>
-          <a:bodyPr/>
-          <a:p/>
-        </p:txBody>
       </p:sp>
       <p:sp>
         <p:nvSpPr>
@@ -6357,10 +6269,6 @@
             <a:prstDash val="solid"/>
           </a:ln>
         </p:spPr>
-        <p:txBody>
-          <a:bodyPr/>
-          <a:p/>
-        </p:txBody>
       </p:sp>
       <p:sp>
         <p:nvSpPr>
@@ -6462,10 +6370,6 @@
             <a:prstDash val="solid"/>
           </a:ln>
         </p:spPr>
-        <p:txBody>
-          <a:bodyPr/>
-          <a:p/>
-        </p:txBody>
       </p:sp>
       <p:sp>
         <p:nvSpPr>
@@ -6567,10 +6471,6 @@
             <a:prstDash val="solid"/>
           </a:ln>
         </p:spPr>
-        <p:txBody>
-          <a:bodyPr/>
-          <a:p/>
-        </p:txBody>
       </p:sp>
       <p:sp>
         <p:nvSpPr>
@@ -6672,10 +6572,6 @@
             <a:prstDash val="solid"/>
           </a:ln>
         </p:spPr>
-        <p:txBody>
-          <a:bodyPr/>
-          <a:p/>
-        </p:txBody>
       </p:sp>
       <p:sp>
         <p:nvSpPr>
@@ -6777,10 +6673,6 @@
             <a:prstDash val="solid"/>
           </a:ln>
         </p:spPr>
-        <p:txBody>
-          <a:bodyPr/>
-          <a:p/>
-        </p:txBody>
       </p:sp>
       <p:sp>
         <p:nvSpPr>
@@ -7026,10 +6918,6 @@
             </a:outerShdw>
           </a:effectLst>
         </p:spPr>
-        <p:txBody>
-          <a:bodyPr/>
-          <a:p/>
-        </p:txBody>
       </p:sp>
       <p:sp>
         <p:nvSpPr>
@@ -7055,10 +6943,6 @@
             <a:prstDash val="solid"/>
           </a:ln>
         </p:spPr>
-        <p:txBody>
-          <a:bodyPr/>
-          <a:p/>
-        </p:txBody>
       </p:sp>
       <p:sp>
         <p:nvSpPr>
@@ -7132,7 +7016,7 @@
                 <a:ea typeface="맑은 고딕" pitchFamily="34" charset="-122"/>
                 <a:cs typeface="맑은 고딕" pitchFamily="34" charset="-120"/>
               </a:rPr>
-              <a:t>AI · 코드 기반 미디어아트 제작</a:t>
+              <a:t>미디어아트 AX 서비스</a:t>
             </a:r>
             <a:endParaRPr lang="en-US" sz="1500" dirty="0"/>
           </a:p>
@@ -7165,17 +7049,6 @@
               </a:lnSpc>
               <a:buNone/>
             </a:pPr>
-            <a:r>
-              <a:rPr lang="en-US" sz="1000" dirty="0">
-                <a:solidFill>
-                  <a:srgbClr val="4A5262"/>
-                </a:solidFill>
-                <a:latin typeface="맑은 고딕" pitchFamily="34" charset="0"/>
-                <a:ea typeface="맑은 고딕" pitchFamily="34" charset="-122"/>
-                <a:cs typeface="맑은 고딕" pitchFamily="34" charset="-120"/>
-              </a:rPr>
-              <a:t>영상 편집이 아니라 코드로 만듭니다. 현장 화면 비율·해상도에 맞춰 다시 출력할 수 있고, 데이터를 연결하면 화면이 매일 달라집니다.</a:t>
-            </a:r>
             <a:endParaRPr lang="en-US" sz="1000" dirty="0"/>
           </a:p>
         </p:txBody>
@@ -7213,10 +7086,6 @@
             </a:outerShdw>
           </a:effectLst>
         </p:spPr>
-        <p:txBody>
-          <a:bodyPr/>
-          <a:p/>
-        </p:txBody>
       </p:sp>
       <p:sp>
         <p:nvSpPr>
@@ -7242,10 +7111,6 @@
             <a:prstDash val="solid"/>
           </a:ln>
         </p:spPr>
-        <p:txBody>
-          <a:bodyPr/>
-          <a:p/>
-        </p:txBody>
       </p:sp>
       <p:sp>
         <p:nvSpPr>
@@ -7319,7 +7184,7 @@
                 <a:ea typeface="맑은 고딕" pitchFamily="34" charset="-122"/>
                 <a:cs typeface="맑은 고딕" pitchFamily="34" charset="-120"/>
               </a:rPr>
-              <a:t>빠른 제작</a:t>
+              <a:t>AI · 코드 기반 미디어아트 제작</a:t>
             </a:r>
             <a:endParaRPr lang="en-US" sz="1500" dirty="0"/>
           </a:p>
@@ -7361,7 +7226,7 @@
                 <a:ea typeface="맑은 고딕" pitchFamily="34" charset="-122"/>
                 <a:cs typeface="맑은 고딕" pitchFamily="34" charset="-120"/>
               </a:rPr>
-              <a:t>시안 3종을 요청 후 1주일 이내에 제시합니다. 영상 외주 제작이 통상 1개월 이상 걸리는 것과 비교되는 지점입니다.</a:t>
+              <a:t>영상 편집이 아니라 코드로 만듭니다. 현장 화면 비율·해상도에 맞춰 다시 출력할 수 있고, 데이터를 연결하면 화면이 매일 달라집니다.</a:t>
             </a:r>
             <a:endParaRPr lang="en-US" sz="1000" dirty="0"/>
           </a:p>
@@ -7400,10 +7265,6 @@
             </a:outerShdw>
           </a:effectLst>
         </p:spPr>
-        <p:txBody>
-          <a:bodyPr/>
-          <a:p/>
-        </p:txBody>
       </p:sp>
       <p:sp>
         <p:nvSpPr>
@@ -7429,10 +7290,6 @@
             <a:prstDash val="solid"/>
           </a:ln>
         </p:spPr>
-        <p:txBody>
-          <a:bodyPr/>
-          <a:p/>
-        </p:txBody>
       </p:sp>
       <p:sp>
         <p:nvSpPr>
@@ -7506,7 +7363,7 @@
                 <a:ea typeface="맑은 고딕" pitchFamily="34" charset="-122"/>
                 <a:cs typeface="맑은 고딕" pitchFamily="34" charset="-120"/>
               </a:rPr>
-              <a:t>LED 패널 · LED 전광판 설치</a:t>
+              <a:t>빠른 제작</a:t>
             </a:r>
             <a:endParaRPr lang="en-US" sz="1500" dirty="0"/>
           </a:p>
@@ -7548,7 +7405,7 @@
                 <a:ea typeface="맑은 고딕" pitchFamily="34" charset="-122"/>
                 <a:cs typeface="맑은 고딕" pitchFamily="34" charset="-120"/>
               </a:rPr>
-              <a:t>로비 미디어월, 외벽 전광판, 세로형 사이니지를 사양 산정부터 공급·설치·배선까지 직접 시공합니다.</a:t>
+              <a:t>시안 3종을 요청 후 1주일 이내에 제시합니다. 영상 외주 제작이 통상 1개월 이상 걸리는 것과 비교되는 지점입니다.</a:t>
             </a:r>
             <a:endParaRPr lang="en-US" sz="1000" dirty="0"/>
           </a:p>
@@ -7587,10 +7444,6 @@
             </a:outerShdw>
           </a:effectLst>
         </p:spPr>
-        <p:txBody>
-          <a:bodyPr/>
-          <a:p/>
-        </p:txBody>
       </p:sp>
       <p:sp>
         <p:nvSpPr>
@@ -7616,10 +7469,6 @@
             <a:prstDash val="solid"/>
           </a:ln>
         </p:spPr>
-        <p:txBody>
-          <a:bodyPr/>
-          <a:p/>
-        </p:txBody>
       </p:sp>
       <p:sp>
         <p:nvSpPr>
@@ -7693,7 +7542,7 @@
                 <a:ea typeface="맑은 고딕" pitchFamily="34" charset="-122"/>
                 <a:cs typeface="맑은 고딕" pitchFamily="34" charset="-120"/>
               </a:rPr>
-              <a:t>빔프로젝터 미디어파사드</a:t>
+              <a:t>LED 패널 · LED 전광판 설치</a:t>
             </a:r>
             <a:endParaRPr lang="en-US" sz="1500" dirty="0"/>
           </a:p>
@@ -7735,6 +7584,185 @@
                 <a:ea typeface="맑은 고딕" pitchFamily="34" charset="-122"/>
                 <a:cs typeface="맑은 고딕" pitchFamily="34" charset="-120"/>
               </a:rPr>
+              <a:t>로비 미디어월, 외벽 전광판, 세로형 사이니지를 사양 산정부터 공급·설치·배선까지 직접 시공합니다.</a:t>
+            </a:r>
+            <a:endParaRPr lang="en-US" sz="1000" dirty="0"/>
+          </a:p>
+        </p:txBody>
+      </p:sp>
+      <p:sp>
+        <p:nvSpPr>
+          <p:cNvPr id="25" name="Shape 23"/>
+          <p:cNvSpPr/>
+          <p:nvPr/>
+        </p:nvSpPr>
+        <p:spPr>
+          <a:xfrm>
+            <a:off x="11978640" y="2697480"/>
+            <a:ext cx="2606040" cy="3200400"/>
+          </a:xfrm>
+          <a:prstGeom prst="roundRect">
+            <a:avLst>
+              <a:gd name="adj" fmla="val 2105"/>
+            </a:avLst>
+          </a:prstGeom>
+          <a:solidFill>
+            <a:srgbClr val="FFFFFF"/>
+          </a:solidFill>
+          <a:ln w="12700">
+            <a:solidFill>
+              <a:srgbClr val="DFE3EA"/>
+            </a:solidFill>
+            <a:prstDash val="solid"/>
+          </a:ln>
+          <a:effectLst>
+            <a:outerShdw sx="100000" sy="100000" kx="0" ky="0" algn="bl" rotWithShape="0" blurRad="152400" dist="38100" dir="5400000">
+              <a:srgbClr val="101B33">
+                <a:alpha val="7000"/>
+              </a:srgbClr>
+            </a:outerShdw>
+          </a:effectLst>
+        </p:spPr>
+      </p:sp>
+      <p:sp>
+        <p:nvSpPr>
+          <p:cNvPr id="26" name="Shape 24"/>
+          <p:cNvSpPr/>
+          <p:nvPr/>
+        </p:nvSpPr>
+        <p:spPr>
+          <a:xfrm>
+            <a:off x="12298680" y="2990088"/>
+            <a:ext cx="420624" cy="420624"/>
+          </a:xfrm>
+          <a:prstGeom prst="ellipse">
+            <a:avLst/>
+          </a:prstGeom>
+          <a:solidFill>
+            <a:srgbClr val="0075C9"/>
+          </a:solidFill>
+          <a:ln w="12700">
+            <a:solidFill>
+              <a:srgbClr val="0075C9"/>
+            </a:solidFill>
+            <a:prstDash val="solid"/>
+          </a:ln>
+        </p:spPr>
+      </p:sp>
+      <p:sp>
+        <p:nvSpPr>
+          <p:cNvPr id="27" name="Text 25"/>
+          <p:cNvSpPr/>
+          <p:nvPr/>
+        </p:nvSpPr>
+        <p:spPr>
+          <a:xfrm>
+            <a:off x="12298680" y="2990088"/>
+            <a:ext cx="420624" cy="420624"/>
+          </a:xfrm>
+          <a:prstGeom prst="rect">
+            <a:avLst/>
+          </a:prstGeom>
+          <a:noFill/>
+          <a:ln/>
+        </p:spPr>
+        <p:txBody>
+          <a:bodyPr wrap="square" lIns="0" tIns="0" rIns="0" bIns="0" rtlCol="0" anchor="ctr"/>
+          <a:lstStyle/>
+          <a:p>
+            <a:pPr algn="ctr" indent="0" marL="0">
+              <a:buNone/>
+            </a:pPr>
+            <a:r>
+              <a:rPr lang="en-US" sz="1300" b="1" dirty="0">
+                <a:solidFill>
+                  <a:srgbClr val="FFFFFF"/>
+                </a:solidFill>
+                <a:latin typeface="맑은 고딕" pitchFamily="34" charset="0"/>
+                <a:ea typeface="맑은 고딕" pitchFamily="34" charset="-122"/>
+                <a:cs typeface="맑은 고딕" pitchFamily="34" charset="-120"/>
+              </a:rPr>
+              <a:t>05</a:t>
+            </a:r>
+            <a:endParaRPr lang="en-US" sz="1300" dirty="0"/>
+          </a:p>
+        </p:txBody>
+      </p:sp>
+      <p:sp>
+        <p:nvSpPr>
+          <p:cNvPr id="28" name="Text 26"/>
+          <p:cNvSpPr/>
+          <p:nvPr/>
+        </p:nvSpPr>
+        <p:spPr>
+          <a:xfrm>
+            <a:off x="12298680" y="3538728"/>
+            <a:ext cx="1965960" cy="658368"/>
+          </a:xfrm>
+          <a:prstGeom prst="rect">
+            <a:avLst/>
+          </a:prstGeom>
+          <a:noFill/>
+          <a:ln/>
+        </p:spPr>
+        <p:txBody>
+          <a:bodyPr wrap="square" lIns="0" tIns="0" rIns="0" bIns="0" rtlCol="0" anchor="t"/>
+          <a:lstStyle/>
+          <a:p>
+            <a:pPr indent="0" marL="0">
+              <a:buNone/>
+            </a:pPr>
+            <a:r>
+              <a:rPr lang="en-US" sz="1500" b="1" dirty="0">
+                <a:solidFill>
+                  <a:srgbClr val="101B33"/>
+                </a:solidFill>
+                <a:latin typeface="맑은 고딕" pitchFamily="34" charset="0"/>
+                <a:ea typeface="맑은 고딕" pitchFamily="34" charset="-122"/>
+                <a:cs typeface="맑은 고딕" pitchFamily="34" charset="-120"/>
+              </a:rPr>
+              <a:t>빔프로젝터 미디어파사드</a:t>
+            </a:r>
+            <a:endParaRPr lang="en-US" sz="1500" dirty="0"/>
+          </a:p>
+        </p:txBody>
+      </p:sp>
+      <p:sp>
+        <p:nvSpPr>
+          <p:cNvPr id="29" name="Text 27"/>
+          <p:cNvSpPr/>
+          <p:nvPr/>
+        </p:nvSpPr>
+        <p:spPr>
+          <a:xfrm>
+            <a:off x="12298680" y="4251960"/>
+            <a:ext cx="1965960" cy="1481328"/>
+          </a:xfrm>
+          <a:prstGeom prst="rect">
+            <a:avLst/>
+          </a:prstGeom>
+          <a:noFill/>
+          <a:ln/>
+        </p:spPr>
+        <p:txBody>
+          <a:bodyPr wrap="square" lIns="0" tIns="0" rIns="0" bIns="0" rtlCol="0" anchor="t"/>
+          <a:lstStyle/>
+          <a:p>
+            <a:pPr indent="0" marL="0">
+              <a:lnSpc>
+                <a:spcPts val="1500"/>
+              </a:lnSpc>
+              <a:buNone/>
+            </a:pPr>
+            <a:r>
+              <a:rPr lang="en-US" sz="1000" dirty="0">
+                <a:solidFill>
+                  <a:srgbClr val="4A5262"/>
+                </a:solidFill>
+                <a:latin typeface="맑은 고딕" pitchFamily="34" charset="0"/>
+                <a:ea typeface="맑은 고딕" pitchFamily="34" charset="-122"/>
+                <a:cs typeface="맑은 고딕" pitchFamily="34" charset="-120"/>
+              </a:rPr>
               <a:t>건물 외벽과 전시장 벽면에 빔프로젝터를 설치하고 프로젝션 매핑으로 미디어파사드를 만듭니다.</a:t>
             </a:r>
             <a:endParaRPr lang="en-US" sz="1000" dirty="0"/>
@@ -7743,7 +7771,7 @@
       </p:sp>
       <p:sp>
         <p:nvSpPr>
-          <p:cNvPr id="25" name="Text 23"/>
+          <p:cNvPr id="30" name="Text 28"/>
           <p:cNvSpPr/>
           <p:nvPr/>
         </p:nvSpPr>
@@ -7923,10 +7951,6 @@
             </a:outerShdw>
           </a:effectLst>
         </p:spPr>
-        <p:txBody>
-          <a:bodyPr/>
-          <a:p/>
-        </p:txBody>
       </p:sp>
       <p:sp>
         <p:nvSpPr>
@@ -8084,10 +8108,6 @@
             </a:outerShdw>
           </a:effectLst>
         </p:spPr>
-        <p:txBody>
-          <a:bodyPr/>
-          <a:p/>
-        </p:txBody>
       </p:sp>
       <p:sp>
         <p:nvSpPr>
@@ -8256,10 +8276,6 @@
             </a:outerShdw>
           </a:effectLst>
         </p:spPr>
-        <p:txBody>
-          <a:bodyPr/>
-          <a:p/>
-        </p:txBody>
       </p:sp>
       <p:sp>
         <p:nvSpPr>
@@ -8673,10 +8689,6 @@
             <a:prstDash val="solid"/>
           </a:ln>
         </p:spPr>
-        <p:txBody>
-          <a:bodyPr/>
-          <a:p/>
-        </p:txBody>
       </p:sp>
       <p:sp>
         <p:nvSpPr>
@@ -8822,10 +8834,6 @@
             <a:prstDash val="solid"/>
           </a:ln>
         </p:spPr>
-        <p:txBody>
-          <a:bodyPr/>
-          <a:p/>
-        </p:txBody>
       </p:sp>
       <p:sp>
         <p:nvSpPr>
@@ -8971,10 +8979,6 @@
             <a:prstDash val="solid"/>
           </a:ln>
         </p:spPr>
-        <p:txBody>
-          <a:bodyPr/>
-          <a:p/>
-        </p:txBody>
       </p:sp>
       <p:sp>
         <p:nvSpPr>
@@ -9356,10 +9360,6 @@
             </a:outerShdw>
           </a:effectLst>
         </p:spPr>
-        <p:txBody>
-          <a:bodyPr/>
-          <a:p/>
-        </p:txBody>
       </p:sp>
       <p:sp>
         <p:nvSpPr>
@@ -9472,10 +9472,6 @@
             </a:outerShdw>
           </a:effectLst>
         </p:spPr>
-        <p:txBody>
-          <a:bodyPr/>
-          <a:p/>
-        </p:txBody>
       </p:sp>
       <p:sp>
         <p:nvSpPr>
@@ -9588,10 +9584,6 @@
             </a:outerShdw>
           </a:effectLst>
         </p:spPr>
-        <p:txBody>
-          <a:bodyPr/>
-          <a:p/>
-        </p:txBody>
       </p:sp>
       <p:sp>
         <p:nvSpPr>
@@ -9978,10 +9970,6 @@
             </a:outerShdw>
           </a:effectLst>
         </p:spPr>
-        <p:txBody>
-          <a:bodyPr/>
-          <a:p/>
-        </p:txBody>
       </p:sp>
       <p:sp>
         <p:nvSpPr>
@@ -10094,10 +10082,6 @@
             </a:outerShdw>
           </a:effectLst>
         </p:spPr>
-        <p:txBody>
-          <a:bodyPr/>
-          <a:p/>
-        </p:txBody>
       </p:sp>
       <p:sp>
         <p:nvSpPr>
@@ -10210,10 +10194,6 @@
             </a:outerShdw>
           </a:effectLst>
         </p:spPr>
-        <p:txBody>
-          <a:bodyPr/>
-          <a:p/>
-        </p:txBody>
       </p:sp>
       <p:sp>
         <p:nvSpPr>
@@ -10326,10 +10306,6 @@
             </a:outerShdw>
           </a:effectLst>
         </p:spPr>
-        <p:txBody>
-          <a:bodyPr/>
-          <a:p/>
-        </p:txBody>
       </p:sp>
       <p:sp>
         <p:nvSpPr>
@@ -11012,10 +10988,6 @@
             </a:outerShdw>
           </a:effectLst>
         </p:spPr>
-        <p:txBody>
-          <a:bodyPr/>
-          <a:p/>
-        </p:txBody>
       </p:sp>
       <p:pic>
         <p:nvPicPr>
@@ -11193,10 +11165,6 @@
             </a:outerShdw>
           </a:effectLst>
         </p:spPr>
-        <p:txBody>
-          <a:bodyPr/>
-          <a:p/>
-        </p:txBody>
       </p:sp>
       <p:pic>
         <p:nvPicPr>
@@ -11374,10 +11342,6 @@
             </a:outerShdw>
           </a:effectLst>
         </p:spPr>
-        <p:txBody>
-          <a:bodyPr/>
-          <a:p/>
-        </p:txBody>
       </p:sp>
       <p:pic>
         <p:nvPicPr>
@@ -11555,10 +11519,6 @@
             </a:outerShdw>
           </a:effectLst>
         </p:spPr>
-        <p:txBody>
-          <a:bodyPr/>
-          <a:p/>
-        </p:txBody>
       </p:sp>
       <p:pic>
         <p:nvPicPr>
@@ -11885,10 +11845,6 @@
             </a:outerShdw>
           </a:effectLst>
         </p:spPr>
-        <p:txBody>
-          <a:bodyPr/>
-          <a:p/>
-        </p:txBody>
       </p:sp>
       <p:sp>
         <p:nvSpPr>
@@ -11914,10 +11870,6 @@
             <a:prstDash val="solid"/>
           </a:ln>
         </p:spPr>
-        <p:txBody>
-          <a:bodyPr/>
-          <a:p/>
-        </p:txBody>
       </p:sp>
       <p:sp>
         <p:nvSpPr>
@@ -12111,10 +12063,6 @@
             </a:outerShdw>
           </a:effectLst>
         </p:spPr>
-        <p:txBody>
-          <a:bodyPr/>
-          <a:p/>
-        </p:txBody>
       </p:sp>
       <p:sp>
         <p:nvSpPr>
@@ -12140,10 +12088,6 @@
             <a:prstDash val="solid"/>
           </a:ln>
         </p:spPr>
-        <p:txBody>
-          <a:bodyPr/>
-          <a:p/>
-        </p:txBody>
       </p:sp>
       <p:sp>
         <p:nvSpPr>
@@ -12337,10 +12281,6 @@
             </a:outerShdw>
           </a:effectLst>
         </p:spPr>
-        <p:txBody>
-          <a:bodyPr/>
-          <a:p/>
-        </p:txBody>
       </p:sp>
       <p:sp>
         <p:nvSpPr>
@@ -12366,10 +12306,6 @@
             <a:prstDash val="solid"/>
           </a:ln>
         </p:spPr>
-        <p:txBody>
-          <a:bodyPr/>
-          <a:p/>
-        </p:txBody>
       </p:sp>
       <p:sp>
         <p:nvSpPr>
@@ -12563,10 +12499,6 @@
             </a:outerShdw>
           </a:effectLst>
         </p:spPr>
-        <p:txBody>
-          <a:bodyPr/>
-          <a:p/>
-        </p:txBody>
       </p:sp>
       <p:sp>
         <p:nvSpPr>
@@ -12592,10 +12524,6 @@
             <a:prstDash val="solid"/>
           </a:ln>
         </p:spPr>
-        <p:txBody>
-          <a:bodyPr/>
-          <a:p/>
-        </p:txBody>
       </p:sp>
       <p:sp>
         <p:nvSpPr>
